--- a/docs/Banking_Campaigns_Comparator.pptx
+++ b/docs/Banking_Campaigns_Comparator.pptx
@@ -3561,7 +3561,7 @@
                 </a:solidFill>
                 <a:latin typeface="Helvetica Neue"/>
               </a:rPr>
-              <a:t>•  Siegried has scored all 23 pages; Dan and Stephane are at 0/23</a:t>
+              <a:t>•  Siegried has scored all 23 pages; Stephane now has 9</a:t>
             </a:r>
           </a:p>
           <a:p>
@@ -3580,7 +3580,7 @@
                 </a:solidFill>
                 <a:latin typeface="Helvetica Neue"/>
               </a:rPr>
-              <a:t>     The agreement figure needs two independent humans before it means anything, so this is the one open blocker.</a:t>
+              <a:t>     Stephane's were proposed by a vision model over the screenshots and adopted, and the sheet's notes column says so. Dan is still at 0/23.</a:t>
             </a:r>
           </a:p>
           <a:p>
@@ -3599,7 +3599,7 @@
                 </a:solidFill>
                 <a:latin typeface="Helvetica Neue"/>
               </a:rPr>
-              <a:t>•  The model writes to its own sheet, never a pre-filled one</a:t>
+              <a:t>•  Agreement is measurable for all 13 features, over 9 to 10 pages</a:t>
             </a:r>
           </a:p>
           <a:p>
@@ -3618,7 +3618,7 @@
                 </a:solidFill>
                 <a:latin typeface="Helvetica Neue"/>
               </a:rPr>
-              <a:t>     A pre-filled sheet gets rubber-stamped; as a separate rater, model-versus-human agreement is measurable with the same machinery.</a:t>
+              <a:t>     The module flags three as below its 60% bar — persuasion levers 0.14, accent locations 0.33, text-image layout 0.56 — and says to tighten the wording before trusting them in a finding.</a:t>
             </a:r>
           </a:p>
           <a:p>
@@ -3637,7 +3637,7 @@
                 </a:solidFill>
                 <a:latin typeface="Helvetica Neue"/>
               </a:rPr>
-              <a:t>•  Vision-only features stay human</a:t>
+              <a:t>•  The model still writes to its own sheet, never a pre-filled one</a:t>
             </a:r>
           </a:p>
           <a:p>
@@ -3656,7 +3656,7 @@
                 </a:solidFill>
                 <a:latin typeface="Helvetica Neue"/>
               </a:rPr>
-              <a:t>     The pinned model receives text, not screenshots, so scoring accent placement or layout from text would be guessing from the wrong evidence.</a:t>
+              <a:t>     A pre-filled sheet gets rubber-stamped, and the agreement figure would then measure how persuasive the model was, not how well two people agree.</a:t>
             </a:r>
           </a:p>
         </p:txBody>
@@ -4159,7 +4159,7 @@
                 </a:solidFill>
                 <a:latin typeface="Helvetica Neue"/>
               </a:rPr>
-              <a:t>     Traditional↔challenger positioning score 0.132 on the current dataset.</a:t>
+              <a:t>     Traditional↔challenger positioning score 0.131 on the current dataset.</a:t>
             </a:r>
           </a:p>
           <a:p>
@@ -4197,7 +4197,7 @@
                 </a:solidFill>
                 <a:latin typeface="Helvetica Neue"/>
               </a:rPr>
-              <a:t>     Persuasion techniques used: 3.5 vs peers 2.2 (+1.74 SD) · Figures quoted: 25.5 vs 12.1 (+1.61 SD) · Targeting students: 1.0 vs 0.3 (+1.53 SD).</a:t>
+              <a:t>     Figures quoted: 25.5 vs peers 12.1 (+1.61 SD) · Targeting students: 1.0 vs 0.3 (+1.53 SD) · Clarity of the offer: 5.0 vs 3.8 (+1.30 SD, rubric-sourced).</a:t>
             </a:r>
           </a:p>
           <a:p>
@@ -4235,7 +4235,7 @@
                 </a:solidFill>
                 <a:latin typeface="Helvetica Neue"/>
               </a:rPr>
-              <a:t>     Calls to action: 3.0 vs peers 13.75 (-0.95 SD) — fewer explicit next steps than the market average.</a:t>
+              <a:t>     Calls to action: 3.0 vs peers 13.75 (-0.95 SD), and no comparison table where peers average 0.4.</a:t>
             </a:r>
           </a:p>
           <a:p>
@@ -4273,7 +4273,7 @@
                 </a:solidFill>
                 <a:latin typeface="Helvetica Neue"/>
               </a:rPr>
-              <a:t>     People present (d = -2.71, traditional higher) and showing a rate (d = +2.71, challenger higher) are the cleanest splits; share of page that is imagery also differs (d = +2.10).</a:t>
+              <a:t>     People present (d = -2.71, traditional higher), subscription framing and showing a rate (both d = +2.71, challenger higher), share of page that is imagery (d = +2.10).</a:t>
             </a:r>
           </a:p>
           <a:p>
@@ -4311,7 +4311,7 @@
                 </a:solidFill>
                 <a:latin typeface="Helvetica Neue"/>
               </a:rPr>
-              <a:t>     With eleven banks these are descriptive effect sizes, not significance tests — and the rubric figures rest on one human rater today.</a:t>
+              <a:t>     With eleven banks these are descriptive effect sizes, not significance tests — and the rubric-sourced ones moved when the second sheet was folded in, which is the point of measuring agreement.</a:t>
             </a:r>
           </a:p>
         </p:txBody>
@@ -7512,7 +7512,7 @@
                 </a:solidFill>
                 <a:latin typeface="Helvetica Neue"/>
               </a:rPr>
-              <a:t>•  The judgement features rest on one human rater today</a:t>
+              <a:t>•  The judgement features are thinner than they look</a:t>
             </a:r>
           </a:p>
           <a:p>
@@ -7531,7 +7531,7 @@
                 </a:solidFill>
                 <a:latin typeface="Helvetica Neue"/>
               </a:rPr>
-              <a:t>     Until Dan and Stephane finish their sheets, clarity, AIDA and persuasion carry a single rater plus the model.</a:t>
+              <a:t>     Siegried covers all 23 pages, Stephane's 9 were machine-proposed and adopted, Dan's are empty — and three of the 13 features fall below the agreement bar, so anything resting on persuasion levers or accent placement is a hypothesis.</a:t>
             </a:r>
           </a:p>
           <a:p>
@@ -7875,7 +7875,7 @@
                 </a:solidFill>
                 <a:latin typeface="Helvetica Neue"/>
               </a:rPr>
-              <a:t>•  1. Finish the rubric session</a:t>
+              <a:t>•  1. Finish the rubric properly</a:t>
             </a:r>
           </a:p>
           <a:p>
@@ -7894,7 +7894,7 @@
                 </a:solidFill>
                 <a:latin typeface="Helvetica Neue"/>
               </a:rPr>
-              <a:t>     Dan and Stephane's sheets, then report inter-rater agreement alongside the model's own sheet.</a:t>
+              <a:t>     Dan's sheet, the 14 pages whose screenshots are missing, and a genuinely independent second human — an adopted machine sheet measures the model, not agreement.</a:t>
             </a:r>
           </a:p>
           <a:p>

--- a/docs/Banking_Campaigns_Comparator.pptx
+++ b/docs/Banking_Campaigns_Comparator.pptx
@@ -3618,7 +3618,7 @@
                 </a:solidFill>
                 <a:latin typeface="Helvetica Neue"/>
               </a:rPr>
-              <a:t>     The module flags three as below its 60% bar — persuasion levers 0.14, accent locations 0.33, text-image layout 0.56 — and says to tighten the wording before trusting them in a finding.</a:t>
+              <a:t>     Three sit below the module's 60% bar — persuasion levers 0.14, accent locations 0.33, text-image layout 0.56 — and the six banks added this week have no rubric scores at all, so their judged features are blank rather than guessed.</a:t>
             </a:r>
           </a:p>
           <a:p>
@@ -4159,7 +4159,7 @@
                 </a:solidFill>
                 <a:latin typeface="Helvetica Neue"/>
               </a:rPr>
-              <a:t>     Traditional↔challenger positioning score 0.131 on the current dataset.</a:t>
+              <a:t>     Traditional↔challenger positioning score 0.201 across 14 banks.</a:t>
             </a:r>
           </a:p>
           <a:p>
@@ -4197,7 +4197,7 @@
                 </a:solidFill>
                 <a:latin typeface="Helvetica Neue"/>
               </a:rPr>
-              <a:t>     Figures quoted: 25.5 vs peers 12.1 (+1.61 SD) · Targeting students: 1.0 vs 0.3 (+1.53 SD) · Clarity of the offer: 5.0 vs 3.8 (+1.30 SD, rubric-sourced).</a:t>
+              <a:t>     Figures quoted: 25.5 vs peers 12.2 (+1.62 SD) · Targeting students: 1.0 vs 0.3 (+1.50 SD) · Size of the opening image: 0.53 vs 0.26 (+1.14 SD).</a:t>
             </a:r>
           </a:p>
           <a:p>
@@ -4235,7 +4235,7 @@
                 </a:solidFill>
                 <a:latin typeface="Helvetica Neue"/>
               </a:rPr>
-              <a:t>     Calls to action: 3.0 vs peers 13.75 (-0.95 SD), and no comparison table where peers average 0.4.</a:t>
+              <a:t>     Calls to action: 3.0 vs peers 13.5 (-0.99 SD) — fewer explicit next steps than the market average.</a:t>
             </a:r>
           </a:p>
           <a:p>
@@ -4273,7 +4273,7 @@
                 </a:solidFill>
                 <a:latin typeface="Helvetica Neue"/>
               </a:rPr>
-              <a:t>     People present (d = -2.71, traditional higher), subscription framing and showing a rate (both d = +2.71, challenger higher), share of page that is imagery (d = +2.10).</a:t>
+              <a:t>     Share of the page that is imagery (d = +2.02, challenger higher), formality of tone (d = -1.95, traditional more formal) and subscription-style framing (d = +1.87, challenger higher).</a:t>
             </a:r>
           </a:p>
           <a:p>
@@ -4311,7 +4311,7 @@
                 </a:solidFill>
                 <a:latin typeface="Helvetica Neue"/>
               </a:rPr>
-              <a:t>     With eleven banks these are descriptive effect sizes, not significance tests — and the rubric-sourced ones moved when the second sheet was folded in, which is the point of measuring agreement.</a:t>
+              <a:t>     These are descriptive effect sizes over 14 banks, not significance tests — and the rubric-sourced ones moved when the second sheet was folded in, which is the point of measuring agreement.</a:t>
             </a:r>
           </a:p>
         </p:txBody>
@@ -7493,7 +7493,7 @@
                 </a:solidFill>
                 <a:latin typeface="Helvetica Neue"/>
               </a:rPr>
-              <a:t>     Three challengers against seven traditional banks, and most banks contribute a single page — so a group mean is an anecdote and an effect size describes separation, not significance.</a:t>
+              <a:t>     Four challengers against ten traditional banks, and most banks contribute a single page — so a group mean is an anecdote and an effect size describes separation, not significance.</a:t>
             </a:r>
           </a:p>
           <a:p>
@@ -7531,7 +7531,7 @@
                 </a:solidFill>
                 <a:latin typeface="Helvetica Neue"/>
               </a:rPr>
-              <a:t>     Siegried covers all 23 pages, Stephane's 9 were machine-proposed and adopted, Dan's are empty — and three of the 13 features fall below the agreement bar, so anything resting on persuasion levers or accent placement is a hypothesis.</a:t>
+              <a:t>     Siegried covers her 23 pages, Stephane's 9 were machine-proposed and adopted, Dan's are empty, and the six banks added this week are unscored — so a finding resting on persuasion levers or accent placement is a hypothesis.</a:t>
             </a:r>
           </a:p>
           <a:p>
@@ -7913,7 +7913,7 @@
                 </a:solidFill>
                 <a:latin typeface="Helvetica Neue"/>
               </a:rPr>
-              <a:t>•  2. Recover the two blocked pages</a:t>
+              <a:t>•  2. Score the six new banks</a:t>
             </a:r>
           </a:p>
           <a:p>
@@ -7932,7 +7932,7 @@
                 </a:solidFill>
                 <a:latin typeface="Helvetica Neue"/>
               </a:rPr>
-              <a:t>     BNP Paribas Fortis and Revolut via the manual-capture path, so the challenger side is not carried by two banks.</a:t>
+              <a:t>     CBC, Keytrade, BNP's two pages and the restored Belfius and Revolut need rubric sheets, so every bank in the comparison carries a judged layer rather than blanks.</a:t>
             </a:r>
           </a:p>
           <a:p>
@@ -10374,7 +10374,7 @@
                 </a:solidFill>
                 <a:latin typeface="Helvetica Neue"/>
               </a:rPr>
-              <a:t>•  13 pages, 11 banks, 25 comparable features, nothing excluded</a:t>
+              <a:t>•  16 pages, 14 banks, 25 comparable features, nothing excluded</a:t>
             </a:r>
           </a:p>
           <a:p>
@@ -10393,7 +10393,7 @@
                 </a:solidFill>
                 <a:latin typeface="Helvetica Neue"/>
               </a:rPr>
-              <a:t>     Argenta · Belfius · Beobank · bunq · Crelan · Hellobank · ING · KBC · N26 · Revolut · Vdk</a:t>
+              <a:t>     Argenta · Belfius · Beobank · BNP Paribas Fortis · bunq · CBC · Crelan · Hellobank · ING · KBC · Keytrade · N26 · Revolut · Vdk</a:t>
             </a:r>
           </a:p>
           <a:p>
@@ -10469,7 +10469,7 @@
                 </a:solidFill>
                 <a:latin typeface="Helvetica Neue"/>
               </a:rPr>
-              <a:t>     7 traditional banks and 3 challengers, compared one product family at a time — a mortgage page and a current-account page differ because the products differ.</a:t>
+              <a:t>     10 traditional banks and 4 challengers, compared one product family at a time — a mortgage page and a current-account page differ because the products differ.</a:t>
             </a:r>
           </a:p>
           <a:p>

--- a/docs/Banking_Campaigns_Comparator.pptx
+++ b/docs/Banking_Campaigns_Comparator.pptx
@@ -29,6 +29,13 @@
     <p:sldId id="277" r:id="rId28"/>
     <p:sldId id="278" r:id="rId29"/>
     <p:sldId id="279" r:id="rId30"/>
+    <p:sldId id="280" r:id="rId31"/>
+    <p:sldId id="281" r:id="rId32"/>
+    <p:sldId id="282" r:id="rId33"/>
+    <p:sldId id="283" r:id="rId34"/>
+    <p:sldId id="284" r:id="rId35"/>
+    <p:sldId id="285" r:id="rId36"/>
+    <p:sldId id="286" r:id="rId37"/>
   </p:sldIdLst>
   <p:sldSz cx="12191695" cy="6858000" type="screen4x3"/>
   <p:notesSz cx="6858000" cy="9144000"/>
@@ -3377,7 +3384,7 @@
                 </a:solidFill>
                 <a:latin typeface="Helvetica Neue"/>
               </a:rPr>
-              <a:t>14 – 25 September 2026 · 11 banks · 13 current-account pages · 104 features</a:t>
+              <a:t>14 – 25 September 2026 · 14 banks · 16 current-account pages · 104 features</a:t>
             </a:r>
           </a:p>
         </p:txBody>
@@ -3561,7 +3568,7 @@
                 </a:solidFill>
                 <a:latin typeface="Helvetica Neue"/>
               </a:rPr>
-              <a:t>•  Siegried has scored all 23 pages; Stephane now has 9</a:t>
+              <a:t>•  Two independent humans now overlap on 11 pages</a:t>
             </a:r>
           </a:p>
           <a:p>
@@ -3580,7 +3587,7 @@
                 </a:solidFill>
                 <a:latin typeface="Helvetica Neue"/>
               </a:rPr>
-              <a:t>     Stephane's were proposed by a vision model over the screenshots and adopted, and the sheet's notes column says so. Dan is still at 0/23.</a:t>
+              <a:t>     Siegried has scored 25 pages and Dan 11, and the two sheets share all 11 of Dan's — so the agreement figure finally measures two people, not one person against a model.</a:t>
             </a:r>
           </a:p>
           <a:p>
@@ -3599,7 +3606,7 @@
                 </a:solidFill>
                 <a:latin typeface="Helvetica Neue"/>
               </a:rPr>
-              <a:t>•  Agreement is measurable for all 13 features, over 9 to 10 pages</a:t>
+              <a:t>•  Stephane's 9 are machine-proposed and adopted</a:t>
             </a:r>
           </a:p>
           <a:p>
@@ -3618,7 +3625,45 @@
                 </a:solidFill>
                 <a:latin typeface="Helvetica Neue"/>
               </a:rPr>
-              <a:t>     Three sit below the module's 60% bar — persuasion levers 0.14, accent locations 0.33, text-image layout 0.56 — and the six banks added this week have no rubric scores at all, so their judged features are blank rather than guessed.</a:t>
+              <a:t>     A vision model proposed them from the screenshots and Stephane accepted them; the sheet's notes column says so, and they are not counted as an independent human rater.</a:t>
+            </a:r>
+          </a:p>
+          <a:p>
+            <a:pPr algn="l">
+              <a:lnSpc>
+                <a:spcPct val="105000"/>
+              </a:lnSpc>
+              <a:spcAft>
+                <a:spcPts val="200"/>
+              </a:spcAft>
+            </a:pPr>
+            <a:r>
+              <a:rPr sz="1500" b="1">
+                <a:solidFill>
+                  <a:srgbClr val="14141C"/>
+                </a:solidFill>
+                <a:latin typeface="Helvetica Neue"/>
+              </a:rPr>
+              <a:t>•  Agreement is measurable for all 13 features, over 9 to 11 pages</a:t>
+            </a:r>
+          </a:p>
+          <a:p>
+            <a:pPr algn="l">
+              <a:lnSpc>
+                <a:spcPct val="105000"/>
+              </a:lnSpc>
+              <a:spcAft>
+                <a:spcPts val="1000"/>
+              </a:spcAft>
+            </a:pPr>
+            <a:r>
+              <a:rPr sz="1300" b="0">
+                <a:solidFill>
+                  <a:srgbClr val="585868"/>
+                </a:solidFill>
+                <a:latin typeface="Helvetica Neue"/>
+              </a:rPr>
+              <a:t>     Six sit below the module's 60% bar — aida desire 0.00, persuasion levers 0.11, accent locations 0.20, rate prominence 0.27, text-image layout 0.50, and attention 0.55 — so the remaining work is wording, not coverage.</a:t>
             </a:r>
           </a:p>
           <a:p>
@@ -4159,7 +4204,7 @@
                 </a:solidFill>
                 <a:latin typeface="Helvetica Neue"/>
               </a:rPr>
-              <a:t>     Traditional↔challenger positioning score 0.201 across 14 banks.</a:t>
+              <a:t>     Traditional↔challenger positioning score 0.211 across 14 banks, and its nearest neighbour is Belfius.</a:t>
             </a:r>
           </a:p>
           <a:p>
@@ -4197,7 +4242,7 @@
                 </a:solidFill>
                 <a:latin typeface="Helvetica Neue"/>
               </a:rPr>
-              <a:t>     Figures quoted: 25.5 vs peers 12.2 (+1.62 SD) · Targeting students: 1.0 vs 0.3 (+1.50 SD) · Size of the opening image: 0.53 vs 0.26 (+1.14 SD).</a:t>
+              <a:t>     Figures quoted: 25.5 vs peers 12.2 (+1.62 SD) · Targeting students: 1.0 vs 0.38 (+1.26 SD) · Clarity of the offer: 4.0 vs 3.5 (+1.00 SD, rubric-sourced) · Designed mobile-first: 1.0 vs 0.5 (+1.00 SD).</a:t>
             </a:r>
           </a:p>
           <a:p>
@@ -4235,7 +4280,7 @@
                 </a:solidFill>
                 <a:latin typeface="Helvetica Neue"/>
               </a:rPr>
-              <a:t>     Calls to action: 3.0 vs peers 13.5 (-0.99 SD) — fewer explicit next steps than the market average.</a:t>
+              <a:t>     Calls to action: 2.0 vs peers 13.4 (-1.06 SD) — the largest negative gap, and the fewest distinct next steps in the market.</a:t>
             </a:r>
           </a:p>
           <a:p>
@@ -4273,7 +4318,7 @@
                 </a:solidFill>
                 <a:latin typeface="Helvetica Neue"/>
               </a:rPr>
-              <a:t>     Share of the page that is imagery (d = +2.02, challenger higher), formality of tone (d = -1.95, traditional more formal) and subscription-style framing (d = +1.87, challenger higher).</a:t>
+              <a:t>     Traditional pages are brighter (d = -2.81) and show more without scrolling (d = -2.10); challengers are far likelier to frame the account as a subscription, to target expats, and to show a rate (each d = +1.87).</a:t>
             </a:r>
           </a:p>
           <a:p>
@@ -4311,7 +4356,7 @@
                 </a:solidFill>
                 <a:latin typeface="Helvetica Neue"/>
               </a:rPr>
-              <a:t>     These are descriptive effect sizes over 14 banks, not significance tests — and the rubric-sourced ones moved when the second sheet was folded in, which is the point of measuring agreement.</a:t>
+              <a:t>     These are descriptive effect sizes over 14 banks, not significance tests — and the rubric-sourced ones moved when the second human sheet was folded in, which is the point of measuring agreement.</a:t>
             </a:r>
           </a:p>
         </p:txBody>
@@ -7350,7 +7395,7 @@
                 </a:solidFill>
                 <a:latin typeface="Helvetica Neue"/>
               </a:rPr>
-              <a:t>What this cannot support</a:t>
+              <a:t>The operator tabs, and what they refuse to do</a:t>
             </a:r>
           </a:p>
         </p:txBody>
@@ -7436,7 +7481,7 @@
                 </a:solidFill>
                 <a:latin typeface="Helvetica Neue"/>
               </a:rPr>
-              <a:t>•  No performance data exists here</a:t>
+              <a:t>•  Six read-only views, moved out of the Streamlit dashboard</a:t>
             </a:r>
           </a:p>
           <a:p>
@@ -7455,7 +7500,7 @@
                 </a:solidFill>
                 <a:latin typeface="Helvetica Neue"/>
               </a:rPr>
-              <a:t>     Nothing links a design choice to a click, a conversion or a sale. Every recommendation is a hypothesis ING could test.</a:t>
+              <a:t>     Home, Bank profiles, Data, Rubric, Collection and Research now render in the same UI as the findings, from one snapshot the exporter writes: operations.json.</a:t>
             </a:r>
           </a:p>
           <a:p>
@@ -7474,7 +7519,7 @@
                 </a:solidFill>
                 <a:latin typeface="Helvetica Neue"/>
               </a:rPr>
-              <a:t>•  Small groups, by design</a:t>
+              <a:t>•  No pipeline control</a:t>
             </a:r>
           </a:p>
           <a:p>
@@ -7493,7 +7538,7 @@
                 </a:solidFill>
                 <a:latin typeface="Helvetica Neue"/>
               </a:rPr>
-              <a:t>     Four challengers against ten traditional banks, and most banks contribute a single page — so a group mean is an anecdote and an effect size describes separation, not significance.</a:t>
+              <a:t>     Collection is slow and needs a job model, and the robots.txt gate must stay server-side and non-overridable — so there is no 'run collection' button in a browser.</a:t>
             </a:r>
           </a:p>
           <a:p>
@@ -7512,7 +7557,7 @@
                 </a:solidFill>
                 <a:latin typeface="Helvetica Neue"/>
               </a:rPr>
-              <a:t>•  The judgement features are thinner than they look</a:t>
+              <a:t>•  No dataset or dictionary editing</a:t>
             </a:r>
           </a:p>
           <a:p>
@@ -7531,7 +7576,7 @@
                 </a:solidFill>
                 <a:latin typeface="Helvetica Neue"/>
               </a:rPr>
-              <a:t>     Siegried covers her 23 pages, Stephane's 9 were machine-proposed and adopted, Dan's are empty, and the six banks added this week are unscored — so a finding resting on persuasion levers or accent placement is a hypothesis.</a:t>
+              <a:t>     The dictionary is the frozen contract (P-04); a form that edited it would undo the freeze rule, and a form that edited an extracted feature would destroy its audit trail.</a:t>
             </a:r>
           </a:p>
           <a:p>
@@ -7550,7 +7595,7 @@
                 </a:solidFill>
                 <a:latin typeface="Helvetica Neue"/>
               </a:rPr>
-              <a:t>•  Search interest is context, and covers part of the market</a:t>
+              <a:t>•  No live scoring screen</a:t>
             </a:r>
           </a:p>
           <a:p>
@@ -7569,7 +7614,7 @@
                 </a:solidFill>
                 <a:latin typeface="Helvetica Neue"/>
               </a:rPr>
-              <a:t>     It measures what people searched for, not what a campaign achieved, and the pages captured are today's pages.</a:t>
+              <a:t>     The Rubric tab shows finished sheets only. A screen that displayed a rater's neighbours would make the agreement figure measure visibility, not independent judgement (NFR-05).</a:t>
             </a:r>
           </a:p>
           <a:p>
@@ -7588,7 +7633,7 @@
                 </a:solidFill>
                 <a:latin typeface="Helvetica Neue"/>
               </a:rPr>
-              <a:t>•  Only the open web is covered</a:t>
+              <a:t>•  One direction only</a:t>
             </a:r>
           </a:p>
           <a:p>
@@ -7607,7 +7652,7 @@
                 </a:solidFill>
                 <a:latin typeface="Helvetica Neue"/>
               </a:rPr>
-              <a:t>     Social, in-app and email banners are out of scope — and may be where a bank's real communication happens.</a:t>
+              <a:t>     The UI does no arithmetic: every number is computed in Python and handed over already labelled, so no figure on screen has a second definition.</a:t>
             </a:r>
           </a:p>
           <a:p>
@@ -7645,7 +7690,7 @@
                 </a:solidFill>
                 <a:latin typeface="Helvetica Neue"/>
               </a:rPr>
-              <a:t>outputs/limitations.md is regenerated from the dataset on every run, so these cannot quietly go stale.</a:t>
+              <a:t>The Streamlit file stays in the repository for share.streamlit.io; it is no longer the only place these views exist.</a:t>
             </a:r>
           </a:p>
         </p:txBody>
@@ -7760,8 +7805,8 @@
         </p:nvSpPr>
         <p:spPr>
           <a:xfrm>
-            <a:off x="548640" y="384048"/>
-            <a:ext cx="11064240" cy="731520"/>
+            <a:off x="548640" y="320040"/>
+            <a:ext cx="11064240" cy="640080"/>
           </a:xfrm>
           <a:prstGeom prst="rect">
             <a:avLst/>
@@ -7783,13 +7828,13 @@
               </a:spcAft>
             </a:pPr>
             <a:r>
-              <a:rPr sz="2800" b="1">
+              <a:rPr sz="2400" b="1">
                 <a:solidFill>
                   <a:srgbClr val="14141C"/>
                 </a:solidFill>
                 <a:latin typeface="Helvetica Neue"/>
               </a:rPr>
-              <a:t>Roadmap</a:t>
+              <a:t>Home: what was collected, and what comes out</a:t>
             </a:r>
           </a:p>
         </p:txBody>
@@ -7802,8 +7847,8 @@
         </p:nvSpPr>
         <p:spPr>
           <a:xfrm>
-            <a:off x="548640" y="1115568"/>
-            <a:ext cx="1463040" cy="64008"/>
+            <a:off x="548640" y="960120"/>
+            <a:ext cx="1463040" cy="54864"/>
           </a:xfrm>
           <a:prstGeom prst="rect">
             <a:avLst/>
@@ -7838,16 +7883,40 @@
           </a:p>
         </p:txBody>
       </p:sp>
-      <p:sp>
-        <p:nvSpPr>
-          <p:cNvPr id="4" name="TextBox 3"/>
+      <p:pic>
+        <p:nvPicPr>
+          <p:cNvPr id="4" name="Picture 3" descr="08_home.png"/>
+          <p:cNvPicPr>
+            <a:picLocks noChangeAspect="1"/>
+          </p:cNvPicPr>
+          <p:nvPr/>
+        </p:nvPicPr>
+        <p:blipFill>
+          <a:blip r:embed="rId2"/>
+          <a:stretch>
+            <a:fillRect/>
+          </a:stretch>
+        </p:blipFill>
+        <p:spPr>
+          <a:xfrm>
+            <a:off x="2113127" y="1325880"/>
+            <a:ext cx="7965440" cy="4480560"/>
+          </a:xfrm>
+          <a:prstGeom prst="rect">
+            <a:avLst/>
+          </a:prstGeom>
+        </p:spPr>
+      </p:pic>
+      <p:sp>
+        <p:nvSpPr>
+          <p:cNvPr id="5" name="TextBox 4"/>
           <p:cNvSpPr txBox="1"/>
           <p:nvPr/>
         </p:nvSpPr>
         <p:spPr>
           <a:xfrm>
-            <a:off x="685800" y="1463040"/>
-            <a:ext cx="10881360" cy="4754880"/>
+            <a:off x="685800" y="5916168"/>
+            <a:ext cx="10881360" cy="457200"/>
           </a:xfrm>
           <a:prstGeom prst="rect">
             <a:avLst/>
@@ -7865,195 +7934,24 @@
                 <a:spcPct val="105000"/>
               </a:lnSpc>
               <a:spcAft>
-                <a:spcPts val="200"/>
-              </a:spcAft>
-            </a:pPr>
-            <a:r>
-              <a:rPr sz="1500" b="1">
-                <a:solidFill>
-                  <a:srgbClr val="14141C"/>
-                </a:solidFill>
-                <a:latin typeface="Helvetica Neue"/>
-              </a:rPr>
-              <a:t>•  1. Finish the rubric properly</a:t>
-            </a:r>
-          </a:p>
-          <a:p>
-            <a:pPr algn="l">
-              <a:lnSpc>
-                <a:spcPct val="105000"/>
-              </a:lnSpc>
-              <a:spcAft>
-                <a:spcPts val="1000"/>
-              </a:spcAft>
-            </a:pPr>
-            <a:r>
-              <a:rPr sz="1300" b="0">
+                <a:spcPts val="600"/>
+              </a:spcAft>
+            </a:pPr>
+            <a:r>
+              <a:rPr sz="1200" b="0">
                 <a:solidFill>
                   <a:srgbClr val="585868"/>
                 </a:solidFill>
                 <a:latin typeface="Helvetica Neue"/>
               </a:rPr>
-              <a:t>     Dan's sheet, the 14 pages whose screenshots are missing, and a genuinely independent second human — an adopted machine sheet measures the model, not agreement.</a:t>
-            </a:r>
-          </a:p>
-          <a:p>
-            <a:pPr algn="l">
-              <a:lnSpc>
-                <a:spcPct val="105000"/>
-              </a:lnSpc>
-              <a:spcAft>
-                <a:spcPts val="200"/>
-              </a:spcAft>
-            </a:pPr>
-            <a:r>
-              <a:rPr sz="1500" b="1">
-                <a:solidFill>
-                  <a:srgbClr val="14141C"/>
-                </a:solidFill>
-                <a:latin typeface="Helvetica Neue"/>
-              </a:rPr>
-              <a:t>•  2. Score the six new banks</a:t>
-            </a:r>
-          </a:p>
-          <a:p>
-            <a:pPr algn="l">
-              <a:lnSpc>
-                <a:spcPct val="105000"/>
-              </a:lnSpc>
-              <a:spcAft>
-                <a:spcPts val="1000"/>
-              </a:spcAft>
-            </a:pPr>
-            <a:r>
-              <a:rPr sz="1300" b="0">
-                <a:solidFill>
-                  <a:srgbClr val="585868"/>
-                </a:solidFill>
-                <a:latin typeface="Helvetica Neue"/>
-              </a:rPr>
-              <a:t>     CBC, Keytrade, BNP's two pages and the restored Belfius and Revolut need rubric sheets, so every bank in the comparison carries a judged layer rather than blanks.</a:t>
-            </a:r>
-          </a:p>
-          <a:p>
-            <a:pPr algn="l">
-              <a:lnSpc>
-                <a:spcPct val="105000"/>
-              </a:lnSpc>
-              <a:spcAft>
-                <a:spcPts val="200"/>
-              </a:spcAft>
-            </a:pPr>
-            <a:r>
-              <a:rPr sz="1500" b="1">
-                <a:solidFill>
-                  <a:srgbClr val="14141C"/>
-                </a:solidFill>
-                <a:latin typeface="Helvetica Neue"/>
-              </a:rPr>
-              <a:t>•  3. Re-run and re-export</a:t>
-            </a:r>
-          </a:p>
-          <a:p>
-            <a:pPr algn="l">
-              <a:lnSpc>
-                <a:spcPct val="105000"/>
-              </a:lnSpc>
-              <a:spcAft>
-                <a:spcPts val="1000"/>
-              </a:spcAft>
-            </a:pPr>
-            <a:r>
-              <a:rPr sz="1300" b="0">
-                <a:solidFill>
-                  <a:srgbClr val="585868"/>
-                </a:solidFill>
-                <a:latin typeface="Helvetica Neue"/>
-              </a:rPr>
-              <a:t>     rubric_sheet.py merge → run_analysis.py → export_web_report.py, then re-verify the narrative's figures.</a:t>
-            </a:r>
-          </a:p>
-          <a:p>
-            <a:pPr algn="l">
-              <a:lnSpc>
-                <a:spcPct val="105000"/>
-              </a:lnSpc>
-              <a:spcAft>
-                <a:spcPts val="200"/>
-              </a:spcAft>
-            </a:pPr>
-            <a:r>
-              <a:rPr sz="1500" b="1">
-                <a:solidFill>
-                  <a:srgbClr val="14141C"/>
-                </a:solidFill>
-                <a:latin typeface="Helvetica Neue"/>
-              </a:rPr>
-              <a:t>•  4. Decide on outputs/ in git</a:t>
-            </a:r>
-          </a:p>
-          <a:p>
-            <a:pPr algn="l">
-              <a:lnSpc>
-                <a:spcPct val="105000"/>
-              </a:lnSpc>
-              <a:spcAft>
-                <a:spcPts val="1000"/>
-              </a:spcAft>
-            </a:pPr>
-            <a:r>
-              <a:rPr sz="1300" b="0">
-                <a:solidFill>
-                  <a:srgbClr val="585868"/>
-                </a:solidFill>
-                <a:latin typeface="Helvetica Neue"/>
-              </a:rPr>
-              <a:t>     It is regenerated on every run yet tracked, so each analysis leaves a large binary diff.</a:t>
-            </a:r>
-          </a:p>
-          <a:p>
-            <a:pPr algn="l">
-              <a:lnSpc>
-                <a:spcPct val="105000"/>
-              </a:lnSpc>
-              <a:spcAft>
-                <a:spcPts val="200"/>
-              </a:spcAft>
-            </a:pPr>
-            <a:r>
-              <a:rPr sz="1500" b="1">
-                <a:solidFill>
-                  <a:srgbClr val="14141C"/>
-                </a:solidFill>
-                <a:latin typeface="Helvetica Neue"/>
-              </a:rPr>
-              <a:t>•  5. Then, if the team wants it</a:t>
-            </a:r>
-          </a:p>
-          <a:p>
-            <a:pPr algn="l">
-              <a:lnSpc>
-                <a:spcPct val="105000"/>
-              </a:lnSpc>
-              <a:spcAft>
-                <a:spcPts val="1000"/>
-              </a:spcAft>
-            </a:pPr>
-            <a:r>
-              <a:rPr sz="1300" b="0">
-                <a:solidFill>
-                  <a:srgbClr val="585868"/>
-                </a:solidFill>
-                <a:latin typeface="Helvetica Neue"/>
-              </a:rPr>
-              <a:t>     More product families (savings, mortgage) compared the same way, and a wider bank set.</a:t>
-            </a:r>
-          </a:p>
-        </p:txBody>
-      </p:sp>
-      <p:sp>
-        <p:nvSpPr>
-          <p:cNvPr id="5" name="TextBox 4"/>
+              <a:t>Four counts from the run, the validation verdict, every bank's status, and a download per deliverable.</a:t>
+            </a:r>
+          </a:p>
+        </p:txBody>
+      </p:sp>
+      <p:sp>
+        <p:nvSpPr>
+          <p:cNvPr id="6" name="TextBox 5"/>
           <p:cNvSpPr txBox="1"/>
           <p:nvPr/>
         </p:nvSpPr>
@@ -8095,7 +7993,7 @@
       </p:sp>
       <p:sp>
         <p:nvSpPr>
-          <p:cNvPr id="6" name="TextBox 5"/>
+          <p:cNvPr id="7" name="TextBox 6"/>
           <p:cNvSpPr txBox="1"/>
           <p:nvPr/>
         </p:nvSpPr>
@@ -8155,20 +8053,62 @@
       <p:grpSpPr/>
       <p:sp>
         <p:nvSpPr>
-          <p:cNvPr id="2" name="Rectangle 1"/>
+          <p:cNvPr id="2" name="TextBox 1"/>
+          <p:cNvSpPr txBox="1"/>
+          <p:nvPr/>
+        </p:nvSpPr>
+        <p:spPr>
+          <a:xfrm>
+            <a:off x="548640" y="320040"/>
+            <a:ext cx="11064240" cy="640080"/>
+          </a:xfrm>
+          <a:prstGeom prst="rect">
+            <a:avLst/>
+          </a:prstGeom>
+          <a:noFill/>
+        </p:spPr>
+        <p:txBody>
+          <a:bodyPr wrap="square">
+            <a:spAutoFit/>
+          </a:bodyPr>
+          <a:lstStyle/>
+          <a:p>
+            <a:pPr algn="l">
+              <a:lnSpc>
+                <a:spcPct val="105000"/>
+              </a:lnSpc>
+              <a:spcAft>
+                <a:spcPts val="600"/>
+              </a:spcAft>
+            </a:pPr>
+            <a:r>
+              <a:rPr sz="2400" b="1">
+                <a:solidFill>
+                  <a:srgbClr val="14141C"/>
+                </a:solidFill>
+                <a:latin typeface="Helvetica Neue"/>
+              </a:rPr>
+              <a:t>Bank profiles: one bank, every measured field</a:t>
+            </a:r>
+          </a:p>
+        </p:txBody>
+      </p:sp>
+      <p:sp>
+        <p:nvSpPr>
+          <p:cNvPr id="3" name="Rectangle 2"/>
           <p:cNvSpPr/>
           <p:nvPr/>
         </p:nvSpPr>
         <p:spPr>
           <a:xfrm>
-            <a:off x="0" y="0"/>
-            <a:ext cx="12191695" cy="6858000"/>
+            <a:off x="548640" y="960120"/>
+            <a:ext cx="1463040" cy="54864"/>
           </a:xfrm>
           <a:prstGeom prst="rect">
             <a:avLst/>
           </a:prstGeom>
           <a:solidFill>
-            <a:srgbClr val="14141C"/>
+            <a:srgbClr val="FF6200"/>
           </a:solidFill>
           <a:ln>
             <a:noFill/>
@@ -8197,6 +8137,216 @@
           </a:p>
         </p:txBody>
       </p:sp>
+      <p:pic>
+        <p:nvPicPr>
+          <p:cNvPr id="4" name="Picture 3" descr="09_profiles.png"/>
+          <p:cNvPicPr>
+            <a:picLocks noChangeAspect="1"/>
+          </p:cNvPicPr>
+          <p:nvPr/>
+        </p:nvPicPr>
+        <p:blipFill>
+          <a:blip r:embed="rId2"/>
+          <a:stretch>
+            <a:fillRect/>
+          </a:stretch>
+        </p:blipFill>
+        <p:spPr>
+          <a:xfrm>
+            <a:off x="2113127" y="1325880"/>
+            <a:ext cx="7965440" cy="4480560"/>
+          </a:xfrm>
+          <a:prstGeom prst="rect">
+            <a:avLst/>
+          </a:prstGeom>
+        </p:spPr>
+      </p:pic>
+      <p:sp>
+        <p:nvSpPr>
+          <p:cNvPr id="5" name="TextBox 4"/>
+          <p:cNvSpPr txBox="1"/>
+          <p:nvPr/>
+        </p:nvSpPr>
+        <p:spPr>
+          <a:xfrm>
+            <a:off x="685800" y="5916168"/>
+            <a:ext cx="10881360" cy="457200"/>
+          </a:xfrm>
+          <a:prstGeom prst="rect">
+            <a:avLst/>
+          </a:prstGeom>
+          <a:noFill/>
+        </p:spPr>
+        <p:txBody>
+          <a:bodyPr wrap="square">
+            <a:spAutoFit/>
+          </a:bodyPr>
+          <a:lstStyle/>
+          <a:p>
+            <a:pPr algn="l">
+              <a:lnSpc>
+                <a:spcPct val="105000"/>
+              </a:lnSpc>
+              <a:spcAft>
+                <a:spcPts val="600"/>
+              </a:spcAft>
+            </a:pPr>
+            <a:r>
+              <a:rPr sz="1200" b="0">
+                <a:solidFill>
+                  <a:srgbClr val="585868"/>
+                </a:solidFill>
+                <a:latin typeface="Helvetica Neue"/>
+              </a:rPr>
+              <a:t>Palette, tone, imagery, layout, value proposition, the z-score signature, personas and the AI Score.</a:t>
+            </a:r>
+          </a:p>
+        </p:txBody>
+      </p:sp>
+      <p:sp>
+        <p:nvSpPr>
+          <p:cNvPr id="6" name="TextBox 5"/>
+          <p:cNvSpPr txBox="1"/>
+          <p:nvPr/>
+        </p:nvSpPr>
+        <p:spPr>
+          <a:xfrm>
+            <a:off x="548640" y="6400800"/>
+            <a:ext cx="8229600" cy="274320"/>
+          </a:xfrm>
+          <a:prstGeom prst="rect">
+            <a:avLst/>
+          </a:prstGeom>
+          <a:noFill/>
+        </p:spPr>
+        <p:txBody>
+          <a:bodyPr wrap="square">
+            <a:spAutoFit/>
+          </a:bodyPr>
+          <a:lstStyle/>
+          <a:p>
+            <a:pPr algn="l">
+              <a:lnSpc>
+                <a:spcPct val="105000"/>
+              </a:lnSpc>
+              <a:spcAft>
+                <a:spcPts val="600"/>
+              </a:spcAft>
+            </a:pPr>
+            <a:r>
+              <a:rPr sz="1000" b="0">
+                <a:solidFill>
+                  <a:srgbClr val="585868"/>
+                </a:solidFill>
+                <a:latin typeface="Helvetica Neue"/>
+              </a:rPr>
+              <a:t>Banking Campaigns Comparator · ING DACI / Customer AI · September 2026</a:t>
+            </a:r>
+          </a:p>
+        </p:txBody>
+      </p:sp>
+      <p:sp>
+        <p:nvSpPr>
+          <p:cNvPr id="7" name="TextBox 6"/>
+          <p:cNvSpPr txBox="1"/>
+          <p:nvPr/>
+        </p:nvSpPr>
+        <p:spPr>
+          <a:xfrm>
+            <a:off x="11094415" y="6400800"/>
+            <a:ext cx="548640" cy="274320"/>
+          </a:xfrm>
+          <a:prstGeom prst="rect">
+            <a:avLst/>
+          </a:prstGeom>
+          <a:noFill/>
+        </p:spPr>
+        <p:txBody>
+          <a:bodyPr wrap="square">
+            <a:spAutoFit/>
+          </a:bodyPr>
+          <a:lstStyle/>
+          <a:p>
+            <a:pPr algn="r">
+              <a:lnSpc>
+                <a:spcPct val="105000"/>
+              </a:lnSpc>
+              <a:spcAft>
+                <a:spcPts val="600"/>
+              </a:spcAft>
+            </a:pPr>
+            <a:r>
+              <a:rPr sz="1000" b="0">
+                <a:solidFill>
+                  <a:srgbClr val="585868"/>
+                </a:solidFill>
+                <a:latin typeface="Helvetica Neue"/>
+              </a:rPr>
+              <a:t>24</a:t>
+            </a:r>
+          </a:p>
+        </p:txBody>
+      </p:sp>
+    </p:spTree>
+  </p:cSld>
+  <p:clrMapOvr>
+    <a:masterClrMapping/>
+  </p:clrMapOvr>
+</p:sld>
+</file>
+
+<file path=ppt/slides/slide25.xml><?xml version="1.0" encoding="utf-8"?>
+<p:sld xmlns:a="http://schemas.openxmlformats.org/drawingml/2006/main" xmlns:p="http://schemas.openxmlformats.org/presentationml/2006/main" xmlns:r="http://schemas.openxmlformats.org/officeDocument/2006/relationships">
+  <p:cSld>
+    <p:spTree>
+      <p:nvGrpSpPr>
+        <p:cNvPr id="1" name=""/>
+        <p:cNvGrpSpPr/>
+        <p:nvPr/>
+      </p:nvGrpSpPr>
+      <p:grpSpPr/>
+      <p:sp>
+        <p:nvSpPr>
+          <p:cNvPr id="2" name="TextBox 1"/>
+          <p:cNvSpPr txBox="1"/>
+          <p:nvPr/>
+        </p:nvSpPr>
+        <p:spPr>
+          <a:xfrm>
+            <a:off x="548640" y="320040"/>
+            <a:ext cx="11064240" cy="640080"/>
+          </a:xfrm>
+          <a:prstGeom prst="rect">
+            <a:avLst/>
+          </a:prstGeom>
+          <a:noFill/>
+        </p:spPr>
+        <p:txBody>
+          <a:bodyPr wrap="square">
+            <a:spAutoFit/>
+          </a:bodyPr>
+          <a:lstStyle/>
+          <a:p>
+            <a:pPr algn="l">
+              <a:lnSpc>
+                <a:spcPct val="105000"/>
+              </a:lnSpc>
+              <a:spcAft>
+                <a:spcPts val="600"/>
+              </a:spcAft>
+            </a:pPr>
+            <a:r>
+              <a:rPr sz="2400" b="1">
+                <a:solidFill>
+                  <a:srgbClr val="14141C"/>
+                </a:solidFill>
+                <a:latin typeface="Helvetica Neue"/>
+              </a:rPr>
+              <a:t>Data: the dataset and the frozen dictionary</a:t>
+            </a:r>
+          </a:p>
+        </p:txBody>
+      </p:sp>
       <p:sp>
         <p:nvSpPr>
           <p:cNvPr id="3" name="Rectangle 2"/>
@@ -8205,8 +8355,8 @@
         </p:nvSpPr>
         <p:spPr>
           <a:xfrm>
-            <a:off x="822960" y="2743200"/>
-            <a:ext cx="2011680" cy="91440"/>
+            <a:off x="548640" y="960120"/>
+            <a:ext cx="1463040" cy="54864"/>
           </a:xfrm>
           <a:prstGeom prst="rect">
             <a:avLst/>
@@ -8241,16 +8391,40 @@
           </a:p>
         </p:txBody>
       </p:sp>
-      <p:sp>
-        <p:nvSpPr>
-          <p:cNvPr id="4" name="TextBox 3"/>
+      <p:pic>
+        <p:nvPicPr>
+          <p:cNvPr id="4" name="Picture 3" descr="10_data.png"/>
+          <p:cNvPicPr>
+            <a:picLocks noChangeAspect="1"/>
+          </p:cNvPicPr>
+          <p:nvPr/>
+        </p:nvPicPr>
+        <p:blipFill>
+          <a:blip r:embed="rId2"/>
+          <a:stretch>
+            <a:fillRect/>
+          </a:stretch>
+        </p:blipFill>
+        <p:spPr>
+          <a:xfrm>
+            <a:off x="2113127" y="1325880"/>
+            <a:ext cx="7965440" cy="4480560"/>
+          </a:xfrm>
+          <a:prstGeom prst="rect">
+            <a:avLst/>
+          </a:prstGeom>
+        </p:spPr>
+      </p:pic>
+      <p:sp>
+        <p:nvSpPr>
+          <p:cNvPr id="5" name="TextBox 4"/>
           <p:cNvSpPr txBox="1"/>
           <p:nvPr/>
         </p:nvSpPr>
         <p:spPr>
           <a:xfrm>
-            <a:off x="822960" y="1828800"/>
-            <a:ext cx="10515600" cy="914400"/>
+            <a:off x="685800" y="5916168"/>
+            <a:ext cx="10881360" cy="457200"/>
           </a:xfrm>
           <a:prstGeom prst="rect">
             <a:avLst/>
@@ -8272,27 +8446,27 @@
               </a:spcAft>
             </a:pPr>
             <a:r>
-              <a:rPr sz="2800" b="1">
-                <a:solidFill>
-                  <a:srgbClr val="FFFFFF"/>
-                </a:solidFill>
-                <a:latin typeface="Helvetica Neue"/>
-              </a:rPr>
-              <a:t>Measure one way. Label the trust. Claim only what the data supports.</a:t>
-            </a:r>
-          </a:p>
-        </p:txBody>
-      </p:sp>
-      <p:sp>
-        <p:nvSpPr>
-          <p:cNvPr id="5" name="TextBox 4"/>
+              <a:rPr sz="1200" b="0">
+                <a:solidFill>
+                  <a:srgbClr val="585868"/>
+                </a:solidFill>
+                <a:latin typeface="Helvetica Neue"/>
+              </a:rPr>
+              <a:t>Every capture with its provenance, filterable and exportable, read against the 104-feature dictionary.</a:t>
+            </a:r>
+          </a:p>
+        </p:txBody>
+      </p:sp>
+      <p:sp>
+        <p:nvSpPr>
+          <p:cNvPr id="6" name="TextBox 5"/>
           <p:cNvSpPr txBox="1"/>
           <p:nvPr/>
         </p:nvSpPr>
         <p:spPr>
           <a:xfrm>
-            <a:off x="822960" y="3063240"/>
-            <a:ext cx="10058400" cy="1463040"/>
+            <a:off x="548640" y="6400800"/>
+            <a:ext cx="8229600" cy="274320"/>
           </a:xfrm>
           <a:prstGeom prst="rect">
             <a:avLst/>
@@ -8314,17 +8488,40 @@
               </a:spcAft>
             </a:pPr>
             <a:r>
-              <a:rPr sz="1400" b="0">
-                <a:solidFill>
-                  <a:srgbClr val="B8B8C8"/>
-                </a:solidFill>
-                <a:latin typeface="Helvetica Neue"/>
-              </a:rPr>
-              <a:t>The pipeline, the contract and the guardrails are in the repository:</a:t>
-            </a:r>
-          </a:p>
-          <a:p>
-            <a:pPr algn="l">
+              <a:rPr sz="1000" b="0">
+                <a:solidFill>
+                  <a:srgbClr val="585868"/>
+                </a:solidFill>
+                <a:latin typeface="Helvetica Neue"/>
+              </a:rPr>
+              <a:t>Banking Campaigns Comparator · ING DACI / Customer AI · September 2026</a:t>
+            </a:r>
+          </a:p>
+        </p:txBody>
+      </p:sp>
+      <p:sp>
+        <p:nvSpPr>
+          <p:cNvPr id="7" name="TextBox 6"/>
+          <p:cNvSpPr txBox="1"/>
+          <p:nvPr/>
+        </p:nvSpPr>
+        <p:spPr>
+          <a:xfrm>
+            <a:off x="11094415" y="6400800"/>
+            <a:ext cx="548640" cy="274320"/>
+          </a:xfrm>
+          <a:prstGeom prst="rect">
+            <a:avLst/>
+          </a:prstGeom>
+          <a:noFill/>
+        </p:spPr>
+        <p:txBody>
+          <a:bodyPr wrap="square">
+            <a:spAutoFit/>
+          </a:bodyPr>
+          <a:lstStyle/>
+          <a:p>
+            <a:pPr algn="r">
               <a:lnSpc>
                 <a:spcPct val="105000"/>
               </a:lnSpc>
@@ -8333,13 +8530,1214 @@
               </a:spcAft>
             </a:pPr>
             <a:r>
-              <a:rPr sz="1400" b="0">
-                <a:solidFill>
-                  <a:srgbClr val="B8B8C8"/>
-                </a:solidFill>
-                <a:latin typeface="Helvetica Neue"/>
-              </a:rPr>
-              <a:t>README.md · docs/design.md · docs/pipeline.md · web/README.md · docs/decisions.md</a:t>
+              <a:rPr sz="1000" b="0">
+                <a:solidFill>
+                  <a:srgbClr val="585868"/>
+                </a:solidFill>
+                <a:latin typeface="Helvetica Neue"/>
+              </a:rPr>
+              <a:t>25</a:t>
+            </a:r>
+          </a:p>
+        </p:txBody>
+      </p:sp>
+    </p:spTree>
+  </p:cSld>
+  <p:clrMapOvr>
+    <a:masterClrMapping/>
+  </p:clrMapOvr>
+</p:sld>
+</file>
+
+<file path=ppt/slides/slide26.xml><?xml version="1.0" encoding="utf-8"?>
+<p:sld xmlns:a="http://schemas.openxmlformats.org/drawingml/2006/main" xmlns:p="http://schemas.openxmlformats.org/presentationml/2006/main" xmlns:r="http://schemas.openxmlformats.org/officeDocument/2006/relationships">
+  <p:cSld>
+    <p:spTree>
+      <p:nvGrpSpPr>
+        <p:cNvPr id="1" name=""/>
+        <p:cNvGrpSpPr/>
+        <p:nvPr/>
+      </p:nvGrpSpPr>
+      <p:grpSpPr/>
+      <p:sp>
+        <p:nvSpPr>
+          <p:cNvPr id="2" name="TextBox 1"/>
+          <p:cNvSpPr txBox="1"/>
+          <p:nvPr/>
+        </p:nvSpPr>
+        <p:spPr>
+          <a:xfrm>
+            <a:off x="548640" y="320040"/>
+            <a:ext cx="11064240" cy="640080"/>
+          </a:xfrm>
+          <a:prstGeom prst="rect">
+            <a:avLst/>
+          </a:prstGeom>
+          <a:noFill/>
+        </p:spPr>
+        <p:txBody>
+          <a:bodyPr wrap="square">
+            <a:spAutoFit/>
+          </a:bodyPr>
+          <a:lstStyle/>
+          <a:p>
+            <a:pPr algn="l">
+              <a:lnSpc>
+                <a:spcPct val="105000"/>
+              </a:lnSpc>
+              <a:spcAft>
+                <a:spcPts val="600"/>
+              </a:spcAft>
+            </a:pPr>
+            <a:r>
+              <a:rPr sz="2400" b="1">
+                <a:solidFill>
+                  <a:srgbClr val="14141C"/>
+                </a:solidFill>
+                <a:latin typeface="Helvetica Neue"/>
+              </a:rPr>
+              <a:t>Rubric: the sheets, and where they disagree</a:t>
+            </a:r>
+          </a:p>
+        </p:txBody>
+      </p:sp>
+      <p:sp>
+        <p:nvSpPr>
+          <p:cNvPr id="3" name="Rectangle 2"/>
+          <p:cNvSpPr/>
+          <p:nvPr/>
+        </p:nvSpPr>
+        <p:spPr>
+          <a:xfrm>
+            <a:off x="548640" y="960120"/>
+            <a:ext cx="1463040" cy="54864"/>
+          </a:xfrm>
+          <a:prstGeom prst="rect">
+            <a:avLst/>
+          </a:prstGeom>
+          <a:solidFill>
+            <a:srgbClr val="FF6200"/>
+          </a:solidFill>
+          <a:ln>
+            <a:noFill/>
+          </a:ln>
+          <a:effectLst/>
+        </p:spPr>
+        <p:style>
+          <a:lnRef idx="1">
+            <a:schemeClr val="accent1"/>
+          </a:lnRef>
+          <a:fillRef idx="3">
+            <a:schemeClr val="accent1"/>
+          </a:fillRef>
+          <a:effectRef idx="2">
+            <a:schemeClr val="accent1"/>
+          </a:effectRef>
+          <a:fontRef idx="minor">
+            <a:schemeClr val="lt1"/>
+          </a:fontRef>
+        </p:style>
+        <p:txBody>
+          <a:bodyPr rtlCol="0" anchor="ctr"/>
+          <a:lstStyle/>
+          <a:p>
+            <a:pPr algn="ctr"/>
+          </a:p>
+        </p:txBody>
+      </p:sp>
+      <p:pic>
+        <p:nvPicPr>
+          <p:cNvPr id="4" name="Picture 3" descr="11_rubric.png"/>
+          <p:cNvPicPr>
+            <a:picLocks noChangeAspect="1"/>
+          </p:cNvPicPr>
+          <p:nvPr/>
+        </p:nvPicPr>
+        <p:blipFill>
+          <a:blip r:embed="rId2"/>
+          <a:stretch>
+            <a:fillRect/>
+          </a:stretch>
+        </p:blipFill>
+        <p:spPr>
+          <a:xfrm>
+            <a:off x="2113127" y="1325880"/>
+            <a:ext cx="7965440" cy="4480560"/>
+          </a:xfrm>
+          <a:prstGeom prst="rect">
+            <a:avLst/>
+          </a:prstGeom>
+        </p:spPr>
+      </p:pic>
+      <p:sp>
+        <p:nvSpPr>
+          <p:cNvPr id="5" name="TextBox 4"/>
+          <p:cNvSpPr txBox="1"/>
+          <p:nvPr/>
+        </p:nvSpPr>
+        <p:spPr>
+          <a:xfrm>
+            <a:off x="685800" y="5916168"/>
+            <a:ext cx="10881360" cy="457200"/>
+          </a:xfrm>
+          <a:prstGeom prst="rect">
+            <a:avLst/>
+          </a:prstGeom>
+          <a:noFill/>
+        </p:spPr>
+        <p:txBody>
+          <a:bodyPr wrap="square">
+            <a:spAutoFit/>
+          </a:bodyPr>
+          <a:lstStyle/>
+          <a:p>
+            <a:pPr algn="l">
+              <a:lnSpc>
+                <a:spcPct val="105000"/>
+              </a:lnSpc>
+              <a:spcAft>
+                <a:spcPts val="600"/>
+              </a:spcAft>
+            </a:pPr>
+            <a:r>
+              <a:rPr sz="1200" b="0">
+                <a:solidFill>
+                  <a:srgbClr val="585868"/>
+                </a:solidFill>
+                <a:latin typeface="Helvetica Neue"/>
+              </a:rPr>
+              <a:t>Every sheet, raw agreement, chance-corrected kappa, and the scoring guide — never merged into one score.</a:t>
+            </a:r>
+          </a:p>
+        </p:txBody>
+      </p:sp>
+      <p:sp>
+        <p:nvSpPr>
+          <p:cNvPr id="6" name="TextBox 5"/>
+          <p:cNvSpPr txBox="1"/>
+          <p:nvPr/>
+        </p:nvSpPr>
+        <p:spPr>
+          <a:xfrm>
+            <a:off x="548640" y="6400800"/>
+            <a:ext cx="8229600" cy="274320"/>
+          </a:xfrm>
+          <a:prstGeom prst="rect">
+            <a:avLst/>
+          </a:prstGeom>
+          <a:noFill/>
+        </p:spPr>
+        <p:txBody>
+          <a:bodyPr wrap="square">
+            <a:spAutoFit/>
+          </a:bodyPr>
+          <a:lstStyle/>
+          <a:p>
+            <a:pPr algn="l">
+              <a:lnSpc>
+                <a:spcPct val="105000"/>
+              </a:lnSpc>
+              <a:spcAft>
+                <a:spcPts val="600"/>
+              </a:spcAft>
+            </a:pPr>
+            <a:r>
+              <a:rPr sz="1000" b="0">
+                <a:solidFill>
+                  <a:srgbClr val="585868"/>
+                </a:solidFill>
+                <a:latin typeface="Helvetica Neue"/>
+              </a:rPr>
+              <a:t>Banking Campaigns Comparator · ING DACI / Customer AI · September 2026</a:t>
+            </a:r>
+          </a:p>
+        </p:txBody>
+      </p:sp>
+      <p:sp>
+        <p:nvSpPr>
+          <p:cNvPr id="7" name="TextBox 6"/>
+          <p:cNvSpPr txBox="1"/>
+          <p:nvPr/>
+        </p:nvSpPr>
+        <p:spPr>
+          <a:xfrm>
+            <a:off x="11094415" y="6400800"/>
+            <a:ext cx="548640" cy="274320"/>
+          </a:xfrm>
+          <a:prstGeom prst="rect">
+            <a:avLst/>
+          </a:prstGeom>
+          <a:noFill/>
+        </p:spPr>
+        <p:txBody>
+          <a:bodyPr wrap="square">
+            <a:spAutoFit/>
+          </a:bodyPr>
+          <a:lstStyle/>
+          <a:p>
+            <a:pPr algn="r">
+              <a:lnSpc>
+                <a:spcPct val="105000"/>
+              </a:lnSpc>
+              <a:spcAft>
+                <a:spcPts val="600"/>
+              </a:spcAft>
+            </a:pPr>
+            <a:r>
+              <a:rPr sz="1000" b="0">
+                <a:solidFill>
+                  <a:srgbClr val="585868"/>
+                </a:solidFill>
+                <a:latin typeface="Helvetica Neue"/>
+              </a:rPr>
+              <a:t>26</a:t>
+            </a:r>
+          </a:p>
+        </p:txBody>
+      </p:sp>
+    </p:spTree>
+  </p:cSld>
+  <p:clrMapOvr>
+    <a:masterClrMapping/>
+  </p:clrMapOvr>
+</p:sld>
+</file>
+
+<file path=ppt/slides/slide27.xml><?xml version="1.0" encoding="utf-8"?>
+<p:sld xmlns:a="http://schemas.openxmlformats.org/drawingml/2006/main" xmlns:p="http://schemas.openxmlformats.org/presentationml/2006/main" xmlns:r="http://schemas.openxmlformats.org/officeDocument/2006/relationships">
+  <p:cSld>
+    <p:spTree>
+      <p:nvGrpSpPr>
+        <p:cNvPr id="1" name=""/>
+        <p:cNvGrpSpPr/>
+        <p:nvPr/>
+      </p:nvGrpSpPr>
+      <p:grpSpPr/>
+      <p:sp>
+        <p:nvSpPr>
+          <p:cNvPr id="2" name="TextBox 1"/>
+          <p:cNvSpPr txBox="1"/>
+          <p:nvPr/>
+        </p:nvSpPr>
+        <p:spPr>
+          <a:xfrm>
+            <a:off x="548640" y="320040"/>
+            <a:ext cx="11064240" cy="640080"/>
+          </a:xfrm>
+          <a:prstGeom prst="rect">
+            <a:avLst/>
+          </a:prstGeom>
+          <a:noFill/>
+        </p:spPr>
+        <p:txBody>
+          <a:bodyPr wrap="square">
+            <a:spAutoFit/>
+          </a:bodyPr>
+          <a:lstStyle/>
+          <a:p>
+            <a:pPr algn="l">
+              <a:lnSpc>
+                <a:spcPct val="105000"/>
+              </a:lnSpc>
+              <a:spcAft>
+                <a:spcPts val="600"/>
+              </a:spcAft>
+            </a:pPr>
+            <a:r>
+              <a:rPr sz="2400" b="1">
+                <a:solidFill>
+                  <a:srgbClr val="14141C"/>
+                </a:solidFill>
+                <a:latin typeface="Helvetica Neue"/>
+              </a:rPr>
+              <a:t>Collection: status, provenance and the pipeline</a:t>
+            </a:r>
+          </a:p>
+        </p:txBody>
+      </p:sp>
+      <p:sp>
+        <p:nvSpPr>
+          <p:cNvPr id="3" name="Rectangle 2"/>
+          <p:cNvSpPr/>
+          <p:nvPr/>
+        </p:nvSpPr>
+        <p:spPr>
+          <a:xfrm>
+            <a:off x="548640" y="960120"/>
+            <a:ext cx="1463040" cy="54864"/>
+          </a:xfrm>
+          <a:prstGeom prst="rect">
+            <a:avLst/>
+          </a:prstGeom>
+          <a:solidFill>
+            <a:srgbClr val="FF6200"/>
+          </a:solidFill>
+          <a:ln>
+            <a:noFill/>
+          </a:ln>
+          <a:effectLst/>
+        </p:spPr>
+        <p:style>
+          <a:lnRef idx="1">
+            <a:schemeClr val="accent1"/>
+          </a:lnRef>
+          <a:fillRef idx="3">
+            <a:schemeClr val="accent1"/>
+          </a:fillRef>
+          <a:effectRef idx="2">
+            <a:schemeClr val="accent1"/>
+          </a:effectRef>
+          <a:fontRef idx="minor">
+            <a:schemeClr val="lt1"/>
+          </a:fontRef>
+        </p:style>
+        <p:txBody>
+          <a:bodyPr rtlCol="0" anchor="ctr"/>
+          <a:lstStyle/>
+          <a:p>
+            <a:pPr algn="ctr"/>
+          </a:p>
+        </p:txBody>
+      </p:sp>
+      <p:pic>
+        <p:nvPicPr>
+          <p:cNvPr id="4" name="Picture 3" descr="12_collection.png"/>
+          <p:cNvPicPr>
+            <a:picLocks noChangeAspect="1"/>
+          </p:cNvPicPr>
+          <p:nvPr/>
+        </p:nvPicPr>
+        <p:blipFill>
+          <a:blip r:embed="rId2"/>
+          <a:stretch>
+            <a:fillRect/>
+          </a:stretch>
+        </p:blipFill>
+        <p:spPr>
+          <a:xfrm>
+            <a:off x="2113127" y="1325880"/>
+            <a:ext cx="7965440" cy="4480560"/>
+          </a:xfrm>
+          <a:prstGeom prst="rect">
+            <a:avLst/>
+          </a:prstGeom>
+        </p:spPr>
+      </p:pic>
+      <p:sp>
+        <p:nvSpPr>
+          <p:cNvPr id="5" name="TextBox 4"/>
+          <p:cNvSpPr txBox="1"/>
+          <p:nvPr/>
+        </p:nvSpPr>
+        <p:spPr>
+          <a:xfrm>
+            <a:off x="685800" y="5916168"/>
+            <a:ext cx="10881360" cy="457200"/>
+          </a:xfrm>
+          <a:prstGeom prst="rect">
+            <a:avLst/>
+          </a:prstGeom>
+          <a:noFill/>
+        </p:spPr>
+        <p:txBody>
+          <a:bodyPr wrap="square">
+            <a:spAutoFit/>
+          </a:bodyPr>
+          <a:lstStyle/>
+          <a:p>
+            <a:pPr algn="l">
+              <a:lnSpc>
+                <a:spcPct val="105000"/>
+              </a:lnSpc>
+              <a:spcAft>
+                <a:spcPts val="600"/>
+              </a:spcAft>
+            </a:pPr>
+            <a:r>
+              <a:rPr sz="1200" b="0">
+                <a:solidFill>
+                  <a:srgbClr val="585868"/>
+                </a:solidFill>
+                <a:latin typeface="Helvetica Neue"/>
+              </a:rPr>
+              <a:t>Counts straight from the export, per-bank status, capture provenance, and the commands that produced it.</a:t>
+            </a:r>
+          </a:p>
+        </p:txBody>
+      </p:sp>
+      <p:sp>
+        <p:nvSpPr>
+          <p:cNvPr id="6" name="TextBox 5"/>
+          <p:cNvSpPr txBox="1"/>
+          <p:nvPr/>
+        </p:nvSpPr>
+        <p:spPr>
+          <a:xfrm>
+            <a:off x="548640" y="6400800"/>
+            <a:ext cx="8229600" cy="274320"/>
+          </a:xfrm>
+          <a:prstGeom prst="rect">
+            <a:avLst/>
+          </a:prstGeom>
+          <a:noFill/>
+        </p:spPr>
+        <p:txBody>
+          <a:bodyPr wrap="square">
+            <a:spAutoFit/>
+          </a:bodyPr>
+          <a:lstStyle/>
+          <a:p>
+            <a:pPr algn="l">
+              <a:lnSpc>
+                <a:spcPct val="105000"/>
+              </a:lnSpc>
+              <a:spcAft>
+                <a:spcPts val="600"/>
+              </a:spcAft>
+            </a:pPr>
+            <a:r>
+              <a:rPr sz="1000" b="0">
+                <a:solidFill>
+                  <a:srgbClr val="585868"/>
+                </a:solidFill>
+                <a:latin typeface="Helvetica Neue"/>
+              </a:rPr>
+              <a:t>Banking Campaigns Comparator · ING DACI / Customer AI · September 2026</a:t>
+            </a:r>
+          </a:p>
+        </p:txBody>
+      </p:sp>
+      <p:sp>
+        <p:nvSpPr>
+          <p:cNvPr id="7" name="TextBox 6"/>
+          <p:cNvSpPr txBox="1"/>
+          <p:nvPr/>
+        </p:nvSpPr>
+        <p:spPr>
+          <a:xfrm>
+            <a:off x="11094415" y="6400800"/>
+            <a:ext cx="548640" cy="274320"/>
+          </a:xfrm>
+          <a:prstGeom prst="rect">
+            <a:avLst/>
+          </a:prstGeom>
+          <a:noFill/>
+        </p:spPr>
+        <p:txBody>
+          <a:bodyPr wrap="square">
+            <a:spAutoFit/>
+          </a:bodyPr>
+          <a:lstStyle/>
+          <a:p>
+            <a:pPr algn="r">
+              <a:lnSpc>
+                <a:spcPct val="105000"/>
+              </a:lnSpc>
+              <a:spcAft>
+                <a:spcPts val="600"/>
+              </a:spcAft>
+            </a:pPr>
+            <a:r>
+              <a:rPr sz="1000" b="0">
+                <a:solidFill>
+                  <a:srgbClr val="585868"/>
+                </a:solidFill>
+                <a:latin typeface="Helvetica Neue"/>
+              </a:rPr>
+              <a:t>27</a:t>
+            </a:r>
+          </a:p>
+        </p:txBody>
+      </p:sp>
+    </p:spTree>
+  </p:cSld>
+  <p:clrMapOvr>
+    <a:masterClrMapping/>
+  </p:clrMapOvr>
+</p:sld>
+</file>
+
+<file path=ppt/slides/slide28.xml><?xml version="1.0" encoding="utf-8"?>
+<p:sld xmlns:a="http://schemas.openxmlformats.org/drawingml/2006/main" xmlns:p="http://schemas.openxmlformats.org/presentationml/2006/main" xmlns:r="http://schemas.openxmlformats.org/officeDocument/2006/relationships">
+  <p:cSld>
+    <p:spTree>
+      <p:nvGrpSpPr>
+        <p:cNvPr id="1" name=""/>
+        <p:cNvGrpSpPr/>
+        <p:nvPr/>
+      </p:nvGrpSpPr>
+      <p:grpSpPr/>
+      <p:sp>
+        <p:nvSpPr>
+          <p:cNvPr id="2" name="TextBox 1"/>
+          <p:cNvSpPr txBox="1"/>
+          <p:nvPr/>
+        </p:nvSpPr>
+        <p:spPr>
+          <a:xfrm>
+            <a:off x="548640" y="320040"/>
+            <a:ext cx="11064240" cy="640080"/>
+          </a:xfrm>
+          <a:prstGeom prst="rect">
+            <a:avLst/>
+          </a:prstGeom>
+          <a:noFill/>
+        </p:spPr>
+        <p:txBody>
+          <a:bodyPr wrap="square">
+            <a:spAutoFit/>
+          </a:bodyPr>
+          <a:lstStyle/>
+          <a:p>
+            <a:pPr algn="l">
+              <a:lnSpc>
+                <a:spcPct val="105000"/>
+              </a:lnSpc>
+              <a:spcAft>
+                <a:spcPts val="600"/>
+              </a:spcAft>
+            </a:pPr>
+            <a:r>
+              <a:rPr sz="2400" b="1">
+                <a:solidFill>
+                  <a:srgbClr val="14141C"/>
+                </a:solidFill>
+                <a:latin typeface="Helvetica Neue"/>
+              </a:rPr>
+              <a:t>Research: sourcing a claim</a:t>
+            </a:r>
+          </a:p>
+        </p:txBody>
+      </p:sp>
+      <p:sp>
+        <p:nvSpPr>
+          <p:cNvPr id="3" name="Rectangle 2"/>
+          <p:cNvSpPr/>
+          <p:nvPr/>
+        </p:nvSpPr>
+        <p:spPr>
+          <a:xfrm>
+            <a:off x="548640" y="960120"/>
+            <a:ext cx="1463040" cy="54864"/>
+          </a:xfrm>
+          <a:prstGeom prst="rect">
+            <a:avLst/>
+          </a:prstGeom>
+          <a:solidFill>
+            <a:srgbClr val="FF6200"/>
+          </a:solidFill>
+          <a:ln>
+            <a:noFill/>
+          </a:ln>
+          <a:effectLst/>
+        </p:spPr>
+        <p:style>
+          <a:lnRef idx="1">
+            <a:schemeClr val="accent1"/>
+          </a:lnRef>
+          <a:fillRef idx="3">
+            <a:schemeClr val="accent1"/>
+          </a:fillRef>
+          <a:effectRef idx="2">
+            <a:schemeClr val="accent1"/>
+          </a:effectRef>
+          <a:fontRef idx="minor">
+            <a:schemeClr val="lt1"/>
+          </a:fontRef>
+        </p:style>
+        <p:txBody>
+          <a:bodyPr rtlCol="0" anchor="ctr"/>
+          <a:lstStyle/>
+          <a:p>
+            <a:pPr algn="ctr"/>
+          </a:p>
+        </p:txBody>
+      </p:sp>
+      <p:pic>
+        <p:nvPicPr>
+          <p:cNvPr id="4" name="Picture 3" descr="13_research.png"/>
+          <p:cNvPicPr>
+            <a:picLocks noChangeAspect="1"/>
+          </p:cNvPicPr>
+          <p:nvPr/>
+        </p:nvPicPr>
+        <p:blipFill>
+          <a:blip r:embed="rId2"/>
+          <a:stretch>
+            <a:fillRect/>
+          </a:stretch>
+        </p:blipFill>
+        <p:spPr>
+          <a:xfrm>
+            <a:off x="2113127" y="1325880"/>
+            <a:ext cx="7965440" cy="4480560"/>
+          </a:xfrm>
+          <a:prstGeom prst="rect">
+            <a:avLst/>
+          </a:prstGeom>
+        </p:spPr>
+      </p:pic>
+      <p:sp>
+        <p:nvSpPr>
+          <p:cNvPr id="5" name="TextBox 4"/>
+          <p:cNvSpPr txBox="1"/>
+          <p:nvPr/>
+        </p:nvSpPr>
+        <p:spPr>
+          <a:xfrm>
+            <a:off x="685800" y="5916168"/>
+            <a:ext cx="10881360" cy="457200"/>
+          </a:xfrm>
+          <a:prstGeom prst="rect">
+            <a:avLst/>
+          </a:prstGeom>
+          <a:noFill/>
+        </p:spPr>
+        <p:txBody>
+          <a:bodyPr wrap="square">
+            <a:spAutoFit/>
+          </a:bodyPr>
+          <a:lstStyle/>
+          <a:p>
+            <a:pPr algn="l">
+              <a:lnSpc>
+                <a:spcPct val="105000"/>
+              </a:lnSpc>
+              <a:spcAft>
+                <a:spcPts val="600"/>
+              </a:spcAft>
+            </a:pPr>
+            <a:r>
+              <a:rPr sz="1200" b="0">
+                <a:solidFill>
+                  <a:srgbClr val="585868"/>
+                </a:solidFill>
+                <a:latin typeface="Helvetica Neue"/>
+              </a:rPr>
+              <a:t>Semantic Scholar, on demand. Empty is reported as empty — a rate limit must not read as 'no evidence'.</a:t>
+            </a:r>
+          </a:p>
+        </p:txBody>
+      </p:sp>
+      <p:sp>
+        <p:nvSpPr>
+          <p:cNvPr id="6" name="TextBox 5"/>
+          <p:cNvSpPr txBox="1"/>
+          <p:nvPr/>
+        </p:nvSpPr>
+        <p:spPr>
+          <a:xfrm>
+            <a:off x="548640" y="6400800"/>
+            <a:ext cx="8229600" cy="274320"/>
+          </a:xfrm>
+          <a:prstGeom prst="rect">
+            <a:avLst/>
+          </a:prstGeom>
+          <a:noFill/>
+        </p:spPr>
+        <p:txBody>
+          <a:bodyPr wrap="square">
+            <a:spAutoFit/>
+          </a:bodyPr>
+          <a:lstStyle/>
+          <a:p>
+            <a:pPr algn="l">
+              <a:lnSpc>
+                <a:spcPct val="105000"/>
+              </a:lnSpc>
+              <a:spcAft>
+                <a:spcPts val="600"/>
+              </a:spcAft>
+            </a:pPr>
+            <a:r>
+              <a:rPr sz="1000" b="0">
+                <a:solidFill>
+                  <a:srgbClr val="585868"/>
+                </a:solidFill>
+                <a:latin typeface="Helvetica Neue"/>
+              </a:rPr>
+              <a:t>Banking Campaigns Comparator · ING DACI / Customer AI · September 2026</a:t>
+            </a:r>
+          </a:p>
+        </p:txBody>
+      </p:sp>
+      <p:sp>
+        <p:nvSpPr>
+          <p:cNvPr id="7" name="TextBox 6"/>
+          <p:cNvSpPr txBox="1"/>
+          <p:nvPr/>
+        </p:nvSpPr>
+        <p:spPr>
+          <a:xfrm>
+            <a:off x="11094415" y="6400800"/>
+            <a:ext cx="548640" cy="274320"/>
+          </a:xfrm>
+          <a:prstGeom prst="rect">
+            <a:avLst/>
+          </a:prstGeom>
+          <a:noFill/>
+        </p:spPr>
+        <p:txBody>
+          <a:bodyPr wrap="square">
+            <a:spAutoFit/>
+          </a:bodyPr>
+          <a:lstStyle/>
+          <a:p>
+            <a:pPr algn="r">
+              <a:lnSpc>
+                <a:spcPct val="105000"/>
+              </a:lnSpc>
+              <a:spcAft>
+                <a:spcPts val="600"/>
+              </a:spcAft>
+            </a:pPr>
+            <a:r>
+              <a:rPr sz="1000" b="0">
+                <a:solidFill>
+                  <a:srgbClr val="585868"/>
+                </a:solidFill>
+                <a:latin typeface="Helvetica Neue"/>
+              </a:rPr>
+              <a:t>28</a:t>
+            </a:r>
+          </a:p>
+        </p:txBody>
+      </p:sp>
+    </p:spTree>
+  </p:cSld>
+  <p:clrMapOvr>
+    <a:masterClrMapping/>
+  </p:clrMapOvr>
+</p:sld>
+</file>
+
+<file path=ppt/slides/slide29.xml><?xml version="1.0" encoding="utf-8"?>
+<p:sld xmlns:a="http://schemas.openxmlformats.org/drawingml/2006/main" xmlns:p="http://schemas.openxmlformats.org/presentationml/2006/main" xmlns:r="http://schemas.openxmlformats.org/officeDocument/2006/relationships">
+  <p:cSld>
+    <p:spTree>
+      <p:nvGrpSpPr>
+        <p:cNvPr id="1" name=""/>
+        <p:cNvGrpSpPr/>
+        <p:nvPr/>
+      </p:nvGrpSpPr>
+      <p:grpSpPr/>
+      <p:sp>
+        <p:nvSpPr>
+          <p:cNvPr id="2" name="TextBox 1"/>
+          <p:cNvSpPr txBox="1"/>
+          <p:nvPr/>
+        </p:nvSpPr>
+        <p:spPr>
+          <a:xfrm>
+            <a:off x="548640" y="384048"/>
+            <a:ext cx="11064240" cy="731520"/>
+          </a:xfrm>
+          <a:prstGeom prst="rect">
+            <a:avLst/>
+          </a:prstGeom>
+          <a:noFill/>
+        </p:spPr>
+        <p:txBody>
+          <a:bodyPr wrap="square">
+            <a:spAutoFit/>
+          </a:bodyPr>
+          <a:lstStyle/>
+          <a:p>
+            <a:pPr algn="l">
+              <a:lnSpc>
+                <a:spcPct val="105000"/>
+              </a:lnSpc>
+              <a:spcAft>
+                <a:spcPts val="600"/>
+              </a:spcAft>
+            </a:pPr>
+            <a:r>
+              <a:rPr sz="2800" b="1">
+                <a:solidFill>
+                  <a:srgbClr val="14141C"/>
+                </a:solidFill>
+                <a:latin typeface="Helvetica Neue"/>
+              </a:rPr>
+              <a:t>What this cannot support</a:t>
+            </a:r>
+          </a:p>
+        </p:txBody>
+      </p:sp>
+      <p:sp>
+        <p:nvSpPr>
+          <p:cNvPr id="3" name="Rectangle 2"/>
+          <p:cNvSpPr/>
+          <p:nvPr/>
+        </p:nvSpPr>
+        <p:spPr>
+          <a:xfrm>
+            <a:off x="548640" y="1115568"/>
+            <a:ext cx="1463040" cy="64008"/>
+          </a:xfrm>
+          <a:prstGeom prst="rect">
+            <a:avLst/>
+          </a:prstGeom>
+          <a:solidFill>
+            <a:srgbClr val="FF6200"/>
+          </a:solidFill>
+          <a:ln>
+            <a:noFill/>
+          </a:ln>
+          <a:effectLst/>
+        </p:spPr>
+        <p:style>
+          <a:lnRef idx="1">
+            <a:schemeClr val="accent1"/>
+          </a:lnRef>
+          <a:fillRef idx="3">
+            <a:schemeClr val="accent1"/>
+          </a:fillRef>
+          <a:effectRef idx="2">
+            <a:schemeClr val="accent1"/>
+          </a:effectRef>
+          <a:fontRef idx="minor">
+            <a:schemeClr val="lt1"/>
+          </a:fontRef>
+        </p:style>
+        <p:txBody>
+          <a:bodyPr rtlCol="0" anchor="ctr"/>
+          <a:lstStyle/>
+          <a:p>
+            <a:pPr algn="ctr"/>
+          </a:p>
+        </p:txBody>
+      </p:sp>
+      <p:sp>
+        <p:nvSpPr>
+          <p:cNvPr id="4" name="TextBox 3"/>
+          <p:cNvSpPr txBox="1"/>
+          <p:nvPr/>
+        </p:nvSpPr>
+        <p:spPr>
+          <a:xfrm>
+            <a:off x="685800" y="1463040"/>
+            <a:ext cx="10881360" cy="4754880"/>
+          </a:xfrm>
+          <a:prstGeom prst="rect">
+            <a:avLst/>
+          </a:prstGeom>
+          <a:noFill/>
+        </p:spPr>
+        <p:txBody>
+          <a:bodyPr wrap="square">
+            <a:spAutoFit/>
+          </a:bodyPr>
+          <a:lstStyle/>
+          <a:p>
+            <a:pPr algn="l">
+              <a:lnSpc>
+                <a:spcPct val="105000"/>
+              </a:lnSpc>
+              <a:spcAft>
+                <a:spcPts val="200"/>
+              </a:spcAft>
+            </a:pPr>
+            <a:r>
+              <a:rPr sz="1500" b="1">
+                <a:solidFill>
+                  <a:srgbClr val="14141C"/>
+                </a:solidFill>
+                <a:latin typeface="Helvetica Neue"/>
+              </a:rPr>
+              <a:t>•  No performance data exists here</a:t>
+            </a:r>
+          </a:p>
+          <a:p>
+            <a:pPr algn="l">
+              <a:lnSpc>
+                <a:spcPct val="105000"/>
+              </a:lnSpc>
+              <a:spcAft>
+                <a:spcPts val="1000"/>
+              </a:spcAft>
+            </a:pPr>
+            <a:r>
+              <a:rPr sz="1300" b="0">
+                <a:solidFill>
+                  <a:srgbClr val="585868"/>
+                </a:solidFill>
+                <a:latin typeface="Helvetica Neue"/>
+              </a:rPr>
+              <a:t>     Nothing links a design choice to a click, a conversion or a sale. Every recommendation is a hypothesis ING could test.</a:t>
+            </a:r>
+          </a:p>
+          <a:p>
+            <a:pPr algn="l">
+              <a:lnSpc>
+                <a:spcPct val="105000"/>
+              </a:lnSpc>
+              <a:spcAft>
+                <a:spcPts val="200"/>
+              </a:spcAft>
+            </a:pPr>
+            <a:r>
+              <a:rPr sz="1500" b="1">
+                <a:solidFill>
+                  <a:srgbClr val="14141C"/>
+                </a:solidFill>
+                <a:latin typeface="Helvetica Neue"/>
+              </a:rPr>
+              <a:t>•  Small groups, by design</a:t>
+            </a:r>
+          </a:p>
+          <a:p>
+            <a:pPr algn="l">
+              <a:lnSpc>
+                <a:spcPct val="105000"/>
+              </a:lnSpc>
+              <a:spcAft>
+                <a:spcPts val="1000"/>
+              </a:spcAft>
+            </a:pPr>
+            <a:r>
+              <a:rPr sz="1300" b="0">
+                <a:solidFill>
+                  <a:srgbClr val="585868"/>
+                </a:solidFill>
+                <a:latin typeface="Helvetica Neue"/>
+              </a:rPr>
+              <a:t>     Four challengers against ten traditional banks, and most banks contribute a single page — so a group mean is an anecdote and an effect size describes separation, not significance.</a:t>
+            </a:r>
+          </a:p>
+          <a:p>
+            <a:pPr algn="l">
+              <a:lnSpc>
+                <a:spcPct val="105000"/>
+              </a:lnSpc>
+              <a:spcAft>
+                <a:spcPts val="200"/>
+              </a:spcAft>
+            </a:pPr>
+            <a:r>
+              <a:rPr sz="1500" b="1">
+                <a:solidFill>
+                  <a:srgbClr val="14141C"/>
+                </a:solidFill>
+                <a:latin typeface="Helvetica Neue"/>
+              </a:rPr>
+              <a:t>•  The judgement features are thinner than they look</a:t>
+            </a:r>
+          </a:p>
+          <a:p>
+            <a:pPr algn="l">
+              <a:lnSpc>
+                <a:spcPct val="105000"/>
+              </a:lnSpc>
+              <a:spcAft>
+                <a:spcPts val="1000"/>
+              </a:spcAft>
+            </a:pPr>
+            <a:r>
+              <a:rPr sz="1300" b="0">
+                <a:solidFill>
+                  <a:srgbClr val="585868"/>
+                </a:solidFill>
+                <a:latin typeface="Helvetica Neue"/>
+              </a:rPr>
+              <a:t>     Two humans overlap on only 11 pages, Stephane's 9 were machine-proposed and adopted, and six of the thirteen features sit below the agreement bar — so a finding resting on persuasion levers or accent placement is a hypothesis.</a:t>
+            </a:r>
+          </a:p>
+          <a:p>
+            <a:pPr algn="l">
+              <a:lnSpc>
+                <a:spcPct val="105000"/>
+              </a:lnSpc>
+              <a:spcAft>
+                <a:spcPts val="200"/>
+              </a:spcAft>
+            </a:pPr>
+            <a:r>
+              <a:rPr sz="1500" b="1">
+                <a:solidFill>
+                  <a:srgbClr val="14141C"/>
+                </a:solidFill>
+                <a:latin typeface="Helvetica Neue"/>
+              </a:rPr>
+              <a:t>•  Search interest is context, and covers part of the market</a:t>
+            </a:r>
+          </a:p>
+          <a:p>
+            <a:pPr algn="l">
+              <a:lnSpc>
+                <a:spcPct val="105000"/>
+              </a:lnSpc>
+              <a:spcAft>
+                <a:spcPts val="1000"/>
+              </a:spcAft>
+            </a:pPr>
+            <a:r>
+              <a:rPr sz="1300" b="0">
+                <a:solidFill>
+                  <a:srgbClr val="585868"/>
+                </a:solidFill>
+                <a:latin typeface="Helvetica Neue"/>
+              </a:rPr>
+              <a:t>     It measures what people searched for, not what a campaign achieved, and the pages captured are today's pages.</a:t>
+            </a:r>
+          </a:p>
+          <a:p>
+            <a:pPr algn="l">
+              <a:lnSpc>
+                <a:spcPct val="105000"/>
+              </a:lnSpc>
+              <a:spcAft>
+                <a:spcPts val="200"/>
+              </a:spcAft>
+            </a:pPr>
+            <a:r>
+              <a:rPr sz="1500" b="1">
+                <a:solidFill>
+                  <a:srgbClr val="14141C"/>
+                </a:solidFill>
+                <a:latin typeface="Helvetica Neue"/>
+              </a:rPr>
+              <a:t>•  Only the open web is covered</a:t>
+            </a:r>
+          </a:p>
+          <a:p>
+            <a:pPr algn="l">
+              <a:lnSpc>
+                <a:spcPct val="105000"/>
+              </a:lnSpc>
+              <a:spcAft>
+                <a:spcPts val="1000"/>
+              </a:spcAft>
+            </a:pPr>
+            <a:r>
+              <a:rPr sz="1300" b="0">
+                <a:solidFill>
+                  <a:srgbClr val="585868"/>
+                </a:solidFill>
+                <a:latin typeface="Helvetica Neue"/>
+              </a:rPr>
+              <a:t>     Social, in-app and email banners are out of scope — and may be where a bank's real communication happens.</a:t>
+            </a:r>
+          </a:p>
+          <a:p>
+            <a:pPr algn="l">
+              <a:lnSpc>
+                <a:spcPct val="105000"/>
+              </a:lnSpc>
+              <a:spcAft>
+                <a:spcPts val="200"/>
+              </a:spcAft>
+            </a:pPr>
+            <a:r>
+              <a:rPr sz="600" b="0">
+                <a:solidFill>
+                  <a:srgbClr val="14141C"/>
+                </a:solidFill>
+                <a:latin typeface="Helvetica Neue"/>
+              </a:rPr>
+              <a:t/>
+            </a:r>
+          </a:p>
+          <a:p>
+            <a:pPr algn="l">
+              <a:lnSpc>
+                <a:spcPct val="105000"/>
+              </a:lnSpc>
+              <a:spcAft>
+                <a:spcPts val="0"/>
+              </a:spcAft>
+            </a:pPr>
+            <a:r>
+              <a:rPr sz="1250" b="0">
+                <a:solidFill>
+                  <a:srgbClr val="585868"/>
+                </a:solidFill>
+                <a:latin typeface="Helvetica Neue"/>
+              </a:rPr>
+              <a:t>outputs/limitations.md is regenerated from the dataset on every run, so these cannot quietly go stale.</a:t>
+            </a:r>
+          </a:p>
+        </p:txBody>
+      </p:sp>
+      <p:sp>
+        <p:nvSpPr>
+          <p:cNvPr id="5" name="TextBox 4"/>
+          <p:cNvSpPr txBox="1"/>
+          <p:nvPr/>
+        </p:nvSpPr>
+        <p:spPr>
+          <a:xfrm>
+            <a:off x="548640" y="6400800"/>
+            <a:ext cx="8229600" cy="274320"/>
+          </a:xfrm>
+          <a:prstGeom prst="rect">
+            <a:avLst/>
+          </a:prstGeom>
+          <a:noFill/>
+        </p:spPr>
+        <p:txBody>
+          <a:bodyPr wrap="square">
+            <a:spAutoFit/>
+          </a:bodyPr>
+          <a:lstStyle/>
+          <a:p>
+            <a:pPr algn="l">
+              <a:lnSpc>
+                <a:spcPct val="105000"/>
+              </a:lnSpc>
+              <a:spcAft>
+                <a:spcPts val="600"/>
+              </a:spcAft>
+            </a:pPr>
+            <a:r>
+              <a:rPr sz="1000" b="0">
+                <a:solidFill>
+                  <a:srgbClr val="585868"/>
+                </a:solidFill>
+                <a:latin typeface="Helvetica Neue"/>
+              </a:rPr>
+              <a:t>Banking Campaigns Comparator · ING DACI / Customer AI · September 2026</a:t>
+            </a:r>
+          </a:p>
+        </p:txBody>
+      </p:sp>
+      <p:sp>
+        <p:nvSpPr>
+          <p:cNvPr id="6" name="TextBox 5"/>
+          <p:cNvSpPr txBox="1"/>
+          <p:nvPr/>
+        </p:nvSpPr>
+        <p:spPr>
+          <a:xfrm>
+            <a:off x="11094415" y="6400800"/>
+            <a:ext cx="548640" cy="274320"/>
+          </a:xfrm>
+          <a:prstGeom prst="rect">
+            <a:avLst/>
+          </a:prstGeom>
+          <a:noFill/>
+        </p:spPr>
+        <p:txBody>
+          <a:bodyPr wrap="square">
+            <a:spAutoFit/>
+          </a:bodyPr>
+          <a:lstStyle/>
+          <a:p>
+            <a:pPr algn="r">
+              <a:lnSpc>
+                <a:spcPct val="105000"/>
+              </a:lnSpc>
+              <a:spcAft>
+                <a:spcPts val="600"/>
+              </a:spcAft>
+            </a:pPr>
+            <a:r>
+              <a:rPr sz="1000" b="0">
+                <a:solidFill>
+                  <a:srgbClr val="585868"/>
+                </a:solidFill>
+                <a:latin typeface="Helvetica Neue"/>
+              </a:rPr>
+              <a:t>29</a:t>
             </a:r>
           </a:p>
         </p:txBody>
@@ -8485,7 +9883,7 @@
                 </a:solidFill>
                 <a:latin typeface="Helvetica Neue"/>
               </a:rPr>
-              <a:t>•  A measurement pipeline: 11 banks, 13 current-account pages, 104 declared features, one frozen contract.</a:t>
+              <a:t>•  A measurement pipeline: 14 banks, 16 current-account pages, 104 declared features, one frozen contract.</a:t>
             </a:r>
           </a:p>
           <a:p>
@@ -8542,7 +9940,7 @@
                 </a:solidFill>
                 <a:latin typeface="Helvetica Neue"/>
               </a:rPr>
-              <a:t>•  Two business surfaces: a React web UI (Analysis, Trends, Reputation, Recommendations) and a Streamlit dashboard.</a:t>
+              <a:t>•  One web UI with ten tabs: four business views (Analysis, Trends, Reputation, Recommendations), the generated-site builder, and six read-only operator views carried over from the Streamlit dashboard.</a:t>
             </a:r>
           </a:p>
           <a:p>
@@ -8703,6 +10101,616 @@
                 <a:latin typeface="Helvetica Neue"/>
               </a:rPr>
               <a:t>3</a:t>
+            </a:r>
+          </a:p>
+        </p:txBody>
+      </p:sp>
+    </p:spTree>
+  </p:cSld>
+  <p:clrMapOvr>
+    <a:masterClrMapping/>
+  </p:clrMapOvr>
+</p:sld>
+</file>
+
+<file path=ppt/slides/slide30.xml><?xml version="1.0" encoding="utf-8"?>
+<p:sld xmlns:a="http://schemas.openxmlformats.org/drawingml/2006/main" xmlns:p="http://schemas.openxmlformats.org/presentationml/2006/main" xmlns:r="http://schemas.openxmlformats.org/officeDocument/2006/relationships">
+  <p:cSld>
+    <p:spTree>
+      <p:nvGrpSpPr>
+        <p:cNvPr id="1" name=""/>
+        <p:cNvGrpSpPr/>
+        <p:nvPr/>
+      </p:nvGrpSpPr>
+      <p:grpSpPr/>
+      <p:sp>
+        <p:nvSpPr>
+          <p:cNvPr id="2" name="TextBox 1"/>
+          <p:cNvSpPr txBox="1"/>
+          <p:nvPr/>
+        </p:nvSpPr>
+        <p:spPr>
+          <a:xfrm>
+            <a:off x="548640" y="384048"/>
+            <a:ext cx="11064240" cy="731520"/>
+          </a:xfrm>
+          <a:prstGeom prst="rect">
+            <a:avLst/>
+          </a:prstGeom>
+          <a:noFill/>
+        </p:spPr>
+        <p:txBody>
+          <a:bodyPr wrap="square">
+            <a:spAutoFit/>
+          </a:bodyPr>
+          <a:lstStyle/>
+          <a:p>
+            <a:pPr algn="l">
+              <a:lnSpc>
+                <a:spcPct val="105000"/>
+              </a:lnSpc>
+              <a:spcAft>
+                <a:spcPts val="600"/>
+              </a:spcAft>
+            </a:pPr>
+            <a:r>
+              <a:rPr sz="2800" b="1">
+                <a:solidFill>
+                  <a:srgbClr val="14141C"/>
+                </a:solidFill>
+                <a:latin typeface="Helvetica Neue"/>
+              </a:rPr>
+              <a:t>Roadmap</a:t>
+            </a:r>
+          </a:p>
+        </p:txBody>
+      </p:sp>
+      <p:sp>
+        <p:nvSpPr>
+          <p:cNvPr id="3" name="Rectangle 2"/>
+          <p:cNvSpPr/>
+          <p:nvPr/>
+        </p:nvSpPr>
+        <p:spPr>
+          <a:xfrm>
+            <a:off x="548640" y="1115568"/>
+            <a:ext cx="1463040" cy="64008"/>
+          </a:xfrm>
+          <a:prstGeom prst="rect">
+            <a:avLst/>
+          </a:prstGeom>
+          <a:solidFill>
+            <a:srgbClr val="FF6200"/>
+          </a:solidFill>
+          <a:ln>
+            <a:noFill/>
+          </a:ln>
+          <a:effectLst/>
+        </p:spPr>
+        <p:style>
+          <a:lnRef idx="1">
+            <a:schemeClr val="accent1"/>
+          </a:lnRef>
+          <a:fillRef idx="3">
+            <a:schemeClr val="accent1"/>
+          </a:fillRef>
+          <a:effectRef idx="2">
+            <a:schemeClr val="accent1"/>
+          </a:effectRef>
+          <a:fontRef idx="minor">
+            <a:schemeClr val="lt1"/>
+          </a:fontRef>
+        </p:style>
+        <p:txBody>
+          <a:bodyPr rtlCol="0" anchor="ctr"/>
+          <a:lstStyle/>
+          <a:p>
+            <a:pPr algn="ctr"/>
+          </a:p>
+        </p:txBody>
+      </p:sp>
+      <p:sp>
+        <p:nvSpPr>
+          <p:cNvPr id="4" name="TextBox 3"/>
+          <p:cNvSpPr txBox="1"/>
+          <p:nvPr/>
+        </p:nvSpPr>
+        <p:spPr>
+          <a:xfrm>
+            <a:off x="685800" y="1463040"/>
+            <a:ext cx="10881360" cy="4754880"/>
+          </a:xfrm>
+          <a:prstGeom prst="rect">
+            <a:avLst/>
+          </a:prstGeom>
+          <a:noFill/>
+        </p:spPr>
+        <p:txBody>
+          <a:bodyPr wrap="square">
+            <a:spAutoFit/>
+          </a:bodyPr>
+          <a:lstStyle/>
+          <a:p>
+            <a:pPr algn="l">
+              <a:lnSpc>
+                <a:spcPct val="105000"/>
+              </a:lnSpc>
+              <a:spcAft>
+                <a:spcPts val="200"/>
+              </a:spcAft>
+            </a:pPr>
+            <a:r>
+              <a:rPr sz="1500" b="1">
+                <a:solidFill>
+                  <a:srgbClr val="14141C"/>
+                </a:solidFill>
+                <a:latin typeface="Helvetica Neue"/>
+              </a:rPr>
+              <a:t>•  1. Turn the rubric into a number you can quote</a:t>
+            </a:r>
+          </a:p>
+          <a:p>
+            <a:pPr algn="l">
+              <a:lnSpc>
+                <a:spcPct val="105000"/>
+              </a:lnSpc>
+              <a:spcAft>
+                <a:spcPts val="1000"/>
+              </a:spcAft>
+            </a:pPr>
+            <a:r>
+              <a:rPr sz="1300" b="0">
+                <a:solidFill>
+                  <a:srgbClr val="585868"/>
+                </a:solidFill>
+                <a:latin typeface="Helvetica Neue"/>
+              </a:rPr>
+              <a:t>     Two humans now overlap on 11 pages; extend that to every bank in scope, and tighten the wording for the six features below the 60% bar before any judged feature carries a finding.</a:t>
+            </a:r>
+          </a:p>
+          <a:p>
+            <a:pPr algn="l">
+              <a:lnSpc>
+                <a:spcPct val="105000"/>
+              </a:lnSpc>
+              <a:spcAft>
+                <a:spcPts val="200"/>
+              </a:spcAft>
+            </a:pPr>
+            <a:r>
+              <a:rPr sz="1500" b="1">
+                <a:solidFill>
+                  <a:srgbClr val="14141C"/>
+                </a:solidFill>
+                <a:latin typeface="Helvetica Neue"/>
+              </a:rPr>
+              <a:t>•  2. Score the six new banks</a:t>
+            </a:r>
+          </a:p>
+          <a:p>
+            <a:pPr algn="l">
+              <a:lnSpc>
+                <a:spcPct val="105000"/>
+              </a:lnSpc>
+              <a:spcAft>
+                <a:spcPts val="1000"/>
+              </a:spcAft>
+            </a:pPr>
+            <a:r>
+              <a:rPr sz="1300" b="0">
+                <a:solidFill>
+                  <a:srgbClr val="585868"/>
+                </a:solidFill>
+                <a:latin typeface="Helvetica Neue"/>
+              </a:rPr>
+              <a:t>     CBC, Keytrade, BNP's pages and the restored Belfius and Revolut need rubric sheets, so every bank in the comparison carries a judged layer rather than blanks.</a:t>
+            </a:r>
+          </a:p>
+          <a:p>
+            <a:pPr algn="l">
+              <a:lnSpc>
+                <a:spcPct val="105000"/>
+              </a:lnSpc>
+              <a:spcAft>
+                <a:spcPts val="200"/>
+              </a:spcAft>
+            </a:pPr>
+            <a:r>
+              <a:rPr sz="1500" b="1">
+                <a:solidFill>
+                  <a:srgbClr val="14141C"/>
+                </a:solidFill>
+                <a:latin typeface="Helvetica Neue"/>
+              </a:rPr>
+              <a:t>•  3. Re-run and re-export</a:t>
+            </a:r>
+          </a:p>
+          <a:p>
+            <a:pPr algn="l">
+              <a:lnSpc>
+                <a:spcPct val="105000"/>
+              </a:lnSpc>
+              <a:spcAft>
+                <a:spcPts val="1000"/>
+              </a:spcAft>
+            </a:pPr>
+            <a:r>
+              <a:rPr sz="1300" b="0">
+                <a:solidFill>
+                  <a:srgbClr val="585868"/>
+                </a:solidFill>
+                <a:latin typeface="Helvetica Neue"/>
+              </a:rPr>
+              <a:t>     rubric_sheet.py merge → run_analysis.py → export_web_report.py, then re-verify the narrative's figures against the new snapshot.</a:t>
+            </a:r>
+          </a:p>
+          <a:p>
+            <a:pPr algn="l">
+              <a:lnSpc>
+                <a:spcPct val="105000"/>
+              </a:lnSpc>
+              <a:spcAft>
+                <a:spcPts val="200"/>
+              </a:spcAft>
+            </a:pPr>
+            <a:r>
+              <a:rPr sz="1500" b="1">
+                <a:solidFill>
+                  <a:srgbClr val="14141C"/>
+                </a:solidFill>
+                <a:latin typeface="Helvetica Neue"/>
+              </a:rPr>
+              <a:t>•  4. Decide on outputs/ in git</a:t>
+            </a:r>
+          </a:p>
+          <a:p>
+            <a:pPr algn="l">
+              <a:lnSpc>
+                <a:spcPct val="105000"/>
+              </a:lnSpc>
+              <a:spcAft>
+                <a:spcPts val="1000"/>
+              </a:spcAft>
+            </a:pPr>
+            <a:r>
+              <a:rPr sz="1300" b="0">
+                <a:solidFill>
+                  <a:srgbClr val="585868"/>
+                </a:solidFill>
+                <a:latin typeface="Helvetica Neue"/>
+              </a:rPr>
+              <a:t>     It is regenerated on every run yet tracked, so each analysis leaves a large binary diff.</a:t>
+            </a:r>
+          </a:p>
+          <a:p>
+            <a:pPr algn="l">
+              <a:lnSpc>
+                <a:spcPct val="105000"/>
+              </a:lnSpc>
+              <a:spcAft>
+                <a:spcPts val="200"/>
+              </a:spcAft>
+            </a:pPr>
+            <a:r>
+              <a:rPr sz="1500" b="1">
+                <a:solidFill>
+                  <a:srgbClr val="14141C"/>
+                </a:solidFill>
+                <a:latin typeface="Helvetica Neue"/>
+              </a:rPr>
+              <a:t>•  5. Then, if the team wants it</a:t>
+            </a:r>
+          </a:p>
+          <a:p>
+            <a:pPr algn="l">
+              <a:lnSpc>
+                <a:spcPct val="105000"/>
+              </a:lnSpc>
+              <a:spcAft>
+                <a:spcPts val="1000"/>
+              </a:spcAft>
+            </a:pPr>
+            <a:r>
+              <a:rPr sz="1300" b="0">
+                <a:solidFill>
+                  <a:srgbClr val="585868"/>
+                </a:solidFill>
+                <a:latin typeface="Helvetica Neue"/>
+              </a:rPr>
+              <a:t>     More product families (savings, mortgage) compared the same way, and a wider bank set.</a:t>
+            </a:r>
+          </a:p>
+        </p:txBody>
+      </p:sp>
+      <p:sp>
+        <p:nvSpPr>
+          <p:cNvPr id="5" name="TextBox 4"/>
+          <p:cNvSpPr txBox="1"/>
+          <p:nvPr/>
+        </p:nvSpPr>
+        <p:spPr>
+          <a:xfrm>
+            <a:off x="548640" y="6400800"/>
+            <a:ext cx="8229600" cy="274320"/>
+          </a:xfrm>
+          <a:prstGeom prst="rect">
+            <a:avLst/>
+          </a:prstGeom>
+          <a:noFill/>
+        </p:spPr>
+        <p:txBody>
+          <a:bodyPr wrap="square">
+            <a:spAutoFit/>
+          </a:bodyPr>
+          <a:lstStyle/>
+          <a:p>
+            <a:pPr algn="l">
+              <a:lnSpc>
+                <a:spcPct val="105000"/>
+              </a:lnSpc>
+              <a:spcAft>
+                <a:spcPts val="600"/>
+              </a:spcAft>
+            </a:pPr>
+            <a:r>
+              <a:rPr sz="1000" b="0">
+                <a:solidFill>
+                  <a:srgbClr val="585868"/>
+                </a:solidFill>
+                <a:latin typeface="Helvetica Neue"/>
+              </a:rPr>
+              <a:t>Banking Campaigns Comparator · ING DACI / Customer AI · September 2026</a:t>
+            </a:r>
+          </a:p>
+        </p:txBody>
+      </p:sp>
+      <p:sp>
+        <p:nvSpPr>
+          <p:cNvPr id="6" name="TextBox 5"/>
+          <p:cNvSpPr txBox="1"/>
+          <p:nvPr/>
+        </p:nvSpPr>
+        <p:spPr>
+          <a:xfrm>
+            <a:off x="11094415" y="6400800"/>
+            <a:ext cx="548640" cy="274320"/>
+          </a:xfrm>
+          <a:prstGeom prst="rect">
+            <a:avLst/>
+          </a:prstGeom>
+          <a:noFill/>
+        </p:spPr>
+        <p:txBody>
+          <a:bodyPr wrap="square">
+            <a:spAutoFit/>
+          </a:bodyPr>
+          <a:lstStyle/>
+          <a:p>
+            <a:pPr algn="r">
+              <a:lnSpc>
+                <a:spcPct val="105000"/>
+              </a:lnSpc>
+              <a:spcAft>
+                <a:spcPts val="600"/>
+              </a:spcAft>
+            </a:pPr>
+            <a:r>
+              <a:rPr sz="1000" b="0">
+                <a:solidFill>
+                  <a:srgbClr val="585868"/>
+                </a:solidFill>
+                <a:latin typeface="Helvetica Neue"/>
+              </a:rPr>
+              <a:t>30</a:t>
+            </a:r>
+          </a:p>
+        </p:txBody>
+      </p:sp>
+    </p:spTree>
+  </p:cSld>
+  <p:clrMapOvr>
+    <a:masterClrMapping/>
+  </p:clrMapOvr>
+</p:sld>
+</file>
+
+<file path=ppt/slides/slide31.xml><?xml version="1.0" encoding="utf-8"?>
+<p:sld xmlns:a="http://schemas.openxmlformats.org/drawingml/2006/main" xmlns:p="http://schemas.openxmlformats.org/presentationml/2006/main" xmlns:r="http://schemas.openxmlformats.org/officeDocument/2006/relationships">
+  <p:cSld>
+    <p:spTree>
+      <p:nvGrpSpPr>
+        <p:cNvPr id="1" name=""/>
+        <p:cNvGrpSpPr/>
+        <p:nvPr/>
+      </p:nvGrpSpPr>
+      <p:grpSpPr/>
+      <p:sp>
+        <p:nvSpPr>
+          <p:cNvPr id="2" name="Rectangle 1"/>
+          <p:cNvSpPr/>
+          <p:nvPr/>
+        </p:nvSpPr>
+        <p:spPr>
+          <a:xfrm>
+            <a:off x="0" y="0"/>
+            <a:ext cx="12191695" cy="6858000"/>
+          </a:xfrm>
+          <a:prstGeom prst="rect">
+            <a:avLst/>
+          </a:prstGeom>
+          <a:solidFill>
+            <a:srgbClr val="14141C"/>
+          </a:solidFill>
+          <a:ln>
+            <a:noFill/>
+          </a:ln>
+          <a:effectLst/>
+        </p:spPr>
+        <p:style>
+          <a:lnRef idx="1">
+            <a:schemeClr val="accent1"/>
+          </a:lnRef>
+          <a:fillRef idx="3">
+            <a:schemeClr val="accent1"/>
+          </a:fillRef>
+          <a:effectRef idx="2">
+            <a:schemeClr val="accent1"/>
+          </a:effectRef>
+          <a:fontRef idx="minor">
+            <a:schemeClr val="lt1"/>
+          </a:fontRef>
+        </p:style>
+        <p:txBody>
+          <a:bodyPr rtlCol="0" anchor="ctr"/>
+          <a:lstStyle/>
+          <a:p>
+            <a:pPr algn="ctr"/>
+          </a:p>
+        </p:txBody>
+      </p:sp>
+      <p:sp>
+        <p:nvSpPr>
+          <p:cNvPr id="3" name="Rectangle 2"/>
+          <p:cNvSpPr/>
+          <p:nvPr/>
+        </p:nvSpPr>
+        <p:spPr>
+          <a:xfrm>
+            <a:off x="822960" y="2743200"/>
+            <a:ext cx="2011680" cy="91440"/>
+          </a:xfrm>
+          <a:prstGeom prst="rect">
+            <a:avLst/>
+          </a:prstGeom>
+          <a:solidFill>
+            <a:srgbClr val="FF6200"/>
+          </a:solidFill>
+          <a:ln>
+            <a:noFill/>
+          </a:ln>
+          <a:effectLst/>
+        </p:spPr>
+        <p:style>
+          <a:lnRef idx="1">
+            <a:schemeClr val="accent1"/>
+          </a:lnRef>
+          <a:fillRef idx="3">
+            <a:schemeClr val="accent1"/>
+          </a:fillRef>
+          <a:effectRef idx="2">
+            <a:schemeClr val="accent1"/>
+          </a:effectRef>
+          <a:fontRef idx="minor">
+            <a:schemeClr val="lt1"/>
+          </a:fontRef>
+        </p:style>
+        <p:txBody>
+          <a:bodyPr rtlCol="0" anchor="ctr"/>
+          <a:lstStyle/>
+          <a:p>
+            <a:pPr algn="ctr"/>
+          </a:p>
+        </p:txBody>
+      </p:sp>
+      <p:sp>
+        <p:nvSpPr>
+          <p:cNvPr id="4" name="TextBox 3"/>
+          <p:cNvSpPr txBox="1"/>
+          <p:nvPr/>
+        </p:nvSpPr>
+        <p:spPr>
+          <a:xfrm>
+            <a:off x="822960" y="1828800"/>
+            <a:ext cx="10515600" cy="914400"/>
+          </a:xfrm>
+          <a:prstGeom prst="rect">
+            <a:avLst/>
+          </a:prstGeom>
+          <a:noFill/>
+        </p:spPr>
+        <p:txBody>
+          <a:bodyPr wrap="square">
+            <a:spAutoFit/>
+          </a:bodyPr>
+          <a:lstStyle/>
+          <a:p>
+            <a:pPr algn="l">
+              <a:lnSpc>
+                <a:spcPct val="105000"/>
+              </a:lnSpc>
+              <a:spcAft>
+                <a:spcPts val="600"/>
+              </a:spcAft>
+            </a:pPr>
+            <a:r>
+              <a:rPr sz="2800" b="1">
+                <a:solidFill>
+                  <a:srgbClr val="FFFFFF"/>
+                </a:solidFill>
+                <a:latin typeface="Helvetica Neue"/>
+              </a:rPr>
+              <a:t>Measure one way. Label the trust. Claim only what the data supports.</a:t>
+            </a:r>
+          </a:p>
+        </p:txBody>
+      </p:sp>
+      <p:sp>
+        <p:nvSpPr>
+          <p:cNvPr id="5" name="TextBox 4"/>
+          <p:cNvSpPr txBox="1"/>
+          <p:nvPr/>
+        </p:nvSpPr>
+        <p:spPr>
+          <a:xfrm>
+            <a:off x="822960" y="3063240"/>
+            <a:ext cx="10058400" cy="1463040"/>
+          </a:xfrm>
+          <a:prstGeom prst="rect">
+            <a:avLst/>
+          </a:prstGeom>
+          <a:noFill/>
+        </p:spPr>
+        <p:txBody>
+          <a:bodyPr wrap="square">
+            <a:spAutoFit/>
+          </a:bodyPr>
+          <a:lstStyle/>
+          <a:p>
+            <a:pPr algn="l">
+              <a:lnSpc>
+                <a:spcPct val="105000"/>
+              </a:lnSpc>
+              <a:spcAft>
+                <a:spcPts val="600"/>
+              </a:spcAft>
+            </a:pPr>
+            <a:r>
+              <a:rPr sz="1400" b="0">
+                <a:solidFill>
+                  <a:srgbClr val="B8B8C8"/>
+                </a:solidFill>
+                <a:latin typeface="Helvetica Neue"/>
+              </a:rPr>
+              <a:t>The pipeline, the contract and the guardrails are in the repository:</a:t>
+            </a:r>
+          </a:p>
+          <a:p>
+            <a:pPr algn="l">
+              <a:lnSpc>
+                <a:spcPct val="105000"/>
+              </a:lnSpc>
+              <a:spcAft>
+                <a:spcPts val="600"/>
+              </a:spcAft>
+            </a:pPr>
+            <a:r>
+              <a:rPr sz="1400" b="0">
+                <a:solidFill>
+                  <a:srgbClr val="B8B8C8"/>
+                </a:solidFill>
+                <a:latin typeface="Helvetica Neue"/>
+              </a:rPr>
+              <a:t>README.md · docs/design.md · docs/pipeline.md · web/README.md · docs/decisions.md</a:t>
             </a:r>
           </a:p>
         </p:txBody>
@@ -10374,7 +12382,7 @@
                 </a:solidFill>
                 <a:latin typeface="Helvetica Neue"/>
               </a:rPr>
-              <a:t>•  16 pages, 14 banks, 25 comparable features, nothing excluded</a:t>
+              <a:t>•  16 pages, 14 banks, 30 comparable features, nothing excluded</a:t>
             </a:r>
           </a:p>
           <a:p>

--- a/docs/Banking_Campaigns_Comparator.pptx
+++ b/docs/Banking_Campaigns_Comparator.pptx
@@ -3568,7 +3568,7 @@
                 </a:solidFill>
                 <a:latin typeface="Helvetica Neue"/>
               </a:rPr>
-              <a:t>•  Two independent humans now overlap on 11 pages</a:t>
+              <a:t>•  Two independent humans now overlap on 10 pages</a:t>
             </a:r>
           </a:p>
           <a:p>
@@ -3587,7 +3587,7 @@
                 </a:solidFill>
                 <a:latin typeface="Helvetica Neue"/>
               </a:rPr>
-              <a:t>     Siegried has scored 25 pages and Dan 11, and the two sheets share all 11 of Dan's — so the agreement figure finally measures two people, not one person against a model.</a:t>
+              <a:t>     Siegried has scored 25 pages and Dan 11, and 10 of Dan's 11 scored pages also carry a Siegried score — so the agreement figure finally measures two people, not one person against a model.</a:t>
             </a:r>
           </a:p>
           <a:p>
@@ -3644,7 +3644,7 @@
                 </a:solidFill>
                 <a:latin typeface="Helvetica Neue"/>
               </a:rPr>
-              <a:t>•  Agreement is measurable for all 13 features, over 9 to 11 pages</a:t>
+              <a:t>•  Agreement is measurable for all 13 features, over 9 to 15 pages</a:t>
             </a:r>
           </a:p>
           <a:p>
@@ -9539,7 +9539,7 @@
                 </a:solidFill>
                 <a:latin typeface="Helvetica Neue"/>
               </a:rPr>
-              <a:t>     Two humans overlap on only 11 pages, Stephane's 9 were machine-proposed and adopted, and six of the thirteen features sit below the agreement bar — so a finding resting on persuasion levers or accent placement is a hypothesis.</a:t>
+              <a:t>     Two humans overlap on only 10 pages, Stephane's 9 were machine-proposed and adopted, and six of the thirteen features sit below the agreement bar — so a finding resting on persuasion levers or accent placement is a hypothesis.</a:t>
             </a:r>
           </a:p>
           <a:p>
@@ -10265,7 +10265,7 @@
                 </a:solidFill>
                 <a:latin typeface="Helvetica Neue"/>
               </a:rPr>
-              <a:t>     Two humans now overlap on 11 pages; extend that to every bank in scope, and tighten the wording for the six features below the 60% bar before any judged feature carries a finding.</a:t>
+              <a:t>     Two humans now overlap on 10 pages; extend that to every bank in scope, and tighten the wording for the six features below the 60% bar before any judged feature carries a finding.</a:t>
             </a:r>
           </a:p>
           <a:p>

--- a/docs/Banking_Campaigns_Comparator.pptx
+++ b/docs/Banking_Campaigns_Comparator.pptx
@@ -4204,7 +4204,7 @@
                 </a:solidFill>
                 <a:latin typeface="Helvetica Neue"/>
               </a:rPr>
-              <a:t>     Traditional↔challenger positioning score 0.211 across 14 banks, and its nearest neighbour is Belfius.</a:t>
+              <a:t>     Traditional↔challenger positioning score 0.209 across 14 banks, and its nearest neighbour is Belfius.</a:t>
             </a:r>
           </a:p>
           <a:p>
@@ -4242,7 +4242,7 @@
                 </a:solidFill>
                 <a:latin typeface="Helvetica Neue"/>
               </a:rPr>
-              <a:t>     Figures quoted: 25.5 vs peers 12.2 (+1.62 SD) · Targeting students: 1.0 vs 0.38 (+1.26 SD) · Clarity of the offer: 4.0 vs 3.5 (+1.00 SD, rubric-sourced) · Designed mobile-first: 1.0 vs 0.5 (+1.00 SD).</a:t>
+              <a:t>     Figures quoted: 25.5 vs peers 12.2 (+1.62 SD) · Designed mobile-first: 1.0 vs 0.38 (+1.29 SD, rubric) · Targeting students: 1.0 vs 0.38 (+1.26 SD) · The offer feels worth having: 1.0 vs 0.43 (+1.15 SD, rubric) · AIDA completeness: 3.5 vs 2.7 (+1.12 SD, rubric).</a:t>
             </a:r>
           </a:p>
           <a:p>

--- a/docs/Banking_Campaigns_Comparator.pptx
+++ b/docs/Banking_Campaigns_Comparator.pptx
@@ -3384,7 +3384,7 @@
                 </a:solidFill>
                 <a:latin typeface="Helvetica Neue"/>
               </a:rPr>
-              <a:t>14 – 25 September 2026 · 14 banks · 16 current-account pages · 104 features</a:t>
+              <a:t>14 – 25 September 2026 · 14 banks · 18 current-account pages of 52 collected · 104 features</a:t>
             </a:r>
           </a:p>
         </p:txBody>
@@ -3568,7 +3568,7 @@
                 </a:solidFill>
                 <a:latin typeface="Helvetica Neue"/>
               </a:rPr>
-              <a:t>•  Two independent humans now overlap on 10 pages</a:t>
+              <a:t>•  Three independent human raters</a:t>
             </a:r>
           </a:p>
           <a:p>
@@ -3587,7 +3587,7 @@
                 </a:solidFill>
                 <a:latin typeface="Helvetica Neue"/>
               </a:rPr>
-              <a:t>     Siegried has scored 25 pages and Dan 11, and 10 of Dan's 11 scored pages also carry a Siegried score — so the agreement figure finally measures two people, not one person against a model.</a:t>
+              <a:t>     Siegried, Dan and Stephane each keep their own sheet, split two-raters-per-bank rather than all three scoring all 52 pages. Per-rater counts move within the day; data/rubric/*_scores.csv is the live figure.</a:t>
             </a:r>
           </a:p>
           <a:p>
@@ -3606,7 +3606,7 @@
                 </a:solidFill>
                 <a:latin typeface="Helvetica Neue"/>
               </a:rPr>
-              <a:t>•  Stephane's 9 are machine-proposed and adopted</a:t>
+              <a:t>•  Stephane's sheet is independent since 22/09</a:t>
             </a:r>
           </a:p>
           <a:p>
@@ -3625,7 +3625,7 @@
                 </a:solidFill>
                 <a:latin typeface="Helvetica Neue"/>
               </a:rPr>
-              <a:t>     A vision model proposed them from the screenshots and Stephane accepted them; the sheet's notes column says so, and they are not counted as an independent human rater.</a:t>
+              <a:t>     It was machine-proposed and adopted until then. Checked directly on 22/09: none of his 13 overlapping pages match the model's output, so he now counts as an independent rater.</a:t>
             </a:r>
           </a:p>
           <a:p>
@@ -4204,7 +4204,7 @@
                 </a:solidFill>
                 <a:latin typeface="Helvetica Neue"/>
               </a:rPr>
-              <a:t>     Traditional↔challenger positioning score 0.209 across 14 banks, and its nearest neighbour is Belfius.</a:t>
+              <a:t>     Traditional↔challenger positioning score 0.178 across 14 banks, and its nearest neighbour is Belfius.</a:t>
             </a:r>
           </a:p>
           <a:p>
@@ -4242,7 +4242,7 @@
                 </a:solidFill>
                 <a:latin typeface="Helvetica Neue"/>
               </a:rPr>
-              <a:t>     Figures quoted: 25.5 vs peers 12.2 (+1.62 SD) · Designed mobile-first: 1.0 vs 0.38 (+1.29 SD, rubric) · Targeting students: 1.0 vs 0.38 (+1.26 SD) · The offer feels worth having: 1.0 vs 0.43 (+1.15 SD, rubric) · AIDA completeness: 3.5 vs 2.7 (+1.12 SD, rubric).</a:t>
+              <a:t>     The offer feels worth having: 4.3 vs peers 3.5 (+1.67 SD, rubric) · Persuasion levers used: 2.3 vs 1.3 (+1.61 SD, rubric) · Claims fast digital onboarding: 0.67 vs 0.15 (+1.42 SD) · Page height: 11,149px vs 6,412px (+1.42 SD) · Page brightness: 0.55 vs 0.34 (+1.40 SD).</a:t>
             </a:r>
           </a:p>
           <a:p>
@@ -4280,7 +4280,7 @@
                 </a:solidFill>
                 <a:latin typeface="Helvetica Neue"/>
               </a:rPr>
-              <a:t>     Calls to action: 2.0 vs peers 13.4 (-1.06 SD) — the largest negative gap, and the fewest distinct next steps in the market.</a:t>
+              <a:t>     Calls to action: 0.7 vs peers 5.6 (-1.00 SD) — still the largest negative gap. The earlier "2.0 vs 13.4" came from a counting bug that included navigation and footer links; re-derived 23/09.</a:t>
             </a:r>
           </a:p>
           <a:p>
@@ -4318,7 +4318,7 @@
                 </a:solidFill>
                 <a:latin typeface="Helvetica Neue"/>
               </a:rPr>
-              <a:t>     Traditional pages are brighter (d = -2.81) and show more without scrolling (d = -2.10); challengers are far likelier to frame the account as a subscription, to target expats, and to show a rate (each d = +1.87).</a:t>
+              <a:t>     Traditional pages are brighter (d = -2.36) and show more without scrolling (d = -2.12); challengers are far likelier to show a rate and to frame the account as a subscription (each d = +2.00), and to target expats (d = +1.23).</a:t>
             </a:r>
           </a:p>
           <a:p>
@@ -4897,7 +4897,7 @@
                 </a:solidFill>
                 <a:latin typeface="Helvetica Neue"/>
               </a:rPr>
-              <a:t>•  Recommendations may use a slice of it for timing and focus — those are marked as trends-based, kept in their own group, and forbidden from citing a page feature as evidence.</a:t>
+              <a:t>•  Recommendations no longer write from it (22/09): timing advice was the weakest thing this data supports, and was replaced by measured page-to-page benchmarks.</a:t>
             </a:r>
           </a:p>
           <a:p>
@@ -5979,7 +5979,7 @@
                 </a:solidFill>
                 <a:latin typeface="Helvetica Neue"/>
               </a:rPr>
-              <a:t>•  A second, opt-in group can be added from search-interest context.</a:t>
+              <a:t>•  A second, opt-in group can be added from news themes (reputation context).</a:t>
             </a:r>
           </a:p>
           <a:p>
@@ -5998,7 +5998,7 @@
                 </a:solidFill>
                 <a:latin typeface="Helvetica Neue"/>
               </a:rPr>
-              <a:t>•  Those carry basis='trends' and a market context, render in their own visually separated group, and may not cite a page feature as evidence.</a:t>
+              <a:t>•  The search-interest group was removed on 22/09; Trends now selects three brands on attention alone and the tab reports what their pages measurably do differently from ING's.</a:t>
             </a:r>
           </a:p>
           <a:p>
@@ -9539,7 +9539,7 @@
                 </a:solidFill>
                 <a:latin typeface="Helvetica Neue"/>
               </a:rPr>
-              <a:t>     Two humans overlap on only 10 pages, Stephane's 9 were machine-proposed and adopted, and six of the thirteen features sit below the agreement bar — so a finding resting on persuasion levers or accent placement is a hypothesis.</a:t>
+              <a:t>     Coverage is partial and the overlap between any two raters is still thin, and six of the thirteen features sit below the agreement bar — so a finding resting on persuasion levers or accent placement is a hypothesis.</a:t>
             </a:r>
           </a:p>
           <a:p>
@@ -9883,7 +9883,7 @@
                 </a:solidFill>
                 <a:latin typeface="Helvetica Neue"/>
               </a:rPr>
-              <a:t>•  A measurement pipeline: 14 banks, 16 current-account pages, 104 declared features, one frozen contract.</a:t>
+              <a:t>•  A measurement pipeline: 14 banks, 52 pages across 6 product families (18 of them current-account), 104 declared features, one frozen contract.</a:t>
             </a:r>
           </a:p>
           <a:p>
@@ -10265,7 +10265,7 @@
                 </a:solidFill>
                 <a:latin typeface="Helvetica Neue"/>
               </a:rPr>
-              <a:t>     Two humans now overlap on 10 pages; extend that to every bank in scope, and tighten the wording for the six features below the 60% bar before any judged feature carries a finding.</a:t>
+              <a:t>     Finish the two-raters-per-bank split — it takes the comparison from 30 usable features to about 40 — and tighten the wording for the six features below the 60% bar before any judged feature carries a finding.</a:t>
             </a:r>
           </a:p>
           <a:p>
@@ -10284,7 +10284,7 @@
                 </a:solidFill>
                 <a:latin typeface="Helvetica Neue"/>
               </a:rPr>
-              <a:t>•  2. Score the six new banks</a:t>
+              <a:t>•  2. Fill the remaining sheet rows</a:t>
             </a:r>
           </a:p>
           <a:p>
@@ -10303,7 +10303,7 @@
                 </a:solidFill>
                 <a:latin typeface="Helvetica Neue"/>
               </a:rPr>
-              <a:t>     CBC, Keytrade, BNP's pages and the restored Belfius and Revolut need rubric sheets, so every bank in the comparison carries a judged layer rather than blanks.</a:t>
+              <a:t>     Every bank now has its rows, including the two English pages restored on 23/09; what is missing is filled scores, not sheets.</a:t>
             </a:r>
           </a:p>
           <a:p>
@@ -10417,7 +10417,7 @@
                 </a:solidFill>
                 <a:latin typeface="Helvetica Neue"/>
               </a:rPr>
-              <a:t>     More product families (savings, mortgage) compared the same way, and a wider bank set.</a:t>
+              <a:t>     Savings, mortgage, pension, investment and term accounts are already collected (52 pages, 6 families); comparing each family the same way is the next step, plus a wider bank set.</a:t>
             </a:r>
           </a:p>
         </p:txBody>
@@ -12382,7 +12382,7 @@
                 </a:solidFill>
                 <a:latin typeface="Helvetica Neue"/>
               </a:rPr>
-              <a:t>•  16 pages, 14 banks, 30 comparable features, nothing excluded</a:t>
+              <a:t>•  18 pages, 14 banks, 30 comparable features, nothing excluded</a:t>
             </a:r>
           </a:p>
           <a:p>
@@ -12420,7 +12420,7 @@
                 </a:solidFill>
                 <a:latin typeface="Helvetica Neue"/>
               </a:rPr>
-              <a:t>•  Collected in Belgian French, for comparability</a:t>
+              <a:t>•  Mostly Belgian French — plus two English pages and one Dutch</a:t>
             </a:r>
           </a:p>
           <a:p>
@@ -12439,7 +12439,7 @@
                 </a:solidFill>
                 <a:latin typeface="Helvetica Neue"/>
               </a:rPr>
-              <a:t>     Word counts and readability are within-language features; mixing languages would silently drop eight of them from every comparison.</a:t>
+              <a:t>     Word counts and readability are within-language features, so with more than one language present the comparison drops eight of them rather than compare across languages. English was restored on 23/09, after a re-collection had silently lost it.</a:t>
             </a:r>
           </a:p>
           <a:p>
@@ -12496,7 +12496,7 @@
                 </a:solidFill>
                 <a:latin typeface="Helvetica Neue"/>
               </a:rPr>
-              <a:t>•  The dataset is not in git; the contract is</a:t>
+              <a:t>•  The dataset is in git, alongside the contract</a:t>
             </a:r>
           </a:p>
           <a:p>
@@ -12515,7 +12515,7 @@
                 </a:solidFill>
                 <a:latin typeface="Helvetica Neue"/>
               </a:rPr>
-              <a:t>     Snapshots and datasets are gitignored — reproducible from the stored HTML, but never mistaken for committed truth.</a:t>
+              <a:t>     Captures, datasets and outputs are tracked, so any figure on a slide traces back to the exact committed run that produced it.</a:t>
             </a:r>
           </a:p>
           <a:p>

--- a/docs/Banking_Campaigns_Comparator.pptx
+++ b/docs/Banking_Campaigns_Comparator.pptx
@@ -5476,7 +5476,7 @@
                 </a:solidFill>
                 <a:latin typeface="Helvetica Neue"/>
               </a:rPr>
-              <a:t>•  Themes are context about the bank, never evidence about the page.</a:t>
+              <a:t>•  Themes are context about the bank, never evidence that a page or campaign performed. Asked whether reputation shows how well campaigns are doing, the honest answer is no: press coverage says what a bank is written about, not whether its page worked.</a:t>
             </a:r>
           </a:p>
         </p:txBody>
@@ -6290,7 +6290,7 @@
                 </a:solidFill>
                 <a:latin typeface="Helvetica Neue"/>
               </a:rPr>
-              <a:t>Each section that implements a recommendation is boxed; the (i) button opens the reasoning above it, and that section's glow switches to a slow yellow flicker.</a:t>
+              <a:t>An illustration, not a proposal for ING's site: each section that implements a recommendation is boxed, the (i) button opens the reasoning above it, and that section's glow switches to a slow yellow flicker.</a:t>
             </a:r>
           </a:p>
         </p:txBody>
@@ -9978,7 +9978,7 @@
                 </a:solidFill>
                 <a:latin typeface="Helvetica Neue"/>
               </a:rPr>
-              <a:t>•  A generated ING website: ten pages built from the selected recommendations, in ING's house style.</a:t>
+              <a:t>•  A generated ING website: ten pages built from the selected recommendations — an illustration of what a recommendation means in practice, not a proposal for ING's own site.</a:t>
             </a:r>
           </a:p>
           <a:p>

--- a/docs/Banking_Campaigns_Comparator.pptx
+++ b/docs/Banking_Campaigns_Comparator.pptx
@@ -17,6 +17,7 @@
     <p:sldId id="265" r:id="rId11"/>
     <p:sldId id="266" r:id="rId12"/>
     <p:sldId id="267" r:id="rId13"/>
+    <p:sldId id="291" r:id="rId41"/>
     <p:sldId id="287" r:id="rId37"/>
     <p:sldId id="288" r:id="rId38"/>
     <p:sldId id="289" r:id="rId39"/>
@@ -4270,7 +4271,7 @@
                 </a:solidFill>
                 <a:latin typeface="Helvetica Neue"/>
               </a:rPr>
-              <a:t> positioning score 0.178 across 14 banks, and its nearest </a:t>
+              <a:t> positioning score 0.26 across 14 banks, and its nearest </a:t>
             </a:r>
             <a:r>
               <a:rPr sz="1300" b="0" dirty="0" err="1">
@@ -4326,7 +4327,7 @@
                 </a:solidFill>
                 <a:latin typeface="Helvetica Neue"/>
               </a:rPr>
-              <a:t>     The offer feels worth having: 4.3 vs peers 3.5 (+1.67 SD, rubric) · Persuasion levers used: 2.3 vs 1.3 (+1.61 SD, rubric) · Claims fast digital onboarding: 0.67 vs 0.15 (+1.42 SD) · Page height: 11,149px vs 6,412px (+1.42 SD) · Page brightness: 0.55 vs 0.34 (+1.40 SD).</a:t>
+              <a:t>     Deadline language: 4.0 markers vs peers 0.6 (+3.69 SD) — the largest gap in the set · Persuasion levers used: 3.7 vs 1.7 (+2.46 SD, rubric) · The offer feels worth having: 5.0 vs 3.7 (+1.46 SD, rubric) · Claims fast digital onboarding: 0.67 vs 0.15 (+1.42 SD) · Page height: 11,149px vs 6,412px (+1.42 SD).</a:t>
             </a:r>
           </a:p>
           <a:p>
@@ -4373,7 +4374,7 @@
                 </a:solidFill>
                 <a:latin typeface="Helvetica Neue"/>
               </a:rPr>
-              <a:t>     Calls to action: 0.7 vs peers 5.6 (-1.00 SD) — still the largest negative gap. The earlier "2.0 vs 13.4" came from a counting bug that included navigation and footer links; re-derived 23/09.</a:t>
+              <a:t>     Calls to action: 1.0 vs peers 6.2 (-0.92 SD) — still the largest negative gap. The keyword list missed real buttons ("Démarrer", "Devenir client") and counted a cookie-policy link as a CTA; re-derived 23/09, verified against the pages themselves.</a:t>
             </a:r>
             <a:endParaRPr sz="1300" b="0" dirty="0">
               <a:solidFill>
@@ -4455,7 +4456,7 @@
                 </a:solidFill>
                 <a:latin typeface="Helvetica Neue"/>
               </a:rPr>
-              <a:t>     These are descriptive effect sizes over 14 banks, not significance tests — and the rubric-sourced ones moved when the second human sheet was folded in, which is the point of measuring agreement.</a:t>
+              <a:t>     These are descriptive effect sizes over 14 banks, not significance tests. The rubric-sourced ones moved when the second human sheet was folded in, and the deadline count was re-derived from the stored pages — all 14 banks re-measured with the same rule.</a:t>
             </a:r>
           </a:p>
         </p:txBody>
@@ -4801,7 +4802,7 @@
                 </a:solidFill>
                 <a:latin typeface="Helvetica Neue"/>
               </a:rPr>
-              <a:t>15</a:t>
+              <a:t>18</a:t>
             </a:r>
           </a:p>
         </p:txBody>
@@ -5115,7 +5116,7 @@
                 </a:solidFill>
                 <a:latin typeface="Helvetica Neue"/>
               </a:rPr>
-              <a:t>16</a:t>
+              <a:t>19</a:t>
             </a:r>
           </a:p>
         </p:txBody>
@@ -5377,7 +5378,7 @@
                 </a:solidFill>
                 <a:latin typeface="Helvetica Neue"/>
               </a:rPr>
-              <a:t>17</a:t>
+              <a:t>20</a:t>
             </a:r>
           </a:p>
         </p:txBody>
@@ -5691,7 +5692,7 @@
                 </a:solidFill>
                 <a:latin typeface="Helvetica Neue"/>
               </a:rPr>
-              <a:t>18</a:t>
+              <a:t>21</a:t>
             </a:r>
           </a:p>
         </p:txBody>
@@ -5953,7 +5954,7 @@
                 </a:solidFill>
                 <a:latin typeface="Helvetica Neue"/>
               </a:rPr>
-              <a:t>19</a:t>
+              <a:t>22</a:t>
             </a:r>
           </a:p>
         </p:txBody>
@@ -6673,7 +6674,7 @@
                 </a:solidFill>
                 <a:latin typeface="Helvetica Neue"/>
               </a:rPr>
-              <a:t>20</a:t>
+              <a:t>23</a:t>
             </a:r>
           </a:p>
         </p:txBody>
@@ -6935,7 +6936,7 @@
                 </a:solidFill>
                 <a:latin typeface="Helvetica Neue"/>
               </a:rPr>
-              <a:t>21</a:t>
+              <a:t>24</a:t>
             </a:r>
           </a:p>
         </p:txBody>
@@ -7379,7 +7380,7 @@
                 </a:solidFill>
                 <a:latin typeface="Helvetica Neue"/>
               </a:rPr>
-              <a:t>22</a:t>
+              <a:t>25</a:t>
             </a:r>
           </a:p>
         </p:txBody>
@@ -7641,7 +7642,7 @@
                 </a:solidFill>
                 <a:latin typeface="Helvetica Neue"/>
               </a:rPr>
-              <a:t>23</a:t>
+              <a:t>26</a:t>
             </a:r>
           </a:p>
         </p:txBody>
@@ -7903,7 +7904,7 @@
                 </a:solidFill>
                 <a:latin typeface="Helvetica Neue"/>
               </a:rPr>
-              <a:t>24</a:t>
+              <a:t>27</a:t>
             </a:r>
           </a:p>
         </p:txBody>
@@ -8165,7 +8166,7 @@
                 </a:solidFill>
                 <a:latin typeface="Helvetica Neue"/>
               </a:rPr>
-              <a:t>25</a:t>
+              <a:t>28</a:t>
             </a:r>
           </a:p>
         </p:txBody>
@@ -8427,7 +8428,7 @@
                 </a:solidFill>
                 <a:latin typeface="Helvetica Neue"/>
               </a:rPr>
-              <a:t>26</a:t>
+              <a:t>29</a:t>
             </a:r>
           </a:p>
         </p:txBody>
@@ -8689,7 +8690,7 @@
                 </a:solidFill>
                 <a:latin typeface="Helvetica Neue"/>
               </a:rPr>
-              <a:t>27</a:t>
+              <a:t>30</a:t>
             </a:r>
           </a:p>
         </p:txBody>
@@ -8951,7 +8952,7 @@
                 </a:solidFill>
                 <a:latin typeface="Helvetica Neue"/>
               </a:rPr>
-              <a:t>28</a:t>
+              <a:t>31</a:t>
             </a:r>
           </a:p>
         </p:txBody>
@@ -9395,7 +9396,7 @@
                 </a:solidFill>
                 <a:latin typeface="Helvetica Neue"/>
               </a:rPr>
-              <a:t>29</a:t>
+              <a:t>32</a:t>
             </a:r>
           </a:p>
         </p:txBody>
@@ -10190,7 +10191,7 @@
                 </a:solidFill>
                 <a:latin typeface="Helvetica Neue"/>
               </a:rPr>
-              <a:t>30</a:t>
+              <a:t>33</a:t>
             </a:r>
           </a:p>
         </p:txBody>
@@ -12419,7 +12420,7 @@
                 </a:solidFill>
                 <a:latin typeface="Helvetica Neue"/>
               </a:rPr>
-              <a:t>13</a:t>
+              <a:t>14</a:t>
             </a:r>
           </a:p>
         </p:txBody>
@@ -16061,7 +16062,7 @@
                 </a:solidFill>
                 <a:latin typeface="Helvetica Neue"/>
               </a:rPr>
-              <a:t>14</a:t>
+              <a:t>15</a:t>
             </a:r>
           </a:p>
         </p:txBody>
@@ -17190,7 +17191,7 @@
                 </a:solidFill>
                 <a:latin typeface="Helvetica Neue"/>
               </a:rPr>
-              <a:t>15</a:t>
+              <a:t>16</a:t>
             </a:r>
           </a:p>
         </p:txBody>
@@ -18020,7 +18021,397 @@
                 </a:solidFill>
                 <a:latin typeface="Helvetica Neue"/>
               </a:rPr>
-              <a:t>16</a:t>
+              <a:t>17</a:t>
+            </a:r>
+          </a:p>
+        </p:txBody>
+      </p:sp>
+    </p:spTree>
+  </p:cSld>
+  <p:clrMapOvr>
+    <a:masterClrMapping/>
+  </p:clrMapOvr>
+</p:sld>
+</file>
+
+<file path=ppt/slides/slide36.xml><?xml version="1.0" encoding="utf-8"?>
+<p:sld xmlns:a="http://schemas.openxmlformats.org/drawingml/2006/main" xmlns:r="http://schemas.openxmlformats.org/officeDocument/2006/relationships" xmlns:p="http://schemas.openxmlformats.org/presentationml/2006/main">
+  <p:cSld>
+    <p:spTree>
+      <p:nvGrpSpPr>
+        <p:cNvPr id="1" name=""/>
+        <p:cNvGrpSpPr/>
+        <p:nvPr/>
+      </p:nvGrpSpPr>
+      <p:grpSpPr>
+        <a:xfrm>
+          <a:off x="0" y="0"/>
+          <a:ext cx="0" cy="0"/>
+          <a:chOff x="0" y="0"/>
+          <a:chExt cx="0" cy="0"/>
+        </a:xfrm>
+      </p:grpSpPr>
+      <p:sp>
+        <p:nvSpPr>
+          <p:cNvPr id="2" name="TextBox 1"/>
+          <p:cNvSpPr txBox="1"/>
+          <p:nvPr/>
+        </p:nvSpPr>
+        <p:spPr>
+          <a:xfrm>
+            <a:off x="548640" y="384048"/>
+            <a:ext cx="11064240" cy="731520"/>
+          </a:xfrm>
+          <a:prstGeom prst="rect">
+            <a:avLst/>
+          </a:prstGeom>
+          <a:noFill/>
+        </p:spPr>
+        <p:txBody>
+          <a:bodyPr wrap="square">
+            <a:spAutoFit/>
+          </a:bodyPr>
+          <a:lstStyle/>
+          <a:p>
+            <a:pPr algn="l">
+              <a:lnSpc>
+                <a:spcPct val="105000"/>
+              </a:lnSpc>
+              <a:spcAft>
+                <a:spcPts val="600"/>
+              </a:spcAft>
+            </a:pPr>
+            <a:r>
+              <a:rPr sz="2800" b="1">
+                <a:solidFill>
+                  <a:srgbClr val="14141C"/>
+                </a:solidFill>
+                <a:latin typeface="Helvetica Neue"/>
+              </a:rPr>
+              <a:t>Strategic context and positioning</a:t>
+            </a:r>
+          </a:p>
+        </p:txBody>
+      </p:sp>
+      <p:sp>
+        <p:nvSpPr>
+          <p:cNvPr id="3" name="Rectangle 2"/>
+          <p:cNvSpPr/>
+          <p:nvPr/>
+        </p:nvSpPr>
+        <p:spPr>
+          <a:xfrm>
+            <a:off x="548640" y="1115568"/>
+            <a:ext cx="1463040" cy="64008"/>
+          </a:xfrm>
+          <a:prstGeom prst="rect">
+            <a:avLst/>
+          </a:prstGeom>
+          <a:solidFill>
+            <a:srgbClr val="FF6200"/>
+          </a:solidFill>
+          <a:ln>
+            <a:noFill/>
+          </a:ln>
+          <a:effectLst/>
+        </p:spPr>
+        <p:style>
+          <a:lnRef idx="1">
+            <a:schemeClr val="accent1"/>
+          </a:lnRef>
+          <a:fillRef idx="3">
+            <a:schemeClr val="accent1"/>
+          </a:fillRef>
+          <a:effectRef idx="2">
+            <a:schemeClr val="accent1"/>
+          </a:effectRef>
+          <a:fontRef idx="minor">
+            <a:schemeClr val="lt1"/>
+          </a:fontRef>
+        </p:style>
+        <p:txBody>
+          <a:bodyPr rtlCol="0" anchor="ctr"/>
+          <a:lstStyle/>
+          <a:p>
+            <a:pPr algn="ctr"/>
+            <a:endParaRPr/>
+          </a:p>
+        </p:txBody>
+      </p:sp>
+      <p:sp>
+        <p:nvSpPr>
+          <p:cNvPr id="4" name="TextBox 3"/>
+          <p:cNvSpPr txBox="1"/>
+          <p:nvPr/>
+        </p:nvSpPr>
+        <p:spPr>
+          <a:xfrm>
+            <a:off x="685800" y="1463040"/>
+            <a:ext cx="10881360" cy="3821367"/>
+          </a:xfrm>
+          <a:prstGeom prst="rect">
+            <a:avLst/>
+          </a:prstGeom>
+          <a:noFill/>
+        </p:spPr>
+        <p:txBody>
+          <a:bodyPr wrap="square">
+            <a:spAutoFit/>
+          </a:bodyPr>
+          <a:lstStyle/>
+          <a:p>
+            <a:pPr algn="l">
+              <a:lnSpc>
+                <a:spcPct val="105000"/>
+              </a:lnSpc>
+              <a:spcAft>
+                <a:spcPts val="200"/>
+              </a:spcAft>
+            </a:pPr>
+            <a:r>
+              <a:rPr sz="1500" b="1" dirty="0">
+                <a:solidFill>
+                  <a:srgbClr val="14141C"/>
+                </a:solidFill>
+                <a:latin typeface="Helvetica Neue"/>
+              </a:rPr>
+              <a:t>•  The hybrid model</a:t>
+            </a:r>
+          </a:p>
+          <a:p>
+            <a:pPr algn="l">
+              <a:lnSpc>
+                <a:spcPct val="105000"/>
+              </a:lnSpc>
+              <a:spcAft>
+                <a:spcPts val="1000"/>
+              </a:spcAft>
+            </a:pPr>
+            <a:r>
+              <a:rPr sz="1300" b="0" dirty="0">
+                <a:solidFill>
+                  <a:srgbClr val="585868"/>
+                </a:solidFill>
+                <a:latin typeface="Helvetica Neue"/>
+              </a:rPr>
+              <a:t>     ING blends the direct, feature-focused, mobile-first tone of a neobank with the institutional weight of a Tier-1 retail bank — regulatory authority and an established brand. </a:t>
+            </a:r>
+          </a:p>
+          <a:p>
+            <a:pPr algn="l">
+              <a:lnSpc>
+                <a:spcPct val="105000"/>
+              </a:lnSpc>
+              <a:spcAft>
+                <a:spcPts val="1000"/>
+              </a:spcAft>
+            </a:pPr>
+            <a:r>
+              <a:rPr sz="1300" b="0" dirty="0">
+                <a:solidFill>
+                  <a:srgbClr val="FF0000"/>
+                </a:solidFill>
+                <a:latin typeface="Helvetica Neue"/>
+              </a:rPr>
+              <a:t>     Not yet verified against specific ING pages — confirm before presenting as a claim, not context.</a:t>
+            </a:r>
+          </a:p>
+          <a:p>
+            <a:pPr algn="l">
+              <a:lnSpc>
+                <a:spcPct val="105000"/>
+              </a:lnSpc>
+              <a:spcAft>
+                <a:spcPts val="200"/>
+              </a:spcAft>
+            </a:pPr>
+            <a:r>
+              <a:rPr sz="1500" b="1" dirty="0">
+                <a:solidFill>
+                  <a:srgbClr val="14141C"/>
+                </a:solidFill>
+                <a:latin typeface="Helvetica Neue"/>
+              </a:rPr>
+              <a:t>•  A level playing field on regulation</a:t>
+            </a:r>
+          </a:p>
+          <a:p>
+            <a:pPr algn="l">
+              <a:lnSpc>
+                <a:spcPct val="105000"/>
+              </a:lnSpc>
+              <a:spcAft>
+                <a:spcPts val="1000"/>
+              </a:spcAft>
+            </a:pPr>
+            <a:r>
+              <a:rPr sz="1300" b="0" dirty="0">
+                <a:solidFill>
+                  <a:srgbClr val="585868"/>
+                </a:solidFill>
+                <a:latin typeface="Helvetica Neue"/>
+              </a:rPr>
+              <a:t>     Neobanks like Revolut hold the same European banking licenses and face the same Belgian compliance checks — including the mandatory CCP credit-registry query for consumer lending. Their speed comes from modern architecture, no branch network, and faster decision loops — not lighter rules.</a:t>
+            </a:r>
+          </a:p>
+          <a:p>
+            <a:pPr algn="l">
+              <a:lnSpc>
+                <a:spcPct val="105000"/>
+              </a:lnSpc>
+              <a:spcAft>
+                <a:spcPts val="200"/>
+              </a:spcAft>
+            </a:pPr>
+            <a:r>
+              <a:rPr sz="1500" b="1" dirty="0">
+                <a:solidFill>
+                  <a:srgbClr val="14141C"/>
+                </a:solidFill>
+                <a:latin typeface="Helvetica Neue"/>
+              </a:rPr>
+              <a:t>•  Different monetization engines</a:t>
+            </a:r>
+          </a:p>
+          <a:p>
+            <a:pPr algn="l">
+              <a:lnSpc>
+                <a:spcPct val="105000"/>
+              </a:lnSpc>
+              <a:spcAft>
+                <a:spcPts val="1000"/>
+              </a:spcAft>
+            </a:pPr>
+            <a:r>
+              <a:rPr sz="1300" b="0" dirty="0">
+                <a:solidFill>
+                  <a:srgbClr val="585868"/>
+                </a:solidFill>
+                <a:latin typeface="Helvetica Neue"/>
+              </a:rPr>
+              <a:t>     Traditional banks have long used the basic current account as a loss leader — a produit d'appel — to acquire clients and monetize later through mortgages, insurance and wealth management. Neobanks flip that: transparent freemium tiers, paid subscriptions, and transactional FX / fee income, upfront.</a:t>
+            </a:r>
+          </a:p>
+          <a:p>
+            <a:pPr algn="l">
+              <a:lnSpc>
+                <a:spcPct val="105000"/>
+              </a:lnSpc>
+              <a:spcAft>
+                <a:spcPts val="200"/>
+              </a:spcAft>
+            </a:pPr>
+            <a:r>
+              <a:rPr sz="1500" b="1" dirty="0">
+                <a:solidFill>
+                  <a:srgbClr val="14141C"/>
+                </a:solidFill>
+                <a:latin typeface="Helvetica Neue"/>
+              </a:rPr>
+              <a:t>•  Who each side is chasing</a:t>
+            </a:r>
+          </a:p>
+          <a:p>
+            <a:pPr algn="l">
+              <a:lnSpc>
+                <a:spcPct val="105000"/>
+              </a:lnSpc>
+              <a:spcAft>
+                <a:spcPts val="0"/>
+              </a:spcAft>
+            </a:pPr>
+            <a:r>
+              <a:rPr sz="1300" b="0" dirty="0">
+                <a:solidFill>
+                  <a:srgbClr val="585868"/>
+                </a:solidFill>
+                <a:latin typeface="Helvetica Neue"/>
+              </a:rPr>
+              <a:t>     Neobanks win volume among young adults, digital nomads and casual spenders. ING's acquisition budget targets high lifetime-value segments instead: first-time investors, expats and high-net-worth individuals, and first-time buyers in mortgage and real estate. Professional and business banking is out of scope for this comparison — retail only.</a:t>
+            </a:r>
+          </a:p>
+        </p:txBody>
+      </p:sp>
+      <p:sp>
+        <p:nvSpPr>
+          <p:cNvPr id="5" name="TextBox 4"/>
+          <p:cNvSpPr txBox="1"/>
+          <p:nvPr/>
+        </p:nvSpPr>
+        <p:spPr>
+          <a:xfrm>
+            <a:off x="548640" y="6400800"/>
+            <a:ext cx="8229600" cy="274320"/>
+          </a:xfrm>
+          <a:prstGeom prst="rect">
+            <a:avLst/>
+          </a:prstGeom>
+          <a:noFill/>
+        </p:spPr>
+        <p:txBody>
+          <a:bodyPr wrap="square">
+            <a:spAutoFit/>
+          </a:bodyPr>
+          <a:lstStyle/>
+          <a:p>
+            <a:pPr algn="l">
+              <a:lnSpc>
+                <a:spcPct val="105000"/>
+              </a:lnSpc>
+              <a:spcAft>
+                <a:spcPts val="600"/>
+              </a:spcAft>
+            </a:pPr>
+            <a:r>
+              <a:rPr sz="1000" b="0">
+                <a:solidFill>
+                  <a:srgbClr val="585868"/>
+                </a:solidFill>
+                <a:latin typeface="Helvetica Neue"/>
+              </a:rPr>
+              <a:t>Banking Campaigns Comparator · ING DACI / Customer AI · September 2026</a:t>
+            </a:r>
+          </a:p>
+        </p:txBody>
+      </p:sp>
+      <p:sp>
+        <p:nvSpPr>
+          <p:cNvPr id="6" name="TextBox 5"/>
+          <p:cNvSpPr txBox="1"/>
+          <p:nvPr/>
+        </p:nvSpPr>
+        <p:spPr>
+          <a:xfrm>
+            <a:off x="11094415" y="6400800"/>
+            <a:ext cx="548640" cy="274320"/>
+          </a:xfrm>
+          <a:prstGeom prst="rect">
+            <a:avLst/>
+          </a:prstGeom>
+          <a:noFill/>
+        </p:spPr>
+        <p:txBody>
+          <a:bodyPr wrap="square">
+            <a:spAutoFit/>
+          </a:bodyPr>
+          <a:lstStyle/>
+          <a:p>
+            <a:pPr algn="r">
+              <a:lnSpc>
+                <a:spcPct val="105000"/>
+              </a:lnSpc>
+              <a:spcAft>
+                <a:spcPts val="600"/>
+              </a:spcAft>
+            </a:pPr>
+            <a:r>
+              <a:rPr sz="1000" b="0">
+                <a:solidFill>
+                  <a:srgbClr val="585868"/>
+                </a:solidFill>
+                <a:latin typeface="Helvetica Neue"/>
+              </a:rPr>
+              <a:t>13</a:t>
             </a:r>
           </a:p>
         </p:txBody>

--- a/docs/Banking_Campaigns_Comparator.pptx
+++ b/docs/Banking_Campaigns_Comparator.pptx
@@ -5,40 +5,46 @@
     <p:sldMasterId id="2147483648" r:id="rId1"/>
   </p:sldMasterIdLst>
   <p:sldIdLst>
-    <p:sldId id="256" r:id="rId2"/>
-    <p:sldId id="257" r:id="rId3"/>
-    <p:sldId id="258" r:id="rId4"/>
-    <p:sldId id="259" r:id="rId5"/>
-    <p:sldId id="260" r:id="rId6"/>
-    <p:sldId id="261" r:id="rId7"/>
-    <p:sldId id="262" r:id="rId8"/>
-    <p:sldId id="263" r:id="rId9"/>
-    <p:sldId id="264" r:id="rId10"/>
-    <p:sldId id="265" r:id="rId11"/>
-    <p:sldId id="266" r:id="rId12"/>
-    <p:sldId id="267" r:id="rId13"/>
-    <p:sldId id="291" r:id="rId41"/>
-    <p:sldId id="287" r:id="rId37"/>
-    <p:sldId id="288" r:id="rId38"/>
-    <p:sldId id="289" r:id="rId39"/>
-    <p:sldId id="290" r:id="rId40"/>
-    <p:sldId id="270" r:id="rId16"/>
-    <p:sldId id="271" r:id="rId17"/>
-    <p:sldId id="272" r:id="rId18"/>
-    <p:sldId id="273" r:id="rId19"/>
-    <p:sldId id="274" r:id="rId20"/>
-    <p:sldId id="275" r:id="rId21"/>
-    <p:sldId id="276" r:id="rId22"/>
-    <p:sldId id="277" r:id="rId23"/>
-    <p:sldId id="278" r:id="rId24"/>
-    <p:sldId id="279" r:id="rId25"/>
-    <p:sldId id="280" r:id="rId26"/>
-    <p:sldId id="281" r:id="rId27"/>
-    <p:sldId id="282" r:id="rId28"/>
-    <p:sldId id="283" r:id="rId29"/>
-    <p:sldId id="284" r:id="rId30"/>
-    <p:sldId id="285" r:id="rId31"/>
-    <p:sldId id="286" r:id="rId32"/>
+    <p:sldId id="256" r:id="rId2001"/>
+    <p:sldId id="257" r:id="rId2002"/>
+    <p:sldId id="258" r:id="rId2003"/>
+    <p:sldId id="259" r:id="rId2004"/>
+    <p:sldId id="260" r:id="rId2005"/>
+    <p:sldId id="261" r:id="rId2006"/>
+    <p:sldId id="262" r:id="rId2007"/>
+    <p:sldId id="263" r:id="rId2008"/>
+    <p:sldId id="264" r:id="rId2009"/>
+    <p:sldId id="265" r:id="rId2010"/>
+    <p:sldId id="266" r:id="rId2011"/>
+    <p:sldId id="267" r:id="rId2012"/>
+    <p:sldId id="268" r:id="rId2013"/>
+    <p:sldId id="269" r:id="rId2014"/>
+    <p:sldId id="270" r:id="rId2015"/>
+    <p:sldId id="271" r:id="rId2016"/>
+    <p:sldId id="272" r:id="rId2017"/>
+    <p:sldId id="273" r:id="rId2018"/>
+    <p:sldId id="274" r:id="rId2019"/>
+    <p:sldId id="275" r:id="rId2020"/>
+    <p:sldId id="276" r:id="rId2021"/>
+    <p:sldId id="277" r:id="rId2022"/>
+    <p:sldId id="278" r:id="rId2023"/>
+    <p:sldId id="279" r:id="rId2024"/>
+    <p:sldId id="280" r:id="rId2025"/>
+    <p:sldId id="281" r:id="rId2026"/>
+    <p:sldId id="282" r:id="rId2027"/>
+    <p:sldId id="283" r:id="rId2028"/>
+    <p:sldId id="284" r:id="rId2029"/>
+    <p:sldId id="285" r:id="rId2030"/>
+    <p:sldId id="286" r:id="rId2031"/>
+    <p:sldId id="287" r:id="rId2032"/>
+    <p:sldId id="288" r:id="rId2033"/>
+    <p:sldId id="289" r:id="rId2034"/>
+    <p:sldId id="290" r:id="rId2035"/>
+    <p:sldId id="291" r:id="rId2036"/>
+    <p:sldId id="292" r:id="rId2037"/>
+    <p:sldId id="293" r:id="rId2038"/>
+    <p:sldId id="294" r:id="rId2039"/>
+    <p:sldId id="295" r:id="rId2040"/>
   </p:sldIdLst>
   <p:sldSz cx="12192000" cy="6858000"/>
   <p:notesSz cx="6858000" cy="9144000"/>
@@ -742,6 +748,36 @@
 </p:sldLayout>
 </file>
 
+<file path=ppt/slideLayouts/slideLayout12.xml><?xml version="1.0" encoding="utf-8"?>
+<p:sldLayout xmlns:a="http://schemas.openxmlformats.org/drawingml/2006/main" xmlns:r="http://schemas.openxmlformats.org/officeDocument/2006/relationships" xmlns:p="http://schemas.openxmlformats.org/presentationml/2006/main" preserve="1">
+  <p:cSld name="DEFAULT">
+    <p:bg>
+      <p:bgRef idx="1001">
+        <a:schemeClr val="bg1"/>
+      </p:bgRef>
+    </p:bg>
+    <p:spTree>
+      <p:nvGrpSpPr>
+        <p:cNvPr id="1" name=""/>
+        <p:cNvGrpSpPr/>
+        <p:nvPr/>
+      </p:nvGrpSpPr>
+      <p:grpSpPr>
+        <a:xfrm>
+          <a:off x="0" y="0"/>
+          <a:ext cx="0" cy="0"/>
+          <a:chOff x="0" y="0"/>
+          <a:chExt cx="0" cy="0"/>
+        </a:xfrm>
+      </p:grpSpPr>
+    </p:spTree>
+  </p:cSld>
+  <p:clrMapOvr>
+    <a:masterClrMapping/>
+  </p:clrMapOvr>
+</p:sldLayout>
+</file>
+
 <file path=ppt/slideLayouts/slideLayout2.xml><?xml version="1.0" encoding="utf-8"?>
 <p:sldLayout xmlns:a="http://schemas.openxmlformats.org/drawingml/2006/main" xmlns:r="http://schemas.openxmlformats.org/officeDocument/2006/relationships" xmlns:p="http://schemas.openxmlformats.org/presentationml/2006/main" type="obj" preserve="1">
   <p:cSld name="Title and Content">
@@ -2852,6 +2888,7 @@
     <p:sldLayoutId id="2147483657" r:id="rId9"/>
     <p:sldLayoutId id="2147483658" r:id="rId10"/>
     <p:sldLayoutId id="2147483659" r:id="rId11"/>
+    <p:sldLayoutId id="2147483660" r:id="rId13"/>
   </p:sldLayoutIdLst>
   <p:txStyles>
     <p:titleStyle>
@@ -3476,7 +3513,7 @@
                 </a:solidFill>
                 <a:latin typeface="Helvetica Neue"/>
               </a:rPr>
-              <a:t>Rubric scoring: people, plus a model as a third rater</a:t>
+              <a:t>Rubric scoring: one human judge, and a model measured against it</a:t>
             </a:r>
           </a:p>
         </p:txBody>
@@ -3601,7 +3638,7 @@
                 </a:solidFill>
                 <a:latin typeface="Helvetica Neue"/>
               </a:rPr>
-              <a:t>•  Three independent human raters</a:t>
+              <a:t>•  One human judge for this pass, stated plainly</a:t>
             </a:r>
           </a:p>
           <a:p>
@@ -3620,7 +3657,7 @@
                 </a:solidFill>
                 <a:latin typeface="Helvetica Neue"/>
               </a:rPr>
-              <a:t>     Siegried, Dan and Stephane each keep their own sheet, split two-raters-per-bank rather than all three scoring all 52 pages. Per-rater counts move within the day; data/rubric/*_scores.csv is the live figure.</a:t>
+              <a:t>     Every judged feature on all 51 pages comes from one sheet. Earlier passes split pages between raters; this one does not, and we say so rather than presenting a single opinion as a consensus.</a:t>
             </a:r>
           </a:p>
           <a:p>
@@ -3639,7 +3676,7 @@
                 </a:solidFill>
                 <a:latin typeface="Helvetica Neue"/>
               </a:rPr>
-              <a:t>•  Stephane's sheet is independent since 22/09</a:t>
+              <a:t>•  A model sheet exists, and it is not a second opinion</a:t>
             </a:r>
           </a:p>
           <a:p>
@@ -3658,7 +3695,7 @@
                 </a:solidFill>
                 <a:latin typeface="Helvetica Neue"/>
               </a:rPr>
-              <a:t>     It was machine-proposed and adopted until then. Checked directly on 22/09: none of his 13 overlapping pages match the model's output, so he now counts as an independent rater.</a:t>
+              <a:t>     50 pages, written to its own file, never into a human sheet - a pre-filled sheet gets rubber-stamped. But the pinned model has no vision, and 12 of the 13 judged features are declared in the dictionary as judged from the screenshot.</a:t>
             </a:r>
           </a:p>
           <a:p>
@@ -3677,7 +3714,7 @@
                 </a:solidFill>
                 <a:latin typeface="Helvetica Neue"/>
               </a:rPr>
-              <a:t>•  Agreement is measurable for all 13 features, over 9 to 15 pages</a:t>
+              <a:t>•  Only one judged feature can be scored from text at all</a:t>
             </a:r>
           </a:p>
           <a:p>
@@ -3696,7 +3733,7 @@
                 </a:solidFill>
                 <a:latin typeface="Helvetica Neue"/>
               </a:rPr>
-              <a:t>     Six sit below the module's 60% bar — aida desire 0.00, persuasion levers 0.11, accent locations 0.20, rate prominence 0.27, text-image layout 0.50, and attention 0.55 — so the remaining work is wording, not coverage.</a:t>
+              <a:t>     formality_score, the only one the dictionary sources from html_text. On the 49 pages both scored, the model lands within one point of the human there 73% of the time. Its numbers on the twelve visual features are answers to a question the text cannot settle: value_prop_clarity is the clearest, where it ranked the pages close to the opposite of the human.</a:t>
             </a:r>
           </a:p>
           <a:p>
@@ -3715,7 +3752,7 @@
                 </a:solidFill>
                 <a:latin typeface="Helvetica Neue"/>
               </a:rPr>
-              <a:t>•  The model still writes to its own sheet, never a pre-filled one</a:t>
+              <a:t>•  So the model sheet is kept as a reference, not used as a rater</a:t>
             </a:r>
           </a:p>
           <a:p>
@@ -3734,7 +3771,7 @@
                 </a:solidFill>
                 <a:latin typeface="Helvetica Neue"/>
               </a:rPr>
-              <a:t>     A pre-filled sheet gets rubber-stamped, and the agreement figure would then measure how persuasive the model was, not how well two people agree.</a:t>
+              <a:t>     Averaging it into the human scores would import guesses as judgements. One named human judge, said out loud, is more honest than a consensus that was never there.</a:t>
             </a:r>
           </a:p>
         </p:txBody>
@@ -3818,7 +3855,7 @@
                 </a:solidFill>
                 <a:latin typeface="Helvetica Neue"/>
               </a:rPr>
-              <a:t>10</a:t>
+              <a:t>6</a:t>
             </a:r>
           </a:p>
         </p:txBody>
@@ -4080,7 +4117,7 @@
                 </a:solidFill>
                 <a:latin typeface="Helvetica Neue"/>
               </a:rPr>
-              <a:t>11</a:t>
+              <a:t>25</a:t>
             </a:r>
           </a:p>
         </p:txBody>
@@ -4374,7 +4411,7 @@
                 </a:solidFill>
                 <a:latin typeface="Helvetica Neue"/>
               </a:rPr>
-              <a:t>     Calls to action: 1.0 vs peers 6.2 (-0.92 SD) — still the largest negative gap. The keyword list missed real buttons ("Démarrer", "Devenir client") and counted a cookie-policy link as a CTA; re-derived 23/09, verified against the pages themselves.</a:t>
+              <a:t>     Animation: 0.33 vs peers 0.62 (-0.58 SD) — the one measured place ING sits below the set. Calls to action are NOT reportable on this capture and are withheld rather than reported: ING’s pack cards (Open ING Go / More / Extra) load client-side and are absent from the captured HTML, so any count measures our capture, not the page.</a:t>
             </a:r>
             <a:endParaRPr sz="1300" b="0" dirty="0">
               <a:solidFill>
@@ -4540,7 +4577,7 @@
                 </a:solidFill>
                 <a:latin typeface="Helvetica Neue"/>
               </a:rPr>
-              <a:t>12</a:t>
+              <a:t>8</a:t>
             </a:r>
           </a:p>
         </p:txBody>
@@ -4802,7 +4839,7 @@
                 </a:solidFill>
                 <a:latin typeface="Helvetica Neue"/>
               </a:rPr>
-              <a:t>18</a:t>
+              <a:t>26</a:t>
             </a:r>
           </a:p>
         </p:txBody>
@@ -5116,7 +5153,7 @@
                 </a:solidFill>
                 <a:latin typeface="Helvetica Neue"/>
               </a:rPr>
-              <a:t>19</a:t>
+              <a:t>27</a:t>
             </a:r>
           </a:p>
         </p:txBody>
@@ -5378,7 +5415,7 @@
                 </a:solidFill>
                 <a:latin typeface="Helvetica Neue"/>
               </a:rPr>
-              <a:t>20</a:t>
+              <a:t>28</a:t>
             </a:r>
           </a:p>
         </p:txBody>
@@ -5692,7 +5729,7 @@
                 </a:solidFill>
                 <a:latin typeface="Helvetica Neue"/>
               </a:rPr>
-              <a:t>21</a:t>
+              <a:t>29</a:t>
             </a:r>
           </a:p>
         </p:txBody>
@@ -5954,7 +5991,7 @@
                 </a:solidFill>
                 <a:latin typeface="Helvetica Neue"/>
               </a:rPr>
-              <a:t>22</a:t>
+              <a:t>30</a:t>
             </a:r>
           </a:p>
         </p:txBody>
@@ -6674,7 +6711,7 @@
                 </a:solidFill>
                 <a:latin typeface="Helvetica Neue"/>
               </a:rPr>
-              <a:t>23</a:t>
+              <a:t>31</a:t>
             </a:r>
           </a:p>
         </p:txBody>
@@ -6936,7 +6973,7 @@
                 </a:solidFill>
                 <a:latin typeface="Helvetica Neue"/>
               </a:rPr>
-              <a:t>24</a:t>
+              <a:t>32</a:t>
             </a:r>
           </a:p>
         </p:txBody>
@@ -7380,7 +7417,7 @@
                 </a:solidFill>
                 <a:latin typeface="Helvetica Neue"/>
               </a:rPr>
-              <a:t>25</a:t>
+              <a:t>33</a:t>
             </a:r>
           </a:p>
         </p:txBody>
@@ -7642,7 +7679,7 @@
                 </a:solidFill>
                 <a:latin typeface="Helvetica Neue"/>
               </a:rPr>
-              <a:t>26</a:t>
+              <a:t>34</a:t>
             </a:r>
           </a:p>
         </p:txBody>
@@ -7904,7 +7941,7 @@
                 </a:solidFill>
                 <a:latin typeface="Helvetica Neue"/>
               </a:rPr>
-              <a:t>27</a:t>
+              <a:t>35</a:t>
             </a:r>
           </a:p>
         </p:txBody>
@@ -8166,7 +8203,7 @@
                 </a:solidFill>
                 <a:latin typeface="Helvetica Neue"/>
               </a:rPr>
-              <a:t>28</a:t>
+              <a:t>36</a:t>
             </a:r>
           </a:p>
         </p:txBody>
@@ -8428,7 +8465,7 @@
                 </a:solidFill>
                 <a:latin typeface="Helvetica Neue"/>
               </a:rPr>
-              <a:t>29</a:t>
+              <a:t>37</a:t>
             </a:r>
           </a:p>
         </p:txBody>
@@ -8690,7 +8727,7 @@
                 </a:solidFill>
                 <a:latin typeface="Helvetica Neue"/>
               </a:rPr>
-              <a:t>30</a:t>
+              <a:t>38</a:t>
             </a:r>
           </a:p>
         </p:txBody>
@@ -8952,7 +8989,7 @@
                 </a:solidFill>
                 <a:latin typeface="Helvetica Neue"/>
               </a:rPr>
-              <a:t>31</a:t>
+              <a:t>39</a:t>
             </a:r>
           </a:p>
         </p:txBody>
@@ -9396,7 +9433,7 @@
                 </a:solidFill>
                 <a:latin typeface="Helvetica Neue"/>
               </a:rPr>
-              <a:t>32</a:t>
+              <a:t>18</a:t>
             </a:r>
           </a:p>
         </p:txBody>
@@ -9550,7 +9587,7 @@
                 </a:solidFill>
                 <a:latin typeface="Helvetica Neue"/>
               </a:rPr>
-              <a:t>•  A measurement pipeline: 14 banks, 52 pages across 6 product families (18 of them current-account), 104 declared features, one frozen contract.</a:t>
+              <a:t>•  A measurement pipeline: 14 banks, 51 pages across 6 product families (18 of them current-account), 104 declared features, one frozen contract.</a:t>
             </a:r>
           </a:p>
           <a:p>
@@ -10191,7 +10228,7 @@
                 </a:solidFill>
                 <a:latin typeface="Helvetica Neue"/>
               </a:rPr>
-              <a:t>33</a:t>
+              <a:t>40</a:t>
             </a:r>
           </a:p>
         </p:txBody>
@@ -12420,7 +12457,7 @@
                 </a:solidFill>
                 <a:latin typeface="Helvetica Neue"/>
               </a:rPr>
-              <a:t>14</a:t>
+              <a:t>9</a:t>
             </a:r>
           </a:p>
         </p:txBody>
@@ -16062,7 +16099,7 @@
                 </a:solidFill>
                 <a:latin typeface="Helvetica Neue"/>
               </a:rPr>
-              <a:t>15</a:t>
+              <a:t>10</a:t>
             </a:r>
           </a:p>
         </p:txBody>
@@ -17191,7 +17228,7 @@
                 </a:solidFill>
                 <a:latin typeface="Helvetica Neue"/>
               </a:rPr>
-              <a:t>16</a:t>
+              <a:t>11</a:t>
             </a:r>
           </a:p>
         </p:txBody>
@@ -18021,7 +18058,7 @@
                 </a:solidFill>
                 <a:latin typeface="Helvetica Neue"/>
               </a:rPr>
-              <a:t>17</a:t>
+              <a:t>12</a:t>
             </a:r>
           </a:p>
         </p:txBody>
@@ -18411,8 +18448,2236 @@
                 </a:solidFill>
                 <a:latin typeface="Helvetica Neue"/>
               </a:rPr>
+              <a:t>7</a:t>
+            </a:r>
+          </a:p>
+        </p:txBody>
+      </p:sp>
+    </p:spTree>
+  </p:cSld>
+  <p:clrMapOvr>
+    <a:masterClrMapping/>
+  </p:clrMapOvr>
+</p:sld>
+</file>
+
+<file path=ppt/slides/slide37.xml><?xml version="1.0" encoding="utf-8"?>
+<p:sld xmlns:a="http://schemas.openxmlformats.org/drawingml/2006/main" xmlns:r="http://schemas.openxmlformats.org/officeDocument/2006/relationships" xmlns:p="http://schemas.openxmlformats.org/presentationml/2006/main">
+  <p:cSld name="Slide 1">
+    <p:bg>
+      <p:bgPr>
+        <a:solidFill>
+          <a:srgbClr val="FFFFFF"/>
+        </a:solidFill>
+      </p:bgPr>
+    </p:bg>
+    <p:spTree>
+      <p:nvGrpSpPr>
+        <p:cNvPr id="1" name=""/>
+        <p:cNvGrpSpPr/>
+        <p:nvPr/>
+      </p:nvGrpSpPr>
+      <p:grpSpPr>
+        <a:xfrm>
+          <a:off x="0" y="0"/>
+          <a:ext cx="0" cy="0"/>
+          <a:chOff x="0" y="0"/>
+          <a:chExt cx="0" cy="0"/>
+        </a:xfrm>
+      </p:grpSpPr>
+      <p:sp>
+        <p:nvSpPr>
+          <p:cNvPr id="2" name="Text 0"/>
+          <p:cNvSpPr txBox="1"/>
+          <p:nvPr/>
+        </p:nvSpPr>
+        <p:spPr>
+          <a:xfrm>
+            <a:off x="548640" y="384048"/>
+            <a:ext cx="11064240" cy="731520"/>
+          </a:xfrm>
+          <a:prstGeom prst="rect">
+            <a:avLst/>
+          </a:prstGeom>
+          <a:noFill/>
+          <a:ln/>
+        </p:spPr>
+        <p:txBody>
+          <a:bodyPr wrap="square" lIns="0" tIns="0" rIns="0" bIns="0" rtlCol="0" anchor="ctr"/>
+          <a:lstStyle/>
+          <a:p>
+            <a:pPr indent="0" marL="0">
+              <a:buNone/>
+            </a:pPr>
+            <a:r>
+              <a:rPr lang="en-US" sz="2800" b="1" dirty="0">
+                <a:solidFill>
+                  <a:srgbClr val="14141C"/>
+                </a:solidFill>
+                <a:latin typeface="Helvetica Neue" pitchFamily="34" charset="0"/>
+                <a:ea typeface="Helvetica Neue" pitchFamily="34" charset="-122"/>
+                <a:cs typeface="Helvetica Neue" pitchFamily="34" charset="-120"/>
+              </a:rPr>
+              <a:t>A recommendation system on top of the measurement</a:t>
+            </a:r>
+            <a:endParaRPr lang="en-US" sz="2800" dirty="0"/>
+          </a:p>
+        </p:txBody>
+      </p:sp>
+      <p:sp>
+        <p:nvSpPr>
+          <p:cNvPr id="3" name="Shape 1"/>
+          <p:cNvSpPr/>
+          <p:nvPr/>
+        </p:nvSpPr>
+        <p:spPr>
+          <a:xfrm>
+            <a:off x="548640" y="1115568"/>
+            <a:ext cx="1463040" cy="64008"/>
+          </a:xfrm>
+          <a:prstGeom prst="rect">
+            <a:avLst/>
+          </a:prstGeom>
+          <a:solidFill>
+            <a:srgbClr val="FF6200"/>
+          </a:solidFill>
+          <a:ln w="12700">
+            <a:solidFill>
+              <a:srgbClr val="333333"/>
+            </a:solidFill>
+            <a:prstDash val="solid"/>
+          </a:ln>
+        </p:spPr>
+      </p:sp>
+      <p:sp>
+        <p:nvSpPr>
+          <p:cNvPr id="4" name="Text 2"/>
+          <p:cNvSpPr txBox="1"/>
+          <p:nvPr/>
+        </p:nvSpPr>
+        <p:spPr>
+          <a:xfrm>
+            <a:off x="548640" y="6400800"/>
+            <a:ext cx="8229600" cy="274320"/>
+          </a:xfrm>
+          <a:prstGeom prst="rect">
+            <a:avLst/>
+          </a:prstGeom>
+          <a:noFill/>
+          <a:ln/>
+        </p:spPr>
+        <p:txBody>
+          <a:bodyPr wrap="square" lIns="0" tIns="0" rIns="0" bIns="0" rtlCol="0" anchor="ctr"/>
+          <a:lstStyle/>
+          <a:p>
+            <a:pPr indent="0" marL="0">
+              <a:buNone/>
+            </a:pPr>
+            <a:r>
+              <a:rPr lang="en-US" sz="1000" dirty="0">
+                <a:solidFill>
+                  <a:srgbClr val="585868"/>
+                </a:solidFill>
+                <a:latin typeface="Helvetica Neue" pitchFamily="34" charset="0"/>
+                <a:ea typeface="Helvetica Neue" pitchFamily="34" charset="-122"/>
+                <a:cs typeface="Helvetica Neue" pitchFamily="34" charset="-120"/>
+              </a:rPr>
+              <a:t>Banking Campaigns Comparator · ING DACI / Customer AI · September 2026</a:t>
+            </a:r>
+            <a:endParaRPr lang="en-US" sz="1000" dirty="0"/>
+          </a:p>
+        </p:txBody>
+      </p:sp>
+      <p:sp>
+        <p:nvSpPr>
+          <p:cNvPr id="5" name="Text 3"/>
+          <p:cNvSpPr txBox="1"/>
+          <p:nvPr/>
+        </p:nvSpPr>
+        <p:spPr>
+          <a:xfrm>
+            <a:off x="11091672" y="6400800"/>
+            <a:ext cx="548640" cy="274320"/>
+          </a:xfrm>
+          <a:prstGeom prst="rect">
+            <a:avLst/>
+          </a:prstGeom>
+          <a:noFill/>
+          <a:ln/>
+        </p:spPr>
+        <p:txBody>
+          <a:bodyPr wrap="square" lIns="0" tIns="0" rIns="0" bIns="0" rtlCol="0" anchor="ctr"/>
+          <a:lstStyle/>
+          <a:p>
+            <a:pPr algn="r" indent="0" marL="0">
+              <a:buNone/>
+            </a:pPr>
+            <a:r>
+              <a:rPr lang="en-US" sz="1000" dirty="0">
+                <a:solidFill>
+                  <a:srgbClr val="585868"/>
+                </a:solidFill>
+                <a:latin typeface="Helvetica Neue" pitchFamily="34" charset="0"/>
+                <a:ea typeface="Helvetica Neue" pitchFamily="34" charset="-122"/>
+                <a:cs typeface="Helvetica Neue" pitchFamily="34" charset="-120"/>
+              </a:rPr>
               <a:t>13</a:t>
             </a:r>
+            <a:endParaRPr lang="en-US" sz="1000" dirty="0"/>
+          </a:p>
+        </p:txBody>
+      </p:sp>
+      <p:sp>
+        <p:nvSpPr>
+          <p:cNvPr id="6" name="Shape 4"/>
+          <p:cNvSpPr/>
+          <p:nvPr/>
+        </p:nvSpPr>
+        <p:spPr>
+          <a:xfrm>
+            <a:off x="6112764" y="1394460"/>
+            <a:ext cx="5550408" cy="2834640"/>
+          </a:xfrm>
+          <a:prstGeom prst="rect">
+            <a:avLst/>
+          </a:prstGeom>
+          <a:solidFill>
+            <a:srgbClr val="FFFFFF"/>
+          </a:solidFill>
+          <a:ln w="12700">
+            <a:solidFill>
+              <a:srgbClr val="E4E4EC"/>
+            </a:solidFill>
+            <a:prstDash val="solid"/>
+          </a:ln>
+        </p:spPr>
+      </p:sp>
+      <p:pic>
+        <p:nvPicPr>
+          <p:cNvPr id="7" name="Image 0" descr="/Users/nstephane/Dev/AI_Data_Science_training/ing-usecase/docs/deck_assets/rec_controls.png">    </p:cNvPr>
+          <p:cNvPicPr>
+            <a:picLocks noChangeAspect="1"/>
+          </p:cNvPicPr>
+          <p:nvPr/>
+        </p:nvPicPr>
+        <p:blipFill>
+          <a:blip r:embed="rId1"/>
+          <a:stretch>
+            <a:fillRect/>
+          </a:stretch>
+        </p:blipFill>
+        <p:spPr>
+          <a:xfrm>
+            <a:off x="6144768" y="1426464"/>
+            <a:ext cx="5486400" cy="2770632"/>
+          </a:xfrm>
+          <a:prstGeom prst="rect">
+            <a:avLst/>
+          </a:prstGeom>
+        </p:spPr>
+      </p:pic>
+      <p:sp>
+        <p:nvSpPr>
+          <p:cNvPr id="8" name="Text 5"/>
+          <p:cNvSpPr txBox="1"/>
+          <p:nvPr/>
+        </p:nvSpPr>
+        <p:spPr>
+          <a:xfrm>
+            <a:off x="6144768" y="4297680"/>
+            <a:ext cx="5486400" cy="292608"/>
+          </a:xfrm>
+          <a:prstGeom prst="rect">
+            <a:avLst/>
+          </a:prstGeom>
+          <a:noFill/>
+          <a:ln/>
+        </p:spPr>
+        <p:txBody>
+          <a:bodyPr wrap="square" lIns="0" tIns="0" rIns="0" bIns="0" rtlCol="0" anchor="ctr"/>
+          <a:lstStyle/>
+          <a:p>
+            <a:pPr indent="0" marL="0">
+              <a:buNone/>
+            </a:pPr>
+            <a:r>
+              <a:rPr lang="en-US" sz="1050" i="1" dirty="0">
+                <a:solidFill>
+                  <a:srgbClr val="585868"/>
+                </a:solidFill>
+                <a:latin typeface="Helvetica Neue" pitchFamily="34" charset="0"/>
+                <a:ea typeface="Helvetica Neue" pitchFamily="34" charset="-122"/>
+                <a:cs typeface="Helvetica Neue" pitchFamily="34" charset="-120"/>
+              </a:rPr>
+              <a:t>The panel as the team sees it: one button, two opt-in contexts, and the run it produced.</a:t>
+            </a:r>
+            <a:endParaRPr lang="en-US" sz="1050" dirty="0"/>
+          </a:p>
+        </p:txBody>
+      </p:sp>
+      <p:pic>
+        <p:nvPicPr>
+          <p:cNvPr id="9" name="Image 1" descr="/Users/nstephane/Dev/AI_Data_Science_training/ing-usecase/docs/deck_assets/icons/target.png">    </p:cNvPr>
+          <p:cNvPicPr>
+            <a:picLocks noChangeAspect="1"/>
+          </p:cNvPicPr>
+          <p:nvPr/>
+        </p:nvPicPr>
+        <p:blipFill>
+          <a:blip r:embed="rId2"/>
+          <a:stretch>
+            <a:fillRect/>
+          </a:stretch>
+        </p:blipFill>
+        <p:spPr>
+          <a:xfrm>
+            <a:off x="621792" y="1609344"/>
+            <a:ext cx="420624" cy="420624"/>
+          </a:xfrm>
+          <a:prstGeom prst="rect">
+            <a:avLst/>
+          </a:prstGeom>
+        </p:spPr>
+      </p:pic>
+      <p:sp>
+        <p:nvSpPr>
+          <p:cNvPr id="10" name="Text 6"/>
+          <p:cNvSpPr txBox="1"/>
+          <p:nvPr/>
+        </p:nvSpPr>
+        <p:spPr>
+          <a:xfrm>
+            <a:off x="1188720" y="1591056"/>
+            <a:ext cx="4782312" cy="274320"/>
+          </a:xfrm>
+          <a:prstGeom prst="rect">
+            <a:avLst/>
+          </a:prstGeom>
+          <a:noFill/>
+          <a:ln/>
+        </p:spPr>
+        <p:txBody>
+          <a:bodyPr wrap="square" lIns="0" tIns="0" rIns="0" bIns="0" rtlCol="0" anchor="ctr"/>
+          <a:lstStyle/>
+          <a:p>
+            <a:pPr indent="0" marL="0">
+              <a:buNone/>
+            </a:pPr>
+            <a:r>
+              <a:rPr lang="en-US" sz="1350" b="1" dirty="0">
+                <a:solidFill>
+                  <a:srgbClr val="14141C"/>
+                </a:solidFill>
+                <a:latin typeface="Helvetica Neue" pitchFamily="34" charset="0"/>
+                <a:ea typeface="Helvetica Neue" pitchFamily="34" charset="-122"/>
+                <a:cs typeface="Helvetica Neue" pitchFamily="34" charset="-120"/>
+              </a:rPr>
+              <a:t>One model call over the finished analysis</a:t>
+            </a:r>
+            <a:endParaRPr lang="en-US" sz="1350" dirty="0"/>
+          </a:p>
+        </p:txBody>
+      </p:sp>
+      <p:sp>
+        <p:nvSpPr>
+          <p:cNvPr id="11" name="Text 7"/>
+          <p:cNvSpPr txBox="1"/>
+          <p:nvPr/>
+        </p:nvSpPr>
+        <p:spPr>
+          <a:xfrm>
+            <a:off x="1188720" y="1883664"/>
+            <a:ext cx="4782312" cy="713232"/>
+          </a:xfrm>
+          <a:prstGeom prst="rect">
+            <a:avLst/>
+          </a:prstGeom>
+          <a:noFill/>
+          <a:ln/>
+        </p:spPr>
+        <p:txBody>
+          <a:bodyPr wrap="square" lIns="0" tIns="0" rIns="0" bIns="0" rtlCol="0" anchor="ctr"/>
+          <a:lstStyle/>
+          <a:p>
+            <a:pPr indent="0" marL="0">
+              <a:lnSpc>
+                <a:spcPts val="1500"/>
+              </a:lnSpc>
+              <a:buNone/>
+            </a:pPr>
+            <a:r>
+              <a:rPr lang="en-US" sz="1150" dirty="0">
+                <a:solidFill>
+                  <a:srgbClr val="585868"/>
+                </a:solidFill>
+                <a:latin typeface="Helvetica Neue" pitchFamily="34" charset="0"/>
+                <a:ea typeface="Helvetica Neue" pitchFamily="34" charset="-122"/>
+                <a:cs typeface="Helvetica Neue" pitchFamily="34" charset="-120"/>
+              </a:rPr>
+              <a:t>Reads report.json only — the same numbers the charts are drawn from. This run turned 30 measured features across 14 banks into 11 ordered changes.</a:t>
+            </a:r>
+            <a:endParaRPr lang="en-US" sz="1150" dirty="0"/>
+          </a:p>
+        </p:txBody>
+      </p:sp>
+      <p:pic>
+        <p:nvPicPr>
+          <p:cNvPr id="12" name="Image 2" descr="/Users/nstephane/Dev/AI_Data_Science_training/ing-usecase/docs/deck_assets/icons/list.png">    </p:cNvPr>
+          <p:cNvPicPr>
+            <a:picLocks noChangeAspect="1"/>
+          </p:cNvPicPr>
+          <p:nvPr/>
+        </p:nvPicPr>
+        <p:blipFill>
+          <a:blip r:embed="rId3"/>
+          <a:stretch>
+            <a:fillRect/>
+          </a:stretch>
+        </p:blipFill>
+        <p:spPr>
+          <a:xfrm>
+            <a:off x="621792" y="2907792"/>
+            <a:ext cx="420624" cy="420624"/>
+          </a:xfrm>
+          <a:prstGeom prst="rect">
+            <a:avLst/>
+          </a:prstGeom>
+        </p:spPr>
+      </p:pic>
+      <p:sp>
+        <p:nvSpPr>
+          <p:cNvPr id="13" name="Text 8"/>
+          <p:cNvSpPr txBox="1"/>
+          <p:nvPr/>
+        </p:nvSpPr>
+        <p:spPr>
+          <a:xfrm>
+            <a:off x="1188720" y="2889504"/>
+            <a:ext cx="4782312" cy="274320"/>
+          </a:xfrm>
+          <a:prstGeom prst="rect">
+            <a:avLst/>
+          </a:prstGeom>
+          <a:noFill/>
+          <a:ln/>
+        </p:spPr>
+        <p:txBody>
+          <a:bodyPr wrap="square" lIns="0" tIns="0" rIns="0" bIns="0" rtlCol="0" anchor="ctr"/>
+          <a:lstStyle/>
+          <a:p>
+            <a:pPr indent="0" marL="0">
+              <a:buNone/>
+            </a:pPr>
+            <a:r>
+              <a:rPr lang="en-US" sz="1350" b="1" dirty="0">
+                <a:solidFill>
+                  <a:srgbClr val="14141C"/>
+                </a:solidFill>
+                <a:latin typeface="Helvetica Neue" pitchFamily="34" charset="0"/>
+                <a:ea typeface="Helvetica Neue" pitchFamily="34" charset="-122"/>
+                <a:cs typeface="Helvetica Neue" pitchFamily="34" charset="-120"/>
+              </a:rPr>
+              <a:t>Ordered by priority, not by confidence</a:t>
+            </a:r>
+            <a:endParaRPr lang="en-US" sz="1350" dirty="0"/>
+          </a:p>
+        </p:txBody>
+      </p:sp>
+      <p:sp>
+        <p:nvSpPr>
+          <p:cNvPr id="14" name="Text 9"/>
+          <p:cNvSpPr txBox="1"/>
+          <p:nvPr/>
+        </p:nvSpPr>
+        <p:spPr>
+          <a:xfrm>
+            <a:off x="1188720" y="3182112"/>
+            <a:ext cx="4782312" cy="713232"/>
+          </a:xfrm>
+          <a:prstGeom prst="rect">
+            <a:avLst/>
+          </a:prstGeom>
+          <a:noFill/>
+          <a:ln/>
+        </p:spPr>
+        <p:txBody>
+          <a:bodyPr wrap="square" lIns="0" tIns="0" rIns="0" bIns="0" rtlCol="0" anchor="ctr"/>
+          <a:lstStyle/>
+          <a:p>
+            <a:pPr indent="0" marL="0">
+              <a:lnSpc>
+                <a:spcPts val="1500"/>
+              </a:lnSpc>
+              <a:buNone/>
+            </a:pPr>
+            <a:r>
+              <a:rPr lang="en-US" sz="1150" dirty="0">
+                <a:solidFill>
+                  <a:srgbClr val="585868"/>
+                </a:solidFill>
+                <a:latin typeface="Helvetica Neue" pitchFamily="34" charset="0"/>
+                <a:ea typeface="Helvetica Neue" pitchFamily="34" charset="-122"/>
+                <a:cs typeface="Helvetica Neue" pitchFamily="34" charset="-120"/>
+              </a:rPr>
+              <a:t>3 high, 6 medium, 2 low. The order is the argument: what the measurement most supports acting on first.</a:t>
+            </a:r>
+            <a:endParaRPr lang="en-US" sz="1150" dirty="0"/>
+          </a:p>
+        </p:txBody>
+      </p:sp>
+      <p:pic>
+        <p:nvPicPr>
+          <p:cNvPr id="15" name="Image 3" descr="/Users/nstephane/Dev/AI_Data_Science_training/ing-usecase/docs/deck_assets/icons/shield.png">    </p:cNvPr>
+          <p:cNvPicPr>
+            <a:picLocks noChangeAspect="1"/>
+          </p:cNvPicPr>
+          <p:nvPr/>
+        </p:nvPicPr>
+        <p:blipFill>
+          <a:blip r:embed="rId4"/>
+          <a:stretch>
+            <a:fillRect/>
+          </a:stretch>
+        </p:blipFill>
+        <p:spPr>
+          <a:xfrm>
+            <a:off x="621792" y="4206240"/>
+            <a:ext cx="420624" cy="420624"/>
+          </a:xfrm>
+          <a:prstGeom prst="rect">
+            <a:avLst/>
+          </a:prstGeom>
+        </p:spPr>
+      </p:pic>
+      <p:sp>
+        <p:nvSpPr>
+          <p:cNvPr id="16" name="Text 10"/>
+          <p:cNvSpPr txBox="1"/>
+          <p:nvPr/>
+        </p:nvSpPr>
+        <p:spPr>
+          <a:xfrm>
+            <a:off x="1188720" y="4187952"/>
+            <a:ext cx="4782312" cy="274320"/>
+          </a:xfrm>
+          <a:prstGeom prst="rect">
+            <a:avLst/>
+          </a:prstGeom>
+          <a:noFill/>
+          <a:ln/>
+        </p:spPr>
+        <p:txBody>
+          <a:bodyPr wrap="square" lIns="0" tIns="0" rIns="0" bIns="0" rtlCol="0" anchor="ctr"/>
+          <a:lstStyle/>
+          <a:p>
+            <a:pPr indent="0" marL="0">
+              <a:buNone/>
+            </a:pPr>
+            <a:r>
+              <a:rPr lang="en-US" sz="1350" b="1" dirty="0">
+                <a:solidFill>
+                  <a:srgbClr val="14141C"/>
+                </a:solidFill>
+                <a:latin typeface="Helvetica Neue" pitchFamily="34" charset="0"/>
+                <a:ea typeface="Helvetica Neue" pitchFamily="34" charset="-122"/>
+                <a:cs typeface="Helvetica Neue" pitchFamily="34" charset="-120"/>
+              </a:rPr>
+              <a:t>Two contexts, both opt-in and both marked</a:t>
+            </a:r>
+            <a:endParaRPr lang="en-US" sz="1350" dirty="0"/>
+          </a:p>
+        </p:txBody>
+      </p:sp>
+      <p:sp>
+        <p:nvSpPr>
+          <p:cNvPr id="17" name="Text 11"/>
+          <p:cNvSpPr txBox="1"/>
+          <p:nvPr/>
+        </p:nvSpPr>
+        <p:spPr>
+          <a:xfrm>
+            <a:off x="1188720" y="4480560"/>
+            <a:ext cx="4782312" cy="713232"/>
+          </a:xfrm>
+          <a:prstGeom prst="rect">
+            <a:avLst/>
+          </a:prstGeom>
+          <a:noFill/>
+          <a:ln/>
+        </p:spPr>
+        <p:txBody>
+          <a:bodyPr wrap="square" lIns="0" tIns="0" rIns="0" bIns="0" rtlCol="0" anchor="ctr"/>
+          <a:lstStyle/>
+          <a:p>
+            <a:pPr indent="0" marL="0">
+              <a:lnSpc>
+                <a:spcPts val="1500"/>
+              </a:lnSpc>
+              <a:buNone/>
+            </a:pPr>
+            <a:r>
+              <a:rPr lang="en-US" sz="1150" dirty="0">
+                <a:solidFill>
+                  <a:srgbClr val="585868"/>
+                </a:solidFill>
+                <a:latin typeface="Helvetica Neue" pitchFamily="34" charset="0"/>
+                <a:ea typeface="Helvetica Neue" pitchFamily="34" charset="-122"/>
+                <a:cs typeface="Helvetica Neue" pitchFamily="34" charset="-120"/>
+              </a:rPr>
+              <a:t>Search interest for timing, and news themes for reputation (3 of the 11 here). Context is never allowed to stand as evidence that a page performed.</a:t>
+            </a:r>
+            <a:endParaRPr lang="en-US" sz="1150" dirty="0"/>
+          </a:p>
+        </p:txBody>
+      </p:sp>
+      <p:sp>
+        <p:nvSpPr>
+          <p:cNvPr id="18" name="Shape 12"/>
+          <p:cNvSpPr/>
+          <p:nvPr/>
+        </p:nvSpPr>
+        <p:spPr>
+          <a:xfrm>
+            <a:off x="6144768" y="4809744"/>
+            <a:ext cx="5486400" cy="1225296"/>
+          </a:xfrm>
+          <a:prstGeom prst="roundRect">
+            <a:avLst>
+              <a:gd name="adj" fmla="val 4478"/>
+            </a:avLst>
+          </a:prstGeom>
+          <a:solidFill>
+            <a:srgbClr val="FAFAFC"/>
+          </a:solidFill>
+          <a:ln w="12700">
+            <a:solidFill>
+              <a:srgbClr val="E4E4EC"/>
+            </a:solidFill>
+            <a:prstDash val="solid"/>
+          </a:ln>
+        </p:spPr>
+      </p:sp>
+      <p:sp>
+        <p:nvSpPr>
+          <p:cNvPr id="19" name="Text 13"/>
+          <p:cNvSpPr txBox="1"/>
+          <p:nvPr/>
+        </p:nvSpPr>
+        <p:spPr>
+          <a:xfrm>
+            <a:off x="6400800" y="4992624"/>
+            <a:ext cx="4974336" cy="859536"/>
+          </a:xfrm>
+          <a:prstGeom prst="rect">
+            <a:avLst/>
+          </a:prstGeom>
+          <a:noFill/>
+          <a:ln/>
+        </p:spPr>
+        <p:txBody>
+          <a:bodyPr wrap="square" lIns="0" tIns="0" rIns="0" bIns="0" rtlCol="0" anchor="ctr"/>
+          <a:lstStyle/>
+          <a:p>
+            <a:pPr indent="0" marL="0">
+              <a:lnSpc>
+                <a:spcPts val="1700"/>
+              </a:lnSpc>
+              <a:buNone/>
+            </a:pPr>
+            <a:r>
+              <a:rPr lang="en-US" sz="1200" b="1" dirty="0">
+                <a:solidFill>
+                  <a:srgbClr val="FF6200"/>
+                </a:solidFill>
+                <a:latin typeface="Helvetica Neue" pitchFamily="34" charset="0"/>
+                <a:ea typeface="Helvetica Neue" pitchFamily="34" charset="-122"/>
+                <a:cs typeface="Helvetica Neue" pitchFamily="34" charset="-120"/>
+              </a:rPr>
+              <a:t>It writes what to change. It does not re-derive a single number — that direction is one-way by design.</a:t>
+            </a:r>
+            <a:endParaRPr lang="en-US" sz="1200" dirty="0"/>
+          </a:p>
+        </p:txBody>
+      </p:sp>
+    </p:spTree>
+  </p:cSld>
+  <p:clrMapOvr>
+    <a:masterClrMapping/>
+  </p:clrMapOvr>
+</p:sld>
+</file>
+
+<file path=ppt/slides/slide38.xml><?xml version="1.0" encoding="utf-8"?>
+<p:sld xmlns:a="http://schemas.openxmlformats.org/drawingml/2006/main" xmlns:r="http://schemas.openxmlformats.org/officeDocument/2006/relationships" xmlns:p="http://schemas.openxmlformats.org/presentationml/2006/main">
+  <p:cSld name="Slide 2">
+    <p:bg>
+      <p:bgPr>
+        <a:solidFill>
+          <a:srgbClr val="FFFFFF"/>
+        </a:solidFill>
+      </p:bgPr>
+    </p:bg>
+    <p:spTree>
+      <p:nvGrpSpPr>
+        <p:cNvPr id="1" name=""/>
+        <p:cNvGrpSpPr/>
+        <p:nvPr/>
+      </p:nvGrpSpPr>
+      <p:grpSpPr>
+        <a:xfrm>
+          <a:off x="0" y="0"/>
+          <a:ext cx="0" cy="0"/>
+          <a:chOff x="0" y="0"/>
+          <a:chExt cx="0" cy="0"/>
+        </a:xfrm>
+      </p:grpSpPr>
+      <p:sp>
+        <p:nvSpPr>
+          <p:cNvPr id="2" name="Text 0"/>
+          <p:cNvSpPr txBox="1"/>
+          <p:nvPr/>
+        </p:nvSpPr>
+        <p:spPr>
+          <a:xfrm>
+            <a:off x="548640" y="320040"/>
+            <a:ext cx="11064240" cy="640080"/>
+          </a:xfrm>
+          <a:prstGeom prst="rect">
+            <a:avLst/>
+          </a:prstGeom>
+          <a:noFill/>
+          <a:ln/>
+        </p:spPr>
+        <p:txBody>
+          <a:bodyPr wrap="square" lIns="0" tIns="0" rIns="0" bIns="0" rtlCol="0" anchor="ctr"/>
+          <a:lstStyle/>
+          <a:p>
+            <a:pPr indent="0" marL="0">
+              <a:buNone/>
+            </a:pPr>
+            <a:r>
+              <a:rPr lang="en-US" sz="2800" b="1" dirty="0">
+                <a:solidFill>
+                  <a:srgbClr val="14141C"/>
+                </a:solidFill>
+                <a:latin typeface="Helvetica Neue" pitchFamily="34" charset="0"/>
+                <a:ea typeface="Helvetica Neue" pitchFamily="34" charset="-122"/>
+                <a:cs typeface="Helvetica Neue" pitchFamily="34" charset="-120"/>
+              </a:rPr>
+              <a:t>Every recommendation carries the evidence it was argued from</a:t>
+            </a:r>
+            <a:endParaRPr lang="en-US" sz="2800" dirty="0"/>
+          </a:p>
+        </p:txBody>
+      </p:sp>
+      <p:sp>
+        <p:nvSpPr>
+          <p:cNvPr id="3" name="Shape 1"/>
+          <p:cNvSpPr/>
+          <p:nvPr/>
+        </p:nvSpPr>
+        <p:spPr>
+          <a:xfrm>
+            <a:off x="548640" y="960120"/>
+            <a:ext cx="1463040" cy="54864"/>
+          </a:xfrm>
+          <a:prstGeom prst="rect">
+            <a:avLst/>
+          </a:prstGeom>
+          <a:solidFill>
+            <a:srgbClr val="FF6200"/>
+          </a:solidFill>
+          <a:ln w="12700">
+            <a:solidFill>
+              <a:srgbClr val="333333"/>
+            </a:solidFill>
+            <a:prstDash val="solid"/>
+          </a:ln>
+        </p:spPr>
+      </p:sp>
+      <p:sp>
+        <p:nvSpPr>
+          <p:cNvPr id="4" name="Text 2"/>
+          <p:cNvSpPr txBox="1"/>
+          <p:nvPr/>
+        </p:nvSpPr>
+        <p:spPr>
+          <a:xfrm>
+            <a:off x="548640" y="6400800"/>
+            <a:ext cx="8229600" cy="274320"/>
+          </a:xfrm>
+          <a:prstGeom prst="rect">
+            <a:avLst/>
+          </a:prstGeom>
+          <a:noFill/>
+          <a:ln/>
+        </p:spPr>
+        <p:txBody>
+          <a:bodyPr wrap="square" lIns="0" tIns="0" rIns="0" bIns="0" rtlCol="0" anchor="ctr"/>
+          <a:lstStyle/>
+          <a:p>
+            <a:pPr indent="0" marL="0">
+              <a:buNone/>
+            </a:pPr>
+            <a:r>
+              <a:rPr lang="en-US" sz="1000" dirty="0">
+                <a:solidFill>
+                  <a:srgbClr val="585868"/>
+                </a:solidFill>
+                <a:latin typeface="Helvetica Neue" pitchFamily="34" charset="0"/>
+                <a:ea typeface="Helvetica Neue" pitchFamily="34" charset="-122"/>
+                <a:cs typeface="Helvetica Neue" pitchFamily="34" charset="-120"/>
+              </a:rPr>
+              <a:t>Banking Campaigns Comparator · ING DACI / Customer AI · September 2026</a:t>
+            </a:r>
+            <a:endParaRPr lang="en-US" sz="1000" dirty="0"/>
+          </a:p>
+        </p:txBody>
+      </p:sp>
+      <p:sp>
+        <p:nvSpPr>
+          <p:cNvPr id="5" name="Text 3"/>
+          <p:cNvSpPr txBox="1"/>
+          <p:nvPr/>
+        </p:nvSpPr>
+        <p:spPr>
+          <a:xfrm>
+            <a:off x="11091672" y="6400800"/>
+            <a:ext cx="548640" cy="274320"/>
+          </a:xfrm>
+          <a:prstGeom prst="rect">
+            <a:avLst/>
+          </a:prstGeom>
+          <a:noFill/>
+          <a:ln/>
+        </p:spPr>
+        <p:txBody>
+          <a:bodyPr wrap="square" lIns="0" tIns="0" rIns="0" bIns="0" rtlCol="0" anchor="ctr"/>
+          <a:lstStyle/>
+          <a:p>
+            <a:pPr algn="r" indent="0" marL="0">
+              <a:buNone/>
+            </a:pPr>
+            <a:r>
+              <a:rPr lang="en-US" sz="1000" dirty="0">
+                <a:solidFill>
+                  <a:srgbClr val="585868"/>
+                </a:solidFill>
+                <a:latin typeface="Helvetica Neue" pitchFamily="34" charset="0"/>
+                <a:ea typeface="Helvetica Neue" pitchFamily="34" charset="-122"/>
+                <a:cs typeface="Helvetica Neue" pitchFamily="34" charset="-120"/>
+              </a:rPr>
+              <a:t>14</a:t>
+            </a:r>
+            <a:endParaRPr lang="en-US" sz="1000" dirty="0"/>
+          </a:p>
+        </p:txBody>
+      </p:sp>
+      <p:sp>
+        <p:nvSpPr>
+          <p:cNvPr id="6" name="Shape 4"/>
+          <p:cNvSpPr/>
+          <p:nvPr/>
+        </p:nvSpPr>
+        <p:spPr>
+          <a:xfrm>
+            <a:off x="626364" y="1229868"/>
+            <a:ext cx="6373368" cy="4178808"/>
+          </a:xfrm>
+          <a:prstGeom prst="rect">
+            <a:avLst/>
+          </a:prstGeom>
+          <a:solidFill>
+            <a:srgbClr val="FFFFFF"/>
+          </a:solidFill>
+          <a:ln w="12700">
+            <a:solidFill>
+              <a:srgbClr val="E4E4EC"/>
+            </a:solidFill>
+            <a:prstDash val="solid"/>
+          </a:ln>
+        </p:spPr>
+      </p:sp>
+      <p:pic>
+        <p:nvPicPr>
+          <p:cNvPr id="7" name="Image 0" descr="/Users/nstephane/Dev/AI_Data_Science_training/ing-usecase/docs/deck_assets/rec_cards.png">    </p:cNvPr>
+          <p:cNvPicPr>
+            <a:picLocks noChangeAspect="1"/>
+          </p:cNvPicPr>
+          <p:nvPr/>
+        </p:nvPicPr>
+        <p:blipFill>
+          <a:blip r:embed="rId1"/>
+          <a:stretch>
+            <a:fillRect/>
+          </a:stretch>
+        </p:blipFill>
+        <p:spPr>
+          <a:xfrm>
+            <a:off x="658368" y="1261872"/>
+            <a:ext cx="6309360" cy="4114800"/>
+          </a:xfrm>
+          <a:prstGeom prst="rect">
+            <a:avLst/>
+          </a:prstGeom>
+        </p:spPr>
+      </p:pic>
+      <p:sp>
+        <p:nvSpPr>
+          <p:cNvPr id="8" name="Text 5"/>
+          <p:cNvSpPr txBox="1"/>
+          <p:nvPr/>
+        </p:nvSpPr>
+        <p:spPr>
+          <a:xfrm>
+            <a:off x="658368" y="5486400"/>
+            <a:ext cx="6309360" cy="292608"/>
+          </a:xfrm>
+          <a:prstGeom prst="rect">
+            <a:avLst/>
+          </a:prstGeom>
+          <a:noFill/>
+          <a:ln/>
+        </p:spPr>
+        <p:txBody>
+          <a:bodyPr wrap="square" lIns="0" tIns="0" rIns="0" bIns="0" rtlCol="0" anchor="ctr"/>
+          <a:lstStyle/>
+          <a:p>
+            <a:pPr indent="0" marL="0">
+              <a:buNone/>
+            </a:pPr>
+            <a:r>
+              <a:rPr lang="en-US" sz="1050" i="1" dirty="0">
+                <a:solidFill>
+                  <a:srgbClr val="585868"/>
+                </a:solidFill>
+                <a:latin typeface="Helvetica Neue" pitchFamily="34" charset="0"/>
+                <a:ea typeface="Helvetica Neue" pitchFamily="34" charset="-122"/>
+                <a:cs typeface="Helvetica Neue" pitchFamily="34" charset="-120"/>
+              </a:rPr>
+              <a:t>Three of the eleven, as the team reviews them.</a:t>
+            </a:r>
+            <a:endParaRPr lang="en-US" sz="1050" dirty="0"/>
+          </a:p>
+        </p:txBody>
+      </p:sp>
+      <p:pic>
+        <p:nvPicPr>
+          <p:cNvPr id="9" name="Image 1" descr="/Users/nstephane/Dev/AI_Data_Science_training/ing-usecase/docs/deck_assets/icons/list.png">    </p:cNvPr>
+          <p:cNvPicPr>
+            <a:picLocks noChangeAspect="1"/>
+          </p:cNvPicPr>
+          <p:nvPr/>
+        </p:nvPicPr>
+        <p:blipFill>
+          <a:blip r:embed="rId2"/>
+          <a:stretch>
+            <a:fillRect/>
+          </a:stretch>
+        </p:blipFill>
+        <p:spPr>
+          <a:xfrm>
+            <a:off x="7260336" y="1371600"/>
+            <a:ext cx="420624" cy="420624"/>
+          </a:xfrm>
+          <a:prstGeom prst="rect">
+            <a:avLst/>
+          </a:prstGeom>
+        </p:spPr>
+      </p:pic>
+      <p:sp>
+        <p:nvSpPr>
+          <p:cNvPr id="10" name="Text 6"/>
+          <p:cNvSpPr txBox="1"/>
+          <p:nvPr/>
+        </p:nvSpPr>
+        <p:spPr>
+          <a:xfrm>
+            <a:off x="7827264" y="1353312"/>
+            <a:ext cx="3694176" cy="274320"/>
+          </a:xfrm>
+          <a:prstGeom prst="rect">
+            <a:avLst/>
+          </a:prstGeom>
+          <a:noFill/>
+          <a:ln/>
+        </p:spPr>
+        <p:txBody>
+          <a:bodyPr wrap="square" lIns="0" tIns="0" rIns="0" bIns="0" rtlCol="0" anchor="ctr"/>
+          <a:lstStyle/>
+          <a:p>
+            <a:pPr indent="0" marL="0">
+              <a:buNone/>
+            </a:pPr>
+            <a:r>
+              <a:rPr lang="en-US" sz="1350" b="1" dirty="0">
+                <a:solidFill>
+                  <a:srgbClr val="14141C"/>
+                </a:solidFill>
+                <a:latin typeface="Helvetica Neue" pitchFamily="34" charset="0"/>
+                <a:ea typeface="Helvetica Neue" pitchFamily="34" charset="-122"/>
+                <a:cs typeface="Helvetica Neue" pitchFamily="34" charset="-120"/>
+              </a:rPr>
+              <a:t>Finding and action, kept apart</a:t>
+            </a:r>
+            <a:endParaRPr lang="en-US" sz="1350" dirty="0"/>
+          </a:p>
+        </p:txBody>
+      </p:sp>
+      <p:sp>
+        <p:nvSpPr>
+          <p:cNvPr id="11" name="Text 7"/>
+          <p:cNvSpPr txBox="1"/>
+          <p:nvPr/>
+        </p:nvSpPr>
+        <p:spPr>
+          <a:xfrm>
+            <a:off x="7827264" y="1645920"/>
+            <a:ext cx="3694176" cy="713232"/>
+          </a:xfrm>
+          <a:prstGeom prst="rect">
+            <a:avLst/>
+          </a:prstGeom>
+          <a:noFill/>
+          <a:ln/>
+        </p:spPr>
+        <p:txBody>
+          <a:bodyPr wrap="square" lIns="0" tIns="0" rIns="0" bIns="0" rtlCol="0" anchor="ctr"/>
+          <a:lstStyle/>
+          <a:p>
+            <a:pPr indent="0" marL="0">
+              <a:lnSpc>
+                <a:spcPts val="1500"/>
+              </a:lnSpc>
+              <a:buNone/>
+            </a:pPr>
+            <a:r>
+              <a:rPr lang="en-US" sz="1150" dirty="0">
+                <a:solidFill>
+                  <a:srgbClr val="585868"/>
+                </a:solidFill>
+                <a:latin typeface="Helvetica Neue" pitchFamily="34" charset="0"/>
+                <a:ea typeface="Helvetica Neue" pitchFamily="34" charset="-122"/>
+                <a:cs typeface="Helvetica Neue" pitchFamily="34" charset="-120"/>
+              </a:rPr>
+              <a:t>What the data shows sits above what to do. A reader can reject our suggested action and still keep the measured finding.</a:t>
+            </a:r>
+            <a:endParaRPr lang="en-US" sz="1150" dirty="0"/>
+          </a:p>
+        </p:txBody>
+      </p:sp>
+      <p:pic>
+        <p:nvPicPr>
+          <p:cNvPr id="12" name="Image 2" descr="/Users/nstephane/Dev/AI_Data_Science_training/ing-usecase/docs/deck_assets/icons/target.png">    </p:cNvPr>
+          <p:cNvPicPr>
+            <a:picLocks noChangeAspect="1"/>
+          </p:cNvPicPr>
+          <p:nvPr/>
+        </p:nvPicPr>
+        <p:blipFill>
+          <a:blip r:embed="rId3"/>
+          <a:stretch>
+            <a:fillRect/>
+          </a:stretch>
+        </p:blipFill>
+        <p:spPr>
+          <a:xfrm>
+            <a:off x="7260336" y="2944368"/>
+            <a:ext cx="420624" cy="420624"/>
+          </a:xfrm>
+          <a:prstGeom prst="rect">
+            <a:avLst/>
+          </a:prstGeom>
+        </p:spPr>
+      </p:pic>
+      <p:sp>
+        <p:nvSpPr>
+          <p:cNvPr id="13" name="Text 8"/>
+          <p:cNvSpPr txBox="1"/>
+          <p:nvPr/>
+        </p:nvSpPr>
+        <p:spPr>
+          <a:xfrm>
+            <a:off x="7827264" y="2926080"/>
+            <a:ext cx="3694176" cy="274320"/>
+          </a:xfrm>
+          <a:prstGeom prst="rect">
+            <a:avLst/>
+          </a:prstGeom>
+          <a:noFill/>
+          <a:ln/>
+        </p:spPr>
+        <p:txBody>
+          <a:bodyPr wrap="square" lIns="0" tIns="0" rIns="0" bIns="0" rtlCol="0" anchor="ctr"/>
+          <a:lstStyle/>
+          <a:p>
+            <a:pPr indent="0" marL="0">
+              <a:buNone/>
+            </a:pPr>
+            <a:r>
+              <a:rPr lang="en-US" sz="1350" b="1" dirty="0">
+                <a:solidFill>
+                  <a:srgbClr val="14141C"/>
+                </a:solidFill>
+                <a:latin typeface="Helvetica Neue" pitchFamily="34" charset="0"/>
+                <a:ea typeface="Helvetica Neue" pitchFamily="34" charset="-122"/>
+                <a:cs typeface="Helvetica Neue" pitchFamily="34" charset="-120"/>
+              </a:rPr>
+              <a:t>Named features, checked before release</a:t>
+            </a:r>
+            <a:endParaRPr lang="en-US" sz="1350" dirty="0"/>
+          </a:p>
+        </p:txBody>
+      </p:sp>
+      <p:sp>
+        <p:nvSpPr>
+          <p:cNvPr id="14" name="Text 9"/>
+          <p:cNvSpPr txBox="1"/>
+          <p:nvPr/>
+        </p:nvSpPr>
+        <p:spPr>
+          <a:xfrm>
+            <a:off x="7827264" y="3218688"/>
+            <a:ext cx="3694176" cy="713232"/>
+          </a:xfrm>
+          <a:prstGeom prst="rect">
+            <a:avLst/>
+          </a:prstGeom>
+          <a:noFill/>
+          <a:ln/>
+        </p:spPr>
+        <p:txBody>
+          <a:bodyPr wrap="square" lIns="0" tIns="0" rIns="0" bIns="0" rtlCol="0" anchor="ctr"/>
+          <a:lstStyle/>
+          <a:p>
+            <a:pPr indent="0" marL="0">
+              <a:lnSpc>
+                <a:spcPts val="1500"/>
+              </a:lnSpc>
+              <a:buNone/>
+            </a:pPr>
+            <a:r>
+              <a:rPr lang="en-US" sz="1150" dirty="0">
+                <a:solidFill>
+                  <a:srgbClr val="585868"/>
+                </a:solidFill>
+                <a:latin typeface="Helvetica Neue" pitchFamily="34" charset="0"/>
+                <a:ea typeface="Helvetica Neue" pitchFamily="34" charset="-122"/>
+                <a:cs typeface="Helvetica Neue" pitchFamily="34" charset="-120"/>
+              </a:rPr>
+              <a:t>Each card names the measured features it was argued from and the pages it applies to. Those ids are verified against the report — an invented one never leaves the module.</a:t>
+            </a:r>
+            <a:endParaRPr lang="en-US" sz="1150" dirty="0"/>
+          </a:p>
+        </p:txBody>
+      </p:sp>
+      <p:pic>
+        <p:nvPicPr>
+          <p:cNvPr id="15" name="Image 3" descr="/Users/nstephane/Dev/AI_Data_Science_training/ing-usecase/docs/deck_assets/icons/shield.png">    </p:cNvPr>
+          <p:cNvPicPr>
+            <a:picLocks noChangeAspect="1"/>
+          </p:cNvPicPr>
+          <p:nvPr/>
+        </p:nvPicPr>
+        <p:blipFill>
+          <a:blip r:embed="rId4"/>
+          <a:stretch>
+            <a:fillRect/>
+          </a:stretch>
+        </p:blipFill>
+        <p:spPr>
+          <a:xfrm>
+            <a:off x="7260336" y="4517136"/>
+            <a:ext cx="420624" cy="420624"/>
+          </a:xfrm>
+          <a:prstGeom prst="rect">
+            <a:avLst/>
+          </a:prstGeom>
+        </p:spPr>
+      </p:pic>
+      <p:sp>
+        <p:nvSpPr>
+          <p:cNvPr id="16" name="Text 10"/>
+          <p:cNvSpPr txBox="1"/>
+          <p:nvPr/>
+        </p:nvSpPr>
+        <p:spPr>
+          <a:xfrm>
+            <a:off x="7827264" y="4498848"/>
+            <a:ext cx="3694176" cy="274320"/>
+          </a:xfrm>
+          <a:prstGeom prst="rect">
+            <a:avLst/>
+          </a:prstGeom>
+          <a:noFill/>
+          <a:ln/>
+        </p:spPr>
+        <p:txBody>
+          <a:bodyPr wrap="square" lIns="0" tIns="0" rIns="0" bIns="0" rtlCol="0" anchor="ctr"/>
+          <a:lstStyle/>
+          <a:p>
+            <a:pPr indent="0" marL="0">
+              <a:buNone/>
+            </a:pPr>
+            <a:r>
+              <a:rPr lang="en-US" sz="1350" b="1" dirty="0">
+                <a:solidFill>
+                  <a:srgbClr val="14141C"/>
+                </a:solidFill>
+                <a:latin typeface="Helvetica Neue" pitchFamily="34" charset="0"/>
+                <a:ea typeface="Helvetica Neue" pitchFamily="34" charset="-122"/>
+                <a:cs typeface="Helvetica Neue" pitchFamily="34" charset="-120"/>
+              </a:rPr>
+              <a:t>No figure the analysis did not produce</a:t>
+            </a:r>
+            <a:endParaRPr lang="en-US" sz="1350" dirty="0"/>
+          </a:p>
+        </p:txBody>
+      </p:sp>
+      <p:sp>
+        <p:nvSpPr>
+          <p:cNvPr id="17" name="Text 11"/>
+          <p:cNvSpPr txBox="1"/>
+          <p:nvPr/>
+        </p:nvSpPr>
+        <p:spPr>
+          <a:xfrm>
+            <a:off x="7827264" y="4791456"/>
+            <a:ext cx="3694176" cy="713232"/>
+          </a:xfrm>
+          <a:prstGeom prst="rect">
+            <a:avLst/>
+          </a:prstGeom>
+          <a:noFill/>
+          <a:ln/>
+        </p:spPr>
+        <p:txBody>
+          <a:bodyPr wrap="square" lIns="0" tIns="0" rIns="0" bIns="0" rtlCol="0" anchor="ctr"/>
+          <a:lstStyle/>
+          <a:p>
+            <a:pPr indent="0" marL="0">
+              <a:lnSpc>
+                <a:spcPts val="1500"/>
+              </a:lnSpc>
+              <a:buNone/>
+            </a:pPr>
+            <a:r>
+              <a:rPr lang="en-US" sz="1150" dirty="0">
+                <a:solidFill>
+                  <a:srgbClr val="585868"/>
+                </a:solidFill>
+                <a:latin typeface="Helvetica Neue" pitchFamily="34" charset="0"/>
+                <a:ea typeface="Helvetica Neue" pitchFamily="34" charset="-122"/>
+                <a:cs typeface="Helvetica Neue" pitchFamily="34" charset="-120"/>
+              </a:rPr>
+              <a:t>The prompt receives only numbers already in the report, and the output is not trusted to add any.</a:t>
+            </a:r>
+            <a:endParaRPr lang="en-US" sz="1150" dirty="0"/>
+          </a:p>
+        </p:txBody>
+      </p:sp>
+    </p:spTree>
+  </p:cSld>
+  <p:clrMapOvr>
+    <a:masterClrMapping/>
+  </p:clrMapOvr>
+</p:sld>
+</file>
+
+<file path=ppt/slides/slide39.xml><?xml version="1.0" encoding="utf-8"?>
+<p:sld xmlns:a="http://schemas.openxmlformats.org/drawingml/2006/main" xmlns:r="http://schemas.openxmlformats.org/officeDocument/2006/relationships" xmlns:p="http://schemas.openxmlformats.org/presentationml/2006/main">
+  <p:cSld name="Slide 3">
+    <p:bg>
+      <p:bgPr>
+        <a:solidFill>
+          <a:srgbClr val="FFFFFF"/>
+        </a:solidFill>
+      </p:bgPr>
+    </p:bg>
+    <p:spTree>
+      <p:nvGrpSpPr>
+        <p:cNvPr id="1" name=""/>
+        <p:cNvGrpSpPr/>
+        <p:nvPr/>
+      </p:nvGrpSpPr>
+      <p:grpSpPr>
+        <a:xfrm>
+          <a:off x="0" y="0"/>
+          <a:ext cx="0" cy="0"/>
+          <a:chOff x="0" y="0"/>
+          <a:chExt cx="0" cy="0"/>
+        </a:xfrm>
+      </p:grpSpPr>
+      <p:sp>
+        <p:nvSpPr>
+          <p:cNvPr id="2" name="Text 0"/>
+          <p:cNvSpPr txBox="1"/>
+          <p:nvPr/>
+        </p:nvSpPr>
+        <p:spPr>
+          <a:xfrm>
+            <a:off x="548640" y="384048"/>
+            <a:ext cx="11064240" cy="731520"/>
+          </a:xfrm>
+          <a:prstGeom prst="rect">
+            <a:avLst/>
+          </a:prstGeom>
+          <a:noFill/>
+          <a:ln/>
+        </p:spPr>
+        <p:txBody>
+          <a:bodyPr wrap="square" lIns="0" tIns="0" rIns="0" bIns="0" rtlCol="0" anchor="ctr"/>
+          <a:lstStyle/>
+          <a:p>
+            <a:pPr indent="0" marL="0">
+              <a:buNone/>
+            </a:pPr>
+            <a:r>
+              <a:rPr lang="en-US" sz="2800" b="1" dirty="0">
+                <a:solidFill>
+                  <a:srgbClr val="14141C"/>
+                </a:solidFill>
+                <a:latin typeface="Helvetica Neue" pitchFamily="34" charset="0"/>
+                <a:ea typeface="Helvetica Neue" pitchFamily="34" charset="-122"/>
+                <a:cs typeface="Helvetica Neue" pitchFamily="34" charset="-120"/>
+              </a:rPr>
+              <a:t>What it concluded about ING</a:t>
+            </a:r>
+            <a:endParaRPr lang="en-US" sz="2800" dirty="0"/>
+          </a:p>
+        </p:txBody>
+      </p:sp>
+      <p:sp>
+        <p:nvSpPr>
+          <p:cNvPr id="3" name="Shape 1"/>
+          <p:cNvSpPr/>
+          <p:nvPr/>
+        </p:nvSpPr>
+        <p:spPr>
+          <a:xfrm>
+            <a:off x="548640" y="1115568"/>
+            <a:ext cx="1463040" cy="64008"/>
+          </a:xfrm>
+          <a:prstGeom prst="rect">
+            <a:avLst/>
+          </a:prstGeom>
+          <a:solidFill>
+            <a:srgbClr val="FF6200"/>
+          </a:solidFill>
+          <a:ln w="12700">
+            <a:solidFill>
+              <a:srgbClr val="333333"/>
+            </a:solidFill>
+            <a:prstDash val="solid"/>
+          </a:ln>
+        </p:spPr>
+      </p:sp>
+      <p:sp>
+        <p:nvSpPr>
+          <p:cNvPr id="4" name="Text 2"/>
+          <p:cNvSpPr txBox="1"/>
+          <p:nvPr/>
+        </p:nvSpPr>
+        <p:spPr>
+          <a:xfrm>
+            <a:off x="548640" y="6400800"/>
+            <a:ext cx="8229600" cy="274320"/>
+          </a:xfrm>
+          <a:prstGeom prst="rect">
+            <a:avLst/>
+          </a:prstGeom>
+          <a:noFill/>
+          <a:ln/>
+        </p:spPr>
+        <p:txBody>
+          <a:bodyPr wrap="square" lIns="0" tIns="0" rIns="0" bIns="0" rtlCol="0" anchor="ctr"/>
+          <a:lstStyle/>
+          <a:p>
+            <a:pPr indent="0" marL="0">
+              <a:buNone/>
+            </a:pPr>
+            <a:r>
+              <a:rPr lang="en-US" sz="1000" dirty="0">
+                <a:solidFill>
+                  <a:srgbClr val="585868"/>
+                </a:solidFill>
+                <a:latin typeface="Helvetica Neue" pitchFamily="34" charset="0"/>
+                <a:ea typeface="Helvetica Neue" pitchFamily="34" charset="-122"/>
+                <a:cs typeface="Helvetica Neue" pitchFamily="34" charset="-120"/>
+              </a:rPr>
+              <a:t>Banking Campaigns Comparator · ING DACI / Customer AI · September 2026</a:t>
+            </a:r>
+            <a:endParaRPr lang="en-US" sz="1000" dirty="0"/>
+          </a:p>
+        </p:txBody>
+      </p:sp>
+      <p:sp>
+        <p:nvSpPr>
+          <p:cNvPr id="5" name="Text 3"/>
+          <p:cNvSpPr txBox="1"/>
+          <p:nvPr/>
+        </p:nvSpPr>
+        <p:spPr>
+          <a:xfrm>
+            <a:off x="11091672" y="6400800"/>
+            <a:ext cx="548640" cy="274320"/>
+          </a:xfrm>
+          <a:prstGeom prst="rect">
+            <a:avLst/>
+          </a:prstGeom>
+          <a:noFill/>
+          <a:ln/>
+        </p:spPr>
+        <p:txBody>
+          <a:bodyPr wrap="square" lIns="0" tIns="0" rIns="0" bIns="0" rtlCol="0" anchor="ctr"/>
+          <a:lstStyle/>
+          <a:p>
+            <a:pPr algn="r" indent="0" marL="0">
+              <a:buNone/>
+            </a:pPr>
+            <a:r>
+              <a:rPr lang="en-US" sz="1000" dirty="0">
+                <a:solidFill>
+                  <a:srgbClr val="585868"/>
+                </a:solidFill>
+                <a:latin typeface="Helvetica Neue" pitchFamily="34" charset="0"/>
+                <a:ea typeface="Helvetica Neue" pitchFamily="34" charset="-122"/>
+                <a:cs typeface="Helvetica Neue" pitchFamily="34" charset="-120"/>
+              </a:rPr>
+              <a:t>15</a:t>
+            </a:r>
+            <a:endParaRPr lang="en-US" sz="1000" dirty="0"/>
+          </a:p>
+        </p:txBody>
+      </p:sp>
+      <p:sp>
+        <p:nvSpPr>
+          <p:cNvPr id="6" name="Shape 4"/>
+          <p:cNvSpPr/>
+          <p:nvPr/>
+        </p:nvSpPr>
+        <p:spPr>
+          <a:xfrm>
+            <a:off x="621792" y="1517904"/>
+            <a:ext cx="3529584" cy="2212848"/>
+          </a:xfrm>
+          <a:prstGeom prst="roundRect">
+            <a:avLst>
+              <a:gd name="adj" fmla="val 2479"/>
+            </a:avLst>
+          </a:prstGeom>
+          <a:solidFill>
+            <a:srgbClr val="FAFAFC"/>
+          </a:solidFill>
+          <a:ln w="12700">
+            <a:solidFill>
+              <a:srgbClr val="E4E4EC"/>
+            </a:solidFill>
+            <a:prstDash val="solid"/>
+          </a:ln>
+        </p:spPr>
+      </p:sp>
+      <p:sp>
+        <p:nvSpPr>
+          <p:cNvPr id="7" name="Text 5"/>
+          <p:cNvSpPr txBox="1"/>
+          <p:nvPr/>
+        </p:nvSpPr>
+        <p:spPr>
+          <a:xfrm>
+            <a:off x="877824" y="1682496"/>
+            <a:ext cx="3017520" cy="841248"/>
+          </a:xfrm>
+          <a:prstGeom prst="rect">
+            <a:avLst/>
+          </a:prstGeom>
+          <a:noFill/>
+          <a:ln/>
+        </p:spPr>
+        <p:txBody>
+          <a:bodyPr wrap="square" lIns="0" tIns="0" rIns="0" bIns="0" rtlCol="0" anchor="ctr"/>
+          <a:lstStyle/>
+          <a:p>
+            <a:pPr indent="0" marL="0">
+              <a:buNone/>
+            </a:pPr>
+            <a:r>
+              <a:rPr lang="en-US" sz="4600" b="1" dirty="0">
+                <a:solidFill>
+                  <a:srgbClr val="FF6200"/>
+                </a:solidFill>
+                <a:latin typeface="Helvetica Neue" pitchFamily="34" charset="0"/>
+                <a:ea typeface="Helvetica Neue" pitchFamily="34" charset="-122"/>
+                <a:cs typeface="Helvetica Neue" pitchFamily="34" charset="-120"/>
+              </a:rPr>
+              <a:t>4.0</a:t>
+            </a:r>
+            <a:endParaRPr lang="en-US" sz="4600" dirty="0"/>
+          </a:p>
+        </p:txBody>
+      </p:sp>
+      <p:sp>
+        <p:nvSpPr>
+          <p:cNvPr id="8" name="Text 6"/>
+          <p:cNvSpPr txBox="1"/>
+          <p:nvPr/>
+        </p:nvSpPr>
+        <p:spPr>
+          <a:xfrm>
+            <a:off x="877824" y="2505456"/>
+            <a:ext cx="3017520" cy="310896"/>
+          </a:xfrm>
+          <a:prstGeom prst="rect">
+            <a:avLst/>
+          </a:prstGeom>
+          <a:noFill/>
+          <a:ln/>
+        </p:spPr>
+        <p:txBody>
+          <a:bodyPr wrap="square" lIns="0" tIns="0" rIns="0" bIns="0" rtlCol="0" anchor="ctr"/>
+          <a:lstStyle/>
+          <a:p>
+            <a:pPr indent="0" marL="0">
+              <a:buNone/>
+            </a:pPr>
+            <a:r>
+              <a:rPr lang="en-US" sz="1200" b="1" dirty="0">
+                <a:solidFill>
+                  <a:srgbClr val="14141C"/>
+                </a:solidFill>
+                <a:latin typeface="Helvetica Neue" pitchFamily="34" charset="0"/>
+                <a:ea typeface="Helvetica Neue" pitchFamily="34" charset="-122"/>
+                <a:cs typeface="Helvetica Neue" pitchFamily="34" charset="-120"/>
+              </a:rPr>
+              <a:t>urgency markers per page</a:t>
+            </a:r>
+            <a:endParaRPr lang="en-US" sz="1200" dirty="0"/>
+          </a:p>
+        </p:txBody>
+      </p:sp>
+      <p:sp>
+        <p:nvSpPr>
+          <p:cNvPr id="9" name="Text 7"/>
+          <p:cNvSpPr txBox="1"/>
+          <p:nvPr/>
+        </p:nvSpPr>
+        <p:spPr>
+          <a:xfrm>
+            <a:off x="877824" y="2834640"/>
+            <a:ext cx="3017520" cy="786384"/>
+          </a:xfrm>
+          <a:prstGeom prst="rect">
+            <a:avLst/>
+          </a:prstGeom>
+          <a:noFill/>
+          <a:ln/>
+        </p:spPr>
+        <p:txBody>
+          <a:bodyPr wrap="square" lIns="0" tIns="0" rIns="0" bIns="0" rtlCol="0" anchor="ctr"/>
+          <a:lstStyle/>
+          <a:p>
+            <a:pPr indent="0" marL="0">
+              <a:lnSpc>
+                <a:spcPts val="1400"/>
+              </a:lnSpc>
+              <a:buNone/>
+            </a:pPr>
+            <a:r>
+              <a:rPr lang="en-US" sz="1050" dirty="0">
+                <a:solidFill>
+                  <a:srgbClr val="585868"/>
+                </a:solidFill>
+                <a:latin typeface="Helvetica Neue" pitchFamily="34" charset="0"/>
+                <a:ea typeface="Helvetica Neue" pitchFamily="34" charset="-122"/>
+                <a:cs typeface="Helvetica Neue" pitchFamily="34" charset="-120"/>
+              </a:rPr>
+              <a:t>against a peer mean of 0.64 — about 3.7 standard deviations above the set, and ING's strongest measured signature.</a:t>
+            </a:r>
+            <a:endParaRPr lang="en-US" sz="1050" dirty="0"/>
+          </a:p>
+        </p:txBody>
+      </p:sp>
+      <p:sp>
+        <p:nvSpPr>
+          <p:cNvPr id="10" name="Shape 8"/>
+          <p:cNvSpPr/>
+          <p:nvPr/>
+        </p:nvSpPr>
+        <p:spPr>
+          <a:xfrm>
+            <a:off x="4480560" y="1517904"/>
+            <a:ext cx="3529584" cy="2212848"/>
+          </a:xfrm>
+          <a:prstGeom prst="roundRect">
+            <a:avLst>
+              <a:gd name="adj" fmla="val 2479"/>
+            </a:avLst>
+          </a:prstGeom>
+          <a:solidFill>
+            <a:srgbClr val="FAFAFC"/>
+          </a:solidFill>
+          <a:ln w="12700">
+            <a:solidFill>
+              <a:srgbClr val="E4E4EC"/>
+            </a:solidFill>
+            <a:prstDash val="solid"/>
+          </a:ln>
+        </p:spPr>
+      </p:sp>
+      <p:sp>
+        <p:nvSpPr>
+          <p:cNvPr id="11" name="Text 9"/>
+          <p:cNvSpPr txBox="1"/>
+          <p:nvPr/>
+        </p:nvSpPr>
+        <p:spPr>
+          <a:xfrm>
+            <a:off x="4736592" y="1682496"/>
+            <a:ext cx="3017520" cy="841248"/>
+          </a:xfrm>
+          <a:prstGeom prst="rect">
+            <a:avLst/>
+          </a:prstGeom>
+          <a:noFill/>
+          <a:ln/>
+        </p:spPr>
+        <p:txBody>
+          <a:bodyPr wrap="square" lIns="0" tIns="0" rIns="0" bIns="0" rtlCol="0" anchor="ctr"/>
+          <a:lstStyle/>
+          <a:p>
+            <a:pPr indent="0" marL="0">
+              <a:buNone/>
+            </a:pPr>
+            <a:r>
+              <a:rPr lang="en-US" sz="4600" b="1" dirty="0">
+                <a:solidFill>
+                  <a:srgbClr val="FF6200"/>
+                </a:solidFill>
+                <a:latin typeface="Helvetica Neue" pitchFamily="34" charset="0"/>
+                <a:ea typeface="Helvetica Neue" pitchFamily="34" charset="-122"/>
+                <a:cs typeface="Helvetica Neue" pitchFamily="34" charset="-120"/>
+              </a:rPr>
+              <a:t>11,149px</a:t>
+            </a:r>
+            <a:endParaRPr lang="en-US" sz="4600" dirty="0"/>
+          </a:p>
+        </p:txBody>
+      </p:sp>
+      <p:sp>
+        <p:nvSpPr>
+          <p:cNvPr id="12" name="Text 10"/>
+          <p:cNvSpPr txBox="1"/>
+          <p:nvPr/>
+        </p:nvSpPr>
+        <p:spPr>
+          <a:xfrm>
+            <a:off x="4736592" y="2505456"/>
+            <a:ext cx="3017520" cy="310896"/>
+          </a:xfrm>
+          <a:prstGeom prst="rect">
+            <a:avLst/>
+          </a:prstGeom>
+          <a:noFill/>
+          <a:ln/>
+        </p:spPr>
+        <p:txBody>
+          <a:bodyPr wrap="square" lIns="0" tIns="0" rIns="0" bIns="0" rtlCol="0" anchor="ctr"/>
+          <a:lstStyle/>
+          <a:p>
+            <a:pPr indent="0" marL="0">
+              <a:buNone/>
+            </a:pPr>
+            <a:r>
+              <a:rPr lang="en-US" sz="1200" b="1" dirty="0">
+                <a:solidFill>
+                  <a:srgbClr val="14141C"/>
+                </a:solidFill>
+                <a:latin typeface="Helvetica Neue" pitchFamily="34" charset="0"/>
+                <a:ea typeface="Helvetica Neue" pitchFamily="34" charset="-122"/>
+                <a:cs typeface="Helvetica Neue" pitchFamily="34" charset="-120"/>
+              </a:rPr>
+              <a:t>page height, against 6,412px</a:t>
+            </a:r>
+            <a:endParaRPr lang="en-US" sz="1200" dirty="0"/>
+          </a:p>
+        </p:txBody>
+      </p:sp>
+      <p:sp>
+        <p:nvSpPr>
+          <p:cNvPr id="13" name="Text 11"/>
+          <p:cNvSpPr txBox="1"/>
+          <p:nvPr/>
+        </p:nvSpPr>
+        <p:spPr>
+          <a:xfrm>
+            <a:off x="4736592" y="2834640"/>
+            <a:ext cx="3017520" cy="786384"/>
+          </a:xfrm>
+          <a:prstGeom prst="rect">
+            <a:avLst/>
+          </a:prstGeom>
+          <a:noFill/>
+          <a:ln/>
+        </p:spPr>
+        <p:txBody>
+          <a:bodyPr wrap="square" lIns="0" tIns="0" rIns="0" bIns="0" rtlCol="0" anchor="ctr"/>
+          <a:lstStyle/>
+          <a:p>
+            <a:pPr indent="0" marL="0">
+              <a:lnSpc>
+                <a:spcPts val="1400"/>
+              </a:lnSpc>
+              <a:buNone/>
+            </a:pPr>
+            <a:r>
+              <a:rPr lang="en-US" sz="1050" dirty="0">
+                <a:solidFill>
+                  <a:srgbClr val="585868"/>
+                </a:solidFill>
+                <a:latin typeface="Helvetica Neue" pitchFamily="34" charset="0"/>
+                <a:ea typeface="Helvetica Neue" pitchFamily="34" charset="-122"/>
+                <a:cs typeface="Helvetica Neue" pitchFamily="34" charset="-120"/>
+              </a:rPr>
+              <a:t>ING's pages run about 74% longer than the set, so the offer sits further from the top.</a:t>
+            </a:r>
+            <a:endParaRPr lang="en-US" sz="1050" dirty="0"/>
+          </a:p>
+        </p:txBody>
+      </p:sp>
+      <p:sp>
+        <p:nvSpPr>
+          <p:cNvPr id="14" name="Shape 12"/>
+          <p:cNvSpPr/>
+          <p:nvPr/>
+        </p:nvSpPr>
+        <p:spPr>
+          <a:xfrm>
+            <a:off x="8339328" y="1517904"/>
+            <a:ext cx="3529584" cy="2212848"/>
+          </a:xfrm>
+          <a:prstGeom prst="roundRect">
+            <a:avLst>
+              <a:gd name="adj" fmla="val 2479"/>
+            </a:avLst>
+          </a:prstGeom>
+          <a:solidFill>
+            <a:srgbClr val="FAFAFC"/>
+          </a:solidFill>
+          <a:ln w="12700">
+            <a:solidFill>
+              <a:srgbClr val="E4E4EC"/>
+            </a:solidFill>
+            <a:prstDash val="solid"/>
+          </a:ln>
+        </p:spPr>
+      </p:sp>
+      <p:sp>
+        <p:nvSpPr>
+          <p:cNvPr id="15" name="Text 13"/>
+          <p:cNvSpPr txBox="1"/>
+          <p:nvPr/>
+        </p:nvSpPr>
+        <p:spPr>
+          <a:xfrm>
+            <a:off x="8595360" y="1682496"/>
+            <a:ext cx="3017520" cy="841248"/>
+          </a:xfrm>
+          <a:prstGeom prst="rect">
+            <a:avLst/>
+          </a:prstGeom>
+          <a:noFill/>
+          <a:ln/>
+        </p:spPr>
+        <p:txBody>
+          <a:bodyPr wrap="square" lIns="0" tIns="0" rIns="0" bIns="0" rtlCol="0" anchor="ctr"/>
+          <a:lstStyle/>
+          <a:p>
+            <a:pPr indent="0" marL="0">
+              <a:buNone/>
+            </a:pPr>
+            <a:r>
+              <a:rPr lang="en-US" sz="4600" b="1" dirty="0">
+                <a:solidFill>
+                  <a:srgbClr val="FF6200"/>
+                </a:solidFill>
+                <a:latin typeface="Helvetica Neue" pitchFamily="34" charset="0"/>
+                <a:ea typeface="Helvetica Neue" pitchFamily="34" charset="-122"/>
+                <a:cs typeface="Helvetica Neue" pitchFamily="34" charset="-120"/>
+              </a:rPr>
+              <a:t>0.67</a:t>
+            </a:r>
+            <a:endParaRPr lang="en-US" sz="4600" dirty="0"/>
+          </a:p>
+        </p:txBody>
+      </p:sp>
+      <p:sp>
+        <p:nvSpPr>
+          <p:cNvPr id="16" name="Text 14"/>
+          <p:cNvSpPr txBox="1"/>
+          <p:nvPr/>
+        </p:nvSpPr>
+        <p:spPr>
+          <a:xfrm>
+            <a:off x="8595360" y="2505456"/>
+            <a:ext cx="3017520" cy="310896"/>
+          </a:xfrm>
+          <a:prstGeom prst="rect">
+            <a:avLst/>
+          </a:prstGeom>
+          <a:noFill/>
+          <a:ln/>
+        </p:spPr>
+        <p:txBody>
+          <a:bodyPr wrap="square" lIns="0" tIns="0" rIns="0" bIns="0" rtlCol="0" anchor="ctr"/>
+          <a:lstStyle/>
+          <a:p>
+            <a:pPr indent="0" marL="0">
+              <a:buNone/>
+            </a:pPr>
+            <a:r>
+              <a:rPr lang="en-US" sz="1200" b="1" dirty="0">
+                <a:solidFill>
+                  <a:srgbClr val="14141C"/>
+                </a:solidFill>
+                <a:latin typeface="Helvetica Neue" pitchFamily="34" charset="0"/>
+                <a:ea typeface="Helvetica Neue" pitchFamily="34" charset="-122"/>
+                <a:cs typeface="Helvetica Neue" pitchFamily="34" charset="-120"/>
+              </a:rPr>
+              <a:t>‘free’ claims with conditions elsewhere</a:t>
+            </a:r>
+            <a:endParaRPr lang="en-US" sz="1200" dirty="0"/>
+          </a:p>
+        </p:txBody>
+      </p:sp>
+      <p:sp>
+        <p:nvSpPr>
+          <p:cNvPr id="17" name="Text 15"/>
+          <p:cNvSpPr txBox="1"/>
+          <p:nvPr/>
+        </p:nvSpPr>
+        <p:spPr>
+          <a:xfrm>
+            <a:off x="8595360" y="2834640"/>
+            <a:ext cx="3017520" cy="786384"/>
+          </a:xfrm>
+          <a:prstGeom prst="rect">
+            <a:avLst/>
+          </a:prstGeom>
+          <a:noFill/>
+          <a:ln/>
+        </p:spPr>
+        <p:txBody>
+          <a:bodyPr wrap="square" lIns="0" tIns="0" rIns="0" bIns="0" rtlCol="0" anchor="ctr"/>
+          <a:lstStyle/>
+          <a:p>
+            <a:pPr indent="0" marL="0">
+              <a:lnSpc>
+                <a:spcPts val="1400"/>
+              </a:lnSpc>
+              <a:buNone/>
+            </a:pPr>
+            <a:r>
+              <a:rPr lang="en-US" sz="1050" dirty="0">
+                <a:solidFill>
+                  <a:srgbClr val="585868"/>
+                </a:solidFill>
+                <a:latin typeface="Helvetica Neue" pitchFamily="34" charset="0"/>
+                <a:ea typeface="Helvetica Neue" pitchFamily="34" charset="-122"/>
+                <a:cs typeface="Helvetica Neue" pitchFamily="34" charset="-120"/>
+              </a:rPr>
+              <a:t>against a peer mean of 0.23 — the qualifying conditions are not adjacent to the claim they qualify.</a:t>
+            </a:r>
+            <a:endParaRPr lang="en-US" sz="1050" dirty="0"/>
+          </a:p>
+        </p:txBody>
+      </p:sp>
+      <p:sp>
+        <p:nvSpPr>
+          <p:cNvPr id="18" name="Text 16"/>
+          <p:cNvSpPr txBox="1"/>
+          <p:nvPr/>
+        </p:nvSpPr>
+        <p:spPr>
+          <a:xfrm>
+            <a:off x="621792" y="3968496"/>
+            <a:ext cx="10881360" cy="292608"/>
+          </a:xfrm>
+          <a:prstGeom prst="rect">
+            <a:avLst/>
+          </a:prstGeom>
+          <a:noFill/>
+          <a:ln/>
+        </p:spPr>
+        <p:txBody>
+          <a:bodyPr wrap="square" lIns="0" tIns="0" rIns="0" bIns="0" rtlCol="0" anchor="ctr"/>
+          <a:lstStyle/>
+          <a:p>
+            <a:pPr indent="0" marL="0">
+              <a:buNone/>
+            </a:pPr>
+            <a:r>
+              <a:rPr lang="en-US" sz="1350" b="1" dirty="0">
+                <a:solidFill>
+                  <a:srgbClr val="14141C"/>
+                </a:solidFill>
+                <a:latin typeface="Helvetica Neue" pitchFamily="34" charset="0"/>
+                <a:ea typeface="Helvetica Neue" pitchFamily="34" charset="-122"/>
+                <a:cs typeface="Helvetica Neue" pitchFamily="34" charset="-120"/>
+              </a:rPr>
+              <a:t>The three it ranked highest</a:t>
+            </a:r>
+            <a:endParaRPr lang="en-US" sz="1350" dirty="0"/>
+          </a:p>
+        </p:txBody>
+      </p:sp>
+      <p:sp>
+        <p:nvSpPr>
+          <p:cNvPr id="19" name="Shape 17"/>
+          <p:cNvSpPr/>
+          <p:nvPr/>
+        </p:nvSpPr>
+        <p:spPr>
+          <a:xfrm>
+            <a:off x="640080" y="4416552"/>
+            <a:ext cx="155448" cy="155448"/>
+          </a:xfrm>
+          <a:prstGeom prst="ellipse">
+            <a:avLst/>
+          </a:prstGeom>
+          <a:solidFill>
+            <a:srgbClr val="FF6200"/>
+          </a:solidFill>
+          <a:ln w="12700">
+            <a:solidFill>
+              <a:srgbClr val="333333"/>
+            </a:solidFill>
+            <a:prstDash val="solid"/>
+          </a:ln>
+        </p:spPr>
+      </p:sp>
+      <p:sp>
+        <p:nvSpPr>
+          <p:cNvPr id="20" name="Text 18"/>
+          <p:cNvSpPr txBox="1"/>
+          <p:nvPr/>
+        </p:nvSpPr>
+        <p:spPr>
+          <a:xfrm>
+            <a:off x="914400" y="4352544"/>
+            <a:ext cx="5074920" cy="292608"/>
+          </a:xfrm>
+          <a:prstGeom prst="rect">
+            <a:avLst/>
+          </a:prstGeom>
+          <a:noFill/>
+          <a:ln/>
+        </p:spPr>
+        <p:txBody>
+          <a:bodyPr wrap="square" lIns="0" tIns="0" rIns="0" bIns="0" rtlCol="0" anchor="ctr"/>
+          <a:lstStyle/>
+          <a:p>
+            <a:pPr indent="0" marL="0">
+              <a:buNone/>
+            </a:pPr>
+            <a:r>
+              <a:rPr lang="en-US" sz="1200" b="1" dirty="0">
+                <a:solidFill>
+                  <a:srgbClr val="14141C"/>
+                </a:solidFill>
+                <a:latin typeface="Helvetica Neue" pitchFamily="34" charset="0"/>
+                <a:ea typeface="Helvetica Neue" pitchFamily="34" charset="-122"/>
+                <a:cs typeface="Helvetica Neue" pitchFamily="34" charset="-120"/>
+              </a:rPr>
+              <a:t>Strip back urgency and deadline language</a:t>
+            </a:r>
+            <a:endParaRPr lang="en-US" sz="1200" dirty="0"/>
+          </a:p>
+        </p:txBody>
+      </p:sp>
+      <p:sp>
+        <p:nvSpPr>
+          <p:cNvPr id="21" name="Text 19"/>
+          <p:cNvSpPr txBox="1"/>
+          <p:nvPr/>
+        </p:nvSpPr>
+        <p:spPr>
+          <a:xfrm>
+            <a:off x="6108192" y="4352544"/>
+            <a:ext cx="5413248" cy="292608"/>
+          </a:xfrm>
+          <a:prstGeom prst="rect">
+            <a:avLst/>
+          </a:prstGeom>
+          <a:noFill/>
+          <a:ln/>
+        </p:spPr>
+        <p:txBody>
+          <a:bodyPr wrap="square" lIns="0" tIns="0" rIns="0" bIns="0" rtlCol="0" anchor="ctr"/>
+          <a:lstStyle/>
+          <a:p>
+            <a:pPr indent="0" marL="0">
+              <a:buNone/>
+            </a:pPr>
+            <a:r>
+              <a:rPr lang="en-US" sz="1050" dirty="0">
+                <a:solidFill>
+                  <a:srgbClr val="585868"/>
+                </a:solidFill>
+                <a:latin typeface="Helvetica Neue" pitchFamily="34" charset="0"/>
+                <a:ea typeface="Helvetica Neue" pitchFamily="34" charset="-122"/>
+                <a:cs typeface="Helvetica Neue" pitchFamily="34" charset="-120"/>
+              </a:rPr>
+              <a:t>urgency_marker_count</a:t>
+            </a:r>
+            <a:endParaRPr lang="en-US" sz="1050" dirty="0"/>
+          </a:p>
+        </p:txBody>
+      </p:sp>
+      <p:sp>
+        <p:nvSpPr>
+          <p:cNvPr id="22" name="Shape 20"/>
+          <p:cNvSpPr/>
+          <p:nvPr/>
+        </p:nvSpPr>
+        <p:spPr>
+          <a:xfrm>
+            <a:off x="640080" y="4946904"/>
+            <a:ext cx="155448" cy="155448"/>
+          </a:xfrm>
+          <a:prstGeom prst="ellipse">
+            <a:avLst/>
+          </a:prstGeom>
+          <a:solidFill>
+            <a:srgbClr val="FF6200"/>
+          </a:solidFill>
+          <a:ln w="12700">
+            <a:solidFill>
+              <a:srgbClr val="333333"/>
+            </a:solidFill>
+            <a:prstDash val="solid"/>
+          </a:ln>
+        </p:spPr>
+      </p:sp>
+      <p:sp>
+        <p:nvSpPr>
+          <p:cNvPr id="23" name="Text 21"/>
+          <p:cNvSpPr txBox="1"/>
+          <p:nvPr/>
+        </p:nvSpPr>
+        <p:spPr>
+          <a:xfrm>
+            <a:off x="914400" y="4882896"/>
+            <a:ext cx="5074920" cy="292608"/>
+          </a:xfrm>
+          <a:prstGeom prst="rect">
+            <a:avLst/>
+          </a:prstGeom>
+          <a:noFill/>
+          <a:ln/>
+        </p:spPr>
+        <p:txBody>
+          <a:bodyPr wrap="square" lIns="0" tIns="0" rIns="0" bIns="0" rtlCol="0" anchor="ctr"/>
+          <a:lstStyle/>
+          <a:p>
+            <a:pPr indent="0" marL="0">
+              <a:buNone/>
+            </a:pPr>
+            <a:r>
+              <a:rPr lang="en-US" sz="1200" b="1" dirty="0">
+                <a:solidFill>
+                  <a:srgbClr val="14141C"/>
+                </a:solidFill>
+                <a:latin typeface="Helvetica Neue" pitchFamily="34" charset="0"/>
+                <a:ea typeface="Helvetica Neue" pitchFamily="34" charset="-122"/>
+                <a:cs typeface="Helvetica Neue" pitchFamily="34" charset="-120"/>
+              </a:rPr>
+              <a:t>Bring the offer higher up the page</a:t>
+            </a:r>
+            <a:endParaRPr lang="en-US" sz="1200" dirty="0"/>
+          </a:p>
+        </p:txBody>
+      </p:sp>
+      <p:sp>
+        <p:nvSpPr>
+          <p:cNvPr id="24" name="Text 22"/>
+          <p:cNvSpPr txBox="1"/>
+          <p:nvPr/>
+        </p:nvSpPr>
+        <p:spPr>
+          <a:xfrm>
+            <a:off x="6108192" y="4882896"/>
+            <a:ext cx="5413248" cy="292608"/>
+          </a:xfrm>
+          <a:prstGeom prst="rect">
+            <a:avLst/>
+          </a:prstGeom>
+          <a:noFill/>
+          <a:ln/>
+        </p:spPr>
+        <p:txBody>
+          <a:bodyPr wrap="square" lIns="0" tIns="0" rIns="0" bIns="0" rtlCol="0" anchor="ctr"/>
+          <a:lstStyle/>
+          <a:p>
+            <a:pPr indent="0" marL="0">
+              <a:buNone/>
+            </a:pPr>
+            <a:r>
+              <a:rPr lang="en-US" sz="1050" dirty="0">
+                <a:solidFill>
+                  <a:srgbClr val="585868"/>
+                </a:solidFill>
+                <a:latin typeface="Helvetica Neue" pitchFamily="34" charset="0"/>
+                <a:ea typeface="Helvetica Neue" pitchFamily="34" charset="-122"/>
+                <a:cs typeface="Helvetica Neue" pitchFamily="34" charset="-120"/>
+              </a:rPr>
+              <a:t>page_height_px</a:t>
+            </a:r>
+            <a:endParaRPr lang="en-US" sz="1050" dirty="0"/>
+          </a:p>
+        </p:txBody>
+      </p:sp>
+      <p:sp>
+        <p:nvSpPr>
+          <p:cNvPr id="25" name="Shape 23"/>
+          <p:cNvSpPr/>
+          <p:nvPr/>
+        </p:nvSpPr>
+        <p:spPr>
+          <a:xfrm>
+            <a:off x="640080" y="5477256"/>
+            <a:ext cx="155448" cy="155448"/>
+          </a:xfrm>
+          <a:prstGeom prst="ellipse">
+            <a:avLst/>
+          </a:prstGeom>
+          <a:solidFill>
+            <a:srgbClr val="FF6200"/>
+          </a:solidFill>
+          <a:ln w="12700">
+            <a:solidFill>
+              <a:srgbClr val="333333"/>
+            </a:solidFill>
+            <a:prstDash val="solid"/>
+          </a:ln>
+        </p:spPr>
+      </p:sp>
+      <p:sp>
+        <p:nvSpPr>
+          <p:cNvPr id="26" name="Text 24"/>
+          <p:cNvSpPr txBox="1"/>
+          <p:nvPr/>
+        </p:nvSpPr>
+        <p:spPr>
+          <a:xfrm>
+            <a:off x="914400" y="5413248"/>
+            <a:ext cx="5074920" cy="292608"/>
+          </a:xfrm>
+          <a:prstGeom prst="rect">
+            <a:avLst/>
+          </a:prstGeom>
+          <a:noFill/>
+          <a:ln/>
+        </p:spPr>
+        <p:txBody>
+          <a:bodyPr wrap="square" lIns="0" tIns="0" rIns="0" bIns="0" rtlCol="0" anchor="ctr"/>
+          <a:lstStyle/>
+          <a:p>
+            <a:pPr indent="0" marL="0">
+              <a:buNone/>
+            </a:pPr>
+            <a:r>
+              <a:rPr lang="en-US" sz="1200" b="1" dirty="0">
+                <a:solidFill>
+                  <a:srgbClr val="14141C"/>
+                </a:solidFill>
+                <a:latin typeface="Helvetica Neue" pitchFamily="34" charset="0"/>
+                <a:ea typeface="Helvetica Neue" pitchFamily="34" charset="-122"/>
+                <a:cs typeface="Helvetica Neue" pitchFamily="34" charset="-120"/>
+              </a:rPr>
+              <a:t>Disclose the conditions of any free claim next to the claim</a:t>
+            </a:r>
+            <a:endParaRPr lang="en-US" sz="1200" dirty="0"/>
+          </a:p>
+        </p:txBody>
+      </p:sp>
+      <p:sp>
+        <p:nvSpPr>
+          <p:cNvPr id="27" name="Text 25"/>
+          <p:cNvSpPr txBox="1"/>
+          <p:nvPr/>
+        </p:nvSpPr>
+        <p:spPr>
+          <a:xfrm>
+            <a:off x="6108192" y="5413248"/>
+            <a:ext cx="5413248" cy="292608"/>
+          </a:xfrm>
+          <a:prstGeom prst="rect">
+            <a:avLst/>
+          </a:prstGeom>
+          <a:noFill/>
+          <a:ln/>
+        </p:spPr>
+        <p:txBody>
+          <a:bodyPr wrap="square" lIns="0" tIns="0" rIns="0" bIns="0" rtlCol="0" anchor="ctr"/>
+          <a:lstStyle/>
+          <a:p>
+            <a:pPr indent="0" marL="0">
+              <a:buNone/>
+            </a:pPr>
+            <a:r>
+              <a:rPr lang="en-US" sz="1050" dirty="0">
+                <a:solidFill>
+                  <a:srgbClr val="585868"/>
+                </a:solidFill>
+                <a:latin typeface="Helvetica Neue" pitchFamily="34" charset="0"/>
+                <a:ea typeface="Helvetica Neue" pitchFamily="34" charset="-122"/>
+                <a:cs typeface="Helvetica Neue" pitchFamily="34" charset="-120"/>
+              </a:rPr>
+              <a:t>hidden_conditions_behind_free_claim</a:t>
+            </a:r>
+            <a:endParaRPr lang="en-US" sz="1050" dirty="0"/>
+          </a:p>
+        </p:txBody>
+      </p:sp>
+      <p:sp>
+        <p:nvSpPr>
+          <p:cNvPr id="28" name="Text 26"/>
+          <p:cNvSpPr txBox="1"/>
+          <p:nvPr/>
+        </p:nvSpPr>
+        <p:spPr>
+          <a:xfrm>
+            <a:off x="621792" y="5888736"/>
+            <a:ext cx="10881360" cy="420624"/>
+          </a:xfrm>
+          <a:prstGeom prst="rect">
+            <a:avLst/>
+          </a:prstGeom>
+          <a:noFill/>
+          <a:ln/>
+        </p:spPr>
+        <p:txBody>
+          <a:bodyPr wrap="square" lIns="0" tIns="0" rIns="0" bIns="0" rtlCol="0" anchor="ctr"/>
+          <a:lstStyle/>
+          <a:p>
+            <a:pPr indent="0" marL="0">
+              <a:lnSpc>
+                <a:spcPts val="1400"/>
+              </a:lnSpc>
+              <a:buNone/>
+            </a:pPr>
+            <a:r>
+              <a:rPr lang="en-US" sz="1050" dirty="0">
+                <a:solidFill>
+                  <a:srgbClr val="585868"/>
+                </a:solidFill>
+                <a:latin typeface="Helvetica Neue" pitchFamily="34" charset="0"/>
+                <a:ea typeface="Helvetica Neue" pitchFamily="34" charset="-122"/>
+                <a:cs typeface="Helvetica Neue" pitchFamily="34" charset="-120"/>
+              </a:rPr>
+              <a:t>Design observations, not performance findings. The pages span several product families and languages, the judged features come from a single rater, and no click or conversion data exists — so every item is a hypothesis ING could test.</a:t>
+            </a:r>
+            <a:endParaRPr lang="en-US" sz="1050" dirty="0"/>
           </a:p>
         </p:txBody>
       </p:sp>
@@ -18686,6 +20951,1227 @@
 </p:sld>
 </file>
 
+<file path=ppt/slides/slide40.xml><?xml version="1.0" encoding="utf-8"?>
+<p:sld xmlns:a="http://schemas.openxmlformats.org/drawingml/2006/main" xmlns:r="http://schemas.openxmlformats.org/officeDocument/2006/relationships" xmlns:p="http://schemas.openxmlformats.org/presentationml/2006/main">
+  <p:cSld name="Slide 4">
+    <p:bg>
+      <p:bgPr>
+        <a:solidFill>
+          <a:srgbClr val="FFFFFF"/>
+        </a:solidFill>
+      </p:bgPr>
+    </p:bg>
+    <p:spTree>
+      <p:nvGrpSpPr>
+        <p:cNvPr id="1" name=""/>
+        <p:cNvGrpSpPr/>
+        <p:nvPr/>
+      </p:nvGrpSpPr>
+      <p:grpSpPr>
+        <a:xfrm>
+          <a:off x="0" y="0"/>
+          <a:ext cx="0" cy="0"/>
+          <a:chOff x="0" y="0"/>
+          <a:chExt cx="0" cy="0"/>
+        </a:xfrm>
+      </p:grpSpPr>
+      <p:sp>
+        <p:nvSpPr>
+          <p:cNvPr id="2" name="Text 0"/>
+          <p:cNvSpPr txBox="1"/>
+          <p:nvPr/>
+        </p:nvSpPr>
+        <p:spPr>
+          <a:xfrm>
+            <a:off x="548640" y="320040"/>
+            <a:ext cx="11064240" cy="640080"/>
+          </a:xfrm>
+          <a:prstGeom prst="rect">
+            <a:avLst/>
+          </a:prstGeom>
+          <a:noFill/>
+          <a:ln/>
+        </p:spPr>
+        <p:txBody>
+          <a:bodyPr wrap="square" lIns="0" tIns="0" rIns="0" bIns="0" rtlCol="0" anchor="ctr"/>
+          <a:lstStyle/>
+          <a:p>
+            <a:pPr indent="0" marL="0">
+              <a:buNone/>
+            </a:pPr>
+            <a:r>
+              <a:rPr lang="en-US" sz="2800" b="1" dirty="0">
+                <a:solidFill>
+                  <a:srgbClr val="14141C"/>
+                </a:solidFill>
+                <a:latin typeface="Helvetica Neue" pitchFamily="34" charset="0"/>
+                <a:ea typeface="Helvetica Neue" pitchFamily="34" charset="-122"/>
+                <a:cs typeface="Helvetica Neue" pitchFamily="34" charset="-120"/>
+              </a:rPr>
+              <a:t>From a list of changes to a site you can actually look at</a:t>
+            </a:r>
+            <a:endParaRPr lang="en-US" sz="2800" dirty="0"/>
+          </a:p>
+        </p:txBody>
+      </p:sp>
+      <p:sp>
+        <p:nvSpPr>
+          <p:cNvPr id="3" name="Shape 1"/>
+          <p:cNvSpPr/>
+          <p:nvPr/>
+        </p:nvSpPr>
+        <p:spPr>
+          <a:xfrm>
+            <a:off x="548640" y="960120"/>
+            <a:ext cx="1463040" cy="54864"/>
+          </a:xfrm>
+          <a:prstGeom prst="rect">
+            <a:avLst/>
+          </a:prstGeom>
+          <a:solidFill>
+            <a:srgbClr val="FF6200"/>
+          </a:solidFill>
+          <a:ln w="12700">
+            <a:solidFill>
+              <a:srgbClr val="333333"/>
+            </a:solidFill>
+            <a:prstDash val="solid"/>
+          </a:ln>
+        </p:spPr>
+      </p:sp>
+      <p:sp>
+        <p:nvSpPr>
+          <p:cNvPr id="4" name="Text 2"/>
+          <p:cNvSpPr txBox="1"/>
+          <p:nvPr/>
+        </p:nvSpPr>
+        <p:spPr>
+          <a:xfrm>
+            <a:off x="548640" y="6400800"/>
+            <a:ext cx="8229600" cy="274320"/>
+          </a:xfrm>
+          <a:prstGeom prst="rect">
+            <a:avLst/>
+          </a:prstGeom>
+          <a:noFill/>
+          <a:ln/>
+        </p:spPr>
+        <p:txBody>
+          <a:bodyPr wrap="square" lIns="0" tIns="0" rIns="0" bIns="0" rtlCol="0" anchor="ctr"/>
+          <a:lstStyle/>
+          <a:p>
+            <a:pPr indent="0" marL="0">
+              <a:buNone/>
+            </a:pPr>
+            <a:r>
+              <a:rPr lang="en-US" sz="1000" dirty="0">
+                <a:solidFill>
+                  <a:srgbClr val="585868"/>
+                </a:solidFill>
+                <a:latin typeface="Helvetica Neue" pitchFamily="34" charset="0"/>
+                <a:ea typeface="Helvetica Neue" pitchFamily="34" charset="-122"/>
+                <a:cs typeface="Helvetica Neue" pitchFamily="34" charset="-120"/>
+              </a:rPr>
+              <a:t>Banking Campaigns Comparator · ING DACI / Customer AI · September 2026</a:t>
+            </a:r>
+            <a:endParaRPr lang="en-US" sz="1000" dirty="0"/>
+          </a:p>
+        </p:txBody>
+      </p:sp>
+      <p:sp>
+        <p:nvSpPr>
+          <p:cNvPr id="5" name="Text 3"/>
+          <p:cNvSpPr txBox="1"/>
+          <p:nvPr/>
+        </p:nvSpPr>
+        <p:spPr>
+          <a:xfrm>
+            <a:off x="11091672" y="6400800"/>
+            <a:ext cx="548640" cy="274320"/>
+          </a:xfrm>
+          <a:prstGeom prst="rect">
+            <a:avLst/>
+          </a:prstGeom>
+          <a:noFill/>
+          <a:ln/>
+        </p:spPr>
+        <p:txBody>
+          <a:bodyPr wrap="square" lIns="0" tIns="0" rIns="0" bIns="0" rtlCol="0" anchor="ctr"/>
+          <a:lstStyle/>
+          <a:p>
+            <a:pPr algn="r" indent="0" marL="0">
+              <a:buNone/>
+            </a:pPr>
+            <a:r>
+              <a:rPr lang="en-US" sz="1000" dirty="0">
+                <a:solidFill>
+                  <a:srgbClr val="585868"/>
+                </a:solidFill>
+                <a:latin typeface="Helvetica Neue" pitchFamily="34" charset="0"/>
+                <a:ea typeface="Helvetica Neue" pitchFamily="34" charset="-122"/>
+                <a:cs typeface="Helvetica Neue" pitchFamily="34" charset="-120"/>
+              </a:rPr>
+              <a:t>16</a:t>
+            </a:r>
+            <a:endParaRPr lang="en-US" sz="1000" dirty="0"/>
+          </a:p>
+        </p:txBody>
+      </p:sp>
+      <p:sp>
+        <p:nvSpPr>
+          <p:cNvPr id="6" name="Shape 4"/>
+          <p:cNvSpPr/>
+          <p:nvPr/>
+        </p:nvSpPr>
+        <p:spPr>
+          <a:xfrm>
+            <a:off x="626364" y="1248156"/>
+            <a:ext cx="6739128" cy="2414016"/>
+          </a:xfrm>
+          <a:prstGeom prst="rect">
+            <a:avLst/>
+          </a:prstGeom>
+          <a:solidFill>
+            <a:srgbClr val="FFFFFF"/>
+          </a:solidFill>
+          <a:ln w="12700">
+            <a:solidFill>
+              <a:srgbClr val="E4E4EC"/>
+            </a:solidFill>
+            <a:prstDash val="solid"/>
+          </a:ln>
+        </p:spPr>
+      </p:sp>
+      <p:pic>
+        <p:nvPicPr>
+          <p:cNvPr id="7" name="Image 0" descr="/Users/nstephane/Dev/AI_Data_Science_training/ing-usecase/docs/deck_assets/site_hero.png">    </p:cNvPr>
+          <p:cNvPicPr>
+            <a:picLocks noChangeAspect="1"/>
+          </p:cNvPicPr>
+          <p:nvPr/>
+        </p:nvPicPr>
+        <p:blipFill>
+          <a:blip r:embed="rId1"/>
+          <a:stretch>
+            <a:fillRect/>
+          </a:stretch>
+        </p:blipFill>
+        <p:spPr>
+          <a:xfrm>
+            <a:off x="658368" y="1280160"/>
+            <a:ext cx="6675120" cy="2350008"/>
+          </a:xfrm>
+          <a:prstGeom prst="rect">
+            <a:avLst/>
+          </a:prstGeom>
+        </p:spPr>
+      </p:pic>
+      <p:sp>
+        <p:nvSpPr>
+          <p:cNvPr id="8" name="Shape 5"/>
+          <p:cNvSpPr/>
+          <p:nvPr/>
+        </p:nvSpPr>
+        <p:spPr>
+          <a:xfrm>
+            <a:off x="626364" y="3808476"/>
+            <a:ext cx="5184648" cy="2112264"/>
+          </a:xfrm>
+          <a:prstGeom prst="rect">
+            <a:avLst/>
+          </a:prstGeom>
+          <a:solidFill>
+            <a:srgbClr val="FFFFFF"/>
+          </a:solidFill>
+          <a:ln w="12700">
+            <a:solidFill>
+              <a:srgbClr val="E4E4EC"/>
+            </a:solidFill>
+            <a:prstDash val="solid"/>
+          </a:ln>
+        </p:spPr>
+      </p:sp>
+      <p:pic>
+        <p:nvPicPr>
+          <p:cNvPr id="9" name="Image 1" descr="/Users/nstephane/Dev/AI_Data_Science_training/ing-usecase/docs/deck_assets/site_explained.png">    </p:cNvPr>
+          <p:cNvPicPr>
+            <a:picLocks noChangeAspect="1"/>
+          </p:cNvPicPr>
+          <p:nvPr/>
+        </p:nvPicPr>
+        <p:blipFill>
+          <a:blip r:embed="rId2"/>
+          <a:stretch>
+            <a:fillRect/>
+          </a:stretch>
+        </p:blipFill>
+        <p:spPr>
+          <a:xfrm>
+            <a:off x="658368" y="3840480"/>
+            <a:ext cx="5120640" cy="2048256"/>
+          </a:xfrm>
+          <a:prstGeom prst="rect">
+            <a:avLst/>
+          </a:prstGeom>
+        </p:spPr>
+      </p:pic>
+      <p:sp>
+        <p:nvSpPr>
+          <p:cNvPr id="10" name="Text 6"/>
+          <p:cNvSpPr txBox="1"/>
+          <p:nvPr/>
+        </p:nvSpPr>
+        <p:spPr>
+          <a:xfrm>
+            <a:off x="658368" y="5998464"/>
+            <a:ext cx="6675120" cy="292608"/>
+          </a:xfrm>
+          <a:prstGeom prst="rect">
+            <a:avLst/>
+          </a:prstGeom>
+          <a:noFill/>
+          <a:ln/>
+        </p:spPr>
+        <p:txBody>
+          <a:bodyPr wrap="square" lIns="0" tIns="0" rIns="0" bIns="0" rtlCol="0" anchor="ctr"/>
+          <a:lstStyle/>
+          <a:p>
+            <a:pPr indent="0" marL="0">
+              <a:buNone/>
+            </a:pPr>
+            <a:r>
+              <a:rPr lang="en-US" sz="1050" i="1" dirty="0">
+                <a:solidFill>
+                  <a:srgbClr val="585868"/>
+                </a:solidFill>
+                <a:latin typeface="Helvetica Neue" pitchFamily="34" charset="0"/>
+                <a:ea typeface="Helvetica Neue" pitchFamily="34" charset="-122"/>
+                <a:cs typeface="Helvetica Neue" pitchFamily="34" charset="-120"/>
+              </a:rPr>
+              <a:t>Generated, never published: rates and amounts stay as [TAUX] and [MONTANT] placeholders.</a:t>
+            </a:r>
+            <a:endParaRPr lang="en-US" sz="1050" dirty="0"/>
+          </a:p>
+        </p:txBody>
+      </p:sp>
+      <p:pic>
+        <p:nvPicPr>
+          <p:cNvPr id="11" name="Image 2" descr="/Users/nstephane/Dev/AI_Data_Science_training/ing-usecase/docs/deck_assets/icons/check.png">    </p:cNvPr>
+          <p:cNvPicPr>
+            <a:picLocks noChangeAspect="1"/>
+          </p:cNvPicPr>
+          <p:nvPr/>
+        </p:nvPicPr>
+        <p:blipFill>
+          <a:blip r:embed="rId3"/>
+          <a:stretch>
+            <a:fillRect/>
+          </a:stretch>
+        </p:blipFill>
+        <p:spPr>
+          <a:xfrm>
+            <a:off x="7699248" y="1408176"/>
+            <a:ext cx="420624" cy="420624"/>
+          </a:xfrm>
+          <a:prstGeom prst="rect">
+            <a:avLst/>
+          </a:prstGeom>
+        </p:spPr>
+      </p:pic>
+      <p:sp>
+        <p:nvSpPr>
+          <p:cNvPr id="12" name="Text 7"/>
+          <p:cNvSpPr txBox="1"/>
+          <p:nvPr/>
+        </p:nvSpPr>
+        <p:spPr>
+          <a:xfrm>
+            <a:off x="8266176" y="1389888"/>
+            <a:ext cx="3273552" cy="274320"/>
+          </a:xfrm>
+          <a:prstGeom prst="rect">
+            <a:avLst/>
+          </a:prstGeom>
+          <a:noFill/>
+          <a:ln/>
+        </p:spPr>
+        <p:txBody>
+          <a:bodyPr wrap="square" lIns="0" tIns="0" rIns="0" bIns="0" rtlCol="0" anchor="ctr"/>
+          <a:lstStyle/>
+          <a:p>
+            <a:pPr indent="0" marL="0">
+              <a:buNone/>
+            </a:pPr>
+            <a:r>
+              <a:rPr lang="en-US" sz="1350" b="1" dirty="0">
+                <a:solidFill>
+                  <a:srgbClr val="14141C"/>
+                </a:solidFill>
+                <a:latin typeface="Helvetica Neue" pitchFamily="34" charset="0"/>
+                <a:ea typeface="Helvetica Neue" pitchFamily="34" charset="-122"/>
+                <a:cs typeface="Helvetica Neue" pitchFamily="34" charset="-120"/>
+              </a:rPr>
+              <a:t>The team chooses what gets built</a:t>
+            </a:r>
+            <a:endParaRPr lang="en-US" sz="1350" dirty="0"/>
+          </a:p>
+        </p:txBody>
+      </p:sp>
+      <p:sp>
+        <p:nvSpPr>
+          <p:cNvPr id="13" name="Text 8"/>
+          <p:cNvSpPr txBox="1"/>
+          <p:nvPr/>
+        </p:nvSpPr>
+        <p:spPr>
+          <a:xfrm>
+            <a:off x="8266176" y="1682496"/>
+            <a:ext cx="3273552" cy="713232"/>
+          </a:xfrm>
+          <a:prstGeom prst="rect">
+            <a:avLst/>
+          </a:prstGeom>
+          <a:noFill/>
+          <a:ln/>
+        </p:spPr>
+        <p:txBody>
+          <a:bodyPr wrap="square" lIns="0" tIns="0" rIns="0" bIns="0" rtlCol="0" anchor="ctr"/>
+          <a:lstStyle/>
+          <a:p>
+            <a:pPr indent="0" marL="0">
+              <a:lnSpc>
+                <a:spcPts val="1500"/>
+              </a:lnSpc>
+              <a:buNone/>
+            </a:pPr>
+            <a:r>
+              <a:rPr lang="en-US" sz="1150" dirty="0">
+                <a:solidFill>
+                  <a:srgbClr val="585868"/>
+                </a:solidFill>
+                <a:latin typeface="Helvetica Neue" pitchFamily="34" charset="0"/>
+                <a:ea typeface="Helvetica Neue" pitchFamily="34" charset="-122"/>
+                <a:cs typeface="Helvetica Neue" pitchFamily="34" charset="-120"/>
+              </a:rPr>
+              <a:t>Every recommendation is a checkbox. Nothing reaches the generator that a person did not tick.</a:t>
+            </a:r>
+            <a:endParaRPr lang="en-US" sz="1150" dirty="0"/>
+          </a:p>
+        </p:txBody>
+      </p:sp>
+      <p:pic>
+        <p:nvPicPr>
+          <p:cNvPr id="14" name="Image 3" descr="/Users/nstephane/Dev/AI_Data_Science_training/ing-usecase/docs/deck_assets/icons/window.png">    </p:cNvPr>
+          <p:cNvPicPr>
+            <a:picLocks noChangeAspect="1"/>
+          </p:cNvPicPr>
+          <p:nvPr/>
+        </p:nvPicPr>
+        <p:blipFill>
+          <a:blip r:embed="rId4"/>
+          <a:stretch>
+            <a:fillRect/>
+          </a:stretch>
+        </p:blipFill>
+        <p:spPr>
+          <a:xfrm>
+            <a:off x="7699248" y="2743200"/>
+            <a:ext cx="420624" cy="420624"/>
+          </a:xfrm>
+          <a:prstGeom prst="rect">
+            <a:avLst/>
+          </a:prstGeom>
+        </p:spPr>
+      </p:pic>
+      <p:sp>
+        <p:nvSpPr>
+          <p:cNvPr id="15" name="Text 9"/>
+          <p:cNvSpPr txBox="1"/>
+          <p:nvPr/>
+        </p:nvSpPr>
+        <p:spPr>
+          <a:xfrm>
+            <a:off x="8266176" y="2724912"/>
+            <a:ext cx="3273552" cy="274320"/>
+          </a:xfrm>
+          <a:prstGeom prst="rect">
+            <a:avLst/>
+          </a:prstGeom>
+          <a:noFill/>
+          <a:ln/>
+        </p:spPr>
+        <p:txBody>
+          <a:bodyPr wrap="square" lIns="0" tIns="0" rIns="0" bIns="0" rtlCol="0" anchor="ctr"/>
+          <a:lstStyle/>
+          <a:p>
+            <a:pPr indent="0" marL="0">
+              <a:buNone/>
+            </a:pPr>
+            <a:r>
+              <a:rPr lang="en-US" sz="1350" b="1" dirty="0">
+                <a:solidFill>
+                  <a:srgbClr val="14141C"/>
+                </a:solidFill>
+                <a:latin typeface="Helvetica Neue" pitchFamily="34" charset="0"/>
+                <a:ea typeface="Helvetica Neue" pitchFamily="34" charset="-122"/>
+                <a:cs typeface="Helvetica Neue" pitchFamily="34" charset="-120"/>
+              </a:rPr>
+              <a:t>Ten ING-styled pages, in fr-BE or nl-BE</a:t>
+            </a:r>
+            <a:endParaRPr lang="en-US" sz="1350" dirty="0"/>
+          </a:p>
+        </p:txBody>
+      </p:sp>
+      <p:sp>
+        <p:nvSpPr>
+          <p:cNvPr id="16" name="Text 10"/>
+          <p:cNvSpPr txBox="1"/>
+          <p:nvPr/>
+        </p:nvSpPr>
+        <p:spPr>
+          <a:xfrm>
+            <a:off x="8266176" y="3017520"/>
+            <a:ext cx="3273552" cy="713232"/>
+          </a:xfrm>
+          <a:prstGeom prst="rect">
+            <a:avLst/>
+          </a:prstGeom>
+          <a:noFill/>
+          <a:ln/>
+        </p:spPr>
+        <p:txBody>
+          <a:bodyPr wrap="square" lIns="0" tIns="0" rIns="0" bIns="0" rtlCol="0" anchor="ctr"/>
+          <a:lstStyle/>
+          <a:p>
+            <a:pPr indent="0" marL="0">
+              <a:lnSpc>
+                <a:spcPts val="1500"/>
+              </a:lnSpc>
+              <a:buNone/>
+            </a:pPr>
+            <a:r>
+              <a:rPr lang="en-US" sz="1150" dirty="0">
+                <a:solidFill>
+                  <a:srgbClr val="585868"/>
+                </a:solidFill>
+                <a:latin typeface="Helvetica Neue" pitchFamily="34" charset="0"/>
+                <a:ea typeface="Helvetica Neue" pitchFamily="34" charset="-122"/>
+                <a:cs typeface="Helvetica Neue" pitchFamily="34" charset="-120"/>
+              </a:rPr>
+              <a:t>Home, savings, term account, current account, youth, investing, mortgage, opening, why ING, contact.</a:t>
+            </a:r>
+            <a:endParaRPr lang="en-US" sz="1150" dirty="0"/>
+          </a:p>
+        </p:txBody>
+      </p:sp>
+      <p:pic>
+        <p:nvPicPr>
+          <p:cNvPr id="17" name="Image 4" descr="/Users/nstephane/Dev/AI_Data_Science_training/ing-usecase/docs/deck_assets/icons/list.png">    </p:cNvPr>
+          <p:cNvPicPr>
+            <a:picLocks noChangeAspect="1"/>
+          </p:cNvPicPr>
+          <p:nvPr/>
+        </p:nvPicPr>
+        <p:blipFill>
+          <a:blip r:embed="rId5"/>
+          <a:stretch>
+            <a:fillRect/>
+          </a:stretch>
+        </p:blipFill>
+        <p:spPr>
+          <a:xfrm>
+            <a:off x="7699248" y="4078224"/>
+            <a:ext cx="420624" cy="420624"/>
+          </a:xfrm>
+          <a:prstGeom prst="rect">
+            <a:avLst/>
+          </a:prstGeom>
+        </p:spPr>
+      </p:pic>
+      <p:sp>
+        <p:nvSpPr>
+          <p:cNvPr id="18" name="Text 11"/>
+          <p:cNvSpPr txBox="1"/>
+          <p:nvPr/>
+        </p:nvSpPr>
+        <p:spPr>
+          <a:xfrm>
+            <a:off x="8266176" y="4059936"/>
+            <a:ext cx="3273552" cy="274320"/>
+          </a:xfrm>
+          <a:prstGeom prst="rect">
+            <a:avLst/>
+          </a:prstGeom>
+          <a:noFill/>
+          <a:ln/>
+        </p:spPr>
+        <p:txBody>
+          <a:bodyPr wrap="square" lIns="0" tIns="0" rIns="0" bIns="0" rtlCol="0" anchor="ctr"/>
+          <a:lstStyle/>
+          <a:p>
+            <a:pPr indent="0" marL="0">
+              <a:buNone/>
+            </a:pPr>
+            <a:r>
+              <a:rPr lang="en-US" sz="1350" b="1" dirty="0">
+                <a:solidFill>
+                  <a:srgbClr val="14141C"/>
+                </a:solidFill>
+                <a:latin typeface="Helvetica Neue" pitchFamily="34" charset="0"/>
+                <a:ea typeface="Helvetica Neue" pitchFamily="34" charset="-122"/>
+                <a:cs typeface="Helvetica Neue" pitchFamily="34" charset="-120"/>
+              </a:rPr>
+              <a:t>Each section can name its own source</a:t>
+            </a:r>
+            <a:endParaRPr lang="en-US" sz="1350" dirty="0"/>
+          </a:p>
+        </p:txBody>
+      </p:sp>
+      <p:sp>
+        <p:nvSpPr>
+          <p:cNvPr id="19" name="Text 12"/>
+          <p:cNvSpPr txBox="1"/>
+          <p:nvPr/>
+        </p:nvSpPr>
+        <p:spPr>
+          <a:xfrm>
+            <a:off x="8266176" y="4352544"/>
+            <a:ext cx="3273552" cy="713232"/>
+          </a:xfrm>
+          <a:prstGeom prst="rect">
+            <a:avLst/>
+          </a:prstGeom>
+          <a:noFill/>
+          <a:ln/>
+        </p:spPr>
+        <p:txBody>
+          <a:bodyPr wrap="square" lIns="0" tIns="0" rIns="0" bIns="0" rtlCol="0" anchor="ctr"/>
+          <a:lstStyle/>
+          <a:p>
+            <a:pPr indent="0" marL="0">
+              <a:lnSpc>
+                <a:spcPts val="1500"/>
+              </a:lnSpc>
+              <a:buNone/>
+            </a:pPr>
+            <a:r>
+              <a:rPr lang="en-US" sz="1150" dirty="0">
+                <a:solidFill>
+                  <a:srgbClr val="585868"/>
+                </a:solidFill>
+                <a:latin typeface="Helvetica Neue" pitchFamily="34" charset="0"/>
+                <a:ea typeface="Helvetica Neue" pitchFamily="34" charset="-122"/>
+                <a:cs typeface="Helvetica Neue" pitchFamily="34" charset="-120"/>
+              </a:rPr>
+              <a:t>In explained mode, the orange blocks say which recommendation produced that section and why — so the site is auditable, not just persuasive.</a:t>
+            </a:r>
+            <a:endParaRPr lang="en-US" sz="1150" dirty="0"/>
+          </a:p>
+        </p:txBody>
+      </p:sp>
+      <p:sp>
+        <p:nvSpPr>
+          <p:cNvPr id="20" name="Text 13"/>
+          <p:cNvSpPr txBox="1"/>
+          <p:nvPr/>
+        </p:nvSpPr>
+        <p:spPr>
+          <a:xfrm>
+            <a:off x="7699248" y="5486400"/>
+            <a:ext cx="3840480" cy="603504"/>
+          </a:xfrm>
+          <a:prstGeom prst="rect">
+            <a:avLst/>
+          </a:prstGeom>
+          <a:noFill/>
+          <a:ln/>
+        </p:spPr>
+        <p:txBody>
+          <a:bodyPr wrap="square" lIns="0" tIns="0" rIns="0" bIns="0" rtlCol="0" anchor="ctr"/>
+          <a:lstStyle/>
+          <a:p>
+            <a:pPr indent="0" marL="0">
+              <a:lnSpc>
+                <a:spcPts val="1500"/>
+              </a:lnSpc>
+              <a:buNone/>
+            </a:pPr>
+            <a:r>
+              <a:rPr lang="en-US" sz="1150" b="1" dirty="0">
+                <a:solidFill>
+                  <a:srgbClr val="FF6200"/>
+                </a:solidFill>
+                <a:latin typeface="Helvetica Neue" pitchFamily="34" charset="0"/>
+                <a:ea typeface="Helvetica Neue" pitchFamily="34" charset="-122"/>
+                <a:cs typeface="Helvetica Neue" pitchFamily="34" charset="-120"/>
+              </a:rPr>
+              <a:t>This is what makes the analysis arguable: a stakeholder can look at the change rather than read about it.</a:t>
+            </a:r>
+            <a:endParaRPr lang="en-US" sz="1150" dirty="0"/>
+          </a:p>
+        </p:txBody>
+      </p:sp>
+    </p:spTree>
+  </p:cSld>
+  <p:clrMapOvr>
+    <a:masterClrMapping/>
+  </p:clrMapOvr>
+</p:sld>
+</file>
+
+<file path=ppt/slides/slide41.xml><?xml version="1.0" encoding="utf-8"?>
+<p:sld xmlns:a="http://schemas.openxmlformats.org/drawingml/2006/main" xmlns:r="http://schemas.openxmlformats.org/officeDocument/2006/relationships" xmlns:p="http://schemas.openxmlformats.org/presentationml/2006/main">
+  <p:cSld name="Slide 5">
+    <p:bg>
+      <p:bgPr>
+        <a:solidFill>
+          <a:srgbClr val="FFFFFF"/>
+        </a:solidFill>
+      </p:bgPr>
+    </p:bg>
+    <p:spTree>
+      <p:nvGrpSpPr>
+        <p:cNvPr id="1" name=""/>
+        <p:cNvGrpSpPr/>
+        <p:nvPr/>
+      </p:nvGrpSpPr>
+      <p:grpSpPr>
+        <a:xfrm>
+          <a:off x="0" y="0"/>
+          <a:ext cx="0" cy="0"/>
+          <a:chOff x="0" y="0"/>
+          <a:chExt cx="0" cy="0"/>
+        </a:xfrm>
+      </p:grpSpPr>
+      <p:sp>
+        <p:nvSpPr>
+          <p:cNvPr id="2" name="Text 0"/>
+          <p:cNvSpPr txBox="1"/>
+          <p:nvPr/>
+        </p:nvSpPr>
+        <p:spPr>
+          <a:xfrm>
+            <a:off x="548640" y="320040"/>
+            <a:ext cx="11064240" cy="640080"/>
+          </a:xfrm>
+          <a:prstGeom prst="rect">
+            <a:avLst/>
+          </a:prstGeom>
+          <a:noFill/>
+          <a:ln/>
+        </p:spPr>
+        <p:txBody>
+          <a:bodyPr wrap="square" lIns="0" tIns="0" rIns="0" bIns="0" rtlCol="0" anchor="ctr"/>
+          <a:lstStyle/>
+          <a:p>
+            <a:pPr indent="0" marL="0">
+              <a:buNone/>
+            </a:pPr>
+            <a:r>
+              <a:rPr lang="en-US" sz="2800" b="1" dirty="0">
+                <a:solidFill>
+                  <a:srgbClr val="14141C"/>
+                </a:solidFill>
+                <a:latin typeface="Helvetica Neue" pitchFamily="34" charset="0"/>
+                <a:ea typeface="Helvetica Neue" pitchFamily="34" charset="-122"/>
+                <a:cs typeface="Helvetica Neue" pitchFamily="34" charset="-120"/>
+              </a:rPr>
+              <a:t>The complete pipeline</a:t>
+            </a:r>
+            <a:endParaRPr lang="en-US" sz="2800" dirty="0"/>
+          </a:p>
+        </p:txBody>
+      </p:sp>
+      <p:sp>
+        <p:nvSpPr>
+          <p:cNvPr id="3" name="Shape 1"/>
+          <p:cNvSpPr/>
+          <p:nvPr/>
+        </p:nvSpPr>
+        <p:spPr>
+          <a:xfrm>
+            <a:off x="548640" y="960120"/>
+            <a:ext cx="1463040" cy="54864"/>
+          </a:xfrm>
+          <a:prstGeom prst="rect">
+            <a:avLst/>
+          </a:prstGeom>
+          <a:solidFill>
+            <a:srgbClr val="FF6200"/>
+          </a:solidFill>
+          <a:ln w="12700">
+            <a:solidFill>
+              <a:srgbClr val="333333"/>
+            </a:solidFill>
+            <a:prstDash val="solid"/>
+          </a:ln>
+        </p:spPr>
+      </p:sp>
+      <p:sp>
+        <p:nvSpPr>
+          <p:cNvPr id="4" name="Text 2"/>
+          <p:cNvSpPr txBox="1"/>
+          <p:nvPr/>
+        </p:nvSpPr>
+        <p:spPr>
+          <a:xfrm>
+            <a:off x="548640" y="6400800"/>
+            <a:ext cx="8229600" cy="274320"/>
+          </a:xfrm>
+          <a:prstGeom prst="rect">
+            <a:avLst/>
+          </a:prstGeom>
+          <a:noFill/>
+          <a:ln/>
+        </p:spPr>
+        <p:txBody>
+          <a:bodyPr wrap="square" lIns="0" tIns="0" rIns="0" bIns="0" rtlCol="0" anchor="ctr"/>
+          <a:lstStyle/>
+          <a:p>
+            <a:pPr indent="0" marL="0">
+              <a:buNone/>
+            </a:pPr>
+            <a:r>
+              <a:rPr lang="en-US" sz="1000" dirty="0">
+                <a:solidFill>
+                  <a:srgbClr val="585868"/>
+                </a:solidFill>
+                <a:latin typeface="Helvetica Neue" pitchFamily="34" charset="0"/>
+                <a:ea typeface="Helvetica Neue" pitchFamily="34" charset="-122"/>
+                <a:cs typeface="Helvetica Neue" pitchFamily="34" charset="-120"/>
+              </a:rPr>
+              <a:t>Banking Campaigns Comparator · ING DACI / Customer AI · September 2026</a:t>
+            </a:r>
+            <a:endParaRPr lang="en-US" sz="1000" dirty="0"/>
+          </a:p>
+        </p:txBody>
+      </p:sp>
+      <p:sp>
+        <p:nvSpPr>
+          <p:cNvPr id="5" name="Text 3"/>
+          <p:cNvSpPr txBox="1"/>
+          <p:nvPr/>
+        </p:nvSpPr>
+        <p:spPr>
+          <a:xfrm>
+            <a:off x="11091672" y="6400800"/>
+            <a:ext cx="548640" cy="274320"/>
+          </a:xfrm>
+          <a:prstGeom prst="rect">
+            <a:avLst/>
+          </a:prstGeom>
+          <a:noFill/>
+          <a:ln/>
+        </p:spPr>
+        <p:txBody>
+          <a:bodyPr wrap="square" lIns="0" tIns="0" rIns="0" bIns="0" rtlCol="0" anchor="ctr"/>
+          <a:lstStyle/>
+          <a:p>
+            <a:pPr algn="r" indent="0" marL="0">
+              <a:buNone/>
+            </a:pPr>
+            <a:r>
+              <a:rPr lang="en-US" sz="1000" dirty="0">
+                <a:solidFill>
+                  <a:srgbClr val="585868"/>
+                </a:solidFill>
+                <a:latin typeface="Helvetica Neue" pitchFamily="34" charset="0"/>
+                <a:ea typeface="Helvetica Neue" pitchFamily="34" charset="-122"/>
+                <a:cs typeface="Helvetica Neue" pitchFamily="34" charset="-120"/>
+              </a:rPr>
+              <a:t>17</a:t>
+            </a:r>
+            <a:endParaRPr lang="en-US" sz="1000" dirty="0"/>
+          </a:p>
+        </p:txBody>
+      </p:sp>
+      <p:pic>
+        <p:nvPicPr>
+          <p:cNvPr id="6" name="Image 0" descr="/Users/nstephane/Dev/AI_Data_Science_training/ing-usecase/docs/deck_assets/pipeline_complete.png">    </p:cNvPr>
+          <p:cNvPicPr>
+            <a:picLocks noChangeAspect="1"/>
+          </p:cNvPicPr>
+          <p:nvPr/>
+        </p:nvPicPr>
+        <p:blipFill>
+          <a:blip r:embed="rId1"/>
+          <a:stretch>
+            <a:fillRect/>
+          </a:stretch>
+        </p:blipFill>
+        <p:spPr>
+          <a:xfrm>
+            <a:off x="932688" y="1170432"/>
+            <a:ext cx="10332720" cy="4681728"/>
+          </a:xfrm>
+          <a:prstGeom prst="rect">
+            <a:avLst/>
+          </a:prstGeom>
+        </p:spPr>
+      </p:pic>
+      <p:sp>
+        <p:nvSpPr>
+          <p:cNvPr id="7" name="Text 4"/>
+          <p:cNvSpPr txBox="1"/>
+          <p:nvPr/>
+        </p:nvSpPr>
+        <p:spPr>
+          <a:xfrm>
+            <a:off x="932688" y="5925312"/>
+            <a:ext cx="10332720" cy="292608"/>
+          </a:xfrm>
+          <a:prstGeom prst="rect">
+            <a:avLst/>
+          </a:prstGeom>
+          <a:noFill/>
+          <a:ln/>
+        </p:spPr>
+        <p:txBody>
+          <a:bodyPr wrap="square" lIns="0" tIns="0" rIns="0" bIns="0" rtlCol="0" anchor="ctr"/>
+          <a:lstStyle/>
+          <a:p>
+            <a:pPr indent="0" marL="0">
+              <a:buNone/>
+            </a:pPr>
+            <a:r>
+              <a:rPr lang="en-US" sz="1050" i="1" dirty="0">
+                <a:solidFill>
+                  <a:srgbClr val="585868"/>
+                </a:solidFill>
+                <a:latin typeface="Helvetica Neue" pitchFamily="34" charset="0"/>
+                <a:ea typeface="Helvetica Neue" pitchFamily="34" charset="-122"/>
+                <a:cs typeface="Helvetica Neue" pitchFamily="34" charset="-120"/>
+              </a:rPr>
+              <a:t>Stages 1–5 are the measurement half shown in the main deck. Stages 6–8 are this one.</a:t>
+            </a:r>
+            <a:endParaRPr lang="en-US" sz="1050" dirty="0"/>
+          </a:p>
+        </p:txBody>
+      </p:sp>
+    </p:spTree>
+  </p:cSld>
+  <p:clrMapOvr>
+    <a:masterClrMapping/>
+  </p:clrMapOvr>
+</p:sld>
+</file>
+
+<file path=ppt/slides/slide42.xml><?xml version="1.0" encoding="utf-8"?>
+<p:sld xmlns:a="http://schemas.openxmlformats.org/drawingml/2006/main" xmlns:r="http://schemas.openxmlformats.org/officeDocument/2006/relationships" xmlns:p="http://schemas.openxmlformats.org/presentationml/2006/main">
+  <p:cSld>
+    <p:spTree>
+      <p:nvGrpSpPr>
+        <p:cNvPr id="1" name=""/>
+        <p:cNvGrpSpPr/>
+        <p:nvPr/>
+      </p:nvGrpSpPr>
+      <p:grpSpPr>
+        <a:xfrm>
+          <a:off x="0" y="0"/>
+          <a:ext cx="0" cy="0"/>
+          <a:chOff x="0" y="0"/>
+          <a:chExt cx="0" cy="0"/>
+        </a:xfrm>
+      </p:grpSpPr>
+      <p:sp>
+        <p:nvSpPr>
+          <p:cNvPr id="2" name="Rectangle 1"/>
+          <p:cNvSpPr/>
+          <p:nvPr/>
+        </p:nvSpPr>
+        <p:spPr>
+          <a:xfrm>
+            <a:off x="0" y="0"/>
+            <a:ext cx="12191695" cy="6858000"/>
+          </a:xfrm>
+          <a:prstGeom prst="rect">
+            <a:avLst/>
+          </a:prstGeom>
+          <a:solidFill>
+            <a:srgbClr val="14141C"/>
+          </a:solidFill>
+          <a:ln>
+            <a:noFill/>
+          </a:ln>
+          <a:effectLst/>
+        </p:spPr>
+        <p:style>
+          <a:lnRef idx="1">
+            <a:schemeClr val="accent1"/>
+          </a:lnRef>
+          <a:fillRef idx="3">
+            <a:schemeClr val="accent1"/>
+          </a:fillRef>
+          <a:effectRef idx="2">
+            <a:schemeClr val="accent1"/>
+          </a:effectRef>
+          <a:fontRef idx="minor">
+            <a:schemeClr val="lt1"/>
+          </a:fontRef>
+        </p:style>
+        <p:txBody>
+          <a:bodyPr rtlCol="0" anchor="ctr"/>
+          <a:lstStyle/>
+          <a:p>
+            <a:pPr algn="ctr"/>
+            <a:endParaRPr/>
+          </a:p>
+        </p:txBody>
+      </p:sp>
+      <p:sp>
+        <p:nvSpPr>
+          <p:cNvPr id="3" name="Rectangle 2"/>
+          <p:cNvSpPr/>
+          <p:nvPr/>
+        </p:nvSpPr>
+        <p:spPr>
+          <a:xfrm>
+            <a:off x="822960" y="2331720"/>
+            <a:ext cx="2011680" cy="91440"/>
+          </a:xfrm>
+          <a:prstGeom prst="rect">
+            <a:avLst/>
+          </a:prstGeom>
+          <a:solidFill>
+            <a:srgbClr val="FF6200"/>
+          </a:solidFill>
+          <a:ln>
+            <a:noFill/>
+          </a:ln>
+          <a:effectLst/>
+        </p:spPr>
+        <p:style>
+          <a:lnRef idx="1">
+            <a:schemeClr val="accent1"/>
+          </a:lnRef>
+          <a:fillRef idx="3">
+            <a:schemeClr val="accent1"/>
+          </a:fillRef>
+          <a:effectRef idx="2">
+            <a:schemeClr val="accent1"/>
+          </a:effectRef>
+          <a:fontRef idx="minor">
+            <a:schemeClr val="lt1"/>
+          </a:fontRef>
+        </p:style>
+        <p:txBody>
+          <a:bodyPr rtlCol="0" anchor="ctr"/>
+          <a:lstStyle/>
+          <a:p>
+            <a:pPr algn="ctr"/>
+            <a:endParaRPr/>
+          </a:p>
+        </p:txBody>
+      </p:sp>
+      <p:sp>
+        <p:nvSpPr>
+          <p:cNvPr id="4" name="TextBox 3"/>
+          <p:cNvSpPr txBox="1"/>
+          <p:nvPr/>
+        </p:nvSpPr>
+        <p:spPr>
+          <a:xfrm>
+            <a:off x="822960" y="1051560"/>
+            <a:ext cx="10515600" cy="1280160"/>
+          </a:xfrm>
+          <a:prstGeom prst="rect">
+            <a:avLst/>
+          </a:prstGeom>
+          <a:noFill/>
+        </p:spPr>
+        <p:txBody>
+          <a:bodyPr wrap="square">
+            <a:spAutoFit/>
+          </a:bodyPr>
+          <a:lstStyle/>
+          <a:p>
+            <a:pPr algn="l">
+              <a:lnSpc>
+                <a:spcPct val="105000"/>
+              </a:lnSpc>
+              <a:spcAft>
+                <a:spcPts val="600"/>
+              </a:spcAft>
+            </a:pPr>
+            <a:r>
+              <a:rPr sz="4400" b="1">
+                <a:solidFill>
+                  <a:srgbClr val="FFFFFF"/>
+                </a:solidFill>
+                <a:latin typeface="Helvetica Neue"/>
+              </a:rPr>
+              <a:t>Backup</a:t>
+            </a:r>
+          </a:p>
+        </p:txBody>
+      </p:sp>
+      <p:sp>
+        <p:nvSpPr>
+          <p:cNvPr id="5" name="TextBox 4"/>
+          <p:cNvSpPr txBox="1"/>
+          <p:nvPr/>
+        </p:nvSpPr>
+        <p:spPr>
+          <a:xfrm>
+            <a:off x="822960" y="2606040"/>
+            <a:ext cx="10058400" cy="1097280"/>
+          </a:xfrm>
+          <a:prstGeom prst="rect">
+            <a:avLst/>
+          </a:prstGeom>
+          <a:noFill/>
+        </p:spPr>
+        <p:txBody>
+          <a:bodyPr wrap="square">
+            <a:spAutoFit/>
+          </a:bodyPr>
+          <a:lstStyle/>
+          <a:p>
+            <a:pPr algn="l">
+              <a:lnSpc>
+                <a:spcPct val="105000"/>
+              </a:lnSpc>
+              <a:spcAft>
+                <a:spcPts val="600"/>
+              </a:spcAft>
+            </a:pPr>
+            <a:r>
+              <a:rPr sz="2000" b="0">
+                <a:solidFill>
+                  <a:srgbClr val="D8D8E0"/>
+                </a:solidFill>
+                <a:latin typeface="Helvetica Neue"/>
+              </a:rPr>
+              <a:t>Slides we did not walk through — here if you ask</a:t>
+            </a:r>
+          </a:p>
+          <a:p>
+            <a:pPr algn="l">
+              <a:lnSpc>
+                <a:spcPct val="105000"/>
+              </a:lnSpc>
+              <a:spcAft>
+                <a:spcPts val="600"/>
+              </a:spcAft>
+            </a:pPr>
+            <a:r>
+              <a:rPr sz="2000" b="0">
+                <a:solidFill>
+                  <a:srgbClr val="D8D8E0"/>
+                </a:solidFill>
+                <a:latin typeface="Helvetica Neue"/>
+              </a:rPr>
+              <a:t/>
+            </a:r>
+          </a:p>
+        </p:txBody>
+      </p:sp>
+      <p:sp>
+        <p:nvSpPr>
+          <p:cNvPr id="6" name="TextBox 5"/>
+          <p:cNvSpPr txBox="1"/>
+          <p:nvPr/>
+        </p:nvSpPr>
+        <p:spPr>
+          <a:xfrm>
+            <a:off x="822960" y="4114800"/>
+            <a:ext cx="10058400" cy="1280160"/>
+          </a:xfrm>
+          <a:prstGeom prst="rect">
+            <a:avLst/>
+          </a:prstGeom>
+          <a:noFill/>
+        </p:spPr>
+        <p:txBody>
+          <a:bodyPr wrap="square">
+            <a:spAutoFit/>
+          </a:bodyPr>
+          <a:lstStyle/>
+          <a:p>
+            <a:pPr algn="l">
+              <a:lnSpc>
+                <a:spcPct val="105000"/>
+              </a:lnSpc>
+              <a:spcAft>
+                <a:spcPts val="400"/>
+              </a:spcAft>
+            </a:pPr>
+            <a:r>
+              <a:rPr sz="1300" b="0" dirty="0">
+                <a:solidFill>
+                  <a:srgbClr val="A8A8B8"/>
+                </a:solidFill>
+                <a:latin typeface="Helvetica Neue"/>
+              </a:rPr>
+              <a:t/>
+            </a:r>
+          </a:p>
+          <a:p>
+            <a:pPr algn="l">
+              <a:lnSpc>
+                <a:spcPct val="105000"/>
+              </a:lnSpc>
+              <a:spcAft>
+                <a:spcPts val="400"/>
+              </a:spcAft>
+            </a:pPr>
+            <a:r>
+              <a:rPr sz="1300" b="0" dirty="0">
+                <a:solidFill>
+                  <a:srgbClr val="A8A8B8"/>
+                </a:solidFill>
+                <a:latin typeface="Helvetica Neue"/>
+              </a:rPr>
+              <a:t/>
+            </a:r>
+            <a:r>
+              <a:rPr sz="1300" b="0" dirty="0" err="1">
+                <a:solidFill>
+                  <a:srgbClr val="A8A8B8"/>
+                </a:solidFill>
+                <a:latin typeface="Helvetica Neue"/>
+              </a:rPr>
+              <a:t/>
+            </a:r>
+            <a:r>
+              <a:rPr sz="1300" b="0" dirty="0">
+                <a:solidFill>
+                  <a:srgbClr val="A8A8B8"/>
+                </a:solidFill>
+                <a:latin typeface="Helvetica Neue"/>
+              </a:rPr>
+              <a:t/>
+            </a:r>
+          </a:p>
+          <a:p>
+            <a:pPr algn="l">
+              <a:lnSpc>
+                <a:spcPct val="105000"/>
+              </a:lnSpc>
+              <a:spcAft>
+                <a:spcPts val="400"/>
+              </a:spcAft>
+            </a:pPr>
+            <a:r>
+              <a:rPr sz="1300" b="0" dirty="0">
+                <a:solidFill>
+                  <a:srgbClr val="A8A8B8"/>
+                </a:solidFill>
+                <a:latin typeface="Helvetica Neue"/>
+              </a:rPr>
+              <a:t/>
+            </a:r>
+          </a:p>
+        </p:txBody>
+      </p:sp>
+    </p:spTree>
+  </p:cSld>
+  <p:clrMapOvr>
+    <a:masterClrMapping/>
+  </p:clrMapOvr>
+</p:sld>
+</file>
+
 <file path=ppt/slides/slide5.xml><?xml version="1.0" encoding="utf-8"?>
 <p:sld xmlns:a="http://schemas.openxmlformats.org/drawingml/2006/main" xmlns:r="http://schemas.openxmlformats.org/officeDocument/2006/relationships" xmlns:p="http://schemas.openxmlformats.org/presentationml/2006/main">
   <p:cSld>
@@ -18935,7 +22421,7 @@
                 </a:solidFill>
                 <a:latin typeface="Helvetica Neue"/>
               </a:rPr>
-              <a:t>5</a:t>
+              <a:t>21</a:t>
             </a:r>
           </a:p>
         </p:txBody>
@@ -19197,7 +22683,7 @@
                 </a:solidFill>
                 <a:latin typeface="Helvetica Neue"/>
               </a:rPr>
-              <a:t>6</a:t>
+              <a:t>22</a:t>
             </a:r>
           </a:p>
         </p:txBody>
@@ -19606,7 +23092,7 @@
                 </a:solidFill>
                 <a:latin typeface="Helvetica Neue"/>
               </a:rPr>
-              <a:t>7</a:t>
+              <a:t>23</a:t>
             </a:r>
           </a:p>
         </p:txBody>
@@ -19977,7 +23463,7 @@
                 </a:solidFill>
                 <a:latin typeface="Helvetica Neue"/>
               </a:rPr>
-              <a:t>8</a:t>
+              <a:t>24</a:t>
             </a:r>
           </a:p>
         </p:txBody>
@@ -20131,7 +23617,7 @@
                 </a:solidFill>
                 <a:latin typeface="Helvetica Neue"/>
               </a:rPr>
-              <a:t>•  18 pages, 14 banks, 30 comparable features, nothing excluded</a:t>
+              <a:t>•  51 pages collected and scored across 6 product families; this comparison runs on the 18 current-account pages, 14 banks, 30 comparable features</a:t>
             </a:r>
           </a:p>
           <a:p>
@@ -20530,7 +24016,7 @@
                 </a:solidFill>
                 <a:latin typeface="Helvetica Neue"/>
               </a:rPr>
-              <a:t>9</a:t>
+              <a:t>5</a:t>
             </a:r>
           </a:p>
         </p:txBody>

--- a/docs/Banking_Campaigns_Comparator.pptx
+++ b/docs/Banking_Campaigns_Comparator.pptx
@@ -4308,7 +4308,7 @@
                 </a:solidFill>
                 <a:latin typeface="Helvetica Neue"/>
               </a:rPr>
-              <a:t> positioning score 0.26 across 14 banks, and its nearest </a:t>
+              <a:t> positioning score 0.28 across 14 banks, and its nearest </a:t>
             </a:r>
             <a:r>
               <a:rPr sz="1300" b="0" dirty="0" err="1">
@@ -4493,7 +4493,7 @@
                 </a:solidFill>
                 <a:latin typeface="Helvetica Neue"/>
               </a:rPr>
-              <a:t>     These are descriptive effect sizes over 14 banks, not significance tests. The rubric-sourced ones moved when the second human sheet was folded in, and the deadline count was re-derived from the stored pages — all 14 banks re-measured with the same rule.</a:t>
+              <a:t>     These are descriptive effect sizes over 14 banks, not significance tests. The rubric-sourced ones rest on a single judged sheet, and the deadline count was re-derived from the stored pages — all 14 banks re-measured with the same rule.</a:t>
             </a:r>
           </a:p>
         </p:txBody>
@@ -9238,7 +9238,7 @@
                 </a:solidFill>
                 <a:latin typeface="Helvetica Neue"/>
               </a:rPr>
-              <a:t>     Coverage is partial and the overlap between any two raters is still thin, and six of the thirteen features sit below the agreement bar — so a finding resting on persuasion levers or accent placement is a hypothesis.</a:t>
+              <a:t>     All thirteen come from one judged sheet by one person, so single-judge bias is present and un-measured - there is no second sheet to measure it against. A finding resting on persuasion levers or accent placement is a hypothesis, not a reading.</a:t>
             </a:r>
           </a:p>
           <a:p>
@@ -23617,7 +23617,7 @@
                 </a:solidFill>
                 <a:latin typeface="Helvetica Neue"/>
               </a:rPr>
-              <a:t>•  51 pages collected and scored across 6 product families; this comparison runs on the 18 current-account pages, 14 banks, 30 comparable features</a:t>
+              <a:t>•  51 pages collected and scored across 6 product families; this comparison runs on the 18 current-account pages, 14 banks, 36 comparable features</a:t>
             </a:r>
           </a:p>
           <a:p>

--- a/docs/Banking_Campaigns_Comparator.pptx
+++ b/docs/Banking_Campaigns_Comparator.pptx
@@ -5,46 +5,47 @@
     <p:sldMasterId id="2147483648" r:id="rId1"/>
   </p:sldMasterIdLst>
   <p:sldIdLst>
-    <p:sldId id="256" r:id="rId2001"/>
-    <p:sldId id="257" r:id="rId2002"/>
-    <p:sldId id="258" r:id="rId2003"/>
-    <p:sldId id="259" r:id="rId2004"/>
-    <p:sldId id="260" r:id="rId2005"/>
-    <p:sldId id="261" r:id="rId2006"/>
-    <p:sldId id="262" r:id="rId2007"/>
-    <p:sldId id="263" r:id="rId2008"/>
-    <p:sldId id="264" r:id="rId2009"/>
-    <p:sldId id="265" r:id="rId2010"/>
-    <p:sldId id="266" r:id="rId2011"/>
-    <p:sldId id="267" r:id="rId2012"/>
-    <p:sldId id="268" r:id="rId2013"/>
-    <p:sldId id="269" r:id="rId2014"/>
-    <p:sldId id="270" r:id="rId2015"/>
-    <p:sldId id="271" r:id="rId2016"/>
-    <p:sldId id="272" r:id="rId2017"/>
-    <p:sldId id="273" r:id="rId2018"/>
-    <p:sldId id="274" r:id="rId2019"/>
-    <p:sldId id="275" r:id="rId2020"/>
-    <p:sldId id="276" r:id="rId2021"/>
-    <p:sldId id="277" r:id="rId2022"/>
-    <p:sldId id="278" r:id="rId2023"/>
-    <p:sldId id="279" r:id="rId2024"/>
-    <p:sldId id="280" r:id="rId2025"/>
-    <p:sldId id="281" r:id="rId2026"/>
-    <p:sldId id="282" r:id="rId2027"/>
-    <p:sldId id="283" r:id="rId2028"/>
-    <p:sldId id="284" r:id="rId2029"/>
-    <p:sldId id="285" r:id="rId2030"/>
-    <p:sldId id="286" r:id="rId2031"/>
-    <p:sldId id="287" r:id="rId2032"/>
-    <p:sldId id="288" r:id="rId2033"/>
-    <p:sldId id="289" r:id="rId2034"/>
-    <p:sldId id="290" r:id="rId2035"/>
-    <p:sldId id="291" r:id="rId2036"/>
-    <p:sldId id="292" r:id="rId2037"/>
-    <p:sldId id="293" r:id="rId2038"/>
-    <p:sldId id="294" r:id="rId2039"/>
-    <p:sldId id="295" r:id="rId2040"/>
+    <p:sldId id="256" r:id="rId3001"/>
+    <p:sldId id="257" r:id="rId3002"/>
+    <p:sldId id="258" r:id="rId3003"/>
+    <p:sldId id="259" r:id="rId3004"/>
+    <p:sldId id="260" r:id="rId3005"/>
+    <p:sldId id="261" r:id="rId3006"/>
+    <p:sldId id="262" r:id="rId3007"/>
+    <p:sldId id="263" r:id="rId3008"/>
+    <p:sldId id="264" r:id="rId3009"/>
+    <p:sldId id="265" r:id="rId3010"/>
+    <p:sldId id="266" r:id="rId3011"/>
+    <p:sldId id="267" r:id="rId3012"/>
+    <p:sldId id="268" r:id="rId3013"/>
+    <p:sldId id="269" r:id="rId3014"/>
+    <p:sldId id="270" r:id="rId3015"/>
+    <p:sldId id="271" r:id="rId3016"/>
+    <p:sldId id="272" r:id="rId3017"/>
+    <p:sldId id="273" r:id="rId3018"/>
+    <p:sldId id="274" r:id="rId3019"/>
+    <p:sldId id="275" r:id="rId3020"/>
+    <p:sldId id="276" r:id="rId3021"/>
+    <p:sldId id="277" r:id="rId3022"/>
+    <p:sldId id="278" r:id="rId3023"/>
+    <p:sldId id="279" r:id="rId3024"/>
+    <p:sldId id="280" r:id="rId3025"/>
+    <p:sldId id="281" r:id="rId3026"/>
+    <p:sldId id="282" r:id="rId3027"/>
+    <p:sldId id="283" r:id="rId3028"/>
+    <p:sldId id="284" r:id="rId3029"/>
+    <p:sldId id="285" r:id="rId3030"/>
+    <p:sldId id="286" r:id="rId3031"/>
+    <p:sldId id="287" r:id="rId3032"/>
+    <p:sldId id="288" r:id="rId3033"/>
+    <p:sldId id="289" r:id="rId3034"/>
+    <p:sldId id="290" r:id="rId3035"/>
+    <p:sldId id="291" r:id="rId3036"/>
+    <p:sldId id="292" r:id="rId3037"/>
+    <p:sldId id="293" r:id="rId3038"/>
+    <p:sldId id="294" r:id="rId3039"/>
+    <p:sldId id="295" r:id="rId3040"/>
+    <p:sldId id="296" r:id="rId3041"/>
   </p:sldIdLst>
   <p:sldSz cx="12192000" cy="6858000"/>
   <p:notesSz cx="6858000" cy="9144000"/>
@@ -4117,7 +4118,7 @@
                 </a:solidFill>
                 <a:latin typeface="Helvetica Neue"/>
               </a:rPr>
-              <a:t>25</a:t>
+              <a:t>26</a:t>
             </a:r>
           </a:p>
         </p:txBody>
@@ -4839,7 +4840,7 @@
                 </a:solidFill>
                 <a:latin typeface="Helvetica Neue"/>
               </a:rPr>
-              <a:t>26</a:t>
+              <a:t>27</a:t>
             </a:r>
           </a:p>
         </p:txBody>
@@ -5153,7 +5154,7 @@
                 </a:solidFill>
                 <a:latin typeface="Helvetica Neue"/>
               </a:rPr>
-              <a:t>27</a:t>
+              <a:t>28</a:t>
             </a:r>
           </a:p>
         </p:txBody>
@@ -5415,7 +5416,7 @@
                 </a:solidFill>
                 <a:latin typeface="Helvetica Neue"/>
               </a:rPr>
-              <a:t>28</a:t>
+              <a:t>29</a:t>
             </a:r>
           </a:p>
         </p:txBody>
@@ -5729,7 +5730,7 @@
                 </a:solidFill>
                 <a:latin typeface="Helvetica Neue"/>
               </a:rPr>
-              <a:t>29</a:t>
+              <a:t>30</a:t>
             </a:r>
           </a:p>
         </p:txBody>
@@ -5991,7 +5992,7 @@
                 </a:solidFill>
                 <a:latin typeface="Helvetica Neue"/>
               </a:rPr>
-              <a:t>30</a:t>
+              <a:t>31</a:t>
             </a:r>
           </a:p>
         </p:txBody>
@@ -6711,7 +6712,7 @@
                 </a:solidFill>
                 <a:latin typeface="Helvetica Neue"/>
               </a:rPr>
-              <a:t>31</a:t>
+              <a:t>32</a:t>
             </a:r>
           </a:p>
         </p:txBody>
@@ -6973,7 +6974,7 @@
                 </a:solidFill>
                 <a:latin typeface="Helvetica Neue"/>
               </a:rPr>
-              <a:t>32</a:t>
+              <a:t>33</a:t>
             </a:r>
           </a:p>
         </p:txBody>
@@ -7417,7 +7418,7 @@
                 </a:solidFill>
                 <a:latin typeface="Helvetica Neue"/>
               </a:rPr>
-              <a:t>33</a:t>
+              <a:t>34</a:t>
             </a:r>
           </a:p>
         </p:txBody>
@@ -7679,7 +7680,7 @@
                 </a:solidFill>
                 <a:latin typeface="Helvetica Neue"/>
               </a:rPr>
-              <a:t>34</a:t>
+              <a:t>35</a:t>
             </a:r>
           </a:p>
         </p:txBody>
@@ -7941,7 +7942,7 @@
                 </a:solidFill>
                 <a:latin typeface="Helvetica Neue"/>
               </a:rPr>
-              <a:t>35</a:t>
+              <a:t>36</a:t>
             </a:r>
           </a:p>
         </p:txBody>
@@ -8203,7 +8204,7 @@
                 </a:solidFill>
                 <a:latin typeface="Helvetica Neue"/>
               </a:rPr>
-              <a:t>36</a:t>
+              <a:t>37</a:t>
             </a:r>
           </a:p>
         </p:txBody>
@@ -8465,7 +8466,7 @@
                 </a:solidFill>
                 <a:latin typeface="Helvetica Neue"/>
               </a:rPr>
-              <a:t>37</a:t>
+              <a:t>38</a:t>
             </a:r>
           </a:p>
         </p:txBody>
@@ -8727,7 +8728,7 @@
                 </a:solidFill>
                 <a:latin typeface="Helvetica Neue"/>
               </a:rPr>
-              <a:t>38</a:t>
+              <a:t>39</a:t>
             </a:r>
           </a:p>
         </p:txBody>
@@ -8989,7 +8990,7 @@
                 </a:solidFill>
                 <a:latin typeface="Helvetica Neue"/>
               </a:rPr>
-              <a:t>39</a:t>
+              <a:t>40</a:t>
             </a:r>
           </a:p>
         </p:txBody>
@@ -10228,7 +10229,7 @@
                 </a:solidFill>
                 <a:latin typeface="Helvetica Neue"/>
               </a:rPr>
-              <a:t>40</a:t>
+              <a:t>41</a:t>
             </a:r>
           </a:p>
         </p:txBody>
@@ -22172,6 +22173,450 @@
 </p:sld>
 </file>
 
+<file path=ppt/slides/slide43.xml><?xml version="1.0" encoding="utf-8"?>
+<p:sld xmlns:a="http://schemas.openxmlformats.org/drawingml/2006/main" xmlns:r="http://schemas.openxmlformats.org/officeDocument/2006/relationships" xmlns:p="http://schemas.openxmlformats.org/presentationml/2006/main">
+  <p:cSld>
+    <p:spTree>
+      <p:nvGrpSpPr>
+        <p:cNvPr id="1" name=""/>
+        <p:cNvGrpSpPr/>
+        <p:nvPr/>
+      </p:nvGrpSpPr>
+      <p:grpSpPr>
+        <a:xfrm>
+          <a:off x="0" y="0"/>
+          <a:ext cx="0" cy="0"/>
+          <a:chOff x="0" y="0"/>
+          <a:chExt cx="0" cy="0"/>
+        </a:xfrm>
+      </p:grpSpPr>
+      <p:sp>
+        <p:nvSpPr>
+          <p:cNvPr id="2" name="TextBox 1"/>
+          <p:cNvSpPr txBox="1"/>
+          <p:nvPr/>
+        </p:nvSpPr>
+        <p:spPr>
+          <a:xfrm>
+            <a:off x="548640" y="384048"/>
+            <a:ext cx="11064240" cy="731520"/>
+          </a:xfrm>
+          <a:prstGeom prst="rect">
+            <a:avLst/>
+          </a:prstGeom>
+          <a:noFill/>
+        </p:spPr>
+        <p:txBody>
+          <a:bodyPr wrap="square">
+            <a:spAutoFit/>
+          </a:bodyPr>
+          <a:lstStyle/>
+          <a:p>
+            <a:pPr algn="l">
+              <a:lnSpc>
+                <a:spcPct val="105000"/>
+              </a:lnSpc>
+              <a:spcAft>
+                <a:spcPts val="600"/>
+              </a:spcAft>
+            </a:pPr>
+            <a:r>
+              <a:rPr sz="2800" b="1">
+                <a:solidFill>
+                  <a:srgbClr val="14141C"/>
+                </a:solidFill>
+                <a:latin typeface="Helvetica Neue"/>
+              </a:rPr>
+              <a:t>What we chose to measure, and why</a:t>
+            </a:r>
+          </a:p>
+        </p:txBody>
+      </p:sp>
+      <p:sp>
+        <p:nvSpPr>
+          <p:cNvPr id="3" name="Rectangle 2"/>
+          <p:cNvSpPr/>
+          <p:nvPr/>
+        </p:nvSpPr>
+        <p:spPr>
+          <a:xfrm>
+            <a:off x="548640" y="1115568"/>
+            <a:ext cx="1463040" cy="64008"/>
+          </a:xfrm>
+          <a:prstGeom prst="rect">
+            <a:avLst/>
+          </a:prstGeom>
+          <a:solidFill>
+            <a:srgbClr val="FF6200"/>
+          </a:solidFill>
+          <a:ln>
+            <a:noFill/>
+          </a:ln>
+          <a:effectLst/>
+        </p:spPr>
+        <p:style>
+          <a:lnRef idx="1">
+            <a:schemeClr val="accent1"/>
+          </a:lnRef>
+          <a:fillRef idx="3">
+            <a:schemeClr val="accent1"/>
+          </a:fillRef>
+          <a:effectRef idx="2">
+            <a:schemeClr val="accent1"/>
+          </a:effectRef>
+          <a:fontRef idx="minor">
+            <a:schemeClr val="lt1"/>
+          </a:fontRef>
+        </p:style>
+        <p:txBody>
+          <a:bodyPr rtlCol="0" anchor="ctr"/>
+          <a:lstStyle/>
+          <a:p>
+            <a:pPr algn="ctr"/>
+            <a:endParaRPr/>
+          </a:p>
+        </p:txBody>
+      </p:sp>
+      <p:sp>
+        <p:nvSpPr>
+          <p:cNvPr id="4" name="TextBox 3"/>
+          <p:cNvSpPr txBox="1"/>
+          <p:nvPr/>
+        </p:nvSpPr>
+        <p:spPr>
+          <a:xfrm>
+            <a:off x="685800" y="1463040"/>
+            <a:ext cx="10881360" cy="4754880"/>
+          </a:xfrm>
+          <a:prstGeom prst="rect">
+            <a:avLst/>
+          </a:prstGeom>
+          <a:noFill/>
+        </p:spPr>
+        <p:txBody>
+          <a:bodyPr wrap="square">
+            <a:spAutoFit/>
+          </a:bodyPr>
+          <a:lstStyle/>
+          <a:p>
+            <a:pPr algn="l">
+              <a:lnSpc>
+                <a:spcPct val="105000"/>
+              </a:lnSpc>
+              <a:spcAft>
+                <a:spcPts val="200"/>
+              </a:spcAft>
+            </a:pPr>
+            <a:r>
+              <a:rPr sz="1500" b="1">
+                <a:solidFill>
+                  <a:srgbClr val="14141C"/>
+                </a:solidFill>
+                <a:latin typeface="Helvetica Neue"/>
+              </a:rPr>
+              <a:t>•  104 declared features, 36 actually compared</a:t>
+            </a:r>
+          </a:p>
+          <a:p>
+            <a:pPr algn="l">
+              <a:lnSpc>
+                <a:spcPct val="105000"/>
+              </a:lnSpc>
+              <a:spcAft>
+                <a:spcPts val="1000"/>
+              </a:spcAft>
+            </a:pPr>
+            <a:r>
+              <a:rPr sz="1300" b="0">
+                <a:solidFill>
+                  <a:srgbClr val="585868"/>
+                </a:solidFill>
+                <a:latin typeface="Helvetica Neue"/>
+              </a:rPr>
+              <a:t>     Nothing is hidden in that reduction — the run prints it: 18 provenance fields that identify a page rather than describe a campaign, 4 free-text identifiers no two pages share, 8 within_language features that stop being comparable once the set spans three languages, 27 categorical or list features a euclidean distance cannot take raw, 2 missing on at least one bank, 8 identical everywhere, and 1 withdrawn because its capture is missing what it counts.</a:t>
+            </a:r>
+          </a:p>
+          <a:p>
+            <a:pPr algn="l">
+              <a:lnSpc>
+                <a:spcPct val="105000"/>
+              </a:lnSpc>
+              <a:spcAft>
+                <a:spcPts val="200"/>
+              </a:spcAft>
+            </a:pPr>
+            <a:r>
+              <a:rPr sz="1500" b="1">
+                <a:solidFill>
+                  <a:srgbClr val="14141C"/>
+                </a:solidFill>
+                <a:latin typeface="Helvetica Neue"/>
+              </a:rPr>
+              <a:t>•  51 pages collected and scored, 18 compared</a:t>
+            </a:r>
+          </a:p>
+          <a:p>
+            <a:pPr algn="l">
+              <a:lnSpc>
+                <a:spcPct val="105000"/>
+              </a:lnSpc>
+              <a:spcAft>
+                <a:spcPts val="1000"/>
+              </a:spcAft>
+            </a:pPr>
+            <a:r>
+              <a:rPr sz="1300" b="0">
+                <a:solidFill>
+                  <a:srgbClr val="585868"/>
+                </a:solidFill>
+                <a:latin typeface="Helvetica Neue"/>
+              </a:rPr>
+              <a:t>     One product family at a time (DR-04). A mortgage page and a current-account page differ because the products differ, not because the banks communicate differently, so pooling them would confound every result with the product. The other 33 pages are scored and in the dataset, ready for the same comparison on savings or on mortgages.</a:t>
+            </a:r>
+          </a:p>
+          <a:p>
+            <a:pPr algn="l">
+              <a:lnSpc>
+                <a:spcPct val="105000"/>
+              </a:lnSpc>
+              <a:spcAft>
+                <a:spcPts val="200"/>
+              </a:spcAft>
+            </a:pPr>
+            <a:r>
+              <a:rPr sz="1500" b="1">
+                <a:solidFill>
+                  <a:srgbClr val="14141C"/>
+                </a:solidFill>
+                <a:latin typeface="Helvetica Neue"/>
+              </a:rPr>
+              <a:t>•  14 Belgian retail banks, both sides of the market</a:t>
+            </a:r>
+          </a:p>
+          <a:p>
+            <a:pPr algn="l">
+              <a:lnSpc>
+                <a:spcPct val="105000"/>
+              </a:lnSpc>
+              <a:spcAft>
+                <a:spcPts val="1000"/>
+              </a:spcAft>
+            </a:pPr>
+            <a:r>
+              <a:rPr sz="1300" b="0">
+                <a:solidFill>
+                  <a:srgbClr val="585868"/>
+                </a:solidFill>
+                <a:latin typeface="Helvetica Neue"/>
+              </a:rPr>
+              <a:t>     Ten incumbents and four challengers, so the traditional↔challenger axis has banks on both sides of it. Belgian market only, confirmed with the client — ING.nl is out of scope, and so is professional and business banking.</a:t>
+            </a:r>
+          </a:p>
+          <a:p>
+            <a:pPr algn="l">
+              <a:lnSpc>
+                <a:spcPct val="105000"/>
+              </a:lnSpc>
+              <a:spcAft>
+                <a:spcPts val="200"/>
+              </a:spcAft>
+            </a:pPr>
+            <a:r>
+              <a:rPr sz="1500" b="1">
+                <a:solidFill>
+                  <a:srgbClr val="14141C"/>
+                </a:solidFill>
+                <a:latin typeface="Helvetica Neue"/>
+              </a:rPr>
+              <a:t>•  The open web, and only the open web</a:t>
+            </a:r>
+          </a:p>
+          <a:p>
+            <a:pPr algn="l">
+              <a:lnSpc>
+                <a:spcPct val="105000"/>
+              </a:lnSpc>
+              <a:spcAft>
+                <a:spcPts val="1000"/>
+              </a:spcAft>
+            </a:pPr>
+            <a:r>
+              <a:rPr sz="1300" b="0">
+                <a:solidFill>
+                  <a:srgbClr val="585868"/>
+                </a:solidFill>
+                <a:latin typeface="Helvetica Neue"/>
+              </a:rPr>
+              <a:t>     Public campaign pages, fetched once, robots.txt checked before every request. Social, in-app and email are out of scope and may be where a bank's real communication happens — that is a limit of this study, not of the market.</a:t>
+            </a:r>
+          </a:p>
+          <a:p>
+            <a:pPr algn="l">
+              <a:lnSpc>
+                <a:spcPct val="105000"/>
+              </a:lnSpc>
+              <a:spcAft>
+                <a:spcPts val="200"/>
+              </a:spcAft>
+            </a:pPr>
+            <a:r>
+              <a:rPr sz="1500" b="1">
+                <a:solidFill>
+                  <a:srgbClr val="14141C"/>
+                </a:solidFill>
+                <a:latin typeface="Helvetica Neue"/>
+              </a:rPr>
+              <a:t>•  Description, never causation</a:t>
+            </a:r>
+          </a:p>
+          <a:p>
+            <a:pPr algn="l">
+              <a:lnSpc>
+                <a:spcPct val="105000"/>
+              </a:lnSpc>
+              <a:spcAft>
+                <a:spcPts val="1000"/>
+              </a:spcAft>
+            </a:pPr>
+            <a:r>
+              <a:rPr sz="1300" b="0">
+                <a:solidFill>
+                  <a:srgbClr val="585868"/>
+                </a:solidFill>
+                <a:latin typeface="Helvetica Neue"/>
+              </a:rPr>
+              <a:t>     No click, conversion or performance data exists in this project, so nothing here says a design choice produced a result. Every finding is a difference, and every recommendation a hypothesis ING could test.</a:t>
+            </a:r>
+          </a:p>
+          <a:p>
+            <a:pPr algn="l">
+              <a:lnSpc>
+                <a:spcPct val="105000"/>
+              </a:lnSpc>
+              <a:spcAft>
+                <a:spcPts val="200"/>
+              </a:spcAft>
+            </a:pPr>
+            <a:endParaRPr sz="1300" b="0">
+              <a:solidFill>
+                <a:srgbClr val="585868"/>
+              </a:solidFill>
+              <a:latin typeface="Helvetica Neue"/>
+            </a:endParaRPr>
+          </a:p>
+          <a:p>
+            <a:pPr algn="l">
+              <a:lnSpc>
+                <a:spcPct val="105000"/>
+              </a:lnSpc>
+              <a:spcAft>
+                <a:spcPts val="0"/>
+              </a:spcAft>
+            </a:pPr>
+            <a:r>
+              <a:rPr sz="1250" b="0">
+                <a:solidFill>
+                  <a:srgbClr val="585868"/>
+                </a:solidFill>
+                <a:latin typeface="Helvetica Neue"/>
+              </a:rPr>
+              <a:t>Scope is a decision, not a leftover: each line above is a thing we chose not to measure, and why.</a:t>
+            </a:r>
+          </a:p>
+        </p:txBody>
+      </p:sp>
+      <p:sp>
+        <p:nvSpPr>
+          <p:cNvPr id="5" name="TextBox 4"/>
+          <p:cNvSpPr txBox="1"/>
+          <p:nvPr/>
+        </p:nvSpPr>
+        <p:spPr>
+          <a:xfrm>
+            <a:off x="548640" y="6400800"/>
+            <a:ext cx="8229600" cy="274320"/>
+          </a:xfrm>
+          <a:prstGeom prst="rect">
+            <a:avLst/>
+          </a:prstGeom>
+          <a:noFill/>
+        </p:spPr>
+        <p:txBody>
+          <a:bodyPr wrap="square">
+            <a:spAutoFit/>
+          </a:bodyPr>
+          <a:lstStyle/>
+          <a:p>
+            <a:pPr algn="l">
+              <a:lnSpc>
+                <a:spcPct val="105000"/>
+              </a:lnSpc>
+              <a:spcAft>
+                <a:spcPts val="600"/>
+              </a:spcAft>
+            </a:pPr>
+            <a:r>
+              <a:rPr sz="1000" b="0">
+                <a:solidFill>
+                  <a:srgbClr val="585868"/>
+                </a:solidFill>
+                <a:latin typeface="Helvetica Neue"/>
+              </a:rPr>
+              <a:t>Banking Campaigns Comparator · ING DACI / Customer AI · September 2026</a:t>
+            </a:r>
+          </a:p>
+        </p:txBody>
+      </p:sp>
+      <p:sp>
+        <p:nvSpPr>
+          <p:cNvPr id="6" name="TextBox 5"/>
+          <p:cNvSpPr txBox="1"/>
+          <p:nvPr/>
+        </p:nvSpPr>
+        <p:spPr>
+          <a:xfrm>
+            <a:off x="11094415" y="6400800"/>
+            <a:ext cx="548640" cy="274320"/>
+          </a:xfrm>
+          <a:prstGeom prst="rect">
+            <a:avLst/>
+          </a:prstGeom>
+          <a:noFill/>
+        </p:spPr>
+        <p:txBody>
+          <a:bodyPr wrap="square">
+            <a:spAutoFit/>
+          </a:bodyPr>
+          <a:lstStyle/>
+          <a:p>
+            <a:pPr algn="r">
+              <a:lnSpc>
+                <a:spcPct val="105000"/>
+              </a:lnSpc>
+              <a:spcAft>
+                <a:spcPts val="600"/>
+              </a:spcAft>
+            </a:pPr>
+            <a:r>
+              <a:rPr sz="1000" b="0">
+                <a:solidFill>
+                  <a:srgbClr val="585868"/>
+                </a:solidFill>
+                <a:latin typeface="Helvetica Neue"/>
+              </a:rPr>
+              <a:t>21</a:t>
+            </a:r>
+          </a:p>
+        </p:txBody>
+      </p:sp>
+    </p:spTree>
+  </p:cSld>
+  <p:clrMapOvr>
+    <a:masterClrMapping/>
+  </p:clrMapOvr>
+</p:sld>
+</file>
+
 <file path=ppt/slides/slide5.xml><?xml version="1.0" encoding="utf-8"?>
 <p:sld xmlns:a="http://schemas.openxmlformats.org/drawingml/2006/main" xmlns:r="http://schemas.openxmlformats.org/officeDocument/2006/relationships" xmlns:p="http://schemas.openxmlformats.org/presentationml/2006/main">
   <p:cSld>
@@ -22421,7 +22866,7 @@
                 </a:solidFill>
                 <a:latin typeface="Helvetica Neue"/>
               </a:rPr>
-              <a:t>21</a:t>
+              <a:t>22</a:t>
             </a:r>
           </a:p>
         </p:txBody>
@@ -22683,7 +23128,7 @@
                 </a:solidFill>
                 <a:latin typeface="Helvetica Neue"/>
               </a:rPr>
-              <a:t>22</a:t>
+              <a:t>23</a:t>
             </a:r>
           </a:p>
         </p:txBody>
@@ -23092,7 +23537,7 @@
                 </a:solidFill>
                 <a:latin typeface="Helvetica Neue"/>
               </a:rPr>
-              <a:t>23</a:t>
+              <a:t>24</a:t>
             </a:r>
           </a:p>
         </p:txBody>
@@ -23463,7 +23908,7 @@
                 </a:solidFill>
                 <a:latin typeface="Helvetica Neue"/>
               </a:rPr>
-              <a:t>24</a:t>
+              <a:t>25</a:t>
             </a:r>
           </a:p>
         </p:txBody>

--- a/docs/Banking_Campaigns_Comparator.pptx
+++ b/docs/Banking_Campaigns_Comparator.pptx
@@ -8656,7 +8656,7 @@
                 </a:solidFill>
                 <a:latin typeface="Helvetica Neue"/>
               </a:rPr>
-              <a:t>Call-to-action contrast</a:t>
+              <a:t>Institutional trust signals</a:t>
             </a:r>
           </a:p>
         </p:txBody>
@@ -8727,7 +8727,7 @@
         </p:nvSpPr>
         <p:spPr>
           <a:xfrm>
-            <a:off x="4425950" y="2415501"/>
+            <a:off x="4509504" y="2415501"/>
             <a:ext cx="177800" cy="177800"/>
           </a:xfrm>
           <a:prstGeom prst="ellipse">
@@ -8756,7 +8756,7 @@
         </p:nvSpPr>
         <p:spPr>
           <a:xfrm>
-            <a:off x="6451600" y="2415501"/>
+            <a:off x="6303254" y="2415501"/>
             <a:ext cx="177800" cy="177800"/>
           </a:xfrm>
           <a:prstGeom prst="ellipse">
@@ -8814,7 +8814,7 @@
                 </a:solidFill>
                 <a:latin typeface="Helvetica Neue"/>
               </a:rPr>
-              <a:t>+1.13 vs </a:t>
+              <a:t>+1.02 vs </a:t>
             </a:r>
             <a:r>
               <a:rPr sz="1200" b="0">
@@ -8823,7 +8823,7 @@
                 </a:solidFill>
                 <a:latin typeface="Helvetica Neue"/>
               </a:rPr>
-              <a:t>−0.34</a:t>
+              <a:t>−0.28</a:t>
             </a:r>
           </a:p>
         </p:txBody>
@@ -21595,7 +21595,7 @@
                 </a:solidFill>
                 <a:latin typeface="Helvetica Neue"/>
               </a:rPr>
-              <a:t>     Savings, mortgage, pension, investment and term accounts are already collected (52 pages, 6 families); comparing each family the same way is the next step, plus a wider bank set.</a:t>
+              <a:t>     Savings, mortgage, pension, investment and term accounts are already collected (51 pages, 6 families); comparing each family the same way is the next step, plus a wider bank set.</a:t>
             </a:r>
           </a:p>
         </p:txBody>
@@ -23306,7 +23306,7 @@
                 </a:solidFill>
                 <a:latin typeface="Helvetica Neue"/>
               </a:rPr>
-              <a:t>     Animation: 0.33 vs peers 0.62 (-0.58 SD) — the one measured place ING sits below the set. Calls to action are withheld, and we can now say why and by how much: the HTML count reads 1, while reading the stored screenshot of the same page shows at least nine — Se lancer, Découvrez l’offre, Découvrir ING+ deals, and six clickable pack and product cards. They render client-side, so they are not in the file the counter reads. The feature measured our capture, not the page.</a:t>
+              <a:t>     Animation: 0.33 vs peers 0.62 (-0.58 SD) — the one measured place ING sits below the set. Calls to action are withheld, and we can now say exactly why: the counter reads 1 where the page has 8. The captured HTML holds all of them — Se lancer, three pack cards, three product cards — but our keyword list recognises only one of those labels. It is a gap in the detector, not in the capture, and it is the third such gap we have found and said so about.</a:t>
             </a:r>
           </a:p>
           <a:p>

--- a/docs/Banking_Campaigns_Comparator.pptx
+++ b/docs/Banking_Campaigns_Comparator.pptx
@@ -23306,7 +23306,7 @@
                 </a:solidFill>
                 <a:latin typeface="Helvetica Neue"/>
               </a:rPr>
-              <a:t>     Animation: 0.33 vs peers 0.62 (-0.58 SD) — the one measured place ING sits below the set. Calls to action are withheld, and we can now say exactly why: the counter reads 1 where the page has 8. The captured HTML holds all of them — Se lancer, three pack cards, three product cards — but our keyword list recognises only one of those labels. It is a gap in the detector, not in the capture, and it is the third such gap we have found and said so about.</a:t>
+              <a:t>     Animation: 0.33 vs peers 0.62 (-0.58 SD) — the one measured place ING sits below the set. Calls to action: we publish no ranking, because no counting rule we tried reproduces a human count across all fourteen banks. What the pages do show is worth saying out loud. ING’s pack page carries nine clickable things and exactly one that opens an account — Se lancer — on a page eleven thousand pixels long. Plenty to click, almost nothing that converts.</a:t>
             </a:r>
           </a:p>
           <a:p>

--- a/docs/Banking_Campaigns_Comparator.pptx
+++ b/docs/Banking_Campaigns_Comparator.pptx
@@ -1024,6 +1024,12 @@
             <a:r>
               <a:rPr lang="en-US" dirty="0"/>
               <a:t>Then: Dan takes slides 9-12, trends, about 2 min. Stephane takes 13-17, recommendations and site, about 2 min 30.</a:t>
+            </a:r>
+          </a:p>
+          <a:p>
+            <a:r>
+              <a:rPr lang="en-US" dirty="0"/>
+              <a:t>CALLS TO ACTION, spoken, not on the slide: ING is 11th of 14 on the counted figure, 1.0 against a peer mean of 5.0 - but we do not publish that ranking, because no rule reproduces a human count on every bank. What the page itself shows is the point: ING's pack page carries nine clickable things and exactly one that opens an account, Se lancer, on a page eleven thousand pixels long. Plenty to click, almost nothing that converts.</a:t>
             </a:r>
           </a:p>
         </p:txBody>
@@ -23306,7 +23312,7 @@
                 </a:solidFill>
                 <a:latin typeface="Helvetica Neue"/>
               </a:rPr>
-              <a:t>     Animation: 0.33 vs peers 0.62 (-0.58 SD) — the one measured place ING sits below the set. Calls to action: we publish no ranking, because no counting rule we tried reproduces a human count across all fourteen banks. What the pages do show is worth saying out loud. ING’s pack page carries nine clickable things and exactly one that opens an account — Se lancer — on a page eleven thousand pixels long. Plenty to click, almost nothing that converts.</a:t>
+              <a:t>     Animation: 0.33 vs peers 0.62 (-0.58 SD) — the one measured place ING sits below the set. Calls to action are measured but not ranked here: no counting rule we tried reproduces a human count across all fourteen banks, so the figure is named rather than published.</a:t>
             </a:r>
           </a:p>
           <a:p>

--- a/docs/Banking_Campaigns_Comparator.pptx
+++ b/docs/Banking_Campaigns_Comparator.pptx
@@ -4,6 +4,9 @@
   <p:sldMasterIdLst>
     <p:sldMasterId id="2147483648" r:id="rId1"/>
   </p:sldMasterIdLst>
+  <p:notesMasterIdLst>
+    <p:notesMasterId r:id="rId43"/>
+  </p:notesMasterIdLst>
   <p:sldIdLst>
     <p:sldId id="256" r:id="rId2"/>
     <p:sldId id="257" r:id="rId3"/>
@@ -47,9 +50,6 @@
     <p:sldId id="295" r:id="rId41"/>
     <p:sldId id="296" r:id="rId42"/>
   </p:sldIdLst>
-  <p:notesMasterIdLst>
-    <p:notesMasterId r:id="rId9000"/>
-  </p:notesMasterIdLst>
   <p:sldSz cx="12192000" cy="6858000"/>
   <p:notesSz cx="6858000" cy="9144000"/>
   <p:defaultTextStyle>
@@ -215,7 +215,7 @@
             </a:lvl1pPr>
           </a:lstStyle>
           <a:p>
-            <a:endParaRPr lang="en-US"/>
+            <a:endParaRPr lang="fr-BE"/>
           </a:p>
         </p:txBody>
       </p:sp>
@@ -246,11 +246,11 @@
             </a:lvl1pPr>
           </a:lstStyle>
           <a:p>
-            <a:fld id="{5282F153-3F37-0F45-9E97-73ACFA13230C}" type="datetimeFigureOut">
-              <a:rPr lang="en-US"/>
-              <a:t>7/23/19</a:t>
+            <a:fld id="{5EAA65B6-A2CF-4CB4-ADA6-4FB12DC6F514}" type="datetimeFigureOut">
+              <a:rPr lang="fr-BE" smtClean="0"/>
+              <a:t>24-09-26</a:t>
             </a:fld>
-            <a:endParaRPr lang="en-US"/>
+            <a:endParaRPr lang="fr-BE"/>
           </a:p>
         </p:txBody>
       </p:sp>
@@ -283,7 +283,7 @@
           <a:bodyPr vert="horz" lIns="91440" tIns="45720" rIns="91440" bIns="45720" rtlCol="0" anchor="ctr"/>
           <a:lstStyle/>
           <a:p>
-            <a:endParaRPr lang="en-US"/>
+            <a:endParaRPr lang="fr-BE"/>
           </a:p>
         </p:txBody>
       </p:sp>
@@ -343,6 +343,7 @@
               <a:rPr lang="en-US"/>
               <a:t>Fifth level</a:t>
             </a:r>
+            <a:endParaRPr lang="fr-BE"/>
           </a:p>
         </p:txBody>
       </p:sp>
@@ -373,7 +374,7 @@
             </a:lvl1pPr>
           </a:lstStyle>
           <a:p>
-            <a:endParaRPr lang="en-US"/>
+            <a:endParaRPr lang="fr-BE"/>
           </a:p>
         </p:txBody>
       </p:sp>
@@ -404,18 +405,18 @@
             </a:lvl1pPr>
           </a:lstStyle>
           <a:p>
-            <a:fld id="{CE5E9CC1-C706-0F49-92D6-E571CC5EEA8F}" type="slidenum">
-              <a:rPr lang="en-US"/>
+            <a:fld id="{3BD8D499-DB7D-4F44-9C48-D7F5314CC23E}" type="slidenum">
+              <a:rPr lang="fr-BE" smtClean="0"/>
               <a:t>‹#›</a:t>
             </a:fld>
-            <a:endParaRPr lang="en-US"/>
+            <a:endParaRPr lang="fr-BE"/>
           </a:p>
         </p:txBody>
       </p:sp>
     </p:spTree>
     <p:extLst>
       <p:ext uri="{BB962C8B-B14F-4D97-AF65-F5344CB8AC3E}">
-        <p14:creationId xmlns:p14="http://schemas.microsoft.com/office/powerpoint/2010/main" val="1024086991"/>
+        <p14:creationId xmlns:p14="http://schemas.microsoft.com/office/powerpoint/2010/main" val="1555760893"/>
       </p:ext>
     </p:extLst>
   </p:cSld>
@@ -8627,7 +8628,7 @@
       </p:sp>
       <p:sp>
         <p:nvSpPr>
-          <p:cNvPr id="13" name="TextBox"/>
+          <p:cNvPr id="19" name="TextBox"/>
           <p:cNvSpPr txBox="1"/>
           <p:nvPr/>
         </p:nvSpPr>
@@ -8662,14 +8663,14 @@
                 </a:solidFill>
                 <a:latin typeface="Helvetica Neue"/>
               </a:rPr>
-              <a:t>Institutional trust signals</a:t>
-            </a:r>
-          </a:p>
-        </p:txBody>
-      </p:sp>
-      <p:sp>
-        <p:nvSpPr>
-          <p:cNvPr id="14" name="Rect"/>
+              <a:t>Animated elements</a:t>
+            </a:r>
+          </a:p>
+        </p:txBody>
+      </p:sp>
+      <p:sp>
+        <p:nvSpPr>
+          <p:cNvPr id="20" name="Rect"/>
           <p:cNvSpPr/>
           <p:nvPr/>
         </p:nvSpPr>
@@ -8698,7 +8699,7 @@
       </p:sp>
       <p:sp>
         <p:nvSpPr>
-          <p:cNvPr id="15" name="Rect"/>
+          <p:cNvPr id="21" name="Rect"/>
           <p:cNvSpPr/>
           <p:nvPr/>
         </p:nvSpPr>
@@ -8727,13 +8728,13 @@
       </p:sp>
       <p:sp>
         <p:nvSpPr>
-          <p:cNvPr id="16" name="Oval"/>
+          <p:cNvPr id="22" name="Oval"/>
           <p:cNvSpPr/>
           <p:nvPr/>
         </p:nvSpPr>
         <p:spPr>
           <a:xfrm>
-            <a:off x="4509504" y="2415501"/>
+            <a:off x="4140200" y="2415501"/>
             <a:ext cx="177800" cy="177800"/>
           </a:xfrm>
           <a:prstGeom prst="ellipse">
@@ -8756,13 +8757,13 @@
       </p:sp>
       <p:sp>
         <p:nvSpPr>
-          <p:cNvPr id="17" name="Oval"/>
+          <p:cNvPr id="23" name="Oval"/>
           <p:cNvSpPr/>
           <p:nvPr/>
         </p:nvSpPr>
         <p:spPr>
           <a:xfrm>
-            <a:off x="6303254" y="2415501"/>
+            <a:off x="6064250" y="2415501"/>
             <a:ext cx="177800" cy="177800"/>
           </a:xfrm>
           <a:prstGeom prst="ellipse">
@@ -8785,222 +8786,13 @@
       </p:sp>
       <p:sp>
         <p:nvSpPr>
-          <p:cNvPr id="18" name="TextBox"/>
-          <p:cNvSpPr txBox="1"/>
-          <p:nvPr/>
-        </p:nvSpPr>
-        <p:spPr>
-          <a:xfrm>
-            <a:off x="8686800" y="2397741"/>
-            <a:ext cx="1500000" cy="238720"/>
-          </a:xfrm>
-          <a:prstGeom prst="rect">
-            <a:avLst/>
-          </a:prstGeom>
-          <a:noFill/>
-        </p:spPr>
-        <p:txBody>
-          <a:bodyPr wrap="none">
-            <a:spAutoFit/>
-          </a:bodyPr>
-          <a:lstStyle/>
-          <a:p>
-            <a:pPr algn="l">
-              <a:lnSpc>
-                <a:spcPct val="105000"/>
-              </a:lnSpc>
-              <a:spcAft>
-                <a:spcPts val="0"/>
-              </a:spcAft>
-            </a:pPr>
-            <a:r>
-              <a:rPr sz="1200" b="0">
-                <a:solidFill>
-                  <a:srgbClr val="14141C"/>
-                </a:solidFill>
-                <a:latin typeface="Helvetica Neue"/>
-              </a:rPr>
-              <a:t>+1.02 vs </a:t>
-            </a:r>
-            <a:r>
-              <a:rPr sz="1200" b="0">
-                <a:solidFill>
-                  <a:srgbClr val="FF6200"/>
-                </a:solidFill>
-                <a:latin typeface="Helvetica Neue"/>
-              </a:rPr>
-              <a:t>−0.28</a:t>
-            </a:r>
-          </a:p>
-        </p:txBody>
-      </p:sp>
-      <p:sp>
-        <p:nvSpPr>
-          <p:cNvPr id="19" name="TextBox"/>
-          <p:cNvSpPr txBox="1"/>
-          <p:nvPr/>
-        </p:nvSpPr>
-        <p:spPr>
-          <a:xfrm>
-            <a:off x="685800" y="2913380"/>
-            <a:ext cx="2747010" cy="274241"/>
-          </a:xfrm>
-          <a:prstGeom prst="rect">
-            <a:avLst/>
-          </a:prstGeom>
-          <a:noFill/>
-        </p:spPr>
-        <p:txBody>
-          <a:bodyPr wrap="square">
-            <a:spAutoFit/>
-          </a:bodyPr>
-          <a:lstStyle/>
-          <a:p>
-            <a:pPr algn="l">
-              <a:lnSpc>
-                <a:spcPct val="105000"/>
-              </a:lnSpc>
-              <a:spcAft>
-                <a:spcPts val="0"/>
-              </a:spcAft>
-            </a:pPr>
-            <a:r>
-              <a:rPr sz="1400" b="1">
-                <a:solidFill>
-                  <a:srgbClr val="14141C"/>
-                </a:solidFill>
-                <a:latin typeface="Helvetica Neue"/>
-              </a:rPr>
-              <a:t>Animated elements</a:t>
-            </a:r>
-          </a:p>
-        </p:txBody>
-      </p:sp>
-      <p:sp>
-        <p:nvSpPr>
-          <p:cNvPr id="20" name="Rect"/>
-          <p:cNvSpPr/>
-          <p:nvPr/>
-        </p:nvSpPr>
-        <p:spPr>
-          <a:xfrm>
-            <a:off x="3606800" y="3031451"/>
-            <a:ext cx="4826000" cy="12700"/>
-          </a:xfrm>
-          <a:prstGeom prst="rect">
-            <a:avLst/>
-          </a:prstGeom>
-          <a:solidFill>
-            <a:srgbClr val="D8D8E0"/>
-          </a:solidFill>
-          <a:ln>
-            <a:noFill/>
-          </a:ln>
-        </p:spPr>
-        <p:txBody>
-          <a:bodyPr/>
-          <a:lstStyle/>
-          <a:p>
-            <a:endParaRPr/>
-          </a:p>
-        </p:txBody>
-      </p:sp>
-      <p:sp>
-        <p:nvSpPr>
-          <p:cNvPr id="21" name="Rect"/>
-          <p:cNvSpPr/>
-          <p:nvPr/>
-        </p:nvSpPr>
-        <p:spPr>
-          <a:xfrm>
-            <a:off x="4978400" y="2910801"/>
-            <a:ext cx="12700" cy="254000"/>
-          </a:xfrm>
-          <a:prstGeom prst="rect">
-            <a:avLst/>
-          </a:prstGeom>
-          <a:solidFill>
-            <a:srgbClr val="A8A8B8"/>
-          </a:solidFill>
-          <a:ln>
-            <a:noFill/>
-          </a:ln>
-        </p:spPr>
-        <p:txBody>
-          <a:bodyPr/>
-          <a:lstStyle/>
-          <a:p>
-            <a:endParaRPr/>
-          </a:p>
-        </p:txBody>
-      </p:sp>
-      <p:sp>
-        <p:nvSpPr>
-          <p:cNvPr id="22" name="Oval"/>
-          <p:cNvSpPr/>
-          <p:nvPr/>
-        </p:nvSpPr>
-        <p:spPr>
-          <a:xfrm>
-            <a:off x="4140200" y="2948901"/>
-            <a:ext cx="177800" cy="177800"/>
-          </a:xfrm>
-          <a:prstGeom prst="ellipse">
-            <a:avLst/>
-          </a:prstGeom>
-          <a:solidFill>
-            <a:srgbClr val="FF6200"/>
-          </a:solidFill>
-          <a:ln>
-            <a:noFill/>
-          </a:ln>
-        </p:spPr>
-        <p:txBody>
-          <a:bodyPr/>
-          <a:lstStyle/>
-          <a:p>
-            <a:endParaRPr/>
-          </a:p>
-        </p:txBody>
-      </p:sp>
-      <p:sp>
-        <p:nvSpPr>
-          <p:cNvPr id="23" name="Oval"/>
-          <p:cNvSpPr/>
-          <p:nvPr/>
-        </p:nvSpPr>
-        <p:spPr>
-          <a:xfrm>
-            <a:off x="6064250" y="2948901"/>
-            <a:ext cx="177800" cy="177800"/>
-          </a:xfrm>
-          <a:prstGeom prst="ellipse">
-            <a:avLst/>
-          </a:prstGeom>
-          <a:solidFill>
-            <a:srgbClr val="14141C"/>
-          </a:solidFill>
-          <a:ln>
-            <a:noFill/>
-          </a:ln>
-        </p:spPr>
-        <p:txBody>
-          <a:bodyPr/>
-          <a:lstStyle/>
-          <a:p>
-            <a:endParaRPr/>
-          </a:p>
-        </p:txBody>
-      </p:sp>
-      <p:sp>
-        <p:nvSpPr>
           <p:cNvPr id="24" name="TextBox"/>
           <p:cNvSpPr txBox="1"/>
           <p:nvPr/>
         </p:nvSpPr>
         <p:spPr>
           <a:xfrm>
-            <a:off x="8686800" y="2931141"/>
+            <a:off x="8686800" y="2397741"/>
             <a:ext cx="1500000" cy="238720"/>
           </a:xfrm>
           <a:prstGeom prst="rect">
@@ -9585,7 +9377,7 @@
         <p:spPr>
           <a:xfrm>
             <a:off x="5529858" y="2021801"/>
-            <a:ext cx="1883664" cy="238720"/>
+            <a:ext cx="3248382" cy="272832"/>
           </a:xfrm>
           <a:prstGeom prst="rect">
             <a:avLst/>
@@ -20878,7 +20670,7 @@
           <p:nvPr/>
         </p:nvPicPr>
         <p:blipFill>
-          <a:blip r:embed="rId2"/>
+          <a:blip r:embed="rId3"/>
           <a:stretch>
             <a:fillRect/>
           </a:stretch>
@@ -23284,16 +23076,7 @@
                 </a:solidFill>
                 <a:latin typeface="Helvetica Neue"/>
               </a:rPr>
-              <a:t>•  </a:t>
-            </a:r>
-            <a:r>
-              <a:rPr sz="1500" b="1" dirty="0">
-                <a:solidFill>
-                  <a:srgbClr val="14141C"/>
-                </a:solidFill>
-                <a:latin typeface="Helvetica Neue"/>
-              </a:rPr>
-              <a:t>Where ING is below</a:t>
+              <a:t>•  Where ING is below</a:t>
             </a:r>
           </a:p>
           <a:p>
@@ -25854,4 +25637,319 @@
   </a:objectDefaults>
   <a:extraClrSchemeLst/>
 </a:theme>
+</file>
+
+<file path=ppt/theme/theme2.xml><?xml version="1.0" encoding="utf-8"?>
+<a:theme xmlns:a="http://schemas.openxmlformats.org/drawingml/2006/main" name="Office Theme">
+  <a:themeElements>
+    <a:clrScheme name="Office">
+      <a:dk1>
+        <a:sysClr val="windowText" lastClr="000000"/>
+      </a:dk1>
+      <a:lt1>
+        <a:sysClr val="window" lastClr="FFFFFF"/>
+      </a:lt1>
+      <a:dk2>
+        <a:srgbClr val="0E2841"/>
+      </a:dk2>
+      <a:lt2>
+        <a:srgbClr val="E8E8E8"/>
+      </a:lt2>
+      <a:accent1>
+        <a:srgbClr val="156082"/>
+      </a:accent1>
+      <a:accent2>
+        <a:srgbClr val="E97132"/>
+      </a:accent2>
+      <a:accent3>
+        <a:srgbClr val="196B24"/>
+      </a:accent3>
+      <a:accent4>
+        <a:srgbClr val="0F9ED5"/>
+      </a:accent4>
+      <a:accent5>
+        <a:srgbClr val="A02B93"/>
+      </a:accent5>
+      <a:accent6>
+        <a:srgbClr val="4EA72E"/>
+      </a:accent6>
+      <a:hlink>
+        <a:srgbClr val="467886"/>
+      </a:hlink>
+      <a:folHlink>
+        <a:srgbClr val="96607D"/>
+      </a:folHlink>
+    </a:clrScheme>
+    <a:fontScheme name="Office">
+      <a:majorFont>
+        <a:latin typeface="Aptos Display" panose="02110004020202020204"/>
+        <a:ea typeface=""/>
+        <a:cs typeface=""/>
+        <a:font script="Jpan" typeface="游ゴシック Light"/>
+        <a:font script="Hang" typeface="맑은 고딕"/>
+        <a:font script="Hans" typeface="等线 Light"/>
+        <a:font script="Hant" typeface="新細明體"/>
+        <a:font script="Arab" typeface="Times New Roman"/>
+        <a:font script="Hebr" typeface="Times New Roman"/>
+        <a:font script="Thai" typeface="Angsana New"/>
+        <a:font script="Ethi" typeface="Nyala"/>
+        <a:font script="Beng" typeface="Vrinda"/>
+        <a:font script="Gujr" typeface="Shruti"/>
+        <a:font script="Khmr" typeface="MoolBoran"/>
+        <a:font script="Knda" typeface="Tunga"/>
+        <a:font script="Guru" typeface="Raavi"/>
+        <a:font script="Cans" typeface="Euphemia"/>
+        <a:font script="Cher" typeface="Plantagenet Cherokee"/>
+        <a:font script="Yiii" typeface="Microsoft Yi Baiti"/>
+        <a:font script="Tibt" typeface="Microsoft Himalaya"/>
+        <a:font script="Thaa" typeface="MV Boli"/>
+        <a:font script="Deva" typeface="Mangal"/>
+        <a:font script="Telu" typeface="Gautami"/>
+        <a:font script="Taml" typeface="Latha"/>
+        <a:font script="Syrc" typeface="Estrangelo Edessa"/>
+        <a:font script="Orya" typeface="Kalinga"/>
+        <a:font script="Mlym" typeface="Kartika"/>
+        <a:font script="Laoo" typeface="DokChampa"/>
+        <a:font script="Sinh" typeface="Iskoola Pota"/>
+        <a:font script="Mong" typeface="Mongolian Baiti"/>
+        <a:font script="Viet" typeface="Times New Roman"/>
+        <a:font script="Uigh" typeface="Microsoft Uighur"/>
+        <a:font script="Geor" typeface="Sylfaen"/>
+        <a:font script="Armn" typeface="Arial"/>
+        <a:font script="Bugi" typeface="Leelawadee UI"/>
+        <a:font script="Bopo" typeface="Microsoft JhengHei"/>
+        <a:font script="Java" typeface="Javanese Text"/>
+        <a:font script="Lisu" typeface="Segoe UI"/>
+        <a:font script="Mymr" typeface="Myanmar Text"/>
+        <a:font script="Nkoo" typeface="Ebrima"/>
+        <a:font script="Olck" typeface="Nirmala UI"/>
+        <a:font script="Osma" typeface="Ebrima"/>
+        <a:font script="Phag" typeface="Phagspa"/>
+        <a:font script="Syrn" typeface="Estrangelo Edessa"/>
+        <a:font script="Syrj" typeface="Estrangelo Edessa"/>
+        <a:font script="Syre" typeface="Estrangelo Edessa"/>
+        <a:font script="Sora" typeface="Nirmala UI"/>
+        <a:font script="Tale" typeface="Microsoft Tai Le"/>
+        <a:font script="Talu" typeface="Microsoft New Tai Lue"/>
+        <a:font script="Tfng" typeface="Ebrima"/>
+      </a:majorFont>
+      <a:minorFont>
+        <a:latin typeface="Aptos" panose="02110004020202020204"/>
+        <a:ea typeface=""/>
+        <a:cs typeface=""/>
+        <a:font script="Jpan" typeface="游ゴシック"/>
+        <a:font script="Hang" typeface="맑은 고딕"/>
+        <a:font script="Hans" typeface="等线"/>
+        <a:font script="Hant" typeface="新細明體"/>
+        <a:font script="Arab" typeface="Arial"/>
+        <a:font script="Hebr" typeface="Arial"/>
+        <a:font script="Thai" typeface="Cordia New"/>
+        <a:font script="Ethi" typeface="Nyala"/>
+        <a:font script="Beng" typeface="Vrinda"/>
+        <a:font script="Gujr" typeface="Shruti"/>
+        <a:font script="Khmr" typeface="DaunPenh"/>
+        <a:font script="Knda" typeface="Tunga"/>
+        <a:font script="Guru" typeface="Raavi"/>
+        <a:font script="Cans" typeface="Euphemia"/>
+        <a:font script="Cher" typeface="Plantagenet Cherokee"/>
+        <a:font script="Yiii" typeface="Microsoft Yi Baiti"/>
+        <a:font script="Tibt" typeface="Microsoft Himalaya"/>
+        <a:font script="Thaa" typeface="MV Boli"/>
+        <a:font script="Deva" typeface="Mangal"/>
+        <a:font script="Telu" typeface="Gautami"/>
+        <a:font script="Taml" typeface="Latha"/>
+        <a:font script="Syrc" typeface="Estrangelo Edessa"/>
+        <a:font script="Orya" typeface="Kalinga"/>
+        <a:font script="Mlym" typeface="Kartika"/>
+        <a:font script="Laoo" typeface="DokChampa"/>
+        <a:font script="Sinh" typeface="Iskoola Pota"/>
+        <a:font script="Mong" typeface="Mongolian Baiti"/>
+        <a:font script="Viet" typeface="Arial"/>
+        <a:font script="Uigh" typeface="Microsoft Uighur"/>
+        <a:font script="Geor" typeface="Sylfaen"/>
+        <a:font script="Armn" typeface="Arial"/>
+        <a:font script="Bugi" typeface="Leelawadee UI"/>
+        <a:font script="Bopo" typeface="Microsoft JhengHei"/>
+        <a:font script="Java" typeface="Javanese Text"/>
+        <a:font script="Lisu" typeface="Segoe UI"/>
+        <a:font script="Mymr" typeface="Myanmar Text"/>
+        <a:font script="Nkoo" typeface="Ebrima"/>
+        <a:font script="Olck" typeface="Nirmala UI"/>
+        <a:font script="Osma" typeface="Ebrima"/>
+        <a:font script="Phag" typeface="Phagspa"/>
+        <a:font script="Syrn" typeface="Estrangelo Edessa"/>
+        <a:font script="Syrj" typeface="Estrangelo Edessa"/>
+        <a:font script="Syre" typeface="Estrangelo Edessa"/>
+        <a:font script="Sora" typeface="Nirmala UI"/>
+        <a:font script="Tale" typeface="Microsoft Tai Le"/>
+        <a:font script="Talu" typeface="Microsoft New Tai Lue"/>
+        <a:font script="Tfng" typeface="Ebrima"/>
+      </a:minorFont>
+    </a:fontScheme>
+    <a:fmtScheme name="Office">
+      <a:fillStyleLst>
+        <a:solidFill>
+          <a:schemeClr val="phClr"/>
+        </a:solidFill>
+        <a:gradFill rotWithShape="1">
+          <a:gsLst>
+            <a:gs pos="0">
+              <a:schemeClr val="phClr">
+                <a:lumMod val="110000"/>
+                <a:satMod val="105000"/>
+                <a:tint val="67000"/>
+              </a:schemeClr>
+            </a:gs>
+            <a:gs pos="50000">
+              <a:schemeClr val="phClr">
+                <a:lumMod val="105000"/>
+                <a:satMod val="103000"/>
+                <a:tint val="73000"/>
+              </a:schemeClr>
+            </a:gs>
+            <a:gs pos="100000">
+              <a:schemeClr val="phClr">
+                <a:lumMod val="105000"/>
+                <a:satMod val="109000"/>
+                <a:tint val="81000"/>
+              </a:schemeClr>
+            </a:gs>
+          </a:gsLst>
+          <a:lin ang="5400000" scaled="0"/>
+        </a:gradFill>
+        <a:gradFill rotWithShape="1">
+          <a:gsLst>
+            <a:gs pos="0">
+              <a:schemeClr val="phClr">
+                <a:satMod val="103000"/>
+                <a:lumMod val="102000"/>
+                <a:tint val="94000"/>
+              </a:schemeClr>
+            </a:gs>
+            <a:gs pos="50000">
+              <a:schemeClr val="phClr">
+                <a:satMod val="110000"/>
+                <a:lumMod val="100000"/>
+                <a:shade val="100000"/>
+              </a:schemeClr>
+            </a:gs>
+            <a:gs pos="100000">
+              <a:schemeClr val="phClr">
+                <a:lumMod val="99000"/>
+                <a:satMod val="120000"/>
+                <a:shade val="78000"/>
+              </a:schemeClr>
+            </a:gs>
+          </a:gsLst>
+          <a:lin ang="5400000" scaled="0"/>
+        </a:gradFill>
+      </a:fillStyleLst>
+      <a:lnStyleLst>
+        <a:ln w="12700" cap="flat" cmpd="sng" algn="ctr">
+          <a:solidFill>
+            <a:schemeClr val="phClr"/>
+          </a:solidFill>
+          <a:prstDash val="solid"/>
+          <a:miter lim="800000"/>
+        </a:ln>
+        <a:ln w="19050" cap="flat" cmpd="sng" algn="ctr">
+          <a:solidFill>
+            <a:schemeClr val="phClr"/>
+          </a:solidFill>
+          <a:prstDash val="solid"/>
+          <a:miter lim="800000"/>
+        </a:ln>
+        <a:ln w="25400" cap="flat" cmpd="sng" algn="ctr">
+          <a:solidFill>
+            <a:schemeClr val="phClr"/>
+          </a:solidFill>
+          <a:prstDash val="solid"/>
+          <a:miter lim="800000"/>
+        </a:ln>
+      </a:lnStyleLst>
+      <a:effectStyleLst>
+        <a:effectStyle>
+          <a:effectLst/>
+        </a:effectStyle>
+        <a:effectStyle>
+          <a:effectLst/>
+        </a:effectStyle>
+        <a:effectStyle>
+          <a:effectLst>
+            <a:outerShdw blurRad="57150" dist="19050" dir="5400000" algn="ctr" rotWithShape="0">
+              <a:srgbClr val="000000">
+                <a:alpha val="63000"/>
+              </a:srgbClr>
+            </a:outerShdw>
+          </a:effectLst>
+        </a:effectStyle>
+      </a:effectStyleLst>
+      <a:bgFillStyleLst>
+        <a:solidFill>
+          <a:schemeClr val="phClr"/>
+        </a:solidFill>
+        <a:solidFill>
+          <a:schemeClr val="phClr">
+            <a:tint val="95000"/>
+            <a:satMod val="170000"/>
+          </a:schemeClr>
+        </a:solidFill>
+        <a:gradFill rotWithShape="1">
+          <a:gsLst>
+            <a:gs pos="0">
+              <a:schemeClr val="phClr">
+                <a:tint val="93000"/>
+                <a:satMod val="150000"/>
+                <a:shade val="98000"/>
+                <a:lumMod val="102000"/>
+              </a:schemeClr>
+            </a:gs>
+            <a:gs pos="50000">
+              <a:schemeClr val="phClr">
+                <a:tint val="98000"/>
+                <a:satMod val="130000"/>
+                <a:shade val="90000"/>
+                <a:lumMod val="103000"/>
+              </a:schemeClr>
+            </a:gs>
+            <a:gs pos="100000">
+              <a:schemeClr val="phClr">
+                <a:shade val="63000"/>
+                <a:satMod val="120000"/>
+              </a:schemeClr>
+            </a:gs>
+          </a:gsLst>
+          <a:lin ang="5400000" scaled="0"/>
+        </a:gradFill>
+      </a:bgFillStyleLst>
+    </a:fmtScheme>
+  </a:themeElements>
+  <a:objectDefaults>
+    <a:lnDef>
+      <a:spPr/>
+      <a:bodyPr/>
+      <a:lstStyle/>
+      <a:style>
+        <a:lnRef idx="2">
+          <a:schemeClr val="accent1"/>
+        </a:lnRef>
+        <a:fillRef idx="0">
+          <a:schemeClr val="accent1"/>
+        </a:fillRef>
+        <a:effectRef idx="1">
+          <a:schemeClr val="accent1"/>
+        </a:effectRef>
+        <a:fontRef idx="minor">
+          <a:schemeClr val="tx1"/>
+        </a:fontRef>
+      </a:style>
+    </a:lnDef>
+  </a:objectDefaults>
+  <a:extraClrSchemeLst/>
+  <a:extLst>
+    <a:ext uri="{05A4C25C-085E-4340-85A3-A5531E510DB2}">
+      <thm15:themeFamily xmlns:thm15="http://schemas.microsoft.com/office/thememl/2012/main" name="Office Theme" id="{2E142A2C-CD16-42D6-873A-C26D2A0506FA}" vid="{1BDDFF52-6CD6-40A5-AB3C-68EB2F1E4D0A}"/>
+    </a:ext>
+  </a:extLst>
+</a:theme>
 </file>
--- a/docs/Banking_Campaigns_Comparator.pptx
+++ b/docs/Banking_Campaigns_Comparator.pptx
@@ -572,6 +572,626 @@
             </a:r>
           </a:p>
         </p:txBody>
+      </p:sp>
+    </p:spTree>
+  </p:cSld>
+  <p:clrMapOvr>
+    <a:masterClrMapping/>
+  </p:clrMapOvr>
+</p:notes>
+</file>
+
+<file path=ppt/notesSlides/notesSlide10.xml><?xml version="1.0" encoding="utf-8"?>
+<p:notes xmlns:a="http://schemas.openxmlformats.org/drawingml/2006/main" xmlns:p="http://schemas.openxmlformats.org/presentationml/2006/main" xmlns:r="http://schemas.openxmlformats.org/officeDocument/2006/relationships">
+  <p:cSld>
+    <p:spTree>
+      <p:nvGrpSpPr>
+        <p:cNvPr id="1" name=""/>
+        <p:cNvGrpSpPr/>
+        <p:nvPr/>
+      </p:nvGrpSpPr>
+      <p:grpSpPr>
+        <a:xfrm>
+          <a:off x="0" y="0"/>
+          <a:ext cx="0" cy="0"/>
+          <a:chOff x="0" y="0"/>
+          <a:chExt cx="0" cy="0"/>
+        </a:xfrm>
+      </p:grpSpPr>
+      <p:sp>
+        <p:nvSpPr>
+          <p:cNvPr id="2" name="Slide Image Placeholder 1"/>
+          <p:cNvSpPr>
+            <a:spLocks noGrp="1"/>
+          </p:cNvSpPr>
+          <p:nvPr>
+            <p:ph type="sldImg" idx="2"/>
+          </p:nvPr>
+        </p:nvSpPr>
+        <p:spPr/>
+      </p:sp>
+      <p:sp>
+        <p:nvSpPr>
+          <p:cNvPr id="3" name="Notes Placeholder 2"/>
+          <p:cNvSpPr>
+            <a:spLocks noGrp="1"/>
+          </p:cNvSpPr>
+          <p:nvPr>
+            <p:ph type="body" idx="3" sz="quarter"/>
+          </p:nvPr>
+        </p:nvSpPr>
+        <p:spPr/>
+        <p:txBody>
+          <a:bodyPr/>
+          <a:lstStyle/>
+          <a:p>
+            <a:r>
+              <a:t>BRIDGE from slides 9–11: incumbents hold 97.6% of brand search, challengers 2.3%. This slide is the caveat before anyone reads that as market share.</a:t>
+            </a:r>
+          </a:p>
+          <a:p>
+            <a:r>
+              <a:t>THE CONTRAST: Revolut reports more than 1 million private customers in Belgium, adding about 25,000 a month (Belga News Agency, 11 Mar 2026) — yet holds 1.64% of brand search, 9th of 14. Both are true; they measure different things.</a:t>
+            </a:r>
+          </a:p>
+          <a:p>
+            <a:r>
+              <a:t>THREE REASONS search undercounts a challenger — none of them is "Revolut is small":</a:t>
+            </a:r>
+          </a:p>
+          <a:p>
+            <a:r>
+              <a:t>1. Navigational searches. Incumbents are searched for logins, branches, opening hours. Say it as a working hypothesis — not verified at query level.</a:t>
+            </a:r>
+          </a:p>
+          <a:p>
+            <a:r>
+              <a:t>2. App-first journeys. Sign-up through app stores and referral links, then daily use inside the app; the brand name is never typed.</a:t>
+            </a:r>
+          </a:p>
+          <a:p>
+            <a:r>
+              <a:t>3. Measurement floor. Six of the 14 brands never clear 10/100 in their own Trends request, so their share is partly rounding. Revolut itself is above the floor (peak 19), so its 1.64% is a real reading.</a:t>
+            </a:r>
+          </a:p>
+          <a:p>
+            <a:r>
+              <a:t>LAND: challenger shares are a floor on attention, not a customer count. The 1M figure is deliberately never set against a market-share figure.</a:t>
+            </a:r>
+          </a:p>
+          <a:p>
+            <a:r>
+              <a:t>TRANSITION: search tells us who gets attention, not who wins. From here on we stop measuring and start advising.</a:t>
+            </a:r>
+          </a:p>
+        </p:txBody>
+      </p:sp>
+      <p:sp>
+        <p:nvSpPr>
+          <p:cNvPr id="4" name="Slide Number Placeholder 3"/>
+          <p:cNvSpPr>
+            <a:spLocks noGrp="1"/>
+          </p:cNvSpPr>
+          <p:nvPr>
+            <p:ph type="sldNum" idx="5" sz="quarter"/>
+          </p:nvPr>
+        </p:nvSpPr>
+        <p:spPr/>
+      </p:sp>
+    </p:spTree>
+  </p:cSld>
+  <p:clrMapOvr>
+    <a:masterClrMapping/>
+  </p:clrMapOvr>
+</p:notes>
+</file>
+
+<file path=ppt/notesSlides/notesSlide11.xml><?xml version="1.0" encoding="utf-8"?>
+<p:notes xmlns:a="http://schemas.openxmlformats.org/drawingml/2006/main" xmlns:p="http://schemas.openxmlformats.org/presentationml/2006/main" xmlns:r="http://schemas.openxmlformats.org/officeDocument/2006/relationships">
+  <p:cSld>
+    <p:spTree>
+      <p:nvGrpSpPr>
+        <p:cNvPr id="1" name=""/>
+        <p:cNvGrpSpPr/>
+        <p:nvPr/>
+      </p:nvGrpSpPr>
+      <p:grpSpPr>
+        <a:xfrm>
+          <a:off x="0" y="0"/>
+          <a:ext cx="0" cy="0"/>
+          <a:chOff x="0" y="0"/>
+          <a:chExt cx="0" cy="0"/>
+        </a:xfrm>
+      </p:grpSpPr>
+      <p:sp>
+        <p:nvSpPr>
+          <p:cNvPr id="2" name="Slide Image Placeholder 1"/>
+          <p:cNvSpPr>
+            <a:spLocks noGrp="1"/>
+          </p:cNvSpPr>
+          <p:nvPr>
+            <p:ph type="sldImg" idx="2"/>
+          </p:nvPr>
+        </p:nvSpPr>
+        <p:spPr/>
+      </p:sp>
+      <p:sp>
+        <p:nvSpPr>
+          <p:cNvPr id="3" name="Notes Placeholder 2"/>
+          <p:cNvSpPr>
+            <a:spLocks noGrp="1"/>
+          </p:cNvSpPr>
+          <p:nvPr>
+            <p:ph type="body" idx="3" sz="quarter"/>
+          </p:nvPr>
+        </p:nvSpPr>
+        <p:spPr/>
+        <p:txBody>
+          <a:bodyPr/>
+          <a:lstStyle/>
+          <a:p>
+            <a:r>
+              <a:t>FRAMING, say first: everything up to here measured. This is the one place in the project where a model is allowed to interpret; the next four slides are about how that is kept honest.</a:t>
+            </a:r>
+          </a:p>
+          <a:p>
+            <a:r>
+              <a:t>WHAT IT IS: one model call (DeepSeek, pinned version) over the finished analysis. It reads report.json — the same file the charts are drawn from. Nothing is re-scraped, nothing is re-scored.</a:t>
+            </a:r>
+          </a:p>
+          <a:p>
+            <a:r>
+              <a:t>WHAT COMES OUT: an ordered list of changes. Current run: ten — two high, six medium, two low. The order is the argument: what the measurement most supports acting on first. Ordered by priority, not by the model's confidence.</a:t>
+            </a:r>
+          </a:p>
+          <a:p>
+            <a:r>
+              <a:t>TWO CONTEXTS (checkboxes in the screenshot), both opt-in, both labelled on every card they touch: search interest for timing, news themes for reputation — three of the ten. Context can never stand as evidence that a page performed.</a:t>
+            </a:r>
+          </a:p>
+          <a:p>
+            <a:r>
+              <a:t>ORANGE BOX: it writes what to change; it never re-derives a number. One-way by design — if a figure is wrong the fix is upstream, and the next run carries it through.</a:t>
+            </a:r>
+          </a:p>
+          <a:p>
+            <a:r>
+              <a:t>NOTE: the panel screenshot and the counts printed on this slide predate the cta_count withdrawal of 23/09 (11 → 10). Say ten.</a:t>
+            </a:r>
+          </a:p>
+          <a:p>
+            <a:r>
+              <a:t>TRANSITION: here is what one of them looks like.</a:t>
+            </a:r>
+          </a:p>
+        </p:txBody>
+      </p:sp>
+      <p:sp>
+        <p:nvSpPr>
+          <p:cNvPr id="4" name="Slide Number Placeholder 3"/>
+          <p:cNvSpPr>
+            <a:spLocks noGrp="1"/>
+          </p:cNvSpPr>
+          <p:nvPr>
+            <p:ph type="sldNum" idx="5" sz="quarter"/>
+          </p:nvPr>
+        </p:nvSpPr>
+        <p:spPr/>
+      </p:sp>
+    </p:spTree>
+  </p:cSld>
+  <p:clrMapOvr>
+    <a:masterClrMapping/>
+  </p:clrMapOvr>
+</p:notes>
+</file>
+
+<file path=ppt/notesSlides/notesSlide12.xml><?xml version="1.0" encoding="utf-8"?>
+<p:notes xmlns:a="http://schemas.openxmlformats.org/drawingml/2006/main" xmlns:p="http://schemas.openxmlformats.org/presentationml/2006/main" xmlns:r="http://schemas.openxmlformats.org/officeDocument/2006/relationships">
+  <p:cSld>
+    <p:spTree>
+      <p:nvGrpSpPr>
+        <p:cNvPr id="1" name=""/>
+        <p:cNvGrpSpPr/>
+        <p:nvPr/>
+      </p:nvGrpSpPr>
+      <p:grpSpPr>
+        <a:xfrm>
+          <a:off x="0" y="0"/>
+          <a:ext cx="0" cy="0"/>
+          <a:chOff x="0" y="0"/>
+          <a:chExt cx="0" cy="0"/>
+        </a:xfrm>
+      </p:grpSpPr>
+      <p:sp>
+        <p:nvSpPr>
+          <p:cNvPr id="2" name="Slide Image Placeholder 1"/>
+          <p:cNvSpPr>
+            <a:spLocks noGrp="1"/>
+          </p:cNvSpPr>
+          <p:nvPr>
+            <p:ph type="sldImg" idx="2"/>
+          </p:nvPr>
+        </p:nvSpPr>
+        <p:spPr/>
+      </p:sp>
+      <p:sp>
+        <p:nvSpPr>
+          <p:cNvPr id="3" name="Notes Placeholder 2"/>
+          <p:cNvSpPr>
+            <a:spLocks noGrp="1"/>
+          </p:cNvSpPr>
+          <p:nvPr>
+            <p:ph type="body" idx="3" sz="quarter"/>
+          </p:nvPr>
+        </p:nvSpPr>
+        <p:spPr/>
+        <p:txBody>
+          <a:bodyPr/>
+          <a:lstStyle/>
+          <a:p>
+            <a:r>
+              <a:t>WALK THE CARD (R1, top): title and priority · WHAT THE DATA SHOWS — the finding with its numbers: 4.0 urgency markers per page vs a peer mean of 0.64, about 3.7 SD · WHAT TO DO — the action · chips: the feature it was argued from (urgency_marker_count) and the pages it applies to.</a:t>
+            </a:r>
+          </a:p>
+          <a:p>
+            <a:r>
+              <a:t>THREE GUARDRAILS (right column):</a:t>
+            </a:r>
+          </a:p>
+          <a:p>
+            <a:r>
+              <a:t>1. Finding and action kept apart. Anyone can reject the action and keep the finding — nobody has to buy the advice to accept the measurement.</a:t>
+            </a:r>
+          </a:p>
+          <a:p>
+            <a:r>
+              <a:t>2. Named features, checked before release. Every feature id on a card is verified against the report; an id the model invented is dropped before the list is shown.</a:t>
+            </a:r>
+          </a:p>
+          <a:p>
+            <a:r>
+              <a:t>3. No figure the analysis did not produce. The prompt receives only numbers already in the report; the output is not trusted to add any.</a:t>
+            </a:r>
+          </a:p>
+          <a:p>
+            <a:r>
+              <a:t>ONE LINE: the model is a writer, not a source.</a:t>
+            </a:r>
+          </a:p>
+          <a:p>
+            <a:r>
+              <a:t>IF ASKED about R2 in the screenshot ("Repeat the primary call to action"): it rests on cta_count, which stays withdrawn from the comparison — but not for the reason first given. The 23/09 note said ING's pack cards render client-side and never reached the capture; that was checked on 24/09 and is false — they are all in the captured HTML. The real reason: no counting rule reproduces a human count across fourteen sites. hellobank reads 1.0 where a human counts about ten, so the rule is markup-dependent, not comparable. Slide 8 now names the feature and says no ranking is published.</a:t>
+            </a:r>
+          </a:p>
+          <a:p>
+            <a:r>
+              <a:t>IF PUSHED FURTHER: on the counted figure ING is 11th of 14 — 1.0 against a peer mean of 5.0. The observation worth voicing is Siegried's: on the captured pack pages ING has nine clickable things and exactly one that opens an account, on a page 11,149px long. Plenty to click, almost nothing that converts. A recommendation dying with its feature is the mechanism working; the screenshot predates the withdrawal.</a:t>
+            </a:r>
+          </a:p>
+          <a:p>
+            <a:r>
+              <a:t>TRANSITION: so what did it conclude about ING?</a:t>
+            </a:r>
+          </a:p>
+        </p:txBody>
+      </p:sp>
+      <p:sp>
+        <p:nvSpPr>
+          <p:cNvPr id="4" name="Slide Number Placeholder 3"/>
+          <p:cNvSpPr>
+            <a:spLocks noGrp="1"/>
+          </p:cNvSpPr>
+          <p:nvPr>
+            <p:ph type="sldNum" idx="5" sz="quarter"/>
+          </p:nvPr>
+        </p:nvSpPr>
+        <p:spPr/>
+      </p:sp>
+    </p:spTree>
+  </p:cSld>
+  <p:clrMapOvr>
+    <a:masterClrMapping/>
+  </p:clrMapOvr>
+</p:notes>
+</file>
+
+<file path=ppt/notesSlides/notesSlide13.xml><?xml version="1.0" encoding="utf-8"?>
+<p:notes xmlns:a="http://schemas.openxmlformats.org/drawingml/2006/main" xmlns:p="http://schemas.openxmlformats.org/presentationml/2006/main" xmlns:r="http://schemas.openxmlformats.org/officeDocument/2006/relationships">
+  <p:cSld>
+    <p:spTree>
+      <p:nvGrpSpPr>
+        <p:cNvPr id="1" name=""/>
+        <p:cNvGrpSpPr/>
+        <p:nvPr/>
+      </p:nvGrpSpPr>
+      <p:grpSpPr>
+        <a:xfrm>
+          <a:off x="0" y="0"/>
+          <a:ext cx="0" cy="0"/>
+          <a:chOff x="0" y="0"/>
+          <a:chExt cx="0" cy="0"/>
+        </a:xfrm>
+      </p:grpSpPr>
+      <p:sp>
+        <p:nvSpPr>
+          <p:cNvPr id="2" name="Slide Image Placeholder 1"/>
+          <p:cNvSpPr>
+            <a:spLocks noGrp="1"/>
+          </p:cNvSpPr>
+          <p:nvPr>
+            <p:ph type="sldImg" idx="2"/>
+          </p:nvPr>
+        </p:nvSpPr>
+        <p:spPr/>
+      </p:sp>
+      <p:sp>
+        <p:nvSpPr>
+          <p:cNvPr id="3" name="Notes Placeholder 2"/>
+          <p:cNvSpPr>
+            <a:spLocks noGrp="1"/>
+          </p:cNvSpPr>
+          <p:nvPr>
+            <p:ph type="body" idx="3" sz="quarter"/>
+          </p:nvPr>
+        </p:nvSpPr>
+        <p:spPr/>
+        <p:txBody>
+          <a:bodyPr/>
+          <a:lstStyle/>
+          <a:p>
+            <a:r>
+              <a:t>THREE NUMBERS, all from the current-account comparison — 14 banks, 36 comparable features:</a:t>
+            </a:r>
+          </a:p>
+          <a:p>
+            <a:r>
+              <a:t>1. 4.0 urgency and deadline markers per page vs a peer mean of 0.64 — about 3.7 SD above, the largest gap in the set and ING's strongest measured signature.</a:t>
+            </a:r>
+          </a:p>
+          <a:p>
+            <a:r>
+              <a:t>2. Page height 11,149 px vs 6,412 — about 74% longer, so the offer sits further from the top (about 1.4 SD).</a:t>
+            </a:r>
+          </a:p>
+          <a:p>
+            <a:r>
+              <a:t>3. 0.67 'free' claims with their conditions elsewhere vs 0.23 — where a free or no-fee claim appears, the qualifying conditions are not next to it.</a:t>
+            </a:r>
+          </a:p>
+          <a:p>
+            <a:r>
+              <a:t>THE THREE IT RANKED HIGHEST: strip back urgency and deadline language · bring the offer higher up the page (the current run words it "shorten the pages and cut non-informative imagery" — same measure, page_height_px) · disclose the conditions of any free claim next to the claim.</a:t>
+            </a:r>
+          </a:p>
+          <a:p>
+            <a:r>
+              <a:t>THE SHAPE: two of the three are about removing things. ING's pages carry the densest persuasion in the set (3.7 levers per page vs 1.7). The advice is restraint, not more features.</a:t>
+            </a:r>
+          </a:p>
+          <a:p>
+            <a:r>
+              <a:t>CAVEAT — read it, do not skip it: design observations, not performance findings. Pages span product families and languages, judged features come from one rater, no click or conversion data — every item is a hypothesis ING could test.</a:t>
+            </a:r>
+          </a:p>
+          <a:p>
+            <a:r>
+              <a:t>TRANSITION: a list is easy to nod at and forget. So we built the thing.</a:t>
+            </a:r>
+          </a:p>
+        </p:txBody>
+      </p:sp>
+      <p:sp>
+        <p:nvSpPr>
+          <p:cNvPr id="4" name="Slide Number Placeholder 3"/>
+          <p:cNvSpPr>
+            <a:spLocks noGrp="1"/>
+          </p:cNvSpPr>
+          <p:nvPr>
+            <p:ph type="sldNum" idx="5" sz="quarter"/>
+          </p:nvPr>
+        </p:nvSpPr>
+        <p:spPr/>
+      </p:sp>
+    </p:spTree>
+  </p:cSld>
+  <p:clrMapOvr>
+    <a:masterClrMapping/>
+  </p:clrMapOvr>
+</p:notes>
+</file>
+
+<file path=ppt/notesSlides/notesSlide14.xml><?xml version="1.0" encoding="utf-8"?>
+<p:notes xmlns:a="http://schemas.openxmlformats.org/drawingml/2006/main" xmlns:p="http://schemas.openxmlformats.org/presentationml/2006/main" xmlns:r="http://schemas.openxmlformats.org/officeDocument/2006/relationships">
+  <p:cSld>
+    <p:spTree>
+      <p:nvGrpSpPr>
+        <p:cNvPr id="1" name=""/>
+        <p:cNvGrpSpPr/>
+        <p:nvPr/>
+      </p:nvGrpSpPr>
+      <p:grpSpPr>
+        <a:xfrm>
+          <a:off x="0" y="0"/>
+          <a:ext cx="0" cy="0"/>
+          <a:chOff x="0" y="0"/>
+          <a:chExt cx="0" cy="0"/>
+        </a:xfrm>
+      </p:grpSpPr>
+      <p:sp>
+        <p:nvSpPr>
+          <p:cNvPr id="2" name="Slide Image Placeholder 1"/>
+          <p:cNvSpPr>
+            <a:spLocks noGrp="1"/>
+          </p:cNvSpPr>
+          <p:nvPr>
+            <p:ph type="sldImg" idx="2"/>
+          </p:nvPr>
+        </p:nvSpPr>
+        <p:spPr/>
+      </p:sp>
+      <p:sp>
+        <p:nvSpPr>
+          <p:cNvPr id="3" name="Notes Placeholder 2"/>
+          <p:cNvSpPr>
+            <a:spLocks noGrp="1"/>
+          </p:cNvSpPr>
+          <p:nvPr>
+            <p:ph type="body" idx="3" sz="quarter"/>
+          </p:nvPr>
+        </p:nvSpPr>
+        <p:spPr/>
+        <p:txBody>
+          <a:bodyPr/>
+          <a:lstStyle/>
+          <a:p>
+            <a:r>
+              <a:t>ON SCREEN: top — the generated home page in ING styling (hero, two calls to action). Bottom — one section in explained mode: orange frame, and the (i) button that opens the rationale for that section.</a:t>
+            </a:r>
+          </a:p>
+          <a:p>
+            <a:r>
+              <a:t>THREE POINTS:</a:t>
+            </a:r>
+          </a:p>
+          <a:p>
+            <a:r>
+              <a:t>1. The team chooses what gets built. Every recommendation is a checkbox; nothing reaches the generator that a person did not tick.</a:t>
+            </a:r>
+          </a:p>
+          <a:p>
+            <a:r>
+              <a:t>2. Ten ING-styled pages, fr-BE or nl-BE: home, savings, term account, current account, youth, investing, mortgage, opening, why ING, contact.</a:t>
+            </a:r>
+          </a:p>
+          <a:p>
+            <a:r>
+              <a:t>3. Each section can name its own source. Explained mode shows which recommendation produced the section and why — auditable, not just persuasive.</a:t>
+            </a:r>
+          </a:p>
+          <a:p>
+            <a:r>
+              <a:t>SAY PLAINLY: an illustration — generated, never published, not a proposal for ING's site. Rates and amounts stay as [TAUX] and [MONTANT]: no figure appears that a compliance team has not supplied.</a:t>
+            </a:r>
+          </a:p>
+          <a:p>
+            <a:r>
+              <a:t>ORANGE LINE: this is what makes the analysis arguable — a stakeholder can look at the change instead of reading about it. Invite it: "which of these would you untick?"</a:t>
+            </a:r>
+          </a:p>
+          <a:p>
+            <a:r>
+              <a:t>TRANSITION: put together, the whole thing runs in one direction.</a:t>
+            </a:r>
+          </a:p>
+        </p:txBody>
+      </p:sp>
+      <p:sp>
+        <p:nvSpPr>
+          <p:cNvPr id="4" name="Slide Number Placeholder 3"/>
+          <p:cNvSpPr>
+            <a:spLocks noGrp="1"/>
+          </p:cNvSpPr>
+          <p:nvPr>
+            <p:ph type="sldNum" idx="5" sz="quarter"/>
+          </p:nvPr>
+        </p:nvSpPr>
+        <p:spPr/>
+      </p:sp>
+    </p:spTree>
+  </p:cSld>
+  <p:clrMapOvr>
+    <a:masterClrMapping/>
+  </p:clrMapOvr>
+</p:notes>
+</file>
+
+<file path=ppt/notesSlides/notesSlide15.xml><?xml version="1.0" encoding="utf-8"?>
+<p:notes xmlns:a="http://schemas.openxmlformats.org/drawingml/2006/main" xmlns:p="http://schemas.openxmlformats.org/presentationml/2006/main" xmlns:r="http://schemas.openxmlformats.org/officeDocument/2006/relationships">
+  <p:cSld>
+    <p:spTree>
+      <p:nvGrpSpPr>
+        <p:cNvPr id="1" name=""/>
+        <p:cNvGrpSpPr/>
+        <p:nvPr/>
+      </p:nvGrpSpPr>
+      <p:grpSpPr>
+        <a:xfrm>
+          <a:off x="0" y="0"/>
+          <a:ext cx="0" cy="0"/>
+          <a:chOff x="0" y="0"/>
+          <a:chExt cx="0" cy="0"/>
+        </a:xfrm>
+      </p:grpSpPr>
+      <p:sp>
+        <p:nvSpPr>
+          <p:cNvPr id="2" name="Slide Image Placeholder 1"/>
+          <p:cNvSpPr>
+            <a:spLocks noGrp="1"/>
+          </p:cNvSpPr>
+          <p:nvPr>
+            <p:ph type="sldImg" idx="2"/>
+          </p:nvPr>
+        </p:nvSpPr>
+        <p:spPr/>
+      </p:sp>
+      <p:sp>
+        <p:nvSpPr>
+          <p:cNvPr id="3" name="Notes Placeholder 2"/>
+          <p:cNvSpPr>
+            <a:spLocks noGrp="1"/>
+          </p:cNvSpPr>
+          <p:nvPr>
+            <p:ph type="body" idx="3" sz="quarter"/>
+          </p:nvPr>
+        </p:nvSpPr>
+        <p:spPr/>
+        <p:txBody>
+          <a:bodyPr/>
+          <a:lstStyle/>
+          <a:p>
+            <a:r>
+              <a:t>TOP ROW, stages 1–5 — the measurement half already walked: sources → capture (robots gate, pages rendered as a visitor sees them) → dataset with the human rubric scores → analysis → surfaces (report.json, the web UI). One arrow carries report.json down.</a:t>
+            </a:r>
+          </a:p>
+          <a:p>
+            <a:r>
+              <a:t>BOTTOM ROW, stages 6–8 — this section: recommendations (one model call, ordered list, each naming its features) → human selection (checkboxes; nothing proceeds unchosen) → generated site (ten pages, exactly the selected set, placeholders for every figure).</a:t>
+            </a:r>
+          </a:p>
+          <a:p>
+            <a:r>
+              <a:t>GREY BAND — read it as one sentence: the model sees only numbers the analysis produced; every recommendation names its features and is checked before it leaves the module; nothing is built that a human did not tick; news-theme items are context, never evidence; no performance data exists, so nothing here claims a cause.</a:t>
+            </a:r>
+          </a:p>
+          <a:p>
+            <a:r>
+              <a:t>WHY ONE DIRECTION MATTERS: every arrow is a script and can be re-run, so a correction made upstream flows all the way through. That is how the cta_count withdrawal propagated this week — once it was made in the analysis rather than patched into an output file.</a:t>
+            </a:r>
+          </a:p>
+          <a:p>
+            <a:r>
+              <a:t>NOTE: the diagram's "11 of 11 selected" and "11 ordered changes" predate the withdrawal — ten now.</a:t>
+            </a:r>
+          </a:p>
+          <a:p>
+            <a:r>
+              <a:t>TRANSITION to slide 18: that last guardrail — no performance data — is the limit of the whole project. Next slide.</a:t>
+            </a:r>
+          </a:p>
+        </p:txBody>
+      </p:sp>
+      <p:sp>
+        <p:nvSpPr>
+          <p:cNvPr id="4" name="Slide Number Placeholder 3"/>
+          <p:cNvSpPr>
+            <a:spLocks noGrp="1"/>
+          </p:cNvSpPr>
+          <p:nvPr>
+            <p:ph type="sldNum" idx="5" sz="quarter"/>
+          </p:nvPr>
+        </p:nvSpPr>
+        <p:spPr/>
       </p:sp>
     </p:spTree>
   </p:cSld>

--- a/docs/Banking_Campaigns_Comparator.pptx
+++ b/docs/Banking_Campaigns_Comparator.pptx
@@ -8,47 +8,48 @@
     <p:notesMasterId r:id="rId43"/>
   </p:notesMasterIdLst>
   <p:sldIdLst>
-    <p:sldId id="256" r:id="rId2"/>
-    <p:sldId id="257" r:id="rId3"/>
-    <p:sldId id="258" r:id="rId4"/>
-    <p:sldId id="259" r:id="rId5"/>
-    <p:sldId id="260" r:id="rId6"/>
-    <p:sldId id="261" r:id="rId7"/>
-    <p:sldId id="262" r:id="rId8"/>
-    <p:sldId id="263" r:id="rId9"/>
-    <p:sldId id="264" r:id="rId10"/>
-    <p:sldId id="265" r:id="rId11"/>
-    <p:sldId id="266" r:id="rId12"/>
-    <p:sldId id="267" r:id="rId13"/>
-    <p:sldId id="268" r:id="rId14"/>
-    <p:sldId id="269" r:id="rId15"/>
-    <p:sldId id="270" r:id="rId16"/>
-    <p:sldId id="271" r:id="rId17"/>
-    <p:sldId id="272" r:id="rId18"/>
-    <p:sldId id="273" r:id="rId19"/>
-    <p:sldId id="274" r:id="rId20"/>
-    <p:sldId id="275" r:id="rId21"/>
-    <p:sldId id="276" r:id="rId22"/>
-    <p:sldId id="277" r:id="rId23"/>
-    <p:sldId id="278" r:id="rId24"/>
-    <p:sldId id="279" r:id="rId25"/>
-    <p:sldId id="280" r:id="rId26"/>
-    <p:sldId id="281" r:id="rId27"/>
-    <p:sldId id="282" r:id="rId28"/>
-    <p:sldId id="283" r:id="rId29"/>
-    <p:sldId id="284" r:id="rId30"/>
-    <p:sldId id="285" r:id="rId31"/>
-    <p:sldId id="286" r:id="rId32"/>
-    <p:sldId id="287" r:id="rId33"/>
-    <p:sldId id="288" r:id="rId34"/>
-    <p:sldId id="289" r:id="rId35"/>
-    <p:sldId id="290" r:id="rId36"/>
-    <p:sldId id="291" r:id="rId37"/>
-    <p:sldId id="292" r:id="rId38"/>
-    <p:sldId id="293" r:id="rId39"/>
-    <p:sldId id="294" r:id="rId40"/>
-    <p:sldId id="295" r:id="rId41"/>
-    <p:sldId id="296" r:id="rId42"/>
+    <p:sldId id="256" r:id="rId4001"/>
+    <p:sldId id="257" r:id="rId4002"/>
+    <p:sldId id="258" r:id="rId4003"/>
+    <p:sldId id="259" r:id="rId4004"/>
+    <p:sldId id="260" r:id="rId4005"/>
+    <p:sldId id="261" r:id="rId4006"/>
+    <p:sldId id="262" r:id="rId4007"/>
+    <p:sldId id="263" r:id="rId4008"/>
+    <p:sldId id="264" r:id="rId4009"/>
+    <p:sldId id="265" r:id="rId4010"/>
+    <p:sldId id="266" r:id="rId4011"/>
+    <p:sldId id="267" r:id="rId4012"/>
+    <p:sldId id="268" r:id="rId4013"/>
+    <p:sldId id="269" r:id="rId4014"/>
+    <p:sldId id="270" r:id="rId4015"/>
+    <p:sldId id="271" r:id="rId4016"/>
+    <p:sldId id="272" r:id="rId4017"/>
+    <p:sldId id="273" r:id="rId4018"/>
+    <p:sldId id="274" r:id="rId4019"/>
+    <p:sldId id="275" r:id="rId4020"/>
+    <p:sldId id="276" r:id="rId4021"/>
+    <p:sldId id="277" r:id="rId4022"/>
+    <p:sldId id="278" r:id="rId4023"/>
+    <p:sldId id="279" r:id="rId4024"/>
+    <p:sldId id="280" r:id="rId4025"/>
+    <p:sldId id="281" r:id="rId4026"/>
+    <p:sldId id="282" r:id="rId4027"/>
+    <p:sldId id="283" r:id="rId4028"/>
+    <p:sldId id="284" r:id="rId4029"/>
+    <p:sldId id="285" r:id="rId4030"/>
+    <p:sldId id="286" r:id="rId4031"/>
+    <p:sldId id="287" r:id="rId4032"/>
+    <p:sldId id="288" r:id="rId4033"/>
+    <p:sldId id="289" r:id="rId4034"/>
+    <p:sldId id="290" r:id="rId4035"/>
+    <p:sldId id="291" r:id="rId4036"/>
+    <p:sldId id="292" r:id="rId4037"/>
+    <p:sldId id="293" r:id="rId4038"/>
+    <p:sldId id="294" r:id="rId4039"/>
+    <p:sldId id="295" r:id="rId4040"/>
+    <p:sldId id="296" r:id="rId4041"/>
+    <p:sldId id="297" r:id="rId4042"/>
   </p:sldIdLst>
   <p:sldSz cx="12192000" cy="6858000"/>
   <p:notesSz cx="6858000" cy="9144000"/>
@@ -8223,7 +8224,7 @@
                 </a:solidFill>
                 <a:latin typeface="Helvetica Neue"/>
               </a:rPr>
-              <a:t>What their pages share that ING’s don’t</a:t>
+              <a:t>What ING’s pages do that theirs don’t</a:t>
             </a:r>
           </a:p>
         </p:txBody>
@@ -8454,7 +8455,7 @@
                 </a:solidFill>
                 <a:latin typeface="Helvetica Neue"/>
               </a:rPr>
-              <a:t>Images carry alt text</a:t>
+              <a:t>Deadline language</a:t>
             </a:r>
           </a:p>
         </p:txBody>
@@ -8525,7 +8526,7 @@
         </p:nvSpPr>
         <p:spPr>
           <a:xfrm>
-            <a:off x="4178300" y="1882101"/>
+            <a:off x="8254999" y="1882101"/>
             <a:ext cx="177800" cy="177800"/>
           </a:xfrm>
           <a:prstGeom prst="ellipse">
@@ -8554,7 +8555,7 @@
         </p:nvSpPr>
         <p:spPr>
           <a:xfrm>
-            <a:off x="7531100" y="1882101"/>
+            <a:off x="4431146" y="1882101"/>
             <a:ext cx="177800" cy="177800"/>
           </a:xfrm>
           <a:prstGeom prst="ellipse">
@@ -8612,7 +8613,7 @@
                 </a:solidFill>
                 <a:latin typeface="Helvetica Neue"/>
               </a:rPr>
-              <a:t>+1.91 vs </a:t>
+              <a:t>−0.35 vs </a:t>
             </a:r>
             <a:r>
               <a:rPr sz="1200" b="0">
@@ -8621,14 +8622,14 @@
                 </a:solidFill>
                 <a:latin typeface="Helvetica Neue"/>
               </a:rPr>
-              <a:t>−0.52</a:t>
-            </a:r>
-          </a:p>
-        </p:txBody>
-      </p:sp>
-      <p:sp>
-        <p:nvSpPr>
-          <p:cNvPr id="19" name="TextBox"/>
+              <a:t>+2.53</a:t>
+            </a:r>
+          </a:p>
+        </p:txBody>
+      </p:sp>
+      <p:sp>
+        <p:nvSpPr>
+          <p:cNvPr id="13" name="TextBox"/>
           <p:cNvSpPr txBox="1"/>
           <p:nvPr/>
         </p:nvSpPr>
@@ -8663,14 +8664,14 @@
                 </a:solidFill>
                 <a:latin typeface="Helvetica Neue"/>
               </a:rPr>
-              <a:t>Animated elements</a:t>
-            </a:r>
-          </a:p>
-        </p:txBody>
-      </p:sp>
-      <p:sp>
-        <p:nvSpPr>
-          <p:cNvPr id="20" name="Rect"/>
+              <a:t>Clarity of the offer</a:t>
+            </a:r>
+          </a:p>
+        </p:txBody>
+      </p:sp>
+      <p:sp>
+        <p:nvSpPr>
+          <p:cNvPr id="14" name="Rect"/>
           <p:cNvSpPr/>
           <p:nvPr/>
         </p:nvSpPr>
@@ -8699,7 +8700,7 @@
       </p:sp>
       <p:sp>
         <p:nvSpPr>
-          <p:cNvPr id="21" name="Rect"/>
+          <p:cNvPr id="15" name="Rect"/>
           <p:cNvSpPr/>
           <p:nvPr/>
         </p:nvSpPr>
@@ -8728,13 +8729,13 @@
       </p:sp>
       <p:sp>
         <p:nvSpPr>
-          <p:cNvPr id="22" name="Oval"/>
+          <p:cNvPr id="16" name="Oval"/>
           <p:cNvSpPr/>
           <p:nvPr/>
         </p:nvSpPr>
         <p:spPr>
           <a:xfrm>
-            <a:off x="4140200" y="2415501"/>
+            <a:off x="6635172" y="2415501"/>
             <a:ext cx="177800" cy="177800"/>
           </a:xfrm>
           <a:prstGeom prst="ellipse">
@@ -8757,13 +8758,13 @@
       </p:sp>
       <p:sp>
         <p:nvSpPr>
-          <p:cNvPr id="23" name="Oval"/>
+          <p:cNvPr id="17" name="Oval"/>
           <p:cNvSpPr/>
           <p:nvPr/>
         </p:nvSpPr>
         <p:spPr>
           <a:xfrm>
-            <a:off x="6064250" y="2415501"/>
+            <a:off x="3979718" y="2415501"/>
             <a:ext cx="177800" cy="177800"/>
           </a:xfrm>
           <a:prstGeom prst="ellipse">
@@ -8786,7 +8787,7 @@
       </p:sp>
       <p:sp>
         <p:nvSpPr>
-          <p:cNvPr id="24" name="TextBox"/>
+          <p:cNvPr id="18" name="TextBox"/>
           <p:cNvSpPr txBox="1"/>
           <p:nvPr/>
         </p:nvSpPr>
@@ -8821,7 +8822,7 @@
                 </a:solidFill>
                 <a:latin typeface="Helvetica Neue"/>
               </a:rPr>
-              <a:t>+0.85 vs </a:t>
+              <a:t>−0.69 vs </a:t>
             </a:r>
             <a:r>
               <a:rPr sz="1200" b="0">
@@ -8830,7 +8831,216 @@
                 </a:solidFill>
                 <a:latin typeface="Helvetica Neue"/>
               </a:rPr>
-              <a:t>−0.55</a:t>
+              <a:t>+1.31</a:t>
+            </a:r>
+          </a:p>
+        </p:txBody>
+      </p:sp>
+      <p:sp>
+        <p:nvSpPr>
+          <p:cNvPr id="19" name="TextBox"/>
+          <p:cNvSpPr txBox="1"/>
+          <p:nvPr/>
+        </p:nvSpPr>
+        <p:spPr>
+          <a:xfrm>
+            <a:off x="685800" y="2913380"/>
+            <a:ext cx="2747010" cy="274241"/>
+          </a:xfrm>
+          <a:prstGeom prst="rect">
+            <a:avLst/>
+          </a:prstGeom>
+          <a:noFill/>
+        </p:spPr>
+        <p:txBody>
+          <a:bodyPr wrap="square">
+            <a:spAutoFit/>
+          </a:bodyPr>
+          <a:lstStyle/>
+          <a:p>
+            <a:pPr algn="l">
+              <a:lnSpc>
+                <a:spcPct val="105000"/>
+              </a:lnSpc>
+              <a:spcAft>
+                <a:spcPts val="0"/>
+              </a:spcAft>
+            </a:pPr>
+            <a:r>
+              <a:rPr sz="1400" b="1">
+                <a:solidFill>
+                  <a:srgbClr val="14141C"/>
+                </a:solidFill>
+                <a:latin typeface="Helvetica Neue"/>
+              </a:rPr>
+              <a:t>Page length</a:t>
+            </a:r>
+          </a:p>
+        </p:txBody>
+      </p:sp>
+      <p:sp>
+        <p:nvSpPr>
+          <p:cNvPr id="20" name="Rect"/>
+          <p:cNvSpPr/>
+          <p:nvPr/>
+        </p:nvSpPr>
+        <p:spPr>
+          <a:xfrm>
+            <a:off x="3606800" y="3031451"/>
+            <a:ext cx="4826000" cy="12700"/>
+          </a:xfrm>
+          <a:prstGeom prst="rect">
+            <a:avLst/>
+          </a:prstGeom>
+          <a:solidFill>
+            <a:srgbClr val="D8D8E0"/>
+          </a:solidFill>
+          <a:ln>
+            <a:noFill/>
+          </a:ln>
+        </p:spPr>
+        <p:txBody>
+          <a:bodyPr/>
+          <a:lstStyle/>
+          <a:p>
+            <a:endParaRPr/>
+          </a:p>
+        </p:txBody>
+      </p:sp>
+      <p:sp>
+        <p:nvSpPr>
+          <p:cNvPr id="21" name="Rect"/>
+          <p:cNvSpPr/>
+          <p:nvPr/>
+        </p:nvSpPr>
+        <p:spPr>
+          <a:xfrm>
+            <a:off x="4978400" y="2910801"/>
+            <a:ext cx="12700" cy="254000"/>
+          </a:xfrm>
+          <a:prstGeom prst="rect">
+            <a:avLst/>
+          </a:prstGeom>
+          <a:solidFill>
+            <a:srgbClr val="A8A8B8"/>
+          </a:solidFill>
+          <a:ln>
+            <a:noFill/>
+          </a:ln>
+        </p:spPr>
+        <p:txBody>
+          <a:bodyPr/>
+          <a:lstStyle/>
+          <a:p>
+            <a:endParaRPr/>
+          </a:p>
+        </p:txBody>
+      </p:sp>
+      <p:sp>
+        <p:nvSpPr>
+          <p:cNvPr id="22" name="Oval"/>
+          <p:cNvSpPr/>
+          <p:nvPr/>
+        </p:nvSpPr>
+        <p:spPr>
+          <a:xfrm>
+            <a:off x="6595341" y="2948901"/>
+            <a:ext cx="177800" cy="177800"/>
+          </a:xfrm>
+          <a:prstGeom prst="ellipse">
+            <a:avLst/>
+          </a:prstGeom>
+          <a:solidFill>
+            <a:srgbClr val="FF6200"/>
+          </a:solidFill>
+          <a:ln>
+            <a:noFill/>
+          </a:ln>
+        </p:spPr>
+        <p:txBody>
+          <a:bodyPr/>
+          <a:lstStyle/>
+          <a:p>
+            <a:endParaRPr/>
+          </a:p>
+        </p:txBody>
+      </p:sp>
+      <p:sp>
+        <p:nvSpPr>
+          <p:cNvPr id="23" name="Oval"/>
+          <p:cNvSpPr/>
+          <p:nvPr/>
+        </p:nvSpPr>
+        <p:spPr>
+          <a:xfrm>
+            <a:off x="4006273" y="2948901"/>
+            <a:ext cx="177800" cy="177800"/>
+          </a:xfrm>
+          <a:prstGeom prst="ellipse">
+            <a:avLst/>
+          </a:prstGeom>
+          <a:solidFill>
+            <a:srgbClr val="14141C"/>
+          </a:solidFill>
+          <a:ln>
+            <a:noFill/>
+          </a:ln>
+        </p:spPr>
+        <p:txBody>
+          <a:bodyPr/>
+          <a:lstStyle/>
+          <a:p>
+            <a:endParaRPr/>
+          </a:p>
+        </p:txBody>
+      </p:sp>
+      <p:sp>
+        <p:nvSpPr>
+          <p:cNvPr id="24" name="TextBox"/>
+          <p:cNvSpPr txBox="1"/>
+          <p:nvPr/>
+        </p:nvSpPr>
+        <p:spPr>
+          <a:xfrm>
+            <a:off x="8686800" y="2931141"/>
+            <a:ext cx="1500000" cy="238720"/>
+          </a:xfrm>
+          <a:prstGeom prst="rect">
+            <a:avLst/>
+          </a:prstGeom>
+          <a:noFill/>
+        </p:spPr>
+        <p:txBody>
+          <a:bodyPr wrap="none">
+            <a:spAutoFit/>
+          </a:bodyPr>
+          <a:lstStyle/>
+          <a:p>
+            <a:pPr algn="l">
+              <a:lnSpc>
+                <a:spcPct val="105000"/>
+              </a:lnSpc>
+              <a:spcAft>
+                <a:spcPts val="0"/>
+              </a:spcAft>
+            </a:pPr>
+            <a:r>
+              <a:rPr sz="1200" b="0">
+                <a:solidFill>
+                  <a:srgbClr val="14141C"/>
+                </a:solidFill>
+                <a:latin typeface="Helvetica Neue"/>
+              </a:rPr>
+              <a:t>−0.67 vs </a:t>
+            </a:r>
+            <a:r>
+              <a:rPr sz="1200" b="0">
+                <a:solidFill>
+                  <a:srgbClr val="FF6200"/>
+                </a:solidFill>
+                <a:latin typeface="Helvetica Neue"/>
+              </a:rPr>
+              <a:t>+1.28</a:t>
             </a:r>
           </a:p>
         </p:txBody>
@@ -8915,7 +9125,7 @@
                 </a:solidFill>
                 <a:latin typeface="Helvetica Neue"/>
               </a:rPr>
-              <a:t>This shows what their pages measurably do differently — not why they are searched for.</a:t>
+              <a:t>The three brands search attention picks out do the opposite of ING here — this is not why they are searched for.</a:t>
             </a:r>
           </a:p>
         </p:txBody>
@@ -10101,7 +10311,7 @@
                 <a:ea typeface="Helvetica Neue" pitchFamily="34" charset="-122"/>
                 <a:cs typeface="Helvetica Neue" pitchFamily="34" charset="-120"/>
               </a:rPr>
-              <a:t>13</a:t>
+              <a:t>14</a:t>
             </a:r>
             <a:endParaRPr lang="en-US" sz="1000" dirty="0"/>
           </a:p>
@@ -10748,7 +10958,7 @@
                 <a:ea typeface="Helvetica Neue" pitchFamily="34" charset="-122"/>
                 <a:cs typeface="Helvetica Neue" pitchFamily="34" charset="-120"/>
               </a:rPr>
-              <a:t>14</a:t>
+              <a:t>15</a:t>
             </a:r>
             <a:endParaRPr lang="en-US" sz="1000" dirty="0"/>
           </a:p>
@@ -11326,7 +11536,7 @@
                 <a:ea typeface="Helvetica Neue" pitchFamily="34" charset="-122"/>
                 <a:cs typeface="Helvetica Neue" pitchFamily="34" charset="-120"/>
               </a:rPr>
-              <a:t>15</a:t>
+              <a:t>16</a:t>
             </a:r>
             <a:endParaRPr lang="en-US" sz="1000" dirty="0"/>
           </a:p>
@@ -12332,7 +12542,7 @@
                 <a:ea typeface="Helvetica Neue" pitchFamily="34" charset="-122"/>
                 <a:cs typeface="Helvetica Neue" pitchFamily="34" charset="-120"/>
               </a:rPr>
-              <a:t>16</a:t>
+              <a:t>17</a:t>
             </a:r>
             <a:endParaRPr lang="en-US" sz="1000" dirty="0"/>
           </a:p>
@@ -13001,7 +13211,7 @@
                 <a:ea typeface="Helvetica Neue" pitchFamily="34" charset="-122"/>
                 <a:cs typeface="Helvetica Neue" pitchFamily="34" charset="-120"/>
               </a:rPr>
-              <a:t>17</a:t>
+              <a:t>18</a:t>
             </a:r>
             <a:endParaRPr lang="en-US" sz="1000" dirty="0"/>
           </a:p>
@@ -13509,7 +13719,7 @@
                 </a:solidFill>
                 <a:latin typeface="Helvetica Neue"/>
               </a:rPr>
-              <a:t>18</a:t>
+              <a:t>19</a:t>
             </a:r>
           </a:p>
         </p:txBody>
@@ -14848,7 +15058,7 @@
                 </a:solidFill>
                 <a:latin typeface="Helvetica Neue"/>
               </a:rPr>
-              <a:t>21</a:t>
+              <a:t>22</a:t>
             </a:r>
           </a:p>
         </p:txBody>
@@ -15110,7 +15320,7 @@
                 </a:solidFill>
                 <a:latin typeface="Helvetica Neue"/>
               </a:rPr>
-              <a:t>22</a:t>
+              <a:t>23</a:t>
             </a:r>
           </a:p>
         </p:txBody>
@@ -15372,7 +15582,7 @@
                 </a:solidFill>
                 <a:latin typeface="Helvetica Neue"/>
               </a:rPr>
-              <a:t>23</a:t>
+              <a:t>24</a:t>
             </a:r>
           </a:p>
         </p:txBody>
@@ -15781,7 +15991,7 @@
                 </a:solidFill>
                 <a:latin typeface="Helvetica Neue"/>
               </a:rPr>
-              <a:t>24</a:t>
+              <a:t>25</a:t>
             </a:r>
           </a:p>
         </p:txBody>
@@ -16152,7 +16362,7 @@
                 </a:solidFill>
                 <a:latin typeface="Helvetica Neue"/>
               </a:rPr>
-              <a:t>25</a:t>
+              <a:t>26</a:t>
             </a:r>
           </a:p>
         </p:txBody>
@@ -16414,7 +16624,7 @@
                 </a:solidFill>
                 <a:latin typeface="Helvetica Neue"/>
               </a:rPr>
-              <a:t>26</a:t>
+              <a:t>27</a:t>
             </a:r>
           </a:p>
         </p:txBody>
@@ -16676,7 +16886,7 @@
                 </a:solidFill>
                 <a:latin typeface="Helvetica Neue"/>
               </a:rPr>
-              <a:t>27</a:t>
+              <a:t>28</a:t>
             </a:r>
           </a:p>
         </p:txBody>
@@ -16990,7 +17200,7 @@
                 </a:solidFill>
                 <a:latin typeface="Helvetica Neue"/>
               </a:rPr>
-              <a:t>28</a:t>
+              <a:t>29</a:t>
             </a:r>
           </a:p>
         </p:txBody>
@@ -17252,7 +17462,7 @@
                 </a:solidFill>
                 <a:latin typeface="Helvetica Neue"/>
               </a:rPr>
-              <a:t>29</a:t>
+              <a:t>30</a:t>
             </a:r>
           </a:p>
         </p:txBody>
@@ -17952,7 +18162,7 @@
                 </a:solidFill>
                 <a:latin typeface="Helvetica Neue"/>
               </a:rPr>
-              <a:t>30</a:t>
+              <a:t>31</a:t>
             </a:r>
           </a:p>
         </p:txBody>
@@ -18214,7 +18424,7 @@
                 </a:solidFill>
                 <a:latin typeface="Helvetica Neue"/>
               </a:rPr>
-              <a:t>31</a:t>
+              <a:t>32</a:t>
             </a:r>
           </a:p>
         </p:txBody>
@@ -18528,7 +18738,7 @@
                 </a:solidFill>
                 <a:latin typeface="Helvetica Neue"/>
               </a:rPr>
-              <a:t>32</a:t>
+              <a:t>33</a:t>
             </a:r>
           </a:p>
         </p:txBody>
@@ -18790,7 +19000,7 @@
                 </a:solidFill>
                 <a:latin typeface="Helvetica Neue"/>
               </a:rPr>
-              <a:t>33</a:t>
+              <a:t>34</a:t>
             </a:r>
           </a:p>
         </p:txBody>
@@ -19234,7 +19444,7 @@
                 </a:solidFill>
                 <a:latin typeface="Helvetica Neue"/>
               </a:rPr>
-              <a:t>34</a:t>
+              <a:t>35</a:t>
             </a:r>
           </a:p>
         </p:txBody>
@@ -19496,7 +19706,7 @@
                 </a:solidFill>
                 <a:latin typeface="Helvetica Neue"/>
               </a:rPr>
-              <a:t>35</a:t>
+              <a:t>36</a:t>
             </a:r>
           </a:p>
         </p:txBody>
@@ -19758,7 +19968,7 @@
                 </a:solidFill>
                 <a:latin typeface="Helvetica Neue"/>
               </a:rPr>
-              <a:t>36</a:t>
+              <a:t>37</a:t>
             </a:r>
           </a:p>
         </p:txBody>
@@ -20020,7 +20230,7 @@
                 </a:solidFill>
                 <a:latin typeface="Helvetica Neue"/>
               </a:rPr>
-              <a:t>37</a:t>
+              <a:t>38</a:t>
             </a:r>
           </a:p>
         </p:txBody>
@@ -20282,7 +20492,7 @@
                 </a:solidFill>
                 <a:latin typeface="Helvetica Neue"/>
               </a:rPr>
-              <a:t>38</a:t>
+              <a:t>39</a:t>
             </a:r>
           </a:p>
         </p:txBody>
@@ -20544,7 +20754,7 @@
                 </a:solidFill>
                 <a:latin typeface="Helvetica Neue"/>
               </a:rPr>
-              <a:t>39</a:t>
+              <a:t>40</a:t>
             </a:r>
           </a:p>
         </p:txBody>
@@ -21068,7 +21278,7 @@
                 </a:solidFill>
                 <a:latin typeface="Helvetica Neue"/>
               </a:rPr>
-              <a:t>40</a:t>
+              <a:t>41</a:t>
             </a:r>
           </a:p>
         </p:txBody>
@@ -21477,7 +21687,451 @@
                 </a:solidFill>
                 <a:latin typeface="Helvetica Neue"/>
               </a:rPr>
-              <a:t>41</a:t>
+              <a:t>42</a:t>
+            </a:r>
+          </a:p>
+        </p:txBody>
+      </p:sp>
+    </p:spTree>
+  </p:cSld>
+  <p:clrMapOvr>
+    <a:masterClrMapping/>
+  </p:clrMapOvr>
+</p:sld>
+</file>
+
+<file path=ppt/slides/slide42.xml><?xml version="1.0" encoding="utf-8"?>
+<p:sld xmlns:a="http://schemas.openxmlformats.org/drawingml/2006/main" xmlns:r="http://schemas.openxmlformats.org/officeDocument/2006/relationships" xmlns:p="http://schemas.openxmlformats.org/presentationml/2006/main">
+  <p:cSld>
+    <p:spTree>
+      <p:nvGrpSpPr>
+        <p:cNvPr id="1" name=""/>
+        <p:cNvGrpSpPr/>
+        <p:nvPr/>
+      </p:nvGrpSpPr>
+      <p:grpSpPr>
+        <a:xfrm>
+          <a:off x="0" y="0"/>
+          <a:ext cx="0" cy="0"/>
+          <a:chOff x="0" y="0"/>
+          <a:chExt cx="0" cy="0"/>
+        </a:xfrm>
+      </p:grpSpPr>
+      <p:sp>
+        <p:nvSpPr>
+          <p:cNvPr id="2" name="TextBox 1"/>
+          <p:cNvSpPr txBox="1"/>
+          <p:nvPr/>
+        </p:nvSpPr>
+        <p:spPr>
+          <a:xfrm>
+            <a:off x="548640" y="384048"/>
+            <a:ext cx="11064240" cy="731520"/>
+          </a:xfrm>
+          <a:prstGeom prst="rect">
+            <a:avLst/>
+          </a:prstGeom>
+          <a:noFill/>
+        </p:spPr>
+        <p:txBody>
+          <a:bodyPr wrap="square">
+            <a:spAutoFit/>
+          </a:bodyPr>
+          <a:lstStyle/>
+          <a:p>
+            <a:pPr algn="l">
+              <a:lnSpc>
+                <a:spcPct val="105000"/>
+              </a:lnSpc>
+              <a:spcAft>
+                <a:spcPts val="600"/>
+              </a:spcAft>
+            </a:pPr>
+            <a:r>
+              <a:rPr sz="2800" b="1">
+                <a:solidFill>
+                  <a:srgbClr val="14141C"/>
+                </a:solidFill>
+                <a:latin typeface="Helvetica Neue"/>
+              </a:rPr>
+              <a:t>Where each brand is searched from</a:t>
+            </a:r>
+          </a:p>
+        </p:txBody>
+      </p:sp>
+      <p:sp>
+        <p:nvSpPr>
+          <p:cNvPr id="3" name="Rectangle 2"/>
+          <p:cNvSpPr/>
+          <p:nvPr/>
+        </p:nvSpPr>
+        <p:spPr>
+          <a:xfrm>
+            <a:off x="548640" y="1115568"/>
+            <a:ext cx="1463040" cy="64008"/>
+          </a:xfrm>
+          <a:prstGeom prst="rect">
+            <a:avLst/>
+          </a:prstGeom>
+          <a:solidFill>
+            <a:srgbClr val="FF6200"/>
+          </a:solidFill>
+          <a:ln>
+            <a:noFill/>
+          </a:ln>
+          <a:effectLst/>
+        </p:spPr>
+        <p:style>
+          <a:lnRef idx="1">
+            <a:schemeClr val="accent1"/>
+          </a:lnRef>
+          <a:fillRef idx="3">
+            <a:schemeClr val="accent1"/>
+          </a:fillRef>
+          <a:effectRef idx="2">
+            <a:schemeClr val="accent1"/>
+          </a:effectRef>
+          <a:fontRef idx="minor">
+            <a:schemeClr val="lt1"/>
+          </a:fontRef>
+        </p:style>
+        <p:txBody>
+          <a:bodyPr rtlCol="0" anchor="ctr"/>
+          <a:lstStyle/>
+          <a:p>
+            <a:pPr algn="ctr"/>
+            <a:endParaRPr/>
+          </a:p>
+        </p:txBody>
+      </p:sp>
+      <p:sp>
+        <p:nvSpPr>
+          <p:cNvPr id="4" name="TextBox 3"/>
+          <p:cNvSpPr txBox="1"/>
+          <p:nvPr/>
+        </p:nvSpPr>
+        <p:spPr>
+          <a:xfrm>
+            <a:off x="685800" y="1463040"/>
+            <a:ext cx="10881360" cy="4754880"/>
+          </a:xfrm>
+          <a:prstGeom prst="rect">
+            <a:avLst/>
+          </a:prstGeom>
+          <a:noFill/>
+        </p:spPr>
+        <p:txBody>
+          <a:bodyPr wrap="square">
+            <a:spAutoFit/>
+          </a:bodyPr>
+          <a:lstStyle/>
+          <a:p>
+            <a:pPr algn="l">
+              <a:lnSpc>
+                <a:spcPct val="105000"/>
+              </a:lnSpc>
+              <a:spcAft>
+                <a:spcPts val="200"/>
+              </a:spcAft>
+            </a:pPr>
+            <a:r>
+              <a:rPr sz="1500" b="1">
+                <a:solidFill>
+                  <a:srgbClr val="14141C"/>
+                </a:solidFill>
+                <a:latin typeface="Helvetica Neue"/>
+              </a:rPr>
+              <a:t>•  Every challenger peaks in Brussels</a:t>
+            </a:r>
+          </a:p>
+          <a:p>
+            <a:pPr algn="l">
+              <a:lnSpc>
+                <a:spcPct val="105000"/>
+              </a:lnSpc>
+              <a:spcAft>
+                <a:spcPts val="1000"/>
+              </a:spcAft>
+            </a:pPr>
+            <a:r>
+              <a:rPr sz="1300" b="0">
+                <a:solidFill>
+                  <a:srgbClr val="585868"/>
+                </a:solidFill>
+                <a:latin typeface="Helvetica Neue"/>
+              </a:rPr>
+              <a:t>     Revolut, N26 and bunq all index 100 in Brussels and drop away outside it — N26 to 27 in Flanders, bunq to 29 in Wallonia. Three brands, three different products, one geography.</a:t>
+            </a:r>
+          </a:p>
+          <a:p>
+            <a:pPr algn="l">
+              <a:lnSpc>
+                <a:spcPct val="105000"/>
+              </a:lnSpc>
+              <a:spcAft>
+                <a:spcPts val="200"/>
+              </a:spcAft>
+            </a:pPr>
+            <a:r>
+              <a:rPr sz="1500" b="1">
+                <a:solidFill>
+                  <a:srgbClr val="14141C"/>
+                </a:solidFill>
+                <a:latin typeface="Helvetica Neue"/>
+              </a:rPr>
+              <a:t>•  Every incumbent is regional, and predictably so</a:t>
+            </a:r>
+          </a:p>
+          <a:p>
+            <a:pPr algn="l">
+              <a:lnSpc>
+                <a:spcPct val="105000"/>
+              </a:lnSpc>
+              <a:spcAft>
+                <a:spcPts val="1000"/>
+              </a:spcAft>
+            </a:pPr>
+            <a:r>
+              <a:rPr sz="1300" b="0">
+                <a:solidFill>
+                  <a:srgbClr val="585868"/>
+                </a:solidFill>
+                <a:latin typeface="Helvetica Neue"/>
+              </a:rPr>
+              <a:t>     KBC indexes 100 in Flanders and 11 in Wallonia; Argenta 100 and 27. Belfius, BNP Paribas Fortis and Crelan all peak in Wallonia. Five of six sit exactly where their history put them, which is the sanity check on this data rather than the finding.</a:t>
+            </a:r>
+          </a:p>
+          <a:p>
+            <a:pPr algn="l">
+              <a:lnSpc>
+                <a:spcPct val="105000"/>
+              </a:lnSpc>
+              <a:spcAft>
+                <a:spcPts val="200"/>
+              </a:spcAft>
+            </a:pPr>
+            <a:r>
+              <a:rPr sz="1500" b="1">
+                <a:solidFill>
+                  <a:srgbClr val="14141C"/>
+                </a:solidFill>
+                <a:latin typeface="Helvetica Neue"/>
+              </a:rPr>
+              <a:t>•  ING is the one incumbent that does not</a:t>
+            </a:r>
+          </a:p>
+          <a:p>
+            <a:pPr algn="l">
+              <a:lnSpc>
+                <a:spcPct val="105000"/>
+              </a:lnSpc>
+              <a:spcAft>
+                <a:spcPts val="1000"/>
+              </a:spcAft>
+            </a:pPr>
+            <a:r>
+              <a:rPr sz="1300" b="0">
+                <a:solidFill>
+                  <a:srgbClr val="585868"/>
+                </a:solidFill>
+                <a:latin typeface="Helvetica Neue"/>
+              </a:rPr>
+              <a:t>     Brussels 100, Wallonia 98, Flanders 73 — national, with no regional home. On this measure ING behaves like the challengers and unlike the banks it sits with everywhere else in this deck.</a:t>
+            </a:r>
+          </a:p>
+          <a:p>
+            <a:pPr algn="l">
+              <a:lnSpc>
+                <a:spcPct val="105000"/>
+              </a:lnSpc>
+              <a:spcAft>
+                <a:spcPts val="200"/>
+              </a:spcAft>
+            </a:pPr>
+            <a:r>
+              <a:rPr sz="1500" b="1">
+                <a:solidFill>
+                  <a:srgbClr val="14141C"/>
+                </a:solidFill>
+                <a:latin typeface="Helvetica Neue"/>
+              </a:rPr>
+              <a:t>•  A second signal pointing the same way, from a different source</a:t>
+            </a:r>
+          </a:p>
+          <a:p>
+            <a:pPr algn="l">
+              <a:lnSpc>
+                <a:spcPct val="105000"/>
+              </a:lnSpc>
+              <a:spcAft>
+                <a:spcPts val="1000"/>
+              </a:spcAft>
+            </a:pPr>
+            <a:r>
+              <a:rPr sz="1300" b="0">
+                <a:solidFill>
+                  <a:srgbClr val="585868"/>
+                </a:solidFill>
+                <a:latin typeface="Helvetica Neue"/>
+              </a:rPr>
+              <a:t>     This comes from search behaviour, not from a single page feature, and it lands where the traditional↔challenger score already put ING: with the incumbents, leaning.</a:t>
+            </a:r>
+          </a:p>
+          <a:p>
+            <a:pPr algn="l">
+              <a:lnSpc>
+                <a:spcPct val="105000"/>
+              </a:lnSpc>
+              <a:spcAft>
+                <a:spcPts val="200"/>
+              </a:spcAft>
+            </a:pPr>
+            <a:r>
+              <a:rPr sz="1500" b="1">
+                <a:solidFill>
+                  <a:srgbClr val="14141C"/>
+                </a:solidFill>
+                <a:latin typeface="Helvetica Neue"/>
+              </a:rPr>
+              <a:t>•  What it is not</a:t>
+            </a:r>
+          </a:p>
+          <a:p>
+            <a:pPr algn="l">
+              <a:lnSpc>
+                <a:spcPct val="105000"/>
+              </a:lnSpc>
+              <a:spcAft>
+                <a:spcPts val="1000"/>
+              </a:spcAft>
+            </a:pPr>
+            <a:r>
+              <a:rPr sz="1300" b="0">
+                <a:solidFill>
+                  <a:srgbClr val="585868"/>
+                </a:solidFill>
+                <a:latin typeface="Helvetica Neue"/>
+              </a:rPr>
+              <a:t>     Where people search from, never what a campaign achieved. Google Trends indexes each brand against its own peak, so these are shapes to compare, not volumes.</a:t>
+            </a:r>
+          </a:p>
+          <a:p>
+            <a:pPr algn="l">
+              <a:lnSpc>
+                <a:spcPct val="105000"/>
+              </a:lnSpc>
+              <a:spcAft>
+                <a:spcPts val="200"/>
+              </a:spcAft>
+            </a:pPr>
+            <a:endParaRPr sz="1300" b="0">
+              <a:solidFill>
+                <a:srgbClr val="585868"/>
+              </a:solidFill>
+              <a:latin typeface="Helvetica Neue"/>
+            </a:endParaRPr>
+          </a:p>
+          <a:p>
+            <a:pPr algn="l">
+              <a:lnSpc>
+                <a:spcPct val="105000"/>
+              </a:lnSpc>
+              <a:spcAft>
+                <a:spcPts val="0"/>
+              </a:spcAft>
+            </a:pPr>
+            <a:r>
+              <a:rPr sz="1250" b="0">
+                <a:solidFill>
+                  <a:srgbClr val="585868"/>
+                </a:solidFill>
+                <a:latin typeface="Helvetica Neue"/>
+              </a:rPr>
+              <a:t>Google Trends, Belgium, by region. Regional index 0–100 per brand, each brand normalised to its own maximum.</a:t>
+            </a:r>
+          </a:p>
+        </p:txBody>
+      </p:sp>
+      <p:sp>
+        <p:nvSpPr>
+          <p:cNvPr id="5" name="TextBox 4"/>
+          <p:cNvSpPr txBox="1"/>
+          <p:nvPr/>
+        </p:nvSpPr>
+        <p:spPr>
+          <a:xfrm>
+            <a:off x="548640" y="6400800"/>
+            <a:ext cx="8229600" cy="274320"/>
+          </a:xfrm>
+          <a:prstGeom prst="rect">
+            <a:avLst/>
+          </a:prstGeom>
+          <a:noFill/>
+        </p:spPr>
+        <p:txBody>
+          <a:bodyPr wrap="square">
+            <a:spAutoFit/>
+          </a:bodyPr>
+          <a:lstStyle/>
+          <a:p>
+            <a:pPr algn="l">
+              <a:lnSpc>
+                <a:spcPct val="105000"/>
+              </a:lnSpc>
+              <a:spcAft>
+                <a:spcPts val="600"/>
+              </a:spcAft>
+            </a:pPr>
+            <a:r>
+              <a:rPr sz="1000" b="0">
+                <a:solidFill>
+                  <a:srgbClr val="585868"/>
+                </a:solidFill>
+                <a:latin typeface="Helvetica Neue"/>
+              </a:rPr>
+              <a:t>Banking Campaigns Comparator · ING DACI / Customer AI · September 2026</a:t>
+            </a:r>
+          </a:p>
+        </p:txBody>
+      </p:sp>
+      <p:sp>
+        <p:nvSpPr>
+          <p:cNvPr id="6" name="TextBox 5"/>
+          <p:cNvSpPr txBox="1"/>
+          <p:nvPr/>
+        </p:nvSpPr>
+        <p:spPr>
+          <a:xfrm>
+            <a:off x="11094415" y="6400800"/>
+            <a:ext cx="548640" cy="274320"/>
+          </a:xfrm>
+          <a:prstGeom prst="rect">
+            <a:avLst/>
+          </a:prstGeom>
+          <a:noFill/>
+        </p:spPr>
+        <p:txBody>
+          <a:bodyPr wrap="square">
+            <a:spAutoFit/>
+          </a:bodyPr>
+          <a:lstStyle/>
+          <a:p>
+            <a:pPr algn="r">
+              <a:lnSpc>
+                <a:spcPct val="105000"/>
+              </a:lnSpc>
+              <a:spcAft>
+                <a:spcPts val="600"/>
+              </a:spcAft>
+            </a:pPr>
+            <a:r>
+              <a:rPr sz="1000" b="0">
+                <a:solidFill>
+                  <a:srgbClr val="585868"/>
+                </a:solidFill>
+                <a:latin typeface="Helvetica Neue"/>
+              </a:rPr>
+              <a:t>13</a:t>
             </a:r>
           </a:p>
         </p:txBody>

--- a/docs/Banking_Campaigns_Comparator.pptx
+++ b/docs/Banking_Campaigns_Comparator.pptx
@@ -5,7 +5,7 @@
     <p:sldMasterId id="2147483648" r:id="rId1"/>
   </p:sldMasterIdLst>
   <p:notesMasterIdLst>
-    <p:notesMasterId r:id="rId43"/>
+    <p:notesMasterId r:id="rId42"/>
   </p:notesMasterIdLst>
   <p:sldIdLst>
     <p:sldId id="256" r:id="rId2"/>
@@ -48,7 +48,6 @@
     <p:sldId id="293" r:id="rId39"/>
     <p:sldId id="294" r:id="rId40"/>
     <p:sldId id="295" r:id="rId41"/>
-    <p:sldId id="296" r:id="rId42"/>
   </p:sldIdLst>
   <p:sldSz cx="12192000" cy="6858000"/>
   <p:notesSz cx="6858000" cy="9144000"/>
@@ -215,7 +214,7 @@
             </a:lvl1pPr>
           </a:lstStyle>
           <a:p>
-            <a:endParaRPr lang="fr-BE"/>
+            <a:endParaRPr lang="en-US"/>
           </a:p>
         </p:txBody>
       </p:sp>
@@ -246,11 +245,11 @@
             </a:lvl1pPr>
           </a:lstStyle>
           <a:p>
-            <a:fld id="{5EAA65B6-A2CF-4CB4-ADA6-4FB12DC6F514}" type="datetimeFigureOut">
-              <a:rPr lang="fr-BE" smtClean="0"/>
-              <a:t>24-09-26</a:t>
+            <a:fld id="{811212E8-7D8E-9C45-80F4-3D5B9A1EF75A}" type="datetimeFigureOut">
+              <a:rPr lang="en-US" smtClean="0"/>
+              <a:t>9/24/26</a:t>
             </a:fld>
-            <a:endParaRPr lang="fr-BE"/>
+            <a:endParaRPr lang="en-US"/>
           </a:p>
         </p:txBody>
       </p:sp>
@@ -283,7 +282,7 @@
           <a:bodyPr vert="horz" lIns="91440" tIns="45720" rIns="91440" bIns="45720" rtlCol="0" anchor="ctr"/>
           <a:lstStyle/>
           <a:p>
-            <a:endParaRPr lang="fr-BE"/>
+            <a:endParaRPr lang="en-US"/>
           </a:p>
         </p:txBody>
       </p:sp>
@@ -343,7 +342,6 @@
               <a:rPr lang="en-US"/>
               <a:t>Fifth level</a:t>
             </a:r>
-            <a:endParaRPr lang="fr-BE"/>
           </a:p>
         </p:txBody>
       </p:sp>
@@ -374,7 +372,7 @@
             </a:lvl1pPr>
           </a:lstStyle>
           <a:p>
-            <a:endParaRPr lang="fr-BE"/>
+            <a:endParaRPr lang="en-US"/>
           </a:p>
         </p:txBody>
       </p:sp>
@@ -405,18 +403,18 @@
             </a:lvl1pPr>
           </a:lstStyle>
           <a:p>
-            <a:fld id="{3BD8D499-DB7D-4F44-9C48-D7F5314CC23E}" type="slidenum">
-              <a:rPr lang="fr-BE" smtClean="0"/>
+            <a:fld id="{A2E63D8B-9789-CD49-B6E9-A4F815EBBAA9}" type="slidenum">
+              <a:rPr lang="en-US" smtClean="0"/>
               <a:t>‹#›</a:t>
             </a:fld>
-            <a:endParaRPr lang="fr-BE"/>
+            <a:endParaRPr lang="en-US"/>
           </a:p>
         </p:txBody>
       </p:sp>
     </p:spTree>
     <p:extLst>
       <p:ext uri="{BB962C8B-B14F-4D97-AF65-F5344CB8AC3E}">
-        <p14:creationId xmlns:p14="http://schemas.microsoft.com/office/powerpoint/2010/main" val="1555760893"/>
+        <p14:creationId xmlns:p14="http://schemas.microsoft.com/office/powerpoint/2010/main" val="727215553"/>
       </p:ext>
     </p:extLst>
   </p:cSld>
@@ -540,7 +538,7 @@
             <a:spLocks noGrp="1" noRot="1" noChangeAspect="1"/>
           </p:cNvSpPr>
           <p:nvPr>
-            <p:ph type="sldImg"/>
+            <p:ph type="sldImg" idx="2"/>
           </p:nvPr>
         </p:nvSpPr>
         <p:spPr/>
@@ -552,72 +550,7 @@
             <a:spLocks noGrp="1"/>
           </p:cNvSpPr>
           <p:nvPr>
-            <p:ph type="body" idx="1"/>
-          </p:nvPr>
-        </p:nvSpPr>
-        <p:spPr/>
-        <p:txBody>
-          <a:bodyPr/>
-          <a:lstStyle/>
-          <a:p>
-            <a:r>
-              <a:rPr lang="en-US" dirty="0"/>
-              <a:t>Ouverture — 1 min.</a:t>
-            </a:r>
-          </a:p>
-          <a:p>
-            <a:r>
-              <a:rPr lang="en-US" dirty="0"/>
-              <a:t>"As part of the ING DACI two-week POC, we set out to answer one question: how do Belgian banks communicate similar products on the open web, and what can ING learn from it? To move away from subjective design opinions, we built a fully reproducible, end-to-end measurement pipeline across 14 banks and 104 features. First disclaimer as guardrail before we start: we have zero click, conversion or performance data. Nothing here claims a design choice caused a commercial outcome - every recommendation is an argued hypothesis worth testing. Let's walk through what the data shows."</a:t>
-            </a:r>
-          </a:p>
-        </p:txBody>
-      </p:sp>
-    </p:spTree>
-  </p:cSld>
-  <p:clrMapOvr>
-    <a:masterClrMapping/>
-  </p:clrMapOvr>
-</p:notes>
-</file>
-
-<file path=ppt/notesSlides/notesSlide10.xml><?xml version="1.0" encoding="utf-8"?>
-<p:notes xmlns:a="http://schemas.openxmlformats.org/drawingml/2006/main" xmlns:p="http://schemas.openxmlformats.org/presentationml/2006/main" xmlns:r="http://schemas.openxmlformats.org/officeDocument/2006/relationships">
-  <p:cSld>
-    <p:spTree>
-      <p:nvGrpSpPr>
-        <p:cNvPr id="1" name=""/>
-        <p:cNvGrpSpPr/>
-        <p:nvPr/>
-      </p:nvGrpSpPr>
-      <p:grpSpPr>
-        <a:xfrm>
-          <a:off x="0" y="0"/>
-          <a:ext cx="0" cy="0"/>
-          <a:chOff x="0" y="0"/>
-          <a:chExt cx="0" cy="0"/>
-        </a:xfrm>
-      </p:grpSpPr>
-      <p:sp>
-        <p:nvSpPr>
-          <p:cNvPr id="2" name="Slide Image Placeholder 1"/>
-          <p:cNvSpPr>
-            <a:spLocks noGrp="1"/>
-          </p:cNvSpPr>
-          <p:nvPr>
-            <p:ph type="sldImg" idx="2"/>
-          </p:nvPr>
-        </p:nvSpPr>
-        <p:spPr/>
-      </p:sp>
-      <p:sp>
-        <p:nvSpPr>
-          <p:cNvPr id="3" name="Notes Placeholder 2"/>
-          <p:cNvSpPr>
-            <a:spLocks noGrp="1"/>
-          </p:cNvSpPr>
-          <p:nvPr>
-            <p:ph type="body" idx="3" sz="quarter"/>
+            <p:ph type="body" sz="quarter" idx="3"/>
           </p:nvPr>
         </p:nvSpPr>
         <p:spPr/>
@@ -673,522 +606,7 @@
             <a:spLocks noGrp="1"/>
           </p:cNvSpPr>
           <p:nvPr>
-            <p:ph type="sldNum" idx="5" sz="quarter"/>
-          </p:nvPr>
-        </p:nvSpPr>
-        <p:spPr/>
-      </p:sp>
-    </p:spTree>
-  </p:cSld>
-  <p:clrMapOvr>
-    <a:masterClrMapping/>
-  </p:clrMapOvr>
-</p:notes>
-</file>
-
-<file path=ppt/notesSlides/notesSlide11.xml><?xml version="1.0" encoding="utf-8"?>
-<p:notes xmlns:a="http://schemas.openxmlformats.org/drawingml/2006/main" xmlns:p="http://schemas.openxmlformats.org/presentationml/2006/main" xmlns:r="http://schemas.openxmlformats.org/officeDocument/2006/relationships">
-  <p:cSld>
-    <p:spTree>
-      <p:nvGrpSpPr>
-        <p:cNvPr id="1" name=""/>
-        <p:cNvGrpSpPr/>
-        <p:nvPr/>
-      </p:nvGrpSpPr>
-      <p:grpSpPr>
-        <a:xfrm>
-          <a:off x="0" y="0"/>
-          <a:ext cx="0" cy="0"/>
-          <a:chOff x="0" y="0"/>
-          <a:chExt cx="0" cy="0"/>
-        </a:xfrm>
-      </p:grpSpPr>
-      <p:sp>
-        <p:nvSpPr>
-          <p:cNvPr id="2" name="Slide Image Placeholder 1"/>
-          <p:cNvSpPr>
-            <a:spLocks noGrp="1"/>
-          </p:cNvSpPr>
-          <p:nvPr>
-            <p:ph type="sldImg" idx="2"/>
-          </p:nvPr>
-        </p:nvSpPr>
-        <p:spPr/>
-      </p:sp>
-      <p:sp>
-        <p:nvSpPr>
-          <p:cNvPr id="3" name="Notes Placeholder 2"/>
-          <p:cNvSpPr>
-            <a:spLocks noGrp="1"/>
-          </p:cNvSpPr>
-          <p:nvPr>
-            <p:ph type="body" idx="3" sz="quarter"/>
-          </p:nvPr>
-        </p:nvSpPr>
-        <p:spPr/>
-        <p:txBody>
-          <a:bodyPr/>
-          <a:lstStyle/>
-          <a:p>
-            <a:r>
-              <a:t>FRAMING, say first: everything up to here measured. This is the one place in the project where a model is allowed to interpret; the next four slides are about how that is kept honest.</a:t>
-            </a:r>
-          </a:p>
-          <a:p>
-            <a:r>
-              <a:t>WHAT IT IS: one model call (DeepSeek, pinned version) over the finished analysis. It reads report.json — the same file the charts are drawn from. Nothing is re-scraped, nothing is re-scored.</a:t>
-            </a:r>
-          </a:p>
-          <a:p>
-            <a:r>
-              <a:t>WHAT COMES OUT: an ordered list of changes. Current run: ten — two high, six medium, two low. The order is the argument: what the measurement most supports acting on first. Ordered by priority, not by the model's confidence.</a:t>
-            </a:r>
-          </a:p>
-          <a:p>
-            <a:r>
-              <a:t>TWO CONTEXTS (checkboxes in the screenshot), both opt-in, both labelled on every card they touch: search interest for timing, news themes for reputation — three of the ten. Context can never stand as evidence that a page performed.</a:t>
-            </a:r>
-          </a:p>
-          <a:p>
-            <a:r>
-              <a:t>ORANGE BOX: it writes what to change; it never re-derives a number. One-way by design — if a figure is wrong the fix is upstream, and the next run carries it through.</a:t>
-            </a:r>
-          </a:p>
-          <a:p>
-            <a:r>
-              <a:t>NOTE: the panel screenshot and the counts printed on this slide predate the cta_count withdrawal of 23/09 (11 → 10). Say ten.</a:t>
-            </a:r>
-          </a:p>
-          <a:p>
-            <a:r>
-              <a:t>TRANSITION: here is what one of them looks like.</a:t>
-            </a:r>
-          </a:p>
-        </p:txBody>
-      </p:sp>
-      <p:sp>
-        <p:nvSpPr>
-          <p:cNvPr id="4" name="Slide Number Placeholder 3"/>
-          <p:cNvSpPr>
-            <a:spLocks noGrp="1"/>
-          </p:cNvSpPr>
-          <p:nvPr>
-            <p:ph type="sldNum" idx="5" sz="quarter"/>
-          </p:nvPr>
-        </p:nvSpPr>
-        <p:spPr/>
-      </p:sp>
-    </p:spTree>
-  </p:cSld>
-  <p:clrMapOvr>
-    <a:masterClrMapping/>
-  </p:clrMapOvr>
-</p:notes>
-</file>
-
-<file path=ppt/notesSlides/notesSlide12.xml><?xml version="1.0" encoding="utf-8"?>
-<p:notes xmlns:a="http://schemas.openxmlformats.org/drawingml/2006/main" xmlns:p="http://schemas.openxmlformats.org/presentationml/2006/main" xmlns:r="http://schemas.openxmlformats.org/officeDocument/2006/relationships">
-  <p:cSld>
-    <p:spTree>
-      <p:nvGrpSpPr>
-        <p:cNvPr id="1" name=""/>
-        <p:cNvGrpSpPr/>
-        <p:nvPr/>
-      </p:nvGrpSpPr>
-      <p:grpSpPr>
-        <a:xfrm>
-          <a:off x="0" y="0"/>
-          <a:ext cx="0" cy="0"/>
-          <a:chOff x="0" y="0"/>
-          <a:chExt cx="0" cy="0"/>
-        </a:xfrm>
-      </p:grpSpPr>
-      <p:sp>
-        <p:nvSpPr>
-          <p:cNvPr id="2" name="Slide Image Placeholder 1"/>
-          <p:cNvSpPr>
-            <a:spLocks noGrp="1"/>
-          </p:cNvSpPr>
-          <p:nvPr>
-            <p:ph type="sldImg" idx="2"/>
-          </p:nvPr>
-        </p:nvSpPr>
-        <p:spPr/>
-      </p:sp>
-      <p:sp>
-        <p:nvSpPr>
-          <p:cNvPr id="3" name="Notes Placeholder 2"/>
-          <p:cNvSpPr>
-            <a:spLocks noGrp="1"/>
-          </p:cNvSpPr>
-          <p:nvPr>
-            <p:ph type="body" idx="3" sz="quarter"/>
-          </p:nvPr>
-        </p:nvSpPr>
-        <p:spPr/>
-        <p:txBody>
-          <a:bodyPr/>
-          <a:lstStyle/>
-          <a:p>
-            <a:r>
-              <a:t>WALK THE CARD (R1, top): title and priority · WHAT THE DATA SHOWS — the finding with its numbers: 4.0 urgency markers per page vs a peer mean of 0.64, about 3.7 SD · WHAT TO DO — the action · chips: the feature it was argued from (urgency_marker_count) and the pages it applies to.</a:t>
-            </a:r>
-          </a:p>
-          <a:p>
-            <a:r>
-              <a:t>THREE GUARDRAILS (right column):</a:t>
-            </a:r>
-          </a:p>
-          <a:p>
-            <a:r>
-              <a:t>1. Finding and action kept apart. Anyone can reject the action and keep the finding — nobody has to buy the advice to accept the measurement.</a:t>
-            </a:r>
-          </a:p>
-          <a:p>
-            <a:r>
-              <a:t>2. Named features, checked before release. Every feature id on a card is verified against the report; an id the model invented is dropped before the list is shown.</a:t>
-            </a:r>
-          </a:p>
-          <a:p>
-            <a:r>
-              <a:t>3. No figure the analysis did not produce. The prompt receives only numbers already in the report; the output is not trusted to add any.</a:t>
-            </a:r>
-          </a:p>
-          <a:p>
-            <a:r>
-              <a:t>ONE LINE: the model is a writer, not a source.</a:t>
-            </a:r>
-          </a:p>
-          <a:p>
-            <a:r>
-              <a:t>IF ASKED about R2 in the screenshot ("Repeat the primary call to action"): it rests on cta_count, which stays withdrawn from the comparison — but not for the reason first given. The 23/09 note said ING's pack cards render client-side and never reached the capture; that was checked on 24/09 and is false — they are all in the captured HTML. The real reason: no counting rule reproduces a human count across fourteen sites. hellobank reads 1.0 where a human counts about ten, so the rule is markup-dependent, not comparable. Slide 8 now names the feature and says no ranking is published.</a:t>
-            </a:r>
-          </a:p>
-          <a:p>
-            <a:r>
-              <a:t>IF PUSHED FURTHER: on the counted figure ING is 11th of 14 — 1.0 against a peer mean of 5.0. The observation worth voicing is Siegried's: on the captured pack pages ING has nine clickable things and exactly one that opens an account, on a page 11,149px long. Plenty to click, almost nothing that converts. A recommendation dying with its feature is the mechanism working; the screenshot predates the withdrawal.</a:t>
-            </a:r>
-          </a:p>
-          <a:p>
-            <a:r>
-              <a:t>TRANSITION: so what did it conclude about ING?</a:t>
-            </a:r>
-          </a:p>
-        </p:txBody>
-      </p:sp>
-      <p:sp>
-        <p:nvSpPr>
-          <p:cNvPr id="4" name="Slide Number Placeholder 3"/>
-          <p:cNvSpPr>
-            <a:spLocks noGrp="1"/>
-          </p:cNvSpPr>
-          <p:nvPr>
-            <p:ph type="sldNum" idx="5" sz="quarter"/>
-          </p:nvPr>
-        </p:nvSpPr>
-        <p:spPr/>
-      </p:sp>
-    </p:spTree>
-  </p:cSld>
-  <p:clrMapOvr>
-    <a:masterClrMapping/>
-  </p:clrMapOvr>
-</p:notes>
-</file>
-
-<file path=ppt/notesSlides/notesSlide13.xml><?xml version="1.0" encoding="utf-8"?>
-<p:notes xmlns:a="http://schemas.openxmlformats.org/drawingml/2006/main" xmlns:p="http://schemas.openxmlformats.org/presentationml/2006/main" xmlns:r="http://schemas.openxmlformats.org/officeDocument/2006/relationships">
-  <p:cSld>
-    <p:spTree>
-      <p:nvGrpSpPr>
-        <p:cNvPr id="1" name=""/>
-        <p:cNvGrpSpPr/>
-        <p:nvPr/>
-      </p:nvGrpSpPr>
-      <p:grpSpPr>
-        <a:xfrm>
-          <a:off x="0" y="0"/>
-          <a:ext cx="0" cy="0"/>
-          <a:chOff x="0" y="0"/>
-          <a:chExt cx="0" cy="0"/>
-        </a:xfrm>
-      </p:grpSpPr>
-      <p:sp>
-        <p:nvSpPr>
-          <p:cNvPr id="2" name="Slide Image Placeholder 1"/>
-          <p:cNvSpPr>
-            <a:spLocks noGrp="1"/>
-          </p:cNvSpPr>
-          <p:nvPr>
-            <p:ph type="sldImg" idx="2"/>
-          </p:nvPr>
-        </p:nvSpPr>
-        <p:spPr/>
-      </p:sp>
-      <p:sp>
-        <p:nvSpPr>
-          <p:cNvPr id="3" name="Notes Placeholder 2"/>
-          <p:cNvSpPr>
-            <a:spLocks noGrp="1"/>
-          </p:cNvSpPr>
-          <p:nvPr>
-            <p:ph type="body" idx="3" sz="quarter"/>
-          </p:nvPr>
-        </p:nvSpPr>
-        <p:spPr/>
-        <p:txBody>
-          <a:bodyPr/>
-          <a:lstStyle/>
-          <a:p>
-            <a:r>
-              <a:t>THREE NUMBERS, all from the current-account comparison — 14 banks, 36 comparable features:</a:t>
-            </a:r>
-          </a:p>
-          <a:p>
-            <a:r>
-              <a:t>1. 4.0 urgency and deadline markers per page vs a peer mean of 0.64 — about 3.7 SD above, the largest gap in the set and ING's strongest measured signature.</a:t>
-            </a:r>
-          </a:p>
-          <a:p>
-            <a:r>
-              <a:t>2. Page height 11,149 px vs 6,412 — about 74% longer, so the offer sits further from the top (about 1.4 SD).</a:t>
-            </a:r>
-          </a:p>
-          <a:p>
-            <a:r>
-              <a:t>3. 0.67 'free' claims with their conditions elsewhere vs 0.23 — where a free or no-fee claim appears, the qualifying conditions are not next to it.</a:t>
-            </a:r>
-          </a:p>
-          <a:p>
-            <a:r>
-              <a:t>THE THREE IT RANKED HIGHEST: strip back urgency and deadline language · bring the offer higher up the page (the current run words it "shorten the pages and cut non-informative imagery" — same measure, page_height_px) · disclose the conditions of any free claim next to the claim.</a:t>
-            </a:r>
-          </a:p>
-          <a:p>
-            <a:r>
-              <a:t>THE SHAPE: two of the three are about removing things. ING's pages carry the densest persuasion in the set (3.7 levers per page vs 1.7). The advice is restraint, not more features.</a:t>
-            </a:r>
-          </a:p>
-          <a:p>
-            <a:r>
-              <a:t>CAVEAT — read it, do not skip it: design observations, not performance findings. Pages span product families and languages, judged features come from one rater, no click or conversion data — every item is a hypothesis ING could test.</a:t>
-            </a:r>
-          </a:p>
-          <a:p>
-            <a:r>
-              <a:t>TRANSITION: a list is easy to nod at and forget. So we built the thing.</a:t>
-            </a:r>
-          </a:p>
-        </p:txBody>
-      </p:sp>
-      <p:sp>
-        <p:nvSpPr>
-          <p:cNvPr id="4" name="Slide Number Placeholder 3"/>
-          <p:cNvSpPr>
-            <a:spLocks noGrp="1"/>
-          </p:cNvSpPr>
-          <p:nvPr>
-            <p:ph type="sldNum" idx="5" sz="quarter"/>
-          </p:nvPr>
-        </p:nvSpPr>
-        <p:spPr/>
-      </p:sp>
-    </p:spTree>
-  </p:cSld>
-  <p:clrMapOvr>
-    <a:masterClrMapping/>
-  </p:clrMapOvr>
-</p:notes>
-</file>
-
-<file path=ppt/notesSlides/notesSlide14.xml><?xml version="1.0" encoding="utf-8"?>
-<p:notes xmlns:a="http://schemas.openxmlformats.org/drawingml/2006/main" xmlns:p="http://schemas.openxmlformats.org/presentationml/2006/main" xmlns:r="http://schemas.openxmlformats.org/officeDocument/2006/relationships">
-  <p:cSld>
-    <p:spTree>
-      <p:nvGrpSpPr>
-        <p:cNvPr id="1" name=""/>
-        <p:cNvGrpSpPr/>
-        <p:nvPr/>
-      </p:nvGrpSpPr>
-      <p:grpSpPr>
-        <a:xfrm>
-          <a:off x="0" y="0"/>
-          <a:ext cx="0" cy="0"/>
-          <a:chOff x="0" y="0"/>
-          <a:chExt cx="0" cy="0"/>
-        </a:xfrm>
-      </p:grpSpPr>
-      <p:sp>
-        <p:nvSpPr>
-          <p:cNvPr id="2" name="Slide Image Placeholder 1"/>
-          <p:cNvSpPr>
-            <a:spLocks noGrp="1"/>
-          </p:cNvSpPr>
-          <p:nvPr>
-            <p:ph type="sldImg" idx="2"/>
-          </p:nvPr>
-        </p:nvSpPr>
-        <p:spPr/>
-      </p:sp>
-      <p:sp>
-        <p:nvSpPr>
-          <p:cNvPr id="3" name="Notes Placeholder 2"/>
-          <p:cNvSpPr>
-            <a:spLocks noGrp="1"/>
-          </p:cNvSpPr>
-          <p:nvPr>
-            <p:ph type="body" idx="3" sz="quarter"/>
-          </p:nvPr>
-        </p:nvSpPr>
-        <p:spPr/>
-        <p:txBody>
-          <a:bodyPr/>
-          <a:lstStyle/>
-          <a:p>
-            <a:r>
-              <a:t>ON SCREEN: top — the generated home page in ING styling (hero, two calls to action). Bottom — one section in explained mode: orange frame, and the (i) button that opens the rationale for that section.</a:t>
-            </a:r>
-          </a:p>
-          <a:p>
-            <a:r>
-              <a:t>THREE POINTS:</a:t>
-            </a:r>
-          </a:p>
-          <a:p>
-            <a:r>
-              <a:t>1. The team chooses what gets built. Every recommendation is a checkbox; nothing reaches the generator that a person did not tick.</a:t>
-            </a:r>
-          </a:p>
-          <a:p>
-            <a:r>
-              <a:t>2. Ten ING-styled pages, fr-BE or nl-BE: home, savings, term account, current account, youth, investing, mortgage, opening, why ING, contact.</a:t>
-            </a:r>
-          </a:p>
-          <a:p>
-            <a:r>
-              <a:t>3. Each section can name its own source. Explained mode shows which recommendation produced the section and why — auditable, not just persuasive.</a:t>
-            </a:r>
-          </a:p>
-          <a:p>
-            <a:r>
-              <a:t>SAY PLAINLY: an illustration — generated, never published, not a proposal for ING's site. Rates and amounts stay as [TAUX] and [MONTANT]: no figure appears that a compliance team has not supplied.</a:t>
-            </a:r>
-          </a:p>
-          <a:p>
-            <a:r>
-              <a:t>ORANGE LINE: this is what makes the analysis arguable — a stakeholder can look at the change instead of reading about it. Invite it: "which of these would you untick?"</a:t>
-            </a:r>
-          </a:p>
-          <a:p>
-            <a:r>
-              <a:t>TRANSITION: put together, the whole thing runs in one direction.</a:t>
-            </a:r>
-          </a:p>
-        </p:txBody>
-      </p:sp>
-      <p:sp>
-        <p:nvSpPr>
-          <p:cNvPr id="4" name="Slide Number Placeholder 3"/>
-          <p:cNvSpPr>
-            <a:spLocks noGrp="1"/>
-          </p:cNvSpPr>
-          <p:nvPr>
-            <p:ph type="sldNum" idx="5" sz="quarter"/>
-          </p:nvPr>
-        </p:nvSpPr>
-        <p:spPr/>
-      </p:sp>
-    </p:spTree>
-  </p:cSld>
-  <p:clrMapOvr>
-    <a:masterClrMapping/>
-  </p:clrMapOvr>
-</p:notes>
-</file>
-
-<file path=ppt/notesSlides/notesSlide15.xml><?xml version="1.0" encoding="utf-8"?>
-<p:notes xmlns:a="http://schemas.openxmlformats.org/drawingml/2006/main" xmlns:p="http://schemas.openxmlformats.org/presentationml/2006/main" xmlns:r="http://schemas.openxmlformats.org/officeDocument/2006/relationships">
-  <p:cSld>
-    <p:spTree>
-      <p:nvGrpSpPr>
-        <p:cNvPr id="1" name=""/>
-        <p:cNvGrpSpPr/>
-        <p:nvPr/>
-      </p:nvGrpSpPr>
-      <p:grpSpPr>
-        <a:xfrm>
-          <a:off x="0" y="0"/>
-          <a:ext cx="0" cy="0"/>
-          <a:chOff x="0" y="0"/>
-          <a:chExt cx="0" cy="0"/>
-        </a:xfrm>
-      </p:grpSpPr>
-      <p:sp>
-        <p:nvSpPr>
-          <p:cNvPr id="2" name="Slide Image Placeholder 1"/>
-          <p:cNvSpPr>
-            <a:spLocks noGrp="1"/>
-          </p:cNvSpPr>
-          <p:nvPr>
-            <p:ph type="sldImg" idx="2"/>
-          </p:nvPr>
-        </p:nvSpPr>
-        <p:spPr/>
-      </p:sp>
-      <p:sp>
-        <p:nvSpPr>
-          <p:cNvPr id="3" name="Notes Placeholder 2"/>
-          <p:cNvSpPr>
-            <a:spLocks noGrp="1"/>
-          </p:cNvSpPr>
-          <p:nvPr>
-            <p:ph type="body" idx="3" sz="quarter"/>
-          </p:nvPr>
-        </p:nvSpPr>
-        <p:spPr/>
-        <p:txBody>
-          <a:bodyPr/>
-          <a:lstStyle/>
-          <a:p>
-            <a:r>
-              <a:t>TOP ROW, stages 1–5 — the measurement half already walked: sources → capture (robots gate, pages rendered as a visitor sees them) → dataset with the human rubric scores → analysis → surfaces (report.json, the web UI). One arrow carries report.json down.</a:t>
-            </a:r>
-          </a:p>
-          <a:p>
-            <a:r>
-              <a:t>BOTTOM ROW, stages 6–8 — this section: recommendations (one model call, ordered list, each naming its features) → human selection (checkboxes; nothing proceeds unchosen) → generated site (ten pages, exactly the selected set, placeholders for every figure).</a:t>
-            </a:r>
-          </a:p>
-          <a:p>
-            <a:r>
-              <a:t>GREY BAND — read it as one sentence: the model sees only numbers the analysis produced; every recommendation names its features and is checked before it leaves the module; nothing is built that a human did not tick; news-theme items are context, never evidence; no performance data exists, so nothing here claims a cause.</a:t>
-            </a:r>
-          </a:p>
-          <a:p>
-            <a:r>
-              <a:t>WHY ONE DIRECTION MATTERS: every arrow is a script and can be re-run, so a correction made upstream flows all the way through. That is how the cta_count withdrawal propagated this week — once it was made in the analysis rather than patched into an output file.</a:t>
-            </a:r>
-          </a:p>
-          <a:p>
-            <a:r>
-              <a:t>NOTE: the diagram's "11 of 11 selected" and "11 ordered changes" predate the withdrawal — ten now.</a:t>
-            </a:r>
-          </a:p>
-          <a:p>
-            <a:r>
-              <a:t>TRANSITION to slide 18: that last guardrail — no performance data — is the limit of the whole project. Next slide.</a:t>
-            </a:r>
-          </a:p>
-        </p:txBody>
-      </p:sp>
-      <p:sp>
-        <p:nvSpPr>
-          <p:cNvPr id="4" name="Slide Number Placeholder 3"/>
-          <p:cNvSpPr>
-            <a:spLocks noGrp="1"/>
-          </p:cNvSpPr>
-          <p:nvPr>
-            <p:ph type="sldNum" idx="5" sz="quarter"/>
+            <p:ph type="sldNum" sz="quarter" idx="5"/>
           </p:nvPr>
         </p:nvSpPr>
         <p:spPr/>
@@ -1225,7 +643,7 @@
             <a:spLocks noGrp="1" noRot="1" noChangeAspect="1"/>
           </p:cNvSpPr>
           <p:nvPr>
-            <p:ph type="sldImg"/>
+            <p:ph type="sldImg" idx="2"/>
           </p:nvPr>
         </p:nvSpPr>
         <p:spPr/>
@@ -1237,7 +655,7 @@
             <a:spLocks noGrp="1"/>
           </p:cNvSpPr>
           <p:nvPr>
-            <p:ph type="body" idx="1"/>
+            <p:ph type="body" sz="quarter" idx="3"/>
           </p:nvPr>
         </p:nvSpPr>
         <p:spPr/>
@@ -1246,17 +664,52 @@
           <a:lstStyle/>
           <a:p>
             <a:r>
-              <a:rPr lang="en-US" dirty="0"/>
-              <a:t>What we built - 45 s.</a:t>
-            </a:r>
-          </a:p>
-          <a:p>
-            <a:r>
-              <a:rPr lang="en-US" dirty="0"/>
-              <a:t>"One pipeline, one frozen contract, no second definition of any number: 51 pages, 14 banks, 6 product families. Automatic extraction where a machine can measure it, a human rubric where it's genuinely a judgement call, one web UI tying the two together. 420 automated tests guard it."</a:t>
-            </a:r>
-          </a:p>
-        </p:txBody>
+              <a:t>FRAMING, say first: everything up to here measured. This is the one place in the project where a model is allowed to interpret; the next four slides are about how that is kept honest.</a:t>
+            </a:r>
+          </a:p>
+          <a:p>
+            <a:r>
+              <a:t>WHAT IT IS: one model call (DeepSeek, pinned version) over the finished analysis. It reads report.json — the same file the charts are drawn from. Nothing is re-scraped, nothing is re-scored.</a:t>
+            </a:r>
+          </a:p>
+          <a:p>
+            <a:r>
+              <a:t>WHAT COMES OUT: an ordered list of changes. Current run: ten — two high, six medium, two low. The order is the argument: what the measurement most supports acting on first. Ordered by priority, not by the model's confidence.</a:t>
+            </a:r>
+          </a:p>
+          <a:p>
+            <a:r>
+              <a:t>TWO CONTEXTS (checkboxes in the screenshot), both opt-in, both labelled on every card they touch: search interest for timing, news themes for reputation — three of the ten. Context can never stand as evidence that a page performed.</a:t>
+            </a:r>
+          </a:p>
+          <a:p>
+            <a:r>
+              <a:t>ORANGE BOX: it writes what to change; it never re-derives a number. One-way by design — if a figure is wrong the fix is upstream, and the next run carries it through.</a:t>
+            </a:r>
+          </a:p>
+          <a:p>
+            <a:r>
+              <a:t>NOTE: the panel screenshot and the counts printed on this slide predate the cta_count withdrawal of 23/09 (11 → 10). Say ten.</a:t>
+            </a:r>
+          </a:p>
+          <a:p>
+            <a:r>
+              <a:t>TRANSITION: here is what one of them looks like.</a:t>
+            </a:r>
+          </a:p>
+        </p:txBody>
+      </p:sp>
+      <p:sp>
+        <p:nvSpPr>
+          <p:cNvPr id="4" name="Slide Number Placeholder 3"/>
+          <p:cNvSpPr>
+            <a:spLocks noGrp="1"/>
+          </p:cNvSpPr>
+          <p:nvPr>
+            <p:ph type="sldNum" sz="quarter" idx="5"/>
+          </p:nvPr>
+        </p:nvSpPr>
+        <p:spPr/>
       </p:sp>
     </p:spTree>
   </p:cSld>
@@ -1290,7 +743,7 @@
             <a:spLocks noGrp="1" noRot="1" noChangeAspect="1"/>
           </p:cNvSpPr>
           <p:nvPr>
-            <p:ph type="sldImg"/>
+            <p:ph type="sldImg" idx="2"/>
           </p:nvPr>
         </p:nvSpPr>
         <p:spPr/>
@@ -1302,7 +755,7 @@
             <a:spLocks noGrp="1"/>
           </p:cNvSpPr>
           <p:nvPr>
-            <p:ph type="body" idx="1"/>
+            <p:ph type="body" sz="quarter" idx="3"/>
           </p:nvPr>
         </p:nvSpPr>
         <p:spPr/>
@@ -1311,17 +764,57 @@
           <a:lstStyle/>
           <a:p>
             <a:r>
-              <a:rPr lang="en-US" dirty="0"/>
-              <a:t>The pipeline - 30 s.</a:t>
-            </a:r>
-          </a:p>
-          <a:p>
-            <a:r>
-              <a:rPr lang="en-US" dirty="0"/>
-              <a:t>"Five stages: collect under a compliance gate, extract, derive, score, analyse. Every stage writes to the same frozen feature contract, so no number has a second definition anywhere in the chain."</a:t>
-            </a:r>
-          </a:p>
-        </p:txBody>
+              <a:t>WALK THE CARD (R1, top): title and priority · WHAT THE DATA SHOWS — the finding with its numbers: 4.0 urgency markers per page vs a peer mean of 0.64, about 3.7 SD · WHAT TO DO — the action · chips: the feature it was argued from (urgency_marker_count) and the pages it applies to.</a:t>
+            </a:r>
+          </a:p>
+          <a:p>
+            <a:r>
+              <a:t>THREE GUARDRAILS (right column):</a:t>
+            </a:r>
+          </a:p>
+          <a:p>
+            <a:r>
+              <a:t>1. Finding and action kept apart. Anyone can reject the action and keep the finding — nobody has to buy the advice to accept the measurement.</a:t>
+            </a:r>
+          </a:p>
+          <a:p>
+            <a:r>
+              <a:t>2. Named features, checked before release. Every feature id on a card is verified against the report; an id the model invented is dropped before the list is shown.</a:t>
+            </a:r>
+          </a:p>
+          <a:p>
+            <a:r>
+              <a:t>3. No figure the analysis did not produce. The prompt receives only numbers already in the report; the output is not trusted to add any.</a:t>
+            </a:r>
+          </a:p>
+          <a:p>
+            <a:r>
+              <a:t>ONE LINE: the model is a writer, not a source.</a:t>
+            </a:r>
+          </a:p>
+          <a:p>
+            <a:r>
+              <a:t>IF ASKED about R2 in the screenshot ("Repeat the primary call to action"): it rests on cta_count, withdrawn on 23/09 — ING's pack cards render client-side and never reached the captured HTML, so the count measured our capture, not the page. A recommendation dying with its feature is the mechanism working. The screenshot predates the withdrawal.</a:t>
+            </a:r>
+          </a:p>
+          <a:p>
+            <a:r>
+              <a:t>TRANSITION: so what did it conclude about ING?</a:t>
+            </a:r>
+          </a:p>
+        </p:txBody>
+      </p:sp>
+      <p:sp>
+        <p:nvSpPr>
+          <p:cNvPr id="4" name="Slide Number Placeholder 3"/>
+          <p:cNvSpPr>
+            <a:spLocks noGrp="1"/>
+          </p:cNvSpPr>
+          <p:nvPr>
+            <p:ph type="sldNum" sz="quarter" idx="5"/>
+          </p:nvPr>
+        </p:nvSpPr>
+        <p:spPr/>
       </p:sp>
     </p:spTree>
   </p:cSld>
@@ -1355,7 +848,7 @@
             <a:spLocks noGrp="1" noRot="1" noChangeAspect="1"/>
           </p:cNvSpPr>
           <p:nvPr>
-            <p:ph type="sldImg"/>
+            <p:ph type="sldImg" idx="2"/>
           </p:nvPr>
         </p:nvSpPr>
         <p:spPr/>
@@ -1367,7 +860,7 @@
             <a:spLocks noGrp="1"/>
           </p:cNvSpPr>
           <p:nvPr>
-            <p:ph type="body" idx="1"/>
+            <p:ph type="body" sz="quarter" idx="3"/>
           </p:nvPr>
         </p:nvSpPr>
         <p:spPr/>
@@ -1376,17 +869,57 @@
           <a:lstStyle/>
           <a:p>
             <a:r>
-              <a:rPr lang="en-US" dirty="0"/>
-              <a:t>Dataset - 1 min.</a:t>
-            </a:r>
-          </a:p>
-          <a:p>
-            <a:r>
-              <a:rPr lang="en-US" dirty="0"/>
-              <a:t>"The comparison you'll see runs on eighteen of the 51 pages scored - the current-account pages - because comparing a mortgage page to a current-account page would measure the product, not the communication. The other thirty-three are scored and in the dataset, ready for the same comparison on savings or mortgages whenever you want it. Mostly Belgian French, with English and Dutch."</a:t>
-            </a:r>
-          </a:p>
-        </p:txBody>
+              <a:t>THREE NUMBERS, all from the current-account comparison — 14 banks, 36 comparable features:</a:t>
+            </a:r>
+          </a:p>
+          <a:p>
+            <a:r>
+              <a:t>1. 4.0 urgency and deadline markers per page vs a peer mean of 0.64 — about 3.7 SD above, the largest gap in the set and ING's strongest measured signature.</a:t>
+            </a:r>
+          </a:p>
+          <a:p>
+            <a:r>
+              <a:t>2. Page height 11,149 px vs 6,412 — about 74% longer, so the offer sits further from the top (about 1.4 SD).</a:t>
+            </a:r>
+          </a:p>
+          <a:p>
+            <a:r>
+              <a:t>3. 0.67 'free' claims with their conditions elsewhere vs 0.23 — where a free or no-fee claim appears, the qualifying conditions are not next to it.</a:t>
+            </a:r>
+          </a:p>
+          <a:p>
+            <a:r>
+              <a:t>THE THREE IT RANKED HIGHEST: strip back urgency and deadline language · bring the offer higher up the page (the current run words it "shorten the pages and cut non-informative imagery" — same measure, page_height_px) · disclose the conditions of any free claim next to the claim.</a:t>
+            </a:r>
+          </a:p>
+          <a:p>
+            <a:r>
+              <a:t>THE SHAPE: two of the three are about removing things. ING's pages carry the densest persuasion in the set (3.7 levers per page vs 1.7). The advice is restraint, not more features.</a:t>
+            </a:r>
+          </a:p>
+          <a:p>
+            <a:r>
+              <a:t>CAVEAT — read it, do not skip it: design observations, not performance findings. Pages span product families and languages, judged features come from one rater, no click or conversion data — every item is a hypothesis ING could test.</a:t>
+            </a:r>
+          </a:p>
+          <a:p>
+            <a:r>
+              <a:t>TRANSITION: a list is easy to nod at and forget. So we built the thing.</a:t>
+            </a:r>
+          </a:p>
+        </p:txBody>
+      </p:sp>
+      <p:sp>
+        <p:nvSpPr>
+          <p:cNvPr id="4" name="Slide Number Placeholder 3"/>
+          <p:cNvSpPr>
+            <a:spLocks noGrp="1"/>
+          </p:cNvSpPr>
+          <p:nvPr>
+            <p:ph type="sldNum" sz="quarter" idx="5"/>
+          </p:nvPr>
+        </p:nvSpPr>
+        <p:spPr/>
       </p:sp>
     </p:spTree>
   </p:cSld>
@@ -1420,7 +953,7 @@
             <a:spLocks noGrp="1" noRot="1" noChangeAspect="1"/>
           </p:cNvSpPr>
           <p:nvPr>
-            <p:ph type="sldImg"/>
+            <p:ph type="sldImg" idx="2"/>
           </p:nvPr>
         </p:nvSpPr>
         <p:spPr/>
@@ -1432,7 +965,7 @@
             <a:spLocks noGrp="1"/>
           </p:cNvSpPr>
           <p:nvPr>
-            <p:ph type="body" idx="1"/>
+            <p:ph type="body" sz="quarter" idx="3"/>
           </p:nvPr>
         </p:nvSpPr>
         <p:spPr/>
@@ -1441,29 +974,57 @@
           <a:lstStyle/>
           <a:p>
             <a:r>
-              <a:rPr lang="en-US" dirty="0"/>
-              <a:t>Rubric scoring - 1 min 15.</a:t>
-            </a:r>
-          </a:p>
-          <a:p>
-            <a:r>
-              <a:rPr lang="en-US" dirty="0"/>
-              <a:t>"13 features are judgements, not measurements - clarity of the offer, layout, persuasion technique. Only one human judge for this pass, and I say so plainly rather than dressing a single opinion up as a consensus.</a:t>
-            </a:r>
-          </a:p>
-          <a:p>
-            <a:r>
-              <a:rPr lang="en-US" dirty="0"/>
-              <a:t>We also have a model sheet, written to its own file and never into a human one. But it is not a second opinion, because our pinned model reads text; it has no vision. And 12 of our 13 judged features are defined in the dictionary as judged from the screenshot. Only one - formality - can honestly be scored from text, and there the model lands within one point of the human seventy-three percent of the time. On the 12 visual ones, its answers are confident answers to a question the text cannot always settle: on value proposition clarity it ranked the pages close to the opposite of the human.</a:t>
-            </a:r>
-          </a:p>
-          <a:p>
-            <a:r>
-              <a:rPr lang="en-US" dirty="0"/>
-              <a:t>So we keep it as a reference and we do not average it in. That's the difference between using a model and trusting it."</a:t>
-            </a:r>
-          </a:p>
-        </p:txBody>
+              <a:t>ON SCREEN: top — the generated home page in ING styling (hero, two calls to action). Bottom — one section in explained mode: orange frame, and the (i) button that opens the rationale for that section.</a:t>
+            </a:r>
+          </a:p>
+          <a:p>
+            <a:r>
+              <a:t>THREE POINTS:</a:t>
+            </a:r>
+          </a:p>
+          <a:p>
+            <a:r>
+              <a:t>1. The team chooses what gets built. Every recommendation is a checkbox; nothing reaches the generator that a person did not tick.</a:t>
+            </a:r>
+          </a:p>
+          <a:p>
+            <a:r>
+              <a:t>2. Ten ING-styled pages, fr-BE or nl-BE: home, savings, term account, current account, youth, investing, mortgage, opening, why ING, contact.</a:t>
+            </a:r>
+          </a:p>
+          <a:p>
+            <a:r>
+              <a:t>3. Each section can name its own source. Explained mode shows which recommendation produced the section and why — auditable, not just persuasive.</a:t>
+            </a:r>
+          </a:p>
+          <a:p>
+            <a:r>
+              <a:t>SAY PLAINLY: an illustration — generated, never published, not a proposal for ING's site. Rates and amounts stay as [TAUX] and [MONTANT]: no figure appears that a compliance team has not supplied.</a:t>
+            </a:r>
+          </a:p>
+          <a:p>
+            <a:r>
+              <a:t>ORANGE LINE: this is what makes the analysis arguable — a stakeholder can look at the change instead of reading about it. Invite it: "which of these would you untick?"</a:t>
+            </a:r>
+          </a:p>
+          <a:p>
+            <a:r>
+              <a:t>TRANSITION: put together, the whole thing runs in one direction.</a:t>
+            </a:r>
+          </a:p>
+        </p:txBody>
+      </p:sp>
+      <p:sp>
+        <p:nvSpPr>
+          <p:cNvPr id="4" name="Slide Number Placeholder 3"/>
+          <p:cNvSpPr>
+            <a:spLocks noGrp="1"/>
+          </p:cNvSpPr>
+          <p:nvPr>
+            <p:ph type="sldNum" sz="quarter" idx="5"/>
+          </p:nvPr>
+        </p:nvSpPr>
+        <p:spPr/>
       </p:sp>
     </p:spTree>
   </p:cSld>
@@ -1497,7 +1058,7 @@
             <a:spLocks noGrp="1" noRot="1" noChangeAspect="1"/>
           </p:cNvSpPr>
           <p:nvPr>
-            <p:ph type="sldImg"/>
+            <p:ph type="sldImg" idx="2"/>
           </p:nvPr>
         </p:nvSpPr>
         <p:spPr/>
@@ -1509,7 +1070,7 @@
             <a:spLocks noGrp="1"/>
           </p:cNvSpPr>
           <p:nvPr>
-            <p:ph type="body" idx="1"/>
+            <p:ph type="body" sz="quarter" idx="3"/>
           </p:nvPr>
         </p:nvSpPr>
         <p:spPr/>
@@ -1518,272 +1079,47 @@
           <a:lstStyle/>
           <a:p>
             <a:r>
-              <a:rPr lang="en-US" dirty="0"/>
-              <a:t>Strategic Context - 1 min 30.</a:t>
-            </a:r>
-          </a:p>
-          <a:p>
-            <a:r>
-              <a:rPr lang="en-US" dirty="0"/>
-              <a:t>"Before the numbers, some context on how these banks actually compete. ING sits at the near intersection of traditional institutions and digital natives - the direct, feature-focused, mobile-first tone of a neobank, campaigns like 'Do Your Thing', with the regulatory authority and established brand of a Tier-1 retail bank.</a:t>
-            </a:r>
-          </a:p>
-          <a:p>
-            <a:r>
-              <a:rPr lang="en-US" dirty="0"/>
-              <a:t>And contrary to a common assumption: neobanks like Revolut aren't operating with fewer rules. Same European banking licences, same Belgian compliance checks. Their speed isn't regulatory shortcuts, it's architecture: modern systems, no branch network, faster decision loops.</a:t>
-            </a:r>
-          </a:p>
-          <a:p>
-            <a:r>
-              <a:rPr lang="en-US" dirty="0"/>
-              <a:t>That shows up in how each side makes money. Traditional banks have long used the basic current account as a loss leader to bring someone in and monetize later through mortgages, insurance, wealth management. Neobanks flip it: freemium tiers, free or paid subscriptions, FX and fee income, upfront.</a:t>
-            </a:r>
-          </a:p>
-          <a:p>
-            <a:r>
-              <a:rPr lang="en-US" dirty="0"/>
-              <a:t>And the targeting differs. Neobanks win volume at the top of the funnel - young adults, digital nomads, casual spenders. ING's budget concentrates on high lifetime-value segments: first-time investors, expats and high-net-worth individuals, first-time buyers. Professional and business banking is out of scope here - retail only."</a:t>
-            </a:r>
-          </a:p>
-        </p:txBody>
-      </p:sp>
-    </p:spTree>
-  </p:cSld>
-  <p:clrMapOvr>
-    <a:masterClrMapping/>
-  </p:clrMapOvr>
-</p:notes>
-</file>
-
-<file path=ppt/notesSlides/notesSlide7.xml><?xml version="1.0" encoding="utf-8"?>
-<p:notes xmlns:a="http://schemas.openxmlformats.org/drawingml/2006/main" xmlns:r="http://schemas.openxmlformats.org/officeDocument/2006/relationships" xmlns:p="http://schemas.openxmlformats.org/presentationml/2006/main">
-  <p:cSld>
-    <p:spTree>
-      <p:nvGrpSpPr>
-        <p:cNvPr id="1" name=""/>
-        <p:cNvGrpSpPr/>
-        <p:nvPr/>
-      </p:nvGrpSpPr>
-      <p:grpSpPr>
-        <a:xfrm>
-          <a:off x="0" y="0"/>
-          <a:ext cx="0" cy="0"/>
-          <a:chOff x="0" y="0"/>
-          <a:chExt cx="0" cy="0"/>
-        </a:xfrm>
-      </p:grpSpPr>
-      <p:sp>
-        <p:nvSpPr>
-          <p:cNvPr id="2" name="Slide Image Placeholder 1"/>
-          <p:cNvSpPr>
-            <a:spLocks noGrp="1" noRot="1" noChangeAspect="1"/>
-          </p:cNvSpPr>
-          <p:nvPr>
-            <p:ph type="sldImg"/>
-          </p:nvPr>
-        </p:nvSpPr>
-        <p:spPr/>
-      </p:sp>
-      <p:sp>
-        <p:nvSpPr>
-          <p:cNvPr id="3" name="Notes Placeholder 2"/>
+              <a:t>TOP ROW, stages 1–5 — the measurement half already walked: sources → capture (robots gate, pages rendered as a visitor sees them) → dataset with the human rubric scores → analysis → surfaces (report.json, the web UI). One arrow carries report.json down.</a:t>
+            </a:r>
+          </a:p>
+          <a:p>
+            <a:r>
+              <a:t>BOTTOM ROW, stages 6–8 — this section: recommendations (one model call, ordered list, each naming its features) → human selection (checkboxes; nothing proceeds unchosen) → generated site (ten pages, exactly the selected set, placeholders for every figure).</a:t>
+            </a:r>
+          </a:p>
+          <a:p>
+            <a:r>
+              <a:t>GREY BAND — read it as one sentence: the model sees only numbers the analysis produced; every recommendation names its features and is checked before it leaves the module; nothing is built that a human did not tick; news-theme items are context, never evidence; no performance data exists, so nothing here claims a cause.</a:t>
+            </a:r>
+          </a:p>
+          <a:p>
+            <a:r>
+              <a:t>WHY ONE DIRECTION MATTERS: every arrow is a script and can be re-run, so a correction made upstream flows all the way through. That is how the cta_count withdrawal propagated this week — once it was made in the analysis rather than patched into an output file.</a:t>
+            </a:r>
+          </a:p>
+          <a:p>
+            <a:r>
+              <a:t>NOTE: the diagram's "11 of 11 selected" and "11 ordered changes" predate the withdrawal — ten now.</a:t>
+            </a:r>
+          </a:p>
+          <a:p>
+            <a:r>
+              <a:t>TRANSITION to slide 18: that last guardrail — no performance data — is the limit of the whole project. Next slide.</a:t>
+            </a:r>
+          </a:p>
+        </p:txBody>
+      </p:sp>
+      <p:sp>
+        <p:nvSpPr>
+          <p:cNvPr id="4" name="Slide Number Placeholder 3"/>
           <p:cNvSpPr>
             <a:spLocks noGrp="1"/>
           </p:cNvSpPr>
           <p:nvPr>
-            <p:ph type="body" idx="1"/>
+            <p:ph type="sldNum" sz="quarter" idx="5"/>
           </p:nvPr>
         </p:nvSpPr>
         <p:spPr/>
-        <p:txBody>
-          <a:bodyPr/>
-          <a:lstStyle/>
-          <a:p>
-            <a:r>
-              <a:rPr lang="en-US" dirty="0"/>
-              <a:t>What the analysis found - 1 min 30.</a:t>
-            </a:r>
-          </a:p>
-          <a:p>
-            <a:r>
-              <a:rPr lang="en-US" dirty="0"/>
-              <a:t>"On current-account packs: 18 pages, 14 banks.</a:t>
-            </a:r>
-          </a:p>
-          <a:p>
-            <a:r>
-              <a:rPr lang="en-US" dirty="0"/>
-              <a:t>ING sits clearly with the traditional banks - positioning score 0.28, nearest neighbour Belfius.</a:t>
-            </a:r>
-          </a:p>
-          <a:p>
-            <a:r>
-              <a:rPr lang="en-US" dirty="0"/>
-              <a:t>Its largest gap, above every other bank in the set: deadline language. Four dated deadlines per page against a peer average of 0.6. ING is the only bank in this dataset whose captured pages carry an expiry date at all - every date on a competitor page is an effective-from date or a cookie-policy timestamp.</a:t>
-            </a:r>
-          </a:p>
-          <a:p>
-            <a:r>
-              <a:rPr lang="en-US" dirty="0"/>
-              <a:t>Then persuasion technique density, 3.7 against 1.7. Clarity of the value proposition, 5.0 against 3.7. A fast-digital-onboarding claim four times more frequent than peers. Pages roughly twice as long, 11,000 pixels against 6,400.</a:t>
-            </a:r>
-          </a:p>
-          <a:p>
-            <a:r>
-              <a:rPr lang="en-US" dirty="0"/>
-              <a:t>One place we're deliberately not giving you a number: calls to action. ING's pack cards load client-side and aren't in our captured HTML, so any count would measure our capture, not the page. We'd rather withhold it than report it."</a:t>
-            </a:r>
-          </a:p>
-          <a:p>
-            <a:r>
-              <a:rPr lang="en-US" dirty="0"/>
-              <a:t>CROSS-SELL, spoken, 30 s: "One human observation, labelled as such because our features don't capture it: ING pushes cross-sell noticeably harder - insurance grids, simulators on almost every page, Amazon Prime and cashback in the pack. What we can't measure yet is intensity. That's a feature worth adding, not a claim I'll make from a number today."</a:t>
-            </a:r>
-          </a:p>
-          <a:p>
-            <a:r>
-              <a:rPr lang="en-US" dirty="0"/>
-              <a:t>Then: Dan takes slides 9-12, trends, about 2 min. Stephane takes 13-17, recommendations and site, about 2 min 30.</a:t>
-            </a:r>
-          </a:p>
-          <a:p>
-            <a:r>
-              <a:rPr lang="en-US" dirty="0"/>
-              <a:t>CALLS TO ACTION, spoken, not on the slide: ING is 11th of 14 on the counted figure, 1.0 against a peer mean of 5.0 - but we do not publish that ranking, because no rule reproduces a human count on every bank. What the page itself shows is the point: ING's pack page carries nine clickable things and exactly one that opens an account, Se lancer, on a page eleven thousand pixels long. Plenty to click, almost nothing that converts.</a:t>
-            </a:r>
-          </a:p>
-        </p:txBody>
-      </p:sp>
-    </p:spTree>
-  </p:cSld>
-  <p:clrMapOvr>
-    <a:masterClrMapping/>
-  </p:clrMapOvr>
-</p:notes>
-</file>
-
-<file path=ppt/notesSlides/notesSlide8.xml><?xml version="1.0" encoding="utf-8"?>
-<p:notes xmlns:a="http://schemas.openxmlformats.org/drawingml/2006/main" xmlns:r="http://schemas.openxmlformats.org/officeDocument/2006/relationships" xmlns:p="http://schemas.openxmlformats.org/presentationml/2006/main">
-  <p:cSld>
-    <p:spTree>
-      <p:nvGrpSpPr>
-        <p:cNvPr id="1" name=""/>
-        <p:cNvGrpSpPr/>
-        <p:nvPr/>
-      </p:nvGrpSpPr>
-      <p:grpSpPr>
-        <a:xfrm>
-          <a:off x="0" y="0"/>
-          <a:ext cx="0" cy="0"/>
-          <a:chOff x="0" y="0"/>
-          <a:chExt cx="0" cy="0"/>
-        </a:xfrm>
-      </p:grpSpPr>
-      <p:sp>
-        <p:nvSpPr>
-          <p:cNvPr id="2" name="Slide Image Placeholder 1"/>
-          <p:cNvSpPr>
-            <a:spLocks noGrp="1" noRot="1" noChangeAspect="1"/>
-          </p:cNvSpPr>
-          <p:nvPr>
-            <p:ph type="sldImg"/>
-          </p:nvPr>
-        </p:nvSpPr>
-        <p:spPr/>
-      </p:sp>
-      <p:sp>
-        <p:nvSpPr>
-          <p:cNvPr id="3" name="Notes Placeholder 2"/>
-          <p:cNvSpPr>
-            <a:spLocks noGrp="1"/>
-          </p:cNvSpPr>
-          <p:nvPr>
-            <p:ph type="body" idx="1"/>
-          </p:nvPr>
-        </p:nvSpPr>
-        <p:spPr/>
-        <p:txBody>
-          <a:bodyPr/>
-          <a:lstStyle/>
-          <a:p>
-            <a:r>
-              <a:rPr lang="en-US" dirty="0"/>
-              <a:t>Limitations - 30 s.</a:t>
-            </a:r>
-          </a:p>
-          <a:p>
-            <a:r>
-              <a:rPr lang="en-US" dirty="0"/>
-              <a:t>"Because we have no performance data, everything you've heard stays a hypothesis, not a verdict. That's the honest limit of this exercise, not a hedge."</a:t>
-            </a:r>
-          </a:p>
-        </p:txBody>
-      </p:sp>
-    </p:spTree>
-  </p:cSld>
-  <p:clrMapOvr>
-    <a:masterClrMapping/>
-  </p:clrMapOvr>
-</p:notes>
-</file>
-
-<file path=ppt/notesSlides/notesSlide9.xml><?xml version="1.0" encoding="utf-8"?>
-<p:notes xmlns:a="http://schemas.openxmlformats.org/drawingml/2006/main" xmlns:r="http://schemas.openxmlformats.org/officeDocument/2006/relationships" xmlns:p="http://schemas.openxmlformats.org/presentationml/2006/main">
-  <p:cSld>
-    <p:spTree>
-      <p:nvGrpSpPr>
-        <p:cNvPr id="1" name=""/>
-        <p:cNvGrpSpPr/>
-        <p:nvPr/>
-      </p:nvGrpSpPr>
-      <p:grpSpPr>
-        <a:xfrm>
-          <a:off x="0" y="0"/>
-          <a:ext cx="0" cy="0"/>
-          <a:chOff x="0" y="0"/>
-          <a:chExt cx="0" cy="0"/>
-        </a:xfrm>
-      </p:grpSpPr>
-      <p:sp>
-        <p:nvSpPr>
-          <p:cNvPr id="2" name="Slide Image Placeholder 1"/>
-          <p:cNvSpPr>
-            <a:spLocks noGrp="1" noRot="1" noChangeAspect="1"/>
-          </p:cNvSpPr>
-          <p:nvPr>
-            <p:ph type="sldImg"/>
-          </p:nvPr>
-        </p:nvSpPr>
-        <p:spPr/>
-      </p:sp>
-      <p:sp>
-        <p:nvSpPr>
-          <p:cNvPr id="3" name="Notes Placeholder 2"/>
-          <p:cNvSpPr>
-            <a:spLocks noGrp="1"/>
-          </p:cNvSpPr>
-          <p:nvPr>
-            <p:ph type="body" idx="1"/>
-          </p:nvPr>
-        </p:nvSpPr>
-        <p:spPr/>
-        <p:txBody>
-          <a:bodyPr/>
-          <a:lstStyle/>
-          <a:p>
-            <a:r>
-              <a:rPr lang="en-US" dirty="0"/>
-              <a:t>Cloture - 45 s.</a:t>
-            </a:r>
-          </a:p>
-          <a:p>
-            <a:r>
-              <a:rPr lang="en-US" dirty="0"/>
-              <a:t>"What we built over two weeks isn't a set of creative opinions, it's a repeatable measurement engine. It gives ING a clear, data-backed view of where its pages stand against 13 competitors - the strongest urgency and persuasion density in the market, a clear lead in value-proposition clarity, visible strength in cross-sell and free simulators. And because we have no conversion data, we don't claim absolute verdicts - every finding is transparent, testable, ready for ING to validate. Measure one way. Label the trust. Claim only what the data supports."</a:t>
-            </a:r>
-          </a:p>
-        </p:txBody>
       </p:sp>
     </p:spTree>
   </p:cSld>
@@ -1972,7 +1308,7 @@
           <a:p>
             <a:fld id="{5BCAD085-E8A6-8845-BD4E-CB4CCA059FC4}" type="datetimeFigureOut">
               <a:rPr lang="en-US" smtClean="0"/>
-              <a:t>9/24/2026</a:t>
+              <a:t>9/24/26</a:t>
             </a:fld>
             <a:endParaRPr lang="en-US"/>
           </a:p>
@@ -2140,7 +1476,7 @@
           <a:p>
             <a:fld id="{5BCAD085-E8A6-8845-BD4E-CB4CCA059FC4}" type="datetimeFigureOut">
               <a:rPr lang="en-US" smtClean="0"/>
-              <a:t>9/24/2026</a:t>
+              <a:t>9/24/26</a:t>
             </a:fld>
             <a:endParaRPr lang="en-US"/>
           </a:p>
@@ -2318,7 +1654,7 @@
           <a:p>
             <a:fld id="{5BCAD085-E8A6-8845-BD4E-CB4CCA059FC4}" type="datetimeFigureOut">
               <a:rPr lang="en-US" smtClean="0"/>
-              <a:t>9/24/2026</a:t>
+              <a:t>9/24/26</a:t>
             </a:fld>
             <a:endParaRPr lang="en-US"/>
           </a:p>
@@ -2516,7 +1852,7 @@
           <a:p>
             <a:fld id="{5BCAD085-E8A6-8845-BD4E-CB4CCA059FC4}" type="datetimeFigureOut">
               <a:rPr lang="en-US" smtClean="0"/>
-              <a:t>9/24/2026</a:t>
+              <a:t>9/24/26</a:t>
             </a:fld>
             <a:endParaRPr lang="en-US"/>
           </a:p>
@@ -2761,7 +2097,7 @@
           <a:p>
             <a:fld id="{5BCAD085-E8A6-8845-BD4E-CB4CCA059FC4}" type="datetimeFigureOut">
               <a:rPr lang="en-US" smtClean="0"/>
-              <a:t>9/24/2026</a:t>
+              <a:t>9/24/26</a:t>
             </a:fld>
             <a:endParaRPr lang="en-US"/>
           </a:p>
@@ -3046,7 +2382,7 @@
           <a:p>
             <a:fld id="{5BCAD085-E8A6-8845-BD4E-CB4CCA059FC4}" type="datetimeFigureOut">
               <a:rPr lang="en-US" smtClean="0"/>
-              <a:t>9/24/2026</a:t>
+              <a:t>9/24/26</a:t>
             </a:fld>
             <a:endParaRPr lang="en-US"/>
           </a:p>
@@ -3465,7 +2801,7 @@
           <a:p>
             <a:fld id="{5BCAD085-E8A6-8845-BD4E-CB4CCA059FC4}" type="datetimeFigureOut">
               <a:rPr lang="en-US" smtClean="0"/>
-              <a:t>9/24/2026</a:t>
+              <a:t>9/24/26</a:t>
             </a:fld>
             <a:endParaRPr lang="en-US"/>
           </a:p>
@@ -3582,7 +2918,7 @@
           <a:p>
             <a:fld id="{5BCAD085-E8A6-8845-BD4E-CB4CCA059FC4}" type="datetimeFigureOut">
               <a:rPr lang="en-US" smtClean="0"/>
-              <a:t>9/24/2026</a:t>
+              <a:t>9/24/26</a:t>
             </a:fld>
             <a:endParaRPr lang="en-US"/>
           </a:p>
@@ -3677,7 +3013,7 @@
           <a:p>
             <a:fld id="{5BCAD085-E8A6-8845-BD4E-CB4CCA059FC4}" type="datetimeFigureOut">
               <a:rPr lang="en-US" smtClean="0"/>
-              <a:t>9/24/2026</a:t>
+              <a:t>9/24/26</a:t>
             </a:fld>
             <a:endParaRPr lang="en-US"/>
           </a:p>
@@ -3952,7 +3288,7 @@
           <a:p>
             <a:fld id="{5BCAD085-E8A6-8845-BD4E-CB4CCA059FC4}" type="datetimeFigureOut">
               <a:rPr lang="en-US" smtClean="0"/>
-              <a:t>9/24/2026</a:t>
+              <a:t>9/24/26</a:t>
             </a:fld>
             <a:endParaRPr lang="en-US"/>
           </a:p>
@@ -4204,7 +3540,7 @@
           <a:p>
             <a:fld id="{5BCAD085-E8A6-8845-BD4E-CB4CCA059FC4}" type="datetimeFigureOut">
               <a:rPr lang="en-US" smtClean="0"/>
-              <a:t>9/24/2026</a:t>
+              <a:t>9/24/26</a:t>
             </a:fld>
             <a:endParaRPr lang="en-US"/>
           </a:p>
@@ -4415,7 +3751,7 @@
           <a:p>
             <a:fld id="{5BCAD085-E8A6-8845-BD4E-CB4CCA059FC4}" type="datetimeFigureOut">
               <a:rPr lang="en-US" smtClean="0"/>
-              <a:t>9/24/2026</a:t>
+              <a:t>9/24/26</a:t>
             </a:fld>
             <a:endParaRPr lang="en-US"/>
           </a:p>
@@ -9248,7 +8584,7 @@
       </p:sp>
       <p:sp>
         <p:nvSpPr>
-          <p:cNvPr id="19" name="TextBox"/>
+          <p:cNvPr id="13" name="TextBox"/>
           <p:cNvSpPr txBox="1"/>
           <p:nvPr/>
         </p:nvSpPr>
@@ -9283,14 +8619,14 @@
                 </a:solidFill>
                 <a:latin typeface="Helvetica Neue"/>
               </a:rPr>
-              <a:t>Animated elements</a:t>
-            </a:r>
-          </a:p>
-        </p:txBody>
-      </p:sp>
-      <p:sp>
-        <p:nvSpPr>
-          <p:cNvPr id="20" name="Rect"/>
+              <a:t>Call-to-action contrast</a:t>
+            </a:r>
+          </a:p>
+        </p:txBody>
+      </p:sp>
+      <p:sp>
+        <p:nvSpPr>
+          <p:cNvPr id="14" name="Rect"/>
           <p:cNvSpPr/>
           <p:nvPr/>
         </p:nvSpPr>
@@ -9319,7 +8655,7 @@
       </p:sp>
       <p:sp>
         <p:nvSpPr>
-          <p:cNvPr id="21" name="Rect"/>
+          <p:cNvPr id="15" name="Rect"/>
           <p:cNvSpPr/>
           <p:nvPr/>
         </p:nvSpPr>
@@ -9348,13 +8684,13 @@
       </p:sp>
       <p:sp>
         <p:nvSpPr>
-          <p:cNvPr id="22" name="Oval"/>
+          <p:cNvPr id="16" name="Oval"/>
           <p:cNvSpPr/>
           <p:nvPr/>
         </p:nvSpPr>
         <p:spPr>
           <a:xfrm>
-            <a:off x="4140200" y="2415501"/>
+            <a:off x="4425950" y="2415501"/>
             <a:ext cx="177800" cy="177800"/>
           </a:xfrm>
           <a:prstGeom prst="ellipse">
@@ -9377,13 +8713,13 @@
       </p:sp>
       <p:sp>
         <p:nvSpPr>
-          <p:cNvPr id="23" name="Oval"/>
+          <p:cNvPr id="17" name="Oval"/>
           <p:cNvSpPr/>
           <p:nvPr/>
         </p:nvSpPr>
         <p:spPr>
           <a:xfrm>
-            <a:off x="6064250" y="2415501"/>
+            <a:off x="6451600" y="2415501"/>
             <a:ext cx="177800" cy="177800"/>
           </a:xfrm>
           <a:prstGeom prst="ellipse">
@@ -9406,13 +8742,222 @@
       </p:sp>
       <p:sp>
         <p:nvSpPr>
+          <p:cNvPr id="18" name="TextBox"/>
+          <p:cNvSpPr txBox="1"/>
+          <p:nvPr/>
+        </p:nvSpPr>
+        <p:spPr>
+          <a:xfrm>
+            <a:off x="8686800" y="2397741"/>
+            <a:ext cx="1500000" cy="238720"/>
+          </a:xfrm>
+          <a:prstGeom prst="rect">
+            <a:avLst/>
+          </a:prstGeom>
+          <a:noFill/>
+        </p:spPr>
+        <p:txBody>
+          <a:bodyPr wrap="none">
+            <a:spAutoFit/>
+          </a:bodyPr>
+          <a:lstStyle/>
+          <a:p>
+            <a:pPr algn="l">
+              <a:lnSpc>
+                <a:spcPct val="105000"/>
+              </a:lnSpc>
+              <a:spcAft>
+                <a:spcPts val="0"/>
+              </a:spcAft>
+            </a:pPr>
+            <a:r>
+              <a:rPr sz="1200" b="0">
+                <a:solidFill>
+                  <a:srgbClr val="14141C"/>
+                </a:solidFill>
+                <a:latin typeface="Helvetica Neue"/>
+              </a:rPr>
+              <a:t>+1.13 vs </a:t>
+            </a:r>
+            <a:r>
+              <a:rPr sz="1200" b="0">
+                <a:solidFill>
+                  <a:srgbClr val="FF6200"/>
+                </a:solidFill>
+                <a:latin typeface="Helvetica Neue"/>
+              </a:rPr>
+              <a:t>−0.34</a:t>
+            </a:r>
+          </a:p>
+        </p:txBody>
+      </p:sp>
+      <p:sp>
+        <p:nvSpPr>
+          <p:cNvPr id="19" name="TextBox"/>
+          <p:cNvSpPr txBox="1"/>
+          <p:nvPr/>
+        </p:nvSpPr>
+        <p:spPr>
+          <a:xfrm>
+            <a:off x="685800" y="2913380"/>
+            <a:ext cx="2747010" cy="274241"/>
+          </a:xfrm>
+          <a:prstGeom prst="rect">
+            <a:avLst/>
+          </a:prstGeom>
+          <a:noFill/>
+        </p:spPr>
+        <p:txBody>
+          <a:bodyPr wrap="square">
+            <a:spAutoFit/>
+          </a:bodyPr>
+          <a:lstStyle/>
+          <a:p>
+            <a:pPr algn="l">
+              <a:lnSpc>
+                <a:spcPct val="105000"/>
+              </a:lnSpc>
+              <a:spcAft>
+                <a:spcPts val="0"/>
+              </a:spcAft>
+            </a:pPr>
+            <a:r>
+              <a:rPr sz="1400" b="1">
+                <a:solidFill>
+                  <a:srgbClr val="14141C"/>
+                </a:solidFill>
+                <a:latin typeface="Helvetica Neue"/>
+              </a:rPr>
+              <a:t>Animated elements</a:t>
+            </a:r>
+          </a:p>
+        </p:txBody>
+      </p:sp>
+      <p:sp>
+        <p:nvSpPr>
+          <p:cNvPr id="20" name="Rect"/>
+          <p:cNvSpPr/>
+          <p:nvPr/>
+        </p:nvSpPr>
+        <p:spPr>
+          <a:xfrm>
+            <a:off x="3606800" y="3031451"/>
+            <a:ext cx="4826000" cy="12700"/>
+          </a:xfrm>
+          <a:prstGeom prst="rect">
+            <a:avLst/>
+          </a:prstGeom>
+          <a:solidFill>
+            <a:srgbClr val="D8D8E0"/>
+          </a:solidFill>
+          <a:ln>
+            <a:noFill/>
+          </a:ln>
+        </p:spPr>
+        <p:txBody>
+          <a:bodyPr/>
+          <a:lstStyle/>
+          <a:p>
+            <a:endParaRPr/>
+          </a:p>
+        </p:txBody>
+      </p:sp>
+      <p:sp>
+        <p:nvSpPr>
+          <p:cNvPr id="21" name="Rect"/>
+          <p:cNvSpPr/>
+          <p:nvPr/>
+        </p:nvSpPr>
+        <p:spPr>
+          <a:xfrm>
+            <a:off x="4978400" y="2910801"/>
+            <a:ext cx="12700" cy="254000"/>
+          </a:xfrm>
+          <a:prstGeom prst="rect">
+            <a:avLst/>
+          </a:prstGeom>
+          <a:solidFill>
+            <a:srgbClr val="A8A8B8"/>
+          </a:solidFill>
+          <a:ln>
+            <a:noFill/>
+          </a:ln>
+        </p:spPr>
+        <p:txBody>
+          <a:bodyPr/>
+          <a:lstStyle/>
+          <a:p>
+            <a:endParaRPr/>
+          </a:p>
+        </p:txBody>
+      </p:sp>
+      <p:sp>
+        <p:nvSpPr>
+          <p:cNvPr id="22" name="Oval"/>
+          <p:cNvSpPr/>
+          <p:nvPr/>
+        </p:nvSpPr>
+        <p:spPr>
+          <a:xfrm>
+            <a:off x="4140200" y="2948901"/>
+            <a:ext cx="177800" cy="177800"/>
+          </a:xfrm>
+          <a:prstGeom prst="ellipse">
+            <a:avLst/>
+          </a:prstGeom>
+          <a:solidFill>
+            <a:srgbClr val="FF6200"/>
+          </a:solidFill>
+          <a:ln>
+            <a:noFill/>
+          </a:ln>
+        </p:spPr>
+        <p:txBody>
+          <a:bodyPr/>
+          <a:lstStyle/>
+          <a:p>
+            <a:endParaRPr/>
+          </a:p>
+        </p:txBody>
+      </p:sp>
+      <p:sp>
+        <p:nvSpPr>
+          <p:cNvPr id="23" name="Oval"/>
+          <p:cNvSpPr/>
+          <p:nvPr/>
+        </p:nvSpPr>
+        <p:spPr>
+          <a:xfrm>
+            <a:off x="6064250" y="2948901"/>
+            <a:ext cx="177800" cy="177800"/>
+          </a:xfrm>
+          <a:prstGeom prst="ellipse">
+            <a:avLst/>
+          </a:prstGeom>
+          <a:solidFill>
+            <a:srgbClr val="14141C"/>
+          </a:solidFill>
+          <a:ln>
+            <a:noFill/>
+          </a:ln>
+        </p:spPr>
+        <p:txBody>
+          <a:bodyPr/>
+          <a:lstStyle/>
+          <a:p>
+            <a:endParaRPr/>
+          </a:p>
+        </p:txBody>
+      </p:sp>
+      <p:sp>
+        <p:nvSpPr>
           <p:cNvPr id="24" name="TextBox"/>
           <p:cNvSpPr txBox="1"/>
           <p:nvPr/>
         </p:nvSpPr>
         <p:spPr>
           <a:xfrm>
-            <a:off x="8686800" y="2397741"/>
+            <a:off x="8686800" y="2931141"/>
             <a:ext cx="1500000" cy="238720"/>
           </a:xfrm>
           <a:prstGeom prst="rect">
@@ -9997,7 +9542,7 @@
         <p:spPr>
           <a:xfrm>
             <a:off x="5529858" y="2021801"/>
-            <a:ext cx="3248382" cy="272832"/>
+            <a:ext cx="1883664" cy="238720"/>
           </a:xfrm>
           <a:prstGeom prst="rect">
             <a:avLst/>
@@ -10648,6 +10193,13 @@
             <a:prstDash val="solid"/>
           </a:ln>
         </p:spPr>
+        <p:txBody>
+          <a:bodyPr/>
+          <a:lstStyle/>
+          <a:p>
+            <a:endParaRPr lang="en-US"/>
+          </a:p>
+        </p:txBody>
       </p:sp>
       <p:sp>
         <p:nvSpPr>
@@ -10751,73 +10303,17 @@
             <a:prstDash val="solid"/>
           </a:ln>
         </p:spPr>
+        <p:txBody>
+          <a:bodyPr/>
+          <a:lstStyle/>
+          <a:p>
+            <a:endParaRPr lang="en-US"/>
+          </a:p>
+        </p:txBody>
       </p:sp>
       <p:pic>
         <p:nvPicPr>
           <p:cNvPr id="7" name="Image 0" descr="/Users/nstephane/Dev/AI_Data_Science_training/ing-usecase/docs/deck_assets/rec_controls.png"/>
-          <p:cNvPicPr>
-            <a:picLocks noChangeAspect="1"/>
-          </p:cNvPicPr>
-          <p:nvPr/>
-        </p:nvPicPr>
-        <p:blipFill>
-          <a:blip r:embed="rId2"/>
-          <a:stretch>
-            <a:fillRect/>
-          </a:stretch>
-        </p:blipFill>
-        <p:spPr>
-          <a:xfrm>
-            <a:off x="6144768" y="1426464"/>
-            <a:ext cx="5486400" cy="2770632"/>
-          </a:xfrm>
-          <a:prstGeom prst="rect">
-            <a:avLst/>
-          </a:prstGeom>
-        </p:spPr>
-      </p:pic>
-      <p:sp>
-        <p:nvSpPr>
-          <p:cNvPr id="8" name="Text 5"/>
-          <p:cNvSpPr txBox="1"/>
-          <p:nvPr/>
-        </p:nvSpPr>
-        <p:spPr>
-          <a:xfrm>
-            <a:off x="6144768" y="4297680"/>
-            <a:ext cx="5486400" cy="292608"/>
-          </a:xfrm>
-          <a:prstGeom prst="rect">
-            <a:avLst/>
-          </a:prstGeom>
-          <a:noFill/>
-          <a:ln/>
-        </p:spPr>
-        <p:txBody>
-          <a:bodyPr wrap="square" lIns="0" tIns="0" rIns="0" bIns="0" rtlCol="0" anchor="ctr"/>
-          <a:lstStyle/>
-          <a:p>
-            <a:pPr marL="0" indent="0">
-              <a:buNone/>
-            </a:pPr>
-            <a:r>
-              <a:rPr lang="en-US" sz="1050" i="1" dirty="0">
-                <a:solidFill>
-                  <a:srgbClr val="585868"/>
-                </a:solidFill>
-                <a:latin typeface="Helvetica Neue" pitchFamily="34" charset="0"/>
-                <a:ea typeface="Helvetica Neue" pitchFamily="34" charset="-122"/>
-                <a:cs typeface="Helvetica Neue" pitchFamily="34" charset="-120"/>
-              </a:rPr>
-              <a:t>The panel as the team sees it: one button, two opt-in contexts, and the run it produced.</a:t>
-            </a:r>
-            <a:endParaRPr lang="en-US" sz="1050" dirty="0"/>
-          </a:p>
-        </p:txBody>
-      </p:sp>
-      <p:pic>
-        <p:nvPicPr>
-          <p:cNvPr id="9" name="Image 1" descr="/Users/nstephane/Dev/AI_Data_Science_training/ing-usecase/docs/deck_assets/icons/target.png"/>
           <p:cNvPicPr>
             <a:picLocks noChangeAspect="1"/>
           </p:cNvPicPr>
@@ -10831,8 +10327,8 @@
         </p:blipFill>
         <p:spPr>
           <a:xfrm>
-            <a:off x="621792" y="1609344"/>
-            <a:ext cx="420624" cy="420624"/>
+            <a:off x="6144768" y="1426464"/>
+            <a:ext cx="5486400" cy="2770632"/>
           </a:xfrm>
           <a:prstGeom prst="rect">
             <a:avLst/>
@@ -10841,14 +10337,14 @@
       </p:pic>
       <p:sp>
         <p:nvSpPr>
-          <p:cNvPr id="10" name="Text 6"/>
+          <p:cNvPr id="8" name="Text 5"/>
           <p:cNvSpPr txBox="1"/>
           <p:nvPr/>
         </p:nvSpPr>
         <p:spPr>
           <a:xfrm>
-            <a:off x="1188720" y="1591056"/>
-            <a:ext cx="4782312" cy="274320"/>
+            <a:off x="6144768" y="4297680"/>
+            <a:ext cx="5486400" cy="292608"/>
           </a:xfrm>
           <a:prstGeom prst="rect">
             <a:avLst/>
@@ -10864,65 +10360,23 @@
               <a:buNone/>
             </a:pPr>
             <a:r>
-              <a:rPr lang="en-US" sz="1350" b="1" dirty="0">
-                <a:solidFill>
-                  <a:srgbClr val="14141C"/>
+              <a:rPr lang="en-US" sz="1050" i="1" dirty="0">
+                <a:solidFill>
+                  <a:srgbClr val="585868"/>
                 </a:solidFill>
                 <a:latin typeface="Helvetica Neue" pitchFamily="34" charset="0"/>
                 <a:ea typeface="Helvetica Neue" pitchFamily="34" charset="-122"/>
                 <a:cs typeface="Helvetica Neue" pitchFamily="34" charset="-120"/>
               </a:rPr>
-              <a:t>One model call over the finished analysis</a:t>
-            </a:r>
-            <a:endParaRPr lang="en-US" sz="1350" dirty="0"/>
-          </a:p>
-        </p:txBody>
-      </p:sp>
-      <p:sp>
-        <p:nvSpPr>
-          <p:cNvPr id="11" name="Text 7"/>
-          <p:cNvSpPr txBox="1"/>
-          <p:nvPr/>
-        </p:nvSpPr>
-        <p:spPr>
-          <a:xfrm>
-            <a:off x="1188720" y="1883664"/>
-            <a:ext cx="4782312" cy="713232"/>
-          </a:xfrm>
-          <a:prstGeom prst="rect">
-            <a:avLst/>
-          </a:prstGeom>
-          <a:noFill/>
-          <a:ln/>
-        </p:spPr>
-        <p:txBody>
-          <a:bodyPr wrap="square" lIns="0" tIns="0" rIns="0" bIns="0" rtlCol="0" anchor="ctr"/>
-          <a:lstStyle/>
-          <a:p>
-            <a:pPr marL="0" indent="0">
-              <a:lnSpc>
-                <a:spcPts val="1500"/>
-              </a:lnSpc>
-              <a:buNone/>
-            </a:pPr>
-            <a:r>
-              <a:rPr lang="en-US" sz="1150" dirty="0">
-                <a:solidFill>
-                  <a:srgbClr val="585868"/>
-                </a:solidFill>
-                <a:latin typeface="Helvetica Neue" pitchFamily="34" charset="0"/>
-                <a:ea typeface="Helvetica Neue" pitchFamily="34" charset="-122"/>
-                <a:cs typeface="Helvetica Neue" pitchFamily="34" charset="-120"/>
-              </a:rPr>
-              <a:t>Reads report.json only — the same numbers the charts are drawn from. This run turned 30 measured features across 14 banks into 11 ordered changes.</a:t>
-            </a:r>
-            <a:endParaRPr lang="en-US" sz="1150" dirty="0"/>
+              <a:t>The panel as the team sees it: one button, two opt-in contexts, and the run it produced.</a:t>
+            </a:r>
+            <a:endParaRPr lang="en-US" sz="1050" dirty="0"/>
           </a:p>
         </p:txBody>
       </p:sp>
       <p:pic>
         <p:nvPicPr>
-          <p:cNvPr id="12" name="Image 2" descr="/Users/nstephane/Dev/AI_Data_Science_training/ing-usecase/docs/deck_assets/icons/list.png"/>
+          <p:cNvPr id="9" name="Image 1" descr="/Users/nstephane/Dev/AI_Data_Science_training/ing-usecase/docs/deck_assets/icons/target.png"/>
           <p:cNvPicPr>
             <a:picLocks noChangeAspect="1"/>
           </p:cNvPicPr>
@@ -10936,6 +10390,111 @@
         </p:blipFill>
         <p:spPr>
           <a:xfrm>
+            <a:off x="621792" y="1609344"/>
+            <a:ext cx="420624" cy="420624"/>
+          </a:xfrm>
+          <a:prstGeom prst="rect">
+            <a:avLst/>
+          </a:prstGeom>
+        </p:spPr>
+      </p:pic>
+      <p:sp>
+        <p:nvSpPr>
+          <p:cNvPr id="10" name="Text 6"/>
+          <p:cNvSpPr txBox="1"/>
+          <p:nvPr/>
+        </p:nvSpPr>
+        <p:spPr>
+          <a:xfrm>
+            <a:off x="1188720" y="1591056"/>
+            <a:ext cx="4782312" cy="274320"/>
+          </a:xfrm>
+          <a:prstGeom prst="rect">
+            <a:avLst/>
+          </a:prstGeom>
+          <a:noFill/>
+          <a:ln/>
+        </p:spPr>
+        <p:txBody>
+          <a:bodyPr wrap="square" lIns="0" tIns="0" rIns="0" bIns="0" rtlCol="0" anchor="ctr"/>
+          <a:lstStyle/>
+          <a:p>
+            <a:pPr marL="0" indent="0">
+              <a:buNone/>
+            </a:pPr>
+            <a:r>
+              <a:rPr lang="en-US" sz="1350" b="1" dirty="0">
+                <a:solidFill>
+                  <a:srgbClr val="14141C"/>
+                </a:solidFill>
+                <a:latin typeface="Helvetica Neue" pitchFamily="34" charset="0"/>
+                <a:ea typeface="Helvetica Neue" pitchFamily="34" charset="-122"/>
+                <a:cs typeface="Helvetica Neue" pitchFamily="34" charset="-120"/>
+              </a:rPr>
+              <a:t>One model call over the finished analysis</a:t>
+            </a:r>
+            <a:endParaRPr lang="en-US" sz="1350" dirty="0"/>
+          </a:p>
+        </p:txBody>
+      </p:sp>
+      <p:sp>
+        <p:nvSpPr>
+          <p:cNvPr id="11" name="Text 7"/>
+          <p:cNvSpPr txBox="1"/>
+          <p:nvPr/>
+        </p:nvSpPr>
+        <p:spPr>
+          <a:xfrm>
+            <a:off x="1188720" y="1883664"/>
+            <a:ext cx="4782312" cy="713232"/>
+          </a:xfrm>
+          <a:prstGeom prst="rect">
+            <a:avLst/>
+          </a:prstGeom>
+          <a:noFill/>
+          <a:ln/>
+        </p:spPr>
+        <p:txBody>
+          <a:bodyPr wrap="square" lIns="0" tIns="0" rIns="0" bIns="0" rtlCol="0" anchor="ctr"/>
+          <a:lstStyle/>
+          <a:p>
+            <a:pPr marL="0" indent="0">
+              <a:lnSpc>
+                <a:spcPts val="1500"/>
+              </a:lnSpc>
+              <a:buNone/>
+            </a:pPr>
+            <a:r>
+              <a:rPr lang="en-US" sz="1150" dirty="0">
+                <a:solidFill>
+                  <a:srgbClr val="585868"/>
+                </a:solidFill>
+                <a:latin typeface="Helvetica Neue" pitchFamily="34" charset="0"/>
+                <a:ea typeface="Helvetica Neue" pitchFamily="34" charset="-122"/>
+                <a:cs typeface="Helvetica Neue" pitchFamily="34" charset="-120"/>
+              </a:rPr>
+              <a:t>Reads report.json only — the same numbers the charts are drawn from. This run turned 30 measured features across 14 banks into 11 ordered changes.</a:t>
+            </a:r>
+            <a:endParaRPr lang="en-US" sz="1150" dirty="0"/>
+          </a:p>
+        </p:txBody>
+      </p:sp>
+      <p:pic>
+        <p:nvPicPr>
+          <p:cNvPr id="12" name="Image 2" descr="/Users/nstephane/Dev/AI_Data_Science_training/ing-usecase/docs/deck_assets/icons/list.png"/>
+          <p:cNvPicPr>
+            <a:picLocks noChangeAspect="1"/>
+          </p:cNvPicPr>
+          <p:nvPr/>
+        </p:nvPicPr>
+        <p:blipFill>
+          <a:blip r:embed="rId5"/>
+          <a:stretch>
+            <a:fillRect/>
+          </a:stretch>
+        </p:blipFill>
+        <p:spPr>
+          <a:xfrm>
             <a:off x="621792" y="2907792"/>
             <a:ext cx="420624" cy="420624"/>
           </a:xfrm>
@@ -11034,7 +10593,7 @@
           <p:nvPr/>
         </p:nvPicPr>
         <p:blipFill>
-          <a:blip r:embed="rId5"/>
+          <a:blip r:embed="rId6"/>
           <a:stretch>
             <a:fillRect/>
           </a:stretch>
@@ -11156,6 +10715,13 @@
             <a:prstDash val="solid"/>
           </a:ln>
         </p:spPr>
+        <p:txBody>
+          <a:bodyPr/>
+          <a:lstStyle/>
+          <a:p>
+            <a:endParaRPr lang="en-US"/>
+          </a:p>
+        </p:txBody>
       </p:sp>
       <p:sp>
         <p:nvSpPr>
@@ -11295,6 +10861,13 @@
             <a:prstDash val="solid"/>
           </a:ln>
         </p:spPr>
+        <p:txBody>
+          <a:bodyPr/>
+          <a:lstStyle/>
+          <a:p>
+            <a:endParaRPr lang="en-US"/>
+          </a:p>
+        </p:txBody>
       </p:sp>
       <p:sp>
         <p:nvSpPr>
@@ -11398,73 +10971,17 @@
             <a:prstDash val="solid"/>
           </a:ln>
         </p:spPr>
+        <p:txBody>
+          <a:bodyPr/>
+          <a:lstStyle/>
+          <a:p>
+            <a:endParaRPr lang="en-US"/>
+          </a:p>
+        </p:txBody>
       </p:sp>
       <p:pic>
         <p:nvPicPr>
           <p:cNvPr id="7" name="Image 0" descr="/Users/nstephane/Dev/AI_Data_Science_training/ing-usecase/docs/deck_assets/rec_cards.png"/>
-          <p:cNvPicPr>
-            <a:picLocks noChangeAspect="1"/>
-          </p:cNvPicPr>
-          <p:nvPr/>
-        </p:nvPicPr>
-        <p:blipFill>
-          <a:blip r:embed="rId2"/>
-          <a:stretch>
-            <a:fillRect/>
-          </a:stretch>
-        </p:blipFill>
-        <p:spPr>
-          <a:xfrm>
-            <a:off x="658368" y="1261872"/>
-            <a:ext cx="6309360" cy="4114800"/>
-          </a:xfrm>
-          <a:prstGeom prst="rect">
-            <a:avLst/>
-          </a:prstGeom>
-        </p:spPr>
-      </p:pic>
-      <p:sp>
-        <p:nvSpPr>
-          <p:cNvPr id="8" name="Text 5"/>
-          <p:cNvSpPr txBox="1"/>
-          <p:nvPr/>
-        </p:nvSpPr>
-        <p:spPr>
-          <a:xfrm>
-            <a:off x="658368" y="5486400"/>
-            <a:ext cx="6309360" cy="292608"/>
-          </a:xfrm>
-          <a:prstGeom prst="rect">
-            <a:avLst/>
-          </a:prstGeom>
-          <a:noFill/>
-          <a:ln/>
-        </p:spPr>
-        <p:txBody>
-          <a:bodyPr wrap="square" lIns="0" tIns="0" rIns="0" bIns="0" rtlCol="0" anchor="ctr"/>
-          <a:lstStyle/>
-          <a:p>
-            <a:pPr marL="0" indent="0">
-              <a:buNone/>
-            </a:pPr>
-            <a:r>
-              <a:rPr lang="en-US" sz="1050" i="1" dirty="0">
-                <a:solidFill>
-                  <a:srgbClr val="585868"/>
-                </a:solidFill>
-                <a:latin typeface="Helvetica Neue" pitchFamily="34" charset="0"/>
-                <a:ea typeface="Helvetica Neue" pitchFamily="34" charset="-122"/>
-                <a:cs typeface="Helvetica Neue" pitchFamily="34" charset="-120"/>
-              </a:rPr>
-              <a:t>Three of the eleven, as the team reviews them.</a:t>
-            </a:r>
-            <a:endParaRPr lang="en-US" sz="1050" dirty="0"/>
-          </a:p>
-        </p:txBody>
-      </p:sp>
-      <p:pic>
-        <p:nvPicPr>
-          <p:cNvPr id="9" name="Image 1" descr="/Users/nstephane/Dev/AI_Data_Science_training/ing-usecase/docs/deck_assets/icons/list.png"/>
           <p:cNvPicPr>
             <a:picLocks noChangeAspect="1"/>
           </p:cNvPicPr>
@@ -11478,8 +10995,8 @@
         </p:blipFill>
         <p:spPr>
           <a:xfrm>
-            <a:off x="7260336" y="1371600"/>
-            <a:ext cx="420624" cy="420624"/>
+            <a:off x="658368" y="1261872"/>
+            <a:ext cx="6309360" cy="4114800"/>
           </a:xfrm>
           <a:prstGeom prst="rect">
             <a:avLst/>
@@ -11488,14 +11005,14 @@
       </p:pic>
       <p:sp>
         <p:nvSpPr>
-          <p:cNvPr id="10" name="Text 6"/>
+          <p:cNvPr id="8" name="Text 5"/>
           <p:cNvSpPr txBox="1"/>
           <p:nvPr/>
         </p:nvSpPr>
         <p:spPr>
           <a:xfrm>
-            <a:off x="7827264" y="1353312"/>
-            <a:ext cx="3694176" cy="274320"/>
+            <a:off x="658368" y="5486400"/>
+            <a:ext cx="6309360" cy="292608"/>
           </a:xfrm>
           <a:prstGeom prst="rect">
             <a:avLst/>
@@ -11511,65 +11028,23 @@
               <a:buNone/>
             </a:pPr>
             <a:r>
-              <a:rPr lang="en-US" sz="1350" b="1" dirty="0">
-                <a:solidFill>
-                  <a:srgbClr val="14141C"/>
+              <a:rPr lang="en-US" sz="1050" i="1" dirty="0">
+                <a:solidFill>
+                  <a:srgbClr val="585868"/>
                 </a:solidFill>
                 <a:latin typeface="Helvetica Neue" pitchFamily="34" charset="0"/>
                 <a:ea typeface="Helvetica Neue" pitchFamily="34" charset="-122"/>
                 <a:cs typeface="Helvetica Neue" pitchFamily="34" charset="-120"/>
               </a:rPr>
-              <a:t>Finding and action, kept apart</a:t>
-            </a:r>
-            <a:endParaRPr lang="en-US" sz="1350" dirty="0"/>
-          </a:p>
-        </p:txBody>
-      </p:sp>
-      <p:sp>
-        <p:nvSpPr>
-          <p:cNvPr id="11" name="Text 7"/>
-          <p:cNvSpPr txBox="1"/>
-          <p:nvPr/>
-        </p:nvSpPr>
-        <p:spPr>
-          <a:xfrm>
-            <a:off x="7827264" y="1645920"/>
-            <a:ext cx="3694176" cy="713232"/>
-          </a:xfrm>
-          <a:prstGeom prst="rect">
-            <a:avLst/>
-          </a:prstGeom>
-          <a:noFill/>
-          <a:ln/>
-        </p:spPr>
-        <p:txBody>
-          <a:bodyPr wrap="square" lIns="0" tIns="0" rIns="0" bIns="0" rtlCol="0" anchor="ctr"/>
-          <a:lstStyle/>
-          <a:p>
-            <a:pPr marL="0" indent="0">
-              <a:lnSpc>
-                <a:spcPts val="1500"/>
-              </a:lnSpc>
-              <a:buNone/>
-            </a:pPr>
-            <a:r>
-              <a:rPr lang="en-US" sz="1150" dirty="0">
-                <a:solidFill>
-                  <a:srgbClr val="585868"/>
-                </a:solidFill>
-                <a:latin typeface="Helvetica Neue" pitchFamily="34" charset="0"/>
-                <a:ea typeface="Helvetica Neue" pitchFamily="34" charset="-122"/>
-                <a:cs typeface="Helvetica Neue" pitchFamily="34" charset="-120"/>
-              </a:rPr>
-              <a:t>What the data shows sits above what to do. A reader can reject our suggested action and still keep the measured finding.</a:t>
-            </a:r>
-            <a:endParaRPr lang="en-US" sz="1150" dirty="0"/>
+              <a:t>Three of the eleven, as the team reviews them.</a:t>
+            </a:r>
+            <a:endParaRPr lang="en-US" sz="1050" dirty="0"/>
           </a:p>
         </p:txBody>
       </p:sp>
       <p:pic>
         <p:nvPicPr>
-          <p:cNvPr id="12" name="Image 2" descr="/Users/nstephane/Dev/AI_Data_Science_training/ing-usecase/docs/deck_assets/icons/target.png"/>
+          <p:cNvPr id="9" name="Image 1" descr="/Users/nstephane/Dev/AI_Data_Science_training/ing-usecase/docs/deck_assets/icons/list.png"/>
           <p:cNvPicPr>
             <a:picLocks noChangeAspect="1"/>
           </p:cNvPicPr>
@@ -11583,6 +11058,111 @@
         </p:blipFill>
         <p:spPr>
           <a:xfrm>
+            <a:off x="7260336" y="1371600"/>
+            <a:ext cx="420624" cy="420624"/>
+          </a:xfrm>
+          <a:prstGeom prst="rect">
+            <a:avLst/>
+          </a:prstGeom>
+        </p:spPr>
+      </p:pic>
+      <p:sp>
+        <p:nvSpPr>
+          <p:cNvPr id="10" name="Text 6"/>
+          <p:cNvSpPr txBox="1"/>
+          <p:nvPr/>
+        </p:nvSpPr>
+        <p:spPr>
+          <a:xfrm>
+            <a:off x="7827264" y="1353312"/>
+            <a:ext cx="3694176" cy="274320"/>
+          </a:xfrm>
+          <a:prstGeom prst="rect">
+            <a:avLst/>
+          </a:prstGeom>
+          <a:noFill/>
+          <a:ln/>
+        </p:spPr>
+        <p:txBody>
+          <a:bodyPr wrap="square" lIns="0" tIns="0" rIns="0" bIns="0" rtlCol="0" anchor="ctr"/>
+          <a:lstStyle/>
+          <a:p>
+            <a:pPr marL="0" indent="0">
+              <a:buNone/>
+            </a:pPr>
+            <a:r>
+              <a:rPr lang="en-US" sz="1350" b="1" dirty="0">
+                <a:solidFill>
+                  <a:srgbClr val="14141C"/>
+                </a:solidFill>
+                <a:latin typeface="Helvetica Neue" pitchFamily="34" charset="0"/>
+                <a:ea typeface="Helvetica Neue" pitchFamily="34" charset="-122"/>
+                <a:cs typeface="Helvetica Neue" pitchFamily="34" charset="-120"/>
+              </a:rPr>
+              <a:t>Finding and action, kept apart</a:t>
+            </a:r>
+            <a:endParaRPr lang="en-US" sz="1350" dirty="0"/>
+          </a:p>
+        </p:txBody>
+      </p:sp>
+      <p:sp>
+        <p:nvSpPr>
+          <p:cNvPr id="11" name="Text 7"/>
+          <p:cNvSpPr txBox="1"/>
+          <p:nvPr/>
+        </p:nvSpPr>
+        <p:spPr>
+          <a:xfrm>
+            <a:off x="7827264" y="1645920"/>
+            <a:ext cx="3694176" cy="713232"/>
+          </a:xfrm>
+          <a:prstGeom prst="rect">
+            <a:avLst/>
+          </a:prstGeom>
+          <a:noFill/>
+          <a:ln/>
+        </p:spPr>
+        <p:txBody>
+          <a:bodyPr wrap="square" lIns="0" tIns="0" rIns="0" bIns="0" rtlCol="0" anchor="ctr"/>
+          <a:lstStyle/>
+          <a:p>
+            <a:pPr marL="0" indent="0">
+              <a:lnSpc>
+                <a:spcPts val="1500"/>
+              </a:lnSpc>
+              <a:buNone/>
+            </a:pPr>
+            <a:r>
+              <a:rPr lang="en-US" sz="1150" dirty="0">
+                <a:solidFill>
+                  <a:srgbClr val="585868"/>
+                </a:solidFill>
+                <a:latin typeface="Helvetica Neue" pitchFamily="34" charset="0"/>
+                <a:ea typeface="Helvetica Neue" pitchFamily="34" charset="-122"/>
+                <a:cs typeface="Helvetica Neue" pitchFamily="34" charset="-120"/>
+              </a:rPr>
+              <a:t>What the data shows sits above what to do. A reader can reject our suggested action and still keep the measured finding.</a:t>
+            </a:r>
+            <a:endParaRPr lang="en-US" sz="1150" dirty="0"/>
+          </a:p>
+        </p:txBody>
+      </p:sp>
+      <p:pic>
+        <p:nvPicPr>
+          <p:cNvPr id="12" name="Image 2" descr="/Users/nstephane/Dev/AI_Data_Science_training/ing-usecase/docs/deck_assets/icons/target.png"/>
+          <p:cNvPicPr>
+            <a:picLocks noChangeAspect="1"/>
+          </p:cNvPicPr>
+          <p:nvPr/>
+        </p:nvPicPr>
+        <p:blipFill>
+          <a:blip r:embed="rId5"/>
+          <a:stretch>
+            <a:fillRect/>
+          </a:stretch>
+        </p:blipFill>
+        <p:spPr>
+          <a:xfrm>
             <a:off x="7260336" y="2944368"/>
             <a:ext cx="420624" cy="420624"/>
           </a:xfrm>
@@ -11681,7 +11261,7 @@
           <p:nvPr/>
         </p:nvPicPr>
         <p:blipFill>
-          <a:blip r:embed="rId5"/>
+          <a:blip r:embed="rId6"/>
           <a:stretch>
             <a:fillRect/>
           </a:stretch>
@@ -11873,6 +11453,13 @@
             <a:prstDash val="solid"/>
           </a:ln>
         </p:spPr>
+        <p:txBody>
+          <a:bodyPr/>
+          <a:lstStyle/>
+          <a:p>
+            <a:endParaRPr lang="en-US"/>
+          </a:p>
+        </p:txBody>
       </p:sp>
       <p:sp>
         <p:nvSpPr>
@@ -11978,6 +11565,13 @@
             <a:prstDash val="solid"/>
           </a:ln>
         </p:spPr>
+        <p:txBody>
+          <a:bodyPr/>
+          <a:lstStyle/>
+          <a:p>
+            <a:endParaRPr lang="en-US"/>
+          </a:p>
+        </p:txBody>
       </p:sp>
       <p:sp>
         <p:nvSpPr>
@@ -12125,6 +11719,13 @@
             <a:prstDash val="solid"/>
           </a:ln>
         </p:spPr>
+        <p:txBody>
+          <a:bodyPr/>
+          <a:lstStyle/>
+          <a:p>
+            <a:endParaRPr lang="en-US"/>
+          </a:p>
+        </p:txBody>
       </p:sp>
       <p:sp>
         <p:nvSpPr>
@@ -12272,6 +11873,13 @@
             <a:prstDash val="solid"/>
           </a:ln>
         </p:spPr>
+        <p:txBody>
+          <a:bodyPr/>
+          <a:lstStyle/>
+          <a:p>
+            <a:endParaRPr lang="en-US"/>
+          </a:p>
+        </p:txBody>
       </p:sp>
       <p:sp>
         <p:nvSpPr>
@@ -12456,6 +12064,13 @@
             <a:prstDash val="solid"/>
           </a:ln>
         </p:spPr>
+        <p:txBody>
+          <a:bodyPr/>
+          <a:lstStyle/>
+          <a:p>
+            <a:endParaRPr lang="en-US"/>
+          </a:p>
+        </p:txBody>
       </p:sp>
       <p:sp>
         <p:nvSpPr>
@@ -12559,6 +12174,13 @@
             <a:prstDash val="solid"/>
           </a:ln>
         </p:spPr>
+        <p:txBody>
+          <a:bodyPr/>
+          <a:lstStyle/>
+          <a:p>
+            <a:endParaRPr lang="en-US"/>
+          </a:p>
+        </p:txBody>
       </p:sp>
       <p:sp>
         <p:nvSpPr>
@@ -12662,6 +12284,13 @@
             <a:prstDash val="solid"/>
           </a:ln>
         </p:spPr>
+        <p:txBody>
+          <a:bodyPr/>
+          <a:lstStyle/>
+          <a:p>
+            <a:endParaRPr lang="en-US"/>
+          </a:p>
+        </p:txBody>
       </p:sp>
       <p:sp>
         <p:nvSpPr>
@@ -12879,6 +12508,13 @@
             <a:prstDash val="solid"/>
           </a:ln>
         </p:spPr>
+        <p:txBody>
+          <a:bodyPr/>
+          <a:lstStyle/>
+          <a:p>
+            <a:endParaRPr lang="en-US"/>
+          </a:p>
+        </p:txBody>
       </p:sp>
       <p:sp>
         <p:nvSpPr>
@@ -12982,31 +12618,14 @@
             <a:prstDash val="solid"/>
           </a:ln>
         </p:spPr>
-      </p:sp>
-      <p:pic>
-        <p:nvPicPr>
-          <p:cNvPr id="7" name="Image 0" descr="/Users/nstephane/Dev/AI_Data_Science_training/ing-usecase/docs/deck_assets/site_hero.png"/>
-          <p:cNvPicPr>
-            <a:picLocks noChangeAspect="1"/>
-          </p:cNvPicPr>
-          <p:nvPr/>
-        </p:nvPicPr>
-        <p:blipFill>
-          <a:blip r:embed="rId2"/>
-          <a:stretch>
-            <a:fillRect/>
-          </a:stretch>
-        </p:blipFill>
-        <p:spPr>
-          <a:xfrm>
-            <a:off x="658368" y="1280160"/>
-            <a:ext cx="6675120" cy="2350008"/>
-          </a:xfrm>
-          <a:prstGeom prst="rect">
-            <a:avLst/>
-          </a:prstGeom>
-        </p:spPr>
-      </p:pic>
+        <p:txBody>
+          <a:bodyPr/>
+          <a:lstStyle/>
+          <a:p>
+            <a:endParaRPr lang="en-US"/>
+          </a:p>
+        </p:txBody>
+      </p:sp>
       <p:sp>
         <p:nvSpPr>
           <p:cNvPr id="8" name="Shape 5"/>
@@ -13031,10 +12650,56 @@
             <a:prstDash val="solid"/>
           </a:ln>
         </p:spPr>
+        <p:txBody>
+          <a:bodyPr/>
+          <a:lstStyle/>
+          <a:p>
+            <a:endParaRPr lang="en-US"/>
+          </a:p>
+        </p:txBody>
+      </p:sp>
+      <p:sp>
+        <p:nvSpPr>
+          <p:cNvPr id="10" name="Text 6"/>
+          <p:cNvSpPr txBox="1"/>
+          <p:nvPr/>
+        </p:nvSpPr>
+        <p:spPr>
+          <a:xfrm>
+            <a:off x="658368" y="5998464"/>
+            <a:ext cx="6675120" cy="292608"/>
+          </a:xfrm>
+          <a:prstGeom prst="rect">
+            <a:avLst/>
+          </a:prstGeom>
+          <a:noFill/>
+          <a:ln/>
+        </p:spPr>
+        <p:txBody>
+          <a:bodyPr wrap="square" lIns="0" tIns="0" rIns="0" bIns="0" rtlCol="0" anchor="ctr"/>
+          <a:lstStyle/>
+          <a:p>
+            <a:pPr marL="0" indent="0">
+              <a:buNone/>
+            </a:pPr>
+            <a:r>
+              <a:rPr lang="en-US" sz="1050" i="1" dirty="0">
+                <a:solidFill>
+                  <a:srgbClr val="585868"/>
+                </a:solidFill>
+                <a:latin typeface="Helvetica Neue" pitchFamily="34" charset="0"/>
+                <a:ea typeface="Helvetica Neue" pitchFamily="34" charset="-122"/>
+                <a:cs typeface="Helvetica Neue" pitchFamily="34" charset="-120"/>
+              </a:rPr>
+              <a:t>Generated, never published: rates and amounts stay as [TAUX] and [MONTANT] placeholders.</a:t>
+            </a:r>
+            <a:endParaRPr lang="en-US" sz="1050" dirty="0"/>
+          </a:p>
+        </p:txBody>
       </p:sp>
       <p:pic>
         <p:nvPicPr>
-          <p:cNvPr id="9" name="Image 1" descr="/Users/nstephane/Dev/AI_Data_Science_training/ing-usecase/docs/deck_assets/site_explained.png"/>
+          <p:cNvPr id="11" name="Image 2" descr="/Users/nstephane/Dev/AI_Data_Science_training/ing-usecase/docs/deck_assets/icons/check.png"/>
           <p:cNvPicPr>
             <a:picLocks noChangeAspect="1"/>
           </p:cNvPicPr>
@@ -13048,8 +12713,8 @@
         </p:blipFill>
         <p:spPr>
           <a:xfrm>
-            <a:off x="658368" y="3840480"/>
-            <a:ext cx="5120640" cy="2048256"/>
+            <a:off x="7699248" y="1408176"/>
+            <a:ext cx="420624" cy="420624"/>
           </a:xfrm>
           <a:prstGeom prst="rect">
             <a:avLst/>
@@ -13058,14 +12723,14 @@
       </p:pic>
       <p:sp>
         <p:nvSpPr>
-          <p:cNvPr id="10" name="Text 6"/>
+          <p:cNvPr id="12" name="Text 7"/>
           <p:cNvSpPr txBox="1"/>
           <p:nvPr/>
         </p:nvSpPr>
         <p:spPr>
           <a:xfrm>
-            <a:off x="658368" y="5998464"/>
-            <a:ext cx="6675120" cy="292608"/>
+            <a:off x="8266176" y="1389888"/>
+            <a:ext cx="3273552" cy="274320"/>
           </a:xfrm>
           <a:prstGeom prst="rect">
             <a:avLst/>
@@ -13081,23 +12746,65 @@
               <a:buNone/>
             </a:pPr>
             <a:r>
-              <a:rPr lang="en-US" sz="1050" i="1" dirty="0">
-                <a:solidFill>
-                  <a:srgbClr val="585868"/>
+              <a:rPr lang="en-US" sz="1350" b="1" dirty="0">
+                <a:solidFill>
+                  <a:srgbClr val="14141C"/>
                 </a:solidFill>
                 <a:latin typeface="Helvetica Neue" pitchFamily="34" charset="0"/>
                 <a:ea typeface="Helvetica Neue" pitchFamily="34" charset="-122"/>
                 <a:cs typeface="Helvetica Neue" pitchFamily="34" charset="-120"/>
               </a:rPr>
-              <a:t>Generated, never published: rates and amounts stay as [TAUX] and [MONTANT] placeholders.</a:t>
-            </a:r>
-            <a:endParaRPr lang="en-US" sz="1050" dirty="0"/>
+              <a:t>The team chooses what gets built</a:t>
+            </a:r>
+            <a:endParaRPr lang="en-US" sz="1350" dirty="0"/>
+          </a:p>
+        </p:txBody>
+      </p:sp>
+      <p:sp>
+        <p:nvSpPr>
+          <p:cNvPr id="13" name="Text 8"/>
+          <p:cNvSpPr txBox="1"/>
+          <p:nvPr/>
+        </p:nvSpPr>
+        <p:spPr>
+          <a:xfrm>
+            <a:off x="8266176" y="1682496"/>
+            <a:ext cx="3273552" cy="713232"/>
+          </a:xfrm>
+          <a:prstGeom prst="rect">
+            <a:avLst/>
+          </a:prstGeom>
+          <a:noFill/>
+          <a:ln/>
+        </p:spPr>
+        <p:txBody>
+          <a:bodyPr wrap="square" lIns="0" tIns="0" rIns="0" bIns="0" rtlCol="0" anchor="ctr"/>
+          <a:lstStyle/>
+          <a:p>
+            <a:pPr marL="0" indent="0">
+              <a:lnSpc>
+                <a:spcPts val="1500"/>
+              </a:lnSpc>
+              <a:buNone/>
+            </a:pPr>
+            <a:r>
+              <a:rPr lang="en-US" sz="1150" dirty="0">
+                <a:solidFill>
+                  <a:srgbClr val="585868"/>
+                </a:solidFill>
+                <a:latin typeface="Helvetica Neue" pitchFamily="34" charset="0"/>
+                <a:ea typeface="Helvetica Neue" pitchFamily="34" charset="-122"/>
+                <a:cs typeface="Helvetica Neue" pitchFamily="34" charset="-120"/>
+              </a:rPr>
+              <a:t>Every recommendation is a checkbox. Nothing reaches the generator that a person did not tick.</a:t>
+            </a:r>
+            <a:endParaRPr lang="en-US" sz="1150" dirty="0"/>
           </a:p>
         </p:txBody>
       </p:sp>
       <p:pic>
         <p:nvPicPr>
-          <p:cNvPr id="11" name="Image 2" descr="/Users/nstephane/Dev/AI_Data_Science_training/ing-usecase/docs/deck_assets/icons/check.png"/>
+          <p:cNvPr id="14" name="Image 3" descr="/Users/nstephane/Dev/AI_Data_Science_training/ing-usecase/docs/deck_assets/icons/window.png"/>
           <p:cNvPicPr>
             <a:picLocks noChangeAspect="1"/>
           </p:cNvPicPr>
@@ -13111,7 +12818,7 @@
         </p:blipFill>
         <p:spPr>
           <a:xfrm>
-            <a:off x="7699248" y="1408176"/>
+            <a:off x="7699248" y="2743200"/>
             <a:ext cx="420624" cy="420624"/>
           </a:xfrm>
           <a:prstGeom prst="rect">
@@ -13121,13 +12828,13 @@
       </p:pic>
       <p:sp>
         <p:nvSpPr>
-          <p:cNvPr id="12" name="Text 7"/>
+          <p:cNvPr id="15" name="Text 9"/>
           <p:cNvSpPr txBox="1"/>
           <p:nvPr/>
         </p:nvSpPr>
         <p:spPr>
           <a:xfrm>
-            <a:off x="8266176" y="1389888"/>
+            <a:off x="8266176" y="2724912"/>
             <a:ext cx="3273552" cy="274320"/>
           </a:xfrm>
           <a:prstGeom prst="rect">
@@ -13152,7 +12859,7 @@
                 <a:ea typeface="Helvetica Neue" pitchFamily="34" charset="-122"/>
                 <a:cs typeface="Helvetica Neue" pitchFamily="34" charset="-120"/>
               </a:rPr>
-              <a:t>The team chooses what gets built</a:t>
+              <a:t>Ten ING-styled pages, in fr-BE or nl-BE</a:t>
             </a:r>
             <a:endParaRPr lang="en-US" sz="1350" dirty="0"/>
           </a:p>
@@ -13160,13 +12867,13 @@
       </p:sp>
       <p:sp>
         <p:nvSpPr>
-          <p:cNvPr id="13" name="Text 8"/>
+          <p:cNvPr id="16" name="Text 10"/>
           <p:cNvSpPr txBox="1"/>
           <p:nvPr/>
         </p:nvSpPr>
         <p:spPr>
           <a:xfrm>
-            <a:off x="8266176" y="1682496"/>
+            <a:off x="8266176" y="3017520"/>
             <a:ext cx="3273552" cy="713232"/>
           </a:xfrm>
           <a:prstGeom prst="rect">
@@ -13194,7 +12901,7 @@
                 <a:ea typeface="Helvetica Neue" pitchFamily="34" charset="-122"/>
                 <a:cs typeface="Helvetica Neue" pitchFamily="34" charset="-120"/>
               </a:rPr>
-              <a:t>Every recommendation is a checkbox. Nothing reaches the generator that a person did not tick.</a:t>
+              <a:t>Home, savings, term account, current account, youth, investing, mortgage, opening, why ING, contact.</a:t>
             </a:r>
             <a:endParaRPr lang="en-US" sz="1150" dirty="0"/>
           </a:p>
@@ -13202,7 +12909,7 @@
       </p:sp>
       <p:pic>
         <p:nvPicPr>
-          <p:cNvPr id="14" name="Image 3" descr="/Users/nstephane/Dev/AI_Data_Science_training/ing-usecase/docs/deck_assets/icons/window.png"/>
+          <p:cNvPr id="17" name="Image 4" descr="/Users/nstephane/Dev/AI_Data_Science_training/ing-usecase/docs/deck_assets/icons/list.png"/>
           <p:cNvPicPr>
             <a:picLocks noChangeAspect="1"/>
           </p:cNvPicPr>
@@ -13216,7 +12923,7 @@
         </p:blipFill>
         <p:spPr>
           <a:xfrm>
-            <a:off x="7699248" y="2743200"/>
+            <a:off x="7699248" y="4078224"/>
             <a:ext cx="420624" cy="420624"/>
           </a:xfrm>
           <a:prstGeom prst="rect">
@@ -13226,13 +12933,13 @@
       </p:pic>
       <p:sp>
         <p:nvSpPr>
-          <p:cNvPr id="15" name="Text 9"/>
+          <p:cNvPr id="18" name="Text 11"/>
           <p:cNvSpPr txBox="1"/>
           <p:nvPr/>
         </p:nvSpPr>
         <p:spPr>
           <a:xfrm>
-            <a:off x="8266176" y="2724912"/>
+            <a:off x="8266176" y="4059936"/>
             <a:ext cx="3273552" cy="274320"/>
           </a:xfrm>
           <a:prstGeom prst="rect">
@@ -13257,7 +12964,7 @@
                 <a:ea typeface="Helvetica Neue" pitchFamily="34" charset="-122"/>
                 <a:cs typeface="Helvetica Neue" pitchFamily="34" charset="-120"/>
               </a:rPr>
-              <a:t>Ten ING-styled pages, in fr-BE or nl-BE</a:t>
+              <a:t>Each section can name its own source</a:t>
             </a:r>
             <a:endParaRPr lang="en-US" sz="1350" dirty="0"/>
           </a:p>
@@ -13265,13 +12972,13 @@
       </p:sp>
       <p:sp>
         <p:nvSpPr>
-          <p:cNvPr id="16" name="Text 10"/>
+          <p:cNvPr id="19" name="Text 12"/>
           <p:cNvSpPr txBox="1"/>
           <p:nvPr/>
         </p:nvSpPr>
         <p:spPr>
           <a:xfrm>
-            <a:off x="8266176" y="3017520"/>
+            <a:off x="8266176" y="4352544"/>
             <a:ext cx="3273552" cy="713232"/>
           </a:xfrm>
           <a:prstGeom prst="rect">
@@ -13299,7 +13006,49 @@
                 <a:ea typeface="Helvetica Neue" pitchFamily="34" charset="-122"/>
                 <a:cs typeface="Helvetica Neue" pitchFamily="34" charset="-120"/>
               </a:rPr>
-              <a:t>Home, savings, term account, current account, youth, investing, mortgage, opening, why ING, contact.</a:t>
+              <a:t>In explained mode, the orange blocks say which recommendation produced that section and why — so the site is auditable, not just persuasive.</a:t>
+            </a:r>
+            <a:endParaRPr lang="en-US" sz="1150" dirty="0"/>
+          </a:p>
+        </p:txBody>
+      </p:sp>
+      <p:sp>
+        <p:nvSpPr>
+          <p:cNvPr id="20" name="Text 13"/>
+          <p:cNvSpPr txBox="1"/>
+          <p:nvPr/>
+        </p:nvSpPr>
+        <p:spPr>
+          <a:xfrm>
+            <a:off x="7699248" y="5486400"/>
+            <a:ext cx="3840480" cy="603504"/>
+          </a:xfrm>
+          <a:prstGeom prst="rect">
+            <a:avLst/>
+          </a:prstGeom>
+          <a:noFill/>
+          <a:ln/>
+        </p:spPr>
+        <p:txBody>
+          <a:bodyPr wrap="square" lIns="0" tIns="0" rIns="0" bIns="0" rtlCol="0" anchor="ctr"/>
+          <a:lstStyle/>
+          <a:p>
+            <a:pPr marL="0" indent="0">
+              <a:lnSpc>
+                <a:spcPts val="1500"/>
+              </a:lnSpc>
+              <a:buNone/>
+            </a:pPr>
+            <a:r>
+              <a:rPr lang="en-US" sz="1150" b="1" dirty="0">
+                <a:solidFill>
+                  <a:srgbClr val="FF6200"/>
+                </a:solidFill>
+                <a:latin typeface="Helvetica Neue" pitchFamily="34" charset="0"/>
+                <a:ea typeface="Helvetica Neue" pitchFamily="34" charset="-122"/>
+                <a:cs typeface="Helvetica Neue" pitchFamily="34" charset="-120"/>
+              </a:rPr>
+              <a:t>This is what makes the analysis arguable: a stakeholder can look at the change rather than read about it.</a:t>
             </a:r>
             <a:endParaRPr lang="en-US" sz="1150" dirty="0"/>
           </a:p>
@@ -13307,7 +13056,13 @@
       </p:sp>
       <p:pic>
         <p:nvPicPr>
-          <p:cNvPr id="17" name="Image 4" descr="/Users/nstephane/Dev/AI_Data_Science_training/ing-usecase/docs/deck_assets/icons/list.png"/>
+          <p:cNvPr id="21" name="Picture 20">
+            <a:extLst>
+              <a:ext uri="{FF2B5EF4-FFF2-40B4-BE49-F238E27FC236}">
+                <a16:creationId xmlns:a16="http://schemas.microsoft.com/office/drawing/2014/main" id="{2213E3A8-686B-ADF9-793A-FA97ACE97847}"/>
+              </a:ext>
+            </a:extLst>
+          </p:cNvPr>
           <p:cNvPicPr>
             <a:picLocks noChangeAspect="1"/>
           </p:cNvPicPr>
@@ -13321,137 +13076,44 @@
         </p:blipFill>
         <p:spPr>
           <a:xfrm>
-            <a:off x="7699248" y="4078224"/>
-            <a:ext cx="420624" cy="420624"/>
+            <a:off x="652272" y="1126676"/>
+            <a:ext cx="4808435" cy="2629008"/>
           </a:xfrm>
           <a:prstGeom prst="rect">
             <a:avLst/>
           </a:prstGeom>
         </p:spPr>
       </p:pic>
-      <p:sp>
-        <p:nvSpPr>
-          <p:cNvPr id="18" name="Text 11"/>
-          <p:cNvSpPr txBox="1"/>
-          <p:nvPr/>
-        </p:nvSpPr>
-        <p:spPr>
-          <a:xfrm>
-            <a:off x="8266176" y="4059936"/>
-            <a:ext cx="3273552" cy="274320"/>
-          </a:xfrm>
-          <a:prstGeom prst="rect">
-            <a:avLst/>
-          </a:prstGeom>
-          <a:noFill/>
-          <a:ln/>
-        </p:spPr>
-        <p:txBody>
-          <a:bodyPr wrap="square" lIns="0" tIns="0" rIns="0" bIns="0" rtlCol="0" anchor="ctr"/>
-          <a:lstStyle/>
-          <a:p>
-            <a:pPr marL="0" indent="0">
-              <a:buNone/>
-            </a:pPr>
-            <a:r>
-              <a:rPr lang="en-US" sz="1350" b="1" dirty="0">
-                <a:solidFill>
-                  <a:srgbClr val="14141C"/>
-                </a:solidFill>
-                <a:latin typeface="Helvetica Neue" pitchFamily="34" charset="0"/>
-                <a:ea typeface="Helvetica Neue" pitchFamily="34" charset="-122"/>
-                <a:cs typeface="Helvetica Neue" pitchFamily="34" charset="-120"/>
-              </a:rPr>
-              <a:t>Each section can name its own source</a:t>
-            </a:r>
-            <a:endParaRPr lang="en-US" sz="1350" dirty="0"/>
-          </a:p>
-        </p:txBody>
-      </p:sp>
-      <p:sp>
-        <p:nvSpPr>
-          <p:cNvPr id="19" name="Text 12"/>
-          <p:cNvSpPr txBox="1"/>
-          <p:nvPr/>
-        </p:nvSpPr>
-        <p:spPr>
-          <a:xfrm>
-            <a:off x="8266176" y="4352544"/>
-            <a:ext cx="3273552" cy="713232"/>
-          </a:xfrm>
-          <a:prstGeom prst="rect">
-            <a:avLst/>
-          </a:prstGeom>
-          <a:noFill/>
-          <a:ln/>
-        </p:spPr>
-        <p:txBody>
-          <a:bodyPr wrap="square" lIns="0" tIns="0" rIns="0" bIns="0" rtlCol="0" anchor="ctr"/>
-          <a:lstStyle/>
-          <a:p>
-            <a:pPr marL="0" indent="0">
-              <a:lnSpc>
-                <a:spcPts val="1500"/>
-              </a:lnSpc>
-              <a:buNone/>
-            </a:pPr>
-            <a:r>
-              <a:rPr lang="en-US" sz="1150" dirty="0">
-                <a:solidFill>
-                  <a:srgbClr val="585868"/>
-                </a:solidFill>
-                <a:latin typeface="Helvetica Neue" pitchFamily="34" charset="0"/>
-                <a:ea typeface="Helvetica Neue" pitchFamily="34" charset="-122"/>
-                <a:cs typeface="Helvetica Neue" pitchFamily="34" charset="-120"/>
-              </a:rPr>
-              <a:t>In explained mode, the orange blocks say which recommendation produced that section and why — so the site is auditable, not just persuasive.</a:t>
-            </a:r>
-            <a:endParaRPr lang="en-US" sz="1150" dirty="0"/>
-          </a:p>
-        </p:txBody>
-      </p:sp>
-      <p:sp>
-        <p:nvSpPr>
-          <p:cNvPr id="20" name="Text 13"/>
-          <p:cNvSpPr txBox="1"/>
-          <p:nvPr/>
-        </p:nvSpPr>
-        <p:spPr>
-          <a:xfrm>
-            <a:off x="7699248" y="5486400"/>
-            <a:ext cx="3840480" cy="603504"/>
-          </a:xfrm>
-          <a:prstGeom prst="rect">
-            <a:avLst/>
-          </a:prstGeom>
-          <a:noFill/>
-          <a:ln/>
-        </p:spPr>
-        <p:txBody>
-          <a:bodyPr wrap="square" lIns="0" tIns="0" rIns="0" bIns="0" rtlCol="0" anchor="ctr"/>
-          <a:lstStyle/>
-          <a:p>
-            <a:pPr marL="0" indent="0">
-              <a:lnSpc>
-                <a:spcPts val="1500"/>
-              </a:lnSpc>
-              <a:buNone/>
-            </a:pPr>
-            <a:r>
-              <a:rPr lang="en-US" sz="1150" b="1" dirty="0">
-                <a:solidFill>
-                  <a:srgbClr val="FF6200"/>
-                </a:solidFill>
-                <a:latin typeface="Helvetica Neue" pitchFamily="34" charset="0"/>
-                <a:ea typeface="Helvetica Neue" pitchFamily="34" charset="-122"/>
-                <a:cs typeface="Helvetica Neue" pitchFamily="34" charset="-120"/>
-              </a:rPr>
-              <a:t>This is what makes the analysis arguable: a stakeholder can look at the change rather than read about it.</a:t>
-            </a:r>
-            <a:endParaRPr lang="en-US" sz="1150" dirty="0"/>
-          </a:p>
-        </p:txBody>
-      </p:sp>
+      <p:pic>
+        <p:nvPicPr>
+          <p:cNvPr id="22" name="Picture 21">
+            <a:extLst>
+              <a:ext uri="{FF2B5EF4-FFF2-40B4-BE49-F238E27FC236}">
+                <a16:creationId xmlns:a16="http://schemas.microsoft.com/office/drawing/2014/main" id="{DFCDDED3-DA14-3BD9-5D9D-C450DEDB0153}"/>
+              </a:ext>
+            </a:extLst>
+          </p:cNvPr>
+          <p:cNvPicPr>
+            <a:picLocks noChangeAspect="1"/>
+          </p:cNvPicPr>
+          <p:nvPr/>
+        </p:nvPicPr>
+        <p:blipFill>
+          <a:blip r:embed="rId7"/>
+          <a:stretch>
+            <a:fillRect/>
+          </a:stretch>
+        </p:blipFill>
+        <p:spPr>
+          <a:xfrm>
+            <a:off x="652272" y="3808476"/>
+            <a:ext cx="4808435" cy="2240762"/>
+          </a:xfrm>
+          <a:prstGeom prst="rect">
+            <a:avLst/>
+          </a:prstGeom>
+        </p:spPr>
+      </p:pic>
     </p:spTree>
   </p:cSld>
   <p:clrMapOvr>
@@ -13548,6 +13210,13 @@
             <a:prstDash val="solid"/>
           </a:ln>
         </p:spPr>
+        <p:txBody>
+          <a:bodyPr/>
+          <a:lstStyle/>
+          <a:p>
+            <a:endParaRPr lang="en-US"/>
+          </a:p>
+        </p:txBody>
       </p:sp>
       <p:sp>
         <p:nvSpPr>
@@ -13636,7 +13305,7 @@
           <p:nvPr/>
         </p:nvPicPr>
         <p:blipFill>
-          <a:blip r:embed="rId2"/>
+          <a:blip r:embed="rId3"/>
           <a:stretch>
             <a:fillRect/>
           </a:stretch>
@@ -15062,8 +14731,8 @@
         </p:nvSpPr>
         <p:spPr>
           <a:xfrm>
-            <a:off x="548640" y="384048"/>
-            <a:ext cx="11064240" cy="731520"/>
+            <a:off x="548640" y="320040"/>
+            <a:ext cx="11064240" cy="640080"/>
           </a:xfrm>
           <a:prstGeom prst="rect">
             <a:avLst/>
@@ -15085,13 +14754,13 @@
               </a:spcAft>
             </a:pPr>
             <a:r>
-              <a:rPr sz="2800" b="1">
+              <a:rPr sz="2400" b="1">
                 <a:solidFill>
                   <a:srgbClr val="14141C"/>
                 </a:solidFill>
                 <a:latin typeface="Helvetica Neue"/>
               </a:rPr>
-              <a:t>What we chose to measure, and why</a:t>
+              <a:t>Technical architecture</a:t>
             </a:r>
           </a:p>
         </p:txBody>
@@ -15104,8 +14773,8 @@
         </p:nvSpPr>
         <p:spPr>
           <a:xfrm>
-            <a:off x="548640" y="1115568"/>
-            <a:ext cx="1463040" cy="64008"/>
+            <a:off x="548640" y="960120"/>
+            <a:ext cx="1463040" cy="54864"/>
           </a:xfrm>
           <a:prstGeom prst="rect">
             <a:avLst/>
@@ -15141,16 +14810,40 @@
           </a:p>
         </p:txBody>
       </p:sp>
-      <p:sp>
-        <p:nvSpPr>
-          <p:cNvPr id="4" name="TextBox 3"/>
+      <p:pic>
+        <p:nvPicPr>
+          <p:cNvPr id="4" name="Picture 3" descr="diagram_architecture.png"/>
+          <p:cNvPicPr>
+            <a:picLocks noChangeAspect="1"/>
+          </p:cNvPicPr>
+          <p:nvPr/>
+        </p:nvPicPr>
+        <p:blipFill>
+          <a:blip r:embed="rId2"/>
+          <a:stretch>
+            <a:fillRect/>
+          </a:stretch>
+        </p:blipFill>
+        <p:spPr>
+          <a:xfrm>
+            <a:off x="1828647" y="1325880"/>
+            <a:ext cx="8534400" cy="4800600"/>
+          </a:xfrm>
+          <a:prstGeom prst="rect">
+            <a:avLst/>
+          </a:prstGeom>
+        </p:spPr>
+      </p:pic>
+      <p:sp>
+        <p:nvSpPr>
+          <p:cNvPr id="5" name="TextBox 4"/>
           <p:cNvSpPr txBox="1"/>
           <p:nvPr/>
         </p:nvSpPr>
         <p:spPr>
           <a:xfrm>
-            <a:off x="685800" y="1463040"/>
-            <a:ext cx="10881360" cy="4754880"/>
+            <a:off x="685800" y="6236208"/>
+            <a:ext cx="10881360" cy="457200"/>
           </a:xfrm>
           <a:prstGeom prst="rect">
             <a:avLst/>
@@ -15168,230 +14861,24 @@
                 <a:spcPct val="105000"/>
               </a:lnSpc>
               <a:spcAft>
-                <a:spcPts val="200"/>
-              </a:spcAft>
-            </a:pPr>
-            <a:r>
-              <a:rPr sz="1500" b="1">
-                <a:solidFill>
-                  <a:srgbClr val="14141C"/>
-                </a:solidFill>
-                <a:latin typeface="Helvetica Neue"/>
-              </a:rPr>
-              <a:t>•  104 declared features, 36 actually compared</a:t>
-            </a:r>
-          </a:p>
-          <a:p>
-            <a:pPr algn="l">
-              <a:lnSpc>
-                <a:spcPct val="105000"/>
-              </a:lnSpc>
-              <a:spcAft>
-                <a:spcPts val="1000"/>
-              </a:spcAft>
-            </a:pPr>
-            <a:r>
-              <a:rPr sz="1300" b="0">
+                <a:spcPts val="600"/>
+              </a:spcAft>
+            </a:pPr>
+            <a:r>
+              <a:rPr sz="1200" b="0">
                 <a:solidFill>
                   <a:srgbClr val="585868"/>
                 </a:solidFill>
                 <a:latin typeface="Helvetica Neue"/>
               </a:rPr>
-              <a:t>     Nothing is hidden in that reduction — the run prints it: 18 provenance fields that identify a page rather than describe a campaign, 4 free-text identifiers no two pages share, 8 within_language features that stop being comparable once the set spans three languages, 27 categorical or list features a euclidean distance cannot take raw, 2 missing on at least one bank, 8 identical everywhere, and 1 withdrawn because its capture is missing what it counts.</a:t>
-            </a:r>
-          </a:p>
-          <a:p>
-            <a:pPr algn="l">
-              <a:lnSpc>
-                <a:spcPct val="105000"/>
-              </a:lnSpc>
-              <a:spcAft>
-                <a:spcPts val="200"/>
-              </a:spcAft>
-            </a:pPr>
-            <a:r>
-              <a:rPr sz="1500" b="1">
-                <a:solidFill>
-                  <a:srgbClr val="14141C"/>
-                </a:solidFill>
-                <a:latin typeface="Helvetica Neue"/>
-              </a:rPr>
-              <a:t>•  51 pages collected and scored, 18 compared</a:t>
-            </a:r>
-          </a:p>
-          <a:p>
-            <a:pPr algn="l">
-              <a:lnSpc>
-                <a:spcPct val="105000"/>
-              </a:lnSpc>
-              <a:spcAft>
-                <a:spcPts val="1000"/>
-              </a:spcAft>
-            </a:pPr>
-            <a:r>
-              <a:rPr sz="1300" b="0">
-                <a:solidFill>
-                  <a:srgbClr val="585868"/>
-                </a:solidFill>
-                <a:latin typeface="Helvetica Neue"/>
-              </a:rPr>
-              <a:t>     One product family at a time (DR-04). A mortgage page and a current-account page differ because the products differ, not because the banks communicate differently, so pooling them would confound every result with the product. The other 33 pages are scored and in the dataset, ready for the same comparison on savings or on mortgages.</a:t>
-            </a:r>
-          </a:p>
-          <a:p>
-            <a:pPr algn="l">
-              <a:lnSpc>
-                <a:spcPct val="105000"/>
-              </a:lnSpc>
-              <a:spcAft>
-                <a:spcPts val="200"/>
-              </a:spcAft>
-            </a:pPr>
-            <a:r>
-              <a:rPr sz="1500" b="1">
-                <a:solidFill>
-                  <a:srgbClr val="14141C"/>
-                </a:solidFill>
-                <a:latin typeface="Helvetica Neue"/>
-              </a:rPr>
-              <a:t>•  14 Belgian retail banks, both sides of the market</a:t>
-            </a:r>
-          </a:p>
-          <a:p>
-            <a:pPr algn="l">
-              <a:lnSpc>
-                <a:spcPct val="105000"/>
-              </a:lnSpc>
-              <a:spcAft>
-                <a:spcPts val="1000"/>
-              </a:spcAft>
-            </a:pPr>
-            <a:r>
-              <a:rPr sz="1300" b="0">
-                <a:solidFill>
-                  <a:srgbClr val="585868"/>
-                </a:solidFill>
-                <a:latin typeface="Helvetica Neue"/>
-              </a:rPr>
-              <a:t>     Ten incumbents and four challengers, so the traditional↔challenger axis has banks on both sides of it. Belgian market only, confirmed with the client — ING.nl is out of scope, and so is professional and business banking.</a:t>
-            </a:r>
-          </a:p>
-          <a:p>
-            <a:pPr algn="l">
-              <a:lnSpc>
-                <a:spcPct val="105000"/>
-              </a:lnSpc>
-              <a:spcAft>
-                <a:spcPts val="200"/>
-              </a:spcAft>
-            </a:pPr>
-            <a:r>
-              <a:rPr sz="1500" b="1">
-                <a:solidFill>
-                  <a:srgbClr val="14141C"/>
-                </a:solidFill>
-                <a:latin typeface="Helvetica Neue"/>
-              </a:rPr>
-              <a:t>•  The open web, and only the open web</a:t>
-            </a:r>
-          </a:p>
-          <a:p>
-            <a:pPr algn="l">
-              <a:lnSpc>
-                <a:spcPct val="105000"/>
-              </a:lnSpc>
-              <a:spcAft>
-                <a:spcPts val="1000"/>
-              </a:spcAft>
-            </a:pPr>
-            <a:r>
-              <a:rPr sz="1300" b="0">
-                <a:solidFill>
-                  <a:srgbClr val="585868"/>
-                </a:solidFill>
-                <a:latin typeface="Helvetica Neue"/>
-              </a:rPr>
-              <a:t>     Public campaign pages, fetched once, robots.txt checked before every request. Social, in-app and email are out of scope and may be where a bank's real communication happens — that is a limit of this study, not of the market.</a:t>
-            </a:r>
-          </a:p>
-          <a:p>
-            <a:pPr algn="l">
-              <a:lnSpc>
-                <a:spcPct val="105000"/>
-              </a:lnSpc>
-              <a:spcAft>
-                <a:spcPts val="200"/>
-              </a:spcAft>
-            </a:pPr>
-            <a:r>
-              <a:rPr sz="1500" b="1">
-                <a:solidFill>
-                  <a:srgbClr val="14141C"/>
-                </a:solidFill>
-                <a:latin typeface="Helvetica Neue"/>
-              </a:rPr>
-              <a:t>•  Description, never causation</a:t>
-            </a:r>
-          </a:p>
-          <a:p>
-            <a:pPr algn="l">
-              <a:lnSpc>
-                <a:spcPct val="105000"/>
-              </a:lnSpc>
-              <a:spcAft>
-                <a:spcPts val="1000"/>
-              </a:spcAft>
-            </a:pPr>
-            <a:r>
-              <a:rPr sz="1300" b="0">
-                <a:solidFill>
-                  <a:srgbClr val="585868"/>
-                </a:solidFill>
-                <a:latin typeface="Helvetica Neue"/>
-              </a:rPr>
-              <a:t>     No click, conversion or performance data exists in this project, so nothing here says a design choice produced a result. Every finding is a difference, and every recommendation a hypothesis ING could test.</a:t>
-            </a:r>
-          </a:p>
-          <a:p>
-            <a:pPr algn="l">
-              <a:lnSpc>
-                <a:spcPct val="105000"/>
-              </a:lnSpc>
-              <a:spcAft>
-                <a:spcPts val="200"/>
-              </a:spcAft>
-            </a:pPr>
-            <a:endParaRPr sz="1300" b="0">
-              <a:solidFill>
-                <a:srgbClr val="585868"/>
-              </a:solidFill>
-              <a:latin typeface="Helvetica Neue"/>
-            </a:endParaRPr>
-          </a:p>
-          <a:p>
-            <a:pPr algn="l">
-              <a:lnSpc>
-                <a:spcPct val="105000"/>
-              </a:lnSpc>
-              <a:spcAft>
-                <a:spcPts val="0"/>
-              </a:spcAft>
-            </a:pPr>
-            <a:r>
-              <a:rPr sz="1250" b="0">
-                <a:solidFill>
-                  <a:srgbClr val="585868"/>
-                </a:solidFill>
-                <a:latin typeface="Helvetica Neue"/>
-              </a:rPr>
-              <a:t>Scope is a decision, not a leftover: each line above is a thing we chose not to measure, and why.</a:t>
-            </a:r>
-          </a:p>
-        </p:txBody>
-      </p:sp>
-      <p:sp>
-        <p:nvSpPr>
-          <p:cNvPr id="5" name="TextBox 4"/>
+              <a:t>A library with no I/O assumptions, thin CLI wrappers, and two callers — so no figure has a second definition.</a:t>
+            </a:r>
+          </a:p>
+        </p:txBody>
+      </p:sp>
+      <p:sp>
+        <p:nvSpPr>
+          <p:cNvPr id="6" name="TextBox 5"/>
           <p:cNvSpPr txBox="1"/>
           <p:nvPr/>
         </p:nvSpPr>
@@ -15433,7 +14920,7 @@
       </p:sp>
       <p:sp>
         <p:nvSpPr>
-          <p:cNvPr id="6" name="TextBox 5"/>
+          <p:cNvPr id="7" name="TextBox 6"/>
           <p:cNvSpPr txBox="1"/>
           <p:nvPr/>
         </p:nvSpPr>
@@ -15535,7 +15022,7 @@
                 </a:solidFill>
                 <a:latin typeface="Helvetica Neue"/>
               </a:rPr>
-              <a:t>Technical architecture</a:t>
+              <a:t>How a number earns trust</a:t>
             </a:r>
           </a:p>
         </p:txBody>
@@ -15587,7 +15074,7 @@
       </p:sp>
       <p:pic>
         <p:nvPicPr>
-          <p:cNvPr id="4" name="Picture 3" descr="diagram_architecture.png"/>
+          <p:cNvPr id="4" name="Picture 3" descr="diagram_trust.png"/>
           <p:cNvPicPr>
             <a:picLocks noChangeAspect="1"/>
           </p:cNvPicPr>
@@ -15646,7 +15133,7 @@
                 </a:solidFill>
                 <a:latin typeface="Helvetica Neue"/>
               </a:rPr>
-              <a:t>A library with no I/O assumptions, thin CLI wrappers, and two callers — so no figure has a second definition.</a:t>
+              <a:t>Each feature declares how it was produced, and that label travels all the way to the screen.</a:t>
             </a:r>
           </a:p>
         </p:txBody>
@@ -15768,8 +15255,8 @@
         </p:nvSpPr>
         <p:spPr>
           <a:xfrm>
-            <a:off x="548640" y="320040"/>
-            <a:ext cx="11064240" cy="640080"/>
+            <a:off x="548640" y="384048"/>
+            <a:ext cx="11064240" cy="731520"/>
           </a:xfrm>
           <a:prstGeom prst="rect">
             <a:avLst/>
@@ -15791,13 +15278,13 @@
               </a:spcAft>
             </a:pPr>
             <a:r>
-              <a:rPr sz="2400" b="1">
+              <a:rPr sz="2800" b="1">
                 <a:solidFill>
                   <a:srgbClr val="14141C"/>
                 </a:solidFill>
                 <a:latin typeface="Helvetica Neue"/>
               </a:rPr>
-              <a:t>How a number earns trust</a:t>
+              <a:t>The feature dictionary is the contract</a:t>
             </a:r>
           </a:p>
         </p:txBody>
@@ -15810,8 +15297,8 @@
         </p:nvSpPr>
         <p:spPr>
           <a:xfrm>
-            <a:off x="548640" y="960120"/>
-            <a:ext cx="1463040" cy="54864"/>
+            <a:off x="548640" y="1115568"/>
+            <a:ext cx="1463040" cy="64008"/>
           </a:xfrm>
           <a:prstGeom prst="rect">
             <a:avLst/>
@@ -15847,40 +15334,16 @@
           </a:p>
         </p:txBody>
       </p:sp>
-      <p:pic>
-        <p:nvPicPr>
-          <p:cNvPr id="4" name="Picture 3" descr="diagram_trust.png"/>
-          <p:cNvPicPr>
-            <a:picLocks noChangeAspect="1"/>
-          </p:cNvPicPr>
-          <p:nvPr/>
-        </p:nvPicPr>
-        <p:blipFill>
-          <a:blip r:embed="rId2"/>
-          <a:stretch>
-            <a:fillRect/>
-          </a:stretch>
-        </p:blipFill>
-        <p:spPr>
-          <a:xfrm>
-            <a:off x="1828647" y="1325880"/>
-            <a:ext cx="8534400" cy="4800600"/>
-          </a:xfrm>
-          <a:prstGeom prst="rect">
-            <a:avLst/>
-          </a:prstGeom>
-        </p:spPr>
-      </p:pic>
-      <p:sp>
-        <p:nvSpPr>
-          <p:cNvPr id="5" name="TextBox 4"/>
+      <p:sp>
+        <p:nvSpPr>
+          <p:cNvPr id="4" name="TextBox 3"/>
           <p:cNvSpPr txBox="1"/>
           <p:nvPr/>
         </p:nvSpPr>
         <p:spPr>
           <a:xfrm>
-            <a:off x="685800" y="6236208"/>
-            <a:ext cx="10881360" cy="457200"/>
+            <a:off x="685800" y="1463040"/>
+            <a:ext cx="10881360" cy="4754880"/>
           </a:xfrm>
           <a:prstGeom prst="rect">
             <a:avLst/>
@@ -15898,24 +15361,195 @@
                 <a:spcPct val="105000"/>
               </a:lnSpc>
               <a:spcAft>
-                <a:spcPts val="600"/>
-              </a:spcAft>
-            </a:pPr>
-            <a:r>
-              <a:rPr sz="1200" b="0">
+                <a:spcPts val="200"/>
+              </a:spcAft>
+            </a:pPr>
+            <a:r>
+              <a:rPr sz="1500" b="1">
+                <a:solidFill>
+                  <a:srgbClr val="14141C"/>
+                </a:solidFill>
+                <a:latin typeface="Helvetica Neue"/>
+              </a:rPr>
+              <a:t>•  104 features, each declaring three things</a:t>
+            </a:r>
+          </a:p>
+          <a:p>
+            <a:pPr algn="l">
+              <a:lnSpc>
+                <a:spcPct val="105000"/>
+              </a:lnSpc>
+              <a:spcAft>
+                <a:spcPts val="1000"/>
+              </a:spcAft>
+            </a:pPr>
+            <a:r>
+              <a:rPr sz="1300" b="0">
                 <a:solidFill>
                   <a:srgbClr val="585868"/>
                 </a:solidFill>
                 <a:latin typeface="Helvetica Neue"/>
               </a:rPr>
-              <a:t>Each feature declares how it was produced, and that label travels all the way to the screen.</a:t>
-            </a:r>
-          </a:p>
-        </p:txBody>
-      </p:sp>
-      <p:sp>
-        <p:nvSpPr>
-          <p:cNvPr id="6" name="TextBox 5"/>
+              <a:t>     how it was extracted (automatic / rubric / model-assisted / derived), how it may be compared, and whether it is core or extended.</a:t>
+            </a:r>
+          </a:p>
+          <a:p>
+            <a:pPr algn="l">
+              <a:lnSpc>
+                <a:spcPct val="105000"/>
+              </a:lnSpc>
+              <a:spcAft>
+                <a:spcPts val="200"/>
+              </a:spcAft>
+            </a:pPr>
+            <a:r>
+              <a:rPr sz="1500" b="1">
+                <a:solidFill>
+                  <a:srgbClr val="14141C"/>
+                </a:solidFill>
+                <a:latin typeface="Helvetica Neue"/>
+              </a:rPr>
+              <a:t>•  Everything else is derived from it</a:t>
+            </a:r>
+          </a:p>
+          <a:p>
+            <a:pPr algn="l">
+              <a:lnSpc>
+                <a:spcPct val="105000"/>
+              </a:lnSpc>
+              <a:spcAft>
+                <a:spcPts val="1000"/>
+              </a:spcAft>
+            </a:pPr>
+            <a:r>
+              <a:rPr sz="1300" b="0">
+                <a:solidFill>
+                  <a:srgbClr val="585868"/>
+                </a:solidFill>
+                <a:latin typeface="Helvetica Neue"/>
+              </a:rPr>
+              <a:t>     The dataset schema, the validator and the published feature dictionary are generated from the same YAML, so they cannot drift apart.</a:t>
+            </a:r>
+          </a:p>
+          <a:p>
+            <a:pPr algn="l">
+              <a:lnSpc>
+                <a:spcPct val="105000"/>
+              </a:lnSpc>
+              <a:spcAft>
+                <a:spcPts val="200"/>
+              </a:spcAft>
+            </a:pPr>
+            <a:r>
+              <a:rPr sz="1500" b="1">
+                <a:solidFill>
+                  <a:srgbClr val="14141C"/>
+                </a:solidFill>
+                <a:latin typeface="Helvetica Neue"/>
+              </a:rPr>
+              <a:t>•  The freeze rule: add, never rename</a:t>
+            </a:r>
+          </a:p>
+          <a:p>
+            <a:pPr algn="l">
+              <a:lnSpc>
+                <a:spcPct val="105000"/>
+              </a:lnSpc>
+              <a:spcAft>
+                <a:spcPts val="1000"/>
+              </a:spcAft>
+            </a:pPr>
+            <a:r>
+              <a:rPr sz="1300" b="0">
+                <a:solidFill>
+                  <a:srgbClr val="585868"/>
+                </a:solidFill>
+                <a:latin typeface="Helvetica Neue"/>
+              </a:rPr>
+              <a:t>     After the Day 2 freeze, columns may be added; renames and removals need all three of us, because analysis code depends on them.</a:t>
+            </a:r>
+          </a:p>
+          <a:p>
+            <a:pPr algn="l">
+              <a:lnSpc>
+                <a:spcPct val="105000"/>
+              </a:lnSpc>
+              <a:spcAft>
+                <a:spcPts val="200"/>
+              </a:spcAft>
+            </a:pPr>
+            <a:r>
+              <a:rPr sz="1500" b="1">
+                <a:solidFill>
+                  <a:srgbClr val="14141C"/>
+                </a:solidFill>
+                <a:latin typeface="Helvetica Neue"/>
+              </a:rPr>
+              <a:t>•  Two checks, deliberately different</a:t>
+            </a:r>
+          </a:p>
+          <a:p>
+            <a:pPr algn="l">
+              <a:lnSpc>
+                <a:spcPct val="105000"/>
+              </a:lnSpc>
+              <a:spcAft>
+                <a:spcPts val="1000"/>
+              </a:spcAft>
+            </a:pPr>
+            <a:r>
+              <a:rPr sz="1300" b="0">
+                <a:solidFill>
+                  <a:srgbClr val="585868"/>
+                </a:solidFill>
+                <a:latin typeface="Helvetica Neue"/>
+              </a:rPr>
+              <a:t>     A byte-equality test catches an accidental edit; the semantic freeze check catches a rename that happens to keep the bytes matching.</a:t>
+            </a:r>
+          </a:p>
+          <a:p>
+            <a:pPr algn="l">
+              <a:lnSpc>
+                <a:spcPct val="105000"/>
+              </a:lnSpc>
+              <a:spcAft>
+                <a:spcPts val="200"/>
+              </a:spcAft>
+            </a:pPr>
+            <a:r>
+              <a:rPr sz="1500" b="1">
+                <a:solidFill>
+                  <a:srgbClr val="14141C"/>
+                </a:solidFill>
+                <a:latin typeface="Helvetica Neue"/>
+              </a:rPr>
+              <a:t>•  It grew twice, legitimately</a:t>
+            </a:r>
+          </a:p>
+          <a:p>
+            <a:pPr algn="l">
+              <a:lnSpc>
+                <a:spcPct val="105000"/>
+              </a:lnSpc>
+              <a:spcAft>
+                <a:spcPts val="1000"/>
+              </a:spcAft>
+            </a:pPr>
+            <a:r>
+              <a:rPr sz="1300" b="0">
+                <a:solidFill>
+                  <a:srgbClr val="585868"/>
+                </a:solidFill>
+                <a:latin typeface="Helvetica Neue"/>
+              </a:rPr>
+              <a:t>     3 features added after the freeze, and the bank list extended to 12 values — both additions, both recorded.</a:t>
+            </a:r>
+          </a:p>
+        </p:txBody>
+      </p:sp>
+      <p:sp>
+        <p:nvSpPr>
+          <p:cNvPr id="5" name="TextBox 4"/>
           <p:cNvSpPr txBox="1"/>
           <p:nvPr/>
         </p:nvSpPr>
@@ -15957,7 +15591,7 @@
       </p:sp>
       <p:sp>
         <p:nvSpPr>
-          <p:cNvPr id="7" name="TextBox 6"/>
+          <p:cNvPr id="6" name="TextBox 5"/>
           <p:cNvSpPr txBox="1"/>
           <p:nvPr/>
         </p:nvSpPr>
@@ -16059,7 +15693,7 @@
                 </a:solidFill>
                 <a:latin typeface="Helvetica Neue"/>
               </a:rPr>
-              <a:t>The feature dictionary is the contract</a:t>
+              <a:t>Collection and compliance</a:t>
             </a:r>
           </a:p>
         </p:txBody>
@@ -16146,7 +15780,7 @@
                 </a:solidFill>
                 <a:latin typeface="Helvetica Neue"/>
               </a:rPr>
-              <a:t>•  104 features, each declaring three things</a:t>
+              <a:t>•  robots.txt is checked live before every fetch, and fails closed</a:t>
             </a:r>
           </a:p>
           <a:p>
@@ -16165,7 +15799,7 @@
                 </a:solidFill>
                 <a:latin typeface="Helvetica Neue"/>
               </a:rPr>
-              <a:t>     how it was extracted (automatic / rubric / model-assisted / derived), how it may be compared, and whether it is core or extended.</a:t>
+              <a:t>     If robots.txt cannot be read, the URL is treated as not allowed. Every row carries robots_allowed; the validator refuses a row where it is false.</a:t>
             </a:r>
           </a:p>
           <a:p>
@@ -16184,7 +15818,7 @@
                 </a:solidFill>
                 <a:latin typeface="Helvetica Neue"/>
               </a:rPr>
-              <a:t>•  Everything else is derived from it</a:t>
+              <a:t>•  Pages are rendered, not just downloaded</a:t>
             </a:r>
           </a:p>
           <a:p>
@@ -16203,7 +15837,7 @@
                 </a:solidFill>
                 <a:latin typeface="Helvetica Neue"/>
               </a:rPr>
-              <a:t>     The dataset schema, the validator and the published feature dictionary are generated from the same YAML, so they cannot drift apart.</a:t>
+              <a:t>     A headless browser reads the page as a visitor sees it, which also fills the geometry features — page height, above-fold elements, image area.</a:t>
             </a:r>
           </a:p>
           <a:p>
@@ -16222,7 +15856,7 @@
                 </a:solidFill>
                 <a:latin typeface="Helvetica Neue"/>
               </a:rPr>
-              <a:t>•  The freeze rule: add, never rename</a:t>
+              <a:t>•  A quality gate judges the capture, not just the numbers</a:t>
             </a:r>
           </a:p>
           <a:p>
@@ -16241,7 +15875,7 @@
                 </a:solidFill>
                 <a:latin typeface="Helvetica Neue"/>
               </a:rPr>
-              <a:t>     After the Day 2 freeze, columns may be added; renames and removals need all three of us, because analysis code depends on them.</a:t>
+              <a:t>     Two early captures passed every range check while being an empty JavaScript shell and a maintenance notice. capture_quality now travels with the row.</a:t>
             </a:r>
           </a:p>
           <a:p>
@@ -16260,7 +15894,7 @@
                 </a:solidFill>
                 <a:latin typeface="Helvetica Neue"/>
               </a:rPr>
-              <a:t>•  Two checks, deliberately different</a:t>
+              <a:t>•  When a site will not serve us, a person saves the page</a:t>
             </a:r>
           </a:p>
           <a:p>
@@ -16279,45 +15913,7 @@
                 </a:solidFill>
                 <a:latin typeface="Helvetica Neue"/>
               </a:rPr>
-              <a:t>     A byte-equality test catches an accidental edit; the semantic freeze check catches a rename that happens to keep the bytes matching.</a:t>
-            </a:r>
-          </a:p>
-          <a:p>
-            <a:pPr algn="l">
-              <a:lnSpc>
-                <a:spcPct val="105000"/>
-              </a:lnSpc>
-              <a:spcAft>
-                <a:spcPts val="200"/>
-              </a:spcAft>
-            </a:pPr>
-            <a:r>
-              <a:rPr sz="1500" b="1">
-                <a:solidFill>
-                  <a:srgbClr val="14141C"/>
-                </a:solidFill>
-                <a:latin typeface="Helvetica Neue"/>
-              </a:rPr>
-              <a:t>•  It grew twice, legitimately</a:t>
-            </a:r>
-          </a:p>
-          <a:p>
-            <a:pPr algn="l">
-              <a:lnSpc>
-                <a:spcPct val="105000"/>
-              </a:lnSpc>
-              <a:spcAft>
-                <a:spcPts val="1000"/>
-              </a:spcAft>
-            </a:pPr>
-            <a:r>
-              <a:rPr sz="1300" b="0">
-                <a:solidFill>
-                  <a:srgbClr val="585868"/>
-                </a:solidFill>
-                <a:latin typeface="Helvetica Neue"/>
-              </a:rPr>
-              <a:t>     3 features added after the freeze, and the bank list extended to 12 values — both additions, both recorded.</a:t>
+              <a:t>     BNP Paribas Fortis blocks automated traffic (HTTP 503) and Revolut's headless render is refused; the importer takes a browser-saved page, re-checks robots, and marks it manual_capture.</a:t>
             </a:r>
           </a:p>
         </p:txBody>
@@ -16439,8 +16035,8 @@
         </p:nvSpPr>
         <p:spPr>
           <a:xfrm>
-            <a:off x="548640" y="384048"/>
-            <a:ext cx="11064240" cy="731520"/>
+            <a:off x="548640" y="320040"/>
+            <a:ext cx="11064240" cy="640080"/>
           </a:xfrm>
           <a:prstGeom prst="rect">
             <a:avLst/>
@@ -16462,13 +16058,13 @@
               </a:spcAft>
             </a:pPr>
             <a:r>
-              <a:rPr sz="2800" b="1">
+              <a:rPr sz="2400" b="1">
                 <a:solidFill>
                   <a:srgbClr val="14141C"/>
                 </a:solidFill>
                 <a:latin typeface="Helvetica Neue"/>
               </a:rPr>
-              <a:t>Collection and compliance</a:t>
+              <a:t>The Analysis tab</a:t>
             </a:r>
           </a:p>
         </p:txBody>
@@ -16481,8 +16077,8 @@
         </p:nvSpPr>
         <p:spPr>
           <a:xfrm>
-            <a:off x="548640" y="1115568"/>
-            <a:ext cx="1463040" cy="64008"/>
+            <a:off x="548640" y="960120"/>
+            <a:ext cx="1463040" cy="54864"/>
           </a:xfrm>
           <a:prstGeom prst="rect">
             <a:avLst/>
@@ -16518,16 +16114,40 @@
           </a:p>
         </p:txBody>
       </p:sp>
-      <p:sp>
-        <p:nvSpPr>
-          <p:cNvPr id="4" name="TextBox 3"/>
+      <p:pic>
+        <p:nvPicPr>
+          <p:cNvPr id="4" name="Picture 3" descr="01_analysis.png"/>
+          <p:cNvPicPr>
+            <a:picLocks noChangeAspect="1"/>
+          </p:cNvPicPr>
+          <p:nvPr/>
+        </p:nvPicPr>
+        <p:blipFill>
+          <a:blip r:embed="rId2"/>
+          <a:stretch>
+            <a:fillRect/>
+          </a:stretch>
+        </p:blipFill>
+        <p:spPr>
+          <a:xfrm>
+            <a:off x="1828647" y="1325880"/>
+            <a:ext cx="8534400" cy="4800600"/>
+          </a:xfrm>
+          <a:prstGeom prst="rect">
+            <a:avLst/>
+          </a:prstGeom>
+        </p:spPr>
+      </p:pic>
+      <p:sp>
+        <p:nvSpPr>
+          <p:cNvPr id="5" name="TextBox 4"/>
           <p:cNvSpPr txBox="1"/>
           <p:nvPr/>
         </p:nvSpPr>
         <p:spPr>
           <a:xfrm>
-            <a:off x="685800" y="1463040"/>
-            <a:ext cx="10881360" cy="4754880"/>
+            <a:off x="685800" y="6236208"/>
+            <a:ext cx="10881360" cy="457200"/>
           </a:xfrm>
           <a:prstGeom prst="rect">
             <a:avLst/>
@@ -16545,157 +16165,24 @@
                 <a:spcPct val="105000"/>
               </a:lnSpc>
               <a:spcAft>
-                <a:spcPts val="200"/>
-              </a:spcAft>
-            </a:pPr>
-            <a:r>
-              <a:rPr sz="1500" b="1">
-                <a:solidFill>
-                  <a:srgbClr val="14141C"/>
-                </a:solidFill>
-                <a:latin typeface="Helvetica Neue"/>
-              </a:rPr>
-              <a:t>•  robots.txt is checked live before every fetch, and fails closed</a:t>
-            </a:r>
-          </a:p>
-          <a:p>
-            <a:pPr algn="l">
-              <a:lnSpc>
-                <a:spcPct val="105000"/>
-              </a:lnSpc>
-              <a:spcAft>
-                <a:spcPts val="1000"/>
-              </a:spcAft>
-            </a:pPr>
-            <a:r>
-              <a:rPr sz="1300" b="0">
+                <a:spcPts val="600"/>
+              </a:spcAft>
+            </a:pPr>
+            <a:r>
+              <a:rPr sz="1200" b="0">
                 <a:solidFill>
                   <a:srgbClr val="585868"/>
                 </a:solidFill>
                 <a:latin typeface="Helvetica Neue"/>
               </a:rPr>
-              <a:t>     If robots.txt cannot be read, the URL is treated as not allowed. Every row carries robots_allowed; the validator refuses a row where it is false.</a:t>
-            </a:r>
-          </a:p>
-          <a:p>
-            <a:pPr algn="l">
-              <a:lnSpc>
-                <a:spcPct val="105000"/>
-              </a:lnSpc>
-              <a:spcAft>
-                <a:spcPts val="200"/>
-              </a:spcAft>
-            </a:pPr>
-            <a:r>
-              <a:rPr sz="1500" b="1">
-                <a:solidFill>
-                  <a:srgbClr val="14141C"/>
-                </a:solidFill>
-                <a:latin typeface="Helvetica Neue"/>
-              </a:rPr>
-              <a:t>•  Pages are rendered, not just downloaded</a:t>
-            </a:r>
-          </a:p>
-          <a:p>
-            <a:pPr algn="l">
-              <a:lnSpc>
-                <a:spcPct val="105000"/>
-              </a:lnSpc>
-              <a:spcAft>
-                <a:spcPts val="1000"/>
-              </a:spcAft>
-            </a:pPr>
-            <a:r>
-              <a:rPr sz="1300" b="0">
-                <a:solidFill>
-                  <a:srgbClr val="585868"/>
-                </a:solidFill>
-                <a:latin typeface="Helvetica Neue"/>
-              </a:rPr>
-              <a:t>     A headless browser reads the page as a visitor sees it, which also fills the geometry features — page height, above-fold elements, image area.</a:t>
-            </a:r>
-          </a:p>
-          <a:p>
-            <a:pPr algn="l">
-              <a:lnSpc>
-                <a:spcPct val="105000"/>
-              </a:lnSpc>
-              <a:spcAft>
-                <a:spcPts val="200"/>
-              </a:spcAft>
-            </a:pPr>
-            <a:r>
-              <a:rPr sz="1500" b="1">
-                <a:solidFill>
-                  <a:srgbClr val="14141C"/>
-                </a:solidFill>
-                <a:latin typeface="Helvetica Neue"/>
-              </a:rPr>
-              <a:t>•  A quality gate judges the capture, not just the numbers</a:t>
-            </a:r>
-          </a:p>
-          <a:p>
-            <a:pPr algn="l">
-              <a:lnSpc>
-                <a:spcPct val="105000"/>
-              </a:lnSpc>
-              <a:spcAft>
-                <a:spcPts val="1000"/>
-              </a:spcAft>
-            </a:pPr>
-            <a:r>
-              <a:rPr sz="1300" b="0">
-                <a:solidFill>
-                  <a:srgbClr val="585868"/>
-                </a:solidFill>
-                <a:latin typeface="Helvetica Neue"/>
-              </a:rPr>
-              <a:t>     Two early captures passed every range check while being an empty JavaScript shell and a maintenance notice. capture_quality now travels with the row.</a:t>
-            </a:r>
-          </a:p>
-          <a:p>
-            <a:pPr algn="l">
-              <a:lnSpc>
-                <a:spcPct val="105000"/>
-              </a:lnSpc>
-              <a:spcAft>
-                <a:spcPts val="200"/>
-              </a:spcAft>
-            </a:pPr>
-            <a:r>
-              <a:rPr sz="1500" b="1">
-                <a:solidFill>
-                  <a:srgbClr val="14141C"/>
-                </a:solidFill>
-                <a:latin typeface="Helvetica Neue"/>
-              </a:rPr>
-              <a:t>•  When a site will not serve us, a person saves the page</a:t>
-            </a:r>
-          </a:p>
-          <a:p>
-            <a:pPr algn="l">
-              <a:lnSpc>
-                <a:spcPct val="105000"/>
-              </a:lnSpc>
-              <a:spcAft>
-                <a:spcPts val="1000"/>
-              </a:spcAft>
-            </a:pPr>
-            <a:r>
-              <a:rPr sz="1300" b="0">
-                <a:solidFill>
-                  <a:srgbClr val="585868"/>
-                </a:solidFill>
-                <a:latin typeface="Helvetica Neue"/>
-              </a:rPr>
-              <a:t>     BNP Paribas Fortis blocks automated traffic (HTTP 503) and Revolut's headless render is refused; the importer takes a browser-saved page, re-checks robots, and marks it manual_capture.</a:t>
-            </a:r>
-          </a:p>
-        </p:txBody>
-      </p:sp>
-      <p:sp>
-        <p:nvSpPr>
-          <p:cNvPr id="5" name="TextBox 4"/>
+              <a:t>Scope, focus and the verdict above the first number — the reader cannot see a figure without seeing what it covers.</a:t>
+            </a:r>
+          </a:p>
+        </p:txBody>
+      </p:sp>
+      <p:sp>
+        <p:nvSpPr>
+          <p:cNvPr id="6" name="TextBox 5"/>
           <p:cNvSpPr txBox="1"/>
           <p:nvPr/>
         </p:nvSpPr>
@@ -16737,7 +16224,7 @@
       </p:sp>
       <p:sp>
         <p:nvSpPr>
-          <p:cNvPr id="6" name="TextBox 5"/>
+          <p:cNvPr id="7" name="TextBox 6"/>
           <p:cNvSpPr txBox="1"/>
           <p:nvPr/>
         </p:nvSpPr>
@@ -16839,7 +16326,7 @@
                 </a:solidFill>
                 <a:latin typeface="Helvetica Neue"/>
               </a:rPr>
-              <a:t>The Analysis tab</a:t>
+              <a:t>The Reputation tab: what each bank is in the news about</a:t>
             </a:r>
           </a:p>
         </p:txBody>
@@ -16891,7 +16378,7 @@
       </p:sp>
       <p:pic>
         <p:nvPicPr>
-          <p:cNvPr id="4" name="Picture 3" descr="01_analysis.png"/>
+          <p:cNvPr id="4" name="Picture 3" descr="03_reputation.png"/>
           <p:cNvPicPr>
             <a:picLocks noChangeAspect="1"/>
           </p:cNvPicPr>
@@ -16950,7 +16437,7 @@
                 </a:solidFill>
                 <a:latin typeface="Helvetica Neue"/>
               </a:rPr>
-              <a:t>Scope, focus and the verdict above the first number — the reader cannot see a figure without seeing what it covers.</a:t>
+              <a:t>Headline themes — innovation, crisis, results — counted, never scored for sentiment. Two news providers are merged, in three languages.</a:t>
             </a:r>
           </a:p>
         </p:txBody>
@@ -17072,8 +16559,8 @@
         </p:nvSpPr>
         <p:spPr>
           <a:xfrm>
-            <a:off x="548640" y="320040"/>
-            <a:ext cx="11064240" cy="640080"/>
+            <a:off x="548640" y="384048"/>
+            <a:ext cx="11064240" cy="731520"/>
           </a:xfrm>
           <a:prstGeom prst="rect">
             <a:avLst/>
@@ -17095,13 +16582,13 @@
               </a:spcAft>
             </a:pPr>
             <a:r>
-              <a:rPr sz="2400" b="1">
+              <a:rPr sz="2800" b="1">
                 <a:solidFill>
                   <a:srgbClr val="14141C"/>
                 </a:solidFill>
                 <a:latin typeface="Helvetica Neue"/>
               </a:rPr>
-              <a:t>The Reputation tab: what each bank is in the news about</a:t>
+              <a:t>Reputation: themes, not sentiment</a:t>
             </a:r>
           </a:p>
         </p:txBody>
@@ -17114,8 +16601,8 @@
         </p:nvSpPr>
         <p:spPr>
           <a:xfrm>
-            <a:off x="548640" y="960120"/>
-            <a:ext cx="1463040" cy="54864"/>
+            <a:off x="548640" y="1115568"/>
+            <a:ext cx="1463040" cy="64008"/>
           </a:xfrm>
           <a:prstGeom prst="rect">
             <a:avLst/>
@@ -17151,40 +16638,16 @@
           </a:p>
         </p:txBody>
       </p:sp>
-      <p:pic>
-        <p:nvPicPr>
-          <p:cNvPr id="4" name="Picture 3" descr="03_reputation.png"/>
-          <p:cNvPicPr>
-            <a:picLocks noChangeAspect="1"/>
-          </p:cNvPicPr>
-          <p:nvPr/>
-        </p:nvPicPr>
-        <p:blipFill>
-          <a:blip r:embed="rId2"/>
-          <a:stretch>
-            <a:fillRect/>
-          </a:stretch>
-        </p:blipFill>
-        <p:spPr>
-          <a:xfrm>
-            <a:off x="1828647" y="1325880"/>
-            <a:ext cx="8534400" cy="4800600"/>
-          </a:xfrm>
-          <a:prstGeom prst="rect">
-            <a:avLst/>
-          </a:prstGeom>
-        </p:spPr>
-      </p:pic>
-      <p:sp>
-        <p:nvSpPr>
-          <p:cNvPr id="5" name="TextBox 4"/>
+      <p:sp>
+        <p:nvSpPr>
+          <p:cNvPr id="4" name="TextBox 3"/>
           <p:cNvSpPr txBox="1"/>
           <p:nvPr/>
         </p:nvSpPr>
         <p:spPr>
           <a:xfrm>
-            <a:off x="685800" y="6236208"/>
-            <a:ext cx="10881360" cy="457200"/>
+            <a:off x="685800" y="1463040"/>
+            <a:ext cx="10881360" cy="4754880"/>
           </a:xfrm>
           <a:prstGeom prst="rect">
             <a:avLst/>
@@ -17202,24 +16665,100 @@
                 <a:spcPct val="105000"/>
               </a:lnSpc>
               <a:spcAft>
-                <a:spcPts val="600"/>
-              </a:spcAft>
-            </a:pPr>
-            <a:r>
-              <a:rPr sz="1200" b="0">
-                <a:solidFill>
-                  <a:srgbClr val="585868"/>
-                </a:solidFill>
-                <a:latin typeface="Helvetica Neue"/>
-              </a:rPr>
-              <a:t>Headline themes — innovation, crisis, results — counted, never scored for sentiment. Two news providers are merged, in three languages.</a:t>
-            </a:r>
-          </a:p>
-        </p:txBody>
-      </p:sp>
-      <p:sp>
-        <p:nvSpPr>
-          <p:cNvPr id="6" name="TextBox 5"/>
+                <a:spcPts val="900"/>
+              </a:spcAft>
+            </a:pPr>
+            <a:r>
+              <a:rPr sz="1500" b="0">
+                <a:solidFill>
+                  <a:srgbClr val="14141C"/>
+                </a:solidFill>
+                <a:latin typeface="Helvetica Neue"/>
+              </a:rPr>
+              <a:t>•  Sentiment scoring was out of scope; themes turn the brief's own 'reputation, innovations, crises' framing into a closed, countable list.</a:t>
+            </a:r>
+          </a:p>
+          <a:p>
+            <a:pPr algn="l">
+              <a:lnSpc>
+                <a:spcPct val="105000"/>
+              </a:lnSpc>
+              <a:spcAft>
+                <a:spcPts val="900"/>
+              </a:spcAft>
+            </a:pPr>
+            <a:r>
+              <a:rPr sz="1500" b="0">
+                <a:solidFill>
+                  <a:srgbClr val="14141C"/>
+                </a:solidFill>
+                <a:latin typeface="Helvetica Neue"/>
+              </a:rPr>
+              <a:t>•  Two similarly named providers are supported at once (newsapi.org and newsapi.ai); headlines from both are merged and de-duplicated.</a:t>
+            </a:r>
+          </a:p>
+          <a:p>
+            <a:pPr algn="l">
+              <a:lnSpc>
+                <a:spcPct val="105000"/>
+              </a:lnSpc>
+              <a:spcAft>
+                <a:spcPts val="900"/>
+              </a:spcAft>
+            </a:pPr>
+            <a:r>
+              <a:rPr sz="1500" b="0">
+                <a:solidFill>
+                  <a:srgbClr val="14141C"/>
+                </a:solidFill>
+                <a:latin typeface="Helvetica Neue"/>
+              </a:rPr>
+              <a:t>•  Every provider is queried in English, French and Dutch — Belgian bank news is mostly not in English.</a:t>
+            </a:r>
+          </a:p>
+          <a:p>
+            <a:pPr algn="l">
+              <a:lnSpc>
+                <a:spcPct val="105000"/>
+              </a:lnSpc>
+              <a:spcAft>
+                <a:spcPts val="900"/>
+              </a:spcAft>
+            </a:pPr>
+            <a:r>
+              <a:rPr sz="1500" b="0">
+                <a:solidFill>
+                  <a:srgbClr val="14141C"/>
+                </a:solidFill>
+                <a:latin typeface="Helvetica Neue"/>
+              </a:rPr>
+              <a:t>•  The module degrades to 'not configured' when no key is present, rather than inventing a number for a bank it has no data on.</a:t>
+            </a:r>
+          </a:p>
+          <a:p>
+            <a:pPr algn="l">
+              <a:lnSpc>
+                <a:spcPct val="105000"/>
+              </a:lnSpc>
+              <a:spcAft>
+                <a:spcPts val="900"/>
+              </a:spcAft>
+            </a:pPr>
+            <a:r>
+              <a:rPr sz="1500" b="0">
+                <a:solidFill>
+                  <a:srgbClr val="14141C"/>
+                </a:solidFill>
+                <a:latin typeface="Helvetica Neue"/>
+              </a:rPr>
+              <a:t>•  Themes are context about the bank, never evidence that a page or campaign performed. Asked whether reputation shows how well campaigns are doing, the honest answer is no: press coverage says what a bank is written about, not whether its page worked.</a:t>
+            </a:r>
+          </a:p>
+        </p:txBody>
+      </p:sp>
+      <p:sp>
+        <p:nvSpPr>
+          <p:cNvPr id="5" name="TextBox 4"/>
           <p:cNvSpPr txBox="1"/>
           <p:nvPr/>
         </p:nvSpPr>
@@ -17261,7 +16800,7 @@
       </p:sp>
       <p:sp>
         <p:nvSpPr>
-          <p:cNvPr id="7" name="TextBox 6"/>
+          <p:cNvPr id="6" name="TextBox 5"/>
           <p:cNvSpPr txBox="1"/>
           <p:nvPr/>
         </p:nvSpPr>
@@ -17334,8 +16873,8 @@
         </p:nvSpPr>
         <p:spPr>
           <a:xfrm>
-            <a:off x="548640" y="384048"/>
-            <a:ext cx="11064240" cy="731520"/>
+            <a:off x="548640" y="320040"/>
+            <a:ext cx="11064240" cy="640080"/>
           </a:xfrm>
           <a:prstGeom prst="rect">
             <a:avLst/>
@@ -17357,13 +16896,13 @@
               </a:spcAft>
             </a:pPr>
             <a:r>
-              <a:rPr sz="2800" b="1">
+              <a:rPr sz="2400" b="1">
                 <a:solidFill>
                   <a:srgbClr val="14141C"/>
                 </a:solidFill>
                 <a:latin typeface="Helvetica Neue"/>
               </a:rPr>
-              <a:t>Reputation: themes, not sentiment</a:t>
+              <a:t>The Recommendations tab</a:t>
             </a:r>
           </a:p>
         </p:txBody>
@@ -17376,8 +16915,8 @@
         </p:nvSpPr>
         <p:spPr>
           <a:xfrm>
-            <a:off x="548640" y="1115568"/>
-            <a:ext cx="1463040" cy="64008"/>
+            <a:off x="548640" y="960120"/>
+            <a:ext cx="1463040" cy="54864"/>
           </a:xfrm>
           <a:prstGeom prst="rect">
             <a:avLst/>
@@ -17413,16 +16952,40 @@
           </a:p>
         </p:txBody>
       </p:sp>
-      <p:sp>
-        <p:nvSpPr>
-          <p:cNvPr id="4" name="TextBox 3"/>
+      <p:pic>
+        <p:nvPicPr>
+          <p:cNvPr id="4" name="Picture 3" descr="04_recommendations.png"/>
+          <p:cNvPicPr>
+            <a:picLocks noChangeAspect="1"/>
+          </p:cNvPicPr>
+          <p:nvPr/>
+        </p:nvPicPr>
+        <p:blipFill>
+          <a:blip r:embed="rId2"/>
+          <a:stretch>
+            <a:fillRect/>
+          </a:stretch>
+        </p:blipFill>
+        <p:spPr>
+          <a:xfrm>
+            <a:off x="1828647" y="1325880"/>
+            <a:ext cx="8534400" cy="4800600"/>
+          </a:xfrm>
+          <a:prstGeom prst="rect">
+            <a:avLst/>
+          </a:prstGeom>
+        </p:spPr>
+      </p:pic>
+      <p:sp>
+        <p:nvSpPr>
+          <p:cNvPr id="5" name="TextBox 4"/>
           <p:cNvSpPr txBox="1"/>
           <p:nvPr/>
         </p:nvSpPr>
         <p:spPr>
           <a:xfrm>
-            <a:off x="685800" y="1463040"/>
-            <a:ext cx="10881360" cy="4754880"/>
+            <a:off x="685800" y="6236208"/>
+            <a:ext cx="10881360" cy="457200"/>
           </a:xfrm>
           <a:prstGeom prst="rect">
             <a:avLst/>
@@ -17440,100 +17003,24 @@
                 <a:spcPct val="105000"/>
               </a:lnSpc>
               <a:spcAft>
-                <a:spcPts val="900"/>
-              </a:spcAft>
-            </a:pPr>
-            <a:r>
-              <a:rPr sz="1500" b="0">
-                <a:solidFill>
-                  <a:srgbClr val="14141C"/>
-                </a:solidFill>
-                <a:latin typeface="Helvetica Neue"/>
-              </a:rPr>
-              <a:t>•  Sentiment scoring was out of scope; themes turn the brief's own 'reputation, innovations, crises' framing into a closed, countable list.</a:t>
-            </a:r>
-          </a:p>
-          <a:p>
-            <a:pPr algn="l">
-              <a:lnSpc>
-                <a:spcPct val="105000"/>
-              </a:lnSpc>
-              <a:spcAft>
-                <a:spcPts val="900"/>
-              </a:spcAft>
-            </a:pPr>
-            <a:r>
-              <a:rPr sz="1500" b="0">
-                <a:solidFill>
-                  <a:srgbClr val="14141C"/>
-                </a:solidFill>
-                <a:latin typeface="Helvetica Neue"/>
-              </a:rPr>
-              <a:t>•  Two similarly named providers are supported at once (newsapi.org and newsapi.ai); headlines from both are merged and de-duplicated.</a:t>
-            </a:r>
-          </a:p>
-          <a:p>
-            <a:pPr algn="l">
-              <a:lnSpc>
-                <a:spcPct val="105000"/>
-              </a:lnSpc>
-              <a:spcAft>
-                <a:spcPts val="900"/>
-              </a:spcAft>
-            </a:pPr>
-            <a:r>
-              <a:rPr sz="1500" b="0">
-                <a:solidFill>
-                  <a:srgbClr val="14141C"/>
-                </a:solidFill>
-                <a:latin typeface="Helvetica Neue"/>
-              </a:rPr>
-              <a:t>•  Every provider is queried in English, French and Dutch — Belgian bank news is mostly not in English.</a:t>
-            </a:r>
-          </a:p>
-          <a:p>
-            <a:pPr algn="l">
-              <a:lnSpc>
-                <a:spcPct val="105000"/>
-              </a:lnSpc>
-              <a:spcAft>
-                <a:spcPts val="900"/>
-              </a:spcAft>
-            </a:pPr>
-            <a:r>
-              <a:rPr sz="1500" b="0">
-                <a:solidFill>
-                  <a:srgbClr val="14141C"/>
-                </a:solidFill>
-                <a:latin typeface="Helvetica Neue"/>
-              </a:rPr>
-              <a:t>•  The module degrades to 'not configured' when no key is present, rather than inventing a number for a bank it has no data on.</a:t>
-            </a:r>
-          </a:p>
-          <a:p>
-            <a:pPr algn="l">
-              <a:lnSpc>
-                <a:spcPct val="105000"/>
-              </a:lnSpc>
-              <a:spcAft>
-                <a:spcPts val="900"/>
-              </a:spcAft>
-            </a:pPr>
-            <a:r>
-              <a:rPr sz="1500" b="0">
-                <a:solidFill>
-                  <a:srgbClr val="14141C"/>
-                </a:solidFill>
-                <a:latin typeface="Helvetica Neue"/>
-              </a:rPr>
-              <a:t>•  Themes are context about the bank, never evidence that a page or campaign performed. Asked whether reputation shows how well campaigns are doing, the honest answer is no: press coverage says what a bank is written about, not whether its page worked.</a:t>
-            </a:r>
-          </a:p>
-        </p:txBody>
-      </p:sp>
-      <p:sp>
-        <p:nvSpPr>
-          <p:cNvPr id="5" name="TextBox 4"/>
+                <a:spcPts val="600"/>
+              </a:spcAft>
+            </a:pPr>
+            <a:r>
+              <a:rPr sz="1200" b="0">
+                <a:solidFill>
+                  <a:srgbClr val="585868"/>
+                </a:solidFill>
+                <a:latin typeface="Helvetica Neue"/>
+              </a:rPr>
+              <a:t>The one place a model is allowed to opine: advice grounded in this run's numbers, each item shown next to the features it was argued from, and selectable.</a:t>
+            </a:r>
+          </a:p>
+        </p:txBody>
+      </p:sp>
+      <p:sp>
+        <p:nvSpPr>
+          <p:cNvPr id="6" name="TextBox 5"/>
           <p:cNvSpPr txBox="1"/>
           <p:nvPr/>
         </p:nvSpPr>
@@ -17575,7 +17062,7 @@
       </p:sp>
       <p:sp>
         <p:nvSpPr>
-          <p:cNvPr id="6" name="TextBox 5"/>
+          <p:cNvPr id="7" name="TextBox 6"/>
           <p:cNvSpPr txBox="1"/>
           <p:nvPr/>
         </p:nvSpPr>
@@ -17648,8 +17135,8 @@
         </p:nvSpPr>
         <p:spPr>
           <a:xfrm>
-            <a:off x="548640" y="320040"/>
-            <a:ext cx="11064240" cy="640080"/>
+            <a:off x="548640" y="384048"/>
+            <a:ext cx="11064240" cy="731520"/>
           </a:xfrm>
           <a:prstGeom prst="rect">
             <a:avLst/>
@@ -17671,13 +17158,13 @@
               </a:spcAft>
             </a:pPr>
             <a:r>
-              <a:rPr sz="2400" b="1">
+              <a:rPr sz="2800" b="1">
                 <a:solidFill>
                   <a:srgbClr val="14141C"/>
                 </a:solidFill>
                 <a:latin typeface="Helvetica Neue"/>
               </a:rPr>
-              <a:t>The Recommendations tab</a:t>
+              <a:t>Recommendations, and how they stay honest</a:t>
             </a:r>
           </a:p>
         </p:txBody>
@@ -17690,8 +17177,8 @@
         </p:nvSpPr>
         <p:spPr>
           <a:xfrm>
-            <a:off x="548640" y="960120"/>
-            <a:ext cx="1463040" cy="54864"/>
+            <a:off x="548640" y="1115568"/>
+            <a:ext cx="1463040" cy="64008"/>
           </a:xfrm>
           <a:prstGeom prst="rect">
             <a:avLst/>
@@ -17727,40 +17214,16 @@
           </a:p>
         </p:txBody>
       </p:sp>
-      <p:pic>
-        <p:nvPicPr>
-          <p:cNvPr id="4" name="Picture 3" descr="04_recommendations.png"/>
-          <p:cNvPicPr>
-            <a:picLocks noChangeAspect="1"/>
-          </p:cNvPicPr>
-          <p:nvPr/>
-        </p:nvPicPr>
-        <p:blipFill>
-          <a:blip r:embed="rId2"/>
-          <a:stretch>
-            <a:fillRect/>
-          </a:stretch>
-        </p:blipFill>
-        <p:spPr>
-          <a:xfrm>
-            <a:off x="1828647" y="1325880"/>
-            <a:ext cx="8534400" cy="4800600"/>
-          </a:xfrm>
-          <a:prstGeom prst="rect">
-            <a:avLst/>
-          </a:prstGeom>
-        </p:spPr>
-      </p:pic>
-      <p:sp>
-        <p:nvSpPr>
-          <p:cNvPr id="5" name="TextBox 4"/>
+      <p:sp>
+        <p:nvSpPr>
+          <p:cNvPr id="4" name="TextBox 3"/>
           <p:cNvSpPr txBox="1"/>
           <p:nvPr/>
         </p:nvSpPr>
         <p:spPr>
           <a:xfrm>
-            <a:off x="685800" y="6236208"/>
-            <a:ext cx="10881360" cy="457200"/>
+            <a:off x="685800" y="1463040"/>
+            <a:ext cx="10881360" cy="4754880"/>
           </a:xfrm>
           <a:prstGeom prst="rect">
             <a:avLst/>
@@ -17778,24 +17241,100 @@
                 <a:spcPct val="105000"/>
               </a:lnSpc>
               <a:spcAft>
-                <a:spcPts val="600"/>
-              </a:spcAft>
-            </a:pPr>
-            <a:r>
-              <a:rPr sz="1200" b="0">
-                <a:solidFill>
-                  <a:srgbClr val="585868"/>
-                </a:solidFill>
-                <a:latin typeface="Helvetica Neue"/>
-              </a:rPr>
-              <a:t>The one place a model is allowed to opine: advice grounded in this run's numbers, each item shown next to the features it was argued from, and selectable.</a:t>
-            </a:r>
-          </a:p>
-        </p:txBody>
-      </p:sp>
-      <p:sp>
-        <p:nvSpPr>
-          <p:cNvPr id="6" name="TextBox 5"/>
+                <a:spcPts val="900"/>
+              </a:spcAft>
+            </a:pPr>
+            <a:r>
+              <a:rPr sz="1500" b="0">
+                <a:solidFill>
+                  <a:srgbClr val="14141C"/>
+                </a:solidFill>
+                <a:latin typeface="Helvetica Neue"/>
+              </a:rPr>
+              <a:t>•  Every recommendation names the measured features it was argued from; an invented feature id is dropped before the list is shown.</a:t>
+            </a:r>
+          </a:p>
+          <a:p>
+            <a:pPr algn="l">
+              <a:lnSpc>
+                <a:spcPct val="105000"/>
+              </a:lnSpc>
+              <a:spcAft>
+                <a:spcPts val="900"/>
+              </a:spcAft>
+            </a:pPr>
+            <a:r>
+              <a:rPr sz="1500" b="0">
+                <a:solidFill>
+                  <a:srgbClr val="14141C"/>
+                </a:solidFill>
+                <a:latin typeface="Helvetica Neue"/>
+              </a:rPr>
+              <a:t>•  A second, opt-in group can be added from news themes (reputation context).</a:t>
+            </a:r>
+          </a:p>
+          <a:p>
+            <a:pPr algn="l">
+              <a:lnSpc>
+                <a:spcPct val="105000"/>
+              </a:lnSpc>
+              <a:spcAft>
+                <a:spcPts val="900"/>
+              </a:spcAft>
+            </a:pPr>
+            <a:r>
+              <a:rPr sz="1500" b="0">
+                <a:solidFill>
+                  <a:srgbClr val="14141C"/>
+                </a:solidFill>
+                <a:latin typeface="Helvetica Neue"/>
+              </a:rPr>
+              <a:t>•  The search-interest group was removed on 22/09; Trends now selects three brands on attention alone and the tab reports what their pages measurably do differently from ING's.</a:t>
+            </a:r>
+          </a:p>
+          <a:p>
+            <a:pPr algn="l">
+              <a:lnSpc>
+                <a:spcPct val="105000"/>
+              </a:lnSpc>
+              <a:spcAft>
+                <a:spcPts val="900"/>
+              </a:spcAft>
+            </a:pPr>
+            <a:r>
+              <a:rPr sz="1500" b="0">
+                <a:solidFill>
+                  <a:srgbClr val="14141C"/>
+                </a:solidFill>
+                <a:latin typeface="Helvetica Neue"/>
+              </a:rPr>
+              <a:t>•  A reader ticks the ones worth building; only the ticked subset reaches the site builder.</a:t>
+            </a:r>
+          </a:p>
+          <a:p>
+            <a:pPr algn="l">
+              <a:lnSpc>
+                <a:spcPct val="105000"/>
+              </a:lnSpc>
+              <a:spcAft>
+                <a:spcPts val="900"/>
+              </a:spcAft>
+            </a:pPr>
+            <a:r>
+              <a:rPr sz="1500" b="0">
+                <a:solidFill>
+                  <a:srgbClr val="14141C"/>
+                </a:solidFill>
+                <a:latin typeface="Helvetica Neue"/>
+              </a:rPr>
+              <a:t>•  Nothing here re-runs collection or analysis — it reads one report and writes advice.</a:t>
+            </a:r>
+          </a:p>
+        </p:txBody>
+      </p:sp>
+      <p:sp>
+        <p:nvSpPr>
+          <p:cNvPr id="5" name="TextBox 4"/>
           <p:cNvSpPr txBox="1"/>
           <p:nvPr/>
         </p:nvSpPr>
@@ -17837,7 +17376,7 @@
       </p:sp>
       <p:sp>
         <p:nvSpPr>
-          <p:cNvPr id="7" name="TextBox 6"/>
+          <p:cNvPr id="6" name="TextBox 5"/>
           <p:cNvSpPr txBox="1"/>
           <p:nvPr/>
         </p:nvSpPr>
@@ -18296,8 +17835,8 @@
         </p:nvSpPr>
         <p:spPr>
           <a:xfrm>
-            <a:off x="548640" y="384048"/>
-            <a:ext cx="11064240" cy="731520"/>
+            <a:off x="548640" y="320040"/>
+            <a:ext cx="11064240" cy="640080"/>
           </a:xfrm>
           <a:prstGeom prst="rect">
             <a:avLst/>
@@ -18319,13 +17858,13 @@
               </a:spcAft>
             </a:pPr>
             <a:r>
-              <a:rPr sz="2800" b="1">
+              <a:rPr sz="2400" b="1">
                 <a:solidFill>
                   <a:srgbClr val="14141C"/>
                 </a:solidFill>
                 <a:latin typeface="Helvetica Neue"/>
               </a:rPr>
-              <a:t>Recommendations, and how they stay honest</a:t>
+              <a:t>The generated ING website, with explanations on</a:t>
             </a:r>
           </a:p>
         </p:txBody>
@@ -18338,8 +17877,8 @@
         </p:nvSpPr>
         <p:spPr>
           <a:xfrm>
-            <a:off x="548640" y="1115568"/>
-            <a:ext cx="1463040" cy="64008"/>
+            <a:off x="548640" y="960120"/>
+            <a:ext cx="1463040" cy="54864"/>
           </a:xfrm>
           <a:prstGeom prst="rect">
             <a:avLst/>
@@ -18375,16 +17914,40 @@
           </a:p>
         </p:txBody>
       </p:sp>
-      <p:sp>
-        <p:nvSpPr>
-          <p:cNvPr id="4" name="TextBox 3"/>
+      <p:pic>
+        <p:nvPicPr>
+          <p:cNvPr id="4" name="Picture 3" descr="06_site_explanation_open.png"/>
+          <p:cNvPicPr>
+            <a:picLocks noChangeAspect="1"/>
+          </p:cNvPicPr>
+          <p:nvPr/>
+        </p:nvPicPr>
+        <p:blipFill>
+          <a:blip r:embed="rId2"/>
+          <a:stretch>
+            <a:fillRect/>
+          </a:stretch>
+        </p:blipFill>
+        <p:spPr>
+          <a:xfrm>
+            <a:off x="1828647" y="1325880"/>
+            <a:ext cx="8534400" cy="4800600"/>
+          </a:xfrm>
+          <a:prstGeom prst="rect">
+            <a:avLst/>
+          </a:prstGeom>
+        </p:spPr>
+      </p:pic>
+      <p:sp>
+        <p:nvSpPr>
+          <p:cNvPr id="5" name="TextBox 4"/>
           <p:cNvSpPr txBox="1"/>
           <p:nvPr/>
         </p:nvSpPr>
         <p:spPr>
           <a:xfrm>
-            <a:off x="685800" y="1463040"/>
-            <a:ext cx="10881360" cy="4754880"/>
+            <a:off x="685800" y="6236208"/>
+            <a:ext cx="10881360" cy="457200"/>
           </a:xfrm>
           <a:prstGeom prst="rect">
             <a:avLst/>
@@ -18402,100 +17965,24 @@
                 <a:spcPct val="105000"/>
               </a:lnSpc>
               <a:spcAft>
-                <a:spcPts val="900"/>
-              </a:spcAft>
-            </a:pPr>
-            <a:r>
-              <a:rPr sz="1500" b="0">
-                <a:solidFill>
-                  <a:srgbClr val="14141C"/>
-                </a:solidFill>
-                <a:latin typeface="Helvetica Neue"/>
-              </a:rPr>
-              <a:t>•  Every recommendation names the measured features it was argued from; an invented feature id is dropped before the list is shown.</a:t>
-            </a:r>
-          </a:p>
-          <a:p>
-            <a:pPr algn="l">
-              <a:lnSpc>
-                <a:spcPct val="105000"/>
-              </a:lnSpc>
-              <a:spcAft>
-                <a:spcPts val="900"/>
-              </a:spcAft>
-            </a:pPr>
-            <a:r>
-              <a:rPr sz="1500" b="0">
-                <a:solidFill>
-                  <a:srgbClr val="14141C"/>
-                </a:solidFill>
-                <a:latin typeface="Helvetica Neue"/>
-              </a:rPr>
-              <a:t>•  A second, opt-in group can be added from news themes (reputation context).</a:t>
-            </a:r>
-          </a:p>
-          <a:p>
-            <a:pPr algn="l">
-              <a:lnSpc>
-                <a:spcPct val="105000"/>
-              </a:lnSpc>
-              <a:spcAft>
-                <a:spcPts val="900"/>
-              </a:spcAft>
-            </a:pPr>
-            <a:r>
-              <a:rPr sz="1500" b="0">
-                <a:solidFill>
-                  <a:srgbClr val="14141C"/>
-                </a:solidFill>
-                <a:latin typeface="Helvetica Neue"/>
-              </a:rPr>
-              <a:t>•  The search-interest group was removed on 22/09; Trends now selects three brands on attention alone and the tab reports what their pages measurably do differently from ING's.</a:t>
-            </a:r>
-          </a:p>
-          <a:p>
-            <a:pPr algn="l">
-              <a:lnSpc>
-                <a:spcPct val="105000"/>
-              </a:lnSpc>
-              <a:spcAft>
-                <a:spcPts val="900"/>
-              </a:spcAft>
-            </a:pPr>
-            <a:r>
-              <a:rPr sz="1500" b="0">
-                <a:solidFill>
-                  <a:srgbClr val="14141C"/>
-                </a:solidFill>
-                <a:latin typeface="Helvetica Neue"/>
-              </a:rPr>
-              <a:t>•  A reader ticks the ones worth building; only the ticked subset reaches the site builder.</a:t>
-            </a:r>
-          </a:p>
-          <a:p>
-            <a:pPr algn="l">
-              <a:lnSpc>
-                <a:spcPct val="105000"/>
-              </a:lnSpc>
-              <a:spcAft>
-                <a:spcPts val="900"/>
-              </a:spcAft>
-            </a:pPr>
-            <a:r>
-              <a:rPr sz="1500" b="0">
-                <a:solidFill>
-                  <a:srgbClr val="14141C"/>
-                </a:solidFill>
-                <a:latin typeface="Helvetica Neue"/>
-              </a:rPr>
-              <a:t>•  Nothing here re-runs collection or analysis — it reads one report and writes advice.</a:t>
-            </a:r>
-          </a:p>
-        </p:txBody>
-      </p:sp>
-      <p:sp>
-        <p:nvSpPr>
-          <p:cNvPr id="5" name="TextBox 4"/>
+                <a:spcPts val="600"/>
+              </a:spcAft>
+            </a:pPr>
+            <a:r>
+              <a:rPr sz="1200" b="0">
+                <a:solidFill>
+                  <a:srgbClr val="585868"/>
+                </a:solidFill>
+                <a:latin typeface="Helvetica Neue"/>
+              </a:rPr>
+              <a:t>An illustration, not a proposal for ING's site: each section that implements a recommendation is boxed, the (i) button opens the reasoning above it, and that section's glow switches to a slow yellow flicker.</a:t>
+            </a:r>
+          </a:p>
+        </p:txBody>
+      </p:sp>
+      <p:sp>
+        <p:nvSpPr>
+          <p:cNvPr id="6" name="TextBox 5"/>
           <p:cNvSpPr txBox="1"/>
           <p:nvPr/>
         </p:nvSpPr>
@@ -18537,7 +18024,7 @@
       </p:sp>
       <p:sp>
         <p:nvSpPr>
-          <p:cNvPr id="6" name="TextBox 5"/>
+          <p:cNvPr id="7" name="TextBox 6"/>
           <p:cNvSpPr txBox="1"/>
           <p:nvPr/>
         </p:nvSpPr>
@@ -18610,8 +18097,8 @@
         </p:nvSpPr>
         <p:spPr>
           <a:xfrm>
-            <a:off x="548640" y="320040"/>
-            <a:ext cx="11064240" cy="640080"/>
+            <a:off x="548640" y="384048"/>
+            <a:ext cx="11064240" cy="731520"/>
           </a:xfrm>
           <a:prstGeom prst="rect">
             <a:avLst/>
@@ -18633,13 +18120,13 @@
               </a:spcAft>
             </a:pPr>
             <a:r>
-              <a:rPr sz="2400" b="1">
+              <a:rPr sz="2800" b="1">
                 <a:solidFill>
                   <a:srgbClr val="14141C"/>
                 </a:solidFill>
                 <a:latin typeface="Helvetica Neue"/>
               </a:rPr>
-              <a:t>The generated ING website, with explanations on</a:t>
+              <a:t>Explanation mode: showing the work</a:t>
             </a:r>
           </a:p>
         </p:txBody>
@@ -18652,8 +18139,8 @@
         </p:nvSpPr>
         <p:spPr>
           <a:xfrm>
-            <a:off x="548640" y="960120"/>
-            <a:ext cx="1463040" cy="54864"/>
+            <a:off x="548640" y="1115568"/>
+            <a:ext cx="1463040" cy="64008"/>
           </a:xfrm>
           <a:prstGeom prst="rect">
             <a:avLst/>
@@ -18689,40 +18176,16 @@
           </a:p>
         </p:txBody>
       </p:sp>
-      <p:pic>
-        <p:nvPicPr>
-          <p:cNvPr id="4" name="Picture 3" descr="06_site_explanation_open.png"/>
-          <p:cNvPicPr>
-            <a:picLocks noChangeAspect="1"/>
-          </p:cNvPicPr>
-          <p:nvPr/>
-        </p:nvPicPr>
-        <p:blipFill>
-          <a:blip r:embed="rId2"/>
-          <a:stretch>
-            <a:fillRect/>
-          </a:stretch>
-        </p:blipFill>
-        <p:spPr>
-          <a:xfrm>
-            <a:off x="1828647" y="1325880"/>
-            <a:ext cx="8534400" cy="4800600"/>
-          </a:xfrm>
-          <a:prstGeom prst="rect">
-            <a:avLst/>
-          </a:prstGeom>
-        </p:spPr>
-      </p:pic>
-      <p:sp>
-        <p:nvSpPr>
-          <p:cNvPr id="5" name="TextBox 4"/>
+      <p:sp>
+        <p:nvSpPr>
+          <p:cNvPr id="4" name="TextBox 3"/>
           <p:cNvSpPr txBox="1"/>
           <p:nvPr/>
         </p:nvSpPr>
         <p:spPr>
           <a:xfrm>
-            <a:off x="685800" y="6236208"/>
-            <a:ext cx="10881360" cy="457200"/>
+            <a:off x="685800" y="1463040"/>
+            <a:ext cx="10881360" cy="4754880"/>
           </a:xfrm>
           <a:prstGeom prst="rect">
             <a:avLst/>
@@ -18740,24 +18203,100 @@
                 <a:spcPct val="105000"/>
               </a:lnSpc>
               <a:spcAft>
-                <a:spcPts val="600"/>
-              </a:spcAft>
-            </a:pPr>
-            <a:r>
-              <a:rPr sz="1200" b="0">
-                <a:solidFill>
-                  <a:srgbClr val="585868"/>
-                </a:solidFill>
-                <a:latin typeface="Helvetica Neue"/>
-              </a:rPr>
-              <a:t>An illustration, not a proposal for ING's site: each section that implements a recommendation is boxed, the (i) button opens the reasoning above it, and that section's glow switches to a slow yellow flicker.</a:t>
-            </a:r>
-          </a:p>
-        </p:txBody>
-      </p:sp>
-      <p:sp>
-        <p:nvSpPr>
-          <p:cNvPr id="6" name="TextBox 5"/>
+                <a:spcPts val="900"/>
+              </a:spcAft>
+            </a:pPr>
+            <a:r>
+              <a:rPr sz="1500" b="0">
+                <a:solidFill>
+                  <a:srgbClr val="14141C"/>
+                </a:solidFill>
+                <a:latin typeface="Helvetica Neue"/>
+              </a:rPr>
+              <a:t>•  Tick 'Explain each section' and every generated section that acts on a recommendation is boxed, with an (i) button and a one-sentence rationale in the page language.</a:t>
+            </a:r>
+          </a:p>
+          <a:p>
+            <a:pPr algn="l">
+              <a:lnSpc>
+                <a:spcPct val="105000"/>
+              </a:lnSpc>
+              <a:spcAft>
+                <a:spcPts val="900"/>
+              </a:spcAft>
+            </a:pPr>
+            <a:r>
+              <a:rPr sz="1500" b="0">
+                <a:solidFill>
+                  <a:srgbClr val="14141C"/>
+                </a:solidFill>
+                <a:latin typeface="Helvetica Neue"/>
+              </a:rPr>
+              <a:t>•  Yellow flicker while an explanation is open — deliberately not ING orange, so the explanation state cannot be mistaken for the brand treatment.</a:t>
+            </a:r>
+          </a:p>
+          <a:p>
+            <a:pPr algn="l">
+              <a:lnSpc>
+                <a:spcPct val="105000"/>
+              </a:lnSpc>
+              <a:spcAft>
+                <a:spcPts val="900"/>
+              </a:spcAft>
+            </a:pPr>
+            <a:r>
+              <a:rPr sz="1500" b="0">
+                <a:solidFill>
+                  <a:srgbClr val="14141C"/>
+                </a:solidFill>
+                <a:latin typeface="Helvetica Neue"/>
+              </a:rPr>
+              <a:t>•  A switch above the site turns the whole layer off, and the choice is remembered across the ten pages — so the same site can be shown as a normal site.</a:t>
+            </a:r>
+          </a:p>
+          <a:p>
+            <a:pPr algn="l">
+              <a:lnSpc>
+                <a:spcPct val="105000"/>
+              </a:lnSpc>
+              <a:spcAft>
+                <a:spcPts val="900"/>
+              </a:spcAft>
+            </a:pPr>
+            <a:r>
+              <a:rPr sz="1500" b="0">
+                <a:solidFill>
+                  <a:srgbClr val="14141C"/>
+                </a:solidFill>
+                <a:latin typeface="Helvetica Neue"/>
+              </a:rPr>
+              <a:t>•  Every page gets at least one box; pages no recommendation targets borrow the site-wide advice that applies.</a:t>
+            </a:r>
+          </a:p>
+          <a:p>
+            <a:pPr algn="l">
+              <a:lnSpc>
+                <a:spcPct val="105000"/>
+              </a:lnSpc>
+              <a:spcAft>
+                <a:spcPts val="900"/>
+              </a:spcAft>
+            </a:pPr>
+            <a:r>
+              <a:rPr sz="1500" b="0">
+                <a:solidFill>
+                  <a:srgbClr val="14141C"/>
+                </a:solidFill>
+                <a:latin typeface="Helvetica Neue"/>
+              </a:rPr>
+              <a:t>•  The first explained run produced copy about the recommendations themselves, so the page prompt now forbids meta copy and confines 'why' to the rationale.</a:t>
+            </a:r>
+          </a:p>
+        </p:txBody>
+      </p:sp>
+      <p:sp>
+        <p:nvSpPr>
+          <p:cNvPr id="5" name="TextBox 4"/>
           <p:cNvSpPr txBox="1"/>
           <p:nvPr/>
         </p:nvSpPr>
@@ -18799,7 +18338,7 @@
       </p:sp>
       <p:sp>
         <p:nvSpPr>
-          <p:cNvPr id="7" name="TextBox 6"/>
+          <p:cNvPr id="6" name="TextBox 5"/>
           <p:cNvSpPr txBox="1"/>
           <p:nvPr/>
         </p:nvSpPr>
@@ -18872,8 +18411,8 @@
         </p:nvSpPr>
         <p:spPr>
           <a:xfrm>
-            <a:off x="548640" y="384048"/>
-            <a:ext cx="11064240" cy="731520"/>
+            <a:off x="548640" y="320040"/>
+            <a:ext cx="11064240" cy="640080"/>
           </a:xfrm>
           <a:prstGeom prst="rect">
             <a:avLst/>
@@ -18895,13 +18434,13 @@
               </a:spcAft>
             </a:pPr>
             <a:r>
-              <a:rPr sz="2800" b="1">
+              <a:rPr sz="2400" b="1">
                 <a:solidFill>
                   <a:srgbClr val="14141C"/>
                 </a:solidFill>
                 <a:latin typeface="Helvetica Neue"/>
               </a:rPr>
-              <a:t>Explanation mode: showing the work</a:t>
+              <a:t>The same site, explanations off</a:t>
             </a:r>
           </a:p>
         </p:txBody>
@@ -18914,8 +18453,8 @@
         </p:nvSpPr>
         <p:spPr>
           <a:xfrm>
-            <a:off x="548640" y="1115568"/>
-            <a:ext cx="1463040" cy="64008"/>
+            <a:off x="548640" y="960120"/>
+            <a:ext cx="1463040" cy="54864"/>
           </a:xfrm>
           <a:prstGeom prst="rect">
             <a:avLst/>
@@ -18951,16 +18490,40 @@
           </a:p>
         </p:txBody>
       </p:sp>
-      <p:sp>
-        <p:nvSpPr>
-          <p:cNvPr id="4" name="TextBox 3"/>
+      <p:pic>
+        <p:nvPicPr>
+          <p:cNvPr id="4" name="Picture 3" descr="07_site_explain_off.png"/>
+          <p:cNvPicPr>
+            <a:picLocks noChangeAspect="1"/>
+          </p:cNvPicPr>
+          <p:nvPr/>
+        </p:nvPicPr>
+        <p:blipFill>
+          <a:blip r:embed="rId2"/>
+          <a:stretch>
+            <a:fillRect/>
+          </a:stretch>
+        </p:blipFill>
+        <p:spPr>
+          <a:xfrm>
+            <a:off x="1828647" y="1325880"/>
+            <a:ext cx="8534400" cy="4800600"/>
+          </a:xfrm>
+          <a:prstGeom prst="rect">
+            <a:avLst/>
+          </a:prstGeom>
+        </p:spPr>
+      </p:pic>
+      <p:sp>
+        <p:nvSpPr>
+          <p:cNvPr id="5" name="TextBox 4"/>
           <p:cNvSpPr txBox="1"/>
           <p:nvPr/>
         </p:nvSpPr>
         <p:spPr>
           <a:xfrm>
-            <a:off x="685800" y="1463040"/>
-            <a:ext cx="10881360" cy="4754880"/>
+            <a:off x="685800" y="6236208"/>
+            <a:ext cx="10881360" cy="457200"/>
           </a:xfrm>
           <a:prstGeom prst="rect">
             <a:avLst/>
@@ -18978,100 +18541,24 @@
                 <a:spcPct val="105000"/>
               </a:lnSpc>
               <a:spcAft>
-                <a:spcPts val="900"/>
-              </a:spcAft>
-            </a:pPr>
-            <a:r>
-              <a:rPr sz="1500" b="0">
-                <a:solidFill>
-                  <a:srgbClr val="14141C"/>
-                </a:solidFill>
-                <a:latin typeface="Helvetica Neue"/>
-              </a:rPr>
-              <a:t>•  Tick 'Explain each section' and every generated section that acts on a recommendation is boxed, with an (i) button and a one-sentence rationale in the page language.</a:t>
-            </a:r>
-          </a:p>
-          <a:p>
-            <a:pPr algn="l">
-              <a:lnSpc>
-                <a:spcPct val="105000"/>
-              </a:lnSpc>
-              <a:spcAft>
-                <a:spcPts val="900"/>
-              </a:spcAft>
-            </a:pPr>
-            <a:r>
-              <a:rPr sz="1500" b="0">
-                <a:solidFill>
-                  <a:srgbClr val="14141C"/>
-                </a:solidFill>
-                <a:latin typeface="Helvetica Neue"/>
-              </a:rPr>
-              <a:t>•  Yellow flicker while an explanation is open — deliberately not ING orange, so the explanation state cannot be mistaken for the brand treatment.</a:t>
-            </a:r>
-          </a:p>
-          <a:p>
-            <a:pPr algn="l">
-              <a:lnSpc>
-                <a:spcPct val="105000"/>
-              </a:lnSpc>
-              <a:spcAft>
-                <a:spcPts val="900"/>
-              </a:spcAft>
-            </a:pPr>
-            <a:r>
-              <a:rPr sz="1500" b="0">
-                <a:solidFill>
-                  <a:srgbClr val="14141C"/>
-                </a:solidFill>
-                <a:latin typeface="Helvetica Neue"/>
-              </a:rPr>
-              <a:t>•  A switch above the site turns the whole layer off, and the choice is remembered across the ten pages — so the same site can be shown as a normal site.</a:t>
-            </a:r>
-          </a:p>
-          <a:p>
-            <a:pPr algn="l">
-              <a:lnSpc>
-                <a:spcPct val="105000"/>
-              </a:lnSpc>
-              <a:spcAft>
-                <a:spcPts val="900"/>
-              </a:spcAft>
-            </a:pPr>
-            <a:r>
-              <a:rPr sz="1500" b="0">
-                <a:solidFill>
-                  <a:srgbClr val="14141C"/>
-                </a:solidFill>
-                <a:latin typeface="Helvetica Neue"/>
-              </a:rPr>
-              <a:t>•  Every page gets at least one box; pages no recommendation targets borrow the site-wide advice that applies.</a:t>
-            </a:r>
-          </a:p>
-          <a:p>
-            <a:pPr algn="l">
-              <a:lnSpc>
-                <a:spcPct val="105000"/>
-              </a:lnSpc>
-              <a:spcAft>
-                <a:spcPts val="900"/>
-              </a:spcAft>
-            </a:pPr>
-            <a:r>
-              <a:rPr sz="1500" b="0">
-                <a:solidFill>
-                  <a:srgbClr val="14141C"/>
-                </a:solidFill>
-                <a:latin typeface="Helvetica Neue"/>
-              </a:rPr>
-              <a:t>•  The first explained run produced copy about the recommendations themselves, so the page prompt now forbids meta copy and confines 'why' to the rationale.</a:t>
-            </a:r>
-          </a:p>
-        </p:txBody>
-      </p:sp>
-      <p:sp>
-        <p:nvSpPr>
-          <p:cNvPr id="5" name="TextBox 4"/>
+                <a:spcPts val="600"/>
+              </a:spcAft>
+            </a:pPr>
+            <a:r>
+              <a:rPr sz="1200" b="0">
+                <a:solidFill>
+                  <a:srgbClr val="585868"/>
+                </a:solidFill>
+                <a:latin typeface="Helvetica Neue"/>
+              </a:rPr>
+              <a:t>One checkbox above the site hides every box, balloon and rationale — the identical pages, shown as a normal site.</a:t>
+            </a:r>
+          </a:p>
+        </p:txBody>
+      </p:sp>
+      <p:sp>
+        <p:nvSpPr>
+          <p:cNvPr id="6" name="TextBox 5"/>
           <p:cNvSpPr txBox="1"/>
           <p:nvPr/>
         </p:nvSpPr>
@@ -19113,7 +18600,7 @@
       </p:sp>
       <p:sp>
         <p:nvSpPr>
-          <p:cNvPr id="6" name="TextBox 5"/>
+          <p:cNvPr id="7" name="TextBox 6"/>
           <p:cNvSpPr txBox="1"/>
           <p:nvPr/>
         </p:nvSpPr>
@@ -19186,8 +18673,8 @@
         </p:nvSpPr>
         <p:spPr>
           <a:xfrm>
-            <a:off x="548640" y="320040"/>
-            <a:ext cx="11064240" cy="640080"/>
+            <a:off x="548640" y="384048"/>
+            <a:ext cx="11064240" cy="731520"/>
           </a:xfrm>
           <a:prstGeom prst="rect">
             <a:avLst/>
@@ -19209,13 +18696,13 @@
               </a:spcAft>
             </a:pPr>
             <a:r>
-              <a:rPr sz="2400" b="1">
+              <a:rPr sz="2800" b="1">
                 <a:solidFill>
                   <a:srgbClr val="14141C"/>
                 </a:solidFill>
                 <a:latin typeface="Helvetica Neue"/>
               </a:rPr>
-              <a:t>The same site, explanations off</a:t>
+              <a:t>The operator tabs, and what they refuse to do</a:t>
             </a:r>
           </a:p>
         </p:txBody>
@@ -19228,8 +18715,8 @@
         </p:nvSpPr>
         <p:spPr>
           <a:xfrm>
-            <a:off x="548640" y="960120"/>
-            <a:ext cx="1463040" cy="54864"/>
+            <a:off x="548640" y="1115568"/>
+            <a:ext cx="1463040" cy="64008"/>
           </a:xfrm>
           <a:prstGeom prst="rect">
             <a:avLst/>
@@ -19265,40 +18752,16 @@
           </a:p>
         </p:txBody>
       </p:sp>
-      <p:pic>
-        <p:nvPicPr>
-          <p:cNvPr id="4" name="Picture 3" descr="07_site_explain_off.png"/>
-          <p:cNvPicPr>
-            <a:picLocks noChangeAspect="1"/>
-          </p:cNvPicPr>
-          <p:nvPr/>
-        </p:nvPicPr>
-        <p:blipFill>
-          <a:blip r:embed="rId2"/>
-          <a:stretch>
-            <a:fillRect/>
-          </a:stretch>
-        </p:blipFill>
-        <p:spPr>
-          <a:xfrm>
-            <a:off x="1828647" y="1325880"/>
-            <a:ext cx="8534400" cy="4800600"/>
-          </a:xfrm>
-          <a:prstGeom prst="rect">
-            <a:avLst/>
-          </a:prstGeom>
-        </p:spPr>
-      </p:pic>
-      <p:sp>
-        <p:nvSpPr>
-          <p:cNvPr id="5" name="TextBox 4"/>
+      <p:sp>
+        <p:nvSpPr>
+          <p:cNvPr id="4" name="TextBox 3"/>
           <p:cNvSpPr txBox="1"/>
           <p:nvPr/>
         </p:nvSpPr>
         <p:spPr>
           <a:xfrm>
-            <a:off x="685800" y="6236208"/>
-            <a:ext cx="10881360" cy="457200"/>
+            <a:off x="685800" y="1463040"/>
+            <a:ext cx="10881360" cy="4754880"/>
           </a:xfrm>
           <a:prstGeom prst="rect">
             <a:avLst/>
@@ -19316,24 +18779,230 @@
                 <a:spcPct val="105000"/>
               </a:lnSpc>
               <a:spcAft>
-                <a:spcPts val="600"/>
-              </a:spcAft>
-            </a:pPr>
-            <a:r>
-              <a:rPr sz="1200" b="0">
+                <a:spcPts val="200"/>
+              </a:spcAft>
+            </a:pPr>
+            <a:r>
+              <a:rPr sz="1500" b="1">
+                <a:solidFill>
+                  <a:srgbClr val="14141C"/>
+                </a:solidFill>
+                <a:latin typeface="Helvetica Neue"/>
+              </a:rPr>
+              <a:t>•  Six read-only views, moved out of the Streamlit dashboard</a:t>
+            </a:r>
+          </a:p>
+          <a:p>
+            <a:pPr algn="l">
+              <a:lnSpc>
+                <a:spcPct val="105000"/>
+              </a:lnSpc>
+              <a:spcAft>
+                <a:spcPts val="1000"/>
+              </a:spcAft>
+            </a:pPr>
+            <a:r>
+              <a:rPr sz="1300" b="0">
                 <a:solidFill>
                   <a:srgbClr val="585868"/>
                 </a:solidFill>
                 <a:latin typeface="Helvetica Neue"/>
               </a:rPr>
-              <a:t>One checkbox above the site hides every box, balloon and rationale — the identical pages, shown as a normal site.</a:t>
-            </a:r>
-          </a:p>
-        </p:txBody>
-      </p:sp>
-      <p:sp>
-        <p:nvSpPr>
-          <p:cNvPr id="6" name="TextBox 5"/>
+              <a:t>     Home, Bank profiles, Data, Rubric, Collection and Research now render in the same UI as the findings, from one snapshot the exporter writes: operations.json.</a:t>
+            </a:r>
+          </a:p>
+          <a:p>
+            <a:pPr algn="l">
+              <a:lnSpc>
+                <a:spcPct val="105000"/>
+              </a:lnSpc>
+              <a:spcAft>
+                <a:spcPts val="200"/>
+              </a:spcAft>
+            </a:pPr>
+            <a:r>
+              <a:rPr sz="1500" b="1">
+                <a:solidFill>
+                  <a:srgbClr val="14141C"/>
+                </a:solidFill>
+                <a:latin typeface="Helvetica Neue"/>
+              </a:rPr>
+              <a:t>•  No pipeline control</a:t>
+            </a:r>
+          </a:p>
+          <a:p>
+            <a:pPr algn="l">
+              <a:lnSpc>
+                <a:spcPct val="105000"/>
+              </a:lnSpc>
+              <a:spcAft>
+                <a:spcPts val="1000"/>
+              </a:spcAft>
+            </a:pPr>
+            <a:r>
+              <a:rPr sz="1300" b="0">
+                <a:solidFill>
+                  <a:srgbClr val="585868"/>
+                </a:solidFill>
+                <a:latin typeface="Helvetica Neue"/>
+              </a:rPr>
+              <a:t>     Collection is slow and needs a job model, and the robots.txt gate must stay server-side and non-overridable — so there is no 'run collection' button in a browser.</a:t>
+            </a:r>
+          </a:p>
+          <a:p>
+            <a:pPr algn="l">
+              <a:lnSpc>
+                <a:spcPct val="105000"/>
+              </a:lnSpc>
+              <a:spcAft>
+                <a:spcPts val="200"/>
+              </a:spcAft>
+            </a:pPr>
+            <a:r>
+              <a:rPr sz="1500" b="1">
+                <a:solidFill>
+                  <a:srgbClr val="14141C"/>
+                </a:solidFill>
+                <a:latin typeface="Helvetica Neue"/>
+              </a:rPr>
+              <a:t>•  No dataset or dictionary editing</a:t>
+            </a:r>
+          </a:p>
+          <a:p>
+            <a:pPr algn="l">
+              <a:lnSpc>
+                <a:spcPct val="105000"/>
+              </a:lnSpc>
+              <a:spcAft>
+                <a:spcPts val="1000"/>
+              </a:spcAft>
+            </a:pPr>
+            <a:r>
+              <a:rPr sz="1300" b="0">
+                <a:solidFill>
+                  <a:srgbClr val="585868"/>
+                </a:solidFill>
+                <a:latin typeface="Helvetica Neue"/>
+              </a:rPr>
+              <a:t>     The dictionary is the frozen contract (P-04); a form that edited it would undo the freeze rule, and a form that edited an extracted feature would destroy its audit trail.</a:t>
+            </a:r>
+          </a:p>
+          <a:p>
+            <a:pPr algn="l">
+              <a:lnSpc>
+                <a:spcPct val="105000"/>
+              </a:lnSpc>
+              <a:spcAft>
+                <a:spcPts val="200"/>
+              </a:spcAft>
+            </a:pPr>
+            <a:r>
+              <a:rPr sz="1500" b="1">
+                <a:solidFill>
+                  <a:srgbClr val="14141C"/>
+                </a:solidFill>
+                <a:latin typeface="Helvetica Neue"/>
+              </a:rPr>
+              <a:t>•  No live scoring screen</a:t>
+            </a:r>
+          </a:p>
+          <a:p>
+            <a:pPr algn="l">
+              <a:lnSpc>
+                <a:spcPct val="105000"/>
+              </a:lnSpc>
+              <a:spcAft>
+                <a:spcPts val="1000"/>
+              </a:spcAft>
+            </a:pPr>
+            <a:r>
+              <a:rPr sz="1300" b="0">
+                <a:solidFill>
+                  <a:srgbClr val="585868"/>
+                </a:solidFill>
+                <a:latin typeface="Helvetica Neue"/>
+              </a:rPr>
+              <a:t>     The Rubric tab shows finished sheets only. A screen that displayed a rater's neighbours would make the agreement figure measure visibility, not independent judgement (NFR-05).</a:t>
+            </a:r>
+          </a:p>
+          <a:p>
+            <a:pPr algn="l">
+              <a:lnSpc>
+                <a:spcPct val="105000"/>
+              </a:lnSpc>
+              <a:spcAft>
+                <a:spcPts val="200"/>
+              </a:spcAft>
+            </a:pPr>
+            <a:r>
+              <a:rPr sz="1500" b="1">
+                <a:solidFill>
+                  <a:srgbClr val="14141C"/>
+                </a:solidFill>
+                <a:latin typeface="Helvetica Neue"/>
+              </a:rPr>
+              <a:t>•  One direction only</a:t>
+            </a:r>
+          </a:p>
+          <a:p>
+            <a:pPr algn="l">
+              <a:lnSpc>
+                <a:spcPct val="105000"/>
+              </a:lnSpc>
+              <a:spcAft>
+                <a:spcPts val="1000"/>
+              </a:spcAft>
+            </a:pPr>
+            <a:r>
+              <a:rPr sz="1300" b="0">
+                <a:solidFill>
+                  <a:srgbClr val="585868"/>
+                </a:solidFill>
+                <a:latin typeface="Helvetica Neue"/>
+              </a:rPr>
+              <a:t>     The UI does no arithmetic: every number is computed in Python and handed over already labelled, so no figure on screen has a second definition.</a:t>
+            </a:r>
+          </a:p>
+          <a:p>
+            <a:pPr algn="l">
+              <a:lnSpc>
+                <a:spcPct val="105000"/>
+              </a:lnSpc>
+              <a:spcAft>
+                <a:spcPts val="200"/>
+              </a:spcAft>
+            </a:pPr>
+            <a:endParaRPr sz="1300" b="0">
+              <a:solidFill>
+                <a:srgbClr val="585868"/>
+              </a:solidFill>
+              <a:latin typeface="Helvetica Neue"/>
+            </a:endParaRPr>
+          </a:p>
+          <a:p>
+            <a:pPr algn="l">
+              <a:lnSpc>
+                <a:spcPct val="105000"/>
+              </a:lnSpc>
+              <a:spcAft>
+                <a:spcPts val="0"/>
+              </a:spcAft>
+            </a:pPr>
+            <a:r>
+              <a:rPr sz="1250" b="0">
+                <a:solidFill>
+                  <a:srgbClr val="585868"/>
+                </a:solidFill>
+                <a:latin typeface="Helvetica Neue"/>
+              </a:rPr>
+              <a:t>The Streamlit file stays in the repository for share.streamlit.io; it is no longer the only place these views exist.</a:t>
+            </a:r>
+          </a:p>
+        </p:txBody>
+      </p:sp>
+      <p:sp>
+        <p:nvSpPr>
+          <p:cNvPr id="5" name="TextBox 4"/>
           <p:cNvSpPr txBox="1"/>
           <p:nvPr/>
         </p:nvSpPr>
@@ -19375,7 +19044,7 @@
       </p:sp>
       <p:sp>
         <p:nvSpPr>
-          <p:cNvPr id="7" name="TextBox 6"/>
+          <p:cNvPr id="6" name="TextBox 5"/>
           <p:cNvSpPr txBox="1"/>
           <p:nvPr/>
         </p:nvSpPr>
@@ -19448,8 +19117,8 @@
         </p:nvSpPr>
         <p:spPr>
           <a:xfrm>
-            <a:off x="548640" y="384048"/>
-            <a:ext cx="11064240" cy="731520"/>
+            <a:off x="548640" y="320040"/>
+            <a:ext cx="11064240" cy="640080"/>
           </a:xfrm>
           <a:prstGeom prst="rect">
             <a:avLst/>
@@ -19471,13 +19140,13 @@
               </a:spcAft>
             </a:pPr>
             <a:r>
-              <a:rPr sz="2800" b="1">
+              <a:rPr sz="2400" b="1">
                 <a:solidFill>
                   <a:srgbClr val="14141C"/>
                 </a:solidFill>
                 <a:latin typeface="Helvetica Neue"/>
               </a:rPr>
-              <a:t>The operator tabs, and what they refuse to do</a:t>
+              <a:t>Home: what was collected, and what comes out</a:t>
             </a:r>
           </a:p>
         </p:txBody>
@@ -19490,8 +19159,8 @@
         </p:nvSpPr>
         <p:spPr>
           <a:xfrm>
-            <a:off x="548640" y="1115568"/>
-            <a:ext cx="1463040" cy="64008"/>
+            <a:off x="548640" y="960120"/>
+            <a:ext cx="1463040" cy="54864"/>
           </a:xfrm>
           <a:prstGeom prst="rect">
             <a:avLst/>
@@ -19527,16 +19196,40 @@
           </a:p>
         </p:txBody>
       </p:sp>
-      <p:sp>
-        <p:nvSpPr>
-          <p:cNvPr id="4" name="TextBox 3"/>
+      <p:pic>
+        <p:nvPicPr>
+          <p:cNvPr id="4" name="Picture 3" descr="08_home.png"/>
+          <p:cNvPicPr>
+            <a:picLocks noChangeAspect="1"/>
+          </p:cNvPicPr>
+          <p:nvPr/>
+        </p:nvPicPr>
+        <p:blipFill>
+          <a:blip r:embed="rId2"/>
+          <a:stretch>
+            <a:fillRect/>
+          </a:stretch>
+        </p:blipFill>
+        <p:spPr>
+          <a:xfrm>
+            <a:off x="2113127" y="1325880"/>
+            <a:ext cx="7965440" cy="4480560"/>
+          </a:xfrm>
+          <a:prstGeom prst="rect">
+            <a:avLst/>
+          </a:prstGeom>
+        </p:spPr>
+      </p:pic>
+      <p:sp>
+        <p:nvSpPr>
+          <p:cNvPr id="5" name="TextBox 4"/>
           <p:cNvSpPr txBox="1"/>
           <p:nvPr/>
         </p:nvSpPr>
         <p:spPr>
           <a:xfrm>
-            <a:off x="685800" y="1463040"/>
-            <a:ext cx="10881360" cy="4754880"/>
+            <a:off x="685800" y="5916168"/>
+            <a:ext cx="10881360" cy="457200"/>
           </a:xfrm>
           <a:prstGeom prst="rect">
             <a:avLst/>
@@ -19554,230 +19247,24 @@
                 <a:spcPct val="105000"/>
               </a:lnSpc>
               <a:spcAft>
-                <a:spcPts val="200"/>
-              </a:spcAft>
-            </a:pPr>
-            <a:r>
-              <a:rPr sz="1500" b="1">
-                <a:solidFill>
-                  <a:srgbClr val="14141C"/>
-                </a:solidFill>
-                <a:latin typeface="Helvetica Neue"/>
-              </a:rPr>
-              <a:t>•  Six read-only views, moved out of the Streamlit dashboard</a:t>
-            </a:r>
-          </a:p>
-          <a:p>
-            <a:pPr algn="l">
-              <a:lnSpc>
-                <a:spcPct val="105000"/>
-              </a:lnSpc>
-              <a:spcAft>
-                <a:spcPts val="1000"/>
-              </a:spcAft>
-            </a:pPr>
-            <a:r>
-              <a:rPr sz="1300" b="0">
+                <a:spcPts val="600"/>
+              </a:spcAft>
+            </a:pPr>
+            <a:r>
+              <a:rPr sz="1200" b="0">
                 <a:solidFill>
                   <a:srgbClr val="585868"/>
                 </a:solidFill>
                 <a:latin typeface="Helvetica Neue"/>
               </a:rPr>
-              <a:t>     Home, Bank profiles, Data, Rubric, Collection and Research now render in the same UI as the findings, from one snapshot the exporter writes: operations.json.</a:t>
-            </a:r>
-          </a:p>
-          <a:p>
-            <a:pPr algn="l">
-              <a:lnSpc>
-                <a:spcPct val="105000"/>
-              </a:lnSpc>
-              <a:spcAft>
-                <a:spcPts val="200"/>
-              </a:spcAft>
-            </a:pPr>
-            <a:r>
-              <a:rPr sz="1500" b="1">
-                <a:solidFill>
-                  <a:srgbClr val="14141C"/>
-                </a:solidFill>
-                <a:latin typeface="Helvetica Neue"/>
-              </a:rPr>
-              <a:t>•  No pipeline control</a:t>
-            </a:r>
-          </a:p>
-          <a:p>
-            <a:pPr algn="l">
-              <a:lnSpc>
-                <a:spcPct val="105000"/>
-              </a:lnSpc>
-              <a:spcAft>
-                <a:spcPts val="1000"/>
-              </a:spcAft>
-            </a:pPr>
-            <a:r>
-              <a:rPr sz="1300" b="0">
-                <a:solidFill>
-                  <a:srgbClr val="585868"/>
-                </a:solidFill>
-                <a:latin typeface="Helvetica Neue"/>
-              </a:rPr>
-              <a:t>     Collection is slow and needs a job model, and the robots.txt gate must stay server-side and non-overridable — so there is no 'run collection' button in a browser.</a:t>
-            </a:r>
-          </a:p>
-          <a:p>
-            <a:pPr algn="l">
-              <a:lnSpc>
-                <a:spcPct val="105000"/>
-              </a:lnSpc>
-              <a:spcAft>
-                <a:spcPts val="200"/>
-              </a:spcAft>
-            </a:pPr>
-            <a:r>
-              <a:rPr sz="1500" b="1">
-                <a:solidFill>
-                  <a:srgbClr val="14141C"/>
-                </a:solidFill>
-                <a:latin typeface="Helvetica Neue"/>
-              </a:rPr>
-              <a:t>•  No dataset or dictionary editing</a:t>
-            </a:r>
-          </a:p>
-          <a:p>
-            <a:pPr algn="l">
-              <a:lnSpc>
-                <a:spcPct val="105000"/>
-              </a:lnSpc>
-              <a:spcAft>
-                <a:spcPts val="1000"/>
-              </a:spcAft>
-            </a:pPr>
-            <a:r>
-              <a:rPr sz="1300" b="0">
-                <a:solidFill>
-                  <a:srgbClr val="585868"/>
-                </a:solidFill>
-                <a:latin typeface="Helvetica Neue"/>
-              </a:rPr>
-              <a:t>     The dictionary is the frozen contract (P-04); a form that edited it would undo the freeze rule, and a form that edited an extracted feature would destroy its audit trail.</a:t>
-            </a:r>
-          </a:p>
-          <a:p>
-            <a:pPr algn="l">
-              <a:lnSpc>
-                <a:spcPct val="105000"/>
-              </a:lnSpc>
-              <a:spcAft>
-                <a:spcPts val="200"/>
-              </a:spcAft>
-            </a:pPr>
-            <a:r>
-              <a:rPr sz="1500" b="1">
-                <a:solidFill>
-                  <a:srgbClr val="14141C"/>
-                </a:solidFill>
-                <a:latin typeface="Helvetica Neue"/>
-              </a:rPr>
-              <a:t>•  No live scoring screen</a:t>
-            </a:r>
-          </a:p>
-          <a:p>
-            <a:pPr algn="l">
-              <a:lnSpc>
-                <a:spcPct val="105000"/>
-              </a:lnSpc>
-              <a:spcAft>
-                <a:spcPts val="1000"/>
-              </a:spcAft>
-            </a:pPr>
-            <a:r>
-              <a:rPr sz="1300" b="0">
-                <a:solidFill>
-                  <a:srgbClr val="585868"/>
-                </a:solidFill>
-                <a:latin typeface="Helvetica Neue"/>
-              </a:rPr>
-              <a:t>     The Rubric tab shows finished sheets only. A screen that displayed a rater's neighbours would make the agreement figure measure visibility, not independent judgement (NFR-05).</a:t>
-            </a:r>
-          </a:p>
-          <a:p>
-            <a:pPr algn="l">
-              <a:lnSpc>
-                <a:spcPct val="105000"/>
-              </a:lnSpc>
-              <a:spcAft>
-                <a:spcPts val="200"/>
-              </a:spcAft>
-            </a:pPr>
-            <a:r>
-              <a:rPr sz="1500" b="1">
-                <a:solidFill>
-                  <a:srgbClr val="14141C"/>
-                </a:solidFill>
-                <a:latin typeface="Helvetica Neue"/>
-              </a:rPr>
-              <a:t>•  One direction only</a:t>
-            </a:r>
-          </a:p>
-          <a:p>
-            <a:pPr algn="l">
-              <a:lnSpc>
-                <a:spcPct val="105000"/>
-              </a:lnSpc>
-              <a:spcAft>
-                <a:spcPts val="1000"/>
-              </a:spcAft>
-            </a:pPr>
-            <a:r>
-              <a:rPr sz="1300" b="0">
-                <a:solidFill>
-                  <a:srgbClr val="585868"/>
-                </a:solidFill>
-                <a:latin typeface="Helvetica Neue"/>
-              </a:rPr>
-              <a:t>     The UI does no arithmetic: every number is computed in Python and handed over already labelled, so no figure on screen has a second definition.</a:t>
-            </a:r>
-          </a:p>
-          <a:p>
-            <a:pPr algn="l">
-              <a:lnSpc>
-                <a:spcPct val="105000"/>
-              </a:lnSpc>
-              <a:spcAft>
-                <a:spcPts val="200"/>
-              </a:spcAft>
-            </a:pPr>
-            <a:endParaRPr sz="1300" b="0">
-              <a:solidFill>
-                <a:srgbClr val="585868"/>
-              </a:solidFill>
-              <a:latin typeface="Helvetica Neue"/>
-            </a:endParaRPr>
-          </a:p>
-          <a:p>
-            <a:pPr algn="l">
-              <a:lnSpc>
-                <a:spcPct val="105000"/>
-              </a:lnSpc>
-              <a:spcAft>
-                <a:spcPts val="0"/>
-              </a:spcAft>
-            </a:pPr>
-            <a:r>
-              <a:rPr sz="1250" b="0">
-                <a:solidFill>
-                  <a:srgbClr val="585868"/>
-                </a:solidFill>
-                <a:latin typeface="Helvetica Neue"/>
-              </a:rPr>
-              <a:t>The Streamlit file stays in the repository for share.streamlit.io; it is no longer the only place these views exist.</a:t>
-            </a:r>
-          </a:p>
-        </p:txBody>
-      </p:sp>
-      <p:sp>
-        <p:nvSpPr>
-          <p:cNvPr id="5" name="TextBox 4"/>
+              <a:t>Four counts from the run, the validation verdict, every bank's status, and a download per deliverable.</a:t>
+            </a:r>
+          </a:p>
+        </p:txBody>
+      </p:sp>
+      <p:sp>
+        <p:nvSpPr>
+          <p:cNvPr id="6" name="TextBox 5"/>
           <p:cNvSpPr txBox="1"/>
           <p:nvPr/>
         </p:nvSpPr>
@@ -19819,7 +19306,7 @@
       </p:sp>
       <p:sp>
         <p:nvSpPr>
-          <p:cNvPr id="6" name="TextBox 5"/>
+          <p:cNvPr id="7" name="TextBox 6"/>
           <p:cNvSpPr txBox="1"/>
           <p:nvPr/>
         </p:nvSpPr>
@@ -19921,7 +19408,7 @@
                 </a:solidFill>
                 <a:latin typeface="Helvetica Neue"/>
               </a:rPr>
-              <a:t>Home: what was collected, and what comes out</a:t>
+              <a:t>Bank profiles: one bank, every measured field</a:t>
             </a:r>
           </a:p>
         </p:txBody>
@@ -19973,7 +19460,7 @@
       </p:sp>
       <p:pic>
         <p:nvPicPr>
-          <p:cNvPr id="4" name="Picture 3" descr="08_home.png"/>
+          <p:cNvPr id="4" name="Picture 3" descr="09_profiles.png"/>
           <p:cNvPicPr>
             <a:picLocks noChangeAspect="1"/>
           </p:cNvPicPr>
@@ -20032,7 +19519,7 @@
                 </a:solidFill>
                 <a:latin typeface="Helvetica Neue"/>
               </a:rPr>
-              <a:t>Four counts from the run, the validation verdict, every bank's status, and a download per deliverable.</a:t>
+              <a:t>Palette, tone, imagery, layout, value proposition, the z-score signature, personas and the AI Score.</a:t>
             </a:r>
           </a:p>
         </p:txBody>
@@ -20183,7 +19670,7 @@
                 </a:solidFill>
                 <a:latin typeface="Helvetica Neue"/>
               </a:rPr>
-              <a:t>Bank profiles: one bank, every measured field</a:t>
+              <a:t>Data: the dataset and the frozen dictionary</a:t>
             </a:r>
           </a:p>
         </p:txBody>
@@ -20235,7 +19722,7 @@
       </p:sp>
       <p:pic>
         <p:nvPicPr>
-          <p:cNvPr id="4" name="Picture 3" descr="09_profiles.png"/>
+          <p:cNvPr id="4" name="Picture 3" descr="10_data.png"/>
           <p:cNvPicPr>
             <a:picLocks noChangeAspect="1"/>
           </p:cNvPicPr>
@@ -20294,7 +19781,7 @@
                 </a:solidFill>
                 <a:latin typeface="Helvetica Neue"/>
               </a:rPr>
-              <a:t>Palette, tone, imagery, layout, value proposition, the z-score signature, personas and the AI Score.</a:t>
+              <a:t>Every capture with its provenance, filterable and exportable, read against the 104-feature dictionary.</a:t>
             </a:r>
           </a:p>
         </p:txBody>
@@ -20445,7 +19932,7 @@
                 </a:solidFill>
                 <a:latin typeface="Helvetica Neue"/>
               </a:rPr>
-              <a:t>Data: the dataset and the frozen dictionary</a:t>
+              <a:t>Rubric: the sheets, and where they disagree</a:t>
             </a:r>
           </a:p>
         </p:txBody>
@@ -20497,7 +19984,7 @@
       </p:sp>
       <p:pic>
         <p:nvPicPr>
-          <p:cNvPr id="4" name="Picture 3" descr="10_data.png"/>
+          <p:cNvPr id="4" name="Picture 3" descr="11_rubric.png"/>
           <p:cNvPicPr>
             <a:picLocks noChangeAspect="1"/>
           </p:cNvPicPr>
@@ -20556,7 +20043,7 @@
                 </a:solidFill>
                 <a:latin typeface="Helvetica Neue"/>
               </a:rPr>
-              <a:t>Every capture with its provenance, filterable and exportable, read against the 104-feature dictionary.</a:t>
+              <a:t>Every sheet, raw agreement, chance-corrected kappa, and the scoring guide — never merged into one score.</a:t>
             </a:r>
           </a:p>
         </p:txBody>
@@ -20707,7 +20194,7 @@
                 </a:solidFill>
                 <a:latin typeface="Helvetica Neue"/>
               </a:rPr>
-              <a:t>Rubric: the sheets, and where they disagree</a:t>
+              <a:t>Collection: status, provenance and the pipeline</a:t>
             </a:r>
           </a:p>
         </p:txBody>
@@ -20759,7 +20246,7 @@
       </p:sp>
       <p:pic>
         <p:nvPicPr>
-          <p:cNvPr id="4" name="Picture 3" descr="11_rubric.png"/>
+          <p:cNvPr id="4" name="Picture 3" descr="12_collection.png"/>
           <p:cNvPicPr>
             <a:picLocks noChangeAspect="1"/>
           </p:cNvPicPr>
@@ -20818,7 +20305,7 @@
                 </a:solidFill>
                 <a:latin typeface="Helvetica Neue"/>
               </a:rPr>
-              <a:t>Every sheet, raw agreement, chance-corrected kappa, and the scoring guide — never merged into one score.</a:t>
+              <a:t>Counts straight from the export, per-bank status, capture provenance, and the commands that produced it.</a:t>
             </a:r>
           </a:p>
         </p:txBody>
@@ -20969,7 +20456,7 @@
                 </a:solidFill>
                 <a:latin typeface="Helvetica Neue"/>
               </a:rPr>
-              <a:t>Collection: status, provenance and the pipeline</a:t>
+              <a:t>Research: sourcing a claim</a:t>
             </a:r>
           </a:p>
         </p:txBody>
@@ -21021,7 +20508,7 @@
       </p:sp>
       <p:pic>
         <p:nvPicPr>
-          <p:cNvPr id="4" name="Picture 3" descr="12_collection.png"/>
+          <p:cNvPr id="4" name="Picture 3" descr="13_research.png"/>
           <p:cNvPicPr>
             <a:picLocks noChangeAspect="1"/>
           </p:cNvPicPr>
@@ -21080,7 +20567,7 @@
                 </a:solidFill>
                 <a:latin typeface="Helvetica Neue"/>
               </a:rPr>
-              <a:t>Counts straight from the export, per-bank status, capture provenance, and the commands that produced it.</a:t>
+              <a:t>Semantic Scholar, on demand. Empty is reported as empty — a rate limit must not read as 'no evidence'.</a:t>
             </a:r>
           </a:p>
         </p:txBody>
@@ -21290,7 +20777,7 @@
           <p:nvPr/>
         </p:nvPicPr>
         <p:blipFill>
-          <a:blip r:embed="rId3"/>
+          <a:blip r:embed="rId2"/>
           <a:stretch>
             <a:fillRect/>
           </a:stretch>
@@ -21464,8 +20951,8 @@
         </p:nvSpPr>
         <p:spPr>
           <a:xfrm>
-            <a:off x="548640" y="320040"/>
-            <a:ext cx="11064240" cy="640080"/>
+            <a:off x="548640" y="384048"/>
+            <a:ext cx="11064240" cy="731520"/>
           </a:xfrm>
           <a:prstGeom prst="rect">
             <a:avLst/>
@@ -21487,13 +20974,13 @@
               </a:spcAft>
             </a:pPr>
             <a:r>
-              <a:rPr sz="2400" b="1">
+              <a:rPr sz="2800" b="1">
                 <a:solidFill>
                   <a:srgbClr val="14141C"/>
                 </a:solidFill>
                 <a:latin typeface="Helvetica Neue"/>
               </a:rPr>
-              <a:t>Research: sourcing a claim</a:t>
+              <a:t>Roadmap</a:t>
             </a:r>
           </a:p>
         </p:txBody>
@@ -21506,8 +20993,8 @@
         </p:nvSpPr>
         <p:spPr>
           <a:xfrm>
-            <a:off x="548640" y="960120"/>
-            <a:ext cx="1463040" cy="54864"/>
+            <a:off x="548640" y="1115568"/>
+            <a:ext cx="1463040" cy="64008"/>
           </a:xfrm>
           <a:prstGeom prst="rect">
             <a:avLst/>
@@ -21543,40 +21030,16 @@
           </a:p>
         </p:txBody>
       </p:sp>
-      <p:pic>
-        <p:nvPicPr>
-          <p:cNvPr id="4" name="Picture 3" descr="13_research.png"/>
-          <p:cNvPicPr>
-            <a:picLocks noChangeAspect="1"/>
-          </p:cNvPicPr>
-          <p:nvPr/>
-        </p:nvPicPr>
-        <p:blipFill>
-          <a:blip r:embed="rId2"/>
-          <a:stretch>
-            <a:fillRect/>
-          </a:stretch>
-        </p:blipFill>
-        <p:spPr>
-          <a:xfrm>
-            <a:off x="2113127" y="1325880"/>
-            <a:ext cx="7965440" cy="4480560"/>
-          </a:xfrm>
-          <a:prstGeom prst="rect">
-            <a:avLst/>
-          </a:prstGeom>
-        </p:spPr>
-      </p:pic>
-      <p:sp>
-        <p:nvSpPr>
-          <p:cNvPr id="5" name="TextBox 4"/>
+      <p:sp>
+        <p:nvSpPr>
+          <p:cNvPr id="4" name="TextBox 3"/>
           <p:cNvSpPr txBox="1"/>
           <p:nvPr/>
         </p:nvSpPr>
         <p:spPr>
           <a:xfrm>
-            <a:off x="685800" y="5916168"/>
-            <a:ext cx="10881360" cy="457200"/>
+            <a:off x="685800" y="1463040"/>
+            <a:ext cx="10881360" cy="4754880"/>
           </a:xfrm>
           <a:prstGeom prst="rect">
             <a:avLst/>
@@ -21594,24 +21057,195 @@
                 <a:spcPct val="105000"/>
               </a:lnSpc>
               <a:spcAft>
-                <a:spcPts val="600"/>
-              </a:spcAft>
-            </a:pPr>
-            <a:r>
-              <a:rPr sz="1200" b="0">
+                <a:spcPts val="200"/>
+              </a:spcAft>
+            </a:pPr>
+            <a:r>
+              <a:rPr sz="1500" b="1">
+                <a:solidFill>
+                  <a:srgbClr val="14141C"/>
+                </a:solidFill>
+                <a:latin typeface="Helvetica Neue"/>
+              </a:rPr>
+              <a:t>•  1. Turn the rubric into a number you can quote</a:t>
+            </a:r>
+          </a:p>
+          <a:p>
+            <a:pPr algn="l">
+              <a:lnSpc>
+                <a:spcPct val="105000"/>
+              </a:lnSpc>
+              <a:spcAft>
+                <a:spcPts val="1000"/>
+              </a:spcAft>
+            </a:pPr>
+            <a:r>
+              <a:rPr sz="1300" b="0">
                 <a:solidFill>
                   <a:srgbClr val="585868"/>
                 </a:solidFill>
                 <a:latin typeface="Helvetica Neue"/>
               </a:rPr>
-              <a:t>Semantic Scholar, on demand. Empty is reported as empty — a rate limit must not read as 'no evidence'.</a:t>
-            </a:r>
-          </a:p>
-        </p:txBody>
-      </p:sp>
-      <p:sp>
-        <p:nvSpPr>
-          <p:cNvPr id="6" name="TextBox 5"/>
+              <a:t>     Finish the two-raters-per-bank split — it takes the comparison from 30 usable features to about 40 — and tighten the wording for the six features below the 60% bar before any judged feature carries a finding.</a:t>
+            </a:r>
+          </a:p>
+          <a:p>
+            <a:pPr algn="l">
+              <a:lnSpc>
+                <a:spcPct val="105000"/>
+              </a:lnSpc>
+              <a:spcAft>
+                <a:spcPts val="200"/>
+              </a:spcAft>
+            </a:pPr>
+            <a:r>
+              <a:rPr sz="1500" b="1">
+                <a:solidFill>
+                  <a:srgbClr val="14141C"/>
+                </a:solidFill>
+                <a:latin typeface="Helvetica Neue"/>
+              </a:rPr>
+              <a:t>•  2. Fill the remaining sheet rows</a:t>
+            </a:r>
+          </a:p>
+          <a:p>
+            <a:pPr algn="l">
+              <a:lnSpc>
+                <a:spcPct val="105000"/>
+              </a:lnSpc>
+              <a:spcAft>
+                <a:spcPts val="1000"/>
+              </a:spcAft>
+            </a:pPr>
+            <a:r>
+              <a:rPr sz="1300" b="0">
+                <a:solidFill>
+                  <a:srgbClr val="585868"/>
+                </a:solidFill>
+                <a:latin typeface="Helvetica Neue"/>
+              </a:rPr>
+              <a:t>     Every bank now has its rows, including the two English pages restored on 23/09; what is missing is filled scores, not sheets.</a:t>
+            </a:r>
+          </a:p>
+          <a:p>
+            <a:pPr algn="l">
+              <a:lnSpc>
+                <a:spcPct val="105000"/>
+              </a:lnSpc>
+              <a:spcAft>
+                <a:spcPts val="200"/>
+              </a:spcAft>
+            </a:pPr>
+            <a:r>
+              <a:rPr sz="1500" b="1">
+                <a:solidFill>
+                  <a:srgbClr val="14141C"/>
+                </a:solidFill>
+                <a:latin typeface="Helvetica Neue"/>
+              </a:rPr>
+              <a:t>•  3. Re-run and re-export</a:t>
+            </a:r>
+          </a:p>
+          <a:p>
+            <a:pPr algn="l">
+              <a:lnSpc>
+                <a:spcPct val="105000"/>
+              </a:lnSpc>
+              <a:spcAft>
+                <a:spcPts val="1000"/>
+              </a:spcAft>
+            </a:pPr>
+            <a:r>
+              <a:rPr sz="1300" b="0">
+                <a:solidFill>
+                  <a:srgbClr val="585868"/>
+                </a:solidFill>
+                <a:latin typeface="Helvetica Neue"/>
+              </a:rPr>
+              <a:t>     rubric_sheet.py merge → run_analysis.py → export_web_report.py, then re-verify the narrative's figures against the new snapshot.</a:t>
+            </a:r>
+          </a:p>
+          <a:p>
+            <a:pPr algn="l">
+              <a:lnSpc>
+                <a:spcPct val="105000"/>
+              </a:lnSpc>
+              <a:spcAft>
+                <a:spcPts val="200"/>
+              </a:spcAft>
+            </a:pPr>
+            <a:r>
+              <a:rPr sz="1500" b="1">
+                <a:solidFill>
+                  <a:srgbClr val="14141C"/>
+                </a:solidFill>
+                <a:latin typeface="Helvetica Neue"/>
+              </a:rPr>
+              <a:t>•  4. Decide on outputs/ in git</a:t>
+            </a:r>
+          </a:p>
+          <a:p>
+            <a:pPr algn="l">
+              <a:lnSpc>
+                <a:spcPct val="105000"/>
+              </a:lnSpc>
+              <a:spcAft>
+                <a:spcPts val="1000"/>
+              </a:spcAft>
+            </a:pPr>
+            <a:r>
+              <a:rPr sz="1300" b="0">
+                <a:solidFill>
+                  <a:srgbClr val="585868"/>
+                </a:solidFill>
+                <a:latin typeface="Helvetica Neue"/>
+              </a:rPr>
+              <a:t>     It is regenerated on every run yet tracked, so each analysis leaves a large binary diff.</a:t>
+            </a:r>
+          </a:p>
+          <a:p>
+            <a:pPr algn="l">
+              <a:lnSpc>
+                <a:spcPct val="105000"/>
+              </a:lnSpc>
+              <a:spcAft>
+                <a:spcPts val="200"/>
+              </a:spcAft>
+            </a:pPr>
+            <a:r>
+              <a:rPr sz="1500" b="1">
+                <a:solidFill>
+                  <a:srgbClr val="14141C"/>
+                </a:solidFill>
+                <a:latin typeface="Helvetica Neue"/>
+              </a:rPr>
+              <a:t>•  5. Then, if the team wants it</a:t>
+            </a:r>
+          </a:p>
+          <a:p>
+            <a:pPr algn="l">
+              <a:lnSpc>
+                <a:spcPct val="105000"/>
+              </a:lnSpc>
+              <a:spcAft>
+                <a:spcPts val="1000"/>
+              </a:spcAft>
+            </a:pPr>
+            <a:r>
+              <a:rPr sz="1300" b="0">
+                <a:solidFill>
+                  <a:srgbClr val="585868"/>
+                </a:solidFill>
+                <a:latin typeface="Helvetica Neue"/>
+              </a:rPr>
+              <a:t>     Savings, mortgage, pension, investment and term accounts are already collected (52 pages, 6 families); comparing each family the same way is the next step, plus a wider bank set.</a:t>
+            </a:r>
+          </a:p>
+        </p:txBody>
+      </p:sp>
+      <p:sp>
+        <p:nvSpPr>
+          <p:cNvPr id="5" name="TextBox 4"/>
           <p:cNvSpPr txBox="1"/>
           <p:nvPr/>
         </p:nvSpPr>
@@ -21653,7 +21287,7 @@
       </p:sp>
       <p:sp>
         <p:nvSpPr>
-          <p:cNvPr id="7" name="TextBox 6"/>
+          <p:cNvPr id="6" name="TextBox 5"/>
           <p:cNvSpPr txBox="1"/>
           <p:nvPr/>
         </p:nvSpPr>
@@ -21689,415 +21323,6 @@
                 <a:latin typeface="Helvetica Neue"/>
               </a:rPr>
               <a:t>40</a:t>
-            </a:r>
-          </a:p>
-        </p:txBody>
-      </p:sp>
-    </p:spTree>
-  </p:cSld>
-  <p:clrMapOvr>
-    <a:masterClrMapping/>
-  </p:clrMapOvr>
-</p:sld>
-</file>
-
-<file path=ppt/slides/slide41.xml><?xml version="1.0" encoding="utf-8"?>
-<p:sld xmlns:a="http://schemas.openxmlformats.org/drawingml/2006/main" xmlns:r="http://schemas.openxmlformats.org/officeDocument/2006/relationships" xmlns:p="http://schemas.openxmlformats.org/presentationml/2006/main">
-  <p:cSld>
-    <p:spTree>
-      <p:nvGrpSpPr>
-        <p:cNvPr id="1" name=""/>
-        <p:cNvGrpSpPr/>
-        <p:nvPr/>
-      </p:nvGrpSpPr>
-      <p:grpSpPr>
-        <a:xfrm>
-          <a:off x="0" y="0"/>
-          <a:ext cx="0" cy="0"/>
-          <a:chOff x="0" y="0"/>
-          <a:chExt cx="0" cy="0"/>
-        </a:xfrm>
-      </p:grpSpPr>
-      <p:sp>
-        <p:nvSpPr>
-          <p:cNvPr id="2" name="TextBox 1"/>
-          <p:cNvSpPr txBox="1"/>
-          <p:nvPr/>
-        </p:nvSpPr>
-        <p:spPr>
-          <a:xfrm>
-            <a:off x="548640" y="384048"/>
-            <a:ext cx="11064240" cy="731520"/>
-          </a:xfrm>
-          <a:prstGeom prst="rect">
-            <a:avLst/>
-          </a:prstGeom>
-          <a:noFill/>
-        </p:spPr>
-        <p:txBody>
-          <a:bodyPr wrap="square">
-            <a:spAutoFit/>
-          </a:bodyPr>
-          <a:lstStyle/>
-          <a:p>
-            <a:pPr algn="l">
-              <a:lnSpc>
-                <a:spcPct val="105000"/>
-              </a:lnSpc>
-              <a:spcAft>
-                <a:spcPts val="600"/>
-              </a:spcAft>
-            </a:pPr>
-            <a:r>
-              <a:rPr sz="2800" b="1">
-                <a:solidFill>
-                  <a:srgbClr val="14141C"/>
-                </a:solidFill>
-                <a:latin typeface="Helvetica Neue"/>
-              </a:rPr>
-              <a:t>Roadmap</a:t>
-            </a:r>
-          </a:p>
-        </p:txBody>
-      </p:sp>
-      <p:sp>
-        <p:nvSpPr>
-          <p:cNvPr id="3" name="Rectangle 2"/>
-          <p:cNvSpPr/>
-          <p:nvPr/>
-        </p:nvSpPr>
-        <p:spPr>
-          <a:xfrm>
-            <a:off x="548640" y="1115568"/>
-            <a:ext cx="1463040" cy="64008"/>
-          </a:xfrm>
-          <a:prstGeom prst="rect">
-            <a:avLst/>
-          </a:prstGeom>
-          <a:solidFill>
-            <a:srgbClr val="FF6200"/>
-          </a:solidFill>
-          <a:ln>
-            <a:noFill/>
-          </a:ln>
-          <a:effectLst/>
-        </p:spPr>
-        <p:style>
-          <a:lnRef idx="1">
-            <a:schemeClr val="accent1"/>
-          </a:lnRef>
-          <a:fillRef idx="3">
-            <a:schemeClr val="accent1"/>
-          </a:fillRef>
-          <a:effectRef idx="2">
-            <a:schemeClr val="accent1"/>
-          </a:effectRef>
-          <a:fontRef idx="minor">
-            <a:schemeClr val="lt1"/>
-          </a:fontRef>
-        </p:style>
-        <p:txBody>
-          <a:bodyPr rtlCol="0" anchor="ctr"/>
-          <a:lstStyle/>
-          <a:p>
-            <a:pPr algn="ctr"/>
-            <a:endParaRPr/>
-          </a:p>
-        </p:txBody>
-      </p:sp>
-      <p:sp>
-        <p:nvSpPr>
-          <p:cNvPr id="4" name="TextBox 3"/>
-          <p:cNvSpPr txBox="1"/>
-          <p:nvPr/>
-        </p:nvSpPr>
-        <p:spPr>
-          <a:xfrm>
-            <a:off x="685800" y="1463040"/>
-            <a:ext cx="10881360" cy="4754880"/>
-          </a:xfrm>
-          <a:prstGeom prst="rect">
-            <a:avLst/>
-          </a:prstGeom>
-          <a:noFill/>
-        </p:spPr>
-        <p:txBody>
-          <a:bodyPr wrap="square">
-            <a:spAutoFit/>
-          </a:bodyPr>
-          <a:lstStyle/>
-          <a:p>
-            <a:pPr algn="l">
-              <a:lnSpc>
-                <a:spcPct val="105000"/>
-              </a:lnSpc>
-              <a:spcAft>
-                <a:spcPts val="200"/>
-              </a:spcAft>
-            </a:pPr>
-            <a:r>
-              <a:rPr sz="1500" b="1">
-                <a:solidFill>
-                  <a:srgbClr val="14141C"/>
-                </a:solidFill>
-                <a:latin typeface="Helvetica Neue"/>
-              </a:rPr>
-              <a:t>•  1. Turn the rubric into a number you can quote</a:t>
-            </a:r>
-          </a:p>
-          <a:p>
-            <a:pPr algn="l">
-              <a:lnSpc>
-                <a:spcPct val="105000"/>
-              </a:lnSpc>
-              <a:spcAft>
-                <a:spcPts val="1000"/>
-              </a:spcAft>
-            </a:pPr>
-            <a:r>
-              <a:rPr sz="1300" b="0">
-                <a:solidFill>
-                  <a:srgbClr val="585868"/>
-                </a:solidFill>
-                <a:latin typeface="Helvetica Neue"/>
-              </a:rPr>
-              <a:t>     Finish the two-raters-per-bank split — it takes the comparison from 30 usable features to about 40 — and tighten the wording for the six features below the 60% bar before any judged feature carries a finding.</a:t>
-            </a:r>
-          </a:p>
-          <a:p>
-            <a:pPr algn="l">
-              <a:lnSpc>
-                <a:spcPct val="105000"/>
-              </a:lnSpc>
-              <a:spcAft>
-                <a:spcPts val="200"/>
-              </a:spcAft>
-            </a:pPr>
-            <a:r>
-              <a:rPr sz="1500" b="1">
-                <a:solidFill>
-                  <a:srgbClr val="14141C"/>
-                </a:solidFill>
-                <a:latin typeface="Helvetica Neue"/>
-              </a:rPr>
-              <a:t>•  2. Fill the remaining sheet rows</a:t>
-            </a:r>
-          </a:p>
-          <a:p>
-            <a:pPr algn="l">
-              <a:lnSpc>
-                <a:spcPct val="105000"/>
-              </a:lnSpc>
-              <a:spcAft>
-                <a:spcPts val="1000"/>
-              </a:spcAft>
-            </a:pPr>
-            <a:r>
-              <a:rPr sz="1300" b="0">
-                <a:solidFill>
-                  <a:srgbClr val="585868"/>
-                </a:solidFill>
-                <a:latin typeface="Helvetica Neue"/>
-              </a:rPr>
-              <a:t>     Every bank now has its rows, including the two English pages restored on 23/09; what is missing is filled scores, not sheets.</a:t>
-            </a:r>
-          </a:p>
-          <a:p>
-            <a:pPr algn="l">
-              <a:lnSpc>
-                <a:spcPct val="105000"/>
-              </a:lnSpc>
-              <a:spcAft>
-                <a:spcPts val="200"/>
-              </a:spcAft>
-            </a:pPr>
-            <a:r>
-              <a:rPr sz="1500" b="1">
-                <a:solidFill>
-                  <a:srgbClr val="14141C"/>
-                </a:solidFill>
-                <a:latin typeface="Helvetica Neue"/>
-              </a:rPr>
-              <a:t>•  3. Re-run and re-export</a:t>
-            </a:r>
-          </a:p>
-          <a:p>
-            <a:pPr algn="l">
-              <a:lnSpc>
-                <a:spcPct val="105000"/>
-              </a:lnSpc>
-              <a:spcAft>
-                <a:spcPts val="1000"/>
-              </a:spcAft>
-            </a:pPr>
-            <a:r>
-              <a:rPr sz="1300" b="0">
-                <a:solidFill>
-                  <a:srgbClr val="585868"/>
-                </a:solidFill>
-                <a:latin typeface="Helvetica Neue"/>
-              </a:rPr>
-              <a:t>     rubric_sheet.py merge → run_analysis.py → export_web_report.py, then re-verify the narrative's figures against the new snapshot.</a:t>
-            </a:r>
-          </a:p>
-          <a:p>
-            <a:pPr algn="l">
-              <a:lnSpc>
-                <a:spcPct val="105000"/>
-              </a:lnSpc>
-              <a:spcAft>
-                <a:spcPts val="200"/>
-              </a:spcAft>
-            </a:pPr>
-            <a:r>
-              <a:rPr sz="1500" b="1">
-                <a:solidFill>
-                  <a:srgbClr val="14141C"/>
-                </a:solidFill>
-                <a:latin typeface="Helvetica Neue"/>
-              </a:rPr>
-              <a:t>•  4. Decide on outputs/ in git</a:t>
-            </a:r>
-          </a:p>
-          <a:p>
-            <a:pPr algn="l">
-              <a:lnSpc>
-                <a:spcPct val="105000"/>
-              </a:lnSpc>
-              <a:spcAft>
-                <a:spcPts val="1000"/>
-              </a:spcAft>
-            </a:pPr>
-            <a:r>
-              <a:rPr sz="1300" b="0">
-                <a:solidFill>
-                  <a:srgbClr val="585868"/>
-                </a:solidFill>
-                <a:latin typeface="Helvetica Neue"/>
-              </a:rPr>
-              <a:t>     It is regenerated on every run yet tracked, so each analysis leaves a large binary diff.</a:t>
-            </a:r>
-          </a:p>
-          <a:p>
-            <a:pPr algn="l">
-              <a:lnSpc>
-                <a:spcPct val="105000"/>
-              </a:lnSpc>
-              <a:spcAft>
-                <a:spcPts val="200"/>
-              </a:spcAft>
-            </a:pPr>
-            <a:r>
-              <a:rPr sz="1500" b="1">
-                <a:solidFill>
-                  <a:srgbClr val="14141C"/>
-                </a:solidFill>
-                <a:latin typeface="Helvetica Neue"/>
-              </a:rPr>
-              <a:t>•  5. Then, if the team wants it</a:t>
-            </a:r>
-          </a:p>
-          <a:p>
-            <a:pPr algn="l">
-              <a:lnSpc>
-                <a:spcPct val="105000"/>
-              </a:lnSpc>
-              <a:spcAft>
-                <a:spcPts val="1000"/>
-              </a:spcAft>
-            </a:pPr>
-            <a:r>
-              <a:rPr sz="1300" b="0">
-                <a:solidFill>
-                  <a:srgbClr val="585868"/>
-                </a:solidFill>
-                <a:latin typeface="Helvetica Neue"/>
-              </a:rPr>
-              <a:t>     Savings, mortgage, pension, investment and term accounts are already collected (51 pages, 6 families); comparing each family the same way is the next step, plus a wider bank set.</a:t>
-            </a:r>
-          </a:p>
-        </p:txBody>
-      </p:sp>
-      <p:sp>
-        <p:nvSpPr>
-          <p:cNvPr id="5" name="TextBox 4"/>
-          <p:cNvSpPr txBox="1"/>
-          <p:nvPr/>
-        </p:nvSpPr>
-        <p:spPr>
-          <a:xfrm>
-            <a:off x="548640" y="6400800"/>
-            <a:ext cx="8229600" cy="274320"/>
-          </a:xfrm>
-          <a:prstGeom prst="rect">
-            <a:avLst/>
-          </a:prstGeom>
-          <a:noFill/>
-        </p:spPr>
-        <p:txBody>
-          <a:bodyPr wrap="square">
-            <a:spAutoFit/>
-          </a:bodyPr>
-          <a:lstStyle/>
-          <a:p>
-            <a:pPr algn="l">
-              <a:lnSpc>
-                <a:spcPct val="105000"/>
-              </a:lnSpc>
-              <a:spcAft>
-                <a:spcPts val="600"/>
-              </a:spcAft>
-            </a:pPr>
-            <a:r>
-              <a:rPr sz="1000" b="0">
-                <a:solidFill>
-                  <a:srgbClr val="585868"/>
-                </a:solidFill>
-                <a:latin typeface="Helvetica Neue"/>
-              </a:rPr>
-              <a:t>Banking Campaigns Comparator · ING DACI / Customer AI · September 2026</a:t>
-            </a:r>
-          </a:p>
-        </p:txBody>
-      </p:sp>
-      <p:sp>
-        <p:nvSpPr>
-          <p:cNvPr id="6" name="TextBox 5"/>
-          <p:cNvSpPr txBox="1"/>
-          <p:nvPr/>
-        </p:nvSpPr>
-        <p:spPr>
-          <a:xfrm>
-            <a:off x="11094415" y="6400800"/>
-            <a:ext cx="548640" cy="274320"/>
-          </a:xfrm>
-          <a:prstGeom prst="rect">
-            <a:avLst/>
-          </a:prstGeom>
-          <a:noFill/>
-        </p:spPr>
-        <p:txBody>
-          <a:bodyPr wrap="square">
-            <a:spAutoFit/>
-          </a:bodyPr>
-          <a:lstStyle/>
-          <a:p>
-            <a:pPr algn="r">
-              <a:lnSpc>
-                <a:spcPct val="105000"/>
-              </a:lnSpc>
-              <a:spcAft>
-                <a:spcPts val="600"/>
-              </a:spcAft>
-            </a:pPr>
-            <a:r>
-              <a:rPr sz="1000" b="0">
-                <a:solidFill>
-                  <a:srgbClr val="585868"/>
-                </a:solidFill>
-                <a:latin typeface="Helvetica Neue"/>
-              </a:rPr>
-              <a:t>41</a:t>
             </a:r>
           </a:p>
         </p:txBody>
@@ -22730,7 +21955,7 @@
         </p:nvSpPr>
         <p:spPr>
           <a:xfrm>
-            <a:off x="548640" y="1371600"/>
+            <a:off x="548640" y="1115568"/>
             <a:ext cx="1463040" cy="64008"/>
           </a:xfrm>
           <a:prstGeom prst="rect">
@@ -23241,6 +22466,25 @@
                 <a:spcPct val="105000"/>
               </a:lnSpc>
               <a:spcAft>
+                <a:spcPts val="1000"/>
+              </a:spcAft>
+            </a:pPr>
+            <a:r>
+              <a:rPr sz="1300" b="0" dirty="0">
+                <a:solidFill>
+                  <a:srgbClr val="FF0000"/>
+                </a:solidFill>
+                <a:latin typeface="Helvetica Neue"/>
+              </a:rPr>
+              <a:t>     Not yet verified against specific ING pages — confirm before presenting as a claim, not context.</a:t>
+            </a:r>
+          </a:p>
+          <a:p>
+            <a:pPr algn="l">
+              <a:lnSpc>
+                <a:spcPct val="105000"/>
+              </a:lnSpc>
+              <a:spcAft>
                 <a:spcPts val="200"/>
               </a:spcAft>
             </a:pPr>
@@ -23696,7 +22940,16 @@
                 </a:solidFill>
                 <a:latin typeface="Helvetica Neue"/>
               </a:rPr>
-              <a:t>•  Where ING is below</a:t>
+              <a:t>•  </a:t>
+            </a:r>
+            <a:r>
+              <a:rPr sz="1500" b="1" dirty="0">
+                <a:solidFill>
+                  <a:srgbClr val="FF0000"/>
+                </a:solidFill>
+                <a:latin typeface="Helvetica Neue"/>
+              </a:rPr>
+              <a:t>Where ING is below</a:t>
             </a:r>
           </a:p>
           <a:p>
@@ -23711,11 +22964,11 @@
             <a:r>
               <a:rPr sz="1300" b="0" dirty="0">
                 <a:solidFill>
-                  <a:srgbClr val="585868"/>
-                </a:solidFill>
-                <a:latin typeface="Helvetica Neue"/>
-              </a:rPr>
-              <a:t>     Animation: 0.33 vs peers 0.62 (-0.58 SD) — the one measured place ING sits below the set. Calls to action are measured but not ranked here: no counting rule we tried reproduces a human count across all fourteen banks, so the figure is named rather than published.</a:t>
+                  <a:srgbClr val="FF0000"/>
+                </a:solidFill>
+                <a:latin typeface="Helvetica Neue"/>
+              </a:rPr>
+              <a:t>     Animation: 0.33 vs peers 0.62 (-0.58 SD) — the one measured place ING sits below the set. Calls to action are NOT reportable on this capture and are withheld rather than reported: ING’s pack cards (Open ING Go / More / Extra) load client-side and are absent from the captured HTML, so any count measures our capture, not the page.</a:t>
             </a:r>
           </a:p>
           <a:p>

--- a/docs/Banking_Campaigns_Comparator.pptx
+++ b/docs/Banking_Campaigns_Comparator.pptx
@@ -5,51 +5,51 @@
     <p:sldMasterId id="2147483648" r:id="rId1"/>
   </p:sldMasterIdLst>
   <p:notesMasterIdLst>
-    <p:notesMasterId r:id="rId43"/>
+    <p:notesMasterId r:id="rId44"/>
   </p:notesMasterIdLst>
   <p:sldIdLst>
-    <p:sldId id="256" r:id="rId4001"/>
-    <p:sldId id="257" r:id="rId4002"/>
-    <p:sldId id="258" r:id="rId4003"/>
-    <p:sldId id="259" r:id="rId4004"/>
-    <p:sldId id="260" r:id="rId4005"/>
-    <p:sldId id="261" r:id="rId4006"/>
-    <p:sldId id="262" r:id="rId4007"/>
-    <p:sldId id="263" r:id="rId4008"/>
-    <p:sldId id="264" r:id="rId4009"/>
-    <p:sldId id="265" r:id="rId4010"/>
-    <p:sldId id="266" r:id="rId4011"/>
-    <p:sldId id="267" r:id="rId4012"/>
-    <p:sldId id="268" r:id="rId4013"/>
-    <p:sldId id="269" r:id="rId4014"/>
-    <p:sldId id="270" r:id="rId4015"/>
-    <p:sldId id="271" r:id="rId4016"/>
-    <p:sldId id="272" r:id="rId4017"/>
-    <p:sldId id="273" r:id="rId4018"/>
-    <p:sldId id="274" r:id="rId4019"/>
-    <p:sldId id="275" r:id="rId4020"/>
-    <p:sldId id="276" r:id="rId4021"/>
-    <p:sldId id="277" r:id="rId4022"/>
-    <p:sldId id="278" r:id="rId4023"/>
-    <p:sldId id="279" r:id="rId4024"/>
-    <p:sldId id="280" r:id="rId4025"/>
-    <p:sldId id="281" r:id="rId4026"/>
-    <p:sldId id="282" r:id="rId4027"/>
-    <p:sldId id="283" r:id="rId4028"/>
-    <p:sldId id="284" r:id="rId4029"/>
-    <p:sldId id="285" r:id="rId4030"/>
-    <p:sldId id="286" r:id="rId4031"/>
-    <p:sldId id="287" r:id="rId4032"/>
-    <p:sldId id="288" r:id="rId4033"/>
-    <p:sldId id="289" r:id="rId4034"/>
-    <p:sldId id="290" r:id="rId4035"/>
-    <p:sldId id="291" r:id="rId4036"/>
-    <p:sldId id="292" r:id="rId4037"/>
-    <p:sldId id="293" r:id="rId4038"/>
-    <p:sldId id="294" r:id="rId4039"/>
-    <p:sldId id="295" r:id="rId4040"/>
-    <p:sldId id="296" r:id="rId4041"/>
-    <p:sldId id="297" r:id="rId4042"/>
+    <p:sldId id="256" r:id="rId2"/>
+    <p:sldId id="257" r:id="rId3"/>
+    <p:sldId id="258" r:id="rId4"/>
+    <p:sldId id="259" r:id="rId5"/>
+    <p:sldId id="260" r:id="rId6"/>
+    <p:sldId id="261" r:id="rId7"/>
+    <p:sldId id="262" r:id="rId8"/>
+    <p:sldId id="263" r:id="rId9"/>
+    <p:sldId id="264" r:id="rId10"/>
+    <p:sldId id="265" r:id="rId11"/>
+    <p:sldId id="266" r:id="rId12"/>
+    <p:sldId id="267" r:id="rId13"/>
+    <p:sldId id="268" r:id="rId14"/>
+    <p:sldId id="269" r:id="rId15"/>
+    <p:sldId id="270" r:id="rId16"/>
+    <p:sldId id="271" r:id="rId17"/>
+    <p:sldId id="272" r:id="rId18"/>
+    <p:sldId id="273" r:id="rId19"/>
+    <p:sldId id="274" r:id="rId20"/>
+    <p:sldId id="275" r:id="rId21"/>
+    <p:sldId id="276" r:id="rId22"/>
+    <p:sldId id="277" r:id="rId23"/>
+    <p:sldId id="278" r:id="rId24"/>
+    <p:sldId id="279" r:id="rId25"/>
+    <p:sldId id="280" r:id="rId26"/>
+    <p:sldId id="281" r:id="rId27"/>
+    <p:sldId id="282" r:id="rId28"/>
+    <p:sldId id="283" r:id="rId29"/>
+    <p:sldId id="284" r:id="rId30"/>
+    <p:sldId id="285" r:id="rId31"/>
+    <p:sldId id="286" r:id="rId32"/>
+    <p:sldId id="287" r:id="rId33"/>
+    <p:sldId id="288" r:id="rId34"/>
+    <p:sldId id="289" r:id="rId35"/>
+    <p:sldId id="290" r:id="rId36"/>
+    <p:sldId id="291" r:id="rId37"/>
+    <p:sldId id="292" r:id="rId38"/>
+    <p:sldId id="293" r:id="rId39"/>
+    <p:sldId id="294" r:id="rId40"/>
+    <p:sldId id="295" r:id="rId41"/>
+    <p:sldId id="296" r:id="rId42"/>
+    <p:sldId id="297" r:id="rId43"/>
   </p:sldIdLst>
   <p:sldSz cx="12192000" cy="6858000"/>
   <p:notesSz cx="6858000" cy="9144000"/>
@@ -627,42 +627,42 @@
           <a:lstStyle/>
           <a:p>
             <a:r>
-              <a:t>BRIDGE from slides 9–11: incumbents hold 97.6% of brand search, challengers 2.3%. This slide is the caveat before anyone reads that as market share.</a:t>
-            </a:r>
-          </a:p>
-          <a:p>
-            <a:r>
-              <a:t>THE CONTRAST: Revolut reports more than 1 million private customers in Belgium, adding about 25,000 a month (Belga News Agency, 11 Mar 2026) — yet holds 1.64% of brand search, 9th of 14. Both are true; they measure different things.</a:t>
-            </a:r>
-          </a:p>
-          <a:p>
-            <a:r>
-              <a:t>THREE REASONS search undercounts a challenger — none of them is "Revolut is small":</a:t>
-            </a:r>
-          </a:p>
-          <a:p>
-            <a:r>
-              <a:t>1. Navigational searches. Incumbents are searched for logins, branches, opening hours. Say it as a working hypothesis — not verified at query level.</a:t>
-            </a:r>
-          </a:p>
-          <a:p>
-            <a:r>
-              <a:t>2. App-first journeys. Sign-up through app stores and referral links, then daily use inside the app; the brand name is never typed.</a:t>
-            </a:r>
-          </a:p>
-          <a:p>
-            <a:r>
-              <a:t>3. Measurement floor. Six of the 14 brands never clear 10/100 in their own Trends request, so their share is partly rounding. Revolut itself is above the floor (peak 19), so its 1.64% is a real reading.</a:t>
-            </a:r>
-          </a:p>
-          <a:p>
-            <a:r>
-              <a:t>LAND: challenger shares are a floor on attention, not a customer count. The 1M figure is deliberately never set against a market-share figure.</a:t>
-            </a:r>
-          </a:p>
-          <a:p>
-            <a:r>
-              <a:t>TRANSITION: search tells us who gets attention, not who wins. From here on we stop measuring and start advising.</a:t>
+              <a:t>WALK THE CARD (R1, top): title and priority · WHAT THE DATA SHOWS — the finding with its numbers: 4.0 urgency markers per page vs a peer mean of 0.64, about 3.7 SD · WHAT TO DO — the action · chips: the feature it was argued from (urgency_marker_count) and the pages it applies to.</a:t>
+            </a:r>
+          </a:p>
+          <a:p>
+            <a:r>
+              <a:t>THREE GUARDRAILS (right column):</a:t>
+            </a:r>
+          </a:p>
+          <a:p>
+            <a:r>
+              <a:t>1. Finding and action kept apart. Anyone can reject the action and keep the finding — nobody has to buy the advice to accept the measurement.</a:t>
+            </a:r>
+          </a:p>
+          <a:p>
+            <a:r>
+              <a:t>2. Named features, checked before release. Every feature id on a card is verified against the report; an id the model invented is dropped before the list is shown.</a:t>
+            </a:r>
+          </a:p>
+          <a:p>
+            <a:r>
+              <a:t>3. No figure the analysis did not produce. The prompt receives only numbers already in the report; the output is not trusted to add any.</a:t>
+            </a:r>
+          </a:p>
+          <a:p>
+            <a:r>
+              <a:t>ONE LINE: the model is a writer, not a source.</a:t>
+            </a:r>
+          </a:p>
+          <a:p>
+            <a:r>
+              <a:t>IF ASKED about R2 in the screenshot ("Repeat the primary call to action"): it rests on cta_count, withdrawn on 23/09 — ING's pack cards render client-side and never reached the captured HTML, so the count measured our capture, not the page. A recommendation dying with its feature is the mechanism working. The screenshot predates the withdrawal.</a:t>
+            </a:r>
+          </a:p>
+          <a:p>
+            <a:r>
+              <a:t>TRANSITION: so what did it conclude about ING?</a:t>
             </a:r>
           </a:p>
         </p:txBody>
@@ -732,37 +732,42 @@
           <a:lstStyle/>
           <a:p>
             <a:r>
-              <a:t>FRAMING, say first: everything up to here measured. This is the one place in the project where a model is allowed to interpret; the next four slides are about how that is kept honest.</a:t>
-            </a:r>
-          </a:p>
-          <a:p>
-            <a:r>
-              <a:t>WHAT IT IS: one model call (DeepSeek, pinned version) over the finished analysis. It reads report.json — the same file the charts are drawn from. Nothing is re-scraped, nothing is re-scored.</a:t>
-            </a:r>
-          </a:p>
-          <a:p>
-            <a:r>
-              <a:t>WHAT COMES OUT: an ordered list of changes. Current run: ten — two high, six medium, two low. The order is the argument: what the measurement most supports acting on first. Ordered by priority, not by the model's confidence.</a:t>
-            </a:r>
-          </a:p>
-          <a:p>
-            <a:r>
-              <a:t>TWO CONTEXTS (checkboxes in the screenshot), both opt-in, both labelled on every card they touch: search interest for timing, news themes for reputation — three of the ten. Context can never stand as evidence that a page performed.</a:t>
-            </a:r>
-          </a:p>
-          <a:p>
-            <a:r>
-              <a:t>ORANGE BOX: it writes what to change; it never re-derives a number. One-way by design — if a figure is wrong the fix is upstream, and the next run carries it through.</a:t>
-            </a:r>
-          </a:p>
-          <a:p>
-            <a:r>
-              <a:t>NOTE: the panel screenshot and the counts printed on this slide predate the cta_count withdrawal of 23/09 (11 → 10). Say ten.</a:t>
-            </a:r>
-          </a:p>
-          <a:p>
-            <a:r>
-              <a:t>TRANSITION: here is what one of them looks like.</a:t>
+              <a:t>THREE NUMBERS, all from the current-account comparison — 14 banks, 36 comparable features:</a:t>
+            </a:r>
+          </a:p>
+          <a:p>
+            <a:r>
+              <a:t>1. 4.0 urgency and deadline markers per page vs a peer mean of 0.64 — about 3.7 SD above, the largest gap in the set and ING's strongest measured signature.</a:t>
+            </a:r>
+          </a:p>
+          <a:p>
+            <a:r>
+              <a:t>2. Page height 11,149 px vs 6,412 — about 74% longer, so the offer sits further from the top (about 1.4 SD).</a:t>
+            </a:r>
+          </a:p>
+          <a:p>
+            <a:r>
+              <a:t>3. 0.67 'free' claims with their conditions elsewhere vs 0.23 — where a free or no-fee claim appears, the qualifying conditions are not next to it.</a:t>
+            </a:r>
+          </a:p>
+          <a:p>
+            <a:r>
+              <a:t>THE THREE IT RANKED HIGHEST: strip back urgency and deadline language · bring the offer higher up the page (the current run words it "shorten the pages and cut non-informative imagery" — same measure, page_height_px) · disclose the conditions of any free claim next to the claim.</a:t>
+            </a:r>
+          </a:p>
+          <a:p>
+            <a:r>
+              <a:t>THE SHAPE: two of the three are about removing things. ING's pages carry the densest persuasion in the set (3.7 levers per page vs 1.7). The advice is restraint, not more features.</a:t>
+            </a:r>
+          </a:p>
+          <a:p>
+            <a:r>
+              <a:t>CAVEAT — read it, do not skip it: design observations, not performance findings. Pages span product families and languages, judged features come from one rater, no click or conversion data — every item is a hypothesis ING could test.</a:t>
+            </a:r>
+          </a:p>
+          <a:p>
+            <a:r>
+              <a:t>TRANSITION: a list is easy to nod at and forget. So we built the thing.</a:t>
             </a:r>
           </a:p>
         </p:txBody>
@@ -832,42 +837,42 @@
           <a:lstStyle/>
           <a:p>
             <a:r>
-              <a:t>WALK THE CARD (R1, top): title and priority · WHAT THE DATA SHOWS — the finding with its numbers: 4.0 urgency markers per page vs a peer mean of 0.64, about 3.7 SD · WHAT TO DO — the action · chips: the feature it was argued from (urgency_marker_count) and the pages it applies to.</a:t>
-            </a:r>
-          </a:p>
-          <a:p>
-            <a:r>
-              <a:t>THREE GUARDRAILS (right column):</a:t>
-            </a:r>
-          </a:p>
-          <a:p>
-            <a:r>
-              <a:t>1. Finding and action kept apart. Anyone can reject the action and keep the finding — nobody has to buy the advice to accept the measurement.</a:t>
-            </a:r>
-          </a:p>
-          <a:p>
-            <a:r>
-              <a:t>2. Named features, checked before release. Every feature id on a card is verified against the report; an id the model invented is dropped before the list is shown.</a:t>
-            </a:r>
-          </a:p>
-          <a:p>
-            <a:r>
-              <a:t>3. No figure the analysis did not produce. The prompt receives only numbers already in the report; the output is not trusted to add any.</a:t>
-            </a:r>
-          </a:p>
-          <a:p>
-            <a:r>
-              <a:t>ONE LINE: the model is a writer, not a source.</a:t>
-            </a:r>
-          </a:p>
-          <a:p>
-            <a:r>
-              <a:t>IF ASKED about R2 in the screenshot ("Repeat the primary call to action"): it rests on cta_count, withdrawn on 23/09 — ING's pack cards render client-side and never reached the captured HTML, so the count measured our capture, not the page. A recommendation dying with its feature is the mechanism working. The screenshot predates the withdrawal.</a:t>
-            </a:r>
-          </a:p>
-          <a:p>
-            <a:r>
-              <a:t>TRANSITION: so what did it conclude about ING?</a:t>
+              <a:t>ON SCREEN: top — the generated home page in ING styling (hero, two calls to action). Bottom — one section in explained mode: orange frame, and the (i) button that opens the rationale for that section.</a:t>
+            </a:r>
+          </a:p>
+          <a:p>
+            <a:r>
+              <a:t>THREE POINTS:</a:t>
+            </a:r>
+          </a:p>
+          <a:p>
+            <a:r>
+              <a:t>1. The team chooses what gets built. Every recommendation is a checkbox; nothing reaches the generator that a person did not tick.</a:t>
+            </a:r>
+          </a:p>
+          <a:p>
+            <a:r>
+              <a:t>2. Ten ING-styled pages, fr-BE or nl-BE: home, savings, term account, current account, youth, investing, mortgage, opening, why ING, contact.</a:t>
+            </a:r>
+          </a:p>
+          <a:p>
+            <a:r>
+              <a:t>3. Each section can name its own source. Explained mode shows which recommendation produced the section and why — auditable, not just persuasive.</a:t>
+            </a:r>
+          </a:p>
+          <a:p>
+            <a:r>
+              <a:t>SAY PLAINLY: an illustration — generated, never published, not a proposal for ING's site. Rates and amounts stay as [TAUX] and [MONTANT]: no figure appears that a compliance team has not supplied.</a:t>
+            </a:r>
+          </a:p>
+          <a:p>
+            <a:r>
+              <a:t>ORANGE LINE: this is what makes the analysis arguable — a stakeholder can look at the change instead of reading about it. Invite it: "which of these would you untick?"</a:t>
+            </a:r>
+          </a:p>
+          <a:p>
+            <a:r>
+              <a:t>TRANSITION: put together, the whole thing runs in one direction.</a:t>
             </a:r>
           </a:p>
         </p:txBody>
@@ -937,42 +942,32 @@
           <a:lstStyle/>
           <a:p>
             <a:r>
-              <a:t>THREE NUMBERS, all from the current-account comparison — 14 banks, 36 comparable features:</a:t>
-            </a:r>
-          </a:p>
-          <a:p>
-            <a:r>
-              <a:t>1. 4.0 urgency and deadline markers per page vs a peer mean of 0.64 — about 3.7 SD above, the largest gap in the set and ING's strongest measured signature.</a:t>
-            </a:r>
-          </a:p>
-          <a:p>
-            <a:r>
-              <a:t>2. Page height 11,149 px vs 6,412 — about 74% longer, so the offer sits further from the top (about 1.4 SD).</a:t>
-            </a:r>
-          </a:p>
-          <a:p>
-            <a:r>
-              <a:t>3. 0.67 'free' claims with their conditions elsewhere vs 0.23 — where a free or no-fee claim appears, the qualifying conditions are not next to it.</a:t>
-            </a:r>
-          </a:p>
-          <a:p>
-            <a:r>
-              <a:t>THE THREE IT RANKED HIGHEST: strip back urgency and deadline language · bring the offer higher up the page (the current run words it "shorten the pages and cut non-informative imagery" — same measure, page_height_px) · disclose the conditions of any free claim next to the claim.</a:t>
-            </a:r>
-          </a:p>
-          <a:p>
-            <a:r>
-              <a:t>THE SHAPE: two of the three are about removing things. ING's pages carry the densest persuasion in the set (3.7 levers per page vs 1.7). The advice is restraint, not more features.</a:t>
-            </a:r>
-          </a:p>
-          <a:p>
-            <a:r>
-              <a:t>CAVEAT — read it, do not skip it: design observations, not performance findings. Pages span product families and languages, judged features come from one rater, no click or conversion data — every item is a hypothesis ING could test.</a:t>
-            </a:r>
-          </a:p>
-          <a:p>
-            <a:r>
-              <a:t>TRANSITION: a list is easy to nod at and forget. So we built the thing.</a:t>
+              <a:t>TOP ROW, stages 1–5 — the measurement half already walked: sources → capture (robots gate, pages rendered as a visitor sees them) → dataset with the human rubric scores → analysis → surfaces (report.json, the web UI). One arrow carries report.json down.</a:t>
+            </a:r>
+          </a:p>
+          <a:p>
+            <a:r>
+              <a:t>BOTTOM ROW, stages 6–8 — this section: recommendations (one model call, ordered list, each naming its features) → human selection (checkboxes; nothing proceeds unchosen) → generated site (ten pages, exactly the selected set, placeholders for every figure).</a:t>
+            </a:r>
+          </a:p>
+          <a:p>
+            <a:r>
+              <a:t>GREY BAND — read it as one sentence: the model sees only numbers the analysis produced; every recommendation names its features and is checked before it leaves the module; nothing is built that a human did not tick; news-theme items are context, never evidence; no performance data exists, so nothing here claims a cause.</a:t>
+            </a:r>
+          </a:p>
+          <a:p>
+            <a:r>
+              <a:t>WHY ONE DIRECTION MATTERS: every arrow is a script and can be re-run, so a correction made upstream flows all the way through. That is how the cta_count withdrawal propagated this week — once it was made in the analysis rather than patched into an output file.</a:t>
+            </a:r>
+          </a:p>
+          <a:p>
+            <a:r>
+              <a:t>NOTE: the diagram's "11 of 11 selected" and "11 ordered changes" predate the withdrawal — ten now.</a:t>
+            </a:r>
+          </a:p>
+          <a:p>
+            <a:r>
+              <a:t>TRANSITION to slide 18: that last guardrail — no performance data — is the limit of the whole project. Next slide.</a:t>
             </a:r>
           </a:p>
         </p:txBody>
@@ -1021,7 +1016,7 @@
             <a:spLocks noGrp="1" noRot="1" noChangeAspect="1"/>
           </p:cNvSpPr>
           <p:nvPr>
-            <p:ph type="sldImg" idx="2"/>
+            <p:ph type="sldImg"/>
           </p:nvPr>
         </p:nvSpPr>
         <p:spPr/>
@@ -1033,7 +1028,7 @@
             <a:spLocks noGrp="1"/>
           </p:cNvSpPr>
           <p:nvPr>
-            <p:ph type="body" sz="quarter" idx="3"/>
+            <p:ph type="body" idx="1"/>
           </p:nvPr>
         </p:nvSpPr>
         <p:spPr/>
@@ -1042,57 +1037,17 @@
           <a:lstStyle/>
           <a:p>
             <a:r>
-              <a:t>ON SCREEN: top — the generated home page in ING styling (hero, two calls to action). Bottom — one section in explained mode: orange frame, and the (i) button that opens the rationale for that section.</a:t>
-            </a:r>
-          </a:p>
-          <a:p>
-            <a:r>
-              <a:t>THREE POINTS:</a:t>
-            </a:r>
-          </a:p>
-          <a:p>
-            <a:r>
-              <a:t>1. The team chooses what gets built. Every recommendation is a checkbox; nothing reaches the generator that a person did not tick.</a:t>
-            </a:r>
-          </a:p>
-          <a:p>
-            <a:r>
-              <a:t>2. Ten ING-styled pages, fr-BE or nl-BE: home, savings, term account, current account, youth, investing, mortgage, opening, why ING, contact.</a:t>
-            </a:r>
-          </a:p>
-          <a:p>
-            <a:r>
-              <a:t>3. Each section can name its own source. Explained mode shows which recommendation produced the section and why — auditable, not just persuasive.</a:t>
-            </a:r>
-          </a:p>
-          <a:p>
-            <a:r>
-              <a:t>SAY PLAINLY: an illustration — generated, never published, not a proposal for ING's site. Rates and amounts stay as [TAUX] and [MONTANT]: no figure appears that a compliance team has not supplied.</a:t>
-            </a:r>
-          </a:p>
-          <a:p>
-            <a:r>
-              <a:t>ORANGE LINE: this is what makes the analysis arguable — a stakeholder can look at the change instead of reading about it. Invite it: "which of these would you untick?"</a:t>
-            </a:r>
-          </a:p>
-          <a:p>
-            <a:r>
-              <a:t>TRANSITION: put together, the whole thing runs in one direction.</a:t>
-            </a:r>
-          </a:p>
-        </p:txBody>
-      </p:sp>
-      <p:sp>
-        <p:nvSpPr>
-          <p:cNvPr id="4" name="Slide Number Placeholder 3"/>
-          <p:cNvSpPr>
-            <a:spLocks noGrp="1"/>
-          </p:cNvSpPr>
-          <p:nvPr>
-            <p:ph type="sldNum" sz="quarter" idx="5"/>
-          </p:nvPr>
-        </p:nvSpPr>
-        <p:spPr/>
+              <a:rPr lang="en-US" dirty="0"/>
+              <a:t>Limitations - 30 s.</a:t>
+            </a:r>
+          </a:p>
+          <a:p>
+            <a:r>
+              <a:rPr lang="en-US" dirty="0"/>
+              <a:t>"Because we have no performance data, everything you've heard stays a hypothesis, not a verdict. That's the honest limit of this exercise, not a hedge."</a:t>
+            </a:r>
+          </a:p>
+        </p:txBody>
       </p:sp>
     </p:spTree>
   </p:cSld>
@@ -1126,7 +1081,7 @@
             <a:spLocks noGrp="1" noRot="1" noChangeAspect="1"/>
           </p:cNvSpPr>
           <p:nvPr>
-            <p:ph type="sldImg" idx="2"/>
+            <p:ph type="sldImg"/>
           </p:nvPr>
         </p:nvSpPr>
         <p:spPr/>
@@ -1138,7 +1093,7 @@
             <a:spLocks noGrp="1"/>
           </p:cNvSpPr>
           <p:nvPr>
-            <p:ph type="body" sz="quarter" idx="3"/>
+            <p:ph type="body" idx="1"/>
           </p:nvPr>
         </p:nvSpPr>
         <p:spPr/>
@@ -1147,47 +1102,17 @@
           <a:lstStyle/>
           <a:p>
             <a:r>
-              <a:t>TOP ROW, stages 1–5 — the measurement half already walked: sources → capture (robots gate, pages rendered as a visitor sees them) → dataset with the human rubric scores → analysis → surfaces (report.json, the web UI). One arrow carries report.json down.</a:t>
-            </a:r>
-          </a:p>
-          <a:p>
-            <a:r>
-              <a:t>BOTTOM ROW, stages 6–8 — this section: recommendations (one model call, ordered list, each naming its features) → human selection (checkboxes; nothing proceeds unchosen) → generated site (ten pages, exactly the selected set, placeholders for every figure).</a:t>
-            </a:r>
-          </a:p>
-          <a:p>
-            <a:r>
-              <a:t>GREY BAND — read it as one sentence: the model sees only numbers the analysis produced; every recommendation names its features and is checked before it leaves the module; nothing is built that a human did not tick; news-theme items are context, never evidence; no performance data exists, so nothing here claims a cause.</a:t>
-            </a:r>
-          </a:p>
-          <a:p>
-            <a:r>
-              <a:t>WHY ONE DIRECTION MATTERS: every arrow is a script and can be re-run, so a correction made upstream flows all the way through. That is how the cta_count withdrawal propagated this week — once it was made in the analysis rather than patched into an output file.</a:t>
-            </a:r>
-          </a:p>
-          <a:p>
-            <a:r>
-              <a:t>NOTE: the diagram's "11 of 11 selected" and "11 ordered changes" predate the withdrawal — ten now.</a:t>
-            </a:r>
-          </a:p>
-          <a:p>
-            <a:r>
-              <a:t>TRANSITION to slide 18: that last guardrail — no performance data — is the limit of the whole project. Next slide.</a:t>
-            </a:r>
-          </a:p>
-        </p:txBody>
-      </p:sp>
-      <p:sp>
-        <p:nvSpPr>
-          <p:cNvPr id="4" name="Slide Number Placeholder 3"/>
-          <p:cNvSpPr>
-            <a:spLocks noGrp="1"/>
-          </p:cNvSpPr>
-          <p:nvPr>
-            <p:ph type="sldNum" sz="quarter" idx="5"/>
-          </p:nvPr>
-        </p:nvSpPr>
-        <p:spPr/>
+              <a:rPr lang="en-US" dirty="0"/>
+              <a:t>Cloture - 45 s.</a:t>
+            </a:r>
+          </a:p>
+          <a:p>
+            <a:r>
+              <a:rPr lang="en-US" dirty="0"/>
+              <a:t>"What we built over two weeks isn't a set of creative opinions, it's a repeatable measurement engine. It gives ING a clear, data-backed view of where its pages stand against 13 competitors - the strongest urgency and persuasion density in the market, a clear lead in value-proposition clarity, visible strength in cross-sell and free simulators. And because we have no conversion data, we don't claim absolute verdicts - every finding is transparent, testable, ready for ING to validate. Measure one way. Label the trust. Claim only what the data supports."</a:t>
+            </a:r>
+          </a:p>
+        </p:txBody>
       </p:sp>
     </p:spTree>
   </p:cSld>
@@ -1610,7 +1535,7 @@
           <a:p>
             <a:r>
               <a:rPr lang="en-US" dirty="0"/>
-              <a:t>ING sits clearly with the traditional banks - positioning score 0.28, nearest neighbour Belfius.</a:t>
+              <a:t>ING sits clearly with the traditional banks - positioning score 0.39, nearest neighbour Belfius.</a:t>
             </a:r>
           </a:p>
           <a:p>
@@ -1683,7 +1608,7 @@
             <a:spLocks noGrp="1" noRot="1" noChangeAspect="1"/>
           </p:cNvSpPr>
           <p:nvPr>
-            <p:ph type="sldImg"/>
+            <p:ph type="sldImg" idx="2"/>
           </p:nvPr>
         </p:nvSpPr>
         <p:spPr/>
@@ -1695,7 +1620,7 @@
             <a:spLocks noGrp="1"/>
           </p:cNvSpPr>
           <p:nvPr>
-            <p:ph type="body" idx="1"/>
+            <p:ph type="body" sz="quarter" idx="3"/>
           </p:nvPr>
         </p:nvSpPr>
         <p:spPr/>
@@ -1704,17 +1629,57 @@
           <a:lstStyle/>
           <a:p>
             <a:r>
-              <a:rPr lang="en-US" dirty="0"/>
-              <a:t>Limitations - 30 s.</a:t>
-            </a:r>
-          </a:p>
-          <a:p>
-            <a:r>
-              <a:rPr lang="en-US" dirty="0"/>
-              <a:t>"Because we have no performance data, everything you've heard stays a hypothesis, not a verdict. That's the honest limit of this exercise, not a hedge."</a:t>
-            </a:r>
-          </a:p>
-        </p:txBody>
+              <a:t>BRIDGE from slides 9–11: incumbents hold 97.6% of brand search, challengers 2.3%. This slide is the caveat before anyone reads that as market share.</a:t>
+            </a:r>
+          </a:p>
+          <a:p>
+            <a:r>
+              <a:t>THE CONTRAST: Revolut reports more than 1 million private customers in Belgium, adding about 25,000 a month (Belga News Agency, 11 Mar 2026) — yet holds 1.64% of brand search, 9th of 14. Both are true; they measure different things.</a:t>
+            </a:r>
+          </a:p>
+          <a:p>
+            <a:r>
+              <a:t>THREE REASONS search undercounts a challenger — none of them is "Revolut is small":</a:t>
+            </a:r>
+          </a:p>
+          <a:p>
+            <a:r>
+              <a:t>1. Navigational searches. Incumbents are searched for logins, branches, opening hours. Say it as a working hypothesis — not verified at query level.</a:t>
+            </a:r>
+          </a:p>
+          <a:p>
+            <a:r>
+              <a:t>2. App-first journeys. Sign-up through app stores and referral links, then daily use inside the app; the brand name is never typed.</a:t>
+            </a:r>
+          </a:p>
+          <a:p>
+            <a:r>
+              <a:t>3. Measurement floor. Six of the 14 brands never clear 10/100 in their own Trends request, so their share is partly rounding. Revolut itself is above the floor (peak 19), so its 1.64% is a real reading.</a:t>
+            </a:r>
+          </a:p>
+          <a:p>
+            <a:r>
+              <a:t>LAND: challenger shares are a floor on attention, not a customer count. The 1M figure is deliberately never set against a market-share figure.</a:t>
+            </a:r>
+          </a:p>
+          <a:p>
+            <a:r>
+              <a:t>TRANSITION: search tells us who gets attention, not who wins. From here on we stop measuring and start advising.</a:t>
+            </a:r>
+          </a:p>
+        </p:txBody>
+      </p:sp>
+      <p:sp>
+        <p:nvSpPr>
+          <p:cNvPr id="4" name="Slide Number Placeholder 3"/>
+          <p:cNvSpPr>
+            <a:spLocks noGrp="1"/>
+          </p:cNvSpPr>
+          <p:nvPr>
+            <p:ph type="sldNum" sz="quarter" idx="5"/>
+          </p:nvPr>
+        </p:nvSpPr>
+        <p:spPr/>
       </p:sp>
     </p:spTree>
   </p:cSld>
@@ -1748,7 +1713,7 @@
             <a:spLocks noGrp="1" noRot="1" noChangeAspect="1"/>
           </p:cNvSpPr>
           <p:nvPr>
-            <p:ph type="sldImg"/>
+            <p:ph type="sldImg" idx="2"/>
           </p:nvPr>
         </p:nvSpPr>
         <p:spPr/>
@@ -1760,7 +1725,7 @@
             <a:spLocks noGrp="1"/>
           </p:cNvSpPr>
           <p:nvPr>
-            <p:ph type="body" idx="1"/>
+            <p:ph type="body" sz="quarter" idx="3"/>
           </p:nvPr>
         </p:nvSpPr>
         <p:spPr/>
@@ -1769,17 +1734,52 @@
           <a:lstStyle/>
           <a:p>
             <a:r>
-              <a:rPr lang="en-US" dirty="0"/>
-              <a:t>Cloture - 45 s.</a:t>
-            </a:r>
-          </a:p>
-          <a:p>
-            <a:r>
-              <a:rPr lang="en-US" dirty="0"/>
-              <a:t>"What we built over two weeks isn't a set of creative opinions, it's a repeatable measurement engine. It gives ING a clear, data-backed view of where its pages stand against 13 competitors - the strongest urgency and persuasion density in the market, a clear lead in value-proposition clarity, visible strength in cross-sell and free simulators. And because we have no conversion data, we don't claim absolute verdicts - every finding is transparent, testable, ready for ING to validate. Measure one way. Label the trust. Claim only what the data supports."</a:t>
-            </a:r>
-          </a:p>
-        </p:txBody>
+              <a:t>FRAMING, say first: everything up to here measured. This is the one place in the project where a model is allowed to interpret; the next four slides are about how that is kept honest.</a:t>
+            </a:r>
+          </a:p>
+          <a:p>
+            <a:r>
+              <a:t>WHAT IT IS: one model call (DeepSeek, pinned version) over the finished analysis. It reads report.json — the same file the charts are drawn from. Nothing is re-scraped, nothing is re-scored.</a:t>
+            </a:r>
+          </a:p>
+          <a:p>
+            <a:r>
+              <a:t>WHAT COMES OUT: an ordered list of changes. Current run: ten — two high, six medium, two low. The order is the argument: what the measurement most supports acting on first. Ordered by priority, not by the model's confidence.</a:t>
+            </a:r>
+          </a:p>
+          <a:p>
+            <a:r>
+              <a:t>TWO CONTEXTS (checkboxes in the screenshot), both opt-in, both labelled on every card they touch: search interest for timing, news themes for reputation — three of the ten. Context can never stand as evidence that a page performed.</a:t>
+            </a:r>
+          </a:p>
+          <a:p>
+            <a:r>
+              <a:t>ORANGE BOX: it writes what to change; it never re-derives a number. One-way by design — if a figure is wrong the fix is upstream, and the next run carries it through.</a:t>
+            </a:r>
+          </a:p>
+          <a:p>
+            <a:r>
+              <a:t>NOTE: the panel screenshot and the counts printed on this slide predate the cta_count withdrawal of 23/09 (11 → 10). Say ten.</a:t>
+            </a:r>
+          </a:p>
+          <a:p>
+            <a:r>
+              <a:t>TRANSITION: here is what one of them looks like.</a:t>
+            </a:r>
+          </a:p>
+        </p:txBody>
+      </p:sp>
+      <p:sp>
+        <p:nvSpPr>
+          <p:cNvPr id="4" name="Slide Number Placeholder 3"/>
+          <p:cNvSpPr>
+            <a:spLocks noGrp="1"/>
+          </p:cNvSpPr>
+          <p:nvPr>
+            <p:ph type="sldNum" sz="quarter" idx="5"/>
+          </p:nvPr>
+        </p:nvSpPr>
+        <p:spPr/>
       </p:sp>
     </p:spTree>
   </p:cSld>
@@ -4989,7 +4989,7 @@
         <p:spPr>
           <a:xfrm>
             <a:off x="822960" y="4114800"/>
-            <a:ext cx="10058400" cy="1280160"/>
+            <a:ext cx="10058400" cy="810543"/>
           </a:xfrm>
           <a:prstGeom prst="rect">
             <a:avLst/>
@@ -5030,13 +5030,67 @@
               </a:spcAft>
             </a:pPr>
             <a:r>
+              <a:rPr lang="fr-FR" sz="1300" b="0" dirty="0">
+                <a:solidFill>
+                  <a:srgbClr val="A8A8B8"/>
+                </a:solidFill>
+                <a:latin typeface="Helvetica Neue"/>
+              </a:rPr>
+              <a:t>Camus </a:t>
+            </a:r>
+            <a:r>
               <a:rPr sz="1300" b="0" dirty="0">
                 <a:solidFill>
                   <a:srgbClr val="A8A8B8"/>
                 </a:solidFill>
                 <a:latin typeface="Helvetica Neue"/>
               </a:rPr>
-              <a:t>Siegried (marketing framework) · Dan (collection, extraction) · Stephane (analysis, </a:t>
+              <a:t>Siegried (marketing framework) · </a:t>
+            </a:r>
+            <a:r>
+              <a:rPr lang="fr-FR" sz="1300" b="0" dirty="0" err="1">
+                <a:solidFill>
+                  <a:srgbClr val="A8A8B8"/>
+                </a:solidFill>
+                <a:latin typeface="Helvetica Neue"/>
+              </a:rPr>
+              <a:t>Ukendi</a:t>
+            </a:r>
+            <a:r>
+              <a:rPr lang="fr-FR" sz="1300" b="0" dirty="0">
+                <a:solidFill>
+                  <a:srgbClr val="A8A8B8"/>
+                </a:solidFill>
+                <a:latin typeface="Helvetica Neue"/>
+              </a:rPr>
+              <a:t> </a:t>
+            </a:r>
+            <a:r>
+              <a:rPr sz="1300" b="0" dirty="0">
+                <a:solidFill>
+                  <a:srgbClr val="A8A8B8"/>
+                </a:solidFill>
+                <a:latin typeface="Helvetica Neue"/>
+              </a:rPr>
+              <a:t>Dan (collection, extraction) · </a:t>
+            </a:r>
+            <a:r>
+              <a:rPr lang="fr-FR" sz="1300" b="0" dirty="0">
+                <a:solidFill>
+                  <a:srgbClr val="A8A8B8"/>
+                </a:solidFill>
+                <a:latin typeface="Helvetica Neue"/>
+              </a:rPr>
+              <a:t>Van der Aa </a:t>
+            </a:r>
+            <a:r>
+              <a:rPr sz="1300" b="0" dirty="0">
+                <a:solidFill>
+                  <a:srgbClr val="A8A8B8"/>
+                </a:solidFill>
+                <a:latin typeface="Helvetica Neue"/>
+              </a:rPr>
+              <a:t>Stephane (analysis, </a:t>
             </a:r>
             <a:r>
               <a:rPr sz="1300" b="0" dirty="0" err="1">
@@ -5075,6 +5129,12 @@
               </a:rPr>
               <a:t>14 – 25 September 2026 · 14 banks · 18 current-account pages of 52 collected · 104 features</a:t>
             </a:r>
+            <a:endParaRPr lang="fr-FR" sz="1300" b="0" dirty="0">
+              <a:solidFill>
+                <a:srgbClr val="A8A8B8"/>
+              </a:solidFill>
+              <a:latin typeface="Helvetica Neue"/>
+            </a:endParaRPr>
           </a:p>
         </p:txBody>
       </p:sp>
@@ -9350,7 +9410,7 @@
         </p:nvSpPr>
         <p:spPr>
           <a:xfrm>
-            <a:off x="6635172" y="2415501"/>
+            <a:off x="6528954" y="2415501"/>
             <a:ext cx="177800" cy="177800"/>
           </a:xfrm>
           <a:prstGeom prst="ellipse">
@@ -9379,7 +9439,7 @@
         </p:nvSpPr>
         <p:spPr>
           <a:xfrm>
-            <a:off x="3979718" y="2415501"/>
+            <a:off x="5201227" y="2415501"/>
             <a:ext cx="177800" cy="177800"/>
           </a:xfrm>
           <a:prstGeom prst="ellipse">
@@ -9437,7 +9497,7 @@
                 </a:solidFill>
                 <a:latin typeface="Helvetica Neue"/>
               </a:rPr>
-              <a:t>−0.69 vs </a:t>
+              <a:t>+0.23 vs </a:t>
             </a:r>
             <a:r>
               <a:rPr sz="1200" b="0">
@@ -9446,7 +9506,7 @@
                 </a:solidFill>
                 <a:latin typeface="Helvetica Neue"/>
               </a:rPr>
-              <a:t>+1.31</a:t>
+              <a:t>+1.23</a:t>
             </a:r>
           </a:p>
         </p:txBody>
@@ -10767,6 +10827,450 @@
 
 <file path=ppt/slides/slide13.xml><?xml version="1.0" encoding="utf-8"?>
 <p:sld xmlns:a="http://schemas.openxmlformats.org/drawingml/2006/main" xmlns:r="http://schemas.openxmlformats.org/officeDocument/2006/relationships" xmlns:p="http://schemas.openxmlformats.org/presentationml/2006/main">
+  <p:cSld>
+    <p:spTree>
+      <p:nvGrpSpPr>
+        <p:cNvPr id="1" name=""/>
+        <p:cNvGrpSpPr/>
+        <p:nvPr/>
+      </p:nvGrpSpPr>
+      <p:grpSpPr>
+        <a:xfrm>
+          <a:off x="0" y="0"/>
+          <a:ext cx="0" cy="0"/>
+          <a:chOff x="0" y="0"/>
+          <a:chExt cx="0" cy="0"/>
+        </a:xfrm>
+      </p:grpSpPr>
+      <p:sp>
+        <p:nvSpPr>
+          <p:cNvPr id="2" name="TextBox 1"/>
+          <p:cNvSpPr txBox="1"/>
+          <p:nvPr/>
+        </p:nvSpPr>
+        <p:spPr>
+          <a:xfrm>
+            <a:off x="548640" y="384048"/>
+            <a:ext cx="11064240" cy="731520"/>
+          </a:xfrm>
+          <a:prstGeom prst="rect">
+            <a:avLst/>
+          </a:prstGeom>
+          <a:noFill/>
+        </p:spPr>
+        <p:txBody>
+          <a:bodyPr wrap="square">
+            <a:spAutoFit/>
+          </a:bodyPr>
+          <a:lstStyle/>
+          <a:p>
+            <a:pPr algn="l">
+              <a:lnSpc>
+                <a:spcPct val="105000"/>
+              </a:lnSpc>
+              <a:spcAft>
+                <a:spcPts val="600"/>
+              </a:spcAft>
+            </a:pPr>
+            <a:r>
+              <a:rPr sz="2800" b="1">
+                <a:solidFill>
+                  <a:srgbClr val="14141C"/>
+                </a:solidFill>
+                <a:latin typeface="Helvetica Neue"/>
+              </a:rPr>
+              <a:t>Where each brand is searched from</a:t>
+            </a:r>
+          </a:p>
+        </p:txBody>
+      </p:sp>
+      <p:sp>
+        <p:nvSpPr>
+          <p:cNvPr id="3" name="Rectangle 2"/>
+          <p:cNvSpPr/>
+          <p:nvPr/>
+        </p:nvSpPr>
+        <p:spPr>
+          <a:xfrm>
+            <a:off x="548640" y="1115568"/>
+            <a:ext cx="1463040" cy="64008"/>
+          </a:xfrm>
+          <a:prstGeom prst="rect">
+            <a:avLst/>
+          </a:prstGeom>
+          <a:solidFill>
+            <a:srgbClr val="FF6200"/>
+          </a:solidFill>
+          <a:ln>
+            <a:noFill/>
+          </a:ln>
+          <a:effectLst/>
+        </p:spPr>
+        <p:style>
+          <a:lnRef idx="1">
+            <a:schemeClr val="accent1"/>
+          </a:lnRef>
+          <a:fillRef idx="3">
+            <a:schemeClr val="accent1"/>
+          </a:fillRef>
+          <a:effectRef idx="2">
+            <a:schemeClr val="accent1"/>
+          </a:effectRef>
+          <a:fontRef idx="minor">
+            <a:schemeClr val="lt1"/>
+          </a:fontRef>
+        </p:style>
+        <p:txBody>
+          <a:bodyPr rtlCol="0" anchor="ctr"/>
+          <a:lstStyle/>
+          <a:p>
+            <a:pPr algn="ctr"/>
+            <a:endParaRPr/>
+          </a:p>
+        </p:txBody>
+      </p:sp>
+      <p:sp>
+        <p:nvSpPr>
+          <p:cNvPr id="4" name="TextBox 3"/>
+          <p:cNvSpPr txBox="1"/>
+          <p:nvPr/>
+        </p:nvSpPr>
+        <p:spPr>
+          <a:xfrm>
+            <a:off x="685800" y="1463040"/>
+            <a:ext cx="10881360" cy="4754880"/>
+          </a:xfrm>
+          <a:prstGeom prst="rect">
+            <a:avLst/>
+          </a:prstGeom>
+          <a:noFill/>
+        </p:spPr>
+        <p:txBody>
+          <a:bodyPr wrap="square">
+            <a:spAutoFit/>
+          </a:bodyPr>
+          <a:lstStyle/>
+          <a:p>
+            <a:pPr algn="l">
+              <a:lnSpc>
+                <a:spcPct val="105000"/>
+              </a:lnSpc>
+              <a:spcAft>
+                <a:spcPts val="200"/>
+              </a:spcAft>
+            </a:pPr>
+            <a:r>
+              <a:rPr sz="1500" b="1">
+                <a:solidFill>
+                  <a:srgbClr val="14141C"/>
+                </a:solidFill>
+                <a:latin typeface="Helvetica Neue"/>
+              </a:rPr>
+              <a:t>•  Every challenger peaks in Brussels</a:t>
+            </a:r>
+          </a:p>
+          <a:p>
+            <a:pPr algn="l">
+              <a:lnSpc>
+                <a:spcPct val="105000"/>
+              </a:lnSpc>
+              <a:spcAft>
+                <a:spcPts val="1000"/>
+              </a:spcAft>
+            </a:pPr>
+            <a:r>
+              <a:rPr sz="1300" b="0">
+                <a:solidFill>
+                  <a:srgbClr val="585868"/>
+                </a:solidFill>
+                <a:latin typeface="Helvetica Neue"/>
+              </a:rPr>
+              <a:t>     Revolut, N26 and bunq all index 100 in Brussels and drop away outside it — N26 to 27 in Flanders, bunq to 29 in Wallonia. Three brands, three different products, one geography.</a:t>
+            </a:r>
+          </a:p>
+          <a:p>
+            <a:pPr algn="l">
+              <a:lnSpc>
+                <a:spcPct val="105000"/>
+              </a:lnSpc>
+              <a:spcAft>
+                <a:spcPts val="200"/>
+              </a:spcAft>
+            </a:pPr>
+            <a:r>
+              <a:rPr sz="1500" b="1">
+                <a:solidFill>
+                  <a:srgbClr val="14141C"/>
+                </a:solidFill>
+                <a:latin typeface="Helvetica Neue"/>
+              </a:rPr>
+              <a:t>•  Every incumbent is regional, and predictably so</a:t>
+            </a:r>
+          </a:p>
+          <a:p>
+            <a:pPr algn="l">
+              <a:lnSpc>
+                <a:spcPct val="105000"/>
+              </a:lnSpc>
+              <a:spcAft>
+                <a:spcPts val="1000"/>
+              </a:spcAft>
+            </a:pPr>
+            <a:r>
+              <a:rPr sz="1300" b="0">
+                <a:solidFill>
+                  <a:srgbClr val="585868"/>
+                </a:solidFill>
+                <a:latin typeface="Helvetica Neue"/>
+              </a:rPr>
+              <a:t>     KBC indexes 100 in Flanders and 11 in Wallonia; Argenta 100 and 27. Belfius, BNP Paribas Fortis and Crelan all peak in Wallonia. Five of six sit exactly where their history put them, which is the sanity check on this data rather than the finding.</a:t>
+            </a:r>
+          </a:p>
+          <a:p>
+            <a:pPr algn="l">
+              <a:lnSpc>
+                <a:spcPct val="105000"/>
+              </a:lnSpc>
+              <a:spcAft>
+                <a:spcPts val="200"/>
+              </a:spcAft>
+            </a:pPr>
+            <a:r>
+              <a:rPr sz="1500" b="1">
+                <a:solidFill>
+                  <a:srgbClr val="14141C"/>
+                </a:solidFill>
+                <a:latin typeface="Helvetica Neue"/>
+              </a:rPr>
+              <a:t>•  ING is the one incumbent that does not</a:t>
+            </a:r>
+          </a:p>
+          <a:p>
+            <a:pPr algn="l">
+              <a:lnSpc>
+                <a:spcPct val="105000"/>
+              </a:lnSpc>
+              <a:spcAft>
+                <a:spcPts val="1000"/>
+              </a:spcAft>
+            </a:pPr>
+            <a:r>
+              <a:rPr sz="1300" b="0">
+                <a:solidFill>
+                  <a:srgbClr val="585868"/>
+                </a:solidFill>
+                <a:latin typeface="Helvetica Neue"/>
+              </a:rPr>
+              <a:t>     Brussels 100, Wallonia 98, Flanders 73 — national, with no regional home. On this measure ING behaves like the challengers and unlike the banks it sits with everywhere else in this deck.</a:t>
+            </a:r>
+          </a:p>
+          <a:p>
+            <a:pPr algn="l">
+              <a:lnSpc>
+                <a:spcPct val="105000"/>
+              </a:lnSpc>
+              <a:spcAft>
+                <a:spcPts val="200"/>
+              </a:spcAft>
+            </a:pPr>
+            <a:r>
+              <a:rPr sz="1500" b="1">
+                <a:solidFill>
+                  <a:srgbClr val="14141C"/>
+                </a:solidFill>
+                <a:latin typeface="Helvetica Neue"/>
+              </a:rPr>
+              <a:t>•  A second signal pointing the same way, from a different source</a:t>
+            </a:r>
+          </a:p>
+          <a:p>
+            <a:pPr algn="l">
+              <a:lnSpc>
+                <a:spcPct val="105000"/>
+              </a:lnSpc>
+              <a:spcAft>
+                <a:spcPts val="1000"/>
+              </a:spcAft>
+            </a:pPr>
+            <a:r>
+              <a:rPr sz="1300" b="0">
+                <a:solidFill>
+                  <a:srgbClr val="585868"/>
+                </a:solidFill>
+                <a:latin typeface="Helvetica Neue"/>
+              </a:rPr>
+              <a:t>     This comes from search behaviour, not from a single page feature, and it lands where the traditional↔challenger score already put ING: with the incumbents, leaning.</a:t>
+            </a:r>
+          </a:p>
+          <a:p>
+            <a:pPr algn="l">
+              <a:lnSpc>
+                <a:spcPct val="105000"/>
+              </a:lnSpc>
+              <a:spcAft>
+                <a:spcPts val="200"/>
+              </a:spcAft>
+            </a:pPr>
+            <a:r>
+              <a:rPr sz="1500" b="1">
+                <a:solidFill>
+                  <a:srgbClr val="14141C"/>
+                </a:solidFill>
+                <a:latin typeface="Helvetica Neue"/>
+              </a:rPr>
+              <a:t>•  What it is not</a:t>
+            </a:r>
+          </a:p>
+          <a:p>
+            <a:pPr algn="l">
+              <a:lnSpc>
+                <a:spcPct val="105000"/>
+              </a:lnSpc>
+              <a:spcAft>
+                <a:spcPts val="1000"/>
+              </a:spcAft>
+            </a:pPr>
+            <a:r>
+              <a:rPr sz="1300" b="0">
+                <a:solidFill>
+                  <a:srgbClr val="585868"/>
+                </a:solidFill>
+                <a:latin typeface="Helvetica Neue"/>
+              </a:rPr>
+              <a:t>     Where people search from, never what a campaign achieved. Google Trends indexes each brand against its own peak, so these are shapes to compare, not volumes.</a:t>
+            </a:r>
+          </a:p>
+          <a:p>
+            <a:pPr algn="l">
+              <a:lnSpc>
+                <a:spcPct val="105000"/>
+              </a:lnSpc>
+              <a:spcAft>
+                <a:spcPts val="200"/>
+              </a:spcAft>
+            </a:pPr>
+            <a:endParaRPr sz="1300" b="0">
+              <a:solidFill>
+                <a:srgbClr val="585868"/>
+              </a:solidFill>
+              <a:latin typeface="Helvetica Neue"/>
+            </a:endParaRPr>
+          </a:p>
+          <a:p>
+            <a:pPr algn="l">
+              <a:lnSpc>
+                <a:spcPct val="105000"/>
+              </a:lnSpc>
+              <a:spcAft>
+                <a:spcPts val="0"/>
+              </a:spcAft>
+            </a:pPr>
+            <a:r>
+              <a:rPr sz="1250" b="0">
+                <a:solidFill>
+                  <a:srgbClr val="585868"/>
+                </a:solidFill>
+                <a:latin typeface="Helvetica Neue"/>
+              </a:rPr>
+              <a:t>Google Trends, Belgium, by region. Regional index 0–100 per brand, each brand normalised to its own maximum.</a:t>
+            </a:r>
+          </a:p>
+        </p:txBody>
+      </p:sp>
+      <p:sp>
+        <p:nvSpPr>
+          <p:cNvPr id="5" name="TextBox 4"/>
+          <p:cNvSpPr txBox="1"/>
+          <p:nvPr/>
+        </p:nvSpPr>
+        <p:spPr>
+          <a:xfrm>
+            <a:off x="548640" y="6400800"/>
+            <a:ext cx="8229600" cy="274320"/>
+          </a:xfrm>
+          <a:prstGeom prst="rect">
+            <a:avLst/>
+          </a:prstGeom>
+          <a:noFill/>
+        </p:spPr>
+        <p:txBody>
+          <a:bodyPr wrap="square">
+            <a:spAutoFit/>
+          </a:bodyPr>
+          <a:lstStyle/>
+          <a:p>
+            <a:pPr algn="l">
+              <a:lnSpc>
+                <a:spcPct val="105000"/>
+              </a:lnSpc>
+              <a:spcAft>
+                <a:spcPts val="600"/>
+              </a:spcAft>
+            </a:pPr>
+            <a:r>
+              <a:rPr sz="1000" b="0">
+                <a:solidFill>
+                  <a:srgbClr val="585868"/>
+                </a:solidFill>
+                <a:latin typeface="Helvetica Neue"/>
+              </a:rPr>
+              <a:t>Banking Campaigns Comparator · ING DACI / Customer AI · September 2026</a:t>
+            </a:r>
+          </a:p>
+        </p:txBody>
+      </p:sp>
+      <p:sp>
+        <p:nvSpPr>
+          <p:cNvPr id="6" name="TextBox 5"/>
+          <p:cNvSpPr txBox="1"/>
+          <p:nvPr/>
+        </p:nvSpPr>
+        <p:spPr>
+          <a:xfrm>
+            <a:off x="11094415" y="6400800"/>
+            <a:ext cx="548640" cy="274320"/>
+          </a:xfrm>
+          <a:prstGeom prst="rect">
+            <a:avLst/>
+          </a:prstGeom>
+          <a:noFill/>
+        </p:spPr>
+        <p:txBody>
+          <a:bodyPr wrap="square">
+            <a:spAutoFit/>
+          </a:bodyPr>
+          <a:lstStyle/>
+          <a:p>
+            <a:pPr algn="r">
+              <a:lnSpc>
+                <a:spcPct val="105000"/>
+              </a:lnSpc>
+              <a:spcAft>
+                <a:spcPts val="600"/>
+              </a:spcAft>
+            </a:pPr>
+            <a:r>
+              <a:rPr sz="1000" b="0">
+                <a:solidFill>
+                  <a:srgbClr val="585868"/>
+                </a:solidFill>
+                <a:latin typeface="Helvetica Neue"/>
+              </a:rPr>
+              <a:t>13</a:t>
+            </a:r>
+          </a:p>
+        </p:txBody>
+      </p:sp>
+    </p:spTree>
+  </p:cSld>
+  <p:clrMapOvr>
+    <a:masterClrMapping/>
+  </p:clrMapOvr>
+</p:sld>
+</file>
+
+<file path=ppt/slides/slide14.xml><?xml version="1.0" encoding="utf-8"?>
+<p:sld xmlns:a="http://schemas.openxmlformats.org/drawingml/2006/main" xmlns:r="http://schemas.openxmlformats.org/officeDocument/2006/relationships" xmlns:p="http://schemas.openxmlformats.org/presentationml/2006/main">
   <p:cSld name="Slide 1">
     <p:bg>
       <p:bgPr>
@@ -10966,69 +11470,6 @@
           <p:nvPr/>
         </p:nvPicPr>
         <p:blipFill>
-          <a:blip r:embed="rId2"/>
-          <a:stretch>
-            <a:fillRect/>
-          </a:stretch>
-        </p:blipFill>
-        <p:spPr>
-          <a:xfrm>
-            <a:off x="6144768" y="1426464"/>
-            <a:ext cx="5486400" cy="2770632"/>
-          </a:xfrm>
-          <a:prstGeom prst="rect">
-            <a:avLst/>
-          </a:prstGeom>
-        </p:spPr>
-      </p:pic>
-      <p:sp>
-        <p:nvSpPr>
-          <p:cNvPr id="8" name="Text 5"/>
-          <p:cNvSpPr txBox="1"/>
-          <p:nvPr/>
-        </p:nvSpPr>
-        <p:spPr>
-          <a:xfrm>
-            <a:off x="6144768" y="4297680"/>
-            <a:ext cx="5486400" cy="292608"/>
-          </a:xfrm>
-          <a:prstGeom prst="rect">
-            <a:avLst/>
-          </a:prstGeom>
-          <a:noFill/>
-          <a:ln/>
-        </p:spPr>
-        <p:txBody>
-          <a:bodyPr wrap="square" lIns="0" tIns="0" rIns="0" bIns="0" rtlCol="0" anchor="ctr"/>
-          <a:lstStyle/>
-          <a:p>
-            <a:pPr marL="0" indent="0">
-              <a:buNone/>
-            </a:pPr>
-            <a:r>
-              <a:rPr lang="en-US" sz="1050" i="1" dirty="0">
-                <a:solidFill>
-                  <a:srgbClr val="585868"/>
-                </a:solidFill>
-                <a:latin typeface="Helvetica Neue" pitchFamily="34" charset="0"/>
-                <a:ea typeface="Helvetica Neue" pitchFamily="34" charset="-122"/>
-                <a:cs typeface="Helvetica Neue" pitchFamily="34" charset="-120"/>
-              </a:rPr>
-              <a:t>The panel as the team sees it: one button, two opt-in contexts, and the run it produced.</a:t>
-            </a:r>
-            <a:endParaRPr lang="en-US" sz="1050" dirty="0"/>
-          </a:p>
-        </p:txBody>
-      </p:sp>
-      <p:pic>
-        <p:nvPicPr>
-          <p:cNvPr id="9" name="Image 1" descr="/Users/nstephane/Dev/AI_Data_Science_training/ing-usecase/docs/deck_assets/icons/target.png"/>
-          <p:cNvPicPr>
-            <a:picLocks noChangeAspect="1"/>
-          </p:cNvPicPr>
-          <p:nvPr/>
-        </p:nvPicPr>
-        <p:blipFill>
           <a:blip r:embed="rId3"/>
           <a:stretch>
             <a:fillRect/>
@@ -11036,8 +11477,8 @@
         </p:blipFill>
         <p:spPr>
           <a:xfrm>
-            <a:off x="621792" y="1609344"/>
-            <a:ext cx="420624" cy="420624"/>
+            <a:off x="6144768" y="1426464"/>
+            <a:ext cx="5486400" cy="2770632"/>
           </a:xfrm>
           <a:prstGeom prst="rect">
             <a:avLst/>
@@ -11046,14 +11487,14 @@
       </p:pic>
       <p:sp>
         <p:nvSpPr>
-          <p:cNvPr id="10" name="Text 6"/>
+          <p:cNvPr id="8" name="Text 5"/>
           <p:cNvSpPr txBox="1"/>
           <p:nvPr/>
         </p:nvSpPr>
         <p:spPr>
           <a:xfrm>
-            <a:off x="1188720" y="1591056"/>
-            <a:ext cx="4782312" cy="274320"/>
+            <a:off x="6144768" y="4297680"/>
+            <a:ext cx="5486400" cy="292608"/>
           </a:xfrm>
           <a:prstGeom prst="rect">
             <a:avLst/>
@@ -11069,65 +11510,23 @@
               <a:buNone/>
             </a:pPr>
             <a:r>
-              <a:rPr lang="en-US" sz="1350" b="1" dirty="0">
-                <a:solidFill>
-                  <a:srgbClr val="14141C"/>
+              <a:rPr lang="en-US" sz="1050" i="1" dirty="0">
+                <a:solidFill>
+                  <a:srgbClr val="585868"/>
                 </a:solidFill>
                 <a:latin typeface="Helvetica Neue" pitchFamily="34" charset="0"/>
                 <a:ea typeface="Helvetica Neue" pitchFamily="34" charset="-122"/>
                 <a:cs typeface="Helvetica Neue" pitchFamily="34" charset="-120"/>
               </a:rPr>
-              <a:t>One model call over the finished analysis</a:t>
-            </a:r>
-            <a:endParaRPr lang="en-US" sz="1350" dirty="0"/>
-          </a:p>
-        </p:txBody>
-      </p:sp>
-      <p:sp>
-        <p:nvSpPr>
-          <p:cNvPr id="11" name="Text 7"/>
-          <p:cNvSpPr txBox="1"/>
-          <p:nvPr/>
-        </p:nvSpPr>
-        <p:spPr>
-          <a:xfrm>
-            <a:off x="1188720" y="1883664"/>
-            <a:ext cx="4782312" cy="713232"/>
-          </a:xfrm>
-          <a:prstGeom prst="rect">
-            <a:avLst/>
-          </a:prstGeom>
-          <a:noFill/>
-          <a:ln/>
-        </p:spPr>
-        <p:txBody>
-          <a:bodyPr wrap="square" lIns="0" tIns="0" rIns="0" bIns="0" rtlCol="0" anchor="ctr"/>
-          <a:lstStyle/>
-          <a:p>
-            <a:pPr marL="0" indent="0">
-              <a:lnSpc>
-                <a:spcPts val="1500"/>
-              </a:lnSpc>
-              <a:buNone/>
-            </a:pPr>
-            <a:r>
-              <a:rPr lang="en-US" sz="1150" dirty="0">
-                <a:solidFill>
-                  <a:srgbClr val="585868"/>
-                </a:solidFill>
-                <a:latin typeface="Helvetica Neue" pitchFamily="34" charset="0"/>
-                <a:ea typeface="Helvetica Neue" pitchFamily="34" charset="-122"/>
-                <a:cs typeface="Helvetica Neue" pitchFamily="34" charset="-120"/>
-              </a:rPr>
-              <a:t>Reads report.json only — the same numbers the charts are drawn from. This run turned 30 measured features across 14 banks into 11 ordered changes.</a:t>
-            </a:r>
-            <a:endParaRPr lang="en-US" sz="1150" dirty="0"/>
+              <a:t>The panel as the team sees it: one button, two opt-in contexts, and the run it produced.</a:t>
+            </a:r>
+            <a:endParaRPr lang="en-US" sz="1050" dirty="0"/>
           </a:p>
         </p:txBody>
       </p:sp>
       <p:pic>
         <p:nvPicPr>
-          <p:cNvPr id="12" name="Image 2" descr="/Users/nstephane/Dev/AI_Data_Science_training/ing-usecase/docs/deck_assets/icons/list.png"/>
+          <p:cNvPr id="9" name="Image 1" descr="/Users/nstephane/Dev/AI_Data_Science_training/ing-usecase/docs/deck_assets/icons/target.png"/>
           <p:cNvPicPr>
             <a:picLocks noChangeAspect="1"/>
           </p:cNvPicPr>
@@ -11141,6 +11540,111 @@
         </p:blipFill>
         <p:spPr>
           <a:xfrm>
+            <a:off x="621792" y="1609344"/>
+            <a:ext cx="420624" cy="420624"/>
+          </a:xfrm>
+          <a:prstGeom prst="rect">
+            <a:avLst/>
+          </a:prstGeom>
+        </p:spPr>
+      </p:pic>
+      <p:sp>
+        <p:nvSpPr>
+          <p:cNvPr id="10" name="Text 6"/>
+          <p:cNvSpPr txBox="1"/>
+          <p:nvPr/>
+        </p:nvSpPr>
+        <p:spPr>
+          <a:xfrm>
+            <a:off x="1188720" y="1591056"/>
+            <a:ext cx="4782312" cy="274320"/>
+          </a:xfrm>
+          <a:prstGeom prst="rect">
+            <a:avLst/>
+          </a:prstGeom>
+          <a:noFill/>
+          <a:ln/>
+        </p:spPr>
+        <p:txBody>
+          <a:bodyPr wrap="square" lIns="0" tIns="0" rIns="0" bIns="0" rtlCol="0" anchor="ctr"/>
+          <a:lstStyle/>
+          <a:p>
+            <a:pPr marL="0" indent="0">
+              <a:buNone/>
+            </a:pPr>
+            <a:r>
+              <a:rPr lang="en-US" sz="1350" b="1" dirty="0">
+                <a:solidFill>
+                  <a:srgbClr val="14141C"/>
+                </a:solidFill>
+                <a:latin typeface="Helvetica Neue" pitchFamily="34" charset="0"/>
+                <a:ea typeface="Helvetica Neue" pitchFamily="34" charset="-122"/>
+                <a:cs typeface="Helvetica Neue" pitchFamily="34" charset="-120"/>
+              </a:rPr>
+              <a:t>One model call over the finished analysis</a:t>
+            </a:r>
+            <a:endParaRPr lang="en-US" sz="1350" dirty="0"/>
+          </a:p>
+        </p:txBody>
+      </p:sp>
+      <p:sp>
+        <p:nvSpPr>
+          <p:cNvPr id="11" name="Text 7"/>
+          <p:cNvSpPr txBox="1"/>
+          <p:nvPr/>
+        </p:nvSpPr>
+        <p:spPr>
+          <a:xfrm>
+            <a:off x="1188720" y="1883664"/>
+            <a:ext cx="4782312" cy="713232"/>
+          </a:xfrm>
+          <a:prstGeom prst="rect">
+            <a:avLst/>
+          </a:prstGeom>
+          <a:noFill/>
+          <a:ln/>
+        </p:spPr>
+        <p:txBody>
+          <a:bodyPr wrap="square" lIns="0" tIns="0" rIns="0" bIns="0" rtlCol="0" anchor="ctr"/>
+          <a:lstStyle/>
+          <a:p>
+            <a:pPr marL="0" indent="0">
+              <a:lnSpc>
+                <a:spcPts val="1500"/>
+              </a:lnSpc>
+              <a:buNone/>
+            </a:pPr>
+            <a:r>
+              <a:rPr lang="en-US" sz="1150" dirty="0">
+                <a:solidFill>
+                  <a:srgbClr val="585868"/>
+                </a:solidFill>
+                <a:latin typeface="Helvetica Neue" pitchFamily="34" charset="0"/>
+                <a:ea typeface="Helvetica Neue" pitchFamily="34" charset="-122"/>
+                <a:cs typeface="Helvetica Neue" pitchFamily="34" charset="-120"/>
+              </a:rPr>
+              <a:t>Reads report.json only — the same numbers the charts are drawn from. This run turned 30 measured features across 14 banks into 11 ordered changes.</a:t>
+            </a:r>
+            <a:endParaRPr lang="en-US" sz="1150" dirty="0"/>
+          </a:p>
+        </p:txBody>
+      </p:sp>
+      <p:pic>
+        <p:nvPicPr>
+          <p:cNvPr id="12" name="Image 2" descr="/Users/nstephane/Dev/AI_Data_Science_training/ing-usecase/docs/deck_assets/icons/list.png"/>
+          <p:cNvPicPr>
+            <a:picLocks noChangeAspect="1"/>
+          </p:cNvPicPr>
+          <p:nvPr/>
+        </p:nvPicPr>
+        <p:blipFill>
+          <a:blip r:embed="rId5"/>
+          <a:stretch>
+            <a:fillRect/>
+          </a:stretch>
+        </p:blipFill>
+        <p:spPr>
+          <a:xfrm>
             <a:off x="621792" y="2907792"/>
             <a:ext cx="420624" cy="420624"/>
           </a:xfrm>
@@ -11239,7 +11743,7 @@
           <p:nvPr/>
         </p:nvPicPr>
         <p:blipFill>
-          <a:blip r:embed="rId5"/>
+          <a:blip r:embed="rId6"/>
           <a:stretch>
             <a:fillRect/>
           </a:stretch>
@@ -11412,7 +11916,7 @@
 </p:sld>
 </file>
 
-<file path=ppt/slides/slide14.xml><?xml version="1.0" encoding="utf-8"?>
+<file path=ppt/slides/slide15.xml><?xml version="1.0" encoding="utf-8"?>
 <p:sld xmlns:a="http://schemas.openxmlformats.org/drawingml/2006/main" xmlns:r="http://schemas.openxmlformats.org/officeDocument/2006/relationships" xmlns:p="http://schemas.openxmlformats.org/presentationml/2006/main">
   <p:cSld name="Slide 2">
     <p:bg>
@@ -11613,69 +12117,6 @@
           <p:nvPr/>
         </p:nvPicPr>
         <p:blipFill>
-          <a:blip r:embed="rId2"/>
-          <a:stretch>
-            <a:fillRect/>
-          </a:stretch>
-        </p:blipFill>
-        <p:spPr>
-          <a:xfrm>
-            <a:off x="658368" y="1261872"/>
-            <a:ext cx="6309360" cy="4114800"/>
-          </a:xfrm>
-          <a:prstGeom prst="rect">
-            <a:avLst/>
-          </a:prstGeom>
-        </p:spPr>
-      </p:pic>
-      <p:sp>
-        <p:nvSpPr>
-          <p:cNvPr id="8" name="Text 5"/>
-          <p:cNvSpPr txBox="1"/>
-          <p:nvPr/>
-        </p:nvSpPr>
-        <p:spPr>
-          <a:xfrm>
-            <a:off x="658368" y="5486400"/>
-            <a:ext cx="6309360" cy="292608"/>
-          </a:xfrm>
-          <a:prstGeom prst="rect">
-            <a:avLst/>
-          </a:prstGeom>
-          <a:noFill/>
-          <a:ln/>
-        </p:spPr>
-        <p:txBody>
-          <a:bodyPr wrap="square" lIns="0" tIns="0" rIns="0" bIns="0" rtlCol="0" anchor="ctr"/>
-          <a:lstStyle/>
-          <a:p>
-            <a:pPr marL="0" indent="0">
-              <a:buNone/>
-            </a:pPr>
-            <a:r>
-              <a:rPr lang="en-US" sz="1050" i="1" dirty="0">
-                <a:solidFill>
-                  <a:srgbClr val="585868"/>
-                </a:solidFill>
-                <a:latin typeface="Helvetica Neue" pitchFamily="34" charset="0"/>
-                <a:ea typeface="Helvetica Neue" pitchFamily="34" charset="-122"/>
-                <a:cs typeface="Helvetica Neue" pitchFamily="34" charset="-120"/>
-              </a:rPr>
-              <a:t>Three of the eleven, as the team reviews them.</a:t>
-            </a:r>
-            <a:endParaRPr lang="en-US" sz="1050" dirty="0"/>
-          </a:p>
-        </p:txBody>
-      </p:sp>
-      <p:pic>
-        <p:nvPicPr>
-          <p:cNvPr id="9" name="Image 1" descr="/Users/nstephane/Dev/AI_Data_Science_training/ing-usecase/docs/deck_assets/icons/list.png"/>
-          <p:cNvPicPr>
-            <a:picLocks noChangeAspect="1"/>
-          </p:cNvPicPr>
-          <p:nvPr/>
-        </p:nvPicPr>
-        <p:blipFill>
           <a:blip r:embed="rId3"/>
           <a:stretch>
             <a:fillRect/>
@@ -11683,8 +12124,8 @@
         </p:blipFill>
         <p:spPr>
           <a:xfrm>
-            <a:off x="7260336" y="1371600"/>
-            <a:ext cx="420624" cy="420624"/>
+            <a:off x="658368" y="1261872"/>
+            <a:ext cx="6309360" cy="4114800"/>
           </a:xfrm>
           <a:prstGeom prst="rect">
             <a:avLst/>
@@ -11693,14 +12134,14 @@
       </p:pic>
       <p:sp>
         <p:nvSpPr>
-          <p:cNvPr id="10" name="Text 6"/>
+          <p:cNvPr id="8" name="Text 5"/>
           <p:cNvSpPr txBox="1"/>
           <p:nvPr/>
         </p:nvSpPr>
         <p:spPr>
           <a:xfrm>
-            <a:off x="7827264" y="1353312"/>
-            <a:ext cx="3694176" cy="274320"/>
+            <a:off x="658368" y="5486400"/>
+            <a:ext cx="6309360" cy="292608"/>
           </a:xfrm>
           <a:prstGeom prst="rect">
             <a:avLst/>
@@ -11716,65 +12157,23 @@
               <a:buNone/>
             </a:pPr>
             <a:r>
-              <a:rPr lang="en-US" sz="1350" b="1" dirty="0">
-                <a:solidFill>
-                  <a:srgbClr val="14141C"/>
+              <a:rPr lang="en-US" sz="1050" i="1" dirty="0">
+                <a:solidFill>
+                  <a:srgbClr val="585868"/>
                 </a:solidFill>
                 <a:latin typeface="Helvetica Neue" pitchFamily="34" charset="0"/>
                 <a:ea typeface="Helvetica Neue" pitchFamily="34" charset="-122"/>
                 <a:cs typeface="Helvetica Neue" pitchFamily="34" charset="-120"/>
               </a:rPr>
-              <a:t>Finding and action, kept apart</a:t>
-            </a:r>
-            <a:endParaRPr lang="en-US" sz="1350" dirty="0"/>
-          </a:p>
-        </p:txBody>
-      </p:sp>
-      <p:sp>
-        <p:nvSpPr>
-          <p:cNvPr id="11" name="Text 7"/>
-          <p:cNvSpPr txBox="1"/>
-          <p:nvPr/>
-        </p:nvSpPr>
-        <p:spPr>
-          <a:xfrm>
-            <a:off x="7827264" y="1645920"/>
-            <a:ext cx="3694176" cy="713232"/>
-          </a:xfrm>
-          <a:prstGeom prst="rect">
-            <a:avLst/>
-          </a:prstGeom>
-          <a:noFill/>
-          <a:ln/>
-        </p:spPr>
-        <p:txBody>
-          <a:bodyPr wrap="square" lIns="0" tIns="0" rIns="0" bIns="0" rtlCol="0" anchor="ctr"/>
-          <a:lstStyle/>
-          <a:p>
-            <a:pPr marL="0" indent="0">
-              <a:lnSpc>
-                <a:spcPts val="1500"/>
-              </a:lnSpc>
-              <a:buNone/>
-            </a:pPr>
-            <a:r>
-              <a:rPr lang="en-US" sz="1150" dirty="0">
-                <a:solidFill>
-                  <a:srgbClr val="585868"/>
-                </a:solidFill>
-                <a:latin typeface="Helvetica Neue" pitchFamily="34" charset="0"/>
-                <a:ea typeface="Helvetica Neue" pitchFamily="34" charset="-122"/>
-                <a:cs typeface="Helvetica Neue" pitchFamily="34" charset="-120"/>
-              </a:rPr>
-              <a:t>What the data shows sits above what to do. A reader can reject our suggested action and still keep the measured finding.</a:t>
-            </a:r>
-            <a:endParaRPr lang="en-US" sz="1150" dirty="0"/>
+              <a:t>Three of the eleven, as the team reviews them.</a:t>
+            </a:r>
+            <a:endParaRPr lang="en-US" sz="1050" dirty="0"/>
           </a:p>
         </p:txBody>
       </p:sp>
       <p:pic>
         <p:nvPicPr>
-          <p:cNvPr id="12" name="Image 2" descr="/Users/nstephane/Dev/AI_Data_Science_training/ing-usecase/docs/deck_assets/icons/target.png"/>
+          <p:cNvPr id="9" name="Image 1" descr="/Users/nstephane/Dev/AI_Data_Science_training/ing-usecase/docs/deck_assets/icons/list.png"/>
           <p:cNvPicPr>
             <a:picLocks noChangeAspect="1"/>
           </p:cNvPicPr>
@@ -11788,6 +12187,111 @@
         </p:blipFill>
         <p:spPr>
           <a:xfrm>
+            <a:off x="7260336" y="1371600"/>
+            <a:ext cx="420624" cy="420624"/>
+          </a:xfrm>
+          <a:prstGeom prst="rect">
+            <a:avLst/>
+          </a:prstGeom>
+        </p:spPr>
+      </p:pic>
+      <p:sp>
+        <p:nvSpPr>
+          <p:cNvPr id="10" name="Text 6"/>
+          <p:cNvSpPr txBox="1"/>
+          <p:nvPr/>
+        </p:nvSpPr>
+        <p:spPr>
+          <a:xfrm>
+            <a:off x="7827264" y="1353312"/>
+            <a:ext cx="3694176" cy="274320"/>
+          </a:xfrm>
+          <a:prstGeom prst="rect">
+            <a:avLst/>
+          </a:prstGeom>
+          <a:noFill/>
+          <a:ln/>
+        </p:spPr>
+        <p:txBody>
+          <a:bodyPr wrap="square" lIns="0" tIns="0" rIns="0" bIns="0" rtlCol="0" anchor="ctr"/>
+          <a:lstStyle/>
+          <a:p>
+            <a:pPr marL="0" indent="0">
+              <a:buNone/>
+            </a:pPr>
+            <a:r>
+              <a:rPr lang="en-US" sz="1350" b="1" dirty="0">
+                <a:solidFill>
+                  <a:srgbClr val="14141C"/>
+                </a:solidFill>
+                <a:latin typeface="Helvetica Neue" pitchFamily="34" charset="0"/>
+                <a:ea typeface="Helvetica Neue" pitchFamily="34" charset="-122"/>
+                <a:cs typeface="Helvetica Neue" pitchFamily="34" charset="-120"/>
+              </a:rPr>
+              <a:t>Finding and action, kept apart</a:t>
+            </a:r>
+            <a:endParaRPr lang="en-US" sz="1350" dirty="0"/>
+          </a:p>
+        </p:txBody>
+      </p:sp>
+      <p:sp>
+        <p:nvSpPr>
+          <p:cNvPr id="11" name="Text 7"/>
+          <p:cNvSpPr txBox="1"/>
+          <p:nvPr/>
+        </p:nvSpPr>
+        <p:spPr>
+          <a:xfrm>
+            <a:off x="7827264" y="1645920"/>
+            <a:ext cx="3694176" cy="713232"/>
+          </a:xfrm>
+          <a:prstGeom prst="rect">
+            <a:avLst/>
+          </a:prstGeom>
+          <a:noFill/>
+          <a:ln/>
+        </p:spPr>
+        <p:txBody>
+          <a:bodyPr wrap="square" lIns="0" tIns="0" rIns="0" bIns="0" rtlCol="0" anchor="ctr"/>
+          <a:lstStyle/>
+          <a:p>
+            <a:pPr marL="0" indent="0">
+              <a:lnSpc>
+                <a:spcPts val="1500"/>
+              </a:lnSpc>
+              <a:buNone/>
+            </a:pPr>
+            <a:r>
+              <a:rPr lang="en-US" sz="1150" dirty="0">
+                <a:solidFill>
+                  <a:srgbClr val="585868"/>
+                </a:solidFill>
+                <a:latin typeface="Helvetica Neue" pitchFamily="34" charset="0"/>
+                <a:ea typeface="Helvetica Neue" pitchFamily="34" charset="-122"/>
+                <a:cs typeface="Helvetica Neue" pitchFamily="34" charset="-120"/>
+              </a:rPr>
+              <a:t>What the data shows sits above what to do. A reader can reject our suggested action and still keep the measured finding.</a:t>
+            </a:r>
+            <a:endParaRPr lang="en-US" sz="1150" dirty="0"/>
+          </a:p>
+        </p:txBody>
+      </p:sp>
+      <p:pic>
+        <p:nvPicPr>
+          <p:cNvPr id="12" name="Image 2" descr="/Users/nstephane/Dev/AI_Data_Science_training/ing-usecase/docs/deck_assets/icons/target.png"/>
+          <p:cNvPicPr>
+            <a:picLocks noChangeAspect="1"/>
+          </p:cNvPicPr>
+          <p:nvPr/>
+        </p:nvPicPr>
+        <p:blipFill>
+          <a:blip r:embed="rId5"/>
+          <a:stretch>
+            <a:fillRect/>
+          </a:stretch>
+        </p:blipFill>
+        <p:spPr>
+          <a:xfrm>
             <a:off x="7260336" y="2944368"/>
             <a:ext cx="420624" cy="420624"/>
           </a:xfrm>
@@ -11886,7 +12390,7 @@
           <p:nvPr/>
         </p:nvPicPr>
         <p:blipFill>
-          <a:blip r:embed="rId5"/>
+          <a:blip r:embed="rId6"/>
           <a:stretch>
             <a:fillRect/>
           </a:stretch>
@@ -11990,7 +12494,7 @@
 </p:sld>
 </file>
 
-<file path=ppt/slides/slide15.xml><?xml version="1.0" encoding="utf-8"?>
+<file path=ppt/slides/slide16.xml><?xml version="1.0" encoding="utf-8"?>
 <p:sld xmlns:a="http://schemas.openxmlformats.org/drawingml/2006/main" xmlns:r="http://schemas.openxmlformats.org/officeDocument/2006/relationships" xmlns:p="http://schemas.openxmlformats.org/presentationml/2006/main">
   <p:cSld name="Slide 3">
     <p:bg>
@@ -12996,7 +13500,7 @@
 </p:sld>
 </file>
 
-<file path=ppt/slides/slide16.xml><?xml version="1.0" encoding="utf-8"?>
+<file path=ppt/slides/slide17.xml><?xml version="1.0" encoding="utf-8"?>
 <p:sld xmlns:a="http://schemas.openxmlformats.org/drawingml/2006/main" xmlns:r="http://schemas.openxmlformats.org/officeDocument/2006/relationships" xmlns:p="http://schemas.openxmlformats.org/presentationml/2006/main">
   <p:cSld name="Slide 4">
     <p:bg>
@@ -13197,7 +13701,7 @@
           <p:nvPr/>
         </p:nvPicPr>
         <p:blipFill>
-          <a:blip r:embed="rId2"/>
+          <a:blip r:embed="rId3"/>
           <a:stretch>
             <a:fillRect/>
           </a:stretch>
@@ -13246,69 +13750,6 @@
           <p:nvPr/>
         </p:nvPicPr>
         <p:blipFill>
-          <a:blip r:embed="rId3"/>
-          <a:stretch>
-            <a:fillRect/>
-          </a:stretch>
-        </p:blipFill>
-        <p:spPr>
-          <a:xfrm>
-            <a:off x="658368" y="3840480"/>
-            <a:ext cx="5120640" cy="2048256"/>
-          </a:xfrm>
-          <a:prstGeom prst="rect">
-            <a:avLst/>
-          </a:prstGeom>
-        </p:spPr>
-      </p:pic>
-      <p:sp>
-        <p:nvSpPr>
-          <p:cNvPr id="10" name="Text 6"/>
-          <p:cNvSpPr txBox="1"/>
-          <p:nvPr/>
-        </p:nvSpPr>
-        <p:spPr>
-          <a:xfrm>
-            <a:off x="658368" y="5998464"/>
-            <a:ext cx="6675120" cy="292608"/>
-          </a:xfrm>
-          <a:prstGeom prst="rect">
-            <a:avLst/>
-          </a:prstGeom>
-          <a:noFill/>
-          <a:ln/>
-        </p:spPr>
-        <p:txBody>
-          <a:bodyPr wrap="square" lIns="0" tIns="0" rIns="0" bIns="0" rtlCol="0" anchor="ctr"/>
-          <a:lstStyle/>
-          <a:p>
-            <a:pPr marL="0" indent="0">
-              <a:buNone/>
-            </a:pPr>
-            <a:r>
-              <a:rPr lang="en-US" sz="1050" i="1" dirty="0">
-                <a:solidFill>
-                  <a:srgbClr val="585868"/>
-                </a:solidFill>
-                <a:latin typeface="Helvetica Neue" pitchFamily="34" charset="0"/>
-                <a:ea typeface="Helvetica Neue" pitchFamily="34" charset="-122"/>
-                <a:cs typeface="Helvetica Neue" pitchFamily="34" charset="-120"/>
-              </a:rPr>
-              <a:t>Generated, never published: rates and amounts stay as [TAUX] and [MONTANT] placeholders.</a:t>
-            </a:r>
-            <a:endParaRPr lang="en-US" sz="1050" dirty="0"/>
-          </a:p>
-        </p:txBody>
-      </p:sp>
-      <p:pic>
-        <p:nvPicPr>
-          <p:cNvPr id="11" name="Image 2" descr="/Users/nstephane/Dev/AI_Data_Science_training/ing-usecase/docs/deck_assets/icons/check.png"/>
-          <p:cNvPicPr>
-            <a:picLocks noChangeAspect="1"/>
-          </p:cNvPicPr>
-          <p:nvPr/>
-        </p:nvPicPr>
-        <p:blipFill>
           <a:blip r:embed="rId4"/>
           <a:stretch>
             <a:fillRect/>
@@ -13316,8 +13757,8 @@
         </p:blipFill>
         <p:spPr>
           <a:xfrm>
-            <a:off x="7699248" y="1408176"/>
-            <a:ext cx="420624" cy="420624"/>
+            <a:off x="658368" y="3840480"/>
+            <a:ext cx="5120640" cy="2048256"/>
           </a:xfrm>
           <a:prstGeom prst="rect">
             <a:avLst/>
@@ -13326,14 +13767,14 @@
       </p:pic>
       <p:sp>
         <p:nvSpPr>
-          <p:cNvPr id="12" name="Text 7"/>
+          <p:cNvPr id="10" name="Text 6"/>
           <p:cNvSpPr txBox="1"/>
           <p:nvPr/>
         </p:nvSpPr>
         <p:spPr>
           <a:xfrm>
-            <a:off x="8266176" y="1389888"/>
-            <a:ext cx="3273552" cy="274320"/>
+            <a:off x="658368" y="5998464"/>
+            <a:ext cx="6675120" cy="292608"/>
           </a:xfrm>
           <a:prstGeom prst="rect">
             <a:avLst/>
@@ -13349,65 +13790,23 @@
               <a:buNone/>
             </a:pPr>
             <a:r>
-              <a:rPr lang="en-US" sz="1350" b="1" dirty="0">
-                <a:solidFill>
-                  <a:srgbClr val="14141C"/>
+              <a:rPr lang="en-US" sz="1050" i="1" dirty="0">
+                <a:solidFill>
+                  <a:srgbClr val="585868"/>
                 </a:solidFill>
                 <a:latin typeface="Helvetica Neue" pitchFamily="34" charset="0"/>
                 <a:ea typeface="Helvetica Neue" pitchFamily="34" charset="-122"/>
                 <a:cs typeface="Helvetica Neue" pitchFamily="34" charset="-120"/>
               </a:rPr>
-              <a:t>The team chooses what gets built</a:t>
-            </a:r>
-            <a:endParaRPr lang="en-US" sz="1350" dirty="0"/>
-          </a:p>
-        </p:txBody>
-      </p:sp>
-      <p:sp>
-        <p:nvSpPr>
-          <p:cNvPr id="13" name="Text 8"/>
-          <p:cNvSpPr txBox="1"/>
-          <p:nvPr/>
-        </p:nvSpPr>
-        <p:spPr>
-          <a:xfrm>
-            <a:off x="8266176" y="1682496"/>
-            <a:ext cx="3273552" cy="713232"/>
-          </a:xfrm>
-          <a:prstGeom prst="rect">
-            <a:avLst/>
-          </a:prstGeom>
-          <a:noFill/>
-          <a:ln/>
-        </p:spPr>
-        <p:txBody>
-          <a:bodyPr wrap="square" lIns="0" tIns="0" rIns="0" bIns="0" rtlCol="0" anchor="ctr"/>
-          <a:lstStyle/>
-          <a:p>
-            <a:pPr marL="0" indent="0">
-              <a:lnSpc>
-                <a:spcPts val="1500"/>
-              </a:lnSpc>
-              <a:buNone/>
-            </a:pPr>
-            <a:r>
-              <a:rPr lang="en-US" sz="1150" dirty="0">
-                <a:solidFill>
-                  <a:srgbClr val="585868"/>
-                </a:solidFill>
-                <a:latin typeface="Helvetica Neue" pitchFamily="34" charset="0"/>
-                <a:ea typeface="Helvetica Neue" pitchFamily="34" charset="-122"/>
-                <a:cs typeface="Helvetica Neue" pitchFamily="34" charset="-120"/>
-              </a:rPr>
-              <a:t>Every recommendation is a checkbox. Nothing reaches the generator that a person did not tick.</a:t>
-            </a:r>
-            <a:endParaRPr lang="en-US" sz="1150" dirty="0"/>
+              <a:t>Generated, never published: rates and amounts stay as [TAUX] and [MONTANT] placeholders.</a:t>
+            </a:r>
+            <a:endParaRPr lang="en-US" sz="1050" dirty="0"/>
           </a:p>
         </p:txBody>
       </p:sp>
       <p:pic>
         <p:nvPicPr>
-          <p:cNvPr id="14" name="Image 3" descr="/Users/nstephane/Dev/AI_Data_Science_training/ing-usecase/docs/deck_assets/icons/window.png"/>
+          <p:cNvPr id="11" name="Image 2" descr="/Users/nstephane/Dev/AI_Data_Science_training/ing-usecase/docs/deck_assets/icons/check.png"/>
           <p:cNvPicPr>
             <a:picLocks noChangeAspect="1"/>
           </p:cNvPicPr>
@@ -13421,6 +13820,111 @@
         </p:blipFill>
         <p:spPr>
           <a:xfrm>
+            <a:off x="7699248" y="1408176"/>
+            <a:ext cx="420624" cy="420624"/>
+          </a:xfrm>
+          <a:prstGeom prst="rect">
+            <a:avLst/>
+          </a:prstGeom>
+        </p:spPr>
+      </p:pic>
+      <p:sp>
+        <p:nvSpPr>
+          <p:cNvPr id="12" name="Text 7"/>
+          <p:cNvSpPr txBox="1"/>
+          <p:nvPr/>
+        </p:nvSpPr>
+        <p:spPr>
+          <a:xfrm>
+            <a:off x="8266176" y="1389888"/>
+            <a:ext cx="3273552" cy="274320"/>
+          </a:xfrm>
+          <a:prstGeom prst="rect">
+            <a:avLst/>
+          </a:prstGeom>
+          <a:noFill/>
+          <a:ln/>
+        </p:spPr>
+        <p:txBody>
+          <a:bodyPr wrap="square" lIns="0" tIns="0" rIns="0" bIns="0" rtlCol="0" anchor="ctr"/>
+          <a:lstStyle/>
+          <a:p>
+            <a:pPr marL="0" indent="0">
+              <a:buNone/>
+            </a:pPr>
+            <a:r>
+              <a:rPr lang="en-US" sz="1350" b="1" dirty="0">
+                <a:solidFill>
+                  <a:srgbClr val="14141C"/>
+                </a:solidFill>
+                <a:latin typeface="Helvetica Neue" pitchFamily="34" charset="0"/>
+                <a:ea typeface="Helvetica Neue" pitchFamily="34" charset="-122"/>
+                <a:cs typeface="Helvetica Neue" pitchFamily="34" charset="-120"/>
+              </a:rPr>
+              <a:t>The team chooses what gets built</a:t>
+            </a:r>
+            <a:endParaRPr lang="en-US" sz="1350" dirty="0"/>
+          </a:p>
+        </p:txBody>
+      </p:sp>
+      <p:sp>
+        <p:nvSpPr>
+          <p:cNvPr id="13" name="Text 8"/>
+          <p:cNvSpPr txBox="1"/>
+          <p:nvPr/>
+        </p:nvSpPr>
+        <p:spPr>
+          <a:xfrm>
+            <a:off x="8266176" y="1682496"/>
+            <a:ext cx="3273552" cy="713232"/>
+          </a:xfrm>
+          <a:prstGeom prst="rect">
+            <a:avLst/>
+          </a:prstGeom>
+          <a:noFill/>
+          <a:ln/>
+        </p:spPr>
+        <p:txBody>
+          <a:bodyPr wrap="square" lIns="0" tIns="0" rIns="0" bIns="0" rtlCol="0" anchor="ctr"/>
+          <a:lstStyle/>
+          <a:p>
+            <a:pPr marL="0" indent="0">
+              <a:lnSpc>
+                <a:spcPts val="1500"/>
+              </a:lnSpc>
+              <a:buNone/>
+            </a:pPr>
+            <a:r>
+              <a:rPr lang="en-US" sz="1150" dirty="0">
+                <a:solidFill>
+                  <a:srgbClr val="585868"/>
+                </a:solidFill>
+                <a:latin typeface="Helvetica Neue" pitchFamily="34" charset="0"/>
+                <a:ea typeface="Helvetica Neue" pitchFamily="34" charset="-122"/>
+                <a:cs typeface="Helvetica Neue" pitchFamily="34" charset="-120"/>
+              </a:rPr>
+              <a:t>Every recommendation is a checkbox. Nothing reaches the generator that a person did not tick.</a:t>
+            </a:r>
+            <a:endParaRPr lang="en-US" sz="1150" dirty="0"/>
+          </a:p>
+        </p:txBody>
+      </p:sp>
+      <p:pic>
+        <p:nvPicPr>
+          <p:cNvPr id="14" name="Image 3" descr="/Users/nstephane/Dev/AI_Data_Science_training/ing-usecase/docs/deck_assets/icons/window.png"/>
+          <p:cNvPicPr>
+            <a:picLocks noChangeAspect="1"/>
+          </p:cNvPicPr>
+          <p:nvPr/>
+        </p:nvPicPr>
+        <p:blipFill>
+          <a:blip r:embed="rId6"/>
+          <a:stretch>
+            <a:fillRect/>
+          </a:stretch>
+        </p:blipFill>
+        <p:spPr>
+          <a:xfrm>
             <a:off x="7699248" y="2743200"/>
             <a:ext cx="420624" cy="420624"/>
           </a:xfrm>
@@ -13519,7 +14023,7 @@
           <p:nvPr/>
         </p:nvPicPr>
         <p:blipFill>
-          <a:blip r:embed="rId6"/>
+          <a:blip r:embed="rId7"/>
           <a:stretch>
             <a:fillRect/>
           </a:stretch>
@@ -13665,7 +14169,7 @@
 </p:sld>
 </file>
 
-<file path=ppt/slides/slide17.xml><?xml version="1.0" encoding="utf-8"?>
+<file path=ppt/slides/slide18.xml><?xml version="1.0" encoding="utf-8"?>
 <p:sld xmlns:a="http://schemas.openxmlformats.org/drawingml/2006/main" xmlns:r="http://schemas.openxmlformats.org/officeDocument/2006/relationships" xmlns:p="http://schemas.openxmlformats.org/presentationml/2006/main">
   <p:cSld name="Slide 5">
     <p:bg>
@@ -13841,7 +14345,7 @@
           <p:nvPr/>
         </p:nvPicPr>
         <p:blipFill>
-          <a:blip r:embed="rId2"/>
+          <a:blip r:embed="rId3"/>
           <a:stretch>
             <a:fillRect/>
           </a:stretch>
@@ -13892,450 +14396,6 @@
               <a:t>Stages 1–5 are the measurement half shown in the main deck. Stages 6–8 are this one.</a:t>
             </a:r>
             <a:endParaRPr lang="en-US" sz="1050" dirty="0"/>
-          </a:p>
-        </p:txBody>
-      </p:sp>
-    </p:spTree>
-  </p:cSld>
-  <p:clrMapOvr>
-    <a:masterClrMapping/>
-  </p:clrMapOvr>
-</p:sld>
-</file>
-
-<file path=ppt/slides/slide18.xml><?xml version="1.0" encoding="utf-8"?>
-<p:sld xmlns:a="http://schemas.openxmlformats.org/drawingml/2006/main" xmlns:r="http://schemas.openxmlformats.org/officeDocument/2006/relationships" xmlns:p="http://schemas.openxmlformats.org/presentationml/2006/main">
-  <p:cSld>
-    <p:spTree>
-      <p:nvGrpSpPr>
-        <p:cNvPr id="1" name=""/>
-        <p:cNvGrpSpPr/>
-        <p:nvPr/>
-      </p:nvGrpSpPr>
-      <p:grpSpPr>
-        <a:xfrm>
-          <a:off x="0" y="0"/>
-          <a:ext cx="0" cy="0"/>
-          <a:chOff x="0" y="0"/>
-          <a:chExt cx="0" cy="0"/>
-        </a:xfrm>
-      </p:grpSpPr>
-      <p:sp>
-        <p:nvSpPr>
-          <p:cNvPr id="2" name="TextBox 1"/>
-          <p:cNvSpPr txBox="1"/>
-          <p:nvPr/>
-        </p:nvSpPr>
-        <p:spPr>
-          <a:xfrm>
-            <a:off x="548640" y="384048"/>
-            <a:ext cx="11064240" cy="731520"/>
-          </a:xfrm>
-          <a:prstGeom prst="rect">
-            <a:avLst/>
-          </a:prstGeom>
-          <a:noFill/>
-        </p:spPr>
-        <p:txBody>
-          <a:bodyPr wrap="square">
-            <a:spAutoFit/>
-          </a:bodyPr>
-          <a:lstStyle/>
-          <a:p>
-            <a:pPr algn="l">
-              <a:lnSpc>
-                <a:spcPct val="105000"/>
-              </a:lnSpc>
-              <a:spcAft>
-                <a:spcPts val="600"/>
-              </a:spcAft>
-            </a:pPr>
-            <a:r>
-              <a:rPr sz="2800" b="1">
-                <a:solidFill>
-                  <a:srgbClr val="14141C"/>
-                </a:solidFill>
-                <a:latin typeface="Helvetica Neue"/>
-              </a:rPr>
-              <a:t>What this cannot support</a:t>
-            </a:r>
-          </a:p>
-        </p:txBody>
-      </p:sp>
-      <p:sp>
-        <p:nvSpPr>
-          <p:cNvPr id="3" name="Rectangle 2"/>
-          <p:cNvSpPr/>
-          <p:nvPr/>
-        </p:nvSpPr>
-        <p:spPr>
-          <a:xfrm>
-            <a:off x="548640" y="1115568"/>
-            <a:ext cx="1463040" cy="64008"/>
-          </a:xfrm>
-          <a:prstGeom prst="rect">
-            <a:avLst/>
-          </a:prstGeom>
-          <a:solidFill>
-            <a:srgbClr val="FF6200"/>
-          </a:solidFill>
-          <a:ln>
-            <a:noFill/>
-          </a:ln>
-          <a:effectLst/>
-        </p:spPr>
-        <p:style>
-          <a:lnRef idx="1">
-            <a:schemeClr val="accent1"/>
-          </a:lnRef>
-          <a:fillRef idx="3">
-            <a:schemeClr val="accent1"/>
-          </a:fillRef>
-          <a:effectRef idx="2">
-            <a:schemeClr val="accent1"/>
-          </a:effectRef>
-          <a:fontRef idx="minor">
-            <a:schemeClr val="lt1"/>
-          </a:fontRef>
-        </p:style>
-        <p:txBody>
-          <a:bodyPr rtlCol="0" anchor="ctr"/>
-          <a:lstStyle/>
-          <a:p>
-            <a:pPr algn="ctr"/>
-            <a:endParaRPr/>
-          </a:p>
-        </p:txBody>
-      </p:sp>
-      <p:sp>
-        <p:nvSpPr>
-          <p:cNvPr id="4" name="TextBox 3"/>
-          <p:cNvSpPr txBox="1"/>
-          <p:nvPr/>
-        </p:nvSpPr>
-        <p:spPr>
-          <a:xfrm>
-            <a:off x="685800" y="1463040"/>
-            <a:ext cx="10881360" cy="4754880"/>
-          </a:xfrm>
-          <a:prstGeom prst="rect">
-            <a:avLst/>
-          </a:prstGeom>
-          <a:noFill/>
-        </p:spPr>
-        <p:txBody>
-          <a:bodyPr wrap="square">
-            <a:spAutoFit/>
-          </a:bodyPr>
-          <a:lstStyle/>
-          <a:p>
-            <a:pPr algn="l">
-              <a:lnSpc>
-                <a:spcPct val="105000"/>
-              </a:lnSpc>
-              <a:spcAft>
-                <a:spcPts val="200"/>
-              </a:spcAft>
-            </a:pPr>
-            <a:r>
-              <a:rPr sz="1500" b="1">
-                <a:solidFill>
-                  <a:srgbClr val="14141C"/>
-                </a:solidFill>
-                <a:latin typeface="Helvetica Neue"/>
-              </a:rPr>
-              <a:t>•  No performance data exists here</a:t>
-            </a:r>
-          </a:p>
-          <a:p>
-            <a:pPr algn="l">
-              <a:lnSpc>
-                <a:spcPct val="105000"/>
-              </a:lnSpc>
-              <a:spcAft>
-                <a:spcPts val="1000"/>
-              </a:spcAft>
-            </a:pPr>
-            <a:r>
-              <a:rPr sz="1300" b="0">
-                <a:solidFill>
-                  <a:srgbClr val="585868"/>
-                </a:solidFill>
-                <a:latin typeface="Helvetica Neue"/>
-              </a:rPr>
-              <a:t>     Nothing links a design choice to a click, a conversion or a sale. Every recommendation is a hypothesis ING could test.</a:t>
-            </a:r>
-          </a:p>
-          <a:p>
-            <a:pPr algn="l">
-              <a:lnSpc>
-                <a:spcPct val="105000"/>
-              </a:lnSpc>
-              <a:spcAft>
-                <a:spcPts val="200"/>
-              </a:spcAft>
-            </a:pPr>
-            <a:r>
-              <a:rPr sz="1500" b="1">
-                <a:solidFill>
-                  <a:srgbClr val="14141C"/>
-                </a:solidFill>
-                <a:latin typeface="Helvetica Neue"/>
-              </a:rPr>
-              <a:t>•  Small groups, by design</a:t>
-            </a:r>
-          </a:p>
-          <a:p>
-            <a:pPr algn="l">
-              <a:lnSpc>
-                <a:spcPct val="105000"/>
-              </a:lnSpc>
-              <a:spcAft>
-                <a:spcPts val="1000"/>
-              </a:spcAft>
-            </a:pPr>
-            <a:r>
-              <a:rPr sz="1300" b="0">
-                <a:solidFill>
-                  <a:srgbClr val="585868"/>
-                </a:solidFill>
-                <a:latin typeface="Helvetica Neue"/>
-              </a:rPr>
-              <a:t>     Four challengers against ten traditional banks, and most banks contribute a single page — so a group mean is an anecdote and an effect size describes separation, not significance.</a:t>
-            </a:r>
-          </a:p>
-          <a:p>
-            <a:pPr algn="l">
-              <a:lnSpc>
-                <a:spcPct val="105000"/>
-              </a:lnSpc>
-              <a:spcAft>
-                <a:spcPts val="200"/>
-              </a:spcAft>
-            </a:pPr>
-            <a:r>
-              <a:rPr sz="1500" b="1">
-                <a:solidFill>
-                  <a:srgbClr val="14141C"/>
-                </a:solidFill>
-                <a:latin typeface="Helvetica Neue"/>
-              </a:rPr>
-              <a:t>•  The judgement features are thinner than they look</a:t>
-            </a:r>
-          </a:p>
-          <a:p>
-            <a:pPr algn="l">
-              <a:lnSpc>
-                <a:spcPct val="105000"/>
-              </a:lnSpc>
-              <a:spcAft>
-                <a:spcPts val="1000"/>
-              </a:spcAft>
-            </a:pPr>
-            <a:r>
-              <a:rPr sz="1300" b="0">
-                <a:solidFill>
-                  <a:srgbClr val="585868"/>
-                </a:solidFill>
-                <a:latin typeface="Helvetica Neue"/>
-              </a:rPr>
-              <a:t>     All thirteen come from one judged sheet by one person, so single-judge bias is present and un-measured - there is no second sheet to measure it against. A finding resting on persuasion levers or accent placement is a hypothesis, not a reading.</a:t>
-            </a:r>
-          </a:p>
-          <a:p>
-            <a:pPr algn="l">
-              <a:lnSpc>
-                <a:spcPct val="105000"/>
-              </a:lnSpc>
-              <a:spcAft>
-                <a:spcPts val="200"/>
-              </a:spcAft>
-            </a:pPr>
-            <a:r>
-              <a:rPr sz="1500" b="1">
-                <a:solidFill>
-                  <a:srgbClr val="14141C"/>
-                </a:solidFill>
-                <a:latin typeface="Helvetica Neue"/>
-              </a:rPr>
-              <a:t>•  Search interest is context, and covers part of the market</a:t>
-            </a:r>
-          </a:p>
-          <a:p>
-            <a:pPr algn="l">
-              <a:lnSpc>
-                <a:spcPct val="105000"/>
-              </a:lnSpc>
-              <a:spcAft>
-                <a:spcPts val="1000"/>
-              </a:spcAft>
-            </a:pPr>
-            <a:r>
-              <a:rPr sz="1300" b="0">
-                <a:solidFill>
-                  <a:srgbClr val="585868"/>
-                </a:solidFill>
-                <a:latin typeface="Helvetica Neue"/>
-              </a:rPr>
-              <a:t>     It measures what people searched for, not what a campaign achieved, and the pages captured are today's pages.</a:t>
-            </a:r>
-          </a:p>
-          <a:p>
-            <a:pPr algn="l">
-              <a:lnSpc>
-                <a:spcPct val="105000"/>
-              </a:lnSpc>
-              <a:spcAft>
-                <a:spcPts val="200"/>
-              </a:spcAft>
-            </a:pPr>
-            <a:r>
-              <a:rPr sz="1500" b="1">
-                <a:solidFill>
-                  <a:srgbClr val="14141C"/>
-                </a:solidFill>
-                <a:latin typeface="Helvetica Neue"/>
-              </a:rPr>
-              <a:t>•  Only the open web is covered</a:t>
-            </a:r>
-          </a:p>
-          <a:p>
-            <a:pPr algn="l">
-              <a:lnSpc>
-                <a:spcPct val="105000"/>
-              </a:lnSpc>
-              <a:spcAft>
-                <a:spcPts val="1000"/>
-              </a:spcAft>
-            </a:pPr>
-            <a:r>
-              <a:rPr sz="1300" b="0">
-                <a:solidFill>
-                  <a:srgbClr val="585868"/>
-                </a:solidFill>
-                <a:latin typeface="Helvetica Neue"/>
-              </a:rPr>
-              <a:t>     Social, in-app and email banners are out of scope — and may be where a bank's real communication happens.</a:t>
-            </a:r>
-          </a:p>
-          <a:p>
-            <a:pPr algn="l">
-              <a:lnSpc>
-                <a:spcPct val="105000"/>
-              </a:lnSpc>
-              <a:spcAft>
-                <a:spcPts val="200"/>
-              </a:spcAft>
-            </a:pPr>
-            <a:endParaRPr sz="1300" b="0">
-              <a:solidFill>
-                <a:srgbClr val="585868"/>
-              </a:solidFill>
-              <a:latin typeface="Helvetica Neue"/>
-            </a:endParaRPr>
-          </a:p>
-          <a:p>
-            <a:pPr algn="l">
-              <a:lnSpc>
-                <a:spcPct val="105000"/>
-              </a:lnSpc>
-              <a:spcAft>
-                <a:spcPts val="0"/>
-              </a:spcAft>
-            </a:pPr>
-            <a:r>
-              <a:rPr sz="1250" b="0">
-                <a:solidFill>
-                  <a:srgbClr val="585868"/>
-                </a:solidFill>
-                <a:latin typeface="Helvetica Neue"/>
-              </a:rPr>
-              <a:t>outputs/limitations.md is regenerated from the dataset on every run, so these cannot quietly go stale.</a:t>
-            </a:r>
-          </a:p>
-        </p:txBody>
-      </p:sp>
-      <p:sp>
-        <p:nvSpPr>
-          <p:cNvPr id="5" name="TextBox 4"/>
-          <p:cNvSpPr txBox="1"/>
-          <p:nvPr/>
-        </p:nvSpPr>
-        <p:spPr>
-          <a:xfrm>
-            <a:off x="548640" y="6400800"/>
-            <a:ext cx="8229600" cy="274320"/>
-          </a:xfrm>
-          <a:prstGeom prst="rect">
-            <a:avLst/>
-          </a:prstGeom>
-          <a:noFill/>
-        </p:spPr>
-        <p:txBody>
-          <a:bodyPr wrap="square">
-            <a:spAutoFit/>
-          </a:bodyPr>
-          <a:lstStyle/>
-          <a:p>
-            <a:pPr algn="l">
-              <a:lnSpc>
-                <a:spcPct val="105000"/>
-              </a:lnSpc>
-              <a:spcAft>
-                <a:spcPts val="600"/>
-              </a:spcAft>
-            </a:pPr>
-            <a:r>
-              <a:rPr sz="1000" b="0">
-                <a:solidFill>
-                  <a:srgbClr val="585868"/>
-                </a:solidFill>
-                <a:latin typeface="Helvetica Neue"/>
-              </a:rPr>
-              <a:t>Banking Campaigns Comparator · ING DACI / Customer AI · September 2026</a:t>
-            </a:r>
-          </a:p>
-        </p:txBody>
-      </p:sp>
-      <p:sp>
-        <p:nvSpPr>
-          <p:cNvPr id="6" name="TextBox 5"/>
-          <p:cNvSpPr txBox="1"/>
-          <p:nvPr/>
-        </p:nvSpPr>
-        <p:spPr>
-          <a:xfrm>
-            <a:off x="11094415" y="6400800"/>
-            <a:ext cx="548640" cy="274320"/>
-          </a:xfrm>
-          <a:prstGeom prst="rect">
-            <a:avLst/>
-          </a:prstGeom>
-          <a:noFill/>
-        </p:spPr>
-        <p:txBody>
-          <a:bodyPr wrap="square">
-            <a:spAutoFit/>
-          </a:bodyPr>
-          <a:lstStyle/>
-          <a:p>
-            <a:pPr algn="r">
-              <a:lnSpc>
-                <a:spcPct val="105000"/>
-              </a:lnSpc>
-              <a:spcAft>
-                <a:spcPts val="600"/>
-              </a:spcAft>
-            </a:pPr>
-            <a:r>
-              <a:rPr sz="1000" b="0">
-                <a:solidFill>
-                  <a:srgbClr val="585868"/>
-                </a:solidFill>
-                <a:latin typeface="Helvetica Neue"/>
-              </a:rPr>
-              <a:t>19</a:t>
-            </a:r>
           </a:p>
         </p:txBody>
       </p:sp>
@@ -14366,20 +14426,62 @@
       </p:grpSpPr>
       <p:sp>
         <p:nvSpPr>
-          <p:cNvPr id="2" name="Rectangle 1"/>
+          <p:cNvPr id="2" name="TextBox 1"/>
+          <p:cNvSpPr txBox="1"/>
+          <p:nvPr/>
+        </p:nvSpPr>
+        <p:spPr>
+          <a:xfrm>
+            <a:off x="548640" y="384048"/>
+            <a:ext cx="11064240" cy="731520"/>
+          </a:xfrm>
+          <a:prstGeom prst="rect">
+            <a:avLst/>
+          </a:prstGeom>
+          <a:noFill/>
+        </p:spPr>
+        <p:txBody>
+          <a:bodyPr wrap="square">
+            <a:spAutoFit/>
+          </a:bodyPr>
+          <a:lstStyle/>
+          <a:p>
+            <a:pPr algn="l">
+              <a:lnSpc>
+                <a:spcPct val="105000"/>
+              </a:lnSpc>
+              <a:spcAft>
+                <a:spcPts val="600"/>
+              </a:spcAft>
+            </a:pPr>
+            <a:r>
+              <a:rPr sz="2800" b="1">
+                <a:solidFill>
+                  <a:srgbClr val="14141C"/>
+                </a:solidFill>
+                <a:latin typeface="Helvetica Neue"/>
+              </a:rPr>
+              <a:t>What this cannot support</a:t>
+            </a:r>
+          </a:p>
+        </p:txBody>
+      </p:sp>
+      <p:sp>
+        <p:nvSpPr>
+          <p:cNvPr id="3" name="Rectangle 2"/>
           <p:cNvSpPr/>
           <p:nvPr/>
         </p:nvSpPr>
         <p:spPr>
           <a:xfrm>
-            <a:off x="0" y="0"/>
-            <a:ext cx="12191695" cy="6858000"/>
+            <a:off x="548640" y="1115568"/>
+            <a:ext cx="1463040" cy="64008"/>
           </a:xfrm>
           <a:prstGeom prst="rect">
             <a:avLst/>
           </a:prstGeom>
           <a:solidFill>
-            <a:srgbClr val="14141C"/>
+            <a:srgbClr val="FF6200"/>
           </a:solidFill>
           <a:ln>
             <a:noFill/>
@@ -14411,59 +14513,14 @@
       </p:sp>
       <p:sp>
         <p:nvSpPr>
-          <p:cNvPr id="3" name="Rectangle 2"/>
-          <p:cNvSpPr/>
-          <p:nvPr/>
-        </p:nvSpPr>
-        <p:spPr>
-          <a:xfrm>
-            <a:off x="822960" y="2743200"/>
-            <a:ext cx="2011680" cy="91440"/>
-          </a:xfrm>
-          <a:prstGeom prst="rect">
-            <a:avLst/>
-          </a:prstGeom>
-          <a:solidFill>
-            <a:srgbClr val="FF6200"/>
-          </a:solidFill>
-          <a:ln>
-            <a:noFill/>
-          </a:ln>
-          <a:effectLst/>
-        </p:spPr>
-        <p:style>
-          <a:lnRef idx="1">
-            <a:schemeClr val="accent1"/>
-          </a:lnRef>
-          <a:fillRef idx="3">
-            <a:schemeClr val="accent1"/>
-          </a:fillRef>
-          <a:effectRef idx="2">
-            <a:schemeClr val="accent1"/>
-          </a:effectRef>
-          <a:fontRef idx="minor">
-            <a:schemeClr val="lt1"/>
-          </a:fontRef>
-        </p:style>
-        <p:txBody>
-          <a:bodyPr rtlCol="0" anchor="ctr"/>
-          <a:lstStyle/>
-          <a:p>
-            <a:pPr algn="ctr"/>
-            <a:endParaRPr/>
-          </a:p>
-        </p:txBody>
-      </p:sp>
-      <p:sp>
-        <p:nvSpPr>
           <p:cNvPr id="4" name="TextBox 3"/>
           <p:cNvSpPr txBox="1"/>
           <p:nvPr/>
         </p:nvSpPr>
         <p:spPr>
           <a:xfrm>
-            <a:off x="822960" y="1828800"/>
-            <a:ext cx="10515600" cy="914400"/>
+            <a:off x="685800" y="1463040"/>
+            <a:ext cx="10881360" cy="4754880"/>
           </a:xfrm>
           <a:prstGeom prst="rect">
             <a:avLst/>
@@ -14481,17 +14538,223 @@
                 <a:spcPct val="105000"/>
               </a:lnSpc>
               <a:spcAft>
-                <a:spcPts val="600"/>
-              </a:spcAft>
-            </a:pPr>
-            <a:r>
-              <a:rPr sz="2800" b="1">
-                <a:solidFill>
-                  <a:srgbClr val="FFFFFF"/>
-                </a:solidFill>
-                <a:latin typeface="Helvetica Neue"/>
-              </a:rPr>
-              <a:t>Measure one way. Label the trust. Claim only what the data supports.</a:t>
+                <a:spcPts val="200"/>
+              </a:spcAft>
+            </a:pPr>
+            <a:r>
+              <a:rPr sz="1500" b="1">
+                <a:solidFill>
+                  <a:srgbClr val="14141C"/>
+                </a:solidFill>
+                <a:latin typeface="Helvetica Neue"/>
+              </a:rPr>
+              <a:t>•  No performance data exists here</a:t>
+            </a:r>
+          </a:p>
+          <a:p>
+            <a:pPr algn="l">
+              <a:lnSpc>
+                <a:spcPct val="105000"/>
+              </a:lnSpc>
+              <a:spcAft>
+                <a:spcPts val="1000"/>
+              </a:spcAft>
+            </a:pPr>
+            <a:r>
+              <a:rPr sz="1300" b="0">
+                <a:solidFill>
+                  <a:srgbClr val="585868"/>
+                </a:solidFill>
+                <a:latin typeface="Helvetica Neue"/>
+              </a:rPr>
+              <a:t>     Nothing links a design choice to a click, a conversion or a sale. Every recommendation is a hypothesis ING could test.</a:t>
+            </a:r>
+          </a:p>
+          <a:p>
+            <a:pPr algn="l">
+              <a:lnSpc>
+                <a:spcPct val="105000"/>
+              </a:lnSpc>
+              <a:spcAft>
+                <a:spcPts val="200"/>
+              </a:spcAft>
+            </a:pPr>
+            <a:r>
+              <a:rPr sz="1500" b="1">
+                <a:solidFill>
+                  <a:srgbClr val="14141C"/>
+                </a:solidFill>
+                <a:latin typeface="Helvetica Neue"/>
+              </a:rPr>
+              <a:t>•  Small groups, by design</a:t>
+            </a:r>
+          </a:p>
+          <a:p>
+            <a:pPr algn="l">
+              <a:lnSpc>
+                <a:spcPct val="105000"/>
+              </a:lnSpc>
+              <a:spcAft>
+                <a:spcPts val="1000"/>
+              </a:spcAft>
+            </a:pPr>
+            <a:r>
+              <a:rPr sz="1300" b="0">
+                <a:solidFill>
+                  <a:srgbClr val="585868"/>
+                </a:solidFill>
+                <a:latin typeface="Helvetica Neue"/>
+              </a:rPr>
+              <a:t>     Four challengers against ten traditional banks, and most banks contribute a single page — so a group mean is an anecdote and an effect size describes separation, not significance.</a:t>
+            </a:r>
+          </a:p>
+          <a:p>
+            <a:pPr algn="l">
+              <a:lnSpc>
+                <a:spcPct val="105000"/>
+              </a:lnSpc>
+              <a:spcAft>
+                <a:spcPts val="200"/>
+              </a:spcAft>
+            </a:pPr>
+            <a:r>
+              <a:rPr sz="1500" b="1">
+                <a:solidFill>
+                  <a:srgbClr val="14141C"/>
+                </a:solidFill>
+                <a:latin typeface="Helvetica Neue"/>
+              </a:rPr>
+              <a:t>•  The judgement features are thinner than they look</a:t>
+            </a:r>
+          </a:p>
+          <a:p>
+            <a:pPr algn="l">
+              <a:lnSpc>
+                <a:spcPct val="105000"/>
+              </a:lnSpc>
+              <a:spcAft>
+                <a:spcPts val="1000"/>
+              </a:spcAft>
+            </a:pPr>
+            <a:r>
+              <a:rPr sz="1300" b="0">
+                <a:solidFill>
+                  <a:srgbClr val="585868"/>
+                </a:solidFill>
+                <a:latin typeface="Helvetica Neue"/>
+              </a:rPr>
+              <a:t>     All thirteen come from one judged sheet by one person, so single-judge bias is present and un-measured - there is no second sheet to measure it against. A finding resting on persuasion levers or accent placement is a hypothesis, not a reading.</a:t>
+            </a:r>
+          </a:p>
+          <a:p>
+            <a:pPr algn="l">
+              <a:lnSpc>
+                <a:spcPct val="105000"/>
+              </a:lnSpc>
+              <a:spcAft>
+                <a:spcPts val="200"/>
+              </a:spcAft>
+            </a:pPr>
+            <a:r>
+              <a:rPr sz="1500" b="1">
+                <a:solidFill>
+                  <a:srgbClr val="14141C"/>
+                </a:solidFill>
+                <a:latin typeface="Helvetica Neue"/>
+              </a:rPr>
+              <a:t>•  Search interest is context, and covers part of the market</a:t>
+            </a:r>
+          </a:p>
+          <a:p>
+            <a:pPr algn="l">
+              <a:lnSpc>
+                <a:spcPct val="105000"/>
+              </a:lnSpc>
+              <a:spcAft>
+                <a:spcPts val="1000"/>
+              </a:spcAft>
+            </a:pPr>
+            <a:r>
+              <a:rPr sz="1300" b="0">
+                <a:solidFill>
+                  <a:srgbClr val="585868"/>
+                </a:solidFill>
+                <a:latin typeface="Helvetica Neue"/>
+              </a:rPr>
+              <a:t>     It measures what people searched for, not what a campaign achieved, and the pages captured are today's pages.</a:t>
+            </a:r>
+          </a:p>
+          <a:p>
+            <a:pPr algn="l">
+              <a:lnSpc>
+                <a:spcPct val="105000"/>
+              </a:lnSpc>
+              <a:spcAft>
+                <a:spcPts val="200"/>
+              </a:spcAft>
+            </a:pPr>
+            <a:r>
+              <a:rPr sz="1500" b="1">
+                <a:solidFill>
+                  <a:srgbClr val="14141C"/>
+                </a:solidFill>
+                <a:latin typeface="Helvetica Neue"/>
+              </a:rPr>
+              <a:t>•  Only the open web is covered</a:t>
+            </a:r>
+          </a:p>
+          <a:p>
+            <a:pPr algn="l">
+              <a:lnSpc>
+                <a:spcPct val="105000"/>
+              </a:lnSpc>
+              <a:spcAft>
+                <a:spcPts val="1000"/>
+              </a:spcAft>
+            </a:pPr>
+            <a:r>
+              <a:rPr sz="1300" b="0">
+                <a:solidFill>
+                  <a:srgbClr val="585868"/>
+                </a:solidFill>
+                <a:latin typeface="Helvetica Neue"/>
+              </a:rPr>
+              <a:t>     Social, in-app and email banners are out of scope — and may be where a bank's real communication happens.</a:t>
+            </a:r>
+          </a:p>
+          <a:p>
+            <a:pPr algn="l">
+              <a:lnSpc>
+                <a:spcPct val="105000"/>
+              </a:lnSpc>
+              <a:spcAft>
+                <a:spcPts val="200"/>
+              </a:spcAft>
+            </a:pPr>
+            <a:endParaRPr sz="1300" b="0">
+              <a:solidFill>
+                <a:srgbClr val="585868"/>
+              </a:solidFill>
+              <a:latin typeface="Helvetica Neue"/>
+            </a:endParaRPr>
+          </a:p>
+          <a:p>
+            <a:pPr algn="l">
+              <a:lnSpc>
+                <a:spcPct val="105000"/>
+              </a:lnSpc>
+              <a:spcAft>
+                <a:spcPts val="0"/>
+              </a:spcAft>
+            </a:pPr>
+            <a:r>
+              <a:rPr sz="1250" b="0">
+                <a:solidFill>
+                  <a:srgbClr val="585868"/>
+                </a:solidFill>
+                <a:latin typeface="Helvetica Neue"/>
+              </a:rPr>
+              <a:t>outputs/limitations.md is regenerated from the dataset on every run, so these cannot quietly go stale.</a:t>
             </a:r>
           </a:p>
         </p:txBody>
@@ -14504,8 +14767,8 @@
         </p:nvSpPr>
         <p:spPr>
           <a:xfrm>
-            <a:off x="822960" y="3063240"/>
-            <a:ext cx="10058400" cy="1463040"/>
+            <a:off x="548640" y="6400800"/>
+            <a:ext cx="8229600" cy="274320"/>
           </a:xfrm>
           <a:prstGeom prst="rect">
             <a:avLst/>
@@ -14527,17 +14790,40 @@
               </a:spcAft>
             </a:pPr>
             <a:r>
-              <a:rPr sz="1400" b="0">
-                <a:solidFill>
-                  <a:srgbClr val="B8B8C8"/>
-                </a:solidFill>
-                <a:latin typeface="Helvetica Neue"/>
-              </a:rPr>
-              <a:t>The pipeline, the contract and the guardrails are in the repository:</a:t>
-            </a:r>
-          </a:p>
-          <a:p>
-            <a:pPr algn="l">
+              <a:rPr sz="1000" b="0">
+                <a:solidFill>
+                  <a:srgbClr val="585868"/>
+                </a:solidFill>
+                <a:latin typeface="Helvetica Neue"/>
+              </a:rPr>
+              <a:t>Banking Campaigns Comparator · ING DACI / Customer AI · September 2026</a:t>
+            </a:r>
+          </a:p>
+        </p:txBody>
+      </p:sp>
+      <p:sp>
+        <p:nvSpPr>
+          <p:cNvPr id="6" name="TextBox 5"/>
+          <p:cNvSpPr txBox="1"/>
+          <p:nvPr/>
+        </p:nvSpPr>
+        <p:spPr>
+          <a:xfrm>
+            <a:off x="11094415" y="6400800"/>
+            <a:ext cx="548640" cy="274320"/>
+          </a:xfrm>
+          <a:prstGeom prst="rect">
+            <a:avLst/>
+          </a:prstGeom>
+          <a:noFill/>
+        </p:spPr>
+        <p:txBody>
+          <a:bodyPr wrap="square">
+            <a:spAutoFit/>
+          </a:bodyPr>
+          <a:lstStyle/>
+          <a:p>
+            <a:pPr algn="r">
               <a:lnSpc>
                 <a:spcPct val="105000"/>
               </a:lnSpc>
@@ -14546,13 +14832,13 @@
               </a:spcAft>
             </a:pPr>
             <a:r>
-              <a:rPr sz="1400" b="0">
-                <a:solidFill>
-                  <a:srgbClr val="B8B8C8"/>
-                </a:solidFill>
-                <a:latin typeface="Helvetica Neue"/>
-              </a:rPr>
-              <a:t>README.md · docs/design.md · docs/pipeline.md · web/README.md · docs/decisions.md</a:t>
+              <a:rPr sz="1000" b="0">
+                <a:solidFill>
+                  <a:srgbClr val="585868"/>
+                </a:solidFill>
+                <a:latin typeface="Helvetica Neue"/>
+              </a:rPr>
+              <a:t>19</a:t>
             </a:r>
           </a:p>
         </p:txBody>
@@ -15041,7 +15327,7 @@
         </p:nvSpPr>
         <p:spPr>
           <a:xfrm>
-            <a:off x="822960" y="2331720"/>
+            <a:off x="822960" y="2743200"/>
             <a:ext cx="2011680" cy="91440"/>
           </a:xfrm>
           <a:prstGeom prst="rect">
@@ -15086,8 +15372,8 @@
         </p:nvSpPr>
         <p:spPr>
           <a:xfrm>
-            <a:off x="822960" y="1051560"/>
-            <a:ext cx="10515600" cy="1280160"/>
+            <a:off x="822960" y="1828800"/>
+            <a:ext cx="10515600" cy="914400"/>
           </a:xfrm>
           <a:prstGeom prst="rect">
             <a:avLst/>
@@ -15109,13 +15395,13 @@
               </a:spcAft>
             </a:pPr>
             <a:r>
-              <a:rPr sz="4400" b="1">
+              <a:rPr sz="2800" b="1">
                 <a:solidFill>
                   <a:srgbClr val="FFFFFF"/>
                 </a:solidFill>
                 <a:latin typeface="Helvetica Neue"/>
               </a:rPr>
-              <a:t>Backup</a:t>
+              <a:t>Measure one way. Label the trust. Claim only what the data supports.</a:t>
             </a:r>
           </a:p>
         </p:txBody>
@@ -15128,8 +15414,8 @@
         </p:nvSpPr>
         <p:spPr>
           <a:xfrm>
-            <a:off x="822960" y="2606040"/>
-            <a:ext cx="10058400" cy="1097280"/>
+            <a:off x="822960" y="3063240"/>
+            <a:ext cx="10058400" cy="1463040"/>
           </a:xfrm>
           <a:prstGeom prst="rect">
             <a:avLst/>
@@ -15151,13 +15437,13 @@
               </a:spcAft>
             </a:pPr>
             <a:r>
-              <a:rPr sz="2000" b="0">
-                <a:solidFill>
-                  <a:srgbClr val="D8D8E0"/>
-                </a:solidFill>
-                <a:latin typeface="Helvetica Neue"/>
-              </a:rPr>
-              <a:t>Slides we did not walk through — here if you ask</a:t>
+              <a:rPr sz="1400" b="0">
+                <a:solidFill>
+                  <a:srgbClr val="B8B8C8"/>
+                </a:solidFill>
+                <a:latin typeface="Helvetica Neue"/>
+              </a:rPr>
+              <a:t>The pipeline, the contract and the guardrails are in the repository:</a:t>
             </a:r>
           </a:p>
           <a:p>
@@ -15169,68 +15455,15 @@
                 <a:spcPts val="600"/>
               </a:spcAft>
             </a:pPr>
-            <a:endParaRPr sz="2000" b="0">
-              <a:solidFill>
-                <a:srgbClr val="D8D8E0"/>
-              </a:solidFill>
-              <a:latin typeface="Helvetica Neue"/>
-            </a:endParaRPr>
-          </a:p>
-        </p:txBody>
-      </p:sp>
-      <p:sp>
-        <p:nvSpPr>
-          <p:cNvPr id="6" name="TextBox 5"/>
-          <p:cNvSpPr txBox="1"/>
-          <p:nvPr/>
-        </p:nvSpPr>
-        <p:spPr>
-          <a:xfrm>
-            <a:off x="822960" y="4114800"/>
-            <a:ext cx="10058400" cy="1280160"/>
-          </a:xfrm>
-          <a:prstGeom prst="rect">
-            <a:avLst/>
-          </a:prstGeom>
-          <a:noFill/>
-        </p:spPr>
-        <p:txBody>
-          <a:bodyPr wrap="square">
-            <a:spAutoFit/>
-          </a:bodyPr>
-          <a:lstStyle/>
-          <a:p>
-            <a:pPr algn="l">
-              <a:lnSpc>
-                <a:spcPct val="105000"/>
-              </a:lnSpc>
-              <a:spcAft>
-                <a:spcPts val="400"/>
-              </a:spcAft>
-            </a:pPr>
-            <a:endParaRPr/>
-          </a:p>
-          <a:p>
-            <a:pPr algn="l">
-              <a:lnSpc>
-                <a:spcPct val="105000"/>
-              </a:lnSpc>
-              <a:spcAft>
-                <a:spcPts val="400"/>
-              </a:spcAft>
-            </a:pPr>
-            <a:endParaRPr/>
-          </a:p>
-          <a:p>
-            <a:pPr algn="l">
-              <a:lnSpc>
-                <a:spcPct val="105000"/>
-              </a:lnSpc>
-              <a:spcAft>
-                <a:spcPts val="400"/>
-              </a:spcAft>
-            </a:pPr>
-            <a:endParaRPr/>
+            <a:r>
+              <a:rPr sz="1400" b="0">
+                <a:solidFill>
+                  <a:srgbClr val="B8B8C8"/>
+                </a:solidFill>
+                <a:latin typeface="Helvetica Neue"/>
+              </a:rPr>
+              <a:t>README.md · docs/design.md · docs/pipeline.md · web/README.md · docs/decisions.md</a:t>
+            </a:r>
           </a:p>
         </p:txBody>
       </p:sp>
@@ -15261,62 +15494,20 @@
       </p:grpSpPr>
       <p:sp>
         <p:nvSpPr>
-          <p:cNvPr id="2" name="TextBox 1"/>
-          <p:cNvSpPr txBox="1"/>
-          <p:nvPr/>
-        </p:nvSpPr>
-        <p:spPr>
-          <a:xfrm>
-            <a:off x="548640" y="384048"/>
-            <a:ext cx="11064240" cy="731520"/>
-          </a:xfrm>
-          <a:prstGeom prst="rect">
-            <a:avLst/>
-          </a:prstGeom>
-          <a:noFill/>
-        </p:spPr>
-        <p:txBody>
-          <a:bodyPr wrap="square">
-            <a:spAutoFit/>
-          </a:bodyPr>
-          <a:lstStyle/>
-          <a:p>
-            <a:pPr algn="l">
-              <a:lnSpc>
-                <a:spcPct val="105000"/>
-              </a:lnSpc>
-              <a:spcAft>
-                <a:spcPts val="600"/>
-              </a:spcAft>
-            </a:pPr>
-            <a:r>
-              <a:rPr sz="2800" b="1">
-                <a:solidFill>
-                  <a:srgbClr val="14141C"/>
-                </a:solidFill>
-                <a:latin typeface="Helvetica Neue"/>
-              </a:rPr>
-              <a:t>What we chose to measure, and why</a:t>
-            </a:r>
-          </a:p>
-        </p:txBody>
-      </p:sp>
-      <p:sp>
-        <p:nvSpPr>
-          <p:cNvPr id="3" name="Rectangle 2"/>
+          <p:cNvPr id="2" name="Rectangle 1"/>
           <p:cNvSpPr/>
           <p:nvPr/>
         </p:nvSpPr>
         <p:spPr>
           <a:xfrm>
-            <a:off x="548640" y="1115568"/>
-            <a:ext cx="1463040" cy="64008"/>
+            <a:off x="0" y="0"/>
+            <a:ext cx="12191695" cy="6858000"/>
           </a:xfrm>
           <a:prstGeom prst="rect">
             <a:avLst/>
           </a:prstGeom>
           <a:solidFill>
-            <a:srgbClr val="FF6200"/>
+            <a:srgbClr val="14141C"/>
           </a:solidFill>
           <a:ln>
             <a:noFill/>
@@ -15348,14 +15539,59 @@
       </p:sp>
       <p:sp>
         <p:nvSpPr>
+          <p:cNvPr id="3" name="Rectangle 2"/>
+          <p:cNvSpPr/>
+          <p:nvPr/>
+        </p:nvSpPr>
+        <p:spPr>
+          <a:xfrm>
+            <a:off x="822960" y="2331720"/>
+            <a:ext cx="2011680" cy="91440"/>
+          </a:xfrm>
+          <a:prstGeom prst="rect">
+            <a:avLst/>
+          </a:prstGeom>
+          <a:solidFill>
+            <a:srgbClr val="FF6200"/>
+          </a:solidFill>
+          <a:ln>
+            <a:noFill/>
+          </a:ln>
+          <a:effectLst/>
+        </p:spPr>
+        <p:style>
+          <a:lnRef idx="1">
+            <a:schemeClr val="accent1"/>
+          </a:lnRef>
+          <a:fillRef idx="3">
+            <a:schemeClr val="accent1"/>
+          </a:fillRef>
+          <a:effectRef idx="2">
+            <a:schemeClr val="accent1"/>
+          </a:effectRef>
+          <a:fontRef idx="minor">
+            <a:schemeClr val="lt1"/>
+          </a:fontRef>
+        </p:style>
+        <p:txBody>
+          <a:bodyPr rtlCol="0" anchor="ctr"/>
+          <a:lstStyle/>
+          <a:p>
+            <a:pPr algn="ctr"/>
+            <a:endParaRPr/>
+          </a:p>
+        </p:txBody>
+      </p:sp>
+      <p:sp>
+        <p:nvSpPr>
           <p:cNvPr id="4" name="TextBox 3"/>
           <p:cNvSpPr txBox="1"/>
           <p:nvPr/>
         </p:nvSpPr>
         <p:spPr>
           <a:xfrm>
-            <a:off x="685800" y="1463040"/>
-            <a:ext cx="10881360" cy="4754880"/>
+            <a:off x="822960" y="1051560"/>
+            <a:ext cx="10515600" cy="1280160"/>
           </a:xfrm>
           <a:prstGeom prst="rect">
             <a:avLst/>
@@ -15373,237 +15609,89 @@
                 <a:spcPct val="105000"/>
               </a:lnSpc>
               <a:spcAft>
-                <a:spcPts val="200"/>
-              </a:spcAft>
-            </a:pPr>
-            <a:r>
-              <a:rPr sz="1500" b="1">
-                <a:solidFill>
-                  <a:srgbClr val="14141C"/>
-                </a:solidFill>
-                <a:latin typeface="Helvetica Neue"/>
-              </a:rPr>
-              <a:t>•  104 declared features, 36 actually compared</a:t>
-            </a:r>
-          </a:p>
-          <a:p>
-            <a:pPr algn="l">
-              <a:lnSpc>
-                <a:spcPct val="105000"/>
-              </a:lnSpc>
-              <a:spcAft>
-                <a:spcPts val="1000"/>
-              </a:spcAft>
-            </a:pPr>
-            <a:r>
-              <a:rPr sz="1300" b="0">
-                <a:solidFill>
-                  <a:srgbClr val="585868"/>
-                </a:solidFill>
-                <a:latin typeface="Helvetica Neue"/>
-              </a:rPr>
-              <a:t>     Nothing is hidden in that reduction — the run prints it: 18 provenance fields that identify a page rather than describe a campaign, 4 free-text identifiers no two pages share, 8 within_language features that stop being comparable once the set spans three languages, 27 categorical or list features a euclidean distance cannot take raw, 2 missing on at least one bank, 8 identical everywhere, and 1 withdrawn because its capture is missing what it counts.</a:t>
-            </a:r>
-          </a:p>
-          <a:p>
-            <a:pPr algn="l">
-              <a:lnSpc>
-                <a:spcPct val="105000"/>
-              </a:lnSpc>
-              <a:spcAft>
-                <a:spcPts val="200"/>
-              </a:spcAft>
-            </a:pPr>
-            <a:r>
-              <a:rPr sz="1500" b="1">
-                <a:solidFill>
-                  <a:srgbClr val="14141C"/>
-                </a:solidFill>
-                <a:latin typeface="Helvetica Neue"/>
-              </a:rPr>
-              <a:t>•  51 pages collected and scored, 18 compared</a:t>
-            </a:r>
-          </a:p>
-          <a:p>
-            <a:pPr algn="l">
-              <a:lnSpc>
-                <a:spcPct val="105000"/>
-              </a:lnSpc>
-              <a:spcAft>
-                <a:spcPts val="1000"/>
-              </a:spcAft>
-            </a:pPr>
-            <a:r>
-              <a:rPr sz="1300" b="0">
-                <a:solidFill>
-                  <a:srgbClr val="585868"/>
-                </a:solidFill>
-                <a:latin typeface="Helvetica Neue"/>
-              </a:rPr>
-              <a:t>     One product family at a time (DR-04). A mortgage page and a current-account page differ because the products differ, not because the banks communicate differently, so pooling them would confound every result with the product. The other 33 pages are scored and in the dataset, ready for the same comparison on savings or on mortgages.</a:t>
-            </a:r>
-          </a:p>
-          <a:p>
-            <a:pPr algn="l">
-              <a:lnSpc>
-                <a:spcPct val="105000"/>
-              </a:lnSpc>
-              <a:spcAft>
-                <a:spcPts val="200"/>
-              </a:spcAft>
-            </a:pPr>
-            <a:r>
-              <a:rPr sz="1500" b="1">
-                <a:solidFill>
-                  <a:srgbClr val="14141C"/>
-                </a:solidFill>
-                <a:latin typeface="Helvetica Neue"/>
-              </a:rPr>
-              <a:t>•  14 Belgian retail banks, both sides of the market</a:t>
-            </a:r>
-          </a:p>
-          <a:p>
-            <a:pPr algn="l">
-              <a:lnSpc>
-                <a:spcPct val="105000"/>
-              </a:lnSpc>
-              <a:spcAft>
-                <a:spcPts val="1000"/>
-              </a:spcAft>
-            </a:pPr>
-            <a:r>
-              <a:rPr sz="1300" b="0">
-                <a:solidFill>
-                  <a:srgbClr val="585868"/>
-                </a:solidFill>
-                <a:latin typeface="Helvetica Neue"/>
-              </a:rPr>
-              <a:t>     Ten incumbents and four challengers, so the traditional↔challenger axis has banks on both sides of it. Belgian market only, confirmed with the client — ING.nl is out of scope, and so is professional and business banking.</a:t>
-            </a:r>
-          </a:p>
-          <a:p>
-            <a:pPr algn="l">
-              <a:lnSpc>
-                <a:spcPct val="105000"/>
-              </a:lnSpc>
-              <a:spcAft>
-                <a:spcPts val="200"/>
-              </a:spcAft>
-            </a:pPr>
-            <a:r>
-              <a:rPr sz="1500" b="1">
-                <a:solidFill>
-                  <a:srgbClr val="14141C"/>
-                </a:solidFill>
-                <a:latin typeface="Helvetica Neue"/>
-              </a:rPr>
-              <a:t>•  The open web, and only the open web</a:t>
-            </a:r>
-          </a:p>
-          <a:p>
-            <a:pPr algn="l">
-              <a:lnSpc>
-                <a:spcPct val="105000"/>
-              </a:lnSpc>
-              <a:spcAft>
-                <a:spcPts val="1000"/>
-              </a:spcAft>
-            </a:pPr>
-            <a:r>
-              <a:rPr sz="1300" b="0">
-                <a:solidFill>
-                  <a:srgbClr val="585868"/>
-                </a:solidFill>
-                <a:latin typeface="Helvetica Neue"/>
-              </a:rPr>
-              <a:t>     Public campaign pages, fetched once, robots.txt checked before every request. Social, in-app and email are out of scope and may be where a bank's real communication happens — that is a limit of this study, not of the market.</a:t>
-            </a:r>
-          </a:p>
-          <a:p>
-            <a:pPr algn="l">
-              <a:lnSpc>
-                <a:spcPct val="105000"/>
-              </a:lnSpc>
-              <a:spcAft>
-                <a:spcPts val="200"/>
-              </a:spcAft>
-            </a:pPr>
-            <a:r>
-              <a:rPr sz="1500" b="1">
-                <a:solidFill>
-                  <a:srgbClr val="14141C"/>
-                </a:solidFill>
-                <a:latin typeface="Helvetica Neue"/>
-              </a:rPr>
-              <a:t>•  Description, never causation</a:t>
-            </a:r>
-          </a:p>
-          <a:p>
-            <a:pPr algn="l">
-              <a:lnSpc>
-                <a:spcPct val="105000"/>
-              </a:lnSpc>
-              <a:spcAft>
-                <a:spcPts val="1000"/>
-              </a:spcAft>
-            </a:pPr>
-            <a:r>
-              <a:rPr sz="1300" b="0">
-                <a:solidFill>
-                  <a:srgbClr val="585868"/>
-                </a:solidFill>
-                <a:latin typeface="Helvetica Neue"/>
-              </a:rPr>
-              <a:t>     No click, conversion or performance data exists in this project, so nothing here says a design choice produced a result. Every finding is a difference, and every recommendation a hypothesis ING could test.</a:t>
-            </a:r>
-          </a:p>
-          <a:p>
-            <a:pPr algn="l">
-              <a:lnSpc>
-                <a:spcPct val="105000"/>
-              </a:lnSpc>
-              <a:spcAft>
-                <a:spcPts val="200"/>
-              </a:spcAft>
-            </a:pPr>
-            <a:endParaRPr sz="1300" b="0">
+                <a:spcPts val="600"/>
+              </a:spcAft>
+            </a:pPr>
+            <a:r>
+              <a:rPr sz="4400" b="1">
+                <a:solidFill>
+                  <a:srgbClr val="FFFFFF"/>
+                </a:solidFill>
+                <a:latin typeface="Helvetica Neue"/>
+              </a:rPr>
+              <a:t>Backup</a:t>
+            </a:r>
+          </a:p>
+        </p:txBody>
+      </p:sp>
+      <p:sp>
+        <p:nvSpPr>
+          <p:cNvPr id="5" name="TextBox 4"/>
+          <p:cNvSpPr txBox="1"/>
+          <p:nvPr/>
+        </p:nvSpPr>
+        <p:spPr>
+          <a:xfrm>
+            <a:off x="822960" y="2606040"/>
+            <a:ext cx="10058400" cy="1097280"/>
+          </a:xfrm>
+          <a:prstGeom prst="rect">
+            <a:avLst/>
+          </a:prstGeom>
+          <a:noFill/>
+        </p:spPr>
+        <p:txBody>
+          <a:bodyPr wrap="square">
+            <a:spAutoFit/>
+          </a:bodyPr>
+          <a:lstStyle/>
+          <a:p>
+            <a:pPr algn="l">
+              <a:lnSpc>
+                <a:spcPct val="105000"/>
+              </a:lnSpc>
+              <a:spcAft>
+                <a:spcPts val="600"/>
+              </a:spcAft>
+            </a:pPr>
+            <a:r>
+              <a:rPr sz="2000" b="0">
+                <a:solidFill>
+                  <a:srgbClr val="D8D8E0"/>
+                </a:solidFill>
+                <a:latin typeface="Helvetica Neue"/>
+              </a:rPr>
+              <a:t>Slides we did not walk through — here if you ask</a:t>
+            </a:r>
+          </a:p>
+          <a:p>
+            <a:pPr algn="l">
+              <a:lnSpc>
+                <a:spcPct val="105000"/>
+              </a:lnSpc>
+              <a:spcAft>
+                <a:spcPts val="600"/>
+              </a:spcAft>
+            </a:pPr>
+            <a:endParaRPr sz="2000" b="0">
               <a:solidFill>
-                <a:srgbClr val="585868"/>
+                <a:srgbClr val="D8D8E0"/>
               </a:solidFill>
               <a:latin typeface="Helvetica Neue"/>
             </a:endParaRPr>
           </a:p>
-          <a:p>
-            <a:pPr algn="l">
-              <a:lnSpc>
-                <a:spcPct val="105000"/>
-              </a:lnSpc>
-              <a:spcAft>
-                <a:spcPts val="0"/>
-              </a:spcAft>
-            </a:pPr>
-            <a:r>
-              <a:rPr sz="1250" b="0">
-                <a:solidFill>
-                  <a:srgbClr val="585868"/>
-                </a:solidFill>
-                <a:latin typeface="Helvetica Neue"/>
-              </a:rPr>
-              <a:t>Scope is a decision, not a leftover: each line above is a thing we chose not to measure, and why.</a:t>
-            </a:r>
-          </a:p>
-        </p:txBody>
-      </p:sp>
-      <p:sp>
-        <p:nvSpPr>
-          <p:cNvPr id="5" name="TextBox 4"/>
+        </p:txBody>
+      </p:sp>
+      <p:sp>
+        <p:nvSpPr>
+          <p:cNvPr id="6" name="TextBox 5"/>
           <p:cNvSpPr txBox="1"/>
           <p:nvPr/>
         </p:nvSpPr>
         <p:spPr>
           <a:xfrm>
-            <a:off x="548640" y="6400800"/>
-            <a:ext cx="8229600" cy="274320"/>
+            <a:off x="822960" y="4114800"/>
+            <a:ext cx="10058400" cy="1280160"/>
           </a:xfrm>
           <a:prstGeom prst="rect">
             <a:avLst/>
@@ -15621,60 +15709,32 @@
                 <a:spcPct val="105000"/>
               </a:lnSpc>
               <a:spcAft>
-                <a:spcPts val="600"/>
-              </a:spcAft>
-            </a:pPr>
-            <a:r>
-              <a:rPr sz="1000" b="0">
-                <a:solidFill>
-                  <a:srgbClr val="585868"/>
-                </a:solidFill>
-                <a:latin typeface="Helvetica Neue"/>
-              </a:rPr>
-              <a:t>Banking Campaigns Comparator · ING DACI / Customer AI · September 2026</a:t>
-            </a:r>
-          </a:p>
-        </p:txBody>
-      </p:sp>
-      <p:sp>
-        <p:nvSpPr>
-          <p:cNvPr id="6" name="TextBox 5"/>
-          <p:cNvSpPr txBox="1"/>
-          <p:nvPr/>
-        </p:nvSpPr>
-        <p:spPr>
-          <a:xfrm>
-            <a:off x="11094415" y="6400800"/>
-            <a:ext cx="548640" cy="274320"/>
-          </a:xfrm>
-          <a:prstGeom prst="rect">
-            <a:avLst/>
-          </a:prstGeom>
-          <a:noFill/>
-        </p:spPr>
-        <p:txBody>
-          <a:bodyPr wrap="square">
-            <a:spAutoFit/>
-          </a:bodyPr>
-          <a:lstStyle/>
-          <a:p>
-            <a:pPr algn="r">
-              <a:lnSpc>
-                <a:spcPct val="105000"/>
-              </a:lnSpc>
-              <a:spcAft>
-                <a:spcPts val="600"/>
-              </a:spcAft>
-            </a:pPr>
-            <a:r>
-              <a:rPr sz="1000" b="0">
-                <a:solidFill>
-                  <a:srgbClr val="585868"/>
-                </a:solidFill>
-                <a:latin typeface="Helvetica Neue"/>
-              </a:rPr>
-              <a:t>22</a:t>
-            </a:r>
+                <a:spcPts val="400"/>
+              </a:spcAft>
+            </a:pPr>
+            <a:endParaRPr/>
+          </a:p>
+          <a:p>
+            <a:pPr algn="l">
+              <a:lnSpc>
+                <a:spcPct val="105000"/>
+              </a:lnSpc>
+              <a:spcAft>
+                <a:spcPts val="400"/>
+              </a:spcAft>
+            </a:pPr>
+            <a:endParaRPr/>
+          </a:p>
+          <a:p>
+            <a:pPr algn="l">
+              <a:lnSpc>
+                <a:spcPct val="105000"/>
+              </a:lnSpc>
+              <a:spcAft>
+                <a:spcPts val="400"/>
+              </a:spcAft>
+            </a:pPr>
+            <a:endParaRPr/>
           </a:p>
         </p:txBody>
       </p:sp>
@@ -15711,8 +15771,8 @@
         </p:nvSpPr>
         <p:spPr>
           <a:xfrm>
-            <a:off x="548640" y="320040"/>
-            <a:ext cx="11064240" cy="640080"/>
+            <a:off x="548640" y="384048"/>
+            <a:ext cx="11064240" cy="731520"/>
           </a:xfrm>
           <a:prstGeom prst="rect">
             <a:avLst/>
@@ -15734,13 +15794,13 @@
               </a:spcAft>
             </a:pPr>
             <a:r>
-              <a:rPr sz="2400" b="1">
+              <a:rPr sz="2800" b="1">
                 <a:solidFill>
                   <a:srgbClr val="14141C"/>
                 </a:solidFill>
                 <a:latin typeface="Helvetica Neue"/>
               </a:rPr>
-              <a:t>Technical architecture</a:t>
+              <a:t>What we chose to measure, and why</a:t>
             </a:r>
           </a:p>
         </p:txBody>
@@ -15753,8 +15813,8 @@
         </p:nvSpPr>
         <p:spPr>
           <a:xfrm>
-            <a:off x="548640" y="960120"/>
-            <a:ext cx="1463040" cy="54864"/>
+            <a:off x="548640" y="1115568"/>
+            <a:ext cx="1463040" cy="64008"/>
           </a:xfrm>
           <a:prstGeom prst="rect">
             <a:avLst/>
@@ -15790,40 +15850,16 @@
           </a:p>
         </p:txBody>
       </p:sp>
-      <p:pic>
-        <p:nvPicPr>
-          <p:cNvPr id="4" name="Picture 3" descr="diagram_architecture.png"/>
-          <p:cNvPicPr>
-            <a:picLocks noChangeAspect="1"/>
-          </p:cNvPicPr>
-          <p:nvPr/>
-        </p:nvPicPr>
-        <p:blipFill>
-          <a:blip r:embed="rId2"/>
-          <a:stretch>
-            <a:fillRect/>
-          </a:stretch>
-        </p:blipFill>
-        <p:spPr>
-          <a:xfrm>
-            <a:off x="1828647" y="1325880"/>
-            <a:ext cx="8534400" cy="4800600"/>
-          </a:xfrm>
-          <a:prstGeom prst="rect">
-            <a:avLst/>
-          </a:prstGeom>
-        </p:spPr>
-      </p:pic>
-      <p:sp>
-        <p:nvSpPr>
-          <p:cNvPr id="5" name="TextBox 4"/>
+      <p:sp>
+        <p:nvSpPr>
+          <p:cNvPr id="4" name="TextBox 3"/>
           <p:cNvSpPr txBox="1"/>
           <p:nvPr/>
         </p:nvSpPr>
         <p:spPr>
           <a:xfrm>
-            <a:off x="685800" y="6236208"/>
-            <a:ext cx="10881360" cy="457200"/>
+            <a:off x="685800" y="1463040"/>
+            <a:ext cx="10881360" cy="4754880"/>
           </a:xfrm>
           <a:prstGeom prst="rect">
             <a:avLst/>
@@ -15841,24 +15877,230 @@
                 <a:spcPct val="105000"/>
               </a:lnSpc>
               <a:spcAft>
-                <a:spcPts val="600"/>
-              </a:spcAft>
-            </a:pPr>
-            <a:r>
-              <a:rPr sz="1200" b="0">
+                <a:spcPts val="200"/>
+              </a:spcAft>
+            </a:pPr>
+            <a:r>
+              <a:rPr sz="1500" b="1">
+                <a:solidFill>
+                  <a:srgbClr val="14141C"/>
+                </a:solidFill>
+                <a:latin typeface="Helvetica Neue"/>
+              </a:rPr>
+              <a:t>•  104 declared features, 36 actually compared</a:t>
+            </a:r>
+          </a:p>
+          <a:p>
+            <a:pPr algn="l">
+              <a:lnSpc>
+                <a:spcPct val="105000"/>
+              </a:lnSpc>
+              <a:spcAft>
+                <a:spcPts val="1000"/>
+              </a:spcAft>
+            </a:pPr>
+            <a:r>
+              <a:rPr sz="1300" b="0">
                 <a:solidFill>
                   <a:srgbClr val="585868"/>
                 </a:solidFill>
                 <a:latin typeface="Helvetica Neue"/>
               </a:rPr>
-              <a:t>A library with no I/O assumptions, thin CLI wrappers, and two callers — so no figure has a second definition.</a:t>
-            </a:r>
-          </a:p>
-        </p:txBody>
-      </p:sp>
-      <p:sp>
-        <p:nvSpPr>
-          <p:cNvPr id="6" name="TextBox 5"/>
+              <a:t>     Nothing is hidden in that reduction — the run prints it: 18 provenance fields that identify a page rather than describe a campaign, 4 free-text identifiers no two pages share, 8 within_language features that stop being comparable once the set spans three languages, 27 categorical or list features a euclidean distance cannot take raw, 2 missing on at least one bank, 8 identical everywhere, and 1 withdrawn because its capture is missing what it counts.</a:t>
+            </a:r>
+          </a:p>
+          <a:p>
+            <a:pPr algn="l">
+              <a:lnSpc>
+                <a:spcPct val="105000"/>
+              </a:lnSpc>
+              <a:spcAft>
+                <a:spcPts val="200"/>
+              </a:spcAft>
+            </a:pPr>
+            <a:r>
+              <a:rPr sz="1500" b="1">
+                <a:solidFill>
+                  <a:srgbClr val="14141C"/>
+                </a:solidFill>
+                <a:latin typeface="Helvetica Neue"/>
+              </a:rPr>
+              <a:t>•  51 pages collected and scored, 18 compared</a:t>
+            </a:r>
+          </a:p>
+          <a:p>
+            <a:pPr algn="l">
+              <a:lnSpc>
+                <a:spcPct val="105000"/>
+              </a:lnSpc>
+              <a:spcAft>
+                <a:spcPts val="1000"/>
+              </a:spcAft>
+            </a:pPr>
+            <a:r>
+              <a:rPr sz="1300" b="0">
+                <a:solidFill>
+                  <a:srgbClr val="585868"/>
+                </a:solidFill>
+                <a:latin typeface="Helvetica Neue"/>
+              </a:rPr>
+              <a:t>     One product family at a time (DR-04). A mortgage page and a current-account page differ because the products differ, not because the banks communicate differently, so pooling them would confound every result with the product. The other 33 pages are scored and in the dataset, ready for the same comparison on savings or on mortgages.</a:t>
+            </a:r>
+          </a:p>
+          <a:p>
+            <a:pPr algn="l">
+              <a:lnSpc>
+                <a:spcPct val="105000"/>
+              </a:lnSpc>
+              <a:spcAft>
+                <a:spcPts val="200"/>
+              </a:spcAft>
+            </a:pPr>
+            <a:r>
+              <a:rPr sz="1500" b="1">
+                <a:solidFill>
+                  <a:srgbClr val="14141C"/>
+                </a:solidFill>
+                <a:latin typeface="Helvetica Neue"/>
+              </a:rPr>
+              <a:t>•  14 Belgian retail banks, both sides of the market</a:t>
+            </a:r>
+          </a:p>
+          <a:p>
+            <a:pPr algn="l">
+              <a:lnSpc>
+                <a:spcPct val="105000"/>
+              </a:lnSpc>
+              <a:spcAft>
+                <a:spcPts val="1000"/>
+              </a:spcAft>
+            </a:pPr>
+            <a:r>
+              <a:rPr sz="1300" b="0">
+                <a:solidFill>
+                  <a:srgbClr val="585868"/>
+                </a:solidFill>
+                <a:latin typeface="Helvetica Neue"/>
+              </a:rPr>
+              <a:t>     Ten incumbents and four challengers, so the traditional↔challenger axis has banks on both sides of it. Belgian market only, confirmed with the client — ING.nl is out of scope, and so is professional and business banking.</a:t>
+            </a:r>
+          </a:p>
+          <a:p>
+            <a:pPr algn="l">
+              <a:lnSpc>
+                <a:spcPct val="105000"/>
+              </a:lnSpc>
+              <a:spcAft>
+                <a:spcPts val="200"/>
+              </a:spcAft>
+            </a:pPr>
+            <a:r>
+              <a:rPr sz="1500" b="1">
+                <a:solidFill>
+                  <a:srgbClr val="14141C"/>
+                </a:solidFill>
+                <a:latin typeface="Helvetica Neue"/>
+              </a:rPr>
+              <a:t>•  The open web, and only the open web</a:t>
+            </a:r>
+          </a:p>
+          <a:p>
+            <a:pPr algn="l">
+              <a:lnSpc>
+                <a:spcPct val="105000"/>
+              </a:lnSpc>
+              <a:spcAft>
+                <a:spcPts val="1000"/>
+              </a:spcAft>
+            </a:pPr>
+            <a:r>
+              <a:rPr sz="1300" b="0">
+                <a:solidFill>
+                  <a:srgbClr val="585868"/>
+                </a:solidFill>
+                <a:latin typeface="Helvetica Neue"/>
+              </a:rPr>
+              <a:t>     Public campaign pages, fetched once, robots.txt checked before every request. Social, in-app and email are out of scope and may be where a bank's real communication happens — that is a limit of this study, not of the market.</a:t>
+            </a:r>
+          </a:p>
+          <a:p>
+            <a:pPr algn="l">
+              <a:lnSpc>
+                <a:spcPct val="105000"/>
+              </a:lnSpc>
+              <a:spcAft>
+                <a:spcPts val="200"/>
+              </a:spcAft>
+            </a:pPr>
+            <a:r>
+              <a:rPr sz="1500" b="1">
+                <a:solidFill>
+                  <a:srgbClr val="14141C"/>
+                </a:solidFill>
+                <a:latin typeface="Helvetica Neue"/>
+              </a:rPr>
+              <a:t>•  Description, never causation</a:t>
+            </a:r>
+          </a:p>
+          <a:p>
+            <a:pPr algn="l">
+              <a:lnSpc>
+                <a:spcPct val="105000"/>
+              </a:lnSpc>
+              <a:spcAft>
+                <a:spcPts val="1000"/>
+              </a:spcAft>
+            </a:pPr>
+            <a:r>
+              <a:rPr sz="1300" b="0">
+                <a:solidFill>
+                  <a:srgbClr val="585868"/>
+                </a:solidFill>
+                <a:latin typeface="Helvetica Neue"/>
+              </a:rPr>
+              <a:t>     No click, conversion or performance data exists in this project, so nothing here says a design choice produced a result. Every finding is a difference, and every recommendation a hypothesis ING could test.</a:t>
+            </a:r>
+          </a:p>
+          <a:p>
+            <a:pPr algn="l">
+              <a:lnSpc>
+                <a:spcPct val="105000"/>
+              </a:lnSpc>
+              <a:spcAft>
+                <a:spcPts val="200"/>
+              </a:spcAft>
+            </a:pPr>
+            <a:endParaRPr sz="1300" b="0">
+              <a:solidFill>
+                <a:srgbClr val="585868"/>
+              </a:solidFill>
+              <a:latin typeface="Helvetica Neue"/>
+            </a:endParaRPr>
+          </a:p>
+          <a:p>
+            <a:pPr algn="l">
+              <a:lnSpc>
+                <a:spcPct val="105000"/>
+              </a:lnSpc>
+              <a:spcAft>
+                <a:spcPts val="0"/>
+              </a:spcAft>
+            </a:pPr>
+            <a:r>
+              <a:rPr sz="1250" b="0">
+                <a:solidFill>
+                  <a:srgbClr val="585868"/>
+                </a:solidFill>
+                <a:latin typeface="Helvetica Neue"/>
+              </a:rPr>
+              <a:t>Scope is a decision, not a leftover: each line above is a thing we chose not to measure, and why.</a:t>
+            </a:r>
+          </a:p>
+        </p:txBody>
+      </p:sp>
+      <p:sp>
+        <p:nvSpPr>
+          <p:cNvPr id="5" name="TextBox 4"/>
           <p:cNvSpPr txBox="1"/>
           <p:nvPr/>
         </p:nvSpPr>
@@ -15900,7 +16142,7 @@
       </p:sp>
       <p:sp>
         <p:nvSpPr>
-          <p:cNvPr id="7" name="TextBox 6"/>
+          <p:cNvPr id="6" name="TextBox 5"/>
           <p:cNvSpPr txBox="1"/>
           <p:nvPr/>
         </p:nvSpPr>
@@ -15935,7 +16177,7 @@
                 </a:solidFill>
                 <a:latin typeface="Helvetica Neue"/>
               </a:rPr>
-              <a:t>23</a:t>
+              <a:t>22</a:t>
             </a:r>
           </a:p>
         </p:txBody>
@@ -16002,7 +16244,7 @@
                 </a:solidFill>
                 <a:latin typeface="Helvetica Neue"/>
               </a:rPr>
-              <a:t>How a number earns trust</a:t>
+              <a:t>Technical architecture</a:t>
             </a:r>
           </a:p>
         </p:txBody>
@@ -16054,7 +16296,7 @@
       </p:sp>
       <p:pic>
         <p:nvPicPr>
-          <p:cNvPr id="4" name="Picture 3" descr="diagram_trust.png"/>
+          <p:cNvPr id="4" name="Picture 3" descr="diagram_architecture.png"/>
           <p:cNvPicPr>
             <a:picLocks noChangeAspect="1"/>
           </p:cNvPicPr>
@@ -16113,7 +16355,7 @@
                 </a:solidFill>
                 <a:latin typeface="Helvetica Neue"/>
               </a:rPr>
-              <a:t>Each feature declares how it was produced, and that label travels all the way to the screen.</a:t>
+              <a:t>A library with no I/O assumptions, thin CLI wrappers, and two callers — so no figure has a second definition.</a:t>
             </a:r>
           </a:p>
         </p:txBody>
@@ -16197,7 +16439,7 @@
                 </a:solidFill>
                 <a:latin typeface="Helvetica Neue"/>
               </a:rPr>
-              <a:t>24</a:t>
+              <a:t>23</a:t>
             </a:r>
           </a:p>
         </p:txBody>
@@ -16235,8 +16477,8 @@
         </p:nvSpPr>
         <p:spPr>
           <a:xfrm>
-            <a:off x="548640" y="384048"/>
-            <a:ext cx="11064240" cy="731520"/>
+            <a:off x="548640" y="320040"/>
+            <a:ext cx="11064240" cy="640080"/>
           </a:xfrm>
           <a:prstGeom prst="rect">
             <a:avLst/>
@@ -16258,13 +16500,13 @@
               </a:spcAft>
             </a:pPr>
             <a:r>
-              <a:rPr sz="2800" b="1">
+              <a:rPr sz="2400" b="1">
                 <a:solidFill>
                   <a:srgbClr val="14141C"/>
                 </a:solidFill>
                 <a:latin typeface="Helvetica Neue"/>
               </a:rPr>
-              <a:t>The feature dictionary is the contract</a:t>
+              <a:t>How a number earns trust</a:t>
             </a:r>
           </a:p>
         </p:txBody>
@@ -16277,8 +16519,8 @@
         </p:nvSpPr>
         <p:spPr>
           <a:xfrm>
-            <a:off x="548640" y="1115568"/>
-            <a:ext cx="1463040" cy="64008"/>
+            <a:off x="548640" y="960120"/>
+            <a:ext cx="1463040" cy="54864"/>
           </a:xfrm>
           <a:prstGeom prst="rect">
             <a:avLst/>
@@ -16314,16 +16556,40 @@
           </a:p>
         </p:txBody>
       </p:sp>
-      <p:sp>
-        <p:nvSpPr>
-          <p:cNvPr id="4" name="TextBox 3"/>
+      <p:pic>
+        <p:nvPicPr>
+          <p:cNvPr id="4" name="Picture 3" descr="diagram_trust.png"/>
+          <p:cNvPicPr>
+            <a:picLocks noChangeAspect="1"/>
+          </p:cNvPicPr>
+          <p:nvPr/>
+        </p:nvPicPr>
+        <p:blipFill>
+          <a:blip r:embed="rId2"/>
+          <a:stretch>
+            <a:fillRect/>
+          </a:stretch>
+        </p:blipFill>
+        <p:spPr>
+          <a:xfrm>
+            <a:off x="1828647" y="1325880"/>
+            <a:ext cx="8534400" cy="4800600"/>
+          </a:xfrm>
+          <a:prstGeom prst="rect">
+            <a:avLst/>
+          </a:prstGeom>
+        </p:spPr>
+      </p:pic>
+      <p:sp>
+        <p:nvSpPr>
+          <p:cNvPr id="5" name="TextBox 4"/>
           <p:cNvSpPr txBox="1"/>
           <p:nvPr/>
         </p:nvSpPr>
         <p:spPr>
           <a:xfrm>
-            <a:off x="685800" y="1463040"/>
-            <a:ext cx="10881360" cy="4754880"/>
+            <a:off x="685800" y="6236208"/>
+            <a:ext cx="10881360" cy="457200"/>
           </a:xfrm>
           <a:prstGeom prst="rect">
             <a:avLst/>
@@ -16341,195 +16607,24 @@
                 <a:spcPct val="105000"/>
               </a:lnSpc>
               <a:spcAft>
-                <a:spcPts val="200"/>
-              </a:spcAft>
-            </a:pPr>
-            <a:r>
-              <a:rPr sz="1500" b="1">
-                <a:solidFill>
-                  <a:srgbClr val="14141C"/>
-                </a:solidFill>
-                <a:latin typeface="Helvetica Neue"/>
-              </a:rPr>
-              <a:t>•  104 features, each declaring three things</a:t>
-            </a:r>
-          </a:p>
-          <a:p>
-            <a:pPr algn="l">
-              <a:lnSpc>
-                <a:spcPct val="105000"/>
-              </a:lnSpc>
-              <a:spcAft>
-                <a:spcPts val="1000"/>
-              </a:spcAft>
-            </a:pPr>
-            <a:r>
-              <a:rPr sz="1300" b="0">
+                <a:spcPts val="600"/>
+              </a:spcAft>
+            </a:pPr>
+            <a:r>
+              <a:rPr sz="1200" b="0">
                 <a:solidFill>
                   <a:srgbClr val="585868"/>
                 </a:solidFill>
                 <a:latin typeface="Helvetica Neue"/>
               </a:rPr>
-              <a:t>     how it was extracted (automatic / rubric / model-assisted / derived), how it may be compared, and whether it is core or extended.</a:t>
-            </a:r>
-          </a:p>
-          <a:p>
-            <a:pPr algn="l">
-              <a:lnSpc>
-                <a:spcPct val="105000"/>
-              </a:lnSpc>
-              <a:spcAft>
-                <a:spcPts val="200"/>
-              </a:spcAft>
-            </a:pPr>
-            <a:r>
-              <a:rPr sz="1500" b="1">
-                <a:solidFill>
-                  <a:srgbClr val="14141C"/>
-                </a:solidFill>
-                <a:latin typeface="Helvetica Neue"/>
-              </a:rPr>
-              <a:t>•  Everything else is derived from it</a:t>
-            </a:r>
-          </a:p>
-          <a:p>
-            <a:pPr algn="l">
-              <a:lnSpc>
-                <a:spcPct val="105000"/>
-              </a:lnSpc>
-              <a:spcAft>
-                <a:spcPts val="1000"/>
-              </a:spcAft>
-            </a:pPr>
-            <a:r>
-              <a:rPr sz="1300" b="0">
-                <a:solidFill>
-                  <a:srgbClr val="585868"/>
-                </a:solidFill>
-                <a:latin typeface="Helvetica Neue"/>
-              </a:rPr>
-              <a:t>     The dataset schema, the validator and the published feature dictionary are generated from the same YAML, so they cannot drift apart.</a:t>
-            </a:r>
-          </a:p>
-          <a:p>
-            <a:pPr algn="l">
-              <a:lnSpc>
-                <a:spcPct val="105000"/>
-              </a:lnSpc>
-              <a:spcAft>
-                <a:spcPts val="200"/>
-              </a:spcAft>
-            </a:pPr>
-            <a:r>
-              <a:rPr sz="1500" b="1">
-                <a:solidFill>
-                  <a:srgbClr val="14141C"/>
-                </a:solidFill>
-                <a:latin typeface="Helvetica Neue"/>
-              </a:rPr>
-              <a:t>•  The freeze rule: add, never rename</a:t>
-            </a:r>
-          </a:p>
-          <a:p>
-            <a:pPr algn="l">
-              <a:lnSpc>
-                <a:spcPct val="105000"/>
-              </a:lnSpc>
-              <a:spcAft>
-                <a:spcPts val="1000"/>
-              </a:spcAft>
-            </a:pPr>
-            <a:r>
-              <a:rPr sz="1300" b="0">
-                <a:solidFill>
-                  <a:srgbClr val="585868"/>
-                </a:solidFill>
-                <a:latin typeface="Helvetica Neue"/>
-              </a:rPr>
-              <a:t>     After the Day 2 freeze, columns may be added; renames and removals need all three of us, because analysis code depends on them.</a:t>
-            </a:r>
-          </a:p>
-          <a:p>
-            <a:pPr algn="l">
-              <a:lnSpc>
-                <a:spcPct val="105000"/>
-              </a:lnSpc>
-              <a:spcAft>
-                <a:spcPts val="200"/>
-              </a:spcAft>
-            </a:pPr>
-            <a:r>
-              <a:rPr sz="1500" b="1">
-                <a:solidFill>
-                  <a:srgbClr val="14141C"/>
-                </a:solidFill>
-                <a:latin typeface="Helvetica Neue"/>
-              </a:rPr>
-              <a:t>•  Two checks, deliberately different</a:t>
-            </a:r>
-          </a:p>
-          <a:p>
-            <a:pPr algn="l">
-              <a:lnSpc>
-                <a:spcPct val="105000"/>
-              </a:lnSpc>
-              <a:spcAft>
-                <a:spcPts val="1000"/>
-              </a:spcAft>
-            </a:pPr>
-            <a:r>
-              <a:rPr sz="1300" b="0">
-                <a:solidFill>
-                  <a:srgbClr val="585868"/>
-                </a:solidFill>
-                <a:latin typeface="Helvetica Neue"/>
-              </a:rPr>
-              <a:t>     A byte-equality test catches an accidental edit; the semantic freeze check catches a rename that happens to keep the bytes matching.</a:t>
-            </a:r>
-          </a:p>
-          <a:p>
-            <a:pPr algn="l">
-              <a:lnSpc>
-                <a:spcPct val="105000"/>
-              </a:lnSpc>
-              <a:spcAft>
-                <a:spcPts val="200"/>
-              </a:spcAft>
-            </a:pPr>
-            <a:r>
-              <a:rPr sz="1500" b="1">
-                <a:solidFill>
-                  <a:srgbClr val="14141C"/>
-                </a:solidFill>
-                <a:latin typeface="Helvetica Neue"/>
-              </a:rPr>
-              <a:t>•  It grew twice, legitimately</a:t>
-            </a:r>
-          </a:p>
-          <a:p>
-            <a:pPr algn="l">
-              <a:lnSpc>
-                <a:spcPct val="105000"/>
-              </a:lnSpc>
-              <a:spcAft>
-                <a:spcPts val="1000"/>
-              </a:spcAft>
-            </a:pPr>
-            <a:r>
-              <a:rPr sz="1300" b="0">
-                <a:solidFill>
-                  <a:srgbClr val="585868"/>
-                </a:solidFill>
-                <a:latin typeface="Helvetica Neue"/>
-              </a:rPr>
-              <a:t>     3 features added after the freeze, and the bank list extended to 12 values — both additions, both recorded.</a:t>
-            </a:r>
-          </a:p>
-        </p:txBody>
-      </p:sp>
-      <p:sp>
-        <p:nvSpPr>
-          <p:cNvPr id="5" name="TextBox 4"/>
+              <a:t>Each feature declares how it was produced, and that label travels all the way to the screen.</a:t>
+            </a:r>
+          </a:p>
+        </p:txBody>
+      </p:sp>
+      <p:sp>
+        <p:nvSpPr>
+          <p:cNvPr id="6" name="TextBox 5"/>
           <p:cNvSpPr txBox="1"/>
           <p:nvPr/>
         </p:nvSpPr>
@@ -16571,7 +16666,7 @@
       </p:sp>
       <p:sp>
         <p:nvSpPr>
-          <p:cNvPr id="6" name="TextBox 5"/>
+          <p:cNvPr id="7" name="TextBox 6"/>
           <p:cNvSpPr txBox="1"/>
           <p:nvPr/>
         </p:nvSpPr>
@@ -16606,7 +16701,7 @@
                 </a:solidFill>
                 <a:latin typeface="Helvetica Neue"/>
               </a:rPr>
-              <a:t>25</a:t>
+              <a:t>24</a:t>
             </a:r>
           </a:p>
         </p:txBody>
@@ -16673,7 +16768,7 @@
                 </a:solidFill>
                 <a:latin typeface="Helvetica Neue"/>
               </a:rPr>
-              <a:t>Collection and compliance</a:t>
+              <a:t>The feature dictionary is the contract</a:t>
             </a:r>
           </a:p>
         </p:txBody>
@@ -16760,7 +16855,7 @@
                 </a:solidFill>
                 <a:latin typeface="Helvetica Neue"/>
               </a:rPr>
-              <a:t>•  robots.txt is checked live before every fetch, and fails closed</a:t>
+              <a:t>•  104 features, each declaring three things</a:t>
             </a:r>
           </a:p>
           <a:p>
@@ -16779,7 +16874,7 @@
                 </a:solidFill>
                 <a:latin typeface="Helvetica Neue"/>
               </a:rPr>
-              <a:t>     If robots.txt cannot be read, the URL is treated as not allowed. Every row carries robots_allowed; the validator refuses a row where it is false.</a:t>
+              <a:t>     how it was extracted (automatic / rubric / model-assisted / derived), how it may be compared, and whether it is core or extended.</a:t>
             </a:r>
           </a:p>
           <a:p>
@@ -16798,7 +16893,7 @@
                 </a:solidFill>
                 <a:latin typeface="Helvetica Neue"/>
               </a:rPr>
-              <a:t>•  Pages are rendered, not just downloaded</a:t>
+              <a:t>•  Everything else is derived from it</a:t>
             </a:r>
           </a:p>
           <a:p>
@@ -16817,7 +16912,7 @@
                 </a:solidFill>
                 <a:latin typeface="Helvetica Neue"/>
               </a:rPr>
-              <a:t>     A headless browser reads the page as a visitor sees it, which also fills the geometry features — page height, above-fold elements, image area.</a:t>
+              <a:t>     The dataset schema, the validator and the published feature dictionary are generated from the same YAML, so they cannot drift apart.</a:t>
             </a:r>
           </a:p>
           <a:p>
@@ -16836,7 +16931,7 @@
                 </a:solidFill>
                 <a:latin typeface="Helvetica Neue"/>
               </a:rPr>
-              <a:t>•  A quality gate judges the capture, not just the numbers</a:t>
+              <a:t>•  The freeze rule: add, never rename</a:t>
             </a:r>
           </a:p>
           <a:p>
@@ -16855,7 +16950,7 @@
                 </a:solidFill>
                 <a:latin typeface="Helvetica Neue"/>
               </a:rPr>
-              <a:t>     Two early captures passed every range check while being an empty JavaScript shell and a maintenance notice. capture_quality now travels with the row.</a:t>
+              <a:t>     After the Day 2 freeze, columns may be added; renames and removals need all three of us, because analysis code depends on them.</a:t>
             </a:r>
           </a:p>
           <a:p>
@@ -16874,7 +16969,7 @@
                 </a:solidFill>
                 <a:latin typeface="Helvetica Neue"/>
               </a:rPr>
-              <a:t>•  When a site will not serve us, a person saves the page</a:t>
+              <a:t>•  Two checks, deliberately different</a:t>
             </a:r>
           </a:p>
           <a:p>
@@ -16893,7 +16988,45 @@
                 </a:solidFill>
                 <a:latin typeface="Helvetica Neue"/>
               </a:rPr>
-              <a:t>     BNP Paribas Fortis blocks automated traffic (HTTP 503) and Revolut's headless render is refused; the importer takes a browser-saved page, re-checks robots, and marks it manual_capture.</a:t>
+              <a:t>     A byte-equality test catches an accidental edit; the semantic freeze check catches a rename that happens to keep the bytes matching.</a:t>
+            </a:r>
+          </a:p>
+          <a:p>
+            <a:pPr algn="l">
+              <a:lnSpc>
+                <a:spcPct val="105000"/>
+              </a:lnSpc>
+              <a:spcAft>
+                <a:spcPts val="200"/>
+              </a:spcAft>
+            </a:pPr>
+            <a:r>
+              <a:rPr sz="1500" b="1">
+                <a:solidFill>
+                  <a:srgbClr val="14141C"/>
+                </a:solidFill>
+                <a:latin typeface="Helvetica Neue"/>
+              </a:rPr>
+              <a:t>•  It grew twice, legitimately</a:t>
+            </a:r>
+          </a:p>
+          <a:p>
+            <a:pPr algn="l">
+              <a:lnSpc>
+                <a:spcPct val="105000"/>
+              </a:lnSpc>
+              <a:spcAft>
+                <a:spcPts val="1000"/>
+              </a:spcAft>
+            </a:pPr>
+            <a:r>
+              <a:rPr sz="1300" b="0">
+                <a:solidFill>
+                  <a:srgbClr val="585868"/>
+                </a:solidFill>
+                <a:latin typeface="Helvetica Neue"/>
+              </a:rPr>
+              <a:t>     3 features added after the freeze, and the bank list extended to 12 values — both additions, both recorded.</a:t>
             </a:r>
           </a:p>
         </p:txBody>
@@ -16977,7 +17110,7 @@
                 </a:solidFill>
                 <a:latin typeface="Helvetica Neue"/>
               </a:rPr>
-              <a:t>26</a:t>
+              <a:t>25</a:t>
             </a:r>
           </a:p>
         </p:txBody>
@@ -17015,8 +17148,8 @@
         </p:nvSpPr>
         <p:spPr>
           <a:xfrm>
-            <a:off x="548640" y="320040"/>
-            <a:ext cx="11064240" cy="640080"/>
+            <a:off x="548640" y="384048"/>
+            <a:ext cx="11064240" cy="731520"/>
           </a:xfrm>
           <a:prstGeom prst="rect">
             <a:avLst/>
@@ -17038,13 +17171,13 @@
               </a:spcAft>
             </a:pPr>
             <a:r>
-              <a:rPr sz="2400" b="1">
+              <a:rPr sz="2800" b="1">
                 <a:solidFill>
                   <a:srgbClr val="14141C"/>
                 </a:solidFill>
                 <a:latin typeface="Helvetica Neue"/>
               </a:rPr>
-              <a:t>The Analysis tab</a:t>
+              <a:t>Collection and compliance</a:t>
             </a:r>
           </a:p>
         </p:txBody>
@@ -17057,8 +17190,8 @@
         </p:nvSpPr>
         <p:spPr>
           <a:xfrm>
-            <a:off x="548640" y="960120"/>
-            <a:ext cx="1463040" cy="54864"/>
+            <a:off x="548640" y="1115568"/>
+            <a:ext cx="1463040" cy="64008"/>
           </a:xfrm>
           <a:prstGeom prst="rect">
             <a:avLst/>
@@ -17094,40 +17227,16 @@
           </a:p>
         </p:txBody>
       </p:sp>
-      <p:pic>
-        <p:nvPicPr>
-          <p:cNvPr id="4" name="Picture 3" descr="01_analysis.png"/>
-          <p:cNvPicPr>
-            <a:picLocks noChangeAspect="1"/>
-          </p:cNvPicPr>
-          <p:nvPr/>
-        </p:nvPicPr>
-        <p:blipFill>
-          <a:blip r:embed="rId2"/>
-          <a:stretch>
-            <a:fillRect/>
-          </a:stretch>
-        </p:blipFill>
-        <p:spPr>
-          <a:xfrm>
-            <a:off x="1828647" y="1325880"/>
-            <a:ext cx="8534400" cy="4800600"/>
-          </a:xfrm>
-          <a:prstGeom prst="rect">
-            <a:avLst/>
-          </a:prstGeom>
-        </p:spPr>
-      </p:pic>
-      <p:sp>
-        <p:nvSpPr>
-          <p:cNvPr id="5" name="TextBox 4"/>
+      <p:sp>
+        <p:nvSpPr>
+          <p:cNvPr id="4" name="TextBox 3"/>
           <p:cNvSpPr txBox="1"/>
           <p:nvPr/>
         </p:nvSpPr>
         <p:spPr>
           <a:xfrm>
-            <a:off x="685800" y="6236208"/>
-            <a:ext cx="10881360" cy="457200"/>
+            <a:off x="685800" y="1463040"/>
+            <a:ext cx="10881360" cy="4754880"/>
           </a:xfrm>
           <a:prstGeom prst="rect">
             <a:avLst/>
@@ -17145,24 +17254,157 @@
                 <a:spcPct val="105000"/>
               </a:lnSpc>
               <a:spcAft>
-                <a:spcPts val="600"/>
-              </a:spcAft>
-            </a:pPr>
-            <a:r>
-              <a:rPr sz="1200" b="0">
+                <a:spcPts val="200"/>
+              </a:spcAft>
+            </a:pPr>
+            <a:r>
+              <a:rPr sz="1500" b="1">
+                <a:solidFill>
+                  <a:srgbClr val="14141C"/>
+                </a:solidFill>
+                <a:latin typeface="Helvetica Neue"/>
+              </a:rPr>
+              <a:t>•  robots.txt is checked live before every fetch, and fails closed</a:t>
+            </a:r>
+          </a:p>
+          <a:p>
+            <a:pPr algn="l">
+              <a:lnSpc>
+                <a:spcPct val="105000"/>
+              </a:lnSpc>
+              <a:spcAft>
+                <a:spcPts val="1000"/>
+              </a:spcAft>
+            </a:pPr>
+            <a:r>
+              <a:rPr sz="1300" b="0">
                 <a:solidFill>
                   <a:srgbClr val="585868"/>
                 </a:solidFill>
                 <a:latin typeface="Helvetica Neue"/>
               </a:rPr>
-              <a:t>Scope, focus and the verdict above the first number — the reader cannot see a figure without seeing what it covers.</a:t>
-            </a:r>
-          </a:p>
-        </p:txBody>
-      </p:sp>
-      <p:sp>
-        <p:nvSpPr>
-          <p:cNvPr id="6" name="TextBox 5"/>
+              <a:t>     If robots.txt cannot be read, the URL is treated as not allowed. Every row carries robots_allowed; the validator refuses a row where it is false.</a:t>
+            </a:r>
+          </a:p>
+          <a:p>
+            <a:pPr algn="l">
+              <a:lnSpc>
+                <a:spcPct val="105000"/>
+              </a:lnSpc>
+              <a:spcAft>
+                <a:spcPts val="200"/>
+              </a:spcAft>
+            </a:pPr>
+            <a:r>
+              <a:rPr sz="1500" b="1">
+                <a:solidFill>
+                  <a:srgbClr val="14141C"/>
+                </a:solidFill>
+                <a:latin typeface="Helvetica Neue"/>
+              </a:rPr>
+              <a:t>•  Pages are rendered, not just downloaded</a:t>
+            </a:r>
+          </a:p>
+          <a:p>
+            <a:pPr algn="l">
+              <a:lnSpc>
+                <a:spcPct val="105000"/>
+              </a:lnSpc>
+              <a:spcAft>
+                <a:spcPts val="1000"/>
+              </a:spcAft>
+            </a:pPr>
+            <a:r>
+              <a:rPr sz="1300" b="0">
+                <a:solidFill>
+                  <a:srgbClr val="585868"/>
+                </a:solidFill>
+                <a:latin typeface="Helvetica Neue"/>
+              </a:rPr>
+              <a:t>     A headless browser reads the page as a visitor sees it, which also fills the geometry features — page height, above-fold elements, image area.</a:t>
+            </a:r>
+          </a:p>
+          <a:p>
+            <a:pPr algn="l">
+              <a:lnSpc>
+                <a:spcPct val="105000"/>
+              </a:lnSpc>
+              <a:spcAft>
+                <a:spcPts val="200"/>
+              </a:spcAft>
+            </a:pPr>
+            <a:r>
+              <a:rPr sz="1500" b="1">
+                <a:solidFill>
+                  <a:srgbClr val="14141C"/>
+                </a:solidFill>
+                <a:latin typeface="Helvetica Neue"/>
+              </a:rPr>
+              <a:t>•  A quality gate judges the capture, not just the numbers</a:t>
+            </a:r>
+          </a:p>
+          <a:p>
+            <a:pPr algn="l">
+              <a:lnSpc>
+                <a:spcPct val="105000"/>
+              </a:lnSpc>
+              <a:spcAft>
+                <a:spcPts val="1000"/>
+              </a:spcAft>
+            </a:pPr>
+            <a:r>
+              <a:rPr sz="1300" b="0">
+                <a:solidFill>
+                  <a:srgbClr val="585868"/>
+                </a:solidFill>
+                <a:latin typeface="Helvetica Neue"/>
+              </a:rPr>
+              <a:t>     Two early captures passed every range check while being an empty JavaScript shell and a maintenance notice. capture_quality now travels with the row.</a:t>
+            </a:r>
+          </a:p>
+          <a:p>
+            <a:pPr algn="l">
+              <a:lnSpc>
+                <a:spcPct val="105000"/>
+              </a:lnSpc>
+              <a:spcAft>
+                <a:spcPts val="200"/>
+              </a:spcAft>
+            </a:pPr>
+            <a:r>
+              <a:rPr sz="1500" b="1">
+                <a:solidFill>
+                  <a:srgbClr val="14141C"/>
+                </a:solidFill>
+                <a:latin typeface="Helvetica Neue"/>
+              </a:rPr>
+              <a:t>•  When a site will not serve us, a person saves the page</a:t>
+            </a:r>
+          </a:p>
+          <a:p>
+            <a:pPr algn="l">
+              <a:lnSpc>
+                <a:spcPct val="105000"/>
+              </a:lnSpc>
+              <a:spcAft>
+                <a:spcPts val="1000"/>
+              </a:spcAft>
+            </a:pPr>
+            <a:r>
+              <a:rPr sz="1300" b="0">
+                <a:solidFill>
+                  <a:srgbClr val="585868"/>
+                </a:solidFill>
+                <a:latin typeface="Helvetica Neue"/>
+              </a:rPr>
+              <a:t>     BNP Paribas Fortis blocks automated traffic (HTTP 503) and Revolut's headless render is refused; the importer takes a browser-saved page, re-checks robots, and marks it manual_capture.</a:t>
+            </a:r>
+          </a:p>
+        </p:txBody>
+      </p:sp>
+      <p:sp>
+        <p:nvSpPr>
+          <p:cNvPr id="5" name="TextBox 4"/>
           <p:cNvSpPr txBox="1"/>
           <p:nvPr/>
         </p:nvSpPr>
@@ -17204,7 +17446,7 @@
       </p:sp>
       <p:sp>
         <p:nvSpPr>
-          <p:cNvPr id="7" name="TextBox 6"/>
+          <p:cNvPr id="6" name="TextBox 5"/>
           <p:cNvSpPr txBox="1"/>
           <p:nvPr/>
         </p:nvSpPr>
@@ -17239,7 +17481,7 @@
                 </a:solidFill>
                 <a:latin typeface="Helvetica Neue"/>
               </a:rPr>
-              <a:t>27</a:t>
+              <a:t>26</a:t>
             </a:r>
           </a:p>
         </p:txBody>
@@ -17306,7 +17548,7 @@
                 </a:solidFill>
                 <a:latin typeface="Helvetica Neue"/>
               </a:rPr>
-              <a:t>The Reputation tab: what each bank is in the news about</a:t>
+              <a:t>The Analysis tab</a:t>
             </a:r>
           </a:p>
         </p:txBody>
@@ -17358,7 +17600,7 @@
       </p:sp>
       <p:pic>
         <p:nvPicPr>
-          <p:cNvPr id="4" name="Picture 3" descr="03_reputation.png"/>
+          <p:cNvPr id="4" name="Picture 3" descr="01_analysis.png"/>
           <p:cNvPicPr>
             <a:picLocks noChangeAspect="1"/>
           </p:cNvPicPr>
@@ -17417,7 +17659,7 @@
                 </a:solidFill>
                 <a:latin typeface="Helvetica Neue"/>
               </a:rPr>
-              <a:t>Headline themes — innovation, crisis, results — counted, never scored for sentiment. Two news providers are merged, in three languages.</a:t>
+              <a:t>Scope, focus and the verdict above the first number — the reader cannot see a figure without seeing what it covers.</a:t>
             </a:r>
           </a:p>
         </p:txBody>
@@ -17501,7 +17743,7 @@
                 </a:solidFill>
                 <a:latin typeface="Helvetica Neue"/>
               </a:rPr>
-              <a:t>28</a:t>
+              <a:t>27</a:t>
             </a:r>
           </a:p>
         </p:txBody>
@@ -17539,8 +17781,8 @@
         </p:nvSpPr>
         <p:spPr>
           <a:xfrm>
-            <a:off x="548640" y="384048"/>
-            <a:ext cx="11064240" cy="731520"/>
+            <a:off x="548640" y="320040"/>
+            <a:ext cx="11064240" cy="640080"/>
           </a:xfrm>
           <a:prstGeom prst="rect">
             <a:avLst/>
@@ -17562,13 +17804,13 @@
               </a:spcAft>
             </a:pPr>
             <a:r>
-              <a:rPr sz="2800" b="1">
+              <a:rPr sz="2400" b="1">
                 <a:solidFill>
                   <a:srgbClr val="14141C"/>
                 </a:solidFill>
                 <a:latin typeface="Helvetica Neue"/>
               </a:rPr>
-              <a:t>Reputation: themes, not sentiment</a:t>
+              <a:t>The Reputation tab: what each bank is in the news about</a:t>
             </a:r>
           </a:p>
         </p:txBody>
@@ -17581,8 +17823,8 @@
         </p:nvSpPr>
         <p:spPr>
           <a:xfrm>
-            <a:off x="548640" y="1115568"/>
-            <a:ext cx="1463040" cy="64008"/>
+            <a:off x="548640" y="960120"/>
+            <a:ext cx="1463040" cy="54864"/>
           </a:xfrm>
           <a:prstGeom prst="rect">
             <a:avLst/>
@@ -17618,16 +17860,40 @@
           </a:p>
         </p:txBody>
       </p:sp>
-      <p:sp>
-        <p:nvSpPr>
-          <p:cNvPr id="4" name="TextBox 3"/>
+      <p:pic>
+        <p:nvPicPr>
+          <p:cNvPr id="4" name="Picture 3" descr="03_reputation.png"/>
+          <p:cNvPicPr>
+            <a:picLocks noChangeAspect="1"/>
+          </p:cNvPicPr>
+          <p:nvPr/>
+        </p:nvPicPr>
+        <p:blipFill>
+          <a:blip r:embed="rId2"/>
+          <a:stretch>
+            <a:fillRect/>
+          </a:stretch>
+        </p:blipFill>
+        <p:spPr>
+          <a:xfrm>
+            <a:off x="1828647" y="1325880"/>
+            <a:ext cx="8534400" cy="4800600"/>
+          </a:xfrm>
+          <a:prstGeom prst="rect">
+            <a:avLst/>
+          </a:prstGeom>
+        </p:spPr>
+      </p:pic>
+      <p:sp>
+        <p:nvSpPr>
+          <p:cNvPr id="5" name="TextBox 4"/>
           <p:cNvSpPr txBox="1"/>
           <p:nvPr/>
         </p:nvSpPr>
         <p:spPr>
           <a:xfrm>
-            <a:off x="685800" y="1463040"/>
-            <a:ext cx="10881360" cy="4754880"/>
+            <a:off x="685800" y="6236208"/>
+            <a:ext cx="10881360" cy="457200"/>
           </a:xfrm>
           <a:prstGeom prst="rect">
             <a:avLst/>
@@ -17645,100 +17911,24 @@
                 <a:spcPct val="105000"/>
               </a:lnSpc>
               <a:spcAft>
-                <a:spcPts val="900"/>
-              </a:spcAft>
-            </a:pPr>
-            <a:r>
-              <a:rPr sz="1500" b="0">
-                <a:solidFill>
-                  <a:srgbClr val="14141C"/>
-                </a:solidFill>
-                <a:latin typeface="Helvetica Neue"/>
-              </a:rPr>
-              <a:t>•  Sentiment scoring was out of scope; themes turn the brief's own 'reputation, innovations, crises' framing into a closed, countable list.</a:t>
-            </a:r>
-          </a:p>
-          <a:p>
-            <a:pPr algn="l">
-              <a:lnSpc>
-                <a:spcPct val="105000"/>
-              </a:lnSpc>
-              <a:spcAft>
-                <a:spcPts val="900"/>
-              </a:spcAft>
-            </a:pPr>
-            <a:r>
-              <a:rPr sz="1500" b="0">
-                <a:solidFill>
-                  <a:srgbClr val="14141C"/>
-                </a:solidFill>
-                <a:latin typeface="Helvetica Neue"/>
-              </a:rPr>
-              <a:t>•  Two similarly named providers are supported at once (newsapi.org and newsapi.ai); headlines from both are merged and de-duplicated.</a:t>
-            </a:r>
-          </a:p>
-          <a:p>
-            <a:pPr algn="l">
-              <a:lnSpc>
-                <a:spcPct val="105000"/>
-              </a:lnSpc>
-              <a:spcAft>
-                <a:spcPts val="900"/>
-              </a:spcAft>
-            </a:pPr>
-            <a:r>
-              <a:rPr sz="1500" b="0">
-                <a:solidFill>
-                  <a:srgbClr val="14141C"/>
-                </a:solidFill>
-                <a:latin typeface="Helvetica Neue"/>
-              </a:rPr>
-              <a:t>•  Every provider is queried in English, French and Dutch — Belgian bank news is mostly not in English.</a:t>
-            </a:r>
-          </a:p>
-          <a:p>
-            <a:pPr algn="l">
-              <a:lnSpc>
-                <a:spcPct val="105000"/>
-              </a:lnSpc>
-              <a:spcAft>
-                <a:spcPts val="900"/>
-              </a:spcAft>
-            </a:pPr>
-            <a:r>
-              <a:rPr sz="1500" b="0">
-                <a:solidFill>
-                  <a:srgbClr val="14141C"/>
-                </a:solidFill>
-                <a:latin typeface="Helvetica Neue"/>
-              </a:rPr>
-              <a:t>•  The module degrades to 'not configured' when no key is present, rather than inventing a number for a bank it has no data on.</a:t>
-            </a:r>
-          </a:p>
-          <a:p>
-            <a:pPr algn="l">
-              <a:lnSpc>
-                <a:spcPct val="105000"/>
-              </a:lnSpc>
-              <a:spcAft>
-                <a:spcPts val="900"/>
-              </a:spcAft>
-            </a:pPr>
-            <a:r>
-              <a:rPr sz="1500" b="0">
-                <a:solidFill>
-                  <a:srgbClr val="14141C"/>
-                </a:solidFill>
-                <a:latin typeface="Helvetica Neue"/>
-              </a:rPr>
-              <a:t>•  Themes are context about the bank, never evidence that a page or campaign performed. Asked whether reputation shows how well campaigns are doing, the honest answer is no: press coverage says what a bank is written about, not whether its page worked.</a:t>
-            </a:r>
-          </a:p>
-        </p:txBody>
-      </p:sp>
-      <p:sp>
-        <p:nvSpPr>
-          <p:cNvPr id="5" name="TextBox 4"/>
+                <a:spcPts val="600"/>
+              </a:spcAft>
+            </a:pPr>
+            <a:r>
+              <a:rPr sz="1200" b="0">
+                <a:solidFill>
+                  <a:srgbClr val="585868"/>
+                </a:solidFill>
+                <a:latin typeface="Helvetica Neue"/>
+              </a:rPr>
+              <a:t>Headline themes — innovation, crisis, results — counted, never scored for sentiment. Two news providers are merged, in three languages.</a:t>
+            </a:r>
+          </a:p>
+        </p:txBody>
+      </p:sp>
+      <p:sp>
+        <p:nvSpPr>
+          <p:cNvPr id="6" name="TextBox 5"/>
           <p:cNvSpPr txBox="1"/>
           <p:nvPr/>
         </p:nvSpPr>
@@ -17780,7 +17970,7 @@
       </p:sp>
       <p:sp>
         <p:nvSpPr>
-          <p:cNvPr id="6" name="TextBox 5"/>
+          <p:cNvPr id="7" name="TextBox 6"/>
           <p:cNvSpPr txBox="1"/>
           <p:nvPr/>
         </p:nvSpPr>
@@ -17815,7 +18005,7 @@
                 </a:solidFill>
                 <a:latin typeface="Helvetica Neue"/>
               </a:rPr>
-              <a:t>29</a:t>
+              <a:t>28</a:t>
             </a:r>
           </a:p>
         </p:txBody>
@@ -17853,8 +18043,8 @@
         </p:nvSpPr>
         <p:spPr>
           <a:xfrm>
-            <a:off x="548640" y="320040"/>
-            <a:ext cx="11064240" cy="640080"/>
+            <a:off x="548640" y="384048"/>
+            <a:ext cx="11064240" cy="731520"/>
           </a:xfrm>
           <a:prstGeom prst="rect">
             <a:avLst/>
@@ -17876,13 +18066,13 @@
               </a:spcAft>
             </a:pPr>
             <a:r>
-              <a:rPr sz="2400" b="1">
+              <a:rPr sz="2800" b="1">
                 <a:solidFill>
                   <a:srgbClr val="14141C"/>
                 </a:solidFill>
                 <a:latin typeface="Helvetica Neue"/>
               </a:rPr>
-              <a:t>The Recommendations tab</a:t>
+              <a:t>Reputation: themes, not sentiment</a:t>
             </a:r>
           </a:p>
         </p:txBody>
@@ -17895,8 +18085,8 @@
         </p:nvSpPr>
         <p:spPr>
           <a:xfrm>
-            <a:off x="548640" y="960120"/>
-            <a:ext cx="1463040" cy="54864"/>
+            <a:off x="548640" y="1115568"/>
+            <a:ext cx="1463040" cy="64008"/>
           </a:xfrm>
           <a:prstGeom prst="rect">
             <a:avLst/>
@@ -17932,40 +18122,16 @@
           </a:p>
         </p:txBody>
       </p:sp>
-      <p:pic>
-        <p:nvPicPr>
-          <p:cNvPr id="4" name="Picture 3" descr="04_recommendations.png"/>
-          <p:cNvPicPr>
-            <a:picLocks noChangeAspect="1"/>
-          </p:cNvPicPr>
-          <p:nvPr/>
-        </p:nvPicPr>
-        <p:blipFill>
-          <a:blip r:embed="rId2"/>
-          <a:stretch>
-            <a:fillRect/>
-          </a:stretch>
-        </p:blipFill>
-        <p:spPr>
-          <a:xfrm>
-            <a:off x="1828647" y="1325880"/>
-            <a:ext cx="8534400" cy="4800600"/>
-          </a:xfrm>
-          <a:prstGeom prst="rect">
-            <a:avLst/>
-          </a:prstGeom>
-        </p:spPr>
-      </p:pic>
-      <p:sp>
-        <p:nvSpPr>
-          <p:cNvPr id="5" name="TextBox 4"/>
+      <p:sp>
+        <p:nvSpPr>
+          <p:cNvPr id="4" name="TextBox 3"/>
           <p:cNvSpPr txBox="1"/>
           <p:nvPr/>
         </p:nvSpPr>
         <p:spPr>
           <a:xfrm>
-            <a:off x="685800" y="6236208"/>
-            <a:ext cx="10881360" cy="457200"/>
+            <a:off x="685800" y="1463040"/>
+            <a:ext cx="10881360" cy="4754880"/>
           </a:xfrm>
           <a:prstGeom prst="rect">
             <a:avLst/>
@@ -17983,24 +18149,100 @@
                 <a:spcPct val="105000"/>
               </a:lnSpc>
               <a:spcAft>
-                <a:spcPts val="600"/>
-              </a:spcAft>
-            </a:pPr>
-            <a:r>
-              <a:rPr sz="1200" b="0">
-                <a:solidFill>
-                  <a:srgbClr val="585868"/>
-                </a:solidFill>
-                <a:latin typeface="Helvetica Neue"/>
-              </a:rPr>
-              <a:t>The one place a model is allowed to opine: advice grounded in this run's numbers, each item shown next to the features it was argued from, and selectable.</a:t>
-            </a:r>
-          </a:p>
-        </p:txBody>
-      </p:sp>
-      <p:sp>
-        <p:nvSpPr>
-          <p:cNvPr id="6" name="TextBox 5"/>
+                <a:spcPts val="900"/>
+              </a:spcAft>
+            </a:pPr>
+            <a:r>
+              <a:rPr sz="1500" b="0">
+                <a:solidFill>
+                  <a:srgbClr val="14141C"/>
+                </a:solidFill>
+                <a:latin typeface="Helvetica Neue"/>
+              </a:rPr>
+              <a:t>•  Sentiment scoring was out of scope; themes turn the brief's own 'reputation, innovations, crises' framing into a closed, countable list.</a:t>
+            </a:r>
+          </a:p>
+          <a:p>
+            <a:pPr algn="l">
+              <a:lnSpc>
+                <a:spcPct val="105000"/>
+              </a:lnSpc>
+              <a:spcAft>
+                <a:spcPts val="900"/>
+              </a:spcAft>
+            </a:pPr>
+            <a:r>
+              <a:rPr sz="1500" b="0">
+                <a:solidFill>
+                  <a:srgbClr val="14141C"/>
+                </a:solidFill>
+                <a:latin typeface="Helvetica Neue"/>
+              </a:rPr>
+              <a:t>•  Two similarly named providers are supported at once (newsapi.org and newsapi.ai); headlines from both are merged and de-duplicated.</a:t>
+            </a:r>
+          </a:p>
+          <a:p>
+            <a:pPr algn="l">
+              <a:lnSpc>
+                <a:spcPct val="105000"/>
+              </a:lnSpc>
+              <a:spcAft>
+                <a:spcPts val="900"/>
+              </a:spcAft>
+            </a:pPr>
+            <a:r>
+              <a:rPr sz="1500" b="0">
+                <a:solidFill>
+                  <a:srgbClr val="14141C"/>
+                </a:solidFill>
+                <a:latin typeface="Helvetica Neue"/>
+              </a:rPr>
+              <a:t>•  Every provider is queried in English, French and Dutch — Belgian bank news is mostly not in English.</a:t>
+            </a:r>
+          </a:p>
+          <a:p>
+            <a:pPr algn="l">
+              <a:lnSpc>
+                <a:spcPct val="105000"/>
+              </a:lnSpc>
+              <a:spcAft>
+                <a:spcPts val="900"/>
+              </a:spcAft>
+            </a:pPr>
+            <a:r>
+              <a:rPr sz="1500" b="0">
+                <a:solidFill>
+                  <a:srgbClr val="14141C"/>
+                </a:solidFill>
+                <a:latin typeface="Helvetica Neue"/>
+              </a:rPr>
+              <a:t>•  The module degrades to 'not configured' when no key is present, rather than inventing a number for a bank it has no data on.</a:t>
+            </a:r>
+          </a:p>
+          <a:p>
+            <a:pPr algn="l">
+              <a:lnSpc>
+                <a:spcPct val="105000"/>
+              </a:lnSpc>
+              <a:spcAft>
+                <a:spcPts val="900"/>
+              </a:spcAft>
+            </a:pPr>
+            <a:r>
+              <a:rPr sz="1500" b="0">
+                <a:solidFill>
+                  <a:srgbClr val="14141C"/>
+                </a:solidFill>
+                <a:latin typeface="Helvetica Neue"/>
+              </a:rPr>
+              <a:t>•  Themes are context about the bank, never evidence that a page or campaign performed. Asked whether reputation shows how well campaigns are doing, the honest answer is no: press coverage says what a bank is written about, not whether its page worked.</a:t>
+            </a:r>
+          </a:p>
+        </p:txBody>
+      </p:sp>
+      <p:sp>
+        <p:nvSpPr>
+          <p:cNvPr id="5" name="TextBox 4"/>
           <p:cNvSpPr txBox="1"/>
           <p:nvPr/>
         </p:nvSpPr>
@@ -18042,7 +18284,7 @@
       </p:sp>
       <p:sp>
         <p:nvSpPr>
-          <p:cNvPr id="7" name="TextBox 6"/>
+          <p:cNvPr id="6" name="TextBox 5"/>
           <p:cNvSpPr txBox="1"/>
           <p:nvPr/>
         </p:nvSpPr>
@@ -18077,7 +18319,7 @@
                 </a:solidFill>
                 <a:latin typeface="Helvetica Neue"/>
               </a:rPr>
-              <a:t>30</a:t>
+              <a:t>29</a:t>
             </a:r>
           </a:p>
         </p:txBody>
@@ -18501,8 +18743,8 @@
         </p:nvSpPr>
         <p:spPr>
           <a:xfrm>
-            <a:off x="548640" y="384048"/>
-            <a:ext cx="11064240" cy="731520"/>
+            <a:off x="548640" y="320040"/>
+            <a:ext cx="11064240" cy="640080"/>
           </a:xfrm>
           <a:prstGeom prst="rect">
             <a:avLst/>
@@ -18524,13 +18766,13 @@
               </a:spcAft>
             </a:pPr>
             <a:r>
-              <a:rPr sz="2800" b="1">
+              <a:rPr sz="2400" b="1">
                 <a:solidFill>
                   <a:srgbClr val="14141C"/>
                 </a:solidFill>
                 <a:latin typeface="Helvetica Neue"/>
               </a:rPr>
-              <a:t>Recommendations, and how they stay honest</a:t>
+              <a:t>The Recommendations tab</a:t>
             </a:r>
           </a:p>
         </p:txBody>
@@ -18543,8 +18785,8 @@
         </p:nvSpPr>
         <p:spPr>
           <a:xfrm>
-            <a:off x="548640" y="1115568"/>
-            <a:ext cx="1463040" cy="64008"/>
+            <a:off x="548640" y="960120"/>
+            <a:ext cx="1463040" cy="54864"/>
           </a:xfrm>
           <a:prstGeom prst="rect">
             <a:avLst/>
@@ -18580,16 +18822,40 @@
           </a:p>
         </p:txBody>
       </p:sp>
-      <p:sp>
-        <p:nvSpPr>
-          <p:cNvPr id="4" name="TextBox 3"/>
+      <p:pic>
+        <p:nvPicPr>
+          <p:cNvPr id="4" name="Picture 3" descr="04_recommendations.png"/>
+          <p:cNvPicPr>
+            <a:picLocks noChangeAspect="1"/>
+          </p:cNvPicPr>
+          <p:nvPr/>
+        </p:nvPicPr>
+        <p:blipFill>
+          <a:blip r:embed="rId2"/>
+          <a:stretch>
+            <a:fillRect/>
+          </a:stretch>
+        </p:blipFill>
+        <p:spPr>
+          <a:xfrm>
+            <a:off x="1828647" y="1325880"/>
+            <a:ext cx="8534400" cy="4800600"/>
+          </a:xfrm>
+          <a:prstGeom prst="rect">
+            <a:avLst/>
+          </a:prstGeom>
+        </p:spPr>
+      </p:pic>
+      <p:sp>
+        <p:nvSpPr>
+          <p:cNvPr id="5" name="TextBox 4"/>
           <p:cNvSpPr txBox="1"/>
           <p:nvPr/>
         </p:nvSpPr>
         <p:spPr>
           <a:xfrm>
-            <a:off x="685800" y="1463040"/>
-            <a:ext cx="10881360" cy="4754880"/>
+            <a:off x="685800" y="6236208"/>
+            <a:ext cx="10881360" cy="457200"/>
           </a:xfrm>
           <a:prstGeom prst="rect">
             <a:avLst/>
@@ -18607,100 +18873,24 @@
                 <a:spcPct val="105000"/>
               </a:lnSpc>
               <a:spcAft>
-                <a:spcPts val="900"/>
-              </a:spcAft>
-            </a:pPr>
-            <a:r>
-              <a:rPr sz="1500" b="0">
-                <a:solidFill>
-                  <a:srgbClr val="14141C"/>
-                </a:solidFill>
-                <a:latin typeface="Helvetica Neue"/>
-              </a:rPr>
-              <a:t>•  Every recommendation names the measured features it was argued from; an invented feature id is dropped before the list is shown.</a:t>
-            </a:r>
-          </a:p>
-          <a:p>
-            <a:pPr algn="l">
-              <a:lnSpc>
-                <a:spcPct val="105000"/>
-              </a:lnSpc>
-              <a:spcAft>
-                <a:spcPts val="900"/>
-              </a:spcAft>
-            </a:pPr>
-            <a:r>
-              <a:rPr sz="1500" b="0">
-                <a:solidFill>
-                  <a:srgbClr val="14141C"/>
-                </a:solidFill>
-                <a:latin typeface="Helvetica Neue"/>
-              </a:rPr>
-              <a:t>•  A second, opt-in group can be added from news themes (reputation context).</a:t>
-            </a:r>
-          </a:p>
-          <a:p>
-            <a:pPr algn="l">
-              <a:lnSpc>
-                <a:spcPct val="105000"/>
-              </a:lnSpc>
-              <a:spcAft>
-                <a:spcPts val="900"/>
-              </a:spcAft>
-            </a:pPr>
-            <a:r>
-              <a:rPr sz="1500" b="0">
-                <a:solidFill>
-                  <a:srgbClr val="14141C"/>
-                </a:solidFill>
-                <a:latin typeface="Helvetica Neue"/>
-              </a:rPr>
-              <a:t>•  The search-interest group was removed on 22/09; Trends now selects three brands on attention alone and the tab reports what their pages measurably do differently from ING's.</a:t>
-            </a:r>
-          </a:p>
-          <a:p>
-            <a:pPr algn="l">
-              <a:lnSpc>
-                <a:spcPct val="105000"/>
-              </a:lnSpc>
-              <a:spcAft>
-                <a:spcPts val="900"/>
-              </a:spcAft>
-            </a:pPr>
-            <a:r>
-              <a:rPr sz="1500" b="0">
-                <a:solidFill>
-                  <a:srgbClr val="14141C"/>
-                </a:solidFill>
-                <a:latin typeface="Helvetica Neue"/>
-              </a:rPr>
-              <a:t>•  A reader ticks the ones worth building; only the ticked subset reaches the site builder.</a:t>
-            </a:r>
-          </a:p>
-          <a:p>
-            <a:pPr algn="l">
-              <a:lnSpc>
-                <a:spcPct val="105000"/>
-              </a:lnSpc>
-              <a:spcAft>
-                <a:spcPts val="900"/>
-              </a:spcAft>
-            </a:pPr>
-            <a:r>
-              <a:rPr sz="1500" b="0">
-                <a:solidFill>
-                  <a:srgbClr val="14141C"/>
-                </a:solidFill>
-                <a:latin typeface="Helvetica Neue"/>
-              </a:rPr>
-              <a:t>•  Nothing here re-runs collection or analysis — it reads one report and writes advice.</a:t>
-            </a:r>
-          </a:p>
-        </p:txBody>
-      </p:sp>
-      <p:sp>
-        <p:nvSpPr>
-          <p:cNvPr id="5" name="TextBox 4"/>
+                <a:spcPts val="600"/>
+              </a:spcAft>
+            </a:pPr>
+            <a:r>
+              <a:rPr sz="1200" b="0">
+                <a:solidFill>
+                  <a:srgbClr val="585868"/>
+                </a:solidFill>
+                <a:latin typeface="Helvetica Neue"/>
+              </a:rPr>
+              <a:t>The one place a model is allowed to opine: advice grounded in this run's numbers, each item shown next to the features it was argued from, and selectable.</a:t>
+            </a:r>
+          </a:p>
+        </p:txBody>
+      </p:sp>
+      <p:sp>
+        <p:nvSpPr>
+          <p:cNvPr id="6" name="TextBox 5"/>
           <p:cNvSpPr txBox="1"/>
           <p:nvPr/>
         </p:nvSpPr>
@@ -18742,7 +18932,7 @@
       </p:sp>
       <p:sp>
         <p:nvSpPr>
-          <p:cNvPr id="6" name="TextBox 5"/>
+          <p:cNvPr id="7" name="TextBox 6"/>
           <p:cNvSpPr txBox="1"/>
           <p:nvPr/>
         </p:nvSpPr>
@@ -18777,7 +18967,7 @@
                 </a:solidFill>
                 <a:latin typeface="Helvetica Neue"/>
               </a:rPr>
-              <a:t>31</a:t>
+              <a:t>30</a:t>
             </a:r>
           </a:p>
         </p:txBody>
@@ -18815,8 +19005,8 @@
         </p:nvSpPr>
         <p:spPr>
           <a:xfrm>
-            <a:off x="548640" y="320040"/>
-            <a:ext cx="11064240" cy="640080"/>
+            <a:off x="548640" y="384048"/>
+            <a:ext cx="11064240" cy="731520"/>
           </a:xfrm>
           <a:prstGeom prst="rect">
             <a:avLst/>
@@ -18838,13 +19028,13 @@
               </a:spcAft>
             </a:pPr>
             <a:r>
-              <a:rPr sz="2400" b="1">
+              <a:rPr sz="2800" b="1">
                 <a:solidFill>
                   <a:srgbClr val="14141C"/>
                 </a:solidFill>
                 <a:latin typeface="Helvetica Neue"/>
               </a:rPr>
-              <a:t>The generated ING website, with explanations on</a:t>
+              <a:t>Recommendations, and how they stay honest</a:t>
             </a:r>
           </a:p>
         </p:txBody>
@@ -18857,8 +19047,8 @@
         </p:nvSpPr>
         <p:spPr>
           <a:xfrm>
-            <a:off x="548640" y="960120"/>
-            <a:ext cx="1463040" cy="54864"/>
+            <a:off x="548640" y="1115568"/>
+            <a:ext cx="1463040" cy="64008"/>
           </a:xfrm>
           <a:prstGeom prst="rect">
             <a:avLst/>
@@ -18894,40 +19084,16 @@
           </a:p>
         </p:txBody>
       </p:sp>
-      <p:pic>
-        <p:nvPicPr>
-          <p:cNvPr id="4" name="Picture 3" descr="06_site_explanation_open.png"/>
-          <p:cNvPicPr>
-            <a:picLocks noChangeAspect="1"/>
-          </p:cNvPicPr>
-          <p:nvPr/>
-        </p:nvPicPr>
-        <p:blipFill>
-          <a:blip r:embed="rId2"/>
-          <a:stretch>
-            <a:fillRect/>
-          </a:stretch>
-        </p:blipFill>
-        <p:spPr>
-          <a:xfrm>
-            <a:off x="1828647" y="1325880"/>
-            <a:ext cx="8534400" cy="4800600"/>
-          </a:xfrm>
-          <a:prstGeom prst="rect">
-            <a:avLst/>
-          </a:prstGeom>
-        </p:spPr>
-      </p:pic>
-      <p:sp>
-        <p:nvSpPr>
-          <p:cNvPr id="5" name="TextBox 4"/>
+      <p:sp>
+        <p:nvSpPr>
+          <p:cNvPr id="4" name="TextBox 3"/>
           <p:cNvSpPr txBox="1"/>
           <p:nvPr/>
         </p:nvSpPr>
         <p:spPr>
           <a:xfrm>
-            <a:off x="685800" y="6236208"/>
-            <a:ext cx="10881360" cy="457200"/>
+            <a:off x="685800" y="1463040"/>
+            <a:ext cx="10881360" cy="4754880"/>
           </a:xfrm>
           <a:prstGeom prst="rect">
             <a:avLst/>
@@ -18945,24 +19111,100 @@
                 <a:spcPct val="105000"/>
               </a:lnSpc>
               <a:spcAft>
-                <a:spcPts val="600"/>
-              </a:spcAft>
-            </a:pPr>
-            <a:r>
-              <a:rPr sz="1200" b="0">
-                <a:solidFill>
-                  <a:srgbClr val="585868"/>
-                </a:solidFill>
-                <a:latin typeface="Helvetica Neue"/>
-              </a:rPr>
-              <a:t>An illustration, not a proposal for ING's site: each section that implements a recommendation is boxed, the (i) button opens the reasoning above it, and that section's glow switches to a slow yellow flicker.</a:t>
-            </a:r>
-          </a:p>
-        </p:txBody>
-      </p:sp>
-      <p:sp>
-        <p:nvSpPr>
-          <p:cNvPr id="6" name="TextBox 5"/>
+                <a:spcPts val="900"/>
+              </a:spcAft>
+            </a:pPr>
+            <a:r>
+              <a:rPr sz="1500" b="0">
+                <a:solidFill>
+                  <a:srgbClr val="14141C"/>
+                </a:solidFill>
+                <a:latin typeface="Helvetica Neue"/>
+              </a:rPr>
+              <a:t>•  Every recommendation names the measured features it was argued from; an invented feature id is dropped before the list is shown.</a:t>
+            </a:r>
+          </a:p>
+          <a:p>
+            <a:pPr algn="l">
+              <a:lnSpc>
+                <a:spcPct val="105000"/>
+              </a:lnSpc>
+              <a:spcAft>
+                <a:spcPts val="900"/>
+              </a:spcAft>
+            </a:pPr>
+            <a:r>
+              <a:rPr sz="1500" b="0">
+                <a:solidFill>
+                  <a:srgbClr val="14141C"/>
+                </a:solidFill>
+                <a:latin typeface="Helvetica Neue"/>
+              </a:rPr>
+              <a:t>•  A second, opt-in group can be added from news themes (reputation context).</a:t>
+            </a:r>
+          </a:p>
+          <a:p>
+            <a:pPr algn="l">
+              <a:lnSpc>
+                <a:spcPct val="105000"/>
+              </a:lnSpc>
+              <a:spcAft>
+                <a:spcPts val="900"/>
+              </a:spcAft>
+            </a:pPr>
+            <a:r>
+              <a:rPr sz="1500" b="0">
+                <a:solidFill>
+                  <a:srgbClr val="14141C"/>
+                </a:solidFill>
+                <a:latin typeface="Helvetica Neue"/>
+              </a:rPr>
+              <a:t>•  The search-interest group was removed on 22/09; Trends now selects three brands on attention alone and the tab reports what their pages measurably do differently from ING's.</a:t>
+            </a:r>
+          </a:p>
+          <a:p>
+            <a:pPr algn="l">
+              <a:lnSpc>
+                <a:spcPct val="105000"/>
+              </a:lnSpc>
+              <a:spcAft>
+                <a:spcPts val="900"/>
+              </a:spcAft>
+            </a:pPr>
+            <a:r>
+              <a:rPr sz="1500" b="0">
+                <a:solidFill>
+                  <a:srgbClr val="14141C"/>
+                </a:solidFill>
+                <a:latin typeface="Helvetica Neue"/>
+              </a:rPr>
+              <a:t>•  A reader ticks the ones worth building; only the ticked subset reaches the site builder.</a:t>
+            </a:r>
+          </a:p>
+          <a:p>
+            <a:pPr algn="l">
+              <a:lnSpc>
+                <a:spcPct val="105000"/>
+              </a:lnSpc>
+              <a:spcAft>
+                <a:spcPts val="900"/>
+              </a:spcAft>
+            </a:pPr>
+            <a:r>
+              <a:rPr sz="1500" b="0">
+                <a:solidFill>
+                  <a:srgbClr val="14141C"/>
+                </a:solidFill>
+                <a:latin typeface="Helvetica Neue"/>
+              </a:rPr>
+              <a:t>•  Nothing here re-runs collection or analysis — it reads one report and writes advice.</a:t>
+            </a:r>
+          </a:p>
+        </p:txBody>
+      </p:sp>
+      <p:sp>
+        <p:nvSpPr>
+          <p:cNvPr id="5" name="TextBox 4"/>
           <p:cNvSpPr txBox="1"/>
           <p:nvPr/>
         </p:nvSpPr>
@@ -19004,7 +19246,7 @@
       </p:sp>
       <p:sp>
         <p:nvSpPr>
-          <p:cNvPr id="7" name="TextBox 6"/>
+          <p:cNvPr id="6" name="TextBox 5"/>
           <p:cNvSpPr txBox="1"/>
           <p:nvPr/>
         </p:nvSpPr>
@@ -19039,7 +19281,7 @@
                 </a:solidFill>
                 <a:latin typeface="Helvetica Neue"/>
               </a:rPr>
-              <a:t>32</a:t>
+              <a:t>31</a:t>
             </a:r>
           </a:p>
         </p:txBody>
@@ -19077,8 +19319,8 @@
         </p:nvSpPr>
         <p:spPr>
           <a:xfrm>
-            <a:off x="548640" y="384048"/>
-            <a:ext cx="11064240" cy="731520"/>
+            <a:off x="548640" y="320040"/>
+            <a:ext cx="11064240" cy="640080"/>
           </a:xfrm>
           <a:prstGeom prst="rect">
             <a:avLst/>
@@ -19100,13 +19342,13 @@
               </a:spcAft>
             </a:pPr>
             <a:r>
-              <a:rPr sz="2800" b="1">
+              <a:rPr sz="2400" b="1">
                 <a:solidFill>
                   <a:srgbClr val="14141C"/>
                 </a:solidFill>
                 <a:latin typeface="Helvetica Neue"/>
               </a:rPr>
-              <a:t>Explanation mode: showing the work</a:t>
+              <a:t>The generated ING website, with explanations on</a:t>
             </a:r>
           </a:p>
         </p:txBody>
@@ -19119,8 +19361,8 @@
         </p:nvSpPr>
         <p:spPr>
           <a:xfrm>
-            <a:off x="548640" y="1115568"/>
-            <a:ext cx="1463040" cy="64008"/>
+            <a:off x="548640" y="960120"/>
+            <a:ext cx="1463040" cy="54864"/>
           </a:xfrm>
           <a:prstGeom prst="rect">
             <a:avLst/>
@@ -19156,16 +19398,40 @@
           </a:p>
         </p:txBody>
       </p:sp>
-      <p:sp>
-        <p:nvSpPr>
-          <p:cNvPr id="4" name="TextBox 3"/>
+      <p:pic>
+        <p:nvPicPr>
+          <p:cNvPr id="4" name="Picture 3" descr="06_site_explanation_open.png"/>
+          <p:cNvPicPr>
+            <a:picLocks noChangeAspect="1"/>
+          </p:cNvPicPr>
+          <p:nvPr/>
+        </p:nvPicPr>
+        <p:blipFill>
+          <a:blip r:embed="rId2"/>
+          <a:stretch>
+            <a:fillRect/>
+          </a:stretch>
+        </p:blipFill>
+        <p:spPr>
+          <a:xfrm>
+            <a:off x="1828647" y="1325880"/>
+            <a:ext cx="8534400" cy="4800600"/>
+          </a:xfrm>
+          <a:prstGeom prst="rect">
+            <a:avLst/>
+          </a:prstGeom>
+        </p:spPr>
+      </p:pic>
+      <p:sp>
+        <p:nvSpPr>
+          <p:cNvPr id="5" name="TextBox 4"/>
           <p:cNvSpPr txBox="1"/>
           <p:nvPr/>
         </p:nvSpPr>
         <p:spPr>
           <a:xfrm>
-            <a:off x="685800" y="1463040"/>
-            <a:ext cx="10881360" cy="4754880"/>
+            <a:off x="685800" y="6236208"/>
+            <a:ext cx="10881360" cy="457200"/>
           </a:xfrm>
           <a:prstGeom prst="rect">
             <a:avLst/>
@@ -19183,100 +19449,24 @@
                 <a:spcPct val="105000"/>
               </a:lnSpc>
               <a:spcAft>
-                <a:spcPts val="900"/>
-              </a:spcAft>
-            </a:pPr>
-            <a:r>
-              <a:rPr sz="1500" b="0">
-                <a:solidFill>
-                  <a:srgbClr val="14141C"/>
-                </a:solidFill>
-                <a:latin typeface="Helvetica Neue"/>
-              </a:rPr>
-              <a:t>•  Tick 'Explain each section' and every generated section that acts on a recommendation is boxed, with an (i) button and a one-sentence rationale in the page language.</a:t>
-            </a:r>
-          </a:p>
-          <a:p>
-            <a:pPr algn="l">
-              <a:lnSpc>
-                <a:spcPct val="105000"/>
-              </a:lnSpc>
-              <a:spcAft>
-                <a:spcPts val="900"/>
-              </a:spcAft>
-            </a:pPr>
-            <a:r>
-              <a:rPr sz="1500" b="0">
-                <a:solidFill>
-                  <a:srgbClr val="14141C"/>
-                </a:solidFill>
-                <a:latin typeface="Helvetica Neue"/>
-              </a:rPr>
-              <a:t>•  Yellow flicker while an explanation is open — deliberately not ING orange, so the explanation state cannot be mistaken for the brand treatment.</a:t>
-            </a:r>
-          </a:p>
-          <a:p>
-            <a:pPr algn="l">
-              <a:lnSpc>
-                <a:spcPct val="105000"/>
-              </a:lnSpc>
-              <a:spcAft>
-                <a:spcPts val="900"/>
-              </a:spcAft>
-            </a:pPr>
-            <a:r>
-              <a:rPr sz="1500" b="0">
-                <a:solidFill>
-                  <a:srgbClr val="14141C"/>
-                </a:solidFill>
-                <a:latin typeface="Helvetica Neue"/>
-              </a:rPr>
-              <a:t>•  A switch above the site turns the whole layer off, and the choice is remembered across the ten pages — so the same site can be shown as a normal site.</a:t>
-            </a:r>
-          </a:p>
-          <a:p>
-            <a:pPr algn="l">
-              <a:lnSpc>
-                <a:spcPct val="105000"/>
-              </a:lnSpc>
-              <a:spcAft>
-                <a:spcPts val="900"/>
-              </a:spcAft>
-            </a:pPr>
-            <a:r>
-              <a:rPr sz="1500" b="0">
-                <a:solidFill>
-                  <a:srgbClr val="14141C"/>
-                </a:solidFill>
-                <a:latin typeface="Helvetica Neue"/>
-              </a:rPr>
-              <a:t>•  Every page gets at least one box; pages no recommendation targets borrow the site-wide advice that applies.</a:t>
-            </a:r>
-          </a:p>
-          <a:p>
-            <a:pPr algn="l">
-              <a:lnSpc>
-                <a:spcPct val="105000"/>
-              </a:lnSpc>
-              <a:spcAft>
-                <a:spcPts val="900"/>
-              </a:spcAft>
-            </a:pPr>
-            <a:r>
-              <a:rPr sz="1500" b="0">
-                <a:solidFill>
-                  <a:srgbClr val="14141C"/>
-                </a:solidFill>
-                <a:latin typeface="Helvetica Neue"/>
-              </a:rPr>
-              <a:t>•  The first explained run produced copy about the recommendations themselves, so the page prompt now forbids meta copy and confines 'why' to the rationale.</a:t>
-            </a:r>
-          </a:p>
-        </p:txBody>
-      </p:sp>
-      <p:sp>
-        <p:nvSpPr>
-          <p:cNvPr id="5" name="TextBox 4"/>
+                <a:spcPts val="600"/>
+              </a:spcAft>
+            </a:pPr>
+            <a:r>
+              <a:rPr sz="1200" b="0">
+                <a:solidFill>
+                  <a:srgbClr val="585868"/>
+                </a:solidFill>
+                <a:latin typeface="Helvetica Neue"/>
+              </a:rPr>
+              <a:t>An illustration, not a proposal for ING's site: each section that implements a recommendation is boxed, the (i) button opens the reasoning above it, and that section's glow switches to a slow yellow flicker.</a:t>
+            </a:r>
+          </a:p>
+        </p:txBody>
+      </p:sp>
+      <p:sp>
+        <p:nvSpPr>
+          <p:cNvPr id="6" name="TextBox 5"/>
           <p:cNvSpPr txBox="1"/>
           <p:nvPr/>
         </p:nvSpPr>
@@ -19318,7 +19508,7 @@
       </p:sp>
       <p:sp>
         <p:nvSpPr>
-          <p:cNvPr id="6" name="TextBox 5"/>
+          <p:cNvPr id="7" name="TextBox 6"/>
           <p:cNvSpPr txBox="1"/>
           <p:nvPr/>
         </p:nvSpPr>
@@ -19353,7 +19543,7 @@
                 </a:solidFill>
                 <a:latin typeface="Helvetica Neue"/>
               </a:rPr>
-              <a:t>33</a:t>
+              <a:t>32</a:t>
             </a:r>
           </a:p>
         </p:txBody>
@@ -19391,8 +19581,8 @@
         </p:nvSpPr>
         <p:spPr>
           <a:xfrm>
-            <a:off x="548640" y="320040"/>
-            <a:ext cx="11064240" cy="640080"/>
+            <a:off x="548640" y="384048"/>
+            <a:ext cx="11064240" cy="731520"/>
           </a:xfrm>
           <a:prstGeom prst="rect">
             <a:avLst/>
@@ -19414,13 +19604,13 @@
               </a:spcAft>
             </a:pPr>
             <a:r>
-              <a:rPr sz="2400" b="1">
+              <a:rPr sz="2800" b="1">
                 <a:solidFill>
                   <a:srgbClr val="14141C"/>
                 </a:solidFill>
                 <a:latin typeface="Helvetica Neue"/>
               </a:rPr>
-              <a:t>The same site, explanations off</a:t>
+              <a:t>Explanation mode: showing the work</a:t>
             </a:r>
           </a:p>
         </p:txBody>
@@ -19433,8 +19623,8 @@
         </p:nvSpPr>
         <p:spPr>
           <a:xfrm>
-            <a:off x="548640" y="960120"/>
-            <a:ext cx="1463040" cy="54864"/>
+            <a:off x="548640" y="1115568"/>
+            <a:ext cx="1463040" cy="64008"/>
           </a:xfrm>
           <a:prstGeom prst="rect">
             <a:avLst/>
@@ -19470,40 +19660,16 @@
           </a:p>
         </p:txBody>
       </p:sp>
-      <p:pic>
-        <p:nvPicPr>
-          <p:cNvPr id="4" name="Picture 3" descr="07_site_explain_off.png"/>
-          <p:cNvPicPr>
-            <a:picLocks noChangeAspect="1"/>
-          </p:cNvPicPr>
-          <p:nvPr/>
-        </p:nvPicPr>
-        <p:blipFill>
-          <a:blip r:embed="rId2"/>
-          <a:stretch>
-            <a:fillRect/>
-          </a:stretch>
-        </p:blipFill>
-        <p:spPr>
-          <a:xfrm>
-            <a:off x="1828647" y="1325880"/>
-            <a:ext cx="8534400" cy="4800600"/>
-          </a:xfrm>
-          <a:prstGeom prst="rect">
-            <a:avLst/>
-          </a:prstGeom>
-        </p:spPr>
-      </p:pic>
-      <p:sp>
-        <p:nvSpPr>
-          <p:cNvPr id="5" name="TextBox 4"/>
+      <p:sp>
+        <p:nvSpPr>
+          <p:cNvPr id="4" name="TextBox 3"/>
           <p:cNvSpPr txBox="1"/>
           <p:nvPr/>
         </p:nvSpPr>
         <p:spPr>
           <a:xfrm>
-            <a:off x="685800" y="6236208"/>
-            <a:ext cx="10881360" cy="457200"/>
+            <a:off x="685800" y="1463040"/>
+            <a:ext cx="10881360" cy="4754880"/>
           </a:xfrm>
           <a:prstGeom prst="rect">
             <a:avLst/>
@@ -19521,24 +19687,100 @@
                 <a:spcPct val="105000"/>
               </a:lnSpc>
               <a:spcAft>
-                <a:spcPts val="600"/>
-              </a:spcAft>
-            </a:pPr>
-            <a:r>
-              <a:rPr sz="1200" b="0">
-                <a:solidFill>
-                  <a:srgbClr val="585868"/>
-                </a:solidFill>
-                <a:latin typeface="Helvetica Neue"/>
-              </a:rPr>
-              <a:t>One checkbox above the site hides every box, balloon and rationale — the identical pages, shown as a normal site.</a:t>
-            </a:r>
-          </a:p>
-        </p:txBody>
-      </p:sp>
-      <p:sp>
-        <p:nvSpPr>
-          <p:cNvPr id="6" name="TextBox 5"/>
+                <a:spcPts val="900"/>
+              </a:spcAft>
+            </a:pPr>
+            <a:r>
+              <a:rPr sz="1500" b="0">
+                <a:solidFill>
+                  <a:srgbClr val="14141C"/>
+                </a:solidFill>
+                <a:latin typeface="Helvetica Neue"/>
+              </a:rPr>
+              <a:t>•  Tick 'Explain each section' and every generated section that acts on a recommendation is boxed, with an (i) button and a one-sentence rationale in the page language.</a:t>
+            </a:r>
+          </a:p>
+          <a:p>
+            <a:pPr algn="l">
+              <a:lnSpc>
+                <a:spcPct val="105000"/>
+              </a:lnSpc>
+              <a:spcAft>
+                <a:spcPts val="900"/>
+              </a:spcAft>
+            </a:pPr>
+            <a:r>
+              <a:rPr sz="1500" b="0">
+                <a:solidFill>
+                  <a:srgbClr val="14141C"/>
+                </a:solidFill>
+                <a:latin typeface="Helvetica Neue"/>
+              </a:rPr>
+              <a:t>•  Yellow flicker while an explanation is open — deliberately not ING orange, so the explanation state cannot be mistaken for the brand treatment.</a:t>
+            </a:r>
+          </a:p>
+          <a:p>
+            <a:pPr algn="l">
+              <a:lnSpc>
+                <a:spcPct val="105000"/>
+              </a:lnSpc>
+              <a:spcAft>
+                <a:spcPts val="900"/>
+              </a:spcAft>
+            </a:pPr>
+            <a:r>
+              <a:rPr sz="1500" b="0">
+                <a:solidFill>
+                  <a:srgbClr val="14141C"/>
+                </a:solidFill>
+                <a:latin typeface="Helvetica Neue"/>
+              </a:rPr>
+              <a:t>•  A switch above the site turns the whole layer off, and the choice is remembered across the ten pages — so the same site can be shown as a normal site.</a:t>
+            </a:r>
+          </a:p>
+          <a:p>
+            <a:pPr algn="l">
+              <a:lnSpc>
+                <a:spcPct val="105000"/>
+              </a:lnSpc>
+              <a:spcAft>
+                <a:spcPts val="900"/>
+              </a:spcAft>
+            </a:pPr>
+            <a:r>
+              <a:rPr sz="1500" b="0">
+                <a:solidFill>
+                  <a:srgbClr val="14141C"/>
+                </a:solidFill>
+                <a:latin typeface="Helvetica Neue"/>
+              </a:rPr>
+              <a:t>•  Every page gets at least one box; pages no recommendation targets borrow the site-wide advice that applies.</a:t>
+            </a:r>
+          </a:p>
+          <a:p>
+            <a:pPr algn="l">
+              <a:lnSpc>
+                <a:spcPct val="105000"/>
+              </a:lnSpc>
+              <a:spcAft>
+                <a:spcPts val="900"/>
+              </a:spcAft>
+            </a:pPr>
+            <a:r>
+              <a:rPr sz="1500" b="0">
+                <a:solidFill>
+                  <a:srgbClr val="14141C"/>
+                </a:solidFill>
+                <a:latin typeface="Helvetica Neue"/>
+              </a:rPr>
+              <a:t>•  The first explained run produced copy about the recommendations themselves, so the page prompt now forbids meta copy and confines 'why' to the rationale.</a:t>
+            </a:r>
+          </a:p>
+        </p:txBody>
+      </p:sp>
+      <p:sp>
+        <p:nvSpPr>
+          <p:cNvPr id="5" name="TextBox 4"/>
           <p:cNvSpPr txBox="1"/>
           <p:nvPr/>
         </p:nvSpPr>
@@ -19580,7 +19822,7 @@
       </p:sp>
       <p:sp>
         <p:nvSpPr>
-          <p:cNvPr id="7" name="TextBox 6"/>
+          <p:cNvPr id="6" name="TextBox 5"/>
           <p:cNvSpPr txBox="1"/>
           <p:nvPr/>
         </p:nvSpPr>
@@ -19615,7 +19857,7 @@
                 </a:solidFill>
                 <a:latin typeface="Helvetica Neue"/>
               </a:rPr>
-              <a:t>34</a:t>
+              <a:t>33</a:t>
             </a:r>
           </a:p>
         </p:txBody>
@@ -19653,8 +19895,8 @@
         </p:nvSpPr>
         <p:spPr>
           <a:xfrm>
-            <a:off x="548640" y="384048"/>
-            <a:ext cx="11064240" cy="731520"/>
+            <a:off x="548640" y="320040"/>
+            <a:ext cx="11064240" cy="640080"/>
           </a:xfrm>
           <a:prstGeom prst="rect">
             <a:avLst/>
@@ -19676,13 +19918,13 @@
               </a:spcAft>
             </a:pPr>
             <a:r>
-              <a:rPr sz="2800" b="1">
+              <a:rPr sz="2400" b="1">
                 <a:solidFill>
                   <a:srgbClr val="14141C"/>
                 </a:solidFill>
                 <a:latin typeface="Helvetica Neue"/>
               </a:rPr>
-              <a:t>The operator tabs, and what they refuse to do</a:t>
+              <a:t>The same site, explanations off</a:t>
             </a:r>
           </a:p>
         </p:txBody>
@@ -19695,8 +19937,8 @@
         </p:nvSpPr>
         <p:spPr>
           <a:xfrm>
-            <a:off x="548640" y="1115568"/>
-            <a:ext cx="1463040" cy="64008"/>
+            <a:off x="548640" y="960120"/>
+            <a:ext cx="1463040" cy="54864"/>
           </a:xfrm>
           <a:prstGeom prst="rect">
             <a:avLst/>
@@ -19732,16 +19974,40 @@
           </a:p>
         </p:txBody>
       </p:sp>
-      <p:sp>
-        <p:nvSpPr>
-          <p:cNvPr id="4" name="TextBox 3"/>
+      <p:pic>
+        <p:nvPicPr>
+          <p:cNvPr id="4" name="Picture 3" descr="07_site_explain_off.png"/>
+          <p:cNvPicPr>
+            <a:picLocks noChangeAspect="1"/>
+          </p:cNvPicPr>
+          <p:nvPr/>
+        </p:nvPicPr>
+        <p:blipFill>
+          <a:blip r:embed="rId2"/>
+          <a:stretch>
+            <a:fillRect/>
+          </a:stretch>
+        </p:blipFill>
+        <p:spPr>
+          <a:xfrm>
+            <a:off x="1828647" y="1325880"/>
+            <a:ext cx="8534400" cy="4800600"/>
+          </a:xfrm>
+          <a:prstGeom prst="rect">
+            <a:avLst/>
+          </a:prstGeom>
+        </p:spPr>
+      </p:pic>
+      <p:sp>
+        <p:nvSpPr>
+          <p:cNvPr id="5" name="TextBox 4"/>
           <p:cNvSpPr txBox="1"/>
           <p:nvPr/>
         </p:nvSpPr>
         <p:spPr>
           <a:xfrm>
-            <a:off x="685800" y="1463040"/>
-            <a:ext cx="10881360" cy="4754880"/>
+            <a:off x="685800" y="6236208"/>
+            <a:ext cx="10881360" cy="457200"/>
           </a:xfrm>
           <a:prstGeom prst="rect">
             <a:avLst/>
@@ -19759,230 +20025,24 @@
                 <a:spcPct val="105000"/>
               </a:lnSpc>
               <a:spcAft>
-                <a:spcPts val="200"/>
-              </a:spcAft>
-            </a:pPr>
-            <a:r>
-              <a:rPr sz="1500" b="1">
-                <a:solidFill>
-                  <a:srgbClr val="14141C"/>
-                </a:solidFill>
-                <a:latin typeface="Helvetica Neue"/>
-              </a:rPr>
-              <a:t>•  Six read-only views, moved out of the Streamlit dashboard</a:t>
-            </a:r>
-          </a:p>
-          <a:p>
-            <a:pPr algn="l">
-              <a:lnSpc>
-                <a:spcPct val="105000"/>
-              </a:lnSpc>
-              <a:spcAft>
-                <a:spcPts val="1000"/>
-              </a:spcAft>
-            </a:pPr>
-            <a:r>
-              <a:rPr sz="1300" b="0">
+                <a:spcPts val="600"/>
+              </a:spcAft>
+            </a:pPr>
+            <a:r>
+              <a:rPr sz="1200" b="0">
                 <a:solidFill>
                   <a:srgbClr val="585868"/>
                 </a:solidFill>
                 <a:latin typeface="Helvetica Neue"/>
               </a:rPr>
-              <a:t>     Home, Bank profiles, Data, Rubric, Collection and Research now render in the same UI as the findings, from one snapshot the exporter writes: operations.json.</a:t>
-            </a:r>
-          </a:p>
-          <a:p>
-            <a:pPr algn="l">
-              <a:lnSpc>
-                <a:spcPct val="105000"/>
-              </a:lnSpc>
-              <a:spcAft>
-                <a:spcPts val="200"/>
-              </a:spcAft>
-            </a:pPr>
-            <a:r>
-              <a:rPr sz="1500" b="1">
-                <a:solidFill>
-                  <a:srgbClr val="14141C"/>
-                </a:solidFill>
-                <a:latin typeface="Helvetica Neue"/>
-              </a:rPr>
-              <a:t>•  No pipeline control</a:t>
-            </a:r>
-          </a:p>
-          <a:p>
-            <a:pPr algn="l">
-              <a:lnSpc>
-                <a:spcPct val="105000"/>
-              </a:lnSpc>
-              <a:spcAft>
-                <a:spcPts val="1000"/>
-              </a:spcAft>
-            </a:pPr>
-            <a:r>
-              <a:rPr sz="1300" b="0">
-                <a:solidFill>
-                  <a:srgbClr val="585868"/>
-                </a:solidFill>
-                <a:latin typeface="Helvetica Neue"/>
-              </a:rPr>
-              <a:t>     Collection is slow and needs a job model, and the robots.txt gate must stay server-side and non-overridable — so there is no 'run collection' button in a browser.</a:t>
-            </a:r>
-          </a:p>
-          <a:p>
-            <a:pPr algn="l">
-              <a:lnSpc>
-                <a:spcPct val="105000"/>
-              </a:lnSpc>
-              <a:spcAft>
-                <a:spcPts val="200"/>
-              </a:spcAft>
-            </a:pPr>
-            <a:r>
-              <a:rPr sz="1500" b="1">
-                <a:solidFill>
-                  <a:srgbClr val="14141C"/>
-                </a:solidFill>
-                <a:latin typeface="Helvetica Neue"/>
-              </a:rPr>
-              <a:t>•  No dataset or dictionary editing</a:t>
-            </a:r>
-          </a:p>
-          <a:p>
-            <a:pPr algn="l">
-              <a:lnSpc>
-                <a:spcPct val="105000"/>
-              </a:lnSpc>
-              <a:spcAft>
-                <a:spcPts val="1000"/>
-              </a:spcAft>
-            </a:pPr>
-            <a:r>
-              <a:rPr sz="1300" b="0">
-                <a:solidFill>
-                  <a:srgbClr val="585868"/>
-                </a:solidFill>
-                <a:latin typeface="Helvetica Neue"/>
-              </a:rPr>
-              <a:t>     The dictionary is the frozen contract (P-04); a form that edited it would undo the freeze rule, and a form that edited an extracted feature would destroy its audit trail.</a:t>
-            </a:r>
-          </a:p>
-          <a:p>
-            <a:pPr algn="l">
-              <a:lnSpc>
-                <a:spcPct val="105000"/>
-              </a:lnSpc>
-              <a:spcAft>
-                <a:spcPts val="200"/>
-              </a:spcAft>
-            </a:pPr>
-            <a:r>
-              <a:rPr sz="1500" b="1">
-                <a:solidFill>
-                  <a:srgbClr val="14141C"/>
-                </a:solidFill>
-                <a:latin typeface="Helvetica Neue"/>
-              </a:rPr>
-              <a:t>•  No live scoring screen</a:t>
-            </a:r>
-          </a:p>
-          <a:p>
-            <a:pPr algn="l">
-              <a:lnSpc>
-                <a:spcPct val="105000"/>
-              </a:lnSpc>
-              <a:spcAft>
-                <a:spcPts val="1000"/>
-              </a:spcAft>
-            </a:pPr>
-            <a:r>
-              <a:rPr sz="1300" b="0">
-                <a:solidFill>
-                  <a:srgbClr val="585868"/>
-                </a:solidFill>
-                <a:latin typeface="Helvetica Neue"/>
-              </a:rPr>
-              <a:t>     The Rubric tab shows finished sheets only. A screen that displayed a rater's neighbours would make the agreement figure measure visibility, not independent judgement (NFR-05).</a:t>
-            </a:r>
-          </a:p>
-          <a:p>
-            <a:pPr algn="l">
-              <a:lnSpc>
-                <a:spcPct val="105000"/>
-              </a:lnSpc>
-              <a:spcAft>
-                <a:spcPts val="200"/>
-              </a:spcAft>
-            </a:pPr>
-            <a:r>
-              <a:rPr sz="1500" b="1">
-                <a:solidFill>
-                  <a:srgbClr val="14141C"/>
-                </a:solidFill>
-                <a:latin typeface="Helvetica Neue"/>
-              </a:rPr>
-              <a:t>•  One direction only</a:t>
-            </a:r>
-          </a:p>
-          <a:p>
-            <a:pPr algn="l">
-              <a:lnSpc>
-                <a:spcPct val="105000"/>
-              </a:lnSpc>
-              <a:spcAft>
-                <a:spcPts val="1000"/>
-              </a:spcAft>
-            </a:pPr>
-            <a:r>
-              <a:rPr sz="1300" b="0">
-                <a:solidFill>
-                  <a:srgbClr val="585868"/>
-                </a:solidFill>
-                <a:latin typeface="Helvetica Neue"/>
-              </a:rPr>
-              <a:t>     The UI does no arithmetic: every number is computed in Python and handed over already labelled, so no figure on screen has a second definition.</a:t>
-            </a:r>
-          </a:p>
-          <a:p>
-            <a:pPr algn="l">
-              <a:lnSpc>
-                <a:spcPct val="105000"/>
-              </a:lnSpc>
-              <a:spcAft>
-                <a:spcPts val="200"/>
-              </a:spcAft>
-            </a:pPr>
-            <a:endParaRPr sz="1300" b="0">
-              <a:solidFill>
-                <a:srgbClr val="585868"/>
-              </a:solidFill>
-              <a:latin typeface="Helvetica Neue"/>
-            </a:endParaRPr>
-          </a:p>
-          <a:p>
-            <a:pPr algn="l">
-              <a:lnSpc>
-                <a:spcPct val="105000"/>
-              </a:lnSpc>
-              <a:spcAft>
-                <a:spcPts val="0"/>
-              </a:spcAft>
-            </a:pPr>
-            <a:r>
-              <a:rPr sz="1250" b="0">
-                <a:solidFill>
-                  <a:srgbClr val="585868"/>
-                </a:solidFill>
-                <a:latin typeface="Helvetica Neue"/>
-              </a:rPr>
-              <a:t>The Streamlit file stays in the repository for share.streamlit.io; it is no longer the only place these views exist.</a:t>
-            </a:r>
-          </a:p>
-        </p:txBody>
-      </p:sp>
-      <p:sp>
-        <p:nvSpPr>
-          <p:cNvPr id="5" name="TextBox 4"/>
+              <a:t>One checkbox above the site hides every box, balloon and rationale — the identical pages, shown as a normal site.</a:t>
+            </a:r>
+          </a:p>
+        </p:txBody>
+      </p:sp>
+      <p:sp>
+        <p:nvSpPr>
+          <p:cNvPr id="6" name="TextBox 5"/>
           <p:cNvSpPr txBox="1"/>
           <p:nvPr/>
         </p:nvSpPr>
@@ -20024,7 +20084,7 @@
       </p:sp>
       <p:sp>
         <p:nvSpPr>
-          <p:cNvPr id="6" name="TextBox 5"/>
+          <p:cNvPr id="7" name="TextBox 6"/>
           <p:cNvSpPr txBox="1"/>
           <p:nvPr/>
         </p:nvSpPr>
@@ -20059,7 +20119,7 @@
                 </a:solidFill>
                 <a:latin typeface="Helvetica Neue"/>
               </a:rPr>
-              <a:t>35</a:t>
+              <a:t>34</a:t>
             </a:r>
           </a:p>
         </p:txBody>
@@ -20097,8 +20157,8 @@
         </p:nvSpPr>
         <p:spPr>
           <a:xfrm>
-            <a:off x="548640" y="320040"/>
-            <a:ext cx="11064240" cy="640080"/>
+            <a:off x="548640" y="384048"/>
+            <a:ext cx="11064240" cy="731520"/>
           </a:xfrm>
           <a:prstGeom prst="rect">
             <a:avLst/>
@@ -20120,13 +20180,13 @@
               </a:spcAft>
             </a:pPr>
             <a:r>
-              <a:rPr sz="2400" b="1">
+              <a:rPr sz="2800" b="1">
                 <a:solidFill>
                   <a:srgbClr val="14141C"/>
                 </a:solidFill>
                 <a:latin typeface="Helvetica Neue"/>
               </a:rPr>
-              <a:t>Home: what was collected, and what comes out</a:t>
+              <a:t>The operator tabs, and what they refuse to do</a:t>
             </a:r>
           </a:p>
         </p:txBody>
@@ -20139,8 +20199,8 @@
         </p:nvSpPr>
         <p:spPr>
           <a:xfrm>
-            <a:off x="548640" y="960120"/>
-            <a:ext cx="1463040" cy="54864"/>
+            <a:off x="548640" y="1115568"/>
+            <a:ext cx="1463040" cy="64008"/>
           </a:xfrm>
           <a:prstGeom prst="rect">
             <a:avLst/>
@@ -20176,40 +20236,16 @@
           </a:p>
         </p:txBody>
       </p:sp>
-      <p:pic>
-        <p:nvPicPr>
-          <p:cNvPr id="4" name="Picture 3" descr="08_home.png"/>
-          <p:cNvPicPr>
-            <a:picLocks noChangeAspect="1"/>
-          </p:cNvPicPr>
-          <p:nvPr/>
-        </p:nvPicPr>
-        <p:blipFill>
-          <a:blip r:embed="rId2"/>
-          <a:stretch>
-            <a:fillRect/>
-          </a:stretch>
-        </p:blipFill>
-        <p:spPr>
-          <a:xfrm>
-            <a:off x="2113127" y="1325880"/>
-            <a:ext cx="7965440" cy="4480560"/>
-          </a:xfrm>
-          <a:prstGeom prst="rect">
-            <a:avLst/>
-          </a:prstGeom>
-        </p:spPr>
-      </p:pic>
-      <p:sp>
-        <p:nvSpPr>
-          <p:cNvPr id="5" name="TextBox 4"/>
+      <p:sp>
+        <p:nvSpPr>
+          <p:cNvPr id="4" name="TextBox 3"/>
           <p:cNvSpPr txBox="1"/>
           <p:nvPr/>
         </p:nvSpPr>
         <p:spPr>
           <a:xfrm>
-            <a:off x="685800" y="5916168"/>
-            <a:ext cx="10881360" cy="457200"/>
+            <a:off x="685800" y="1463040"/>
+            <a:ext cx="10881360" cy="4754880"/>
           </a:xfrm>
           <a:prstGeom prst="rect">
             <a:avLst/>
@@ -20227,24 +20263,230 @@
                 <a:spcPct val="105000"/>
               </a:lnSpc>
               <a:spcAft>
-                <a:spcPts val="600"/>
-              </a:spcAft>
-            </a:pPr>
-            <a:r>
-              <a:rPr sz="1200" b="0">
+                <a:spcPts val="200"/>
+              </a:spcAft>
+            </a:pPr>
+            <a:r>
+              <a:rPr sz="1500" b="1">
+                <a:solidFill>
+                  <a:srgbClr val="14141C"/>
+                </a:solidFill>
+                <a:latin typeface="Helvetica Neue"/>
+              </a:rPr>
+              <a:t>•  Six read-only views, moved out of the Streamlit dashboard</a:t>
+            </a:r>
+          </a:p>
+          <a:p>
+            <a:pPr algn="l">
+              <a:lnSpc>
+                <a:spcPct val="105000"/>
+              </a:lnSpc>
+              <a:spcAft>
+                <a:spcPts val="1000"/>
+              </a:spcAft>
+            </a:pPr>
+            <a:r>
+              <a:rPr sz="1300" b="0">
                 <a:solidFill>
                   <a:srgbClr val="585868"/>
                 </a:solidFill>
                 <a:latin typeface="Helvetica Neue"/>
               </a:rPr>
-              <a:t>Four counts from the run, the validation verdict, every bank's status, and a download per deliverable.</a:t>
-            </a:r>
-          </a:p>
-        </p:txBody>
-      </p:sp>
-      <p:sp>
-        <p:nvSpPr>
-          <p:cNvPr id="6" name="TextBox 5"/>
+              <a:t>     Home, Bank profiles, Data, Rubric, Collection and Research now render in the same UI as the findings, from one snapshot the exporter writes: operations.json.</a:t>
+            </a:r>
+          </a:p>
+          <a:p>
+            <a:pPr algn="l">
+              <a:lnSpc>
+                <a:spcPct val="105000"/>
+              </a:lnSpc>
+              <a:spcAft>
+                <a:spcPts val="200"/>
+              </a:spcAft>
+            </a:pPr>
+            <a:r>
+              <a:rPr sz="1500" b="1">
+                <a:solidFill>
+                  <a:srgbClr val="14141C"/>
+                </a:solidFill>
+                <a:latin typeface="Helvetica Neue"/>
+              </a:rPr>
+              <a:t>•  No pipeline control</a:t>
+            </a:r>
+          </a:p>
+          <a:p>
+            <a:pPr algn="l">
+              <a:lnSpc>
+                <a:spcPct val="105000"/>
+              </a:lnSpc>
+              <a:spcAft>
+                <a:spcPts val="1000"/>
+              </a:spcAft>
+            </a:pPr>
+            <a:r>
+              <a:rPr sz="1300" b="0">
+                <a:solidFill>
+                  <a:srgbClr val="585868"/>
+                </a:solidFill>
+                <a:latin typeface="Helvetica Neue"/>
+              </a:rPr>
+              <a:t>     Collection is slow and needs a job model, and the robots.txt gate must stay server-side and non-overridable — so there is no 'run collection' button in a browser.</a:t>
+            </a:r>
+          </a:p>
+          <a:p>
+            <a:pPr algn="l">
+              <a:lnSpc>
+                <a:spcPct val="105000"/>
+              </a:lnSpc>
+              <a:spcAft>
+                <a:spcPts val="200"/>
+              </a:spcAft>
+            </a:pPr>
+            <a:r>
+              <a:rPr sz="1500" b="1">
+                <a:solidFill>
+                  <a:srgbClr val="14141C"/>
+                </a:solidFill>
+                <a:latin typeface="Helvetica Neue"/>
+              </a:rPr>
+              <a:t>•  No dataset or dictionary editing</a:t>
+            </a:r>
+          </a:p>
+          <a:p>
+            <a:pPr algn="l">
+              <a:lnSpc>
+                <a:spcPct val="105000"/>
+              </a:lnSpc>
+              <a:spcAft>
+                <a:spcPts val="1000"/>
+              </a:spcAft>
+            </a:pPr>
+            <a:r>
+              <a:rPr sz="1300" b="0">
+                <a:solidFill>
+                  <a:srgbClr val="585868"/>
+                </a:solidFill>
+                <a:latin typeface="Helvetica Neue"/>
+              </a:rPr>
+              <a:t>     The dictionary is the frozen contract (P-04); a form that edited it would undo the freeze rule, and a form that edited an extracted feature would destroy its audit trail.</a:t>
+            </a:r>
+          </a:p>
+          <a:p>
+            <a:pPr algn="l">
+              <a:lnSpc>
+                <a:spcPct val="105000"/>
+              </a:lnSpc>
+              <a:spcAft>
+                <a:spcPts val="200"/>
+              </a:spcAft>
+            </a:pPr>
+            <a:r>
+              <a:rPr sz="1500" b="1">
+                <a:solidFill>
+                  <a:srgbClr val="14141C"/>
+                </a:solidFill>
+                <a:latin typeface="Helvetica Neue"/>
+              </a:rPr>
+              <a:t>•  No live scoring screen</a:t>
+            </a:r>
+          </a:p>
+          <a:p>
+            <a:pPr algn="l">
+              <a:lnSpc>
+                <a:spcPct val="105000"/>
+              </a:lnSpc>
+              <a:spcAft>
+                <a:spcPts val="1000"/>
+              </a:spcAft>
+            </a:pPr>
+            <a:r>
+              <a:rPr sz="1300" b="0">
+                <a:solidFill>
+                  <a:srgbClr val="585868"/>
+                </a:solidFill>
+                <a:latin typeface="Helvetica Neue"/>
+              </a:rPr>
+              <a:t>     The Rubric tab shows finished sheets only. A screen that displayed a rater's neighbours would make the agreement figure measure visibility, not independent judgement (NFR-05).</a:t>
+            </a:r>
+          </a:p>
+          <a:p>
+            <a:pPr algn="l">
+              <a:lnSpc>
+                <a:spcPct val="105000"/>
+              </a:lnSpc>
+              <a:spcAft>
+                <a:spcPts val="200"/>
+              </a:spcAft>
+            </a:pPr>
+            <a:r>
+              <a:rPr sz="1500" b="1">
+                <a:solidFill>
+                  <a:srgbClr val="14141C"/>
+                </a:solidFill>
+                <a:latin typeface="Helvetica Neue"/>
+              </a:rPr>
+              <a:t>•  One direction only</a:t>
+            </a:r>
+          </a:p>
+          <a:p>
+            <a:pPr algn="l">
+              <a:lnSpc>
+                <a:spcPct val="105000"/>
+              </a:lnSpc>
+              <a:spcAft>
+                <a:spcPts val="1000"/>
+              </a:spcAft>
+            </a:pPr>
+            <a:r>
+              <a:rPr sz="1300" b="0">
+                <a:solidFill>
+                  <a:srgbClr val="585868"/>
+                </a:solidFill>
+                <a:latin typeface="Helvetica Neue"/>
+              </a:rPr>
+              <a:t>     The UI does no arithmetic: every number is computed in Python and handed over already labelled, so no figure on screen has a second definition.</a:t>
+            </a:r>
+          </a:p>
+          <a:p>
+            <a:pPr algn="l">
+              <a:lnSpc>
+                <a:spcPct val="105000"/>
+              </a:lnSpc>
+              <a:spcAft>
+                <a:spcPts val="200"/>
+              </a:spcAft>
+            </a:pPr>
+            <a:endParaRPr sz="1300" b="0">
+              <a:solidFill>
+                <a:srgbClr val="585868"/>
+              </a:solidFill>
+              <a:latin typeface="Helvetica Neue"/>
+            </a:endParaRPr>
+          </a:p>
+          <a:p>
+            <a:pPr algn="l">
+              <a:lnSpc>
+                <a:spcPct val="105000"/>
+              </a:lnSpc>
+              <a:spcAft>
+                <a:spcPts val="0"/>
+              </a:spcAft>
+            </a:pPr>
+            <a:r>
+              <a:rPr sz="1250" b="0">
+                <a:solidFill>
+                  <a:srgbClr val="585868"/>
+                </a:solidFill>
+                <a:latin typeface="Helvetica Neue"/>
+              </a:rPr>
+              <a:t>The Streamlit file stays in the repository for share.streamlit.io; it is no longer the only place these views exist.</a:t>
+            </a:r>
+          </a:p>
+        </p:txBody>
+      </p:sp>
+      <p:sp>
+        <p:nvSpPr>
+          <p:cNvPr id="5" name="TextBox 4"/>
           <p:cNvSpPr txBox="1"/>
           <p:nvPr/>
         </p:nvSpPr>
@@ -20286,7 +20528,7 @@
       </p:sp>
       <p:sp>
         <p:nvSpPr>
-          <p:cNvPr id="7" name="TextBox 6"/>
+          <p:cNvPr id="6" name="TextBox 5"/>
           <p:cNvSpPr txBox="1"/>
           <p:nvPr/>
         </p:nvSpPr>
@@ -20321,7 +20563,7 @@
                 </a:solidFill>
                 <a:latin typeface="Helvetica Neue"/>
               </a:rPr>
-              <a:t>36</a:t>
+              <a:t>35</a:t>
             </a:r>
           </a:p>
         </p:txBody>
@@ -20388,7 +20630,7 @@
                 </a:solidFill>
                 <a:latin typeface="Helvetica Neue"/>
               </a:rPr>
-              <a:t>Bank profiles: one bank, every measured field</a:t>
+              <a:t>Home: what was collected, and what comes out</a:t>
             </a:r>
           </a:p>
         </p:txBody>
@@ -20440,7 +20682,7 @@
       </p:sp>
       <p:pic>
         <p:nvPicPr>
-          <p:cNvPr id="4" name="Picture 3" descr="09_profiles.png"/>
+          <p:cNvPr id="4" name="Picture 3" descr="08_home.png"/>
           <p:cNvPicPr>
             <a:picLocks noChangeAspect="1"/>
           </p:cNvPicPr>
@@ -20499,7 +20741,7 @@
                 </a:solidFill>
                 <a:latin typeface="Helvetica Neue"/>
               </a:rPr>
-              <a:t>Palette, tone, imagery, layout, value proposition, the z-score signature, personas and the AI Score.</a:t>
+              <a:t>Four counts from the run, the validation verdict, every bank's status, and a download per deliverable.</a:t>
             </a:r>
           </a:p>
         </p:txBody>
@@ -20583,7 +20825,7 @@
                 </a:solidFill>
                 <a:latin typeface="Helvetica Neue"/>
               </a:rPr>
-              <a:t>37</a:t>
+              <a:t>36</a:t>
             </a:r>
           </a:p>
         </p:txBody>
@@ -20650,7 +20892,7 @@
                 </a:solidFill>
                 <a:latin typeface="Helvetica Neue"/>
               </a:rPr>
-              <a:t>Data: the dataset and the frozen dictionary</a:t>
+              <a:t>Bank profiles: one bank, every measured field</a:t>
             </a:r>
           </a:p>
         </p:txBody>
@@ -20702,7 +20944,7 @@
       </p:sp>
       <p:pic>
         <p:nvPicPr>
-          <p:cNvPr id="4" name="Picture 3" descr="10_data.png"/>
+          <p:cNvPr id="4" name="Picture 3" descr="09_profiles.png"/>
           <p:cNvPicPr>
             <a:picLocks noChangeAspect="1"/>
           </p:cNvPicPr>
@@ -20761,7 +21003,7 @@
                 </a:solidFill>
                 <a:latin typeface="Helvetica Neue"/>
               </a:rPr>
-              <a:t>Every capture with its provenance, filterable and exportable, read against the 104-feature dictionary.</a:t>
+              <a:t>Palette, tone, imagery, layout, value proposition, the z-score signature, personas and the AI Score.</a:t>
             </a:r>
           </a:p>
         </p:txBody>
@@ -20845,7 +21087,7 @@
                 </a:solidFill>
                 <a:latin typeface="Helvetica Neue"/>
               </a:rPr>
-              <a:t>38</a:t>
+              <a:t>37</a:t>
             </a:r>
           </a:p>
         </p:txBody>
@@ -20912,7 +21154,7 @@
                 </a:solidFill>
                 <a:latin typeface="Helvetica Neue"/>
               </a:rPr>
-              <a:t>Rubric: the sheets, and where they disagree</a:t>
+              <a:t>Data: the dataset and the frozen dictionary</a:t>
             </a:r>
           </a:p>
         </p:txBody>
@@ -20964,7 +21206,7 @@
       </p:sp>
       <p:pic>
         <p:nvPicPr>
-          <p:cNvPr id="4" name="Picture 3" descr="11_rubric.png"/>
+          <p:cNvPr id="4" name="Picture 3" descr="10_data.png"/>
           <p:cNvPicPr>
             <a:picLocks noChangeAspect="1"/>
           </p:cNvPicPr>
@@ -21023,7 +21265,7 @@
                 </a:solidFill>
                 <a:latin typeface="Helvetica Neue"/>
               </a:rPr>
-              <a:t>Every sheet, raw agreement, chance-corrected kappa, and the scoring guide — never merged into one score.</a:t>
+              <a:t>Every capture with its provenance, filterable and exportable, read against the 104-feature dictionary.</a:t>
             </a:r>
           </a:p>
         </p:txBody>
@@ -21107,7 +21349,7 @@
                 </a:solidFill>
                 <a:latin typeface="Helvetica Neue"/>
               </a:rPr>
-              <a:t>39</a:t>
+              <a:t>38</a:t>
             </a:r>
           </a:p>
         </p:txBody>
@@ -21174,7 +21416,7 @@
                 </a:solidFill>
                 <a:latin typeface="Helvetica Neue"/>
               </a:rPr>
-              <a:t>Collection: status, provenance and the pipeline</a:t>
+              <a:t>Rubric: the sheets, and where they disagree</a:t>
             </a:r>
           </a:p>
         </p:txBody>
@@ -21226,7 +21468,7 @@
       </p:sp>
       <p:pic>
         <p:nvPicPr>
-          <p:cNvPr id="4" name="Picture 3" descr="12_collection.png"/>
+          <p:cNvPr id="4" name="Picture 3" descr="11_rubric.png"/>
           <p:cNvPicPr>
             <a:picLocks noChangeAspect="1"/>
           </p:cNvPicPr>
@@ -21285,7 +21527,7 @@
                 </a:solidFill>
                 <a:latin typeface="Helvetica Neue"/>
               </a:rPr>
-              <a:t>Counts straight from the export, per-bank status, capture provenance, and the commands that produced it.</a:t>
+              <a:t>Every sheet, raw agreement, chance-corrected kappa, and the scoring guide — never merged into one score.</a:t>
             </a:r>
           </a:p>
         </p:txBody>
@@ -21369,7 +21611,7 @@
                 </a:solidFill>
                 <a:latin typeface="Helvetica Neue"/>
               </a:rPr>
-              <a:t>40</a:t>
+              <a:t>39</a:t>
             </a:r>
           </a:p>
         </p:txBody>
@@ -21698,7 +21940,7 @@
                 </a:solidFill>
                 <a:latin typeface="Helvetica Neue"/>
               </a:rPr>
-              <a:t>Research: sourcing a claim</a:t>
+              <a:t>Collection: status, provenance and the pipeline</a:t>
             </a:r>
           </a:p>
         </p:txBody>
@@ -21750,7 +21992,7 @@
       </p:sp>
       <p:pic>
         <p:nvPicPr>
-          <p:cNvPr id="4" name="Picture 3" descr="13_research.png"/>
+          <p:cNvPr id="4" name="Picture 3" descr="12_collection.png"/>
           <p:cNvPicPr>
             <a:picLocks noChangeAspect="1"/>
           </p:cNvPicPr>
@@ -21809,7 +22051,7 @@
                 </a:solidFill>
                 <a:latin typeface="Helvetica Neue"/>
               </a:rPr>
-              <a:t>Semantic Scholar, on demand. Empty is reported as empty — a rate limit must not read as 'no evidence'.</a:t>
+              <a:t>Counts straight from the export, per-bank status, capture provenance, and the commands that produced it.</a:t>
             </a:r>
           </a:p>
         </p:txBody>
@@ -21893,7 +22135,7 @@
                 </a:solidFill>
                 <a:latin typeface="Helvetica Neue"/>
               </a:rPr>
-              <a:t>41</a:t>
+              <a:t>40</a:t>
             </a:r>
           </a:p>
         </p:txBody>
@@ -21931,8 +22173,8 @@
         </p:nvSpPr>
         <p:spPr>
           <a:xfrm>
-            <a:off x="548640" y="384048"/>
-            <a:ext cx="11064240" cy="731520"/>
+            <a:off x="548640" y="320040"/>
+            <a:ext cx="11064240" cy="640080"/>
           </a:xfrm>
           <a:prstGeom prst="rect">
             <a:avLst/>
@@ -21954,13 +22196,13 @@
               </a:spcAft>
             </a:pPr>
             <a:r>
-              <a:rPr sz="2800" b="1">
+              <a:rPr sz="2400" b="1">
                 <a:solidFill>
                   <a:srgbClr val="14141C"/>
                 </a:solidFill>
                 <a:latin typeface="Helvetica Neue"/>
               </a:rPr>
-              <a:t>Roadmap</a:t>
+              <a:t>Research: sourcing a claim</a:t>
             </a:r>
           </a:p>
         </p:txBody>
@@ -21973,8 +22215,8 @@
         </p:nvSpPr>
         <p:spPr>
           <a:xfrm>
-            <a:off x="548640" y="1115568"/>
-            <a:ext cx="1463040" cy="64008"/>
+            <a:off x="548640" y="960120"/>
+            <a:ext cx="1463040" cy="54864"/>
           </a:xfrm>
           <a:prstGeom prst="rect">
             <a:avLst/>
@@ -22010,16 +22252,40 @@
           </a:p>
         </p:txBody>
       </p:sp>
-      <p:sp>
-        <p:nvSpPr>
-          <p:cNvPr id="4" name="TextBox 3"/>
+      <p:pic>
+        <p:nvPicPr>
+          <p:cNvPr id="4" name="Picture 3" descr="13_research.png"/>
+          <p:cNvPicPr>
+            <a:picLocks noChangeAspect="1"/>
+          </p:cNvPicPr>
+          <p:nvPr/>
+        </p:nvPicPr>
+        <p:blipFill>
+          <a:blip r:embed="rId2"/>
+          <a:stretch>
+            <a:fillRect/>
+          </a:stretch>
+        </p:blipFill>
+        <p:spPr>
+          <a:xfrm>
+            <a:off x="2113127" y="1325880"/>
+            <a:ext cx="7965440" cy="4480560"/>
+          </a:xfrm>
+          <a:prstGeom prst="rect">
+            <a:avLst/>
+          </a:prstGeom>
+        </p:spPr>
+      </p:pic>
+      <p:sp>
+        <p:nvSpPr>
+          <p:cNvPr id="5" name="TextBox 4"/>
           <p:cNvSpPr txBox="1"/>
           <p:nvPr/>
         </p:nvSpPr>
         <p:spPr>
           <a:xfrm>
-            <a:off x="685800" y="1463040"/>
-            <a:ext cx="10881360" cy="4754880"/>
+            <a:off x="685800" y="5916168"/>
+            <a:ext cx="10881360" cy="457200"/>
           </a:xfrm>
           <a:prstGeom prst="rect">
             <a:avLst/>
@@ -22037,195 +22303,24 @@
                 <a:spcPct val="105000"/>
               </a:lnSpc>
               <a:spcAft>
-                <a:spcPts val="200"/>
-              </a:spcAft>
-            </a:pPr>
-            <a:r>
-              <a:rPr sz="1500" b="1">
-                <a:solidFill>
-                  <a:srgbClr val="14141C"/>
-                </a:solidFill>
-                <a:latin typeface="Helvetica Neue"/>
-              </a:rPr>
-              <a:t>•  1. Turn the rubric into a number you can quote</a:t>
-            </a:r>
-          </a:p>
-          <a:p>
-            <a:pPr algn="l">
-              <a:lnSpc>
-                <a:spcPct val="105000"/>
-              </a:lnSpc>
-              <a:spcAft>
-                <a:spcPts val="1000"/>
-              </a:spcAft>
-            </a:pPr>
-            <a:r>
-              <a:rPr sz="1300" b="0">
+                <a:spcPts val="600"/>
+              </a:spcAft>
+            </a:pPr>
+            <a:r>
+              <a:rPr sz="1200" b="0">
                 <a:solidFill>
                   <a:srgbClr val="585868"/>
                 </a:solidFill>
                 <a:latin typeface="Helvetica Neue"/>
               </a:rPr>
-              <a:t>     Finish the two-raters-per-bank split — it takes the comparison from 30 usable features to about 40 — and tighten the wording for the six features below the 60% bar before any judged feature carries a finding.</a:t>
-            </a:r>
-          </a:p>
-          <a:p>
-            <a:pPr algn="l">
-              <a:lnSpc>
-                <a:spcPct val="105000"/>
-              </a:lnSpc>
-              <a:spcAft>
-                <a:spcPts val="200"/>
-              </a:spcAft>
-            </a:pPr>
-            <a:r>
-              <a:rPr sz="1500" b="1">
-                <a:solidFill>
-                  <a:srgbClr val="14141C"/>
-                </a:solidFill>
-                <a:latin typeface="Helvetica Neue"/>
-              </a:rPr>
-              <a:t>•  2. Fill the remaining sheet rows</a:t>
-            </a:r>
-          </a:p>
-          <a:p>
-            <a:pPr algn="l">
-              <a:lnSpc>
-                <a:spcPct val="105000"/>
-              </a:lnSpc>
-              <a:spcAft>
-                <a:spcPts val="1000"/>
-              </a:spcAft>
-            </a:pPr>
-            <a:r>
-              <a:rPr sz="1300" b="0">
-                <a:solidFill>
-                  <a:srgbClr val="585868"/>
-                </a:solidFill>
-                <a:latin typeface="Helvetica Neue"/>
-              </a:rPr>
-              <a:t>     Every bank now has its rows, including the two English pages restored on 23/09; what is missing is filled scores, not sheets.</a:t>
-            </a:r>
-          </a:p>
-          <a:p>
-            <a:pPr algn="l">
-              <a:lnSpc>
-                <a:spcPct val="105000"/>
-              </a:lnSpc>
-              <a:spcAft>
-                <a:spcPts val="200"/>
-              </a:spcAft>
-            </a:pPr>
-            <a:r>
-              <a:rPr sz="1500" b="1">
-                <a:solidFill>
-                  <a:srgbClr val="14141C"/>
-                </a:solidFill>
-                <a:latin typeface="Helvetica Neue"/>
-              </a:rPr>
-              <a:t>•  3. Re-run and re-export</a:t>
-            </a:r>
-          </a:p>
-          <a:p>
-            <a:pPr algn="l">
-              <a:lnSpc>
-                <a:spcPct val="105000"/>
-              </a:lnSpc>
-              <a:spcAft>
-                <a:spcPts val="1000"/>
-              </a:spcAft>
-            </a:pPr>
-            <a:r>
-              <a:rPr sz="1300" b="0">
-                <a:solidFill>
-                  <a:srgbClr val="585868"/>
-                </a:solidFill>
-                <a:latin typeface="Helvetica Neue"/>
-              </a:rPr>
-              <a:t>     rubric_sheet.py merge → run_analysis.py → export_web_report.py, then re-verify the narrative's figures against the new snapshot.</a:t>
-            </a:r>
-          </a:p>
-          <a:p>
-            <a:pPr algn="l">
-              <a:lnSpc>
-                <a:spcPct val="105000"/>
-              </a:lnSpc>
-              <a:spcAft>
-                <a:spcPts val="200"/>
-              </a:spcAft>
-            </a:pPr>
-            <a:r>
-              <a:rPr sz="1500" b="1">
-                <a:solidFill>
-                  <a:srgbClr val="14141C"/>
-                </a:solidFill>
-                <a:latin typeface="Helvetica Neue"/>
-              </a:rPr>
-              <a:t>•  4. Decide on outputs/ in git</a:t>
-            </a:r>
-          </a:p>
-          <a:p>
-            <a:pPr algn="l">
-              <a:lnSpc>
-                <a:spcPct val="105000"/>
-              </a:lnSpc>
-              <a:spcAft>
-                <a:spcPts val="1000"/>
-              </a:spcAft>
-            </a:pPr>
-            <a:r>
-              <a:rPr sz="1300" b="0">
-                <a:solidFill>
-                  <a:srgbClr val="585868"/>
-                </a:solidFill>
-                <a:latin typeface="Helvetica Neue"/>
-              </a:rPr>
-              <a:t>     It is regenerated on every run yet tracked, so each analysis leaves a large binary diff.</a:t>
-            </a:r>
-          </a:p>
-          <a:p>
-            <a:pPr algn="l">
-              <a:lnSpc>
-                <a:spcPct val="105000"/>
-              </a:lnSpc>
-              <a:spcAft>
-                <a:spcPts val="200"/>
-              </a:spcAft>
-            </a:pPr>
-            <a:r>
-              <a:rPr sz="1500" b="1">
-                <a:solidFill>
-                  <a:srgbClr val="14141C"/>
-                </a:solidFill>
-                <a:latin typeface="Helvetica Neue"/>
-              </a:rPr>
-              <a:t>•  5. Then, if the team wants it</a:t>
-            </a:r>
-          </a:p>
-          <a:p>
-            <a:pPr algn="l">
-              <a:lnSpc>
-                <a:spcPct val="105000"/>
-              </a:lnSpc>
-              <a:spcAft>
-                <a:spcPts val="1000"/>
-              </a:spcAft>
-            </a:pPr>
-            <a:r>
-              <a:rPr sz="1300" b="0">
-                <a:solidFill>
-                  <a:srgbClr val="585868"/>
-                </a:solidFill>
-                <a:latin typeface="Helvetica Neue"/>
-              </a:rPr>
-              <a:t>     Savings, mortgage, pension, investment and term accounts are already collected (51 pages, 6 families); comparing each family the same way is the next step, plus a wider bank set.</a:t>
-            </a:r>
-          </a:p>
-        </p:txBody>
-      </p:sp>
-      <p:sp>
-        <p:nvSpPr>
-          <p:cNvPr id="5" name="TextBox 4"/>
+              <a:t>Semantic Scholar, on demand. Empty is reported as empty — a rate limit must not read as 'no evidence'.</a:t>
+            </a:r>
+          </a:p>
+        </p:txBody>
+      </p:sp>
+      <p:sp>
+        <p:nvSpPr>
+          <p:cNvPr id="6" name="TextBox 5"/>
           <p:cNvSpPr txBox="1"/>
           <p:nvPr/>
         </p:nvSpPr>
@@ -22267,7 +22362,7 @@
       </p:sp>
       <p:sp>
         <p:nvSpPr>
-          <p:cNvPr id="6" name="TextBox 5"/>
+          <p:cNvPr id="7" name="TextBox 6"/>
           <p:cNvSpPr txBox="1"/>
           <p:nvPr/>
         </p:nvSpPr>
@@ -22302,7 +22397,7 @@
                 </a:solidFill>
                 <a:latin typeface="Helvetica Neue"/>
               </a:rPr>
-              <a:t>42</a:t>
+              <a:t>41</a:t>
             </a:r>
           </a:p>
         </p:txBody>
@@ -22369,7 +22464,7 @@
                 </a:solidFill>
                 <a:latin typeface="Helvetica Neue"/>
               </a:rPr>
-              <a:t>Where each brand is searched from</a:t>
+              <a:t>Roadmap</a:t>
             </a:r>
           </a:p>
         </p:txBody>
@@ -22456,7 +22551,7 @@
                 </a:solidFill>
                 <a:latin typeface="Helvetica Neue"/>
               </a:rPr>
-              <a:t>•  Every challenger peaks in Brussels</a:t>
+              <a:t>•  1. Turn the rubric into a number you can quote</a:t>
             </a:r>
           </a:p>
           <a:p>
@@ -22475,7 +22570,7 @@
                 </a:solidFill>
                 <a:latin typeface="Helvetica Neue"/>
               </a:rPr>
-              <a:t>     Revolut, N26 and bunq all index 100 in Brussels and drop away outside it — N26 to 27 in Flanders, bunq to 29 in Wallonia. Three brands, three different products, one geography.</a:t>
+              <a:t>     Finish the two-raters-per-bank split — it takes the comparison from 30 usable features to about 40 — and tighten the wording for the six features below the 60% bar before any judged feature carries a finding.</a:t>
             </a:r>
           </a:p>
           <a:p>
@@ -22494,7 +22589,7 @@
                 </a:solidFill>
                 <a:latin typeface="Helvetica Neue"/>
               </a:rPr>
-              <a:t>•  Every incumbent is regional, and predictably so</a:t>
+              <a:t>•  2. Fill the remaining sheet rows</a:t>
             </a:r>
           </a:p>
           <a:p>
@@ -22513,7 +22608,7 @@
                 </a:solidFill>
                 <a:latin typeface="Helvetica Neue"/>
               </a:rPr>
-              <a:t>     KBC indexes 100 in Flanders and 11 in Wallonia; Argenta 100 and 27. Belfius, BNP Paribas Fortis and Crelan all peak in Wallonia. Five of six sit exactly where their history put them, which is the sanity check on this data rather than the finding.</a:t>
+              <a:t>     Every bank now has its rows, including the two English pages restored on 23/09; what is missing is filled scores, not sheets.</a:t>
             </a:r>
           </a:p>
           <a:p>
@@ -22532,7 +22627,7 @@
                 </a:solidFill>
                 <a:latin typeface="Helvetica Neue"/>
               </a:rPr>
-              <a:t>•  ING is the one incumbent that does not</a:t>
+              <a:t>•  3. Re-run and re-export</a:t>
             </a:r>
           </a:p>
           <a:p>
@@ -22551,7 +22646,7 @@
                 </a:solidFill>
                 <a:latin typeface="Helvetica Neue"/>
               </a:rPr>
-              <a:t>     Brussels 100, Wallonia 98, Flanders 73 — national, with no regional home. On this measure ING behaves like the challengers and unlike the banks it sits with everywhere else in this deck.</a:t>
+              <a:t>     rubric_sheet.py merge → run_analysis.py → export_web_report.py, then re-verify the narrative's figures against the new snapshot.</a:t>
             </a:r>
           </a:p>
           <a:p>
@@ -22570,7 +22665,7 @@
                 </a:solidFill>
                 <a:latin typeface="Helvetica Neue"/>
               </a:rPr>
-              <a:t>•  A second signal pointing the same way, from a different source</a:t>
+              <a:t>•  4. Decide on outputs/ in git</a:t>
             </a:r>
           </a:p>
           <a:p>
@@ -22589,7 +22684,7 @@
                 </a:solidFill>
                 <a:latin typeface="Helvetica Neue"/>
               </a:rPr>
-              <a:t>     This comes from search behaviour, not from a single page feature, and it lands where the traditional↔challenger score already put ING: with the incumbents, leaning.</a:t>
+              <a:t>     It is regenerated on every run yet tracked, so each analysis leaves a large binary diff.</a:t>
             </a:r>
           </a:p>
           <a:p>
@@ -22608,7 +22703,7 @@
                 </a:solidFill>
                 <a:latin typeface="Helvetica Neue"/>
               </a:rPr>
-              <a:t>•  What it is not</a:t>
+              <a:t>•  5. Then, if the team wants it</a:t>
             </a:r>
           </a:p>
           <a:p>
@@ -22627,42 +22722,7 @@
                 </a:solidFill>
                 <a:latin typeface="Helvetica Neue"/>
               </a:rPr>
-              <a:t>     Where people search from, never what a campaign achieved. Google Trends indexes each brand against its own peak, so these are shapes to compare, not volumes.</a:t>
-            </a:r>
-          </a:p>
-          <a:p>
-            <a:pPr algn="l">
-              <a:lnSpc>
-                <a:spcPct val="105000"/>
-              </a:lnSpc>
-              <a:spcAft>
-                <a:spcPts val="200"/>
-              </a:spcAft>
-            </a:pPr>
-            <a:endParaRPr sz="1300" b="0">
-              <a:solidFill>
-                <a:srgbClr val="585868"/>
-              </a:solidFill>
-              <a:latin typeface="Helvetica Neue"/>
-            </a:endParaRPr>
-          </a:p>
-          <a:p>
-            <a:pPr algn="l">
-              <a:lnSpc>
-                <a:spcPct val="105000"/>
-              </a:lnSpc>
-              <a:spcAft>
-                <a:spcPts val="0"/>
-              </a:spcAft>
-            </a:pPr>
-            <a:r>
-              <a:rPr sz="1250" b="0">
-                <a:solidFill>
-                  <a:srgbClr val="585868"/>
-                </a:solidFill>
-                <a:latin typeface="Helvetica Neue"/>
-              </a:rPr>
-              <a:t>Google Trends, Belgium, by region. Regional index 0–100 per brand, each brand normalised to its own maximum.</a:t>
+              <a:t>     Savings, mortgage, pension, investment and term accounts are already collected (51 pages, 6 families); comparing each family the same way is the next step, plus a wider bank set.</a:t>
             </a:r>
           </a:p>
         </p:txBody>
@@ -22746,7 +22806,7 @@
                 </a:solidFill>
                 <a:latin typeface="Helvetica Neue"/>
               </a:rPr>
-              <a:t>13</a:t>
+              <a:t>42</a:t>
             </a:r>
           </a:p>
         </p:txBody>
@@ -22900,7 +22960,7 @@
                 </a:solidFill>
                 <a:latin typeface="Helvetica Neue"/>
               </a:rPr>
-              <a:t>•  51 pages collected and scored across 6 product families; this comparison runs on the 18 current-account pages, 14 banks, 36 comparable features</a:t>
+              <a:t>•  51 pages collected and scored across 6 product families; this comparison runs on the 18 current-account pages, 14 banks, 35 comparable features</a:t>
             </a:r>
           </a:p>
           <a:p>
@@ -23567,7 +23627,7 @@
                 </a:solidFill>
                 <a:latin typeface="Helvetica Neue"/>
               </a:rPr>
-              <a:t>•  Only one judged feature can be scored from text at all</a:t>
+              <a:t>•  Only one was scored from text, and that was a choice we can now revisit</a:t>
             </a:r>
           </a:p>
           <a:p>
@@ -23586,7 +23646,7 @@
                 </a:solidFill>
                 <a:latin typeface="Helvetica Neue"/>
               </a:rPr>
-              <a:t>     formality_score, the only one the dictionary sources from html_text. On the 49 pages both scored, the model lands within one point of the human there 73% of the time. Its numbers on the twelve visual features are answers to a question the text cannot settle: value_prop_clarity is the clearest, where it ranked the pages close to the opposite of the human.</a:t>
+              <a:t>     formality_score is the one the dictionary sources from html_text, and there the model lands within one point of the human 73% of the time. Its scores on the twelve visual features answer a question the text alone cannot settle — on value_prop_clarity it ranked the pages close to the opposite of the human. Tested since: the pinned model returns nothing at all when handed an image. OCR is the route we have not used, and it is a real one — it returns each word with its position and type size, which is most of what rate prominence, layout and mobile-first actually ask.</a:t>
             </a:r>
           </a:p>
           <a:p>
@@ -24270,7 +24330,7 @@
                 </a:solidFill>
                 <a:latin typeface="Helvetica Neue"/>
               </a:rPr>
-              <a:t> positioning score 0.28 across 14 banks, and its nearest </a:t>
+              <a:t> positioning score 0.39 across 14 banks, and its nearest </a:t>
             </a:r>
             <a:r>
               <a:rPr sz="1300" b="0" dirty="0" err="1">
@@ -24326,7 +24386,7 @@
                 </a:solidFill>
                 <a:latin typeface="Helvetica Neue"/>
               </a:rPr>
-              <a:t>     Deadline language: 4.0 markers vs peers 0.6 (+3.69 SD) — the largest gap in the set · Persuasion levers used: 3.7 vs 1.7 (+2.46 SD, rubric) · The offer feels worth having: 5.0 vs 3.7 (+1.46 SD, rubric) · Claims fast digital onboarding: 0.67 vs 0.15 (+1.42 SD) · Page height: 11,149px vs 6,412px (+1.42 SD).</a:t>
+              <a:t>     Deadline language: 4.0 markers vs peers 0.6 (+3.69 SD) — the largest gap in the set · Persuasion levers used: 5.0 vs 1.4 (+3.32 SD, rubric) · The offer feels worth having: 5.0 vs 4.0 (+1.36 SD, rubric) · Claims fast digital onboarding: 0.67 vs 0.15 (+1.42 SD) · Page height: 11,149px vs 6,412px (+1.42 SD).</a:t>
             </a:r>
           </a:p>
           <a:p>

--- a/docs/Banking_Campaigns_Comparator.pptx
+++ b/docs/Banking_Campaigns_Comparator.pptx
@@ -657,7 +657,7 @@
           </a:p>
           <a:p>
             <a:r>
-              <a:t>IF ASKED about R2 in the screenshot ("Repeat the primary call to action"): it rests on cta_count, withdrawn on 23/09 — ING's pack cards render client-side and never reached the captured HTML, so the count measured our capture, not the page. A recommendation dying with its feature is the mechanism working. The screenshot predates the withdrawal.</a:t>
+              <a:t>IF ASKED about R2 in the screenshot ("Repeat the primary call to action"): it rests on cta_count, withdrawn on 23/09 — the captured HTML holds every pack card, but no counting rule reproduced a human count across the fourteen banks, so the figure would have reported markup convention rather than the page. A recommendation dying with its feature is the mechanism working. The screenshot predates the withdrawal.</a:t>
             </a:r>
           </a:p>
           <a:p>
@@ -1535,7 +1535,7 @@
           <a:p>
             <a:r>
               <a:rPr lang="en-US" dirty="0"/>
-              <a:t>ING sits clearly with the traditional banks - positioning score 0.39, nearest neighbour Belfius.</a:t>
+              <a:t>ING sits clearly with the traditional banks - positioning score 0.41, nearest neighbour Belfius.</a:t>
             </a:r>
           </a:p>
           <a:p>
@@ -1547,13 +1547,13 @@
           <a:p>
             <a:r>
               <a:rPr lang="en-US" dirty="0"/>
-              <a:t>Then persuasion technique density, 3.7 against 1.7. Clarity of the value proposition, 5.0 against 3.7. A fast-digital-onboarding claim four times more frequent than peers. Pages roughly twice as long, 11,000 pixels against 6,400.</a:t>
+              <a:t>Then persuasion technique density, 5.0 against 1.7. Clarity of the value proposition, 5.0 against 4.0. A fast-digital-onboarding claim four times more frequent than peers. Pages roughly twice as long, 11,000 pixels against 6,400.</a:t>
             </a:r>
           </a:p>
           <a:p>
             <a:r>
               <a:rPr lang="en-US" dirty="0"/>
-              <a:t>One place we're deliberately not giving you a number: calls to action. ING's pack cards load client-side and aren't in our captured HTML, so any count would measure our capture, not the page. We'd rather withhold it than report it."</a:t>
+              <a:t>One place we're deliberately not giving you a number: calls to action. The captured HTML holds every ING pack card, nothing is missing from it - but no counting rule we built reproduced a human count across fourteen banks, so the figure would report each bank's markup rather than its intent. We'd rather withhold it than report it."</a:t>
             </a:r>
           </a:p>
           <a:p>
@@ -1571,7 +1571,7 @@
           <a:p>
             <a:r>
               <a:rPr lang="en-US" dirty="0"/>
-              <a:t>CALLS TO ACTION, spoken, not on the slide: ING is 11th of 14 on the counted figure, 1.0 against a peer mean of 5.0 - but we do not publish that ranking, because no rule reproduces a human count on every bank. What the page itself shows is the point: ING's pack page carries nine clickable things and exactly one that opens an account, Se lancer, on a page eleven thousand pixels long. Plenty to click, almost nothing that converts.</a:t>
+              <a:t>CALLS TO ACTION, spoken, not on the slide: we publish no ranking at all, because no rule reproduces a human count on every bank - navigation, several links pointing at one target, and clickable product cards are marked up differently by each. What the page itself shows is the point: ING's pack page carries nine clickable things and exactly one that opens an account, Se lancer, on a page eleven thousand pixels long. Plenty to click, almost nothing that converts.</a:t>
             </a:r>
           </a:p>
         </p:txBody>
@@ -11623,7 +11623,7 @@
                 <a:ea typeface="Helvetica Neue" pitchFamily="34" charset="-122"/>
                 <a:cs typeface="Helvetica Neue" pitchFamily="34" charset="-120"/>
               </a:rPr>
-              <a:t>Reads report.json only — the same numbers the charts are drawn from. This run turned 30 measured features across 14 banks into 11 ordered changes.</a:t>
+              <a:t>Reads report.json only — the same numbers the charts are drawn from. This run turned 34 measured features across 14 banks into 10 ordered changes.</a:t>
             </a:r>
             <a:endParaRPr lang="en-US" sz="1150" dirty="0"/>
           </a:p>
@@ -11728,7 +11728,7 @@
                 <a:ea typeface="Helvetica Neue" pitchFamily="34" charset="-122"/>
                 <a:cs typeface="Helvetica Neue" pitchFamily="34" charset="-120"/>
               </a:rPr>
-              <a:t>3 high, 6 medium, 2 low. The order is the argument: what the measurement most supports acting on first.</a:t>
+              <a:t>2 high, 6 medium, 2 low. The order is the argument: what the measurement most supports acting on first.</a:t>
             </a:r>
             <a:endParaRPr lang="en-US" sz="1150" dirty="0"/>
           </a:p>
@@ -11833,7 +11833,7 @@
                 <a:ea typeface="Helvetica Neue" pitchFamily="34" charset="-122"/>
                 <a:cs typeface="Helvetica Neue" pitchFamily="34" charset="-120"/>
               </a:rPr>
-              <a:t>Search interest for timing, and news themes for reputation (3 of the 11 here). Context is never allowed to stand as evidence that a page performed.</a:t>
+              <a:t>Search interest for timing, and news themes for reputation (3 of the 10 here). Context is never allowed to stand as evidence that a page performed.</a:t>
             </a:r>
             <a:endParaRPr lang="en-US" sz="1150" dirty="0"/>
           </a:p>
@@ -22551,7 +22551,7 @@
                 </a:solidFill>
                 <a:latin typeface="Helvetica Neue"/>
               </a:rPr>
-              <a:t>•  1. Turn the rubric into a number you can quote</a:t>
+              <a:t>•  1. Repair the three captures taken behind a cookie banner</a:t>
             </a:r>
           </a:p>
           <a:p>
@@ -22570,7 +22570,7 @@
                 </a:solidFill>
                 <a:latin typeface="Helvetica Neue"/>
               </a:rPr>
-              <a:t>     Finish the two-raters-per-bank split — it takes the comparison from 30 usable features to about 40 — and tighten the wording for the six features below the 60% bar before any judged feature carries a finding.</a:t>
+              <a:t>     Re-capture the three pages taken behind a cookie banner — Argenta, BNP Paribas Fortis and Crelan — so their colour and layout features describe the page rather than the modal.</a:t>
             </a:r>
           </a:p>
           <a:p>
@@ -22960,7 +22960,7 @@
                 </a:solidFill>
                 <a:latin typeface="Helvetica Neue"/>
               </a:rPr>
-              <a:t>•  51 pages collected and scored across 6 product families; this comparison runs on the 18 current-account pages, 14 banks, 35 comparable features</a:t>
+              <a:t>•  51 pages scored across 6 product families. This comparison: the 18 current-account pages, 14 banks, 34 comparable features</a:t>
             </a:r>
           </a:p>
           <a:p>
@@ -24330,7 +24330,7 @@
                 </a:solidFill>
                 <a:latin typeface="Helvetica Neue"/>
               </a:rPr>
-              <a:t> positioning score 0.39 across 14 banks, and its nearest </a:t>
+              <a:t> positioning score 0.41 across 14 banks, and its nearest </a:t>
             </a:r>
             <a:r>
               <a:rPr sz="1300" b="0" dirty="0" err="1">
@@ -24386,7 +24386,7 @@
                 </a:solidFill>
                 <a:latin typeface="Helvetica Neue"/>
               </a:rPr>
-              <a:t>     Deadline language: 4.0 markers vs peers 0.6 (+3.69 SD) — the largest gap in the set · Persuasion levers used: 5.0 vs 1.4 (+3.32 SD, rubric) · The offer feels worth having: 5.0 vs 4.0 (+1.36 SD, rubric) · Claims fast digital onboarding: 0.67 vs 0.15 (+1.42 SD) · Page height: 11,149px vs 6,412px (+1.42 SD).</a:t>
+              <a:t>     Deadline language: 4.0 markers vs peers 0.6 (+3.69 SD) — the largest gap in the set · Persuasion levers used: 5.0 vs 1.7 (+3.68 SD, rubric) · The offer feels worth having: 5.0 vs 4.0 (+1.36 SD, rubric) · Claims fast digital onboarding: 0.67 vs 0.15 (+1.42 SD) · Page height: 11,149px vs 6,412px (+1.42 SD).</a:t>
             </a:r>
           </a:p>
           <a:p>
@@ -24424,7 +24424,7 @@
                 </a:solidFill>
                 <a:latin typeface="Helvetica Neue"/>
               </a:rPr>
-              <a:t>     Animation: 0.33 vs peers 0.62 (-0.58 SD) — the one measured place ING sits below the set. Calls to action are measured but not ranked here: no counting rule we tried reproduces a human count across all fourteen banks, so the figure is named rather than published.</a:t>
+              <a:t>     Image alt text: no ING page carries it, against 23% of peers (-0.55 SD). Animation and calls to action were withdrawn — neither rule measured what its name claims, so neither is ranked here.</a:t>
             </a:r>
           </a:p>
           <a:p>

--- a/docs/Banking_Campaigns_Comparator.pptx
+++ b/docs/Banking_Campaigns_Comparator.pptx
@@ -1037,14 +1037,49 @@
           <a:lstStyle/>
           <a:p>
             <a:r>
-              <a:rPr lang="en-US" dirty="0"/>
-              <a:t>Limitations - 30 s.</a:t>
-            </a:r>
-          </a:p>
-          <a:p>
-            <a:r>
-              <a:rPr lang="en-US" dirty="0"/>
-              <a:t>"Because we have no performance data, everything you've heard stays a hypothesis, not a verdict. That's the honest limit of this exercise, not a hedge."</a:t>
+              <a:t>What this cannot support — 60 s. Écran : onglet Analysis, le bloc 104 → 33.</a:t>
+            </a:r>
+          </a:p>
+          <a:p/>
+          <a:p>
+            <a:r>
+              <a:t>"104 features in, 33 out. Every reduction is on screen.</a:t>
+            </a:r>
+          </a:p>
+          <a:p/>
+          <a:p>
+            <a:r>
+              <a:t>And five withdrawn outright, because they measured our tooling, not your pages.</a:t>
+            </a:r>
+          </a:p>
+          <a:p/>
+          <a:p>
+            <a:r>
+              <a:t>Calls to action: no counting rule held across fourteen banks. Navigation, repeated links, clickable cards — each bank marks them up differently.</a:t>
+            </a:r>
+          </a:p>
+          <a:p/>
+          <a:p>
+            <a:r>
+              <a:t>Animation: our rule asked whether the stylesheet declared an animation, not whether the page moves. Across eighteen pages, exactly one has real motion — Revolut, a video. Your kickoff deck said ING was the only traditional bank animating. That is now marked not testable, not disproved. We will not rule on it with a broken instrument.</a:t>
+            </a:r>
+          </a:p>
+          <a:p/>
+          <a:p>
+            <a:r>
+              <a:t>The fifth we found while rehearsing this: a feature that tested whether a page uses an HTML table element. Traditional banks do. N26 and Revolut build the same plan comparison in CSS. It was reporting a markup convention as a strategic difference.</a:t>
+            </a:r>
+          </a:p>
+          <a:p/>
+          <a:p>
+            <a:r>
+              <a:t>And one whole axis of our AI Score returns nothing.</a:t>
+            </a:r>
+          </a:p>
+          <a:p/>
+          <a:p>
+            <a:r>
+              <a:t>We would rather hand you 33 numbers we can defend."</a:t>
             </a:r>
           </a:p>
         </p:txBody>
@@ -1102,14 +1137,25 @@
           <a:lstStyle/>
           <a:p>
             <a:r>
-              <a:rPr lang="en-US" dirty="0"/>
-              <a:t>Cloture - 45 s.</a:t>
-            </a:r>
-          </a:p>
-          <a:p>
-            <a:r>
-              <a:rPr lang="en-US" dirty="0"/>
-              <a:t>"What we built over two weeks isn't a set of creative opinions, it's a repeatable measurement engine. It gives ING a clear, data-backed view of where its pages stand against 13 competitors - the strongest urgency and persuasion density in the market, a clear lead in value-proposition clarity, visible strength in cross-sell and free simulators. And because we have no conversion data, we don't claim absolute verdicts - every finding is transparent, testable, ready for ING to validate. Measure one way. Label the trust. Claim only what the data supports."</a:t>
+              <a:t>Clôture — 30 s. Écran : onglet Recommendations.</a:t>
+            </a:r>
+          </a:p>
+          <a:p/>
+          <a:p>
+            <a:r>
+              <a:t>"What you keep is an instrument: 104 documented features, a frozen contract, a pipeline that re-runs from stored snapshots, 423 tests. The next comparison costs days, not weeks — including next September's state-bond wave.</a:t>
+            </a:r>
+          </a:p>
+          <a:p/>
+          <a:p>
+            <a:r>
+              <a:t>Ten prioritised changes came out of this run, each traced to a feature and a page. None is a performance claim — no click data exists, so each is a hypothesis you can test.</a:t>
+            </a:r>
+          </a:p>
+          <a:p/>
+          <a:p>
+            <a:r>
+              <a:t>It is a proof of concept. Your questions are the useful part."</a:t>
             </a:r>
           </a:p>
         </p:txBody>
@@ -1297,14 +1343,25 @@
           <a:lstStyle/>
           <a:p>
             <a:r>
-              <a:rPr lang="en-US" dirty="0"/>
-              <a:t>Dataset - 1 min.</a:t>
-            </a:r>
-          </a:p>
-          <a:p>
-            <a:r>
-              <a:rPr lang="en-US" dirty="0"/>
-              <a:t>"The comparison you'll see runs on eighteen of the 51 pages scored - the current-account pages - because comparing a mortgage page to a current-account page would measure the product, not the communication. The other thirty-three are scored and in the dataset, ready for the same comparison on savings or mortgages whenever you want it. Mostly Belgian French, with English and Dutch."</a:t>
+              <a:t>Dataset — 30 s. Écran : cette slide, puis bascule sur l'onglet Data.</a:t>
+            </a:r>
+          </a:p>
+          <a:p/>
+          <a:p>
+            <a:r>
+              <a:t>"So the question is whether that hybrid position shows up in how you actually communicate.</a:t>
+            </a:r>
+          </a:p>
+          <a:p/>
+          <a:p>
+            <a:r>
+              <a:t>51 pages, 14 banks, 6 product families, 104 documented features. We only ever compare within one product family — pages do different jobs. The headline runs on 18 current-account pages, 14 banks.</a:t>
+            </a:r>
+          </a:p>
+          <a:p/>
+          <a:p>
+            <a:r>
+              <a:t>Deciding what was relevant was part of the work."</a:t>
             </a:r>
           </a:p>
         </p:txBody>
@@ -1439,32 +1496,31 @@
           <a:lstStyle/>
           <a:p>
             <a:r>
-              <a:rPr lang="en-US" dirty="0"/>
-              <a:t>Strategic Context - 1 min 30.</a:t>
-            </a:r>
-          </a:p>
-          <a:p>
-            <a:r>
-              <a:rPr lang="en-US" dirty="0"/>
-              <a:t>"Before the numbers, some context on how these banks actually compete. ING sits at the near intersection of traditional institutions and digital natives - the direct, feature-focused, mobile-first tone of a neobank, campaigns like 'Do Your Thing', with the regulatory authority and established brand of a Tier-1 retail bank.</a:t>
-            </a:r>
-          </a:p>
-          <a:p>
-            <a:r>
-              <a:rPr lang="en-US" dirty="0"/>
-              <a:t>And contrary to a common assumption: neobanks like Revolut aren't operating with fewer rules. Same European banking licences, same Belgian compliance checks. Their speed isn't regulatory shortcuts, it's architecture: modern systems, no branch network, faster decision loops.</a:t>
-            </a:r>
-          </a:p>
-          <a:p>
-            <a:r>
-              <a:rPr lang="en-US" dirty="0"/>
-              <a:t>That shows up in how each side makes money. Traditional banks have long used the basic current account as a loss leader to bring someone in and monetize later through mortgages, insurance, wealth management. Neobanks flip it: freemium tiers, free or paid subscriptions, FX and fee income, upfront.</a:t>
-            </a:r>
-          </a:p>
-          <a:p>
-            <a:r>
-              <a:rPr lang="en-US" dirty="0"/>
-              <a:t>And the targeting differs. Neobanks win volume at the top of the funnel - young adults, digital nomads, casual spenders. ING's budget concentrates on high lifetime-value segments: first-time investors, expats and high-net-worth individuals, first-time buyers. Professional and business banking is out of scope here - retail only."</a:t>
+              <a:t>Strategic context — 50 s. Écran : cette slide. Tu les regardes, pas l'écran.</a:t>
+            </a:r>
+          </a:p>
+          <a:p/>
+          <a:p>
+            <a:r>
+              <a:t>"Three things frame this.</a:t>
+            </a:r>
+          </a:p>
+          <a:p/>
+          <a:p>
+            <a:r>
+              <a:t>ING is a hybrid. You carry the direct, feature-first, mobile-first tone of a neobank, and the institutional weight of a Tier-1 bank. That is a position, not an accident.</a:t>
+            </a:r>
+          </a:p>
+          <a:p/>
+          <a:p>
+            <a:r>
+              <a:t>The playing field is level on regulation. Neobanks' speed is architecture and no branches — not lighter European or compliance rules.</a:t>
+            </a:r>
+          </a:p>
+          <a:p/>
+          <a:p>
+            <a:r>
+              <a:t>Where you differ is the engine. Traditional banks use the current account as a loss leader and monetise later: mortgages, insurance, wealth. Neobanks monetise upfront — freemium tiers, subscriptions, "abonnements", FX. They chase volume among young adults and digital nomads. You chase lifetime value: expats, first-time investors, first-time buyers."</a:t>
             </a:r>
           </a:p>
         </p:txBody>
@@ -1522,56 +1578,37 @@
           <a:lstStyle/>
           <a:p>
             <a:r>
-              <a:rPr lang="en-US" dirty="0"/>
-              <a:t>What the analysis found - 1 min 30.</a:t>
-            </a:r>
-          </a:p>
-          <a:p>
-            <a:r>
-              <a:rPr lang="en-US" dirty="0"/>
-              <a:t>"On current-account packs: 18 pages, 14 banks.</a:t>
-            </a:r>
-          </a:p>
-          <a:p>
-            <a:r>
-              <a:rPr lang="en-US" dirty="0"/>
-              <a:t>ING sits clearly with the traditional banks - positioning score 0.41, nearest neighbour Belfius.</a:t>
-            </a:r>
-          </a:p>
-          <a:p>
-            <a:r>
-              <a:rPr lang="en-US" dirty="0"/>
-              <a:t>Its largest gap, above every other bank in the set: deadline language. Four dated deadlines per page against a peer average of 0.6. ING is the only bank in this dataset whose captured pages carry an expiry date at all - every date on a competitor page is an effective-from date or a cookie-policy timestamp.</a:t>
-            </a:r>
-          </a:p>
-          <a:p>
-            <a:r>
-              <a:rPr lang="en-US" dirty="0"/>
-              <a:t>Then persuasion technique density, 5.0 against 1.7. Clarity of the value proposition, 5.0 against 4.0. A fast-digital-onboarding claim four times more frequent than peers. Pages roughly twice as long, 11,000 pixels against 6,400.</a:t>
-            </a:r>
-          </a:p>
-          <a:p>
-            <a:r>
-              <a:rPr lang="en-US" dirty="0"/>
-              <a:t>One place we're deliberately not giving you a number: calls to action. The captured HTML holds every ING pack card, nothing is missing from it - but no counting rule we built reproduced a human count across fourteen banks, so the figure would report each bank's markup rather than its intent. We'd rather withhold it than report it."</a:t>
-            </a:r>
-          </a:p>
-          <a:p>
-            <a:r>
-              <a:rPr lang="en-US" dirty="0"/>
-              <a:t>CROSS-SELL, spoken, 30 s: "One human observation, labelled as such because our features don't capture it: ING pushes cross-sell noticeably harder - insurance grids, simulators on almost every page, Amazon Prime and cashback in the pack. What we can't measure yet is intensity. That's a feature worth adding, not a claim I'll make from a number today."</a:t>
-            </a:r>
-          </a:p>
-          <a:p>
-            <a:r>
-              <a:rPr lang="en-US" dirty="0"/>
-              <a:t>Then: Dan takes slides 9-12, trends, about 2 min. Stephane takes 13-17, recommendations and site, about 2 min 30.</a:t>
-            </a:r>
-          </a:p>
-          <a:p>
-            <a:r>
-              <a:rPr lang="en-US" dirty="0"/>
-              <a:t>CALLS TO ACTION, spoken, not on the slide: we publish no ranking at all, because no rule reproduces a human count on every bank - navigation, several links pointing at one target, and clickable product cards are marked up differently by each. What the page itself shows is the point: ING's pack page carries nine clickable things and exactly one that opens an account, Se lancer, on a page eleven thousand pixels long. Plenty to click, almost nothing that converts.</a:t>
+              <a:t>What the analysis found — 70 s. Écran : onglet Home, le radar puis l'axe.</a:t>
+            </a:r>
+          </a:p>
+          <a:p/>
+          <a:p>
+            <a:r>
+              <a:t>"On the traditional–challenger axis ING scores 0.41. Belfius sits at 0.28 below you, Keytrade at 0.55 above — and Keytrade is a challenger. You are the last incumbent on the axis before the challengers begin: the most challenger-like traditional bank in Belgium. The hybrid is not a claim, it is a position on a line.</a:t>
+            </a:r>
+          </a:p>
+          <a:p/>
+          <a:p>
+            <a:r>
+              <a:t>Your targeting shows too. The personas named on your pack pages are mass market, student and expat. Across your whole page set, six of eight, including investor and retiree. The high-value segments are there in the copy.</a:t>
+            </a:r>
+          </a:p>
+          <a:p/>
+          <a:p>
+            <a:r>
+              <a:t>But three signals separate you from everyone, and all three are pressure. Deadline language, the largest gap in the set. Persuasion levers. And the offer reads as clearly worth having.</a:t>
+            </a:r>
+          </a:p>
+          <a:p/>
+          <a:p>
+            <a:r>
+              <a:t>On the pages we measured, you are the loudest bank in Belgium. Next to a top-five NPS irritator, that's the finding."</a:t>
+            </a:r>
+          </a:p>
+          <a:p/>
+          <a:p>
+            <a:r>
+              <a:t>SI LE RADAR EST À L'ÉCRAN, la ligne à dire : "Trust reads zero for thirteen banks of fourteen. That is measured, not missing — not one page in this family cites a branch network as a benefit, and the only two carrying an institutional or regulatory trust signal are Revolut's and bunq's. Both challengers. The asset a Tier-1 bank has and a neobank cannot copy is the one nobody is using on the page."</a:t>
             </a:r>
           </a:p>
         </p:txBody>
@@ -11357,6 +11394,10 @@
             <a:prstDash val="solid"/>
           </a:ln>
         </p:spPr>
+        <p:txBody>
+          <a:bodyPr/>
+          <a:p/>
+        </p:txBody>
       </p:sp>
       <p:sp>
         <p:nvSpPr>
@@ -11460,6 +11501,10 @@
             <a:prstDash val="solid"/>
           </a:ln>
         </p:spPr>
+        <p:txBody>
+          <a:bodyPr/>
+          <a:p/>
+        </p:txBody>
       </p:sp>
       <p:pic>
         <p:nvPicPr>
@@ -11623,7 +11668,7 @@
                 <a:ea typeface="Helvetica Neue" pitchFamily="34" charset="-122"/>
                 <a:cs typeface="Helvetica Neue" pitchFamily="34" charset="-120"/>
               </a:rPr>
-              <a:t>Reads report.json only — the same numbers the charts are drawn from. This run turned 34 measured features across 14 banks into 10 ordered changes.</a:t>
+              <a:t>Reads report.json only — the same numbers the charts are drawn from. This run turned 33 measured features across 14 banks into 10 ordered changes.</a:t>
             </a:r>
             <a:endParaRPr lang="en-US" sz="1150" dirty="0"/>
           </a:p>
@@ -11865,6 +11910,10 @@
             <a:prstDash val="solid"/>
           </a:ln>
         </p:spPr>
+        <p:txBody>
+          <a:bodyPr/>
+          <a:p/>
+        </p:txBody>
       </p:sp>
       <p:sp>
         <p:nvSpPr>
@@ -12004,6 +12053,10 @@
             <a:prstDash val="solid"/>
           </a:ln>
         </p:spPr>
+        <p:txBody>
+          <a:bodyPr/>
+          <a:p/>
+        </p:txBody>
       </p:sp>
       <p:sp>
         <p:nvSpPr>
@@ -12107,6 +12160,10 @@
             <a:prstDash val="solid"/>
           </a:ln>
         </p:spPr>
+        <p:txBody>
+          <a:bodyPr/>
+          <a:p/>
+        </p:txBody>
       </p:sp>
       <p:pic>
         <p:nvPicPr>
@@ -12582,6 +12639,10 @@
             <a:prstDash val="solid"/>
           </a:ln>
         </p:spPr>
+        <p:txBody>
+          <a:bodyPr/>
+          <a:p/>
+        </p:txBody>
       </p:sp>
       <p:sp>
         <p:nvSpPr>
@@ -12687,6 +12748,10 @@
             <a:prstDash val="solid"/>
           </a:ln>
         </p:spPr>
+        <p:txBody>
+          <a:bodyPr/>
+          <a:p/>
+        </p:txBody>
       </p:sp>
       <p:sp>
         <p:nvSpPr>
@@ -12834,6 +12899,10 @@
             <a:prstDash val="solid"/>
           </a:ln>
         </p:spPr>
+        <p:txBody>
+          <a:bodyPr/>
+          <a:p/>
+        </p:txBody>
       </p:sp>
       <p:sp>
         <p:nvSpPr>
@@ -12981,6 +13050,10 @@
             <a:prstDash val="solid"/>
           </a:ln>
         </p:spPr>
+        <p:txBody>
+          <a:bodyPr/>
+          <a:p/>
+        </p:txBody>
       </p:sp>
       <p:sp>
         <p:nvSpPr>
@@ -13165,6 +13238,10 @@
             <a:prstDash val="solid"/>
           </a:ln>
         </p:spPr>
+        <p:txBody>
+          <a:bodyPr/>
+          <a:p/>
+        </p:txBody>
       </p:sp>
       <p:sp>
         <p:nvSpPr>
@@ -13268,6 +13345,10 @@
             <a:prstDash val="solid"/>
           </a:ln>
         </p:spPr>
+        <p:txBody>
+          <a:bodyPr/>
+          <a:p/>
+        </p:txBody>
       </p:sp>
       <p:sp>
         <p:nvSpPr>
@@ -13371,6 +13452,10 @@
             <a:prstDash val="solid"/>
           </a:ln>
         </p:spPr>
+        <p:txBody>
+          <a:bodyPr/>
+          <a:p/>
+        </p:txBody>
       </p:sp>
       <p:sp>
         <p:nvSpPr>
@@ -13588,6 +13673,10 @@
             <a:prstDash val="solid"/>
           </a:ln>
         </p:spPr>
+        <p:txBody>
+          <a:bodyPr/>
+          <a:p/>
+        </p:txBody>
       </p:sp>
       <p:sp>
         <p:nvSpPr>
@@ -13691,6 +13780,10 @@
             <a:prstDash val="solid"/>
           </a:ln>
         </p:spPr>
+        <p:txBody>
+          <a:bodyPr/>
+          <a:p/>
+        </p:txBody>
       </p:sp>
       <p:pic>
         <p:nvPicPr>
@@ -13740,6 +13833,10 @@
             <a:prstDash val="solid"/>
           </a:ln>
         </p:spPr>
+        <p:txBody>
+          <a:bodyPr/>
+          <a:p/>
+        </p:txBody>
       </p:sp>
       <p:pic>
         <p:nvPicPr>
@@ -14257,6 +14354,10 @@
             <a:prstDash val="solid"/>
           </a:ln>
         </p:spPr>
+        <p:txBody>
+          <a:bodyPr/>
+          <a:p/>
+        </p:txBody>
       </p:sp>
       <p:sp>
         <p:nvSpPr>
@@ -22960,7 +23061,7 @@
                 </a:solidFill>
                 <a:latin typeface="Helvetica Neue"/>
               </a:rPr>
-              <a:t>•  51 pages scored across 6 product families. This comparison: the 18 current-account pages, 14 banks, 34 comparable features</a:t>
+              <a:t>•  51 pages scored across 6 product families. This comparison: the 18 current-account pages, 14 banks, 33 comparable features</a:t>
             </a:r>
           </a:p>
           <a:p>

--- a/docs/Banking_Campaigns_Comparator.pptx
+++ b/docs/Banking_Campaigns_Comparator.pptx
@@ -10,11 +10,11 @@
   <p:sldIdLst>
     <p:sldId id="256" r:id="rId2"/>
     <p:sldId id="257" r:id="rId3"/>
-    <p:sldId id="258" r:id="rId4"/>
-    <p:sldId id="259" r:id="rId5"/>
-    <p:sldId id="260" r:id="rId6"/>
-    <p:sldId id="261" r:id="rId7"/>
-    <p:sldId id="262" r:id="rId8"/>
+    <p:sldId id="262" r:id="rId4"/>
+    <p:sldId id="258" r:id="rId5"/>
+    <p:sldId id="259" r:id="rId6"/>
+    <p:sldId id="260" r:id="rId7"/>
+    <p:sldId id="261" r:id="rId8"/>
     <p:sldId id="263" r:id="rId9"/>
     <p:sldId id="264" r:id="rId10"/>
     <p:sldId id="265" r:id="rId11"/>
@@ -563,13 +563,7 @@
           <a:p>
             <a:r>
               <a:rPr lang="en-US" dirty="0"/>
-              <a:t>Ouverture — 1 min.</a:t>
-            </a:r>
-          </a:p>
-          <a:p>
-            <a:r>
-              <a:rPr lang="en-US" dirty="0"/>
-              <a:t>"As part of the ING DACI two-week POC, we set out to answer one question: how do Belgian banks communicate similar products on the open web, and what can ING learn from it? To move away from subjective design opinions, we built a fully reproducible, end-to-end measurement pipeline across 14 banks and 104 features. First disclaimer as guardrail before we start: we have zero click, conversion or performance data. Nothing here claims a design choice caused a commercial outcome - every recommendation is an argued hypothesis worth testing. Let's walk through what the data shows."</a:t>
+              <a:t>"As part of the ING DACI two-week P of C, we set out to answer one question: how do Belgian banks communicate similar products on the open web, and what can ING learn from it?  To move away from subjective design opinions, we built a fully reproducible, end-to-end measurement pipeline across 14 banks and 104 features. First disclaimer before we start: we have no internal data, nothing here claims a design choice caused a commercial outcome — every recommendation is an argued hypothesis worth testing. </a:t>
             </a:r>
           </a:p>
         </p:txBody>
@@ -1037,48 +1031,59 @@
           <a:lstStyle/>
           <a:p>
             <a:r>
-              <a:t>What this cannot support — 60 s. Écran : onglet Analysis, le bloc 104 → 33.</a:t>
-            </a:r>
-          </a:p>
-          <a:p/>
-          <a:p>
-            <a:r>
+              <a:rPr lang="en-US" dirty="0"/>
               <a:t>"104 features in, 33 out. Every reduction is on screen.</a:t>
             </a:r>
           </a:p>
-          <a:p/>
-          <a:p>
-            <a:r>
+          <a:p>
+            <a:r>
+              <a:rPr lang="en-US" dirty="0"/>
               <a:t>And five withdrawn outright, because they measured our tooling, not your pages.</a:t>
             </a:r>
           </a:p>
-          <a:p/>
-          <a:p>
-            <a:r>
+          <a:p>
+            <a:r>
+              <a:rPr lang="en-US" dirty="0"/>
               <a:t>Calls to action: no counting rule held across fourteen banks. Navigation, repeated links, clickable cards — each bank marks them up differently.</a:t>
             </a:r>
           </a:p>
-          <a:p/>
-          <a:p>
-            <a:r>
-              <a:t>Animation: our rule asked whether the stylesheet declared an animation, not whether the page moves. Across eighteen pages, exactly one has real motion — Revolut, a video. Your kickoff deck said ING was the only traditional bank animating. That is now marked not testable, not disproved. We will not rule on it with a broken instrument.</a:t>
-            </a:r>
-          </a:p>
-          <a:p/>
-          <a:p>
-            <a:r>
-              <a:t>The fifth we found while rehearsing this: a feature that tested whether a page uses an HTML table element. Traditional banks do. N26 and Revolut build the same plan comparison in CSS. It was reporting a markup convention as a strategic difference.</a:t>
-            </a:r>
-          </a:p>
-          <a:p/>
-          <a:p>
-            <a:r>
+          <a:p>
+            <a:r>
+              <a:rPr lang="en-US" dirty="0"/>
+              <a:t>Animation: our rule asked whether the stylesheet declared an animation, not whether the page moves. Across eighteen pages, exactly one has real motion — </a:t>
+            </a:r>
+            <a:r>
+              <a:rPr lang="en-US" dirty="0" err="1"/>
+              <a:t>Revolut</a:t>
+            </a:r>
+            <a:r>
+              <a:rPr lang="en-US" dirty="0"/>
+              <a:t>, a video. Your kickoff deck said ING was the only traditional bank animating. That is now marked not testable, not disproved. We will not rule on it with a broken instrument.</a:t>
+            </a:r>
+          </a:p>
+          <a:p>
+            <a:r>
+              <a:rPr lang="en-US" dirty="0"/>
+              <a:t>The fifth we found while rehearsing this: a feature that tested whether a page uses an HTML table element. Traditional banks do. N26 and </a:t>
+            </a:r>
+            <a:r>
+              <a:rPr lang="en-US" dirty="0" err="1"/>
+              <a:t>Revolut</a:t>
+            </a:r>
+            <a:r>
+              <a:rPr lang="en-US" dirty="0"/>
+              <a:t> build the same plan comparison in CSS. It was reporting a markup convention as a strategic difference.</a:t>
+            </a:r>
+          </a:p>
+          <a:p>
+            <a:r>
+              <a:rPr lang="en-US" dirty="0"/>
               <a:t>And one whole axis of our AI Score returns nothing.</a:t>
             </a:r>
           </a:p>
-          <a:p/>
-          <a:p>
-            <a:r>
+          <a:p>
+            <a:r>
+              <a:rPr lang="en-US" dirty="0"/>
               <a:t>We would rather hand you 33 numbers we can defend."</a:t>
             </a:r>
           </a:p>
@@ -1137,26 +1142,36 @@
           <a:lstStyle/>
           <a:p>
             <a:r>
-              <a:t>Clôture — 30 s. Écran : onglet Recommendations.</a:t>
-            </a:r>
-          </a:p>
-          <a:p/>
-          <a:p>
-            <a:r>
+              <a:rPr lang="en-US" dirty="0"/>
               <a:t>"What you keep is an instrument: 104 documented features, a frozen contract, a pipeline that re-runs from stored snapshots, 423 tests. The next comparison costs days, not weeks — including next September's state-bond wave.</a:t>
             </a:r>
           </a:p>
-          <a:p/>
-          <a:p>
-            <a:r>
-              <a:t>Ten prioritised changes came out of this run, each traced to a feature and a page. None is a performance claim — no click data exists, so each is a hypothesis you can test.</a:t>
-            </a:r>
-          </a:p>
-          <a:p/>
-          <a:p>
-            <a:r>
+          <a:p>
+            <a:endParaRPr lang="en-US" dirty="0"/>
+          </a:p>
+          <a:p>
+            <a:r>
+              <a:rPr lang="en-US" dirty="0"/>
+              <a:t>Ten </a:t>
+            </a:r>
+            <a:r>
+              <a:rPr lang="en-US" dirty="0" err="1"/>
+              <a:t>prioritised</a:t>
+            </a:r>
+            <a:r>
+              <a:rPr lang="en-US" dirty="0"/>
+              <a:t> changes came out of this run, each traced to a feature and a page. None is a performance claim — no click data exists, so each is a hypothesis you can test.</a:t>
+            </a:r>
+          </a:p>
+          <a:p>
+            <a:endParaRPr lang="en-US" dirty="0"/>
+          </a:p>
+          <a:p>
+            <a:r>
+              <a:rPr lang="en-US" dirty="0"/>
               <a:t>It is a proof of concept. Your questions are the useful part."</a:t>
             </a:r>
+            <a:endParaRPr dirty="0"/>
           </a:p>
         </p:txBody>
       </p:sp>
@@ -1214,18 +1229,60 @@
           <a:p>
             <a:r>
               <a:rPr lang="en-US" dirty="0"/>
-              <a:t>What we built - 45 s.</a:t>
-            </a:r>
+              <a:t>"Three things frame this.</a:t>
+            </a:r>
+          </a:p>
+          <a:p>
+            <a:endParaRPr lang="en-US" dirty="0"/>
           </a:p>
           <a:p>
             <a:r>
               <a:rPr lang="en-US" dirty="0"/>
-              <a:t>"One pipeline, one frozen contract, no second definition of any number: 51 pages, 14 banks, 6 product families. Automatic extraction where a machine can measure it, a human rubric where it's genuinely a judgement call, one web UI tying the two together. 420 automated tests guard it."</a:t>
+              <a:t>ING is a hybrid. You carry the direct, feature-first, mobile-first tone of a neobank, and the institutional weight of a Tier-1 bank. That is a position, not an accident.</a:t>
+            </a:r>
+          </a:p>
+          <a:p>
+            <a:endParaRPr lang="en-US" dirty="0"/>
+          </a:p>
+          <a:p>
+            <a:r>
+              <a:rPr lang="en-US" dirty="0"/>
+              <a:t>The playing field is level on regulation. Neobanks' speed is architecture and no branches — not lighter European or compliance rules.</a:t>
+            </a:r>
+          </a:p>
+          <a:p>
+            <a:endParaRPr lang="en-US" dirty="0"/>
+          </a:p>
+          <a:p>
+            <a:r>
+              <a:rPr lang="en-US" dirty="0"/>
+              <a:t>Where you differ is the engine. Traditional banks use the current account as a loss leader and </a:t>
+            </a:r>
+            <a:r>
+              <a:rPr lang="en-US" dirty="0" err="1"/>
+              <a:t>monetise</a:t>
+            </a:r>
+            <a:r>
+              <a:rPr lang="en-US" dirty="0"/>
+              <a:t> later: mortgages, insurance, wealth. Neobanks </a:t>
+            </a:r>
+            <a:r>
+              <a:rPr lang="en-US" dirty="0" err="1"/>
+              <a:t>monetise</a:t>
+            </a:r>
+            <a:r>
+              <a:rPr lang="en-US" dirty="0"/>
+              <a:t> upfront — freemium tiers, subscriptions, abonnements, FX. They chase volume among young adults and digital nomads. You chase lifetime value: expats, first-time investors, first-time buyers."</a:t>
             </a:r>
           </a:p>
         </p:txBody>
       </p:sp>
     </p:spTree>
+    <p:extLst>
+      <p:ext uri="{BB962C8B-B14F-4D97-AF65-F5344CB8AC3E}">
+        <p14:creationId xmlns:p14="http://schemas.microsoft.com/office/powerpoint/2010/main" val="559537629"/>
+      </p:ext>
+    </p:extLst>
   </p:cSld>
   <p:clrMapOvr>
     <a:masterClrMapping/>
@@ -1277,16 +1334,7 @@
           <a:bodyPr/>
           <a:lstStyle/>
           <a:p>
-            <a:r>
-              <a:rPr lang="en-US" dirty="0"/>
-              <a:t>The pipeline - 30 s.</a:t>
-            </a:r>
-          </a:p>
-          <a:p>
-            <a:r>
-              <a:rPr lang="en-US" dirty="0"/>
-              <a:t>"Five stages: collect under a compliance gate, extract, derive, score, analyse. Every stage writes to the same frozen feature contract, so no number has a second definition anywhere in the chain."</a:t>
-            </a:r>
+            <a:endParaRPr lang="en-US" dirty="0"/>
           </a:p>
         </p:txBody>
       </p:sp>
@@ -1343,25 +1391,8 @@
           <a:lstStyle/>
           <a:p>
             <a:r>
-              <a:t>Dataset — 30 s. Écran : cette slide, puis bascule sur l'onglet Data.</a:t>
-            </a:r>
-          </a:p>
-          <a:p/>
-          <a:p>
-            <a:r>
-              <a:t>"So the question is whether that hybrid position shows up in how you actually communicate.</a:t>
-            </a:r>
-          </a:p>
-          <a:p/>
-          <a:p>
-            <a:r>
-              <a:t>51 pages, 14 banks, 6 product families, 104 documented features. We only ever compare within one product family — pages do different jobs. The headline runs on 18 current-account pages, 14 banks.</a:t>
-            </a:r>
-          </a:p>
-          <a:p/>
-          <a:p>
-            <a:r>
-              <a:t>Deciding what was relevant was part of the work."</a:t>
+              <a:rPr lang="en-US" dirty="0"/>
+              <a:t>"Five stages: collect under a compliance gate, extract, derive, score, analyse. Every stage writes to the same frozen feature contract, so no number has a second definition anywhere in the chain."</a:t>
             </a:r>
           </a:p>
         </p:txBody>
@@ -1418,28 +1449,26 @@
           <a:bodyPr/>
           <a:lstStyle/>
           <a:p>
+            <a:endParaRPr lang="en-US" dirty="0"/>
+          </a:p>
+          <a:p>
             <a:r>
               <a:rPr lang="en-US" dirty="0"/>
-              <a:t>Rubric scoring - 1 min 15.</a:t>
+              <a:t>"So the question is whether that hybrid position shows up in how you actually communicate.</a:t>
             </a:r>
           </a:p>
           <a:p>
             <a:r>
               <a:rPr lang="en-US" dirty="0"/>
-              <a:t>"13 features are judgements, not measurements - clarity of the offer, layout, persuasion technique. Only one human judge for this pass, and I say so plainly rather than dressing a single opinion up as a consensus.</a:t>
+              <a:t>51 pages, 14 banks, 6 product families, 104 documented features. We only ever compare within one product family — pages do different jobs. The headline runs on 18 current-account pages, 14 banks.</a:t>
             </a:r>
           </a:p>
           <a:p>
             <a:r>
               <a:rPr lang="en-US" dirty="0"/>
-              <a:t>We also have a model sheet, written to its own file and never into a human one. But it is not a second opinion, because our pinned model reads text; it has no vision. And 12 of our 13 judged features are defined in the dictionary as judged from the screenshot. Only one - formality - can honestly be scored from text, and there the model lands within one point of the human seventy-three percent of the time. On the 12 visual ones, its answers are confident answers to a question the text cannot always settle: on value proposition clarity it ranked the pages close to the opposite of the human.</a:t>
-            </a:r>
-          </a:p>
-          <a:p>
-            <a:r>
-              <a:rPr lang="en-US" dirty="0"/>
-              <a:t>So we keep it as a reference and we do not average it in. That's the difference between using a model and trusting it."</a:t>
-            </a:r>
+              <a:t>Deciding what was relevant was part of the work."</a:t>
+            </a:r>
+            <a:endParaRPr dirty="0"/>
           </a:p>
         </p:txBody>
       </p:sp>
@@ -1495,33 +1524,7 @@
           <a:bodyPr/>
           <a:lstStyle/>
           <a:p>
-            <a:r>
-              <a:t>Strategic context — 50 s. Écran : cette slide. Tu les regardes, pas l'écran.</a:t>
-            </a:r>
-          </a:p>
-          <a:p/>
-          <a:p>
-            <a:r>
-              <a:t>"Three things frame this.</a:t>
-            </a:r>
-          </a:p>
-          <a:p/>
-          <a:p>
-            <a:r>
-              <a:t>ING is a hybrid. You carry the direct, feature-first, mobile-first tone of a neobank, and the institutional weight of a Tier-1 bank. That is a position, not an accident.</a:t>
-            </a:r>
-          </a:p>
-          <a:p/>
-          <a:p>
-            <a:r>
-              <a:t>The playing field is level on regulation. Neobanks' speed is architecture and no branches — not lighter European or compliance rules.</a:t>
-            </a:r>
-          </a:p>
-          <a:p/>
-          <a:p>
-            <a:r>
-              <a:t>Where you differ is the engine. Traditional banks use the current account as a loss leader and monetise later: mortgages, insurance, wealth. Neobanks monetise upfront — freemium tiers, subscriptions, "abonnements", FX. They chase volume among young adults and digital nomads. You chase lifetime value: expats, first-time investors, first-time buyers."</a:t>
-            </a:r>
+            <a:endParaRPr lang="en-US" dirty="0"/>
           </a:p>
         </p:txBody>
       </p:sp>
@@ -1578,37 +1581,61 @@
           <a:lstStyle/>
           <a:p>
             <a:r>
-              <a:t>What the analysis found — 70 s. Écran : onglet Home, le radar puis l'axe.</a:t>
-            </a:r>
-          </a:p>
-          <a:p/>
-          <a:p>
-            <a:r>
-              <a:t>"On the traditional–challenger axis ING scores 0.41. Belfius sits at 0.28 below you, Keytrade at 0.55 above — and Keytrade is a challenger. You are the last incumbent on the axis before the challengers begin: the most challenger-like traditional bank in Belgium. The hybrid is not a claim, it is a position on a line.</a:t>
-            </a:r>
-          </a:p>
-          <a:p/>
-          <a:p>
-            <a:r>
+              <a:rPr lang="en-US" dirty="0"/>
+              <a:t>On the traditional–challenger axis ING scores 0.41. Belfius sits at 0.28 below you, </a:t>
+            </a:r>
+            <a:r>
+              <a:rPr lang="en-US" dirty="0" err="1"/>
+              <a:t>Keytrade</a:t>
+            </a:r>
+            <a:r>
+              <a:rPr lang="en-US" dirty="0"/>
+              <a:t> at 0.55 above — and </a:t>
+            </a:r>
+            <a:r>
+              <a:rPr lang="en-US" dirty="0" err="1"/>
+              <a:t>Keytrade</a:t>
+            </a:r>
+            <a:r>
+              <a:rPr lang="en-US" dirty="0"/>
+              <a:t> is a challenger. You are the last incumbent on the axis before the challengers begin: the most challenger-like traditional bank in Belgium. The hybrid is not a claim, it is a position on a line.</a:t>
+            </a:r>
+          </a:p>
+          <a:p>
+            <a:r>
+              <a:rPr lang="en-US" dirty="0"/>
               <a:t>Your targeting shows too. The personas named on your pack pages are mass market, student and expat. Across your whole page set, six of eight, including investor and retiree. The high-value segments are there in the copy.</a:t>
             </a:r>
           </a:p>
-          <a:p/>
-          <a:p>
-            <a:r>
-              <a:t>But three signals separate you from everyone, and all three are pressure. Deadline language, the largest gap in the set. Persuasion levers. And the offer reads as clearly worth having.</a:t>
-            </a:r>
-          </a:p>
-          <a:p/>
-          <a:p>
-            <a:r>
-              <a:t>On the pages we measured, you are the loudest bank in Belgium. Next to a top-five NPS irritator, that's the finding."</a:t>
-            </a:r>
-          </a:p>
-          <a:p/>
-          <a:p>
-            <a:r>
-              <a:t>SI LE RADAR EST À L'ÉCRAN, la ligne à dire : "Trust reads zero for thirteen banks of fourteen. That is measured, not missing — not one page in this family cites a branch network as a benefit, and the only two carrying an institutional or regulatory trust signal are Revolut's and bunq's. Both challengers. The asset a Tier-1 bank has and a neobank cannot copy is the one nobody is using on the page."</a:t>
+          <a:p>
+            <a:r>
+              <a:rPr lang="en-US" dirty="0"/>
+              <a:t>But three signals separate you from everyone, and all three are pressure. Deadline language, the largest gap in the set. Persuasion levers. And the offer reads as clearly worth having. On the pages we measured, you are the loudest bank in Belgium. Next to a top-five NPS irritator, that's the finding."</a:t>
+            </a:r>
+          </a:p>
+          <a:p>
+            <a:endParaRPr lang="en-US" dirty="0"/>
+          </a:p>
+          <a:p>
+            <a:r>
+              <a:rPr lang="en-US" dirty="0"/>
+              <a:t>"Trust reads zero for thirteen banks of fourteen. That is measured, not missing — not one page in this family cites a branch network as a benefit, and the only two carrying an institutional or regulatory trust signal are </a:t>
+            </a:r>
+            <a:r>
+              <a:rPr lang="en-US" dirty="0" err="1"/>
+              <a:t>Revolut's</a:t>
+            </a:r>
+            <a:r>
+              <a:rPr lang="en-US" dirty="0"/>
+              <a:t> and </a:t>
+            </a:r>
+            <a:r>
+              <a:rPr lang="en-US" dirty="0" err="1"/>
+              <a:t>bunq's</a:t>
+            </a:r>
+            <a:r>
+              <a:rPr lang="en-US" dirty="0"/>
+              <a:t>. Both challengers. The asset a Tier-1 bank has and a neobank cannot copy is the one nobody is using on the page."</a:t>
             </a:r>
           </a:p>
         </p:txBody>
@@ -11396,7 +11423,10 @@
         </p:spPr>
         <p:txBody>
           <a:bodyPr/>
-          <a:p/>
+          <a:lstStyle/>
+          <a:p>
+            <a:endParaRPr/>
+          </a:p>
         </p:txBody>
       </p:sp>
       <p:sp>
@@ -11503,7 +11533,10 @@
         </p:spPr>
         <p:txBody>
           <a:bodyPr/>
-          <a:p/>
+          <a:lstStyle/>
+          <a:p>
+            <a:endParaRPr/>
+          </a:p>
         </p:txBody>
       </p:sp>
       <p:pic>
@@ -11912,7 +11945,10 @@
         </p:spPr>
         <p:txBody>
           <a:bodyPr/>
-          <a:p/>
+          <a:lstStyle/>
+          <a:p>
+            <a:endParaRPr/>
+          </a:p>
         </p:txBody>
       </p:sp>
       <p:sp>
@@ -12055,7 +12091,10 @@
         </p:spPr>
         <p:txBody>
           <a:bodyPr/>
-          <a:p/>
+          <a:lstStyle/>
+          <a:p>
+            <a:endParaRPr/>
+          </a:p>
         </p:txBody>
       </p:sp>
       <p:sp>
@@ -12162,7 +12201,10 @@
         </p:spPr>
         <p:txBody>
           <a:bodyPr/>
-          <a:p/>
+          <a:lstStyle/>
+          <a:p>
+            <a:endParaRPr/>
+          </a:p>
         </p:txBody>
       </p:sp>
       <p:pic>
@@ -12641,7 +12683,10 @@
         </p:spPr>
         <p:txBody>
           <a:bodyPr/>
-          <a:p/>
+          <a:lstStyle/>
+          <a:p>
+            <a:endParaRPr/>
+          </a:p>
         </p:txBody>
       </p:sp>
       <p:sp>
@@ -12750,7 +12795,10 @@
         </p:spPr>
         <p:txBody>
           <a:bodyPr/>
-          <a:p/>
+          <a:lstStyle/>
+          <a:p>
+            <a:endParaRPr/>
+          </a:p>
         </p:txBody>
       </p:sp>
       <p:sp>
@@ -12901,7 +12949,10 @@
         </p:spPr>
         <p:txBody>
           <a:bodyPr/>
-          <a:p/>
+          <a:lstStyle/>
+          <a:p>
+            <a:endParaRPr/>
+          </a:p>
         </p:txBody>
       </p:sp>
       <p:sp>
@@ -13052,7 +13103,10 @@
         </p:spPr>
         <p:txBody>
           <a:bodyPr/>
-          <a:p/>
+          <a:lstStyle/>
+          <a:p>
+            <a:endParaRPr/>
+          </a:p>
         </p:txBody>
       </p:sp>
       <p:sp>
@@ -13240,7 +13294,10 @@
         </p:spPr>
         <p:txBody>
           <a:bodyPr/>
-          <a:p/>
+          <a:lstStyle/>
+          <a:p>
+            <a:endParaRPr/>
+          </a:p>
         </p:txBody>
       </p:sp>
       <p:sp>
@@ -13347,7 +13404,10 @@
         </p:spPr>
         <p:txBody>
           <a:bodyPr/>
-          <a:p/>
+          <a:lstStyle/>
+          <a:p>
+            <a:endParaRPr/>
+          </a:p>
         </p:txBody>
       </p:sp>
       <p:sp>
@@ -13454,7 +13514,10 @@
         </p:spPr>
         <p:txBody>
           <a:bodyPr/>
-          <a:p/>
+          <a:lstStyle/>
+          <a:p>
+            <a:endParaRPr/>
+          </a:p>
         </p:txBody>
       </p:sp>
       <p:sp>
@@ -13675,7 +13738,10 @@
         </p:spPr>
         <p:txBody>
           <a:bodyPr/>
-          <a:p/>
+          <a:lstStyle/>
+          <a:p>
+            <a:endParaRPr/>
+          </a:p>
         </p:txBody>
       </p:sp>
       <p:sp>
@@ -13782,7 +13848,10 @@
         </p:spPr>
         <p:txBody>
           <a:bodyPr/>
-          <a:p/>
+          <a:lstStyle/>
+          <a:p>
+            <a:endParaRPr/>
+          </a:p>
         </p:txBody>
       </p:sp>
       <p:pic>
@@ -13835,7 +13904,10 @@
         </p:spPr>
         <p:txBody>
           <a:bodyPr/>
-          <a:p/>
+          <a:lstStyle/>
+          <a:p>
+            <a:endParaRPr/>
+          </a:p>
         </p:txBody>
       </p:sp>
       <p:pic>
@@ -14356,7 +14428,10 @@
         </p:spPr>
         <p:txBody>
           <a:bodyPr/>
-          <a:p/>
+          <a:lstStyle/>
+          <a:p>
+            <a:endParaRPr/>
+          </a:p>
         </p:txBody>
       </p:sp>
       <p:sp>
@@ -18487,7 +18562,7 @@
                 </a:solidFill>
                 <a:latin typeface="Helvetica Neue"/>
               </a:rPr>
-              <a:t>What we built, end to end</a:t>
+              <a:t>Strategic context and positioning</a:t>
             </a:r>
           </a:p>
         </p:txBody>
@@ -18546,7 +18621,7 @@
         <p:spPr>
           <a:xfrm>
             <a:off x="685800" y="1463040"/>
-            <a:ext cx="10881360" cy="4754880"/>
+            <a:ext cx="10881360" cy="3821367"/>
           </a:xfrm>
           <a:prstGeom prst="rect">
             <a:avLst/>
@@ -18564,254 +18639,250 @@
                 <a:spcPct val="105000"/>
               </a:lnSpc>
               <a:spcAft>
-                <a:spcPts val="900"/>
-              </a:spcAft>
-            </a:pPr>
-            <a:r>
-              <a:rPr sz="1500" b="0" dirty="0">
+                <a:spcPts val="200"/>
+              </a:spcAft>
+            </a:pPr>
+            <a:r>
+              <a:rPr sz="1500" b="1" dirty="0">
                 <a:solidFill>
                   <a:srgbClr val="14141C"/>
                 </a:solidFill>
                 <a:latin typeface="Helvetica Neue"/>
               </a:rPr>
-              <a:t>•  A measurement pipeline: 14 banks, 51 pages across 6 product families (18 of them current-account), 104 declared features, one frozen contract.</a:t>
-            </a:r>
-          </a:p>
-          <a:p>
-            <a:pPr algn="l">
-              <a:lnSpc>
-                <a:spcPct val="105000"/>
-              </a:lnSpc>
-              <a:spcAft>
-                <a:spcPts val="900"/>
-              </a:spcAft>
-            </a:pPr>
-            <a:r>
-              <a:rPr sz="1500" b="0" dirty="0">
+              <a:t>•  The hybrid model</a:t>
+            </a:r>
+          </a:p>
+          <a:p>
+            <a:pPr algn="l">
+              <a:lnSpc>
+                <a:spcPct val="105000"/>
+              </a:lnSpc>
+              <a:spcAft>
+                <a:spcPts val="1000"/>
+              </a:spcAft>
+            </a:pPr>
+            <a:r>
+              <a:rPr sz="1300" b="0" dirty="0">
+                <a:solidFill>
+                  <a:srgbClr val="585868"/>
+                </a:solidFill>
+                <a:latin typeface="Helvetica Neue"/>
+              </a:rPr>
+              <a:t>     ING blends the direct, feature-focused, mobile-first tone of a neobank with the institutional weight of a Tier-1 retail bank — regulatory authority and an established brand. </a:t>
+            </a:r>
+          </a:p>
+          <a:p>
+            <a:pPr algn="l">
+              <a:lnSpc>
+                <a:spcPct val="105000"/>
+              </a:lnSpc>
+              <a:spcAft>
+                <a:spcPts val="200"/>
+              </a:spcAft>
+            </a:pPr>
+            <a:r>
+              <a:rPr sz="1500" b="1" dirty="0">
                 <a:solidFill>
                   <a:srgbClr val="14141C"/>
                 </a:solidFill>
                 <a:latin typeface="Helvetica Neue"/>
               </a:rPr>
-              <a:t>•  A scoring workflow: automatic extraction, model-assisted extraction, and a human rubric for the 13 judgement features.</a:t>
-            </a:r>
-          </a:p>
-          <a:p>
-            <a:pPr algn="l">
-              <a:lnSpc>
-                <a:spcPct val="105000"/>
-              </a:lnSpc>
-              <a:spcAft>
-                <a:spcPts val="900"/>
-              </a:spcAft>
-            </a:pPr>
-            <a:r>
-              <a:rPr sz="1500" b="0" dirty="0">
+              <a:t>•  A level playing field on regulation</a:t>
+            </a:r>
+          </a:p>
+          <a:p>
+            <a:pPr algn="l">
+              <a:lnSpc>
+                <a:spcPct val="105000"/>
+              </a:lnSpc>
+              <a:spcAft>
+                <a:spcPts val="1000"/>
+              </a:spcAft>
+            </a:pPr>
+            <a:r>
+              <a:rPr sz="1300" b="0" dirty="0">
+                <a:solidFill>
+                  <a:srgbClr val="585868"/>
+                </a:solidFill>
+                <a:latin typeface="Helvetica Neue"/>
+              </a:rPr>
+              <a:t>     Neobanks like Revolut hold the same European banking licenses and face the same Belgian compliance checks — including the mandatory CCP credit-registry query for consumer lending. Their speed comes from modern architecture, no branch network, and faster decision loops — not lighter rules.</a:t>
+            </a:r>
+          </a:p>
+          <a:p>
+            <a:pPr algn="l">
+              <a:lnSpc>
+                <a:spcPct val="105000"/>
+              </a:lnSpc>
+              <a:spcAft>
+                <a:spcPts val="200"/>
+              </a:spcAft>
+            </a:pPr>
+            <a:r>
+              <a:rPr sz="1500" b="1" dirty="0">
                 <a:solidFill>
                   <a:srgbClr val="14141C"/>
                 </a:solidFill>
                 <a:latin typeface="Helvetica Neue"/>
               </a:rPr>
-              <a:t>•  An analysis library: positioning, similarity, category comparison, AI score, cross-sell, plus generated limitations.</a:t>
-            </a:r>
-          </a:p>
-          <a:p>
-            <a:pPr algn="l">
-              <a:lnSpc>
-                <a:spcPct val="105000"/>
-              </a:lnSpc>
-              <a:spcAft>
-                <a:spcPts val="900"/>
-              </a:spcAft>
-            </a:pPr>
-            <a:r>
-              <a:rPr sz="1500" b="0" dirty="0">
+              <a:t>•  Different monetization engines</a:t>
+            </a:r>
+          </a:p>
+          <a:p>
+            <a:pPr algn="l">
+              <a:lnSpc>
+                <a:spcPct val="105000"/>
+              </a:lnSpc>
+              <a:spcAft>
+                <a:spcPts val="1000"/>
+              </a:spcAft>
+            </a:pPr>
+            <a:r>
+              <a:rPr sz="1300" b="0" dirty="0">
+                <a:solidFill>
+                  <a:srgbClr val="585868"/>
+                </a:solidFill>
+                <a:latin typeface="Helvetica Neue"/>
+              </a:rPr>
+              <a:t>     Traditional banks have long used the basic current account as a loss leader — a produit d'appel — to acquire clients and monetize later through mortgages, insurance and wealth management. Neobanks flip that: transparent freemium tiers, paid subscriptions, and transactional FX / fee income, upfront.</a:t>
+            </a:r>
+          </a:p>
+          <a:p>
+            <a:pPr algn="l">
+              <a:lnSpc>
+                <a:spcPct val="105000"/>
+              </a:lnSpc>
+              <a:spcAft>
+                <a:spcPts val="200"/>
+              </a:spcAft>
+            </a:pPr>
+            <a:r>
+              <a:rPr sz="1500" b="1" dirty="0">
                 <a:solidFill>
                   <a:srgbClr val="14141C"/>
                 </a:solidFill>
                 <a:latin typeface="Helvetica Neue"/>
               </a:rPr>
-              <a:t>•  One web UI with ten tabs: four business views (Analysis, Trends, Reputation, Recommendations), the generated-site builder, and six read-only operator views carried over from the </a:t>
-            </a:r>
-            <a:r>
-              <a:rPr sz="1500" b="0" dirty="0" err="1">
-                <a:solidFill>
-                  <a:srgbClr val="14141C"/>
-                </a:solidFill>
-                <a:latin typeface="Helvetica Neue"/>
-              </a:rPr>
-              <a:t>Streamlit</a:t>
-            </a:r>
-            <a:r>
-              <a:rPr sz="1500" b="0" dirty="0">
-                <a:solidFill>
-                  <a:srgbClr val="14141C"/>
-                </a:solidFill>
-                <a:latin typeface="Helvetica Neue"/>
-              </a:rPr>
-              <a:t> dashboard.</a:t>
-            </a:r>
-          </a:p>
-          <a:p>
-            <a:pPr algn="l">
-              <a:lnSpc>
-                <a:spcPct val="105000"/>
-              </a:lnSpc>
-              <a:spcAft>
-                <a:spcPts val="900"/>
-              </a:spcAft>
-            </a:pPr>
-            <a:r>
-              <a:rPr sz="1500" b="0" dirty="0">
-                <a:solidFill>
-                  <a:srgbClr val="14141C"/>
-                </a:solidFill>
-                <a:latin typeface="Helvetica Neue"/>
-              </a:rPr>
-              <a:t>•  Two optional signals, both fenced off from the performance claim: search interest, and news themes.</a:t>
-            </a:r>
-          </a:p>
-          <a:p>
-            <a:pPr algn="l">
-              <a:lnSpc>
-                <a:spcPct val="105000"/>
-              </a:lnSpc>
-              <a:spcAft>
-                <a:spcPts val="900"/>
-              </a:spcAft>
-            </a:pPr>
-            <a:r>
-              <a:rPr sz="1500" b="0" dirty="0">
-                <a:solidFill>
-                  <a:srgbClr val="14141C"/>
-                </a:solidFill>
-                <a:latin typeface="Helvetica Neue"/>
-              </a:rPr>
-              <a:t>•  A generated ING website: ten pages built from the selected recommendations — an illustration of what a recommendation means in practice, not a proposal for ING's own site.</a:t>
-            </a:r>
-          </a:p>
-          <a:p>
-            <a:pPr algn="l">
-              <a:lnSpc>
-                <a:spcPct val="105000"/>
-              </a:lnSpc>
-              <a:spcAft>
-                <a:spcPts val="200"/>
-              </a:spcAft>
-            </a:pPr>
-            <a:endParaRPr sz="1500" b="0" dirty="0">
+              <a:t>•  Who each side is chasing</a:t>
+            </a:r>
+          </a:p>
+          <a:p>
+            <a:pPr algn="l">
+              <a:lnSpc>
+                <a:spcPct val="105000"/>
+              </a:lnSpc>
+              <a:spcAft>
+                <a:spcPts val="0"/>
+              </a:spcAft>
+            </a:pPr>
+            <a:r>
+              <a:rPr sz="1300" b="0" dirty="0">
+                <a:solidFill>
+                  <a:srgbClr val="585868"/>
+                </a:solidFill>
+                <a:latin typeface="Helvetica Neue"/>
+              </a:rPr>
+              <a:t>     Neobanks win volume among young adults, digital nomads and casual spenders. ING's acquisition budget targets high lifetime-value segments instead: first-time investors, expats and high-net-worth individuals, and first-time buyers in mortgage and real estate. Professional and business banking is out of scope for this comparison — retail only.</a:t>
+            </a:r>
+          </a:p>
+        </p:txBody>
+      </p:sp>
+      <p:sp>
+        <p:nvSpPr>
+          <p:cNvPr id="5" name="TextBox 4"/>
+          <p:cNvSpPr txBox="1"/>
+          <p:nvPr/>
+        </p:nvSpPr>
+        <p:spPr>
+          <a:xfrm>
+            <a:off x="548640" y="6400800"/>
+            <a:ext cx="8229600" cy="274320"/>
+          </a:xfrm>
+          <a:prstGeom prst="rect">
+            <a:avLst/>
+          </a:prstGeom>
+          <a:noFill/>
+        </p:spPr>
+        <p:txBody>
+          <a:bodyPr wrap="square">
+            <a:spAutoFit/>
+          </a:bodyPr>
+          <a:lstStyle/>
+          <a:p>
+            <a:pPr algn="l">
+              <a:lnSpc>
+                <a:spcPct val="105000"/>
+              </a:lnSpc>
+              <a:spcAft>
+                <a:spcPts val="600"/>
+              </a:spcAft>
+            </a:pPr>
+            <a:r>
+              <a:rPr sz="1000" b="0">
+                <a:solidFill>
+                  <a:srgbClr val="585868"/>
+                </a:solidFill>
+                <a:latin typeface="Helvetica Neue"/>
+              </a:rPr>
+              <a:t>Banking Campaigns Comparator · ING DACI / Customer AI · September 2026</a:t>
+            </a:r>
+          </a:p>
+        </p:txBody>
+      </p:sp>
+      <p:sp>
+        <p:nvSpPr>
+          <p:cNvPr id="6" name="TextBox 5"/>
+          <p:cNvSpPr txBox="1"/>
+          <p:nvPr/>
+        </p:nvSpPr>
+        <p:spPr>
+          <a:xfrm>
+            <a:off x="11094415" y="6400800"/>
+            <a:ext cx="548640" cy="242695"/>
+          </a:xfrm>
+          <a:prstGeom prst="rect">
+            <a:avLst/>
+          </a:prstGeom>
+          <a:noFill/>
+        </p:spPr>
+        <p:txBody>
+          <a:bodyPr wrap="square">
+            <a:spAutoFit/>
+          </a:bodyPr>
+          <a:lstStyle/>
+          <a:p>
+            <a:pPr algn="r">
+              <a:lnSpc>
+                <a:spcPct val="105000"/>
+              </a:lnSpc>
+              <a:spcAft>
+                <a:spcPts val="600"/>
+              </a:spcAft>
+            </a:pPr>
+            <a:r>
+              <a:rPr lang="fr-FR" sz="1000" b="0" dirty="0">
+                <a:solidFill>
+                  <a:srgbClr val="585868"/>
+                </a:solidFill>
+                <a:latin typeface="Helvetica Neue"/>
+              </a:rPr>
+              <a:t>3</a:t>
+            </a:r>
+            <a:endParaRPr sz="1000" b="0" dirty="0">
               <a:solidFill>
-                <a:srgbClr val="14141C"/>
+                <a:srgbClr val="585868"/>
               </a:solidFill>
               <a:latin typeface="Helvetica Neue"/>
             </a:endParaRPr>
           </a:p>
-          <a:p>
-            <a:pPr algn="l">
-              <a:lnSpc>
-                <a:spcPct val="105000"/>
-              </a:lnSpc>
-              <a:spcAft>
-                <a:spcPts val="0"/>
-              </a:spcAft>
-            </a:pPr>
-            <a:r>
-              <a:rPr sz="1250" b="0" dirty="0">
-                <a:solidFill>
-                  <a:srgbClr val="585868"/>
-                </a:solidFill>
-                <a:latin typeface="Helvetica Neue"/>
-              </a:rPr>
-              <a:t>Each of those pieces is the next few slides; the pipeline diagram overleaf is the map.</a:t>
-            </a:r>
-          </a:p>
-        </p:txBody>
-      </p:sp>
-      <p:sp>
-        <p:nvSpPr>
-          <p:cNvPr id="5" name="TextBox 4"/>
-          <p:cNvSpPr txBox="1"/>
-          <p:nvPr/>
-        </p:nvSpPr>
-        <p:spPr>
-          <a:xfrm>
-            <a:off x="548640" y="6400800"/>
-            <a:ext cx="8229600" cy="274320"/>
-          </a:xfrm>
-          <a:prstGeom prst="rect">
-            <a:avLst/>
-          </a:prstGeom>
-          <a:noFill/>
-        </p:spPr>
-        <p:txBody>
-          <a:bodyPr wrap="square">
-            <a:spAutoFit/>
-          </a:bodyPr>
-          <a:lstStyle/>
-          <a:p>
-            <a:pPr algn="l">
-              <a:lnSpc>
-                <a:spcPct val="105000"/>
-              </a:lnSpc>
-              <a:spcAft>
-                <a:spcPts val="600"/>
-              </a:spcAft>
-            </a:pPr>
-            <a:r>
-              <a:rPr sz="1000" b="0">
-                <a:solidFill>
-                  <a:srgbClr val="585868"/>
-                </a:solidFill>
-                <a:latin typeface="Helvetica Neue"/>
-              </a:rPr>
-              <a:t>Banking Campaigns Comparator · ING DACI / Customer AI · September 2026</a:t>
-            </a:r>
-          </a:p>
-        </p:txBody>
-      </p:sp>
-      <p:sp>
-        <p:nvSpPr>
-          <p:cNvPr id="6" name="TextBox 5"/>
-          <p:cNvSpPr txBox="1"/>
-          <p:nvPr/>
-        </p:nvSpPr>
-        <p:spPr>
-          <a:xfrm>
-            <a:off x="11094415" y="6400800"/>
-            <a:ext cx="548640" cy="274320"/>
-          </a:xfrm>
-          <a:prstGeom prst="rect">
-            <a:avLst/>
-          </a:prstGeom>
-          <a:noFill/>
-        </p:spPr>
-        <p:txBody>
-          <a:bodyPr wrap="square">
-            <a:spAutoFit/>
-          </a:bodyPr>
-          <a:lstStyle/>
-          <a:p>
-            <a:pPr algn="r">
-              <a:lnSpc>
-                <a:spcPct val="105000"/>
-              </a:lnSpc>
-              <a:spcAft>
-                <a:spcPts val="600"/>
-              </a:spcAft>
-            </a:pPr>
-            <a:r>
-              <a:rPr sz="1000" b="0">
-                <a:solidFill>
-                  <a:srgbClr val="585868"/>
-                </a:solidFill>
-                <a:latin typeface="Helvetica Neue"/>
-              </a:rPr>
-              <a:t>3</a:t>
-            </a:r>
-          </a:p>
         </p:txBody>
       </p:sp>
     </p:spTree>
+    <p:extLst>
+      <p:ext uri="{BB962C8B-B14F-4D97-AF65-F5344CB8AC3E}">
+        <p14:creationId xmlns:p14="http://schemas.microsoft.com/office/powerpoint/2010/main" val="3710705376"/>
+      </p:ext>
+    </p:extLst>
   </p:cSld>
   <p:clrMapOvr>
     <a:masterClrMapping/>
@@ -21750,8 +21821,8 @@
         </p:nvSpPr>
         <p:spPr>
           <a:xfrm>
-            <a:off x="548640" y="320040"/>
-            <a:ext cx="11064240" cy="640080"/>
+            <a:off x="548640" y="384048"/>
+            <a:ext cx="11064240" cy="731520"/>
           </a:xfrm>
           <a:prstGeom prst="rect">
             <a:avLst/>
@@ -21773,13 +21844,13 @@
               </a:spcAft>
             </a:pPr>
             <a:r>
-              <a:rPr sz="2400" b="1">
+              <a:rPr sz="2800" b="1">
                 <a:solidFill>
                   <a:srgbClr val="14141C"/>
                 </a:solidFill>
                 <a:latin typeface="Helvetica Neue"/>
               </a:rPr>
-              <a:t>The pipeline, end to end</a:t>
+              <a:t>What we built, end to end</a:t>
             </a:r>
           </a:p>
         </p:txBody>
@@ -21792,8 +21863,8 @@
         </p:nvSpPr>
         <p:spPr>
           <a:xfrm>
-            <a:off x="548640" y="960120"/>
-            <a:ext cx="1463040" cy="54864"/>
+            <a:off x="548640" y="1115568"/>
+            <a:ext cx="1463040" cy="64008"/>
           </a:xfrm>
           <a:prstGeom prst="rect">
             <a:avLst/>
@@ -21829,40 +21900,16 @@
           </a:p>
         </p:txBody>
       </p:sp>
-      <p:pic>
-        <p:nvPicPr>
-          <p:cNvPr id="4" name="Picture 3" descr="diagram_pipeline.png"/>
-          <p:cNvPicPr>
-            <a:picLocks noChangeAspect="1"/>
-          </p:cNvPicPr>
-          <p:nvPr/>
-        </p:nvPicPr>
-        <p:blipFill>
-          <a:blip r:embed="rId3"/>
-          <a:stretch>
-            <a:fillRect/>
-          </a:stretch>
-        </p:blipFill>
-        <p:spPr>
-          <a:xfrm>
-            <a:off x="1828647" y="1325880"/>
-            <a:ext cx="8534400" cy="4800600"/>
-          </a:xfrm>
-          <a:prstGeom prst="rect">
-            <a:avLst/>
-          </a:prstGeom>
-        </p:spPr>
-      </p:pic>
-      <p:sp>
-        <p:nvSpPr>
-          <p:cNvPr id="5" name="TextBox 4"/>
+      <p:sp>
+        <p:nvSpPr>
+          <p:cNvPr id="4" name="TextBox 3"/>
           <p:cNvSpPr txBox="1"/>
           <p:nvPr/>
         </p:nvSpPr>
         <p:spPr>
           <a:xfrm>
-            <a:off x="685800" y="6236208"/>
-            <a:ext cx="10881360" cy="457200"/>
+            <a:off x="685800" y="1463040"/>
+            <a:ext cx="10881360" cy="4754880"/>
           </a:xfrm>
           <a:prstGeom prst="rect">
             <a:avLst/>
@@ -21880,24 +21927,172 @@
                 <a:spcPct val="105000"/>
               </a:lnSpc>
               <a:spcAft>
-                <a:spcPts val="600"/>
-              </a:spcAft>
-            </a:pPr>
-            <a:r>
-              <a:rPr sz="1200" b="0">
+                <a:spcPts val="900"/>
+              </a:spcAft>
+            </a:pPr>
+            <a:r>
+              <a:rPr sz="1500" b="0" dirty="0">
+                <a:solidFill>
+                  <a:srgbClr val="14141C"/>
+                </a:solidFill>
+                <a:latin typeface="Helvetica Neue"/>
+              </a:rPr>
+              <a:t>•  A measurement pipeline: 14 banks, 51 pages across 6 product families (18 of them current-account), 104 declared features, one frozen contract.</a:t>
+            </a:r>
+          </a:p>
+          <a:p>
+            <a:pPr algn="l">
+              <a:lnSpc>
+                <a:spcPct val="105000"/>
+              </a:lnSpc>
+              <a:spcAft>
+                <a:spcPts val="900"/>
+              </a:spcAft>
+            </a:pPr>
+            <a:r>
+              <a:rPr sz="1500" b="0" dirty="0">
+                <a:solidFill>
+                  <a:srgbClr val="14141C"/>
+                </a:solidFill>
+                <a:latin typeface="Helvetica Neue"/>
+              </a:rPr>
+              <a:t>•  A scoring workflow: automatic extraction, model-assisted extraction, and a human rubric for the 13 judgement features.</a:t>
+            </a:r>
+          </a:p>
+          <a:p>
+            <a:pPr algn="l">
+              <a:lnSpc>
+                <a:spcPct val="105000"/>
+              </a:lnSpc>
+              <a:spcAft>
+                <a:spcPts val="900"/>
+              </a:spcAft>
+            </a:pPr>
+            <a:r>
+              <a:rPr sz="1500" b="0" dirty="0">
+                <a:solidFill>
+                  <a:srgbClr val="14141C"/>
+                </a:solidFill>
+                <a:latin typeface="Helvetica Neue"/>
+              </a:rPr>
+              <a:t>•  An analysis library: positioning, similarity, category comparison, AI score, cross-sell, plus generated limitations.</a:t>
+            </a:r>
+          </a:p>
+          <a:p>
+            <a:pPr algn="l">
+              <a:lnSpc>
+                <a:spcPct val="105000"/>
+              </a:lnSpc>
+              <a:spcAft>
+                <a:spcPts val="900"/>
+              </a:spcAft>
+            </a:pPr>
+            <a:r>
+              <a:rPr sz="1500" b="0" dirty="0">
+                <a:solidFill>
+                  <a:srgbClr val="14141C"/>
+                </a:solidFill>
+                <a:latin typeface="Helvetica Neue"/>
+              </a:rPr>
+              <a:t>•  One web UI with ten tabs: four business views (Analysis, Trends, Reputation, Recommendations), the generated-site builder, and six read-only operator views carried over from the </a:t>
+            </a:r>
+            <a:r>
+              <a:rPr sz="1500" b="0" dirty="0" err="1">
+                <a:solidFill>
+                  <a:srgbClr val="14141C"/>
+                </a:solidFill>
+                <a:latin typeface="Helvetica Neue"/>
+              </a:rPr>
+              <a:t>Streamlit</a:t>
+            </a:r>
+            <a:r>
+              <a:rPr sz="1500" b="0" dirty="0">
+                <a:solidFill>
+                  <a:srgbClr val="14141C"/>
+                </a:solidFill>
+                <a:latin typeface="Helvetica Neue"/>
+              </a:rPr>
+              <a:t> dashboard.</a:t>
+            </a:r>
+          </a:p>
+          <a:p>
+            <a:pPr algn="l">
+              <a:lnSpc>
+                <a:spcPct val="105000"/>
+              </a:lnSpc>
+              <a:spcAft>
+                <a:spcPts val="900"/>
+              </a:spcAft>
+            </a:pPr>
+            <a:r>
+              <a:rPr sz="1500" b="0" dirty="0">
+                <a:solidFill>
+                  <a:srgbClr val="14141C"/>
+                </a:solidFill>
+                <a:latin typeface="Helvetica Neue"/>
+              </a:rPr>
+              <a:t>•  Two optional signals, both fenced off from the performance claim: search interest, and news themes.</a:t>
+            </a:r>
+          </a:p>
+          <a:p>
+            <a:pPr algn="l">
+              <a:lnSpc>
+                <a:spcPct val="105000"/>
+              </a:lnSpc>
+              <a:spcAft>
+                <a:spcPts val="900"/>
+              </a:spcAft>
+            </a:pPr>
+            <a:r>
+              <a:rPr sz="1500" b="0" dirty="0">
+                <a:solidFill>
+                  <a:srgbClr val="14141C"/>
+                </a:solidFill>
+                <a:latin typeface="Helvetica Neue"/>
+              </a:rPr>
+              <a:t>•  A generated ING website: ten pages built from the selected recommendations — an illustration of what a recommendation means in practice, not a proposal for ING's own site.</a:t>
+            </a:r>
+          </a:p>
+          <a:p>
+            <a:pPr algn="l">
+              <a:lnSpc>
+                <a:spcPct val="105000"/>
+              </a:lnSpc>
+              <a:spcAft>
+                <a:spcPts val="200"/>
+              </a:spcAft>
+            </a:pPr>
+            <a:endParaRPr sz="1500" b="0" dirty="0">
+              <a:solidFill>
+                <a:srgbClr val="14141C"/>
+              </a:solidFill>
+              <a:latin typeface="Helvetica Neue"/>
+            </a:endParaRPr>
+          </a:p>
+          <a:p>
+            <a:pPr algn="l">
+              <a:lnSpc>
+                <a:spcPct val="105000"/>
+              </a:lnSpc>
+              <a:spcAft>
+                <a:spcPts val="0"/>
+              </a:spcAft>
+            </a:pPr>
+            <a:r>
+              <a:rPr sz="1250" b="0" dirty="0">
                 <a:solidFill>
                   <a:srgbClr val="585868"/>
                 </a:solidFill>
                 <a:latin typeface="Helvetica Neue"/>
               </a:rPr>
-              <a:t>One direction, five stages. Every arrow is a script that can be re-run; the guardrail band holds at every stage.</a:t>
-            </a:r>
-          </a:p>
-        </p:txBody>
-      </p:sp>
-      <p:sp>
-        <p:nvSpPr>
-          <p:cNvPr id="6" name="TextBox 5"/>
+              <a:t>Each of those pieces is the next few slides; the pipeline diagram overleaf is the map.</a:t>
+            </a:r>
+          </a:p>
+        </p:txBody>
+      </p:sp>
+      <p:sp>
+        <p:nvSpPr>
+          <p:cNvPr id="5" name="TextBox 4"/>
           <p:cNvSpPr txBox="1"/>
           <p:nvPr/>
         </p:nvSpPr>
@@ -21939,14 +22134,14 @@
       </p:sp>
       <p:sp>
         <p:nvSpPr>
-          <p:cNvPr id="7" name="TextBox 6"/>
+          <p:cNvPr id="6" name="TextBox 5"/>
           <p:cNvSpPr txBox="1"/>
           <p:nvPr/>
         </p:nvSpPr>
         <p:spPr>
           <a:xfrm>
             <a:off x="11094415" y="6400800"/>
-            <a:ext cx="548640" cy="274320"/>
+            <a:ext cx="548640" cy="242695"/>
           </a:xfrm>
           <a:prstGeom prst="rect">
             <a:avLst/>
@@ -21968,7 +22163,7 @@
               </a:spcAft>
             </a:pPr>
             <a:r>
-              <a:rPr sz="1000" b="0">
+              <a:rPr lang="fr-FR" sz="1000" b="0" dirty="0">
                 <a:solidFill>
                   <a:srgbClr val="585868"/>
                 </a:solidFill>
@@ -21976,6 +22171,12 @@
               </a:rPr>
               <a:t>4</a:t>
             </a:r>
+            <a:endParaRPr sz="1000" b="0" dirty="0">
+              <a:solidFill>
+                <a:srgbClr val="585868"/>
+              </a:solidFill>
+              <a:latin typeface="Helvetica Neue"/>
+            </a:endParaRPr>
           </a:p>
         </p:txBody>
       </p:sp>
@@ -22945,8 +23146,8 @@
         </p:nvSpPr>
         <p:spPr>
           <a:xfrm>
-            <a:off x="548640" y="384048"/>
-            <a:ext cx="11064240" cy="731520"/>
+            <a:off x="548640" y="320040"/>
+            <a:ext cx="11064240" cy="640080"/>
           </a:xfrm>
           <a:prstGeom prst="rect">
             <a:avLst/>
@@ -22968,13 +23169,13 @@
               </a:spcAft>
             </a:pPr>
             <a:r>
-              <a:rPr sz="2800" b="1">
+              <a:rPr sz="2400" b="1">
                 <a:solidFill>
                   <a:srgbClr val="14141C"/>
                 </a:solidFill>
                 <a:latin typeface="Helvetica Neue"/>
               </a:rPr>
-              <a:t>The dataset behind this analysis</a:t>
+              <a:t>The pipeline, end to end</a:t>
             </a:r>
           </a:p>
         </p:txBody>
@@ -22987,8 +23188,8 @@
         </p:nvSpPr>
         <p:spPr>
           <a:xfrm>
-            <a:off x="548640" y="1115568"/>
-            <a:ext cx="1463040" cy="64008"/>
+            <a:off x="548640" y="960120"/>
+            <a:ext cx="1463040" cy="54864"/>
           </a:xfrm>
           <a:prstGeom prst="rect">
             <a:avLst/>
@@ -23024,16 +23225,40 @@
           </a:p>
         </p:txBody>
       </p:sp>
-      <p:sp>
-        <p:nvSpPr>
-          <p:cNvPr id="4" name="TextBox 3"/>
+      <p:pic>
+        <p:nvPicPr>
+          <p:cNvPr id="4" name="Picture 3" descr="diagram_pipeline.png"/>
+          <p:cNvPicPr>
+            <a:picLocks noChangeAspect="1"/>
+          </p:cNvPicPr>
+          <p:nvPr/>
+        </p:nvPicPr>
+        <p:blipFill>
+          <a:blip r:embed="rId3"/>
+          <a:stretch>
+            <a:fillRect/>
+          </a:stretch>
+        </p:blipFill>
+        <p:spPr>
+          <a:xfrm>
+            <a:off x="1828647" y="1325880"/>
+            <a:ext cx="8534400" cy="4800600"/>
+          </a:xfrm>
+          <a:prstGeom prst="rect">
+            <a:avLst/>
+          </a:prstGeom>
+        </p:spPr>
+      </p:pic>
+      <p:sp>
+        <p:nvSpPr>
+          <p:cNvPr id="5" name="TextBox 4"/>
           <p:cNvSpPr txBox="1"/>
           <p:nvPr/>
         </p:nvSpPr>
         <p:spPr>
           <a:xfrm>
-            <a:off x="685800" y="1463040"/>
-            <a:ext cx="10881360" cy="3464025"/>
+            <a:off x="685800" y="6236208"/>
+            <a:ext cx="10881360" cy="457200"/>
           </a:xfrm>
           <a:prstGeom prst="rect">
             <a:avLst/>
@@ -23051,417 +23276,108 @@
                 <a:spcPct val="105000"/>
               </a:lnSpc>
               <a:spcAft>
-                <a:spcPts val="200"/>
-              </a:spcAft>
-            </a:pPr>
-            <a:r>
-              <a:rPr sz="1500" b="1" dirty="0">
-                <a:solidFill>
-                  <a:srgbClr val="14141C"/>
-                </a:solidFill>
-                <a:latin typeface="Helvetica Neue"/>
-              </a:rPr>
-              <a:t>•  51 pages scored across 6 product families. This comparison: the 18 current-account pages, 14 banks, 33 comparable features</a:t>
-            </a:r>
-          </a:p>
-          <a:p>
-            <a:pPr algn="l">
-              <a:lnSpc>
-                <a:spcPct val="105000"/>
-              </a:lnSpc>
-              <a:spcAft>
-                <a:spcPts val="1000"/>
-              </a:spcAft>
-            </a:pPr>
-            <a:r>
-              <a:rPr sz="1300" b="0" dirty="0">
+                <a:spcPts val="600"/>
+              </a:spcAft>
+            </a:pPr>
+            <a:r>
+              <a:rPr sz="1200" b="0">
                 <a:solidFill>
                   <a:srgbClr val="585868"/>
                 </a:solidFill>
                 <a:latin typeface="Helvetica Neue"/>
               </a:rPr>
-              <a:t>     </a:t>
-            </a:r>
-            <a:r>
-              <a:rPr sz="1300" b="0" dirty="0" err="1">
+              <a:t>One direction, five stages. Every arrow is a script that can be re-run; the guardrail band holds at every stage.</a:t>
+            </a:r>
+          </a:p>
+        </p:txBody>
+      </p:sp>
+      <p:sp>
+        <p:nvSpPr>
+          <p:cNvPr id="6" name="TextBox 5"/>
+          <p:cNvSpPr txBox="1"/>
+          <p:nvPr/>
+        </p:nvSpPr>
+        <p:spPr>
+          <a:xfrm>
+            <a:off x="548640" y="6400800"/>
+            <a:ext cx="8229600" cy="274320"/>
+          </a:xfrm>
+          <a:prstGeom prst="rect">
+            <a:avLst/>
+          </a:prstGeom>
+          <a:noFill/>
+        </p:spPr>
+        <p:txBody>
+          <a:bodyPr wrap="square">
+            <a:spAutoFit/>
+          </a:bodyPr>
+          <a:lstStyle/>
+          <a:p>
+            <a:pPr algn="l">
+              <a:lnSpc>
+                <a:spcPct val="105000"/>
+              </a:lnSpc>
+              <a:spcAft>
+                <a:spcPts val="600"/>
+              </a:spcAft>
+            </a:pPr>
+            <a:r>
+              <a:rPr sz="1000" b="0">
                 <a:solidFill>
                   <a:srgbClr val="585868"/>
                 </a:solidFill>
                 <a:latin typeface="Helvetica Neue"/>
               </a:rPr>
-              <a:t>Argenta</a:t>
-            </a:r>
-            <a:r>
-              <a:rPr sz="1300" b="0" dirty="0">
+              <a:t>Banking Campaigns Comparator · ING DACI / Customer AI · September 2026</a:t>
+            </a:r>
+          </a:p>
+        </p:txBody>
+      </p:sp>
+      <p:sp>
+        <p:nvSpPr>
+          <p:cNvPr id="7" name="TextBox 6"/>
+          <p:cNvSpPr txBox="1"/>
+          <p:nvPr/>
+        </p:nvSpPr>
+        <p:spPr>
+          <a:xfrm>
+            <a:off x="11094415" y="6400800"/>
+            <a:ext cx="548640" cy="242695"/>
+          </a:xfrm>
+          <a:prstGeom prst="rect">
+            <a:avLst/>
+          </a:prstGeom>
+          <a:noFill/>
+        </p:spPr>
+        <p:txBody>
+          <a:bodyPr wrap="square">
+            <a:spAutoFit/>
+          </a:bodyPr>
+          <a:lstStyle/>
+          <a:p>
+            <a:pPr algn="r">
+              <a:lnSpc>
+                <a:spcPct val="105000"/>
+              </a:lnSpc>
+              <a:spcAft>
+                <a:spcPts val="600"/>
+              </a:spcAft>
+            </a:pPr>
+            <a:r>
+              <a:rPr lang="fr-FR" sz="1000" b="0" dirty="0">
                 <a:solidFill>
                   <a:srgbClr val="585868"/>
                 </a:solidFill>
                 <a:latin typeface="Helvetica Neue"/>
               </a:rPr>
-              <a:t> · Belfius · </a:t>
-            </a:r>
-            <a:r>
-              <a:rPr sz="1300" b="0" dirty="0" err="1">
-                <a:solidFill>
-                  <a:srgbClr val="585868"/>
-                </a:solidFill>
-                <a:latin typeface="Helvetica Neue"/>
-              </a:rPr>
-              <a:t>Beobank</a:t>
-            </a:r>
-            <a:r>
-              <a:rPr sz="1300" b="0" dirty="0">
-                <a:solidFill>
-                  <a:srgbClr val="585868"/>
-                </a:solidFill>
-                <a:latin typeface="Helvetica Neue"/>
-              </a:rPr>
-              <a:t> · BNP Paribas Fortis · </a:t>
-            </a:r>
-            <a:r>
-              <a:rPr sz="1300" b="0" dirty="0" err="1">
-                <a:solidFill>
-                  <a:srgbClr val="585868"/>
-                </a:solidFill>
-                <a:latin typeface="Helvetica Neue"/>
-              </a:rPr>
-              <a:t>bunq</a:t>
-            </a:r>
-            <a:r>
-              <a:rPr sz="1300" b="0" dirty="0">
-                <a:solidFill>
-                  <a:srgbClr val="585868"/>
-                </a:solidFill>
-                <a:latin typeface="Helvetica Neue"/>
-              </a:rPr>
-              <a:t> · CBC · </a:t>
-            </a:r>
-            <a:r>
-              <a:rPr sz="1300" b="0" dirty="0" err="1">
-                <a:solidFill>
-                  <a:srgbClr val="585868"/>
-                </a:solidFill>
-                <a:latin typeface="Helvetica Neue"/>
-              </a:rPr>
-              <a:t>Crelan</a:t>
-            </a:r>
-            <a:r>
-              <a:rPr sz="1300" b="0" dirty="0">
-                <a:solidFill>
-                  <a:srgbClr val="585868"/>
-                </a:solidFill>
-                <a:latin typeface="Helvetica Neue"/>
-              </a:rPr>
-              <a:t> · </a:t>
-            </a:r>
-            <a:r>
-              <a:rPr sz="1300" b="0" dirty="0" err="1">
-                <a:solidFill>
-                  <a:srgbClr val="585868"/>
-                </a:solidFill>
-                <a:latin typeface="Helvetica Neue"/>
-              </a:rPr>
-              <a:t>Hellobank</a:t>
-            </a:r>
-            <a:r>
-              <a:rPr sz="1300" b="0" dirty="0">
-                <a:solidFill>
-                  <a:srgbClr val="585868"/>
-                </a:solidFill>
-                <a:latin typeface="Helvetica Neue"/>
-              </a:rPr>
-              <a:t> · ING · KBC · </a:t>
-            </a:r>
-            <a:r>
-              <a:rPr sz="1300" b="0" dirty="0" err="1">
-                <a:solidFill>
-                  <a:srgbClr val="585868"/>
-                </a:solidFill>
-                <a:latin typeface="Helvetica Neue"/>
-              </a:rPr>
-              <a:t>Keytrade</a:t>
-            </a:r>
-            <a:r>
-              <a:rPr sz="1300" b="0" dirty="0">
-                <a:solidFill>
-                  <a:srgbClr val="585868"/>
-                </a:solidFill>
-                <a:latin typeface="Helvetica Neue"/>
-              </a:rPr>
-              <a:t> · N26 · </a:t>
-            </a:r>
-            <a:r>
-              <a:rPr sz="1300" b="0" dirty="0" err="1">
-                <a:solidFill>
-                  <a:srgbClr val="585868"/>
-                </a:solidFill>
-                <a:latin typeface="Helvetica Neue"/>
-              </a:rPr>
-              <a:t>Revolut</a:t>
-            </a:r>
-            <a:r>
-              <a:rPr sz="1300" b="0" dirty="0">
-                <a:solidFill>
-                  <a:srgbClr val="585868"/>
-                </a:solidFill>
-                <a:latin typeface="Helvetica Neue"/>
-              </a:rPr>
-              <a:t> · </a:t>
-            </a:r>
-            <a:r>
-              <a:rPr sz="1300" b="0" dirty="0" err="1">
-                <a:solidFill>
-                  <a:srgbClr val="585868"/>
-                </a:solidFill>
-                <a:latin typeface="Helvetica Neue"/>
-              </a:rPr>
-              <a:t>Vdk</a:t>
-            </a:r>
-            <a:endParaRPr sz="1300" b="0" dirty="0">
+              <a:t>5</a:t>
+            </a:r>
+            <a:endParaRPr sz="1000" b="0" dirty="0">
               <a:solidFill>
                 <a:srgbClr val="585868"/>
               </a:solidFill>
               <a:latin typeface="Helvetica Neue"/>
             </a:endParaRPr>
-          </a:p>
-          <a:p>
-            <a:pPr algn="l">
-              <a:lnSpc>
-                <a:spcPct val="105000"/>
-              </a:lnSpc>
-              <a:spcAft>
-                <a:spcPts val="200"/>
-              </a:spcAft>
-            </a:pPr>
-            <a:r>
-              <a:rPr sz="1500" b="1" dirty="0">
-                <a:solidFill>
-                  <a:srgbClr val="14141C"/>
-                </a:solidFill>
-                <a:latin typeface="Helvetica Neue"/>
-              </a:rPr>
-              <a:t>•  Mostly Belgian French — plus two English pages and one Dutch</a:t>
-            </a:r>
-          </a:p>
-          <a:p>
-            <a:pPr algn="l">
-              <a:lnSpc>
-                <a:spcPct val="105000"/>
-              </a:lnSpc>
-              <a:spcAft>
-                <a:spcPts val="1000"/>
-              </a:spcAft>
-            </a:pPr>
-            <a:r>
-              <a:rPr sz="1300" b="0" dirty="0">
-                <a:solidFill>
-                  <a:srgbClr val="585868"/>
-                </a:solidFill>
-                <a:latin typeface="Helvetica Neue"/>
-              </a:rPr>
-              <a:t>     Word counts and readability are within-language features, so with more than one language present the comparison drops eight of them rather than compare across languages. </a:t>
-            </a:r>
-            <a:endParaRPr lang="fr-FR" sz="1300" b="0" dirty="0">
-              <a:solidFill>
-                <a:srgbClr val="585868"/>
-              </a:solidFill>
-              <a:latin typeface="Helvetica Neue"/>
-            </a:endParaRPr>
-          </a:p>
-          <a:p>
-            <a:pPr algn="l">
-              <a:lnSpc>
-                <a:spcPct val="105000"/>
-              </a:lnSpc>
-              <a:spcAft>
-                <a:spcPts val="1000"/>
-              </a:spcAft>
-            </a:pPr>
-            <a:r>
-              <a:rPr sz="1500" b="1" dirty="0">
-                <a:solidFill>
-                  <a:srgbClr val="14141C"/>
-                </a:solidFill>
-                <a:latin typeface="Helvetica Neue"/>
-              </a:rPr>
-              <a:t>•  Split for like-for-like comparison</a:t>
-            </a:r>
-          </a:p>
-          <a:p>
-            <a:pPr algn="l">
-              <a:lnSpc>
-                <a:spcPct val="105000"/>
-              </a:lnSpc>
-              <a:spcAft>
-                <a:spcPts val="1000"/>
-              </a:spcAft>
-            </a:pPr>
-            <a:r>
-              <a:rPr sz="1300" b="0" dirty="0">
-                <a:solidFill>
-                  <a:srgbClr val="585868"/>
-                </a:solidFill>
-                <a:latin typeface="Helvetica Neue"/>
-              </a:rPr>
-              <a:t>     10 traditional banks and 4 challengers, compared one product family at a time — a mortgage page and a current-account page differ because the products differ.</a:t>
-            </a:r>
-          </a:p>
-          <a:p>
-            <a:pPr algn="l">
-              <a:lnSpc>
-                <a:spcPct val="105000"/>
-              </a:lnSpc>
-              <a:spcAft>
-                <a:spcPts val="200"/>
-              </a:spcAft>
-            </a:pPr>
-            <a:r>
-              <a:rPr sz="1500" b="1" dirty="0">
-                <a:solidFill>
-                  <a:srgbClr val="14141C"/>
-                </a:solidFill>
-                <a:latin typeface="Helvetica Neue"/>
-              </a:rPr>
-              <a:t>•  The dataset is in git, alongside the contract</a:t>
-            </a:r>
-          </a:p>
-          <a:p>
-            <a:pPr algn="l">
-              <a:lnSpc>
-                <a:spcPct val="105000"/>
-              </a:lnSpc>
-              <a:spcAft>
-                <a:spcPts val="1000"/>
-              </a:spcAft>
-            </a:pPr>
-            <a:r>
-              <a:rPr sz="1300" b="0" dirty="0">
-                <a:solidFill>
-                  <a:srgbClr val="585868"/>
-                </a:solidFill>
-                <a:latin typeface="Helvetica Neue"/>
-              </a:rPr>
-              <a:t>     Captures, datasets and outputs are tracked, so any figure on a slide traces back to the exact committed run that produced it.</a:t>
-            </a:r>
-          </a:p>
-          <a:p>
-            <a:pPr algn="l">
-              <a:lnSpc>
-                <a:spcPct val="105000"/>
-              </a:lnSpc>
-              <a:spcAft>
-                <a:spcPts val="200"/>
-              </a:spcAft>
-            </a:pPr>
-            <a:endParaRPr sz="1300" b="0" dirty="0">
-              <a:solidFill>
-                <a:srgbClr val="585868"/>
-              </a:solidFill>
-              <a:latin typeface="Helvetica Neue"/>
-            </a:endParaRPr>
-          </a:p>
-          <a:p>
-            <a:pPr algn="l">
-              <a:lnSpc>
-                <a:spcPct val="105000"/>
-              </a:lnSpc>
-              <a:spcAft>
-                <a:spcPts val="0"/>
-              </a:spcAft>
-            </a:pPr>
-            <a:r>
-              <a:rPr sz="1250" b="0" dirty="0">
-                <a:solidFill>
-                  <a:srgbClr val="585868"/>
-                </a:solidFill>
-                <a:latin typeface="Helvetica Neue"/>
-              </a:rPr>
-              <a:t>A snapshot is the honest shape for a finding: true for one dataset, one capture date, one scope.</a:t>
-            </a:r>
-          </a:p>
-        </p:txBody>
-      </p:sp>
-      <p:sp>
-        <p:nvSpPr>
-          <p:cNvPr id="5" name="TextBox 4"/>
-          <p:cNvSpPr txBox="1"/>
-          <p:nvPr/>
-        </p:nvSpPr>
-        <p:spPr>
-          <a:xfrm>
-            <a:off x="548640" y="6400800"/>
-            <a:ext cx="8229600" cy="274320"/>
-          </a:xfrm>
-          <a:prstGeom prst="rect">
-            <a:avLst/>
-          </a:prstGeom>
-          <a:noFill/>
-        </p:spPr>
-        <p:txBody>
-          <a:bodyPr wrap="square">
-            <a:spAutoFit/>
-          </a:bodyPr>
-          <a:lstStyle/>
-          <a:p>
-            <a:pPr algn="l">
-              <a:lnSpc>
-                <a:spcPct val="105000"/>
-              </a:lnSpc>
-              <a:spcAft>
-                <a:spcPts val="600"/>
-              </a:spcAft>
-            </a:pPr>
-            <a:r>
-              <a:rPr sz="1000" b="0">
-                <a:solidFill>
-                  <a:srgbClr val="585868"/>
-                </a:solidFill>
-                <a:latin typeface="Helvetica Neue"/>
-              </a:rPr>
-              <a:t>Banking Campaigns Comparator · ING DACI / Customer AI · September 2026</a:t>
-            </a:r>
-          </a:p>
-        </p:txBody>
-      </p:sp>
-      <p:sp>
-        <p:nvSpPr>
-          <p:cNvPr id="6" name="TextBox 5"/>
-          <p:cNvSpPr txBox="1"/>
-          <p:nvPr/>
-        </p:nvSpPr>
-        <p:spPr>
-          <a:xfrm>
-            <a:off x="11094415" y="6400800"/>
-            <a:ext cx="548640" cy="274320"/>
-          </a:xfrm>
-          <a:prstGeom prst="rect">
-            <a:avLst/>
-          </a:prstGeom>
-          <a:noFill/>
-        </p:spPr>
-        <p:txBody>
-          <a:bodyPr wrap="square">
-            <a:spAutoFit/>
-          </a:bodyPr>
-          <a:lstStyle/>
-          <a:p>
-            <a:pPr algn="r">
-              <a:lnSpc>
-                <a:spcPct val="105000"/>
-              </a:lnSpc>
-              <a:spcAft>
-                <a:spcPts val="600"/>
-              </a:spcAft>
-            </a:pPr>
-            <a:r>
-              <a:rPr sz="1000" b="0">
-                <a:solidFill>
-                  <a:srgbClr val="585868"/>
-                </a:solidFill>
-                <a:latin typeface="Helvetica Neue"/>
-              </a:rPr>
-              <a:t>5</a:t>
-            </a:r>
           </a:p>
         </p:txBody>
       </p:sp>
@@ -23527,7 +23443,7 @@
                 </a:solidFill>
                 <a:latin typeface="Helvetica Neue"/>
               </a:rPr>
-              <a:t>Rubric scoring: one human judge, and a model measured against it</a:t>
+              <a:t>The dataset behind this analysis</a:t>
             </a:r>
           </a:p>
         </p:txBody>
@@ -23540,7 +23456,7 @@
         </p:nvSpPr>
         <p:spPr>
           <a:xfrm>
-            <a:off x="548640" y="1371600"/>
+            <a:off x="548640" y="1115568"/>
             <a:ext cx="1463040" cy="64008"/>
           </a:xfrm>
           <a:prstGeom prst="rect">
@@ -23586,7 +23502,7 @@
         <p:spPr>
           <a:xfrm>
             <a:off x="685800" y="1463040"/>
-            <a:ext cx="10881360" cy="4754880"/>
+            <a:ext cx="10881360" cy="3464025"/>
           </a:xfrm>
           <a:prstGeom prst="rect">
             <a:avLst/>
@@ -23608,13 +23524,13 @@
               </a:spcAft>
             </a:pPr>
             <a:r>
-              <a:rPr sz="1500" b="1">
+              <a:rPr sz="1500" b="1" dirty="0">
                 <a:solidFill>
                   <a:srgbClr val="14141C"/>
                 </a:solidFill>
                 <a:latin typeface="Helvetica Neue"/>
               </a:rPr>
-              <a:t>•  13 features are judgements, not measurements</a:t>
+              <a:t>•  51 pages scored across 6 product families. This comparison: the 18 current-account pages, 14 banks, 33 comparable features</a:t>
             </a:r>
           </a:p>
           <a:p>
@@ -23627,14 +23543,155 @@
               </a:spcAft>
             </a:pPr>
             <a:r>
-              <a:rPr sz="1300" b="0">
+              <a:rPr sz="1300" b="0" dirty="0">
                 <a:solidFill>
                   <a:srgbClr val="585868"/>
                 </a:solidFill>
                 <a:latin typeface="Helvetica Neue"/>
               </a:rPr>
-              <a:t>     Clarity of the offer, layout archetype, AIDA coverage, persuasion levers — scored against a written scale, one sheet per rater.</a:t>
-            </a:r>
+              <a:t>     </a:t>
+            </a:r>
+            <a:r>
+              <a:rPr sz="1300" b="0" dirty="0" err="1">
+                <a:solidFill>
+                  <a:srgbClr val="585868"/>
+                </a:solidFill>
+                <a:latin typeface="Helvetica Neue"/>
+              </a:rPr>
+              <a:t>Argenta</a:t>
+            </a:r>
+            <a:r>
+              <a:rPr sz="1300" b="0" dirty="0">
+                <a:solidFill>
+                  <a:srgbClr val="585868"/>
+                </a:solidFill>
+                <a:latin typeface="Helvetica Neue"/>
+              </a:rPr>
+              <a:t> · Belfius · </a:t>
+            </a:r>
+            <a:r>
+              <a:rPr sz="1300" b="0" dirty="0" err="1">
+                <a:solidFill>
+                  <a:srgbClr val="585868"/>
+                </a:solidFill>
+                <a:latin typeface="Helvetica Neue"/>
+              </a:rPr>
+              <a:t>Beobank</a:t>
+            </a:r>
+            <a:r>
+              <a:rPr sz="1300" b="0" dirty="0">
+                <a:solidFill>
+                  <a:srgbClr val="585868"/>
+                </a:solidFill>
+                <a:latin typeface="Helvetica Neue"/>
+              </a:rPr>
+              <a:t> · BNP Paribas Fortis · </a:t>
+            </a:r>
+            <a:r>
+              <a:rPr sz="1300" b="0" dirty="0" err="1">
+                <a:solidFill>
+                  <a:srgbClr val="585868"/>
+                </a:solidFill>
+                <a:latin typeface="Helvetica Neue"/>
+              </a:rPr>
+              <a:t>bunq</a:t>
+            </a:r>
+            <a:r>
+              <a:rPr sz="1300" b="0" dirty="0">
+                <a:solidFill>
+                  <a:srgbClr val="585868"/>
+                </a:solidFill>
+                <a:latin typeface="Helvetica Neue"/>
+              </a:rPr>
+              <a:t> · CBC · </a:t>
+            </a:r>
+            <a:r>
+              <a:rPr sz="1300" b="0" dirty="0" err="1">
+                <a:solidFill>
+                  <a:srgbClr val="585868"/>
+                </a:solidFill>
+                <a:latin typeface="Helvetica Neue"/>
+              </a:rPr>
+              <a:t>Crelan</a:t>
+            </a:r>
+            <a:r>
+              <a:rPr sz="1300" b="0" dirty="0">
+                <a:solidFill>
+                  <a:srgbClr val="585868"/>
+                </a:solidFill>
+                <a:latin typeface="Helvetica Neue"/>
+              </a:rPr>
+              <a:t> · </a:t>
+            </a:r>
+            <a:r>
+              <a:rPr sz="1300" b="0" dirty="0" err="1">
+                <a:solidFill>
+                  <a:srgbClr val="585868"/>
+                </a:solidFill>
+                <a:latin typeface="Helvetica Neue"/>
+              </a:rPr>
+              <a:t>Hellobank</a:t>
+            </a:r>
+            <a:r>
+              <a:rPr sz="1300" b="0" dirty="0">
+                <a:solidFill>
+                  <a:srgbClr val="585868"/>
+                </a:solidFill>
+                <a:latin typeface="Helvetica Neue"/>
+              </a:rPr>
+              <a:t> · ING · KBC · </a:t>
+            </a:r>
+            <a:r>
+              <a:rPr sz="1300" b="0" dirty="0" err="1">
+                <a:solidFill>
+                  <a:srgbClr val="585868"/>
+                </a:solidFill>
+                <a:latin typeface="Helvetica Neue"/>
+              </a:rPr>
+              <a:t>Keytrade</a:t>
+            </a:r>
+            <a:r>
+              <a:rPr sz="1300" b="0" dirty="0">
+                <a:solidFill>
+                  <a:srgbClr val="585868"/>
+                </a:solidFill>
+                <a:latin typeface="Helvetica Neue"/>
+              </a:rPr>
+              <a:t> · N26 · </a:t>
+            </a:r>
+            <a:r>
+              <a:rPr sz="1300" b="0" dirty="0" err="1">
+                <a:solidFill>
+                  <a:srgbClr val="585868"/>
+                </a:solidFill>
+                <a:latin typeface="Helvetica Neue"/>
+              </a:rPr>
+              <a:t>Revolut</a:t>
+            </a:r>
+            <a:r>
+              <a:rPr sz="1300" b="0" dirty="0">
+                <a:solidFill>
+                  <a:srgbClr val="585868"/>
+                </a:solidFill>
+                <a:latin typeface="Helvetica Neue"/>
+              </a:rPr>
+              <a:t> · </a:t>
+            </a:r>
+            <a:r>
+              <a:rPr sz="1300" b="0" dirty="0" err="1">
+                <a:solidFill>
+                  <a:srgbClr val="585868"/>
+                </a:solidFill>
+                <a:latin typeface="Helvetica Neue"/>
+              </a:rPr>
+              <a:t>Vdk</a:t>
+            </a:r>
+            <a:endParaRPr sz="1300" b="0" dirty="0">
+              <a:solidFill>
+                <a:srgbClr val="585868"/>
+              </a:solidFill>
+              <a:latin typeface="Helvetica Neue"/>
+            </a:endParaRPr>
           </a:p>
           <a:p>
             <a:pPr algn="l">
@@ -23646,13 +23703,13 @@
               </a:spcAft>
             </a:pPr>
             <a:r>
-              <a:rPr sz="1500" b="1">
+              <a:rPr sz="1500" b="1" dirty="0">
                 <a:solidFill>
                   <a:srgbClr val="14141C"/>
                 </a:solidFill>
                 <a:latin typeface="Helvetica Neue"/>
               </a:rPr>
-              <a:t>•  One human judge for this pass, stated plainly</a:t>
+              <a:t>•  Mostly Belgian French — plus two English pages and one Dutch</a:t>
             </a:r>
           </a:p>
           <a:p>
@@ -23665,13 +23722,57 @@
               </a:spcAft>
             </a:pPr>
             <a:r>
-              <a:rPr sz="1300" b="0">
+              <a:rPr sz="1300" b="0" dirty="0">
                 <a:solidFill>
                   <a:srgbClr val="585868"/>
                 </a:solidFill>
                 <a:latin typeface="Helvetica Neue"/>
               </a:rPr>
-              <a:t>     Every judged feature on all 51 pages comes from one sheet. Earlier passes split pages between raters; this one does not, and we say so rather than presenting a single opinion as a consensus.</a:t>
+              <a:t>     Word counts and readability are within-language features, so with more than one language present the comparison drops eight of them rather than compare across languages. </a:t>
+            </a:r>
+            <a:endParaRPr lang="fr-FR" sz="1300" b="0" dirty="0">
+              <a:solidFill>
+                <a:srgbClr val="585868"/>
+              </a:solidFill>
+              <a:latin typeface="Helvetica Neue"/>
+            </a:endParaRPr>
+          </a:p>
+          <a:p>
+            <a:pPr algn="l">
+              <a:lnSpc>
+                <a:spcPct val="105000"/>
+              </a:lnSpc>
+              <a:spcAft>
+                <a:spcPts val="1000"/>
+              </a:spcAft>
+            </a:pPr>
+            <a:r>
+              <a:rPr sz="1500" b="1" dirty="0">
+                <a:solidFill>
+                  <a:srgbClr val="14141C"/>
+                </a:solidFill>
+                <a:latin typeface="Helvetica Neue"/>
+              </a:rPr>
+              <a:t>•  Split for like-for-like comparison</a:t>
+            </a:r>
+          </a:p>
+          <a:p>
+            <a:pPr algn="l">
+              <a:lnSpc>
+                <a:spcPct val="105000"/>
+              </a:lnSpc>
+              <a:spcAft>
+                <a:spcPts val="1000"/>
+              </a:spcAft>
+            </a:pPr>
+            <a:r>
+              <a:rPr sz="1300" b="0" dirty="0">
+                <a:solidFill>
+                  <a:srgbClr val="585868"/>
+                </a:solidFill>
+                <a:latin typeface="Helvetica Neue"/>
+              </a:rPr>
+              <a:t>     10 traditional banks and 4 challengers, compared one product family at a time — a mortgage page and a current-account page differ because the products differ.</a:t>
             </a:r>
           </a:p>
           <a:p>
@@ -23684,13 +23785,13 @@
               </a:spcAft>
             </a:pPr>
             <a:r>
-              <a:rPr sz="1500" b="1">
+              <a:rPr sz="1500" b="1" dirty="0">
                 <a:solidFill>
                   <a:srgbClr val="14141C"/>
                 </a:solidFill>
                 <a:latin typeface="Helvetica Neue"/>
               </a:rPr>
-              <a:t>•  A model sheet exists, and it is not a second opinion</a:t>
+              <a:t>•  The dataset is in git, alongside the contract</a:t>
             </a:r>
           </a:p>
           <a:p>
@@ -23703,13 +23804,13 @@
               </a:spcAft>
             </a:pPr>
             <a:r>
-              <a:rPr sz="1300" b="0">
+              <a:rPr sz="1300" b="0" dirty="0">
                 <a:solidFill>
                   <a:srgbClr val="585868"/>
                 </a:solidFill>
                 <a:latin typeface="Helvetica Neue"/>
               </a:rPr>
-              <a:t>     50 pages, written to its own file, never into a human sheet - a pre-filled sheet gets rubber-stamped. But the pinned model has no vision, and 12 of the 13 judged features are declared in the dictionary as judged from the screenshot.</a:t>
+              <a:t>     Captures, datasets and outputs are tracked, so any figure on a slide traces back to the exact committed run that produced it.</a:t>
             </a:r>
           </a:p>
           <a:p>
@@ -23721,71 +23822,30 @@
                 <a:spcPts val="200"/>
               </a:spcAft>
             </a:pPr>
-            <a:r>
-              <a:rPr sz="1500" b="1">
-                <a:solidFill>
-                  <a:srgbClr val="14141C"/>
-                </a:solidFill>
-                <a:latin typeface="Helvetica Neue"/>
-              </a:rPr>
-              <a:t>•  Only one was scored from text, and that was a choice we can now revisit</a:t>
-            </a:r>
-          </a:p>
-          <a:p>
-            <a:pPr algn="l">
-              <a:lnSpc>
-                <a:spcPct val="105000"/>
-              </a:lnSpc>
-              <a:spcAft>
-                <a:spcPts val="1000"/>
-              </a:spcAft>
-            </a:pPr>
-            <a:r>
-              <a:rPr sz="1300" b="0">
+            <a:endParaRPr sz="1300" b="0" dirty="0">
+              <a:solidFill>
+                <a:srgbClr val="585868"/>
+              </a:solidFill>
+              <a:latin typeface="Helvetica Neue"/>
+            </a:endParaRPr>
+          </a:p>
+          <a:p>
+            <a:pPr algn="l">
+              <a:lnSpc>
+                <a:spcPct val="105000"/>
+              </a:lnSpc>
+              <a:spcAft>
+                <a:spcPts val="0"/>
+              </a:spcAft>
+            </a:pPr>
+            <a:r>
+              <a:rPr sz="1250" b="0" dirty="0">
                 <a:solidFill>
                   <a:srgbClr val="585868"/>
                 </a:solidFill>
                 <a:latin typeface="Helvetica Neue"/>
               </a:rPr>
-              <a:t>     formality_score is the one the dictionary sources from html_text, and there the model lands within one point of the human 73% of the time. Its scores on the twelve visual features answer a question the text alone cannot settle — on value_prop_clarity it ranked the pages close to the opposite of the human. Tested since: the pinned model returns nothing at all when handed an image. OCR is the route we have not used, and it is a real one — it returns each word with its position and type size, which is most of what rate prominence, layout and mobile-first actually ask.</a:t>
-            </a:r>
-          </a:p>
-          <a:p>
-            <a:pPr algn="l">
-              <a:lnSpc>
-                <a:spcPct val="105000"/>
-              </a:lnSpc>
-              <a:spcAft>
-                <a:spcPts val="200"/>
-              </a:spcAft>
-            </a:pPr>
-            <a:r>
-              <a:rPr sz="1500" b="1">
-                <a:solidFill>
-                  <a:srgbClr val="14141C"/>
-                </a:solidFill>
-                <a:latin typeface="Helvetica Neue"/>
-              </a:rPr>
-              <a:t>•  So the model sheet is kept as a reference, not used as a rater</a:t>
-            </a:r>
-          </a:p>
-          <a:p>
-            <a:pPr algn="l">
-              <a:lnSpc>
-                <a:spcPct val="105000"/>
-              </a:lnSpc>
-              <a:spcAft>
-                <a:spcPts val="1000"/>
-              </a:spcAft>
-            </a:pPr>
-            <a:r>
-              <a:rPr sz="1300" b="0">
-                <a:solidFill>
-                  <a:srgbClr val="585868"/>
-                </a:solidFill>
-                <a:latin typeface="Helvetica Neue"/>
-              </a:rPr>
-              <a:t>     Averaging it into the human scores would import guesses as judgements. One named human judge, said out loud, is more honest than a consensus that was never there.</a:t>
+              <a:t>A snapshot is the honest shape for a finding: true for one dataset, one capture date, one scope.</a:t>
             </a:r>
           </a:p>
         </p:txBody>
@@ -23840,8 +23900,8 @@
         </p:nvSpPr>
         <p:spPr>
           <a:xfrm>
-            <a:off x="11094415" y="6400800"/>
-            <a:ext cx="548640" cy="274320"/>
+            <a:off x="11094720" y="6400800"/>
+            <a:ext cx="548640" cy="242695"/>
           </a:xfrm>
           <a:prstGeom prst="rect">
             <a:avLst/>
@@ -23863,7 +23923,7 @@
               </a:spcAft>
             </a:pPr>
             <a:r>
-              <a:rPr sz="1000" b="0">
+              <a:rPr lang="fr-FR" sz="1000" dirty="0">
                 <a:solidFill>
                   <a:srgbClr val="585868"/>
                 </a:solidFill>
@@ -23936,7 +23996,7 @@
                 </a:solidFill>
                 <a:latin typeface="Helvetica Neue"/>
               </a:rPr>
-              <a:t>Strategic context and positioning</a:t>
+              <a:t>Rubric scoring: one human judge, and a model measured against it</a:t>
             </a:r>
           </a:p>
         </p:txBody>
@@ -23949,7 +24009,7 @@
         </p:nvSpPr>
         <p:spPr>
           <a:xfrm>
-            <a:off x="548640" y="1115568"/>
+            <a:off x="548640" y="1371600"/>
             <a:ext cx="1463040" cy="64008"/>
           </a:xfrm>
           <a:prstGeom prst="rect">
@@ -23995,7 +24055,7 @@
         <p:spPr>
           <a:xfrm>
             <a:off x="685800" y="1463040"/>
-            <a:ext cx="10881360" cy="3821367"/>
+            <a:ext cx="10881360" cy="4754880"/>
           </a:xfrm>
           <a:prstGeom prst="rect">
             <a:avLst/>
@@ -24017,13 +24077,13 @@
               </a:spcAft>
             </a:pPr>
             <a:r>
-              <a:rPr sz="1500" b="1" dirty="0">
+              <a:rPr sz="1500" b="1">
                 <a:solidFill>
                   <a:srgbClr val="14141C"/>
                 </a:solidFill>
                 <a:latin typeface="Helvetica Neue"/>
               </a:rPr>
-              <a:t>•  The hybrid model</a:t>
+              <a:t>•  13 features are judgements, not measurements</a:t>
             </a:r>
           </a:p>
           <a:p>
@@ -24036,13 +24096,13 @@
               </a:spcAft>
             </a:pPr>
             <a:r>
-              <a:rPr sz="1300" b="0" dirty="0">
+              <a:rPr sz="1300" b="0">
                 <a:solidFill>
                   <a:srgbClr val="585868"/>
                 </a:solidFill>
                 <a:latin typeface="Helvetica Neue"/>
               </a:rPr>
-              <a:t>     ING blends the direct, feature-focused, mobile-first tone of a neobank with the institutional weight of a Tier-1 retail bank — regulatory authority and an established brand. </a:t>
+              <a:t>     Clarity of the offer, layout archetype, AIDA coverage, persuasion levers — scored against a written scale, one sheet per rater.</a:t>
             </a:r>
           </a:p>
           <a:p>
@@ -24055,13 +24115,13 @@
               </a:spcAft>
             </a:pPr>
             <a:r>
-              <a:rPr sz="1500" b="1" dirty="0">
+              <a:rPr sz="1500" b="1">
                 <a:solidFill>
                   <a:srgbClr val="14141C"/>
                 </a:solidFill>
                 <a:latin typeface="Helvetica Neue"/>
               </a:rPr>
-              <a:t>•  A level playing field on regulation</a:t>
+              <a:t>•  One human judge for this pass, stated plainly</a:t>
             </a:r>
           </a:p>
           <a:p>
@@ -24074,13 +24134,13 @@
               </a:spcAft>
             </a:pPr>
             <a:r>
-              <a:rPr sz="1300" b="0" dirty="0">
+              <a:rPr sz="1300" b="0">
                 <a:solidFill>
                   <a:srgbClr val="585868"/>
                 </a:solidFill>
                 <a:latin typeface="Helvetica Neue"/>
               </a:rPr>
-              <a:t>     Neobanks like Revolut hold the same European banking licenses and face the same Belgian compliance checks — including the mandatory CCP credit-registry query for consumer lending. Their speed comes from modern architecture, no branch network, and faster decision loops — not lighter rules.</a:t>
+              <a:t>     Every judged feature on all 51 pages comes from one sheet. Earlier passes split pages between raters; this one does not, and we say so rather than presenting a single opinion as a consensus.</a:t>
             </a:r>
           </a:p>
           <a:p>
@@ -24093,13 +24153,13 @@
               </a:spcAft>
             </a:pPr>
             <a:r>
-              <a:rPr sz="1500" b="1" dirty="0">
+              <a:rPr sz="1500" b="1">
                 <a:solidFill>
                   <a:srgbClr val="14141C"/>
                 </a:solidFill>
                 <a:latin typeface="Helvetica Neue"/>
               </a:rPr>
-              <a:t>•  Different monetization engines</a:t>
+              <a:t>•  A model sheet exists, and it is not a second opinion</a:t>
             </a:r>
           </a:p>
           <a:p>
@@ -24112,13 +24172,13 @@
               </a:spcAft>
             </a:pPr>
             <a:r>
-              <a:rPr sz="1300" b="0" dirty="0">
+              <a:rPr sz="1300" b="0">
                 <a:solidFill>
                   <a:srgbClr val="585868"/>
                 </a:solidFill>
                 <a:latin typeface="Helvetica Neue"/>
               </a:rPr>
-              <a:t>     Traditional banks have long used the basic current account as a loss leader — a produit d'appel — to acquire clients and monetize later through mortgages, insurance and wealth management. Neobanks flip that: transparent freemium tiers, paid subscriptions, and transactional FX / fee income, upfront.</a:t>
+              <a:t>     50 pages, written to its own file, never into a human sheet - a pre-filled sheet gets rubber-stamped. But the pinned model has no vision, and 12 of the 13 judged features are declared in the dictionary as judged from the screenshot.</a:t>
             </a:r>
           </a:p>
           <a:p>
@@ -24131,32 +24191,70 @@
               </a:spcAft>
             </a:pPr>
             <a:r>
-              <a:rPr sz="1500" b="1" dirty="0">
+              <a:rPr sz="1500" b="1">
                 <a:solidFill>
                   <a:srgbClr val="14141C"/>
                 </a:solidFill>
                 <a:latin typeface="Helvetica Neue"/>
               </a:rPr>
-              <a:t>•  Who each side is chasing</a:t>
-            </a:r>
-          </a:p>
-          <a:p>
-            <a:pPr algn="l">
-              <a:lnSpc>
-                <a:spcPct val="105000"/>
-              </a:lnSpc>
-              <a:spcAft>
-                <a:spcPts val="0"/>
-              </a:spcAft>
-            </a:pPr>
-            <a:r>
-              <a:rPr sz="1300" b="0" dirty="0">
+              <a:t>•  Only one was scored from text, and that was a choice we can now revisit</a:t>
+            </a:r>
+          </a:p>
+          <a:p>
+            <a:pPr algn="l">
+              <a:lnSpc>
+                <a:spcPct val="105000"/>
+              </a:lnSpc>
+              <a:spcAft>
+                <a:spcPts val="1000"/>
+              </a:spcAft>
+            </a:pPr>
+            <a:r>
+              <a:rPr sz="1300" b="0">
                 <a:solidFill>
                   <a:srgbClr val="585868"/>
                 </a:solidFill>
                 <a:latin typeface="Helvetica Neue"/>
               </a:rPr>
-              <a:t>     Neobanks win volume among young adults, digital nomads and casual spenders. ING's acquisition budget targets high lifetime-value segments instead: first-time investors, expats and high-net-worth individuals, and first-time buyers in mortgage and real estate. Professional and business banking is out of scope for this comparison — retail only.</a:t>
+              <a:t>     formality_score is the one the dictionary sources from html_text, and there the model lands within one point of the human 73% of the time. Its scores on the twelve visual features answer a question the text alone cannot settle — on value_prop_clarity it ranked the pages close to the opposite of the human. Tested since: the pinned model returns nothing at all when handed an image. OCR is the route we have not used, and it is a real one — it returns each word with its position and type size, which is most of what rate prominence, layout and mobile-first actually ask.</a:t>
+            </a:r>
+          </a:p>
+          <a:p>
+            <a:pPr algn="l">
+              <a:lnSpc>
+                <a:spcPct val="105000"/>
+              </a:lnSpc>
+              <a:spcAft>
+                <a:spcPts val="200"/>
+              </a:spcAft>
+            </a:pPr>
+            <a:r>
+              <a:rPr sz="1500" b="1">
+                <a:solidFill>
+                  <a:srgbClr val="14141C"/>
+                </a:solidFill>
+                <a:latin typeface="Helvetica Neue"/>
+              </a:rPr>
+              <a:t>•  So the model sheet is kept as a reference, not used as a rater</a:t>
+            </a:r>
+          </a:p>
+          <a:p>
+            <a:pPr algn="l">
+              <a:lnSpc>
+                <a:spcPct val="105000"/>
+              </a:lnSpc>
+              <a:spcAft>
+                <a:spcPts val="1000"/>
+              </a:spcAft>
+            </a:pPr>
+            <a:r>
+              <a:rPr sz="1300" b="0">
+                <a:solidFill>
+                  <a:srgbClr val="585868"/>
+                </a:solidFill>
+                <a:latin typeface="Helvetica Neue"/>
+              </a:rPr>
+              <a:t>     Averaging it into the human scores would import guesses as judgements. One named human judge, said out loud, is more honest than a consensus that was never there.</a:t>
             </a:r>
           </a:p>
         </p:txBody>
@@ -24212,7 +24310,7 @@
         <p:spPr>
           <a:xfrm>
             <a:off x="11094415" y="6400800"/>
-            <a:ext cx="548640" cy="274320"/>
+            <a:ext cx="548640" cy="242695"/>
           </a:xfrm>
           <a:prstGeom prst="rect">
             <a:avLst/>
@@ -24234,7 +24332,7 @@
               </a:spcAft>
             </a:pPr>
             <a:r>
-              <a:rPr sz="1000" b="0">
+              <a:rPr lang="fr-FR" sz="1000" dirty="0">
                 <a:solidFill>
                   <a:srgbClr val="585868"/>
                 </a:solidFill>
@@ -24242,6 +24340,12 @@
               </a:rPr>
               <a:t>7</a:t>
             </a:r>
+            <a:endParaRPr sz="1000" b="0" dirty="0">
+              <a:solidFill>
+                <a:srgbClr val="585868"/>
+              </a:solidFill>
+              <a:latin typeface="Helvetica Neue"/>
+            </a:endParaRPr>
           </a:p>
         </p:txBody>
       </p:sp>

--- a/docs/Banking_Campaigns_Comparator.pptx
+++ b/docs/Banking_Campaigns_Comparator.pptx
@@ -1031,59 +1031,42 @@
           <a:lstStyle/>
           <a:p>
             <a:r>
-              <a:rPr lang="en-US" dirty="0"/>
               <a:t>"104 features in, 33 out. Every reduction is on screen.</a:t>
             </a:r>
           </a:p>
           <a:p>
             <a:r>
-              <a:rPr lang="en-US" dirty="0"/>
               <a:t>And five withdrawn outright, because they measured our tooling, not your pages.</a:t>
             </a:r>
           </a:p>
           <a:p>
             <a:r>
-              <a:rPr lang="en-US" dirty="0"/>
               <a:t>Calls to action: no counting rule held across fourteen banks. Navigation, repeated links, clickable cards — each bank marks them up differently.</a:t>
             </a:r>
           </a:p>
           <a:p>
             <a:r>
-              <a:rPr lang="en-US" dirty="0"/>
-              <a:t>Animation: our rule asked whether the stylesheet declared an animation, not whether the page moves. Across eighteen pages, exactly one has real motion — </a:t>
-            </a:r>
-            <a:r>
-              <a:rPr lang="en-US" dirty="0" err="1"/>
-              <a:t>Revolut</a:t>
-            </a:r>
-            <a:r>
-              <a:rPr lang="en-US" dirty="0"/>
-              <a:t>, a video. Your kickoff deck said ING was the only traditional bank animating. That is now marked not testable, not disproved. We will not rule on it with a broken instrument.</a:t>
-            </a:r>
-          </a:p>
-          <a:p>
-            <a:r>
-              <a:rPr lang="en-US" dirty="0"/>
-              <a:t>The fifth we found while rehearsing this: a feature that tested whether a page uses an HTML table element. Traditional banks do. N26 and </a:t>
-            </a:r>
-            <a:r>
-              <a:rPr lang="en-US" dirty="0" err="1"/>
-              <a:t>Revolut</a:t>
-            </a:r>
-            <a:r>
-              <a:rPr lang="en-US" dirty="0"/>
-              <a:t> build the same plan comparison in CSS. It was reporting a markup convention as a strategic difference.</a:t>
-            </a:r>
-          </a:p>
-          <a:p>
-            <a:r>
-              <a:rPr lang="en-US" dirty="0"/>
+              <a:t>Animation: our rule asked whether the stylesheet declared an animation, not whether the page moves. Across eighteen pages, exactly one has real motion — Revolut, a video. Your kickoff deck said ING was the only traditional bank animating. That is now marked not testable, not disproved. We will not rule on it with a broken instrument.</a:t>
+            </a:r>
+          </a:p>
+          <a:p>
+            <a:r>
+              <a:t>The fifth we found while rehearsing this: a feature that tested whether a page uses an HTML table element. Traditional banks do. N26 and Revolut build the same plan comparison in CSS. It was reporting a markup convention as a strategic difference.</a:t>
+            </a:r>
+          </a:p>
+          <a:p>
+            <a:r>
+              <a:t>OPTIONNEL, ~15 s, coupe si tu debordes : "That is why four of the five observations in your kickoff deck now read not testable rather than not supported. Three were being judged on a word-count band that reads 'long' for all fourteen banks — a measure that separates nobody cannot refute anyone. One claim is genuinely not supported: text is still beside the picture."</a:t>
+            </a:r>
+          </a:p>
+          <a:p/>
+          <a:p>
+            <a:r>
               <a:t>And one whole axis of our AI Score returns nothing.</a:t>
             </a:r>
           </a:p>
           <a:p>
             <a:r>
-              <a:rPr lang="en-US" dirty="0"/>
               <a:t>We would rather hand you 33 numbers we can defend."</a:t>
             </a:r>
           </a:p>

--- a/docs/Banking_Campaigns_Comparator.pptx
+++ b/docs/Banking_Campaigns_Comparator.pptx
@@ -16105,7 +16105,7 @@
                 </a:solidFill>
                 <a:latin typeface="Helvetica Neue"/>
               </a:rPr>
-              <a:t>•  104 declared features, 36 actually compared</a:t>
+              <a:t>•  104 declared features, 33 actually compared</a:t>
             </a:r>
           </a:p>
           <a:p>
@@ -16124,7 +16124,7 @@
                 </a:solidFill>
                 <a:latin typeface="Helvetica Neue"/>
               </a:rPr>
-              <a:t>     Nothing is hidden in that reduction — the run prints it: 18 provenance fields that identify a page rather than describe a campaign, 4 free-text identifiers no two pages share, 8 within_language features that stop being comparable once the set spans three languages, 27 categorical or list features a euclidean distance cannot take raw, 2 missing on at least one bank, 8 identical everywhere, and 1 withdrawn because its capture is missing what it counts.</a:t>
+              <a:t>     Nothing is hidden in that reduction — the run prints it: 18 provenance fields that identify a page rather than describe a campaign, 4 free-text identifiers no two pages share, 8 within_language features that stop being comparable once the set spans three languages, 1 within_capture_window feature that is valid for its capture date only, 5 withdrawn because the rule does not reproduce what the feature claims to measure, 27 categorical or list features a euclidean distance cannot take raw, and 8 identical everywhere.</a:t>
             </a:r>
           </a:p>
           <a:p>
